--- a/tutorial_HIL_driver.pptx
+++ b/tutorial_HIL_driver.pptx
@@ -5441,7 +5441,7 @@
           <a:p>
             <a:r>
               <a:rPr sz="2600"/>
-              <a:t>Step 1: ChInteractiveDriver (Lines 535 to 546)</a:t>
+              <a:t>Step 1: ChInteractiveDriver (Lines 535 to 572)</a:t>
             </a:r>
           </a:p>
         </p:txBody>
@@ -5499,7 +5499,7 @@
                 </a:solidFill>
                 <a:latin typeface="Consolas"/>
               </a:rPr>
-              <a:t>    # Arrow keys steer/accelerate/brake, 'C' centers steering, 'R' releases</a:t>
+              <a:t>    # W/A/S/D drive, 'C' centers steering, 'R' releases the pedals, 'L' locks</a:t>
             </a:r>
           </a:p>
           <a:p>
@@ -5510,7 +5510,7 @@
                 </a:solidFill>
                 <a:latin typeface="Consolas"/>
               </a:rPr>
-              <a:t>    # the pedals, 'L' locks the current inputs.</a:t>
+              <a:t>    # the inputs.  ARROW keys are the chase camera, not driving controls.</a:t>
             </a:r>
           </a:p>
           <a:p>
@@ -5628,7 +5628,7 @@
             <a:pPr/>
             <a:r>
               <a:rPr sz="1800"/>
-              <a:t>Arrow keys steer/accelerate/brake, C centers steering, R releases the pedals, L locks the inputs</a:t>
+              <a:t>W/A/S/D drive, C centers steering, R releases the pedals, L locks the inputs (arrows are the chase camera)</a:t>
             </a:r>
           </a:p>
           <a:p>
@@ -5745,7 +5745,7 @@
           <a:p>
             <a:r>
               <a:rPr sz="2600"/>
-              <a:t>Step 2: Route the window events to the driver (Lines 589 to 592)</a:t>
+              <a:t>Step 2: Route the window events to the driver (Lines 615 to 618)</a:t>
             </a:r>
           </a:p>
         </p:txBody>
@@ -5988,7 +5988,7 @@
             <a:pPr/>
             <a:r>
               <a:rPr sz="2000"/>
-              <a:t>Driving the HMMWV with the arrow keys - watch the Irrlicht HUD (speed, inputs, RTF)</a:t>
+              <a:t>Driving the HMMWV with W/A/S/D - watch the Irrlicht HUD (speed, inputs, RTF)</a:t>
             </a:r>
           </a:p>
         </p:txBody>
@@ -7404,7 +7404,7 @@
           <a:p>
             <a:r>
               <a:rPr sz="2600"/>
-              <a:t>Step 2: Sample once per step, then hold (Lines 684 to 701)</a:t>
+              <a:t>Step 2: Sample once per step, then hold (Lines 710 to 727)</a:t>
             </a:r>
           </a:p>
         </p:txBody>
@@ -7744,7 +7744,7 @@
           <a:p>
             <a:r>
               <a:rPr sz="2600"/>
-              <a:t>Step 3: Send state back at render rate (Lines 745 to 755)</a:t>
+              <a:t>Step 3: Send state back at render rate (Lines 771 to 781)</a:t>
             </a:r>
           </a:p>
         </p:txBody>
@@ -8163,119 +8163,41 @@
             <p:ph type="title"/>
           </p:nvPr>
         </p:nvSpPr>
-        <p:spPr>
-          <a:xfrm>
-            <a:off x="235228" y="150000"/>
-            <a:ext cx="9875520" cy="800000"/>
-          </a:xfrm>
-        </p:spPr>
+        <p:spPr/>
         <p:txBody>
           <a:bodyPr wrap="square"/>
           <a:lstStyle/>
           <a:p>
             <a:r>
-              <a:rPr sz="2600"/>
-              <a:t>Where this goes next</a:t>
-            </a:r>
-          </a:p>
-        </p:txBody>
-      </p:sp>
-      <p:sp>
-        <p:nvSpPr>
-          <p:cNvPr id="3" name="Content Placeholder 2"/>
-          <p:cNvSpPr>
-            <a:spLocks noGrp="1"/>
-          </p:cNvSpPr>
-          <p:nvPr>
-            <p:ph idx="1"/>
+              <a:t>Parts 6-8: the same loop, three more things</a:t>
+            </a:r>
+          </a:p>
+        </p:txBody>
+      </p:sp>
+      <p:sp>
+        <p:nvSpPr>
+          <p:cNvPr id="3" name="Text Placeholder 2"/>
+          <p:cNvSpPr>
+            <a:spLocks noGrp="1"/>
+          </p:cNvSpPr>
+          <p:nvPr>
+            <p:ph type="body" idx="1"/>
           </p:nvPr>
         </p:nvSpPr>
         <p:spPr/>
         <p:txBody>
-          <a:bodyPr wrap="square"/>
-          <a:lstStyle/>
-          <a:p>
-            <a:pPr/>
-            <a:r>
-              <a:rPr sz="2000"/>
-              <a:t>Chrono::HIL (github.com/zzhou292/chrono-HIL): the same three-float interface, scaled up</a:t>
-            </a:r>
-          </a:p>
-          <a:p>
-            <a:pPr lvl="1"/>
-            <a:r>
-              <a:rPr sz="1800"/>
-              <a:t>SDL steering wheels with force feedback, cumulative real-time timer, multi-vehicle traffic</a:t>
-            </a:r>
-          </a:p>
-          <a:p>
-            <a:pPr lvl="1"/>
-            <a:r>
-              <a:rPr sz="1800"/>
-              <a:t>ROS 2 and Unity bridges, teleoperation over the network, deformable (SCM) terrain</a:t>
-            </a:r>
-          </a:p>
-          <a:p>
-            <a:pPr/>
-            <a:r>
-              <a:rPr sz="2000"/>
-              <a:t>Chrono::Sensor: cameras/lidar rendered from the vehicle for the operator's screen</a:t>
-            </a:r>
-          </a:p>
-          <a:p>
-            <a:pPr/>
-            <a:r>
-              <a:rPr sz="2000"/>
-              <a:t>Chrono::Synchrono: several humans in the same world, each on their own machine</a:t>
-            </a:r>
-          </a:p>
-          <a:p>
-            <a:pPr/>
-            <a:r>
-              <a:rPr sz="2000"/>
-              <a:t>Takeaways</a:t>
-            </a:r>
-          </a:p>
-          <a:p>
-            <a:pPr lvl="1"/>
-            <a:r>
-              <a:rPr sz="1800"/>
-              <a:t>Real time in Chrono is soft: spin once per step, and measure the drift</a:t>
-            </a:r>
-          </a:p>
-          <a:p>
-            <a:pPr lvl="1"/>
-            <a:r>
-              <a:rPr sz="1800"/>
-              <a:t>The human interface is three floats per step, sampled once and smoothed</a:t>
-            </a:r>
-          </a:p>
-          <a:p>
-            <a:pPr lvl="1"/>
-            <a:r>
-              <a:rPr sz="1800"/>
-              <a:t>Never let the input device block the physics loop</a:t>
-            </a:r>
-          </a:p>
-          <a:p>
-            <a:pPr lvl="1"/>
-            <a:r>
-              <a:rPr sz="1800"/>
-              <a:t>Levels are held, events are drained - a gear is an event</a:t>
-            </a:r>
-          </a:p>
-          <a:p>
-            <a:pPr lvl="1"/>
-            <a:r>
-              <a:rPr sz="1800"/>
-              <a:t>Nothing in the pattern needs a vehicle: swap the plant, keep the loop</a:t>
-            </a:r>
-          </a:p>
-        </p:txBody>
-      </p:sp>
-      <p:sp>
-        <p:nvSpPr>
-          <p:cNvPr id="4" name="TextBox 3"/>
+          <a:bodyPr/>
+          <a:lstStyle/>
+          <a:p>
+            <a:r>
+              <a:t>changing gear, driving somewhere real, and steering something that is not a car</a:t>
+            </a:r>
+          </a:p>
+        </p:txBody>
+      </p:sp>
+      <p:sp>
+        <p:nvSpPr>
+          <p:cNvPr id="4" name="TextBox footer"/>
           <p:cNvSpPr txBox="1"/>
           <p:nvPr/>
         </p:nvSpPr>
@@ -8304,7 +8226,7 @@
       </p:sp>
       <p:sp>
         <p:nvSpPr>
-          <p:cNvPr id="5" name="TextBox 4"/>
+          <p:cNvPr id="5" name="TextBox pageno"/>
           <p:cNvSpPr txBox="1"/>
           <p:nvPr/>
         </p:nvSpPr>
@@ -8326,7 +8248,7 @@
           <a:p>
             <a:r>
               <a:rPr sz="1000"/>
-              <a:t>28</a:t>
+              <a:t>23</a:t>
             </a:r>
           </a:p>
         </p:txBody>
@@ -8361,30 +8283,193 @@
         </p:nvSpPr>
         <p:spPr/>
         <p:txBody>
-          <a:bodyPr/>
-          <a:lstStyle/>
-          <a:p>
-            <a:r>
-              <a:t>Any questions?</a:t>
-            </a:r>
-          </a:p>
-        </p:txBody>
-      </p:sp>
-      <p:sp>
-        <p:nvSpPr>
-          <p:cNvPr id="3" name="Text Placeholder 2"/>
-          <p:cNvSpPr>
-            <a:spLocks noGrp="1"/>
-          </p:cNvSpPr>
-          <p:nvPr>
-            <p:ph type="body" idx="1"/>
-          </p:nvPr>
-        </p:nvSpPr>
-        <p:spPr/>
-        <p:txBody>
-          <a:bodyPr/>
-          <a:lstStyle/>
-          <a:p/>
+          <a:bodyPr wrap="square"/>
+          <a:lstStyle/>
+          <a:p>
+            <a:r>
+              <a:rPr sz="2600"/>
+              <a:t>Part 6: Change gear - and why it is not a fourth float</a:t>
+            </a:r>
+          </a:p>
+        </p:txBody>
+      </p:sp>
+      <p:sp>
+        <p:nvSpPr>
+          <p:cNvPr id="3" name="TextBox 2"/>
+          <p:cNvSpPr txBox="1"/>
+          <p:nvPr/>
+        </p:nvSpPr>
+        <p:spPr>
+          <a:xfrm>
+            <a:off x="0" y="1051560"/>
+            <a:ext cx="12191969" cy="3017520"/>
+          </a:xfrm>
+          <a:prstGeom prst="rect">
+            <a:avLst/>
+          </a:prstGeom>
+          <a:solidFill>
+            <a:srgbClr val="000000"/>
+          </a:solidFill>
+        </p:spPr>
+        <p:txBody>
+          <a:bodyPr wrap="none" lIns="300000" rIns="300000">
+            <a:noAutofit/>
+          </a:bodyPr>
+          <a:lstStyle/>
+          <a:p>
+            <a:r>
+              <a:rPr sz="1300">
+                <a:solidFill>
+                  <a:srgbClr val="CCCCCC"/>
+                </a:solidFill>
+                <a:latin typeface="Consolas"/>
+              </a:rPr>
+              <a:t># A ChDriver carries three numbers, and a gear is not one of them: the</a:t>
+            </a:r>
+          </a:p>
+          <a:p>
+            <a:r>
+              <a:rPr sz="1300">
+                <a:solidFill>
+                  <a:srgbClr val="CCCCCC"/>
+                </a:solidFill>
+                <a:latin typeface="Consolas"/>
+              </a:rPr>
+              <a:t># gearbox belongs to the VEHICLE, so it is reached through the vehicle.</a:t>
+            </a:r>
+          </a:p>
+          <a:p>
+            <a:r>
+              <a:rPr sz="1300">
+                <a:solidFill>
+                  <a:srgbClr val="CCCCCC"/>
+                </a:solidFill>
+                <a:latin typeface="Consolas"/>
+              </a:rPr>
+              <a:t/>
+            </a:r>
+          </a:p>
+          <a:p>
+            <a:r>
+              <a:rPr sz="1300">
+                <a:solidFill>
+                  <a:srgbClr val="CCCCCC"/>
+                </a:solidFill>
+                <a:latin typeface="Consolas"/>
+              </a:rPr>
+              <a:t>transmission = vehicle.GetTransmission()</a:t>
+            </a:r>
+          </a:p>
+          <a:p>
+            <a:r>
+              <a:rPr sz="1300">
+                <a:solidFill>
+                  <a:srgbClr val="CCCCCC"/>
+                </a:solidFill>
+                <a:latin typeface="Consolas"/>
+              </a:rPr>
+              <a:t>transmission.ShiftUp()                        # or ShiftDown(), SetGear(n)</a:t>
+            </a:r>
+          </a:p>
+          <a:p>
+            <a:r>
+              <a:rPr sz="1300">
+                <a:solidFill>
+                  <a:srgbClr val="CCCCCC"/>
+                </a:solidFill>
+                <a:latin typeface="Consolas"/>
+              </a:rPr>
+              <a:t>transmission.asAutomatic().SetDriveMode(...)  # D / N / R</a:t>
+            </a:r>
+          </a:p>
+          <a:p>
+            <a:r>
+              <a:rPr sz="1300">
+                <a:solidFill>
+                  <a:srgbClr val="CCCCCC"/>
+                </a:solidFill>
+                <a:latin typeface="Consolas"/>
+              </a:rPr>
+              <a:t>transmission.asAutomatic().SetShiftMode(...)  # let it shift, or row it</a:t>
+            </a:r>
+          </a:p>
+          <a:p>
+            <a:r>
+              <a:rPr sz="1300">
+                <a:solidFill>
+                  <a:srgbClr val="CCCCCC"/>
+                </a:solidFill>
+                <a:latin typeface="Consolas"/>
+              </a:rPr>
+              <a:t/>
+            </a:r>
+          </a:p>
+          <a:p>
+            <a:r>
+              <a:rPr sz="1300">
+                <a:solidFill>
+                  <a:srgbClr val="CCCCCC"/>
+                </a:solidFill>
+                <a:latin typeface="Consolas"/>
+              </a:rPr>
+              <a:t># On the keyboard you write none of this - vis.AttachDriver(driver) binds:</a:t>
+            </a:r>
+          </a:p>
+          <a:p>
+            <a:r>
+              <a:rPr sz="1300">
+                <a:solidFill>
+                  <a:srgbClr val="CCCCCC"/>
+                </a:solidFill>
+                <a:latin typeface="Consolas"/>
+              </a:rPr>
+              <a:t>#     Z  D &lt;-&gt; R     X  neutral     T  AUTO &lt;-&gt; MANUAL     [ ]  down / up</a:t>
+            </a:r>
+          </a:p>
+          <a:p>
+            <a:r>
+              <a:rPr sz="1300">
+                <a:solidFill>
+                  <a:srgbClr val="CCCCCC"/>
+                </a:solidFill>
+                <a:latin typeface="Consolas"/>
+              </a:rPr>
+              <a:t>#</a:t>
+            </a:r>
+          </a:p>
+          <a:p>
+            <a:r>
+              <a:rPr sz="1300">
+                <a:solidFill>
+                  <a:srgbClr val="CCCCCC"/>
+                </a:solidFill>
+                <a:latin typeface="Consolas"/>
+              </a:rPr>
+              <a:t># For a device Chrono has never heard of, nothing is wired up. That is the</a:t>
+            </a:r>
+          </a:p>
+          <a:p>
+            <a:r>
+              <a:rPr sz="1300">
+                <a:solidFill>
+                  <a:srgbClr val="CCCCCC"/>
+                </a:solidFill>
+                <a:latin typeface="Consolas"/>
+              </a:rPr>
+              <a:t># point of PART 4: hil_gearbox.Gearbox turns one character off the socket</a:t>
+            </a:r>
+          </a:p>
+          <a:p>
+            <a:r>
+              <a:rPr sz="1300">
+                <a:solidFill>
+                  <a:srgbClr val="CCCCCC"/>
+                </a:solidFill>
+                <a:latin typeface="Consolas"/>
+              </a:rPr>
+              <a:t># into the calls above, and operator_console.py sends it in a 4th field.</a:t>
+            </a:r>
+          </a:p>
         </p:txBody>
       </p:sp>
       <p:sp>
@@ -8395,8 +8480,8 @@
         </p:nvSpPr>
         <p:spPr>
           <a:xfrm>
-            <a:off x="310974" y="6645811"/>
-            <a:ext cx="11644805" cy="188527"/>
+            <a:off x="402336" y="4251960"/>
+            <a:ext cx="11393424" cy="1463040"/>
           </a:xfrm>
           <a:prstGeom prst="rect">
             <a:avLst/>
@@ -8404,28 +8489,40 @@
           <a:noFill/>
         </p:spPr>
         <p:txBody>
-          <a:bodyPr wrap="none">
+          <a:bodyPr wrap="square">
             <a:spAutoFit/>
           </a:bodyPr>
           <a:lstStyle/>
           <a:p>
             <a:r>
-              <a:rPr sz="1000"/>
-              <a:t>University of Wisconsin - Madison</a:t>
-            </a:r>
-          </a:p>
-        </p:txBody>
-      </p:sp>
-      <p:sp>
-        <p:nvSpPr>
-          <p:cNvPr id="5" name="TextBox 4"/>
+              <a:rPr sz="1800"/>
+              <a:t>A steering value is a LEVEL: re-sent every frame, and a lost packet costs nothing</a:t>
+            </a:r>
+          </a:p>
+          <a:p>
+            <a:r>
+              <a:rPr sz="1800"/>
+              <a:t>A gear change is an EVENT: a lost one is a shift that never happened - so it is sent once, on the key-down edge, and applied exactly once</a:t>
+            </a:r>
+          </a:p>
+          <a:p>
+            <a:r>
+              <a:rPr sz="1800"/>
+              <a:t>VEHICLE = "audi" is the only model here with a manual gearbox: it is assembled from JSON, not from a model wrapper class, and the wrappers each hard-code one powertrain</a:t>
+            </a:r>
+          </a:p>
+        </p:txBody>
+      </p:sp>
+      <p:sp>
+        <p:nvSpPr>
+          <p:cNvPr id="5" name="TextBox footer"/>
           <p:cNvSpPr txBox="1"/>
           <p:nvPr/>
         </p:nvSpPr>
         <p:spPr>
           <a:xfrm>
-            <a:off x="10249563" y="6646310"/>
-            <a:ext cx="1706217" cy="188028"/>
+            <a:off x="310974" y="6645811"/>
+            <a:ext cx="11644805" cy="188527"/>
           </a:xfrm>
           <a:prstGeom prst="rect">
             <a:avLst/>
@@ -8440,7 +8537,36 @@
           <a:p>
             <a:r>
               <a:rPr sz="1000"/>
-              <a:t>29</a:t>
+              <a:t>University of Wisconsin - Madison</a:t>
+            </a:r>
+          </a:p>
+        </p:txBody>
+      </p:sp>
+      <p:sp>
+        <p:nvSpPr>
+          <p:cNvPr id="6" name="TextBox pageno"/>
+          <p:cNvSpPr txBox="1"/>
+          <p:nvPr/>
+        </p:nvSpPr>
+        <p:spPr>
+          <a:xfrm>
+            <a:off x="10249563" y="6646310"/>
+            <a:ext cx="1706217" cy="188028"/>
+          </a:xfrm>
+          <a:prstGeom prst="rect">
+            <a:avLst/>
+          </a:prstGeom>
+          <a:noFill/>
+        </p:spPr>
+        <p:txBody>
+          <a:bodyPr wrap="none">
+            <a:spAutoFit/>
+          </a:bodyPr>
+          <a:lstStyle/>
+          <a:p>
+            <a:r>
+              <a:rPr sz="1000"/>
+              <a:t>24</a:t>
             </a:r>
           </a:p>
         </p:txBody>
@@ -8465,14 +8591,130 @@
       <p:grpSpPr/>
       <p:sp>
         <p:nvSpPr>
-          <p:cNvPr id="2" name="TextBox 1"/>
+          <p:cNvPr id="2" name="Title 1"/>
+          <p:cNvSpPr>
+            <a:spLocks noGrp="1"/>
+          </p:cNvSpPr>
+          <p:nvPr>
+            <p:ph type="title"/>
+          </p:nvPr>
+        </p:nvSpPr>
+        <p:spPr/>
+        <p:txBody>
+          <a:bodyPr wrap="square"/>
+          <a:lstStyle/>
+          <a:p>
+            <a:r>
+              <a:rPr sz="2600"/>
+              <a:t>Part 7: Drive somewhere real - the Mcity digital twin</a:t>
+            </a:r>
+          </a:p>
+        </p:txBody>
+      </p:sp>
+      <p:sp>
+        <p:nvSpPr>
+          <p:cNvPr id="3" name="Content Placeholder 2"/>
+          <p:cNvSpPr>
+            <a:spLocks noGrp="1"/>
+          </p:cNvSpPr>
+          <p:nvPr>
+            <p:ph idx="1"/>
+          </p:nvPr>
+        </p:nvSpPr>
+        <p:spPr/>
+        <p:txBody>
+          <a:bodyPr wrap="square"/>
+          <a:lstStyle/>
+          <a:p>
+            <a:pPr/>
+            <a:r>
+              <a:rPr sz="1800">
+                <a:latin typeface="Consolas"/>
+              </a:rPr>
+              <a:t>SCENE = "mcity"</a:t>
+            </a:r>
+            <a:r>
+              <a:rPr sz="2000"/>
+              <a:t> swaps the 200 x 200 m patch for a real 32-acre test facility</a:t>
+            </a:r>
+          </a:p>
+          <a:p>
+            <a:pPr lvl="1"/>
+            <a:r>
+              <a:rPr sz="1800"/>
+              <a:t>road surface driven as a collision mesh; buildings, poles, signal heads drawn from a placement manifest</a:t>
+            </a:r>
+          </a:p>
+          <a:p>
+            <a:pPr lvl="1"/>
+            <a:r>
+              <a:rPr sz="1600">
+                <a:latin typeface="Consolas"/>
+              </a:rPr>
+              <a:t>MCITY_DETAIL</a:t>
+            </a:r>
+            <a:r>
+              <a:rPr sz="1800"/>
+              <a:t> = "ground" | "light" | "full" trades scenery for frame rate - start at "ground" on a laptop</a:t>
+            </a:r>
+          </a:p>
+          <a:p>
+            <a:pPr lvl="1"/>
+            <a:r>
+              <a:rPr sz="1800"/>
+              <a:t>860 placements cost 230 meshes: one ChVisualShape, added to a body many times, each time with its own frame</a:t>
+            </a:r>
+          </a:p>
+          <a:p>
+            <a:pPr/>
+            <a:r>
+              <a:rPr sz="2000"/>
+              <a:t>Third-party and generated, not shipped: a missing dataset falls back to flat terrain with instructions</a:t>
+            </a:r>
+          </a:p>
+          <a:p>
+            <a:pPr/>
+            <a:r>
+              <a:rPr sz="2000"/>
+              <a:t>Two things that cost time to rediscover:</a:t>
+            </a:r>
+          </a:p>
+          <a:p>
+            <a:pPr lvl="1"/>
+            <a:r>
+              <a:rPr sz="1800"/>
+              <a:t>Drive the DRAWN geometry: Mcity's OpenDRIVE elevation differs from the road mesh by -0.24 to +0.29 m (5th/95th pct)</a:t>
+            </a:r>
+          </a:p>
+          <a:p>
+            <a:pPr lvl="1"/>
+            <a:r>
+              <a:rPr sz="1800"/>
+              <a:t>Read the spawn height from the mesh: </a:t>
+            </a:r>
+            <a:r>
+              <a:rPr sz="1600">
+                <a:latin typeface="Consolas"/>
+              </a:rPr>
+              <a:t>RigidTerrain</a:t>
+            </a:r>
+            <a:r>
+              <a:rPr sz="1800"/>
+              <a:t> raycasts a collision system that does not exist yet and answers 0, which on a 274 m datum drops the car out of the world</a:t>
+            </a:r>
+          </a:p>
+        </p:txBody>
+      </p:sp>
+      <p:sp>
+        <p:nvSpPr>
+          <p:cNvPr id="4" name="TextBox footer"/>
           <p:cNvSpPr txBox="1"/>
           <p:nvPr/>
         </p:nvSpPr>
         <p:spPr>
           <a:xfrm>
-            <a:off x="914400" y="1371600"/>
-            <a:ext cx="10058400" cy="4057600"/>
+            <a:off x="310974" y="6645811"/>
+            <a:ext cx="11644805" cy="188527"/>
           </a:xfrm>
           <a:prstGeom prst="rect">
             <a:avLst/>
@@ -8480,81 +8722,28 @@
           <a:noFill/>
         </p:spPr>
         <p:txBody>
-          <a:bodyPr wrap="square">
+          <a:bodyPr wrap="none">
             <a:spAutoFit/>
           </a:bodyPr>
           <a:lstStyle/>
           <a:p>
-            <a:pPr/>
-            <a:r>
-              <a:rPr sz="2000"/>
-              <a:t>Thank you.</a:t>
-            </a:r>
-          </a:p>
-          <a:p>
-            <a:pPr/>
-            <a:r>
-              <a:rPr sz="2000"/>
-              <a:t>kasha2@wisc.edu</a:t>
-            </a:r>
-          </a:p>
-          <a:p>
-            <a:pPr/>
-            <a:r>
-              <a:rPr sz="2000"/>
-              <a:t>Simulation-Based Engineering Lab</a:t>
-            </a:r>
-          </a:p>
-          <a:p>
-            <a:pPr/>
-            <a:r>
-              <a:rPr sz="2000"/>
+            <a:r>
+              <a:rPr sz="1000"/>
               <a:t>University of Wisconsin - Madison</a:t>
             </a:r>
           </a:p>
-          <a:p>
-            <a:pPr/>
-          </a:p>
-          <a:p>
-            <a:pPr/>
-            <a:r>
-              <a:rPr sz="2000"/>
-              <a:t>Lab website: http://sbel.wisc.edu</a:t>
-            </a:r>
-          </a:p>
-          <a:p>
-            <a:pPr/>
-            <a:r>
-              <a:rPr sz="2000"/>
-              <a:t>Chrono website: http://www.projectchrono.org</a:t>
-            </a:r>
-          </a:p>
-          <a:p>
-            <a:pPr/>
-            <a:r>
-              <a:rPr sz="2000"/>
-              <a:t>Source code: https://github.com/projectchrono</a:t>
-            </a:r>
-          </a:p>
-          <a:p>
-            <a:pPr/>
-            <a:r>
-              <a:rPr sz="2000"/>
-              <a:t>Tutorial code + slides: https://github.com/ksha23/chrono-hil-tutorial</a:t>
-            </a:r>
-          </a:p>
-        </p:txBody>
-      </p:sp>
-      <p:sp>
-        <p:nvSpPr>
-          <p:cNvPr id="3" name="TextBox 2"/>
+        </p:txBody>
+      </p:sp>
+      <p:sp>
+        <p:nvSpPr>
+          <p:cNvPr id="5" name="TextBox pageno"/>
           <p:cNvSpPr txBox="1"/>
           <p:nvPr/>
         </p:nvSpPr>
         <p:spPr>
           <a:xfrm>
-            <a:off x="310974" y="6645811"/>
-            <a:ext cx="11644805" cy="188527"/>
+            <a:off x="10249563" y="6646310"/>
+            <a:ext cx="1706217" cy="188028"/>
           </a:xfrm>
           <a:prstGeom prst="rect">
             <a:avLst/>
@@ -8569,36 +8758,7 @@
           <a:p>
             <a:r>
               <a:rPr sz="1000"/>
-              <a:t>University of Wisconsin - Madison</a:t>
-            </a:r>
-          </a:p>
-        </p:txBody>
-      </p:sp>
-      <p:sp>
-        <p:nvSpPr>
-          <p:cNvPr id="4" name="TextBox 3"/>
-          <p:cNvSpPr txBox="1"/>
-          <p:nvPr/>
-        </p:nvSpPr>
-        <p:spPr>
-          <a:xfrm>
-            <a:off x="10249563" y="6646310"/>
-            <a:ext cx="1706217" cy="188028"/>
-          </a:xfrm>
-          <a:prstGeom prst="rect">
-            <a:avLst/>
-          </a:prstGeom>
-          <a:noFill/>
-        </p:spPr>
-        <p:txBody>
-          <a:bodyPr wrap="none">
-            <a:spAutoFit/>
-          </a:bodyPr>
-          <a:lstStyle/>
-          <a:p>
-            <a:r>
-              <a:rPr sz="1000"/>
-              <a:t>30</a:t>
+              <a:t>25</a:t>
             </a:r>
           </a:p>
         </p:txBody>
@@ -8637,28 +8797,110 @@
           <a:lstStyle/>
           <a:p>
             <a:r>
-              <a:t>Parts 6-8: the same loop, three more things</a:t>
-            </a:r>
-          </a:p>
-        </p:txBody>
-      </p:sp>
-      <p:sp>
-        <p:nvSpPr>
-          <p:cNvPr id="3" name="Text Placeholder 2"/>
-          <p:cNvSpPr>
-            <a:spLocks noGrp="1"/>
-          </p:cNvSpPr>
-          <p:nvPr>
-            <p:ph type="body" idx="1"/>
+              <a:rPr sz="2600"/>
+              <a:t>Part 8: Control something that isn't a car</a:t>
+            </a:r>
+          </a:p>
+        </p:txBody>
+      </p:sp>
+      <p:sp>
+        <p:nvSpPr>
+          <p:cNvPr id="3" name="Content Placeholder 2"/>
+          <p:cNvSpPr>
+            <a:spLocks noGrp="1"/>
+          </p:cNvSpPr>
+          <p:nvPr>
+            <p:ph idx="1"/>
           </p:nvPr>
         </p:nvSpPr>
         <p:spPr/>
         <p:txBody>
-          <a:bodyPr/>
-          <a:lstStyle/>
-          <a:p>
-            <a:r>
-              <a:t>changing gear, driving somewhere real, and steering something that is not a car</a:t>
+          <a:bodyPr wrap="square"/>
+          <a:lstStyle/>
+          <a:p>
+            <a:pPr/>
+            <a:r>
+              <a:rPr sz="1800">
+                <a:latin typeface="Consolas"/>
+              </a:rPr>
+              <a:t>PLANT</a:t>
+            </a:r>
+            <a:r>
+              <a:rPr sz="2000"/>
+              <a:t> switches what the same three numbers drive. The devices and the loop do not change</a:t>
+            </a:r>
+          </a:p>
+          <a:p>
+            <a:pPr lvl="1"/>
+            <a:r>
+              <a:rPr sz="1600">
+                <a:latin typeface="Consolas"/>
+              </a:rPr>
+              <a:t>"vehicle"</a:t>
+            </a:r>
+            <a:r>
+              <a:rPr sz="1800"/>
+              <a:t> a Chrono::Vehicle, as in Parts 1-7</a:t>
+            </a:r>
+          </a:p>
+          <a:p>
+            <a:pPr lvl="1"/>
+            <a:r>
+              <a:rPr sz="1600">
+                <a:latin typeface="Consolas"/>
+              </a:rPr>
+              <a:t>"rover"</a:t>
+            </a:r>
+            <a:r>
+              <a:rPr sz="1800"/>
+              <a:t> a Viper rover: steering -&gt; wheel angle, throttle -&gt; commanded wheel speed</a:t>
+            </a:r>
+          </a:p>
+          <a:p>
+            <a:pPr lvl="1"/>
+            <a:r>
+              <a:rPr sz="1600">
+                <a:latin typeface="Consolas"/>
+              </a:rPr>
+              <a:t>"crane"</a:t>
+            </a:r>
+            <a:r>
+              <a:rPr sz="1800"/>
+              <a:t> a gantry crane: steering -&gt; cross-travel, throttle/braking -&gt; forward/reverse travel</a:t>
+            </a:r>
+          </a:p>
+          <a:p>
+            <a:pPr/>
+            <a:r>
+              <a:rPr sz="2000"/>
+              <a:t>The crane has no Chrono::Vehicle at all: four bodies, two motors, a distance constraint</a:t>
+            </a:r>
+          </a:p>
+          <a:p>
+            <a:pPr lvl="1"/>
+            <a:r>
+              <a:rPr sz="1800"/>
+              <a:t>the payload swings with nothing to damp it but the operator - which is the whole point</a:t>
+            </a:r>
+          </a:p>
+          <a:p>
+            <a:pPr/>
+            <a:r>
+              <a:rPr sz="2000"/>
+              <a:t>No ChVehicle means no ChInteractiveDriver: both take input over UDP, console unchanged</a:t>
+            </a:r>
+          </a:p>
+          <a:p>
+            <a:pPr lvl="1"/>
+            <a:r>
+              <a:rPr sz="1600">
+                <a:latin typeface="Consolas"/>
+              </a:rPr>
+              <a:t>DriverInputs</a:t>
+            </a:r>
+            <a:r>
+              <a:rPr sz="1800"/>
+              <a:t> is the whole ChDriver contract in twelve lines of Python: three floats, three setters, GetInputs()</a:t>
             </a:r>
           </a:p>
         </p:txBody>
@@ -8716,7 +8958,7 @@
           <a:p>
             <a:r>
               <a:rPr sz="1000"/>
-              <a:t>23</a:t>
+              <a:t>26</a:t>
             </a:r>
           </a:p>
         </p:txBody>
@@ -8756,200 +8998,126 @@
           <a:p>
             <a:r>
               <a:rPr sz="2600"/>
-              <a:t>Part 6: Change gear - and why it is not a fourth float</a:t>
-            </a:r>
-          </a:p>
-        </p:txBody>
-      </p:sp>
-      <p:sp>
-        <p:nvSpPr>
-          <p:cNvPr id="3" name="TextBox 2"/>
+              <a:t>Show Time</a:t>
+            </a:r>
+          </a:p>
+        </p:txBody>
+      </p:sp>
+      <p:sp>
+        <p:nvSpPr>
+          <p:cNvPr id="3" name="Content Placeholder 2"/>
+          <p:cNvSpPr>
+            <a:spLocks noGrp="1"/>
+          </p:cNvSpPr>
+          <p:nvPr>
+            <p:ph idx="1"/>
+          </p:nvPr>
+        </p:nvSpPr>
+        <p:spPr/>
+        <p:txBody>
+          <a:bodyPr wrap="square"/>
+          <a:lstStyle/>
+          <a:p>
+            <a:pPr/>
+            <a:r>
+              <a:rPr sz="1800">
+                <a:latin typeface="Consolas"/>
+              </a:rPr>
+              <a:t>PLANT = "crane"</a:t>
+            </a:r>
+            <a:r>
+              <a:rPr sz="2000"/>
+              <a:t> over </a:t>
+            </a:r>
+            <a:r>
+              <a:rPr sz="1800">
+                <a:latin typeface="Consolas"/>
+              </a:rPr>
+              <a:t>udp</a:t>
+            </a:r>
+            <a:r>
+              <a:rPr sz="2000"/>
+              <a:t>: put the load on the green pad with the swing under 2 degrees</a:t>
+            </a:r>
+          </a:p>
+          <a:p>
+            <a:pPr lvl="1"/>
+            <a:r>
+              <a:rPr sz="1800"/>
+              <a:t>the console prints swing angle and miss distance - same telemetry path, same packet shape as the car</a:t>
+            </a:r>
+          </a:p>
+          <a:p>
+            <a:pPr/>
+            <a:r>
+              <a:rPr sz="1800">
+                <a:latin typeface="Consolas"/>
+              </a:rPr>
+              <a:t>VEHICLE = "audi"</a:t>
+            </a:r>
+            <a:r>
+              <a:rPr sz="2000"/>
+              <a:t>, </a:t>
+            </a:r>
+            <a:r>
+              <a:rPr sz="1800">
+                <a:latin typeface="Consolas"/>
+              </a:rPr>
+              <a:t>TRANSMISSION = "manual"</a:t>
+            </a:r>
+            <a:r>
+              <a:rPr sz="2000"/>
+              <a:t>: pull away in third and feel the engine bog down</a:t>
+            </a:r>
+          </a:p>
+          <a:p>
+            <a:pPr/>
+            <a:r>
+              <a:rPr sz="1800">
+                <a:latin typeface="Consolas"/>
+              </a:rPr>
+              <a:t>SCENE = "mcity"</a:t>
+            </a:r>
+            <a:r>
+              <a:rPr sz="2000"/>
+              <a:t> with </a:t>
+            </a:r>
+            <a:r>
+              <a:rPr sz="1800">
+                <a:latin typeface="Consolas"/>
+              </a:rPr>
+              <a:t>MCITY_DETAIL = "ground"</a:t>
+            </a:r>
+            <a:r>
+              <a:rPr sz="2000"/>
+              <a:t>: the same three numbers, somewhere real</a:t>
+            </a:r>
+          </a:p>
+          <a:p>
+            <a:pPr/>
+            <a:r>
+              <a:rPr sz="1800">
+                <a:latin typeface="Consolas"/>
+              </a:rPr>
+              <a:t>PLANT = "rover"</a:t>
+            </a:r>
+            <a:r>
+              <a:rPr sz="2000"/>
+              <a:t> and hold the brake: it coasts rather than stopping - ViperDriver has no brake input</a:t>
+            </a:r>
+          </a:p>
+        </p:txBody>
+      </p:sp>
+      <p:sp>
+        <p:nvSpPr>
+          <p:cNvPr id="4" name="TextBox footer"/>
           <p:cNvSpPr txBox="1"/>
           <p:nvPr/>
         </p:nvSpPr>
         <p:spPr>
           <a:xfrm>
-            <a:off x="0" y="1051560"/>
-            <a:ext cx="12191969" cy="3017520"/>
-          </a:xfrm>
-          <a:prstGeom prst="rect">
-            <a:avLst/>
-          </a:prstGeom>
-          <a:solidFill>
-            <a:srgbClr val="000000"/>
-          </a:solidFill>
-        </p:spPr>
-        <p:txBody>
-          <a:bodyPr wrap="none" lIns="300000" rIns="300000">
-            <a:noAutofit/>
-          </a:bodyPr>
-          <a:lstStyle/>
-          <a:p>
-            <a:r>
-              <a:rPr sz="1300">
-                <a:solidFill>
-                  <a:srgbClr val="CCCCCC"/>
-                </a:solidFill>
-                <a:latin typeface="Consolas"/>
-              </a:rPr>
-              <a:t># A ChDriver carries three numbers, and a gear is not one of them: the</a:t>
-            </a:r>
-          </a:p>
-          <a:p>
-            <a:r>
-              <a:rPr sz="1300">
-                <a:solidFill>
-                  <a:srgbClr val="CCCCCC"/>
-                </a:solidFill>
-                <a:latin typeface="Consolas"/>
-              </a:rPr>
-              <a:t># gearbox belongs to the VEHICLE, so it is reached through the vehicle.</a:t>
-            </a:r>
-          </a:p>
-          <a:p>
-            <a:r>
-              <a:rPr sz="1300">
-                <a:solidFill>
-                  <a:srgbClr val="CCCCCC"/>
-                </a:solidFill>
-                <a:latin typeface="Consolas"/>
-              </a:rPr>
-              <a:t/>
-            </a:r>
-          </a:p>
-          <a:p>
-            <a:r>
-              <a:rPr sz="1300">
-                <a:solidFill>
-                  <a:srgbClr val="CCCCCC"/>
-                </a:solidFill>
-                <a:latin typeface="Consolas"/>
-              </a:rPr>
-              <a:t>transmission = vehicle.GetTransmission()</a:t>
-            </a:r>
-          </a:p>
-          <a:p>
-            <a:r>
-              <a:rPr sz="1300">
-                <a:solidFill>
-                  <a:srgbClr val="CCCCCC"/>
-                </a:solidFill>
-                <a:latin typeface="Consolas"/>
-              </a:rPr>
-              <a:t>transmission.ShiftUp()                        # or ShiftDown(), SetGear(n)</a:t>
-            </a:r>
-          </a:p>
-          <a:p>
-            <a:r>
-              <a:rPr sz="1300">
-                <a:solidFill>
-                  <a:srgbClr val="CCCCCC"/>
-                </a:solidFill>
-                <a:latin typeface="Consolas"/>
-              </a:rPr>
-              <a:t>transmission.asAutomatic().SetDriveMode(...)  # D / N / R</a:t>
-            </a:r>
-          </a:p>
-          <a:p>
-            <a:r>
-              <a:rPr sz="1300">
-                <a:solidFill>
-                  <a:srgbClr val="CCCCCC"/>
-                </a:solidFill>
-                <a:latin typeface="Consolas"/>
-              </a:rPr>
-              <a:t>transmission.asAutomatic().SetShiftMode(...)  # let it shift, or row it</a:t>
-            </a:r>
-          </a:p>
-          <a:p>
-            <a:r>
-              <a:rPr sz="1300">
-                <a:solidFill>
-                  <a:srgbClr val="CCCCCC"/>
-                </a:solidFill>
-                <a:latin typeface="Consolas"/>
-              </a:rPr>
-              <a:t/>
-            </a:r>
-          </a:p>
-          <a:p>
-            <a:r>
-              <a:rPr sz="1300">
-                <a:solidFill>
-                  <a:srgbClr val="CCCCCC"/>
-                </a:solidFill>
-                <a:latin typeface="Consolas"/>
-              </a:rPr>
-              <a:t># On the keyboard you write none of this - vis.AttachDriver(driver) binds:</a:t>
-            </a:r>
-          </a:p>
-          <a:p>
-            <a:r>
-              <a:rPr sz="1300">
-                <a:solidFill>
-                  <a:srgbClr val="CCCCCC"/>
-                </a:solidFill>
-                <a:latin typeface="Consolas"/>
-              </a:rPr>
-              <a:t>#     Z  D &lt;-&gt; R     X  neutral     T  AUTO &lt;-&gt; MANUAL     [ ]  down / up</a:t>
-            </a:r>
-          </a:p>
-          <a:p>
-            <a:r>
-              <a:rPr sz="1300">
-                <a:solidFill>
-                  <a:srgbClr val="CCCCCC"/>
-                </a:solidFill>
-                <a:latin typeface="Consolas"/>
-              </a:rPr>
-              <a:t>#</a:t>
-            </a:r>
-          </a:p>
-          <a:p>
-            <a:r>
-              <a:rPr sz="1300">
-                <a:solidFill>
-                  <a:srgbClr val="CCCCCC"/>
-                </a:solidFill>
-                <a:latin typeface="Consolas"/>
-              </a:rPr>
-              <a:t># For a device Chrono has never heard of, nothing is wired up. That is the</a:t>
-            </a:r>
-          </a:p>
-          <a:p>
-            <a:r>
-              <a:rPr sz="1300">
-                <a:solidFill>
-                  <a:srgbClr val="CCCCCC"/>
-                </a:solidFill>
-                <a:latin typeface="Consolas"/>
-              </a:rPr>
-              <a:t># point of PART 4: hil_gearbox.Gearbox turns one character off the socket</a:t>
-            </a:r>
-          </a:p>
-          <a:p>
-            <a:r>
-              <a:rPr sz="1300">
-                <a:solidFill>
-                  <a:srgbClr val="CCCCCC"/>
-                </a:solidFill>
-                <a:latin typeface="Consolas"/>
-              </a:rPr>
-              <a:t># into the calls above, and operator_console.py sends it in a 4th field.</a:t>
-            </a:r>
-          </a:p>
-        </p:txBody>
-      </p:sp>
-      <p:sp>
-        <p:nvSpPr>
-          <p:cNvPr id="4" name="TextBox 3"/>
-          <p:cNvSpPr txBox="1"/>
-          <p:nvPr/>
-        </p:nvSpPr>
-        <p:spPr>
-          <a:xfrm>
-            <a:off x="402336" y="4251960"/>
-            <a:ext cx="11393424" cy="1463040"/>
+            <a:off x="310974" y="6645811"/>
+            <a:ext cx="11644805" cy="188527"/>
           </a:xfrm>
           <a:prstGeom prst="rect">
             <a:avLst/>
@@ -8957,40 +9125,28 @@
           <a:noFill/>
         </p:spPr>
         <p:txBody>
-          <a:bodyPr wrap="square">
+          <a:bodyPr wrap="none">
             <a:spAutoFit/>
           </a:bodyPr>
           <a:lstStyle/>
           <a:p>
             <a:r>
-              <a:rPr sz="1800"/>
-              <a:t>A steering value is a LEVEL: re-sent every frame, and a lost packet costs nothing</a:t>
-            </a:r>
-          </a:p>
-          <a:p>
-            <a:r>
-              <a:rPr sz="1800"/>
-              <a:t>A gear change is an EVENT: a lost one is a shift that never happened - so it is sent once, on the key-down edge, and applied exactly once</a:t>
-            </a:r>
-          </a:p>
-          <a:p>
-            <a:r>
-              <a:rPr sz="1800"/>
-              <a:t>VEHICLE = "audi" is the only model here with a manual gearbox: it is assembled from JSON, not from a model wrapper class, and the wrappers each hard-code one powertrain</a:t>
-            </a:r>
-          </a:p>
-        </p:txBody>
-      </p:sp>
-      <p:sp>
-        <p:nvSpPr>
-          <p:cNvPr id="5" name="TextBox footer"/>
+              <a:rPr sz="1000"/>
+              <a:t>University of Wisconsin - Madison</a:t>
+            </a:r>
+          </a:p>
+        </p:txBody>
+      </p:sp>
+      <p:sp>
+        <p:nvSpPr>
+          <p:cNvPr id="5" name="TextBox pageno"/>
           <p:cNvSpPr txBox="1"/>
           <p:nvPr/>
         </p:nvSpPr>
         <p:spPr>
           <a:xfrm>
-            <a:off x="310974" y="6645811"/>
-            <a:ext cx="11644805" cy="188527"/>
+            <a:off x="10249563" y="6646310"/>
+            <a:ext cx="1706217" cy="188028"/>
           </a:xfrm>
           <a:prstGeom prst="rect">
             <a:avLst/>
@@ -9005,36 +9161,7 @@
           <a:p>
             <a:r>
               <a:rPr sz="1000"/>
-              <a:t>University of Wisconsin - Madison</a:t>
-            </a:r>
-          </a:p>
-        </p:txBody>
-      </p:sp>
-      <p:sp>
-        <p:nvSpPr>
-          <p:cNvPr id="6" name="TextBox pageno"/>
-          <p:cNvSpPr txBox="1"/>
-          <p:nvPr/>
-        </p:nvSpPr>
-        <p:spPr>
-          <a:xfrm>
-            <a:off x="10249563" y="6646310"/>
-            <a:ext cx="1706217" cy="188028"/>
-          </a:xfrm>
-          <a:prstGeom prst="rect">
-            <a:avLst/>
-          </a:prstGeom>
-          <a:noFill/>
-        </p:spPr>
-        <p:txBody>
-          <a:bodyPr wrap="none">
-            <a:spAutoFit/>
-          </a:bodyPr>
-          <a:lstStyle/>
-          <a:p>
-            <a:r>
-              <a:rPr sz="1000"/>
-              <a:t>24</a:t>
+              <a:t>27</a:t>
             </a:r>
           </a:p>
         </p:txBody>
@@ -9067,115 +9194,119 @@
             <p:ph type="title"/>
           </p:nvPr>
         </p:nvSpPr>
+        <p:spPr>
+          <a:xfrm>
+            <a:off x="235228" y="150000"/>
+            <a:ext cx="9875520" cy="800000"/>
+          </a:xfrm>
+        </p:spPr>
+        <p:txBody>
+          <a:bodyPr wrap="square"/>
+          <a:lstStyle/>
+          <a:p>
+            <a:r>
+              <a:rPr sz="2600"/>
+              <a:t>Where this goes next</a:t>
+            </a:r>
+          </a:p>
+        </p:txBody>
+      </p:sp>
+      <p:sp>
+        <p:nvSpPr>
+          <p:cNvPr id="3" name="Content Placeholder 2"/>
+          <p:cNvSpPr>
+            <a:spLocks noGrp="1"/>
+          </p:cNvSpPr>
+          <p:nvPr>
+            <p:ph idx="1"/>
+          </p:nvPr>
+        </p:nvSpPr>
         <p:spPr/>
         <p:txBody>
           <a:bodyPr wrap="square"/>
           <a:lstStyle/>
           <a:p>
-            <a:r>
-              <a:rPr sz="2600"/>
-              <a:t>Part 7: Drive somewhere real - the Mcity digital twin</a:t>
-            </a:r>
-          </a:p>
-        </p:txBody>
-      </p:sp>
-      <p:sp>
-        <p:nvSpPr>
-          <p:cNvPr id="3" name="Content Placeholder 2"/>
-          <p:cNvSpPr>
-            <a:spLocks noGrp="1"/>
-          </p:cNvSpPr>
-          <p:nvPr>
-            <p:ph idx="1"/>
-          </p:nvPr>
-        </p:nvSpPr>
-        <p:spPr/>
-        <p:txBody>
-          <a:bodyPr wrap="square"/>
-          <a:lstStyle/>
-          <a:p>
             <a:pPr/>
             <a:r>
-              <a:rPr sz="1800">
-                <a:latin typeface="Consolas"/>
-              </a:rPr>
-              <a:t>SCENE = "mcity"</a:t>
-            </a:r>
-            <a:r>
               <a:rPr sz="2000"/>
-              <a:t> swaps the 200 x 200 m patch for a real 32-acre test facility</a:t>
+              <a:t>Chrono::HIL (github.com/zzhou292/chrono-HIL): the same three-float interface, scaled up</a:t>
             </a:r>
           </a:p>
           <a:p>
             <a:pPr lvl="1"/>
             <a:r>
               <a:rPr sz="1800"/>
-              <a:t>road surface driven as a collision mesh; buildings, poles, signal heads drawn from a placement manifest</a:t>
+              <a:t>SDL steering wheels with force feedback, cumulative real-time timer, multi-vehicle traffic</a:t>
             </a:r>
           </a:p>
           <a:p>
             <a:pPr lvl="1"/>
             <a:r>
-              <a:rPr sz="1600">
-                <a:latin typeface="Consolas"/>
-              </a:rPr>
-              <a:t>MCITY_DETAIL</a:t>
-            </a:r>
-            <a:r>
               <a:rPr sz="1800"/>
-              <a:t> = "ground" | "light" | "full" trades scenery for frame rate - start at "ground" on a laptop</a:t>
+              <a:t>ROS 2 and Unity bridges, teleoperation over the network, deformable (SCM) terrain</a:t>
+            </a:r>
+          </a:p>
+          <a:p>
+            <a:pPr/>
+            <a:r>
+              <a:rPr sz="2000"/>
+              <a:t>Chrono::Sensor: cameras/lidar rendered from the vehicle for the operator's screen</a:t>
+            </a:r>
+          </a:p>
+          <a:p>
+            <a:pPr/>
+            <a:r>
+              <a:rPr sz="2000"/>
+              <a:t>Chrono::Synchrono: several humans in the same world, each on their own machine</a:t>
+            </a:r>
+          </a:p>
+          <a:p>
+            <a:pPr/>
+            <a:r>
+              <a:rPr sz="2000"/>
+              <a:t>Takeaways</a:t>
             </a:r>
           </a:p>
           <a:p>
             <a:pPr lvl="1"/>
             <a:r>
               <a:rPr sz="1800"/>
-              <a:t>860 placements cost 230 meshes: one ChVisualShape, added to a body many times, each time with its own frame</a:t>
-            </a:r>
-          </a:p>
-          <a:p>
-            <a:pPr/>
-            <a:r>
-              <a:rPr sz="2000"/>
-              <a:t>Third-party and generated, not shipped: a missing dataset falls back to flat terrain with instructions</a:t>
-            </a:r>
-          </a:p>
-          <a:p>
-            <a:pPr/>
-            <a:r>
-              <a:rPr sz="2000"/>
-              <a:t>Two things that cost time to rediscover:</a:t>
+              <a:t>Real time in Chrono is soft: spin once per step, and measure the drift</a:t>
             </a:r>
           </a:p>
           <a:p>
             <a:pPr lvl="1"/>
             <a:r>
               <a:rPr sz="1800"/>
-              <a:t>Drive the DRAWN geometry: Mcity's OpenDRIVE elevation differs from the road mesh by -0.24 to +0.29 m (5th/95th pct)</a:t>
+              <a:t>The human interface is three floats per step, sampled once and smoothed</a:t>
             </a:r>
           </a:p>
           <a:p>
             <a:pPr lvl="1"/>
             <a:r>
               <a:rPr sz="1800"/>
-              <a:t>Read the spawn height from the mesh: </a:t>
-            </a:r>
-            <a:r>
-              <a:rPr sz="1600">
-                <a:latin typeface="Consolas"/>
-              </a:rPr>
-              <a:t>RigidTerrain</a:t>
-            </a:r>
+              <a:t>Never let the input device block the physics loop</a:t>
+            </a:r>
+          </a:p>
+          <a:p>
+            <a:pPr lvl="1"/>
             <a:r>
               <a:rPr sz="1800"/>
-              <a:t> raycasts a collision system that does not exist yet and answers 0, which on a 274 m datum drops the car out of the world</a:t>
-            </a:r>
-          </a:p>
-        </p:txBody>
-      </p:sp>
-      <p:sp>
-        <p:nvSpPr>
-          <p:cNvPr id="4" name="TextBox footer"/>
+              <a:t>Levels are held, events are drained - a gear is an event</a:t>
+            </a:r>
+          </a:p>
+          <a:p>
+            <a:pPr lvl="1"/>
+            <a:r>
+              <a:rPr sz="1800"/>
+              <a:t>Nothing in the pattern needs a vehicle: swap the plant, keep the loop</a:t>
+            </a:r>
+          </a:p>
+        </p:txBody>
+      </p:sp>
+      <p:sp>
+        <p:nvSpPr>
+          <p:cNvPr id="4" name="TextBox 3"/>
           <p:cNvSpPr txBox="1"/>
           <p:nvPr/>
         </p:nvSpPr>
@@ -9204,7 +9335,7 @@
       </p:sp>
       <p:sp>
         <p:nvSpPr>
-          <p:cNvPr id="5" name="TextBox pageno"/>
+          <p:cNvPr id="5" name="TextBox 4"/>
           <p:cNvSpPr txBox="1"/>
           <p:nvPr/>
         </p:nvSpPr>
@@ -9226,7 +9357,7 @@
           <a:p>
             <a:r>
               <a:rPr sz="1000"/>
-              <a:t>25</a:t>
+              <a:t>28</a:t>
             </a:r>
           </a:p>
         </p:txBody>
@@ -9261,121 +9392,35 @@
         </p:nvSpPr>
         <p:spPr/>
         <p:txBody>
-          <a:bodyPr wrap="square"/>
-          <a:lstStyle/>
-          <a:p>
-            <a:r>
-              <a:rPr sz="2600"/>
-              <a:t>Part 8: Control something that isn't a car</a:t>
-            </a:r>
-          </a:p>
-        </p:txBody>
-      </p:sp>
-      <p:sp>
-        <p:nvSpPr>
-          <p:cNvPr id="3" name="Content Placeholder 2"/>
-          <p:cNvSpPr>
-            <a:spLocks noGrp="1"/>
-          </p:cNvSpPr>
-          <p:nvPr>
-            <p:ph idx="1"/>
+          <a:bodyPr/>
+          <a:lstStyle/>
+          <a:p>
+            <a:r>
+              <a:t>Any questions?</a:t>
+            </a:r>
+          </a:p>
+        </p:txBody>
+      </p:sp>
+      <p:sp>
+        <p:nvSpPr>
+          <p:cNvPr id="3" name="Text Placeholder 2"/>
+          <p:cNvSpPr>
+            <a:spLocks noGrp="1"/>
+          </p:cNvSpPr>
+          <p:nvPr>
+            <p:ph type="body" idx="1"/>
           </p:nvPr>
         </p:nvSpPr>
         <p:spPr/>
         <p:txBody>
-          <a:bodyPr wrap="square"/>
-          <a:lstStyle/>
-          <a:p>
-            <a:pPr/>
-            <a:r>
-              <a:rPr sz="1800">
-                <a:latin typeface="Consolas"/>
-              </a:rPr>
-              <a:t>PLANT</a:t>
-            </a:r>
-            <a:r>
-              <a:rPr sz="2000"/>
-              <a:t> switches what the same three numbers drive. The devices and the loop do not change</a:t>
-            </a:r>
-          </a:p>
-          <a:p>
-            <a:pPr lvl="1"/>
-            <a:r>
-              <a:rPr sz="1600">
-                <a:latin typeface="Consolas"/>
-              </a:rPr>
-              <a:t>"vehicle"</a:t>
-            </a:r>
-            <a:r>
-              <a:rPr sz="1800"/>
-              <a:t> a Chrono::Vehicle, as in Parts 1-7</a:t>
-            </a:r>
-          </a:p>
-          <a:p>
-            <a:pPr lvl="1"/>
-            <a:r>
-              <a:rPr sz="1600">
-                <a:latin typeface="Consolas"/>
-              </a:rPr>
-              <a:t>"rover"</a:t>
-            </a:r>
-            <a:r>
-              <a:rPr sz="1800"/>
-              <a:t> a Viper rover: steering -&gt; wheel angle, throttle -&gt; commanded wheel speed</a:t>
-            </a:r>
-          </a:p>
-          <a:p>
-            <a:pPr lvl="1"/>
-            <a:r>
-              <a:rPr sz="1600">
-                <a:latin typeface="Consolas"/>
-              </a:rPr>
-              <a:t>"crane"</a:t>
-            </a:r>
-            <a:r>
-              <a:rPr sz="1800"/>
-              <a:t> a gantry crane: steering -&gt; cross-travel, throttle/braking -&gt; forward/reverse travel</a:t>
-            </a:r>
-          </a:p>
-          <a:p>
-            <a:pPr/>
-            <a:r>
-              <a:rPr sz="2000"/>
-              <a:t>The crane has no Chrono::Vehicle at all: four bodies, two motors, a distance constraint</a:t>
-            </a:r>
-          </a:p>
-          <a:p>
-            <a:pPr lvl="1"/>
-            <a:r>
-              <a:rPr sz="1800"/>
-              <a:t>the payload swings with nothing to damp it but the operator - which is the whole point</a:t>
-            </a:r>
-          </a:p>
-          <a:p>
-            <a:pPr/>
-            <a:r>
-              <a:rPr sz="2000"/>
-              <a:t>No ChVehicle means no ChInteractiveDriver: both take input over UDP, console unchanged</a:t>
-            </a:r>
-          </a:p>
-          <a:p>
-            <a:pPr lvl="1"/>
-            <a:r>
-              <a:rPr sz="1600">
-                <a:latin typeface="Consolas"/>
-              </a:rPr>
-              <a:t>DriverInputs</a:t>
-            </a:r>
-            <a:r>
-              <a:rPr sz="1800"/>
-              <a:t> is the whole ChDriver contract in twelve lines of Python: three floats, three setters, GetInputs()</a:t>
-            </a:r>
-          </a:p>
-        </p:txBody>
-      </p:sp>
-      <p:sp>
-        <p:nvSpPr>
-          <p:cNvPr id="4" name="TextBox footer"/>
+          <a:bodyPr/>
+          <a:lstStyle/>
+          <a:p/>
+        </p:txBody>
+      </p:sp>
+      <p:sp>
+        <p:nvSpPr>
+          <p:cNvPr id="4" name="TextBox 3"/>
           <p:cNvSpPr txBox="1"/>
           <p:nvPr/>
         </p:nvSpPr>
@@ -9404,7 +9449,7 @@
       </p:sp>
       <p:sp>
         <p:nvSpPr>
-          <p:cNvPr id="5" name="TextBox pageno"/>
+          <p:cNvPr id="5" name="TextBox 4"/>
           <p:cNvSpPr txBox="1"/>
           <p:nvPr/>
         </p:nvSpPr>
@@ -9426,7 +9471,7 @@
           <a:p>
             <a:r>
               <a:rPr sz="1000"/>
-              <a:t>26</a:t>
+              <a:t>29</a:t>
             </a:r>
           </a:p>
         </p:txBody>
@@ -9550,7 +9595,7 @@
             <a:pPr/>
             <a:r>
               <a:rPr sz="2000"/>
-              <a:t>python tutorial_HIL_driver.py opens an Irrlicht window with an HMMWV - drive it with the arrow keys</a:t>
+              <a:t>python tutorial_HIL_driver.py opens an Irrlicht window with an HMMWV - drive it with W/A/S/D</a:t>
             </a:r>
           </a:p>
           <a:p>
@@ -9640,141 +9685,14 @@
       <p:grpSpPr/>
       <p:sp>
         <p:nvSpPr>
-          <p:cNvPr id="2" name="Title 1"/>
-          <p:cNvSpPr>
-            <a:spLocks noGrp="1"/>
-          </p:cNvSpPr>
-          <p:nvPr>
-            <p:ph type="title"/>
-          </p:nvPr>
-        </p:nvSpPr>
-        <p:spPr/>
-        <p:txBody>
-          <a:bodyPr wrap="square"/>
-          <a:lstStyle/>
-          <a:p>
-            <a:r>
-              <a:rPr sz="2600"/>
-              <a:t>Show Time</a:t>
-            </a:r>
-          </a:p>
-        </p:txBody>
-      </p:sp>
-      <p:sp>
-        <p:nvSpPr>
-          <p:cNvPr id="3" name="Content Placeholder 2"/>
-          <p:cNvSpPr>
-            <a:spLocks noGrp="1"/>
-          </p:cNvSpPr>
-          <p:nvPr>
-            <p:ph idx="1"/>
-          </p:nvPr>
-        </p:nvSpPr>
-        <p:spPr/>
-        <p:txBody>
-          <a:bodyPr wrap="square"/>
-          <a:lstStyle/>
-          <a:p>
-            <a:pPr/>
-            <a:r>
-              <a:rPr sz="1800">
-                <a:latin typeface="Consolas"/>
-              </a:rPr>
-              <a:t>PLANT = "crane"</a:t>
-            </a:r>
-            <a:r>
-              <a:rPr sz="2000"/>
-              <a:t> over </a:t>
-            </a:r>
-            <a:r>
-              <a:rPr sz="1800">
-                <a:latin typeface="Consolas"/>
-              </a:rPr>
-              <a:t>udp</a:t>
-            </a:r>
-            <a:r>
-              <a:rPr sz="2000"/>
-              <a:t>: put the load on the green pad with the swing under 2 degrees</a:t>
-            </a:r>
-          </a:p>
-          <a:p>
-            <a:pPr lvl="1"/>
-            <a:r>
-              <a:rPr sz="1800"/>
-              <a:t>the console prints swing angle and miss distance - same telemetry path, same packet shape as the car</a:t>
-            </a:r>
-          </a:p>
-          <a:p>
-            <a:pPr/>
-            <a:r>
-              <a:rPr sz="1800">
-                <a:latin typeface="Consolas"/>
-              </a:rPr>
-              <a:t>VEHICLE = "audi"</a:t>
-            </a:r>
-            <a:r>
-              <a:rPr sz="2000"/>
-              <a:t>, </a:t>
-            </a:r>
-            <a:r>
-              <a:rPr sz="1800">
-                <a:latin typeface="Consolas"/>
-              </a:rPr>
-              <a:t>TRANSMISSION = "manual"</a:t>
-            </a:r>
-            <a:r>
-              <a:rPr sz="2000"/>
-              <a:t>: pull away in third and feel the engine bog down</a:t>
-            </a:r>
-          </a:p>
-          <a:p>
-            <a:pPr/>
-            <a:r>
-              <a:rPr sz="1800">
-                <a:latin typeface="Consolas"/>
-              </a:rPr>
-              <a:t>SCENE = "mcity"</a:t>
-            </a:r>
-            <a:r>
-              <a:rPr sz="2000"/>
-              <a:t> with </a:t>
-            </a:r>
-            <a:r>
-              <a:rPr sz="1800">
-                <a:latin typeface="Consolas"/>
-              </a:rPr>
-              <a:t>MCITY_DETAIL = "ground"</a:t>
-            </a:r>
-            <a:r>
-              <a:rPr sz="2000"/>
-              <a:t>: the same three numbers, somewhere real</a:t>
-            </a:r>
-          </a:p>
-          <a:p>
-            <a:pPr/>
-            <a:r>
-              <a:rPr sz="1800">
-                <a:latin typeface="Consolas"/>
-              </a:rPr>
-              <a:t>PLANT = "rover"</a:t>
-            </a:r>
-            <a:r>
-              <a:rPr sz="2000"/>
-              <a:t> and hold the brake: it coasts rather than stopping - ViperDriver has no brake input</a:t>
-            </a:r>
-          </a:p>
-        </p:txBody>
-      </p:sp>
-      <p:sp>
-        <p:nvSpPr>
-          <p:cNvPr id="4" name="TextBox footer"/>
+          <p:cNvPr id="2" name="TextBox 1"/>
           <p:cNvSpPr txBox="1"/>
           <p:nvPr/>
         </p:nvSpPr>
         <p:spPr>
           <a:xfrm>
-            <a:off x="310974" y="6645811"/>
-            <a:ext cx="11644805" cy="188527"/>
+            <a:off x="914400" y="1371600"/>
+            <a:ext cx="10058400" cy="4057600"/>
           </a:xfrm>
           <a:prstGeom prst="rect">
             <a:avLst/>
@@ -9782,28 +9700,81 @@
           <a:noFill/>
         </p:spPr>
         <p:txBody>
-          <a:bodyPr wrap="none">
+          <a:bodyPr wrap="square">
             <a:spAutoFit/>
           </a:bodyPr>
           <a:lstStyle/>
           <a:p>
-            <a:r>
-              <a:rPr sz="1000"/>
+            <a:pPr/>
+            <a:r>
+              <a:rPr sz="2000"/>
+              <a:t>Thank you.</a:t>
+            </a:r>
+          </a:p>
+          <a:p>
+            <a:pPr/>
+            <a:r>
+              <a:rPr sz="2000"/>
+              <a:t>kasha2@wisc.edu</a:t>
+            </a:r>
+          </a:p>
+          <a:p>
+            <a:pPr/>
+            <a:r>
+              <a:rPr sz="2000"/>
+              <a:t>Simulation-Based Engineering Lab</a:t>
+            </a:r>
+          </a:p>
+          <a:p>
+            <a:pPr/>
+            <a:r>
+              <a:rPr sz="2000"/>
               <a:t>University of Wisconsin - Madison</a:t>
             </a:r>
           </a:p>
-        </p:txBody>
-      </p:sp>
-      <p:sp>
-        <p:nvSpPr>
-          <p:cNvPr id="5" name="TextBox pageno"/>
+          <a:p>
+            <a:pPr/>
+          </a:p>
+          <a:p>
+            <a:pPr/>
+            <a:r>
+              <a:rPr sz="2000"/>
+              <a:t>Lab website: http://sbel.wisc.edu</a:t>
+            </a:r>
+          </a:p>
+          <a:p>
+            <a:pPr/>
+            <a:r>
+              <a:rPr sz="2000"/>
+              <a:t>Chrono website: http://www.projectchrono.org</a:t>
+            </a:r>
+          </a:p>
+          <a:p>
+            <a:pPr/>
+            <a:r>
+              <a:rPr sz="2000"/>
+              <a:t>Source code: https://github.com/projectchrono</a:t>
+            </a:r>
+          </a:p>
+          <a:p>
+            <a:pPr/>
+            <a:r>
+              <a:rPr sz="2000"/>
+              <a:t>Tutorial code + slides: https://github.com/ksha23/chrono-hil-tutorial</a:t>
+            </a:r>
+          </a:p>
+        </p:txBody>
+      </p:sp>
+      <p:sp>
+        <p:nvSpPr>
+          <p:cNvPr id="3" name="TextBox 2"/>
           <p:cNvSpPr txBox="1"/>
           <p:nvPr/>
         </p:nvSpPr>
         <p:spPr>
           <a:xfrm>
-            <a:off x="10249563" y="6646310"/>
-            <a:ext cx="1706217" cy="188028"/>
+            <a:off x="310974" y="6645811"/>
+            <a:ext cx="11644805" cy="188527"/>
           </a:xfrm>
           <a:prstGeom prst="rect">
             <a:avLst/>
@@ -9818,7 +9789,36 @@
           <a:p>
             <a:r>
               <a:rPr sz="1000"/>
-              <a:t>27</a:t>
+              <a:t>University of Wisconsin - Madison</a:t>
+            </a:r>
+          </a:p>
+        </p:txBody>
+      </p:sp>
+      <p:sp>
+        <p:nvSpPr>
+          <p:cNvPr id="4" name="TextBox 3"/>
+          <p:cNvSpPr txBox="1"/>
+          <p:nvPr/>
+        </p:nvSpPr>
+        <p:spPr>
+          <a:xfrm>
+            <a:off x="10249563" y="6646310"/>
+            <a:ext cx="1706217" cy="188028"/>
+          </a:xfrm>
+          <a:prstGeom prst="rect">
+            <a:avLst/>
+          </a:prstGeom>
+          <a:noFill/>
+        </p:spPr>
+        <p:txBody>
+          <a:bodyPr wrap="none">
+            <a:spAutoFit/>
+          </a:bodyPr>
+          <a:lstStyle/>
+          <a:p>
+            <a:r>
+              <a:rPr sz="1000"/>
+              <a:t>30</a:t>
             </a:r>
           </a:p>
         </p:txBody>
@@ -10165,7 +10165,7 @@
           <a:p>
             <a:r>
               <a:rPr sz="2600"/>
-              <a:t>Step 1: The simulation loop (Lines 674 to 725)</a:t>
+              <a:t>Step 1: The simulation loop (Lines 700 to 751)</a:t>
             </a:r>
           </a:p>
         </p:txBody>
@@ -10676,7 +10676,7 @@
           <a:p>
             <a:r>
               <a:rPr sz="2600"/>
-              <a:t>Step 2: Measure it - sim time vs wall time (Lines 727 to 743)</a:t>
+              <a:t>Step 2: Measure it - sim time vs wall time (Lines 753 to 769)</a:t>
             </a:r>
           </a:p>
         </p:txBody>
@@ -11182,7 +11182,7 @@
           <a:p>
             <a:r>
               <a:rPr sz="2600"/>
-              <a:t>Step 3: Enforce real time, three ways (Lines 630 to 645)</a:t>
+              <a:t>Step 3: Enforce real time, three ways (Lines 656 to 671)</a:t>
             </a:r>
           </a:p>
         </p:txBody>

--- a/tutorial_HIL_driver.pptx
+++ b/tutorial_HIL_driver.pptx
@@ -13,31 +13,26 @@
     <p:sldId id="258" r:id="rId10"/>
     <p:sldId id="259" r:id="rId11"/>
     <p:sldId id="260" r:id="rId12"/>
+    <p:sldId id="261" r:id="rId13"/>
+    <p:sldId id="262" r:id="rId14"/>
     <p:sldId id="263" r:id="rId15"/>
     <p:sldId id="264" r:id="rId16"/>
     <p:sldId id="265" r:id="rId17"/>
     <p:sldId id="266" r:id="rId18"/>
+    <p:sldId id="267" r:id="rId19"/>
     <p:sldId id="268" r:id="rId20"/>
+    <p:sldId id="269" r:id="rId21"/>
     <p:sldId id="270" r:id="rId22"/>
     <p:sldId id="271" r:id="rId23"/>
-    <p:sldId id="272" r:id="rId24"/>
     <p:sldId id="273" r:id="rId25"/>
+    <p:sldId id="274" r:id="rId26"/>
     <p:sldId id="275" r:id="rId27"/>
     <p:sldId id="276" r:id="rId28"/>
-    <p:sldId id="306" r:id="rId38"/>
     <p:sldId id="277" r:id="rId29"/>
+    <p:sldId id="278" r:id="rId30"/>
     <p:sldId id="279" r:id="rId31"/>
-    <p:sldId id="282" r:id="rId34"/>
-    <p:sldId id="287" r:id="rId39"/>
-    <p:sldId id="284" r:id="rId36"/>
-    <p:sldId id="307" r:id="rId33"/>
-    <p:sldId id="308" r:id="rId32"/>
-    <p:sldId id="309" r:id="rId35"/>
-    <p:sldId id="310" r:id="rId30"/>
-    <p:sldId id="311" r:id="rId37"/>
-    <p:sldId id="291" r:id="rId43"/>
-    <p:sldId id="292" r:id="rId44"/>
-    <p:sldId id="293" r:id="rId45"/>
+    <p:sldId id="280" r:id="rId32"/>
+    <p:sldId id="281" r:id="rId33"/>
   </p:sldIdLst>
   <p:sldSz cx="12192000" cy="6858000"/>
   <p:notesSz cx="6858000" cy="9144000"/>
@@ -4659,7 +4654,7 @@
         </p:nvSpPr>
         <p:spPr/>
         <p:txBody>
-          <a:bodyPr/>
+          <a:bodyPr wrap="square"/>
           <a:lstStyle/>
           <a:p>
             <a:r>
@@ -4680,7 +4675,7 @@
         </p:nvSpPr>
         <p:spPr/>
         <p:txBody>
-          <a:bodyPr/>
+          <a:bodyPr wrap="square"/>
           <a:lstStyle/>
           <a:p>
             <a:r>
@@ -4696,7 +4691,7 @@
       </p:sp>
       <p:sp>
         <p:nvSpPr>
-          <p:cNvPr id="4" name="TextBox 3"/>
+          <p:cNvPr id="4" name="Footer"/>
           <p:cNvSpPr txBox="1"/>
           <p:nvPr/>
         </p:nvSpPr>
@@ -4725,7 +4720,7 @@
       </p:sp>
       <p:sp>
         <p:nvSpPr>
-          <p:cNvPr id="5" name="TextBox 4"/>
+          <p:cNvPr id="5" name="PageNo"/>
           <p:cNvSpPr txBox="1"/>
           <p:nvPr/>
         </p:nvSpPr>
@@ -4780,33 +4775,28 @@
             <p:ph type="title"/>
           </p:nvPr>
         </p:nvSpPr>
-        <p:spPr>
-          <a:xfrm>
-            <a:off x="235228" y="150000"/>
-            <a:ext cx="9875520" cy="800000"/>
-          </a:xfrm>
-        </p:spPr>
+        <p:spPr/>
         <p:txBody>
           <a:bodyPr wrap="square"/>
           <a:lstStyle/>
           <a:p>
             <a:r>
               <a:rPr sz="2600"/>
-              <a:t>Step 4: A drift-free timer in 10 lines (Lines 71 to 88)</a:t>
-            </a:r>
-          </a:p>
-        </p:txBody>
-      </p:sp>
-      <p:sp>
-        <p:nvSpPr>
-          <p:cNvPr id="3" name="TextBox 2"/>
+              <a:t>The loop, and where the driver is queried (Lines 700 to 751)</a:t>
+            </a:r>
+          </a:p>
+        </p:txBody>
+      </p:sp>
+      <p:sp>
+        <p:nvSpPr>
+          <p:cNvPr id="3" name="CodeBox"/>
           <p:cNvSpPr txBox="1"/>
           <p:nvPr/>
         </p:nvSpPr>
         <p:spPr>
           <a:xfrm>
-            <a:off x="0" y="1050000"/>
-            <a:ext cx="12192000" cy="3967480"/>
+            <a:off x="0" y="1051560"/>
+            <a:ext cx="12191969" cy="4539424"/>
           </a:xfrm>
           <a:prstGeom prst="rect">
             <a:avLst/>
@@ -4822,225 +4812,357 @@
           <a:lstStyle/>
           <a:p>
             <a:r>
-              <a:rPr sz="1300">
-                <a:solidFill>
-                  <a:srgbClr val="CCCCCC"/>
-                </a:solidFill>
-                <a:latin typeface="Consolas"/>
-              </a:rPr>
-              <a:t>class CumulativeRealtimeTimer:</a:t>
-            </a:r>
-          </a:p>
-          <a:p>
-            <a:r>
-              <a:rPr sz="1300">
-                <a:solidFill>
-                  <a:srgbClr val="CCCCCC"/>
-                </a:solidFill>
-                <a:latin typeface="Consolas"/>
-              </a:rPr>
-              <a:t>    """Soft real-time that does not accumulate drift.</a:t>
-            </a:r>
-          </a:p>
-          <a:p>
-            <a:r>
-              <a:rPr sz="1300">
-                <a:solidFill>
-                  <a:srgbClr val="CCCCCC"/>
-                </a:solidFill>
-                <a:latin typeface="Consolas"/>
-              </a:rPr>
-              <a:t> </a:t>
-            </a:r>
-          </a:p>
-          <a:p>
-            <a:r>
-              <a:rPr sz="1300">
-                <a:solidFill>
-                  <a:srgbClr val="CCCCCC"/>
-                </a:solidFill>
-                <a:latin typeface="Consolas"/>
-              </a:rPr>
-              <a:t>    ChRealtimeStepTimer measures each step independently: any time lost on a</a:t>
-            </a:r>
-          </a:p>
-          <a:p>
-            <a:r>
-              <a:rPr sz="1300">
-                <a:solidFill>
-                  <a:srgbClr val="CCCCCC"/>
-                </a:solidFill>
-                <a:latin typeface="Consolas"/>
-              </a:rPr>
-              <a:t>    slow step (or spent in Python between steps) is never recovered.  This timer</a:t>
-            </a:r>
-          </a:p>
-          <a:p>
-            <a:r>
-              <a:rPr sz="1300">
-                <a:solidFill>
-                  <a:srgbClr val="CCCCCC"/>
-                </a:solidFill>
-                <a:latin typeface="Consolas"/>
-              </a:rPr>
-              <a:t>    instead compares the *total* simulated time with the *total* wall time, so a</a:t>
-            </a:r>
-          </a:p>
-          <a:p>
-            <a:r>
-              <a:rPr sz="1300">
-                <a:solidFill>
-                  <a:srgbClr val="CCCCCC"/>
-                </a:solidFill>
-                <a:latin typeface="Consolas"/>
-              </a:rPr>
-              <a:t>    slow step is followed by a few fast steps that catch back up.</a:t>
-            </a:r>
-          </a:p>
-          <a:p>
-            <a:r>
-              <a:rPr sz="1300">
-                <a:solidFill>
-                  <a:srgbClr val="CCCCCC"/>
-                </a:solidFill>
-                <a:latin typeface="Consolas"/>
-              </a:rPr>
-              <a:t>    """</a:t>
-            </a:r>
-          </a:p>
-          <a:p>
-            <a:r>
-              <a:rPr sz="1300">
-                <a:solidFill>
-                  <a:srgbClr val="CCCCCC"/>
-                </a:solidFill>
-                <a:latin typeface="Consolas"/>
-              </a:rPr>
-              <a:t> </a:t>
-            </a:r>
-          </a:p>
-          <a:p>
-            <a:r>
-              <a:rPr sz="1300">
-                <a:solidFill>
-                  <a:srgbClr val="CCCCCC"/>
-                </a:solidFill>
-                <a:latin typeface="Consolas"/>
-              </a:rPr>
-              <a:t>    def __init__(self):</a:t>
-            </a:r>
-          </a:p>
-          <a:p>
-            <a:r>
-              <a:rPr sz="1300">
-                <a:solidFill>
-                  <a:srgbClr val="CCCCCC"/>
-                </a:solidFill>
-                <a:latin typeface="Consolas"/>
-              </a:rPr>
-              <a:t>        self.reset()</a:t>
-            </a:r>
-          </a:p>
-          <a:p>
-            <a:r>
-              <a:rPr sz="1300">
-                <a:solidFill>
-                  <a:srgbClr val="CCCCCC"/>
-                </a:solidFill>
-                <a:latin typeface="Consolas"/>
-              </a:rPr>
-              <a:t> </a:t>
-            </a:r>
-          </a:p>
-          <a:p>
-            <a:r>
-              <a:rPr sz="1300">
-                <a:solidFill>
-                  <a:srgbClr val="CCCCCC"/>
-                </a:solidFill>
-                <a:latin typeface="Consolas"/>
-              </a:rPr>
-              <a:t>    def reset(self):</a:t>
-            </a:r>
-          </a:p>
-          <a:p>
-            <a:r>
-              <a:rPr sz="1300">
-                <a:solidFill>
-                  <a:srgbClr val="CCCCCC"/>
-                </a:solidFill>
-                <a:latin typeface="Consolas"/>
-              </a:rPr>
-              <a:t>        self.t_start = time.perf_counter()</a:t>
-            </a:r>
-          </a:p>
-          <a:p>
-            <a:r>
-              <a:rPr sz="1300">
-                <a:solidFill>
-                  <a:srgbClr val="CCCCCC"/>
-                </a:solidFill>
-                <a:latin typeface="Consolas"/>
-              </a:rPr>
-              <a:t> </a:t>
-            </a:r>
-          </a:p>
-          <a:p>
-            <a:r>
-              <a:rPr sz="1300">
-                <a:solidFill>
-                  <a:srgbClr val="CCCCCC"/>
-                </a:solidFill>
-                <a:latin typeface="Consolas"/>
-              </a:rPr>
-              <a:t>    def spin(self, sim_time):</a:t>
-            </a:r>
-          </a:p>
-          <a:p>
-            <a:r>
-              <a:rPr sz="1300">
-                <a:solidFill>
-                  <a:srgbClr val="CCCCCC"/>
-                </a:solidFill>
-                <a:latin typeface="Consolas"/>
-              </a:rPr>
-              <a:t>        while time.perf_counter() - self.t_start &lt; sim_time:</a:t>
-            </a:r>
-          </a:p>
-          <a:p>
-            <a:r>
-              <a:rPr sz="1300">
-                <a:solidFill>
-                  <a:srgbClr val="CCCCCC"/>
-                </a:solidFill>
-                <a:latin typeface="Consolas"/>
-              </a:rPr>
-              <a:t>            pass  # spin in place until real time catches up</a:t>
-            </a:r>
-          </a:p>
-          <a:p>
-            <a:r>
-              <a:rPr sz="1300">
-                <a:solidFill>
-                  <a:srgbClr val="CCCCCC"/>
-                </a:solidFill>
-                <a:latin typeface="Consolas"/>
-              </a:rPr>
-              <a:t> </a:t>
-            </a:r>
-          </a:p>
-        </p:txBody>
-      </p:sp>
-      <p:sp>
-        <p:nvSpPr>
-          <p:cNvPr id="4" name="TextBox 3"/>
+              <a:rPr sz="900">
+                <a:solidFill>
+                  <a:srgbClr val="CCCCCC"/>
+                </a:solidFill>
+                <a:latin typeface="Consolas"/>
+              </a:rPr>
+              <a:t>while vis.Run():</a:t>
+            </a:r>
+          </a:p>
+          <a:p>
+            <a:r>
+              <a:rPr sz="900">
+                <a:solidFill>
+                  <a:srgbClr val="CCCCCC"/>
+                </a:solidFill>
+                <a:latin typeface="Consolas"/>
+              </a:rPr>
+              <a:t>    sim_time = system.GetChTime()</a:t>
+            </a:r>
+          </a:p>
+          <a:p>
+            <a:r>
+              <a:rPr sz="900">
+                <a:solidFill>
+                  <a:srgbClr val="CCCCCC"/>
+                </a:solidFill>
+                <a:latin typeface="Consolas"/>
+              </a:rPr>
+              <a:t/>
+            </a:r>
+          </a:p>
+          <a:p>
+            <a:r>
+              <a:rPr sz="900">
+                <a:solidFill>
+                  <a:srgbClr val="CCCCCC"/>
+                </a:solidFill>
+                <a:latin typeface="Consolas"/>
+              </a:rPr>
+              <a:t>    # Render scene</a:t>
+            </a:r>
+          </a:p>
+          <a:p>
+            <a:r>
+              <a:rPr sz="900">
+                <a:solidFill>
+                  <a:srgbClr val="CCCCCC"/>
+                </a:solidFill>
+                <a:latin typeface="Consolas"/>
+              </a:rPr>
+              <a:t>    if step_number % render_steps == 0:</a:t>
+            </a:r>
+          </a:p>
+          <a:p>
+            <a:r>
+              <a:rPr sz="900">
+                <a:solidFill>
+                  <a:srgbClr val="CCCCCC"/>
+                </a:solidFill>
+                <a:latin typeface="Consolas"/>
+              </a:rPr>
+              <a:t>        follow_camera()</a:t>
+            </a:r>
+          </a:p>
+          <a:p>
+            <a:r>
+              <a:rPr sz="900">
+                <a:solidFill>
+                  <a:srgbClr val="CCCCCC"/>
+                </a:solidFill>
+                <a:latin typeface="Consolas"/>
+              </a:rPr>
+              <a:t>        vis.BeginScene()</a:t>
+            </a:r>
+          </a:p>
+          <a:p>
+            <a:r>
+              <a:rPr sz="900">
+                <a:solidFill>
+                  <a:srgbClr val="CCCCCC"/>
+                </a:solidFill>
+                <a:latin typeface="Consolas"/>
+              </a:rPr>
+              <a:t>        vis.Render()</a:t>
+            </a:r>
+          </a:p>
+          <a:p>
+            <a:r>
+              <a:rPr sz="900">
+                <a:solidFill>
+                  <a:srgbClr val="CCCCCC"/>
+                </a:solidFill>
+                <a:latin typeface="Consolas"/>
+              </a:rPr>
+              <a:t>        vis.EndScene()</a:t>
+            </a:r>
+          </a:p>
+          <a:p>
+            <a:r>
+              <a:rPr sz="900">
+                <a:solidFill>
+                  <a:srgbClr val="CCCCCC"/>
+                </a:solidFill>
+                <a:latin typeface="Consolas"/>
+              </a:rPr>
+              <a:t/>
+            </a:r>
+          </a:p>
+          <a:p>
+            <a:r>
+              <a:rPr sz="900">
+                <a:solidFill>
+                  <a:srgbClr val="CCCCCC"/>
+                </a:solidFill>
+                <a:latin typeface="Consolas"/>
+              </a:rPr>
+              <a:t>    # PART 4 samples the device here; PART 6 applies any gear command</a:t>
+            </a:r>
+          </a:p>
+          <a:p>
+            <a:r>
+              <a:rPr sz="900">
+                <a:solidFill>
+                  <a:srgbClr val="CCCCCC"/>
+                </a:solidFill>
+                <a:latin typeface="Consolas"/>
+              </a:rPr>
+              <a:t>    ...</a:t>
+            </a:r>
+          </a:p>
+          <a:p>
+            <a:r>
+              <a:rPr sz="900">
+                <a:solidFill>
+                  <a:srgbClr val="CCCCCC"/>
+                </a:solidFill>
+                <a:latin typeface="Consolas"/>
+              </a:rPr>
+              <a:t/>
+            </a:r>
+          </a:p>
+          <a:p>
+            <a:r>
+              <a:rPr sz="900">
+                <a:solidFill>
+                  <a:srgbClr val="CCCCCC"/>
+                </a:solidFill>
+                <a:latin typeface="Consolas"/>
+              </a:rPr>
+              <a:t>    # Get driver inputs (three floats) - the whole human-in-the-loop contract</a:t>
+            </a:r>
+          </a:p>
+          <a:p>
+            <a:r>
+              <a:rPr sz="900">
+                <a:solidFill>
+                  <a:srgbClr val="CCCCCC"/>
+                </a:solidFill>
+                <a:latin typeface="Consolas"/>
+              </a:rPr>
+              <a:t>    driver_inputs = driver.GetInputs()</a:t>
+            </a:r>
+          </a:p>
+          <a:p>
+            <a:r>
+              <a:rPr sz="900">
+                <a:solidFill>
+                  <a:srgbClr val="CCCCCC"/>
+                </a:solidFill>
+                <a:latin typeface="Consolas"/>
+              </a:rPr>
+              <a:t/>
+            </a:r>
+          </a:p>
+          <a:p>
+            <a:r>
+              <a:rPr sz="900">
+                <a:solidFill>
+                  <a:srgbClr val="CCCCCC"/>
+                </a:solidFill>
+                <a:latin typeface="Consolas"/>
+              </a:rPr>
+              <a:t>    # PART 8: hand the three numbers to whatever is being controlled</a:t>
+            </a:r>
+          </a:p>
+          <a:p>
+            <a:r>
+              <a:rPr sz="900">
+                <a:solidFill>
+                  <a:srgbClr val="CCCCCC"/>
+                </a:solidFill>
+                <a:latin typeface="Consolas"/>
+              </a:rPr>
+              <a:t>    plant.apply(driver_inputs)</a:t>
+            </a:r>
+          </a:p>
+          <a:p>
+            <a:r>
+              <a:rPr sz="900">
+                <a:solidFill>
+                  <a:srgbClr val="CCCCCC"/>
+                </a:solidFill>
+                <a:latin typeface="Consolas"/>
+              </a:rPr>
+              <a:t/>
+            </a:r>
+          </a:p>
+          <a:p>
+            <a:r>
+              <a:rPr sz="900">
+                <a:solidFill>
+                  <a:srgbClr val="CCCCCC"/>
+                </a:solidFill>
+                <a:latin typeface="Consolas"/>
+              </a:rPr>
+              <a:t>    # Update modules (process inputs from other modules)</a:t>
+            </a:r>
+          </a:p>
+          <a:p>
+            <a:r>
+              <a:rPr sz="900">
+                <a:solidFill>
+                  <a:srgbClr val="CCCCCC"/>
+                </a:solidFill>
+                <a:latin typeface="Consolas"/>
+              </a:rPr>
+              <a:t>    driver.Synchronize(sim_time)</a:t>
+            </a:r>
+          </a:p>
+          <a:p>
+            <a:r>
+              <a:rPr sz="900">
+                <a:solidFill>
+                  <a:srgbClr val="CCCCCC"/>
+                </a:solidFill>
+                <a:latin typeface="Consolas"/>
+              </a:rPr>
+              <a:t>    terrain.Synchronize(sim_time)</a:t>
+            </a:r>
+          </a:p>
+          <a:p>
+            <a:r>
+              <a:rPr sz="900">
+                <a:solidFill>
+                  <a:srgbClr val="CCCCCC"/>
+                </a:solidFill>
+                <a:latin typeface="Consolas"/>
+              </a:rPr>
+              <a:t>    plant.synchronize(sim_time, driver_inputs)</a:t>
+            </a:r>
+          </a:p>
+          <a:p>
+            <a:r>
+              <a:rPr sz="900">
+                <a:solidFill>
+                  <a:srgbClr val="CCCCCC"/>
+                </a:solidFill>
+                <a:latin typeface="Consolas"/>
+              </a:rPr>
+              <a:t>    vis.Synchronize(sim_time, driver_inputs)</a:t>
+            </a:r>
+          </a:p>
+          <a:p>
+            <a:r>
+              <a:rPr sz="900">
+                <a:solidFill>
+                  <a:srgbClr val="CCCCCC"/>
+                </a:solidFill>
+                <a:latin typeface="Consolas"/>
+              </a:rPr>
+              <a:t/>
+            </a:r>
+          </a:p>
+          <a:p>
+            <a:r>
+              <a:rPr sz="900">
+                <a:solidFill>
+                  <a:srgbClr val="CCCCCC"/>
+                </a:solidFill>
+                <a:latin typeface="Consolas"/>
+              </a:rPr>
+              <a:t>    # Advance simulation for one timestep for all modules</a:t>
+            </a:r>
+          </a:p>
+          <a:p>
+            <a:r>
+              <a:rPr sz="900">
+                <a:solidFill>
+                  <a:srgbClr val="CCCCCC"/>
+                </a:solidFill>
+                <a:latin typeface="Consolas"/>
+              </a:rPr>
+              <a:t>    driver.Advance(step_size)</a:t>
+            </a:r>
+          </a:p>
+          <a:p>
+            <a:r>
+              <a:rPr sz="900">
+                <a:solidFill>
+                  <a:srgbClr val="CCCCCC"/>
+                </a:solidFill>
+                <a:latin typeface="Consolas"/>
+              </a:rPr>
+              <a:t>    terrain.Advance(step_size)</a:t>
+            </a:r>
+          </a:p>
+          <a:p>
+            <a:r>
+              <a:rPr sz="900">
+                <a:solidFill>
+                  <a:srgbClr val="CCCCCC"/>
+                </a:solidFill>
+                <a:latin typeface="Consolas"/>
+              </a:rPr>
+              <a:t>    plant.advance(step_size)          # spins here if REALTIME == "vehicle"</a:t>
+            </a:r>
+          </a:p>
+          <a:p>
+            <a:r>
+              <a:rPr sz="900">
+                <a:solidFill>
+                  <a:srgbClr val="CCCCCC"/>
+                </a:solidFill>
+                <a:latin typeface="Consolas"/>
+              </a:rPr>
+              <a:t>    system.DoStepDynamics(step_size)  # only for a plant that does not step itself</a:t>
+            </a:r>
+          </a:p>
+          <a:p>
+            <a:r>
+              <a:rPr sz="900">
+                <a:solidFill>
+                  <a:srgbClr val="CCCCCC"/>
+                </a:solidFill>
+                <a:latin typeface="Consolas"/>
+              </a:rPr>
+              <a:t>    vis.Advance(step_size)</a:t>
+            </a:r>
+          </a:p>
+        </p:txBody>
+      </p:sp>
+      <p:sp>
+        <p:nvSpPr>
+          <p:cNvPr id="4" name="NoteBox"/>
           <p:cNvSpPr txBox="1"/>
           <p:nvPr/>
         </p:nvSpPr>
         <p:spPr>
           <a:xfrm>
-            <a:off x="400000" y="5117480"/>
-            <a:ext cx="11392000" cy="1340520"/>
+            <a:off x="402336" y="5728144"/>
+            <a:ext cx="11393424" cy="688848"/>
           </a:xfrm>
           <a:prstGeom prst="rect">
             <a:avLst/>
@@ -5053,24 +5175,22 @@
           </a:bodyPr>
           <a:lstStyle/>
           <a:p>
-            <a:pPr/>
-            <a:r>
-              <a:rPr sz="1800"/>
-              <a:t>Compare TOTAL simulated time with TOTAL wall time - lost time is caught up on the next fast steps</a:t>
-            </a:r>
-          </a:p>
-          <a:p>
-            <a:pPr/>
-            <a:r>
-              <a:rPr sz="1800"/>
-              <a:t>This is how driving simulators (e.g. Chrono::HIL) keep their clock; the same idea also works across processes</a:t>
-            </a:r>
-          </a:p>
-        </p:txBody>
-      </p:sp>
-      <p:sp>
-        <p:nvSpPr>
-          <p:cNvPr id="5" name="TextBox 4"/>
+            <a:r>
+              <a:rPr sz="1600"/>
+              <a:t>Synchronize: every module reads what it needs from the others at time t. Advance: every module integrates t to t + step</a:t>
+            </a:r>
+          </a:p>
+          <a:p>
+            <a:r>
+              <a:rPr sz="1600"/>
+              <a:t>The driver is queried BEFORE Synchronize - the human's input is sampled once and held for the whole step</a:t>
+            </a:r>
+          </a:p>
+        </p:txBody>
+      </p:sp>
+      <p:sp>
+        <p:nvSpPr>
+          <p:cNvPr id="5" name="Footer"/>
           <p:cNvSpPr txBox="1"/>
           <p:nvPr/>
         </p:nvSpPr>
@@ -5099,7 +5219,7 @@
       </p:sp>
       <p:sp>
         <p:nvSpPr>
-          <p:cNvPr id="6" name="TextBox 5"/>
+          <p:cNvPr id="6" name="PageNo"/>
           <p:cNvSpPr txBox="1"/>
           <p:nvPr/>
         </p:nvSpPr>
@@ -5154,91 +5274,240 @@
             <p:ph type="title"/>
           </p:nvPr>
         </p:nvSpPr>
-        <p:spPr>
-          <a:xfrm>
-            <a:off x="235228" y="150000"/>
-            <a:ext cx="9875520" cy="800000"/>
-          </a:xfrm>
-        </p:spPr>
+        <p:spPr/>
         <p:txBody>
           <a:bodyPr wrap="square"/>
           <a:lstStyle/>
           <a:p>
             <a:r>
               <a:rPr sz="2600"/>
-              <a:t>Show Time</a:t>
-            </a:r>
-          </a:p>
-        </p:txBody>
-      </p:sp>
-      <p:sp>
-        <p:nvSpPr>
-          <p:cNvPr id="3" name="Content Placeholder 2"/>
-          <p:cNvSpPr>
-            <a:spLocks noGrp="1"/>
-          </p:cNvSpPr>
-          <p:nvPr>
-            <p:ph idx="1"/>
-          </p:nvPr>
-        </p:nvSpPr>
-        <p:spPr/>
-        <p:txBody>
-          <a:bodyPr wrap="square"/>
-          <a:lstStyle/>
-          <a:p>
-            <a:pPr/>
-            <a:r>
-              <a:rPr sz="2000"/>
-              <a:t>Measured on a laptop, HMMWV + TMeasy tires, step 3 ms (RTF ~ 0.14):</a:t>
-            </a:r>
-          </a:p>
-          <a:p>
-            <a:pPr lvl="1"/>
-            <a:r>
-              <a:rPr sz="1800"/>
-              <a:t>"none": drift -69 s after 17 s of wall time</a:t>
-            </a:r>
-          </a:p>
-          <a:p>
-            <a:pPr lvl="1"/>
-            <a:r>
-              <a:rPr sz="1800"/>
-              <a:t>"per_step": drift +0.012 s after 17 s and growing</a:t>
-            </a:r>
-          </a:p>
-          <a:p>
-            <a:pPr lvl="1"/>
-            <a:r>
-              <a:rPr sz="1800"/>
-              <a:t>"vehicle": drift +0.021 s after 17 s and growing</a:t>
-            </a:r>
-          </a:p>
-          <a:p>
-            <a:pPr lvl="1"/>
-            <a:r>
-              <a:rPr sz="1800"/>
-              <a:t>"cumulative": drift +0.000 s</a:t>
-            </a:r>
-          </a:p>
-          <a:p>
-            <a:pPr/>
-            <a:r>
-              <a:rPr sz="2000"/>
-              <a:t>Drift matters more the closer you are to RTF = 1</a:t>
-            </a:r>
-          </a:p>
-        </p:txBody>
-      </p:sp>
-      <p:sp>
-        <p:nvSpPr>
-          <p:cNvPr id="4" name="TextBox 3"/>
+              <a:t>Measure it: sim time vs wall time (Lines 753 to 769)</a:t>
+            </a:r>
+          </a:p>
+        </p:txBody>
+      </p:sp>
+      <p:sp>
+        <p:nvSpPr>
+          <p:cNvPr id="3" name="CodeBox"/>
           <p:cNvSpPr txBox="1"/>
           <p:nvPr/>
         </p:nvSpPr>
         <p:spPr>
           <a:xfrm>
-            <a:off x="310974" y="6645811"/>
-            <a:ext cx="11644805" cy="188527"/>
+            <a:off x="0" y="1051560"/>
+            <a:ext cx="12191969" cy="3353562"/>
+          </a:xfrm>
+          <a:prstGeom prst="rect">
+            <a:avLst/>
+          </a:prstGeom>
+          <a:solidFill>
+            <a:srgbClr val="000000"/>
+          </a:solidFill>
+        </p:spPr>
+        <p:txBody>
+          <a:bodyPr wrap="none" lIns="300000" rIns="300000">
+            <a:noAutofit/>
+          </a:bodyPr>
+          <a:lstStyle/>
+          <a:p>
+            <a:r>
+              <a:rPr sz="1200">
+                <a:solidFill>
+                  <a:srgbClr val="CCCCCC"/>
+                </a:solidFill>
+                <a:latin typeface="Consolas"/>
+              </a:rPr>
+              <a:t># Console report: how far is the sim from wall time?</a:t>
+            </a:r>
+          </a:p>
+          <a:p>
+            <a:r>
+              <a:rPr sz="1200">
+                <a:solidFill>
+                  <a:srgbClr val="CCCCCC"/>
+                </a:solidFill>
+                <a:latin typeface="Consolas"/>
+              </a:rPr>
+              <a:t>if step_number % report_steps == 0:</a:t>
+            </a:r>
+          </a:p>
+          <a:p>
+            <a:r>
+              <a:rPr sz="1200">
+                <a:solidFill>
+                  <a:srgbClr val="CCCCCC"/>
+                </a:solidFill>
+                <a:latin typeface="Consolas"/>
+              </a:rPr>
+              <a:t>    wall = time.perf_counter() - wall_start</a:t>
+            </a:r>
+          </a:p>
+          <a:p>
+            <a:r>
+              <a:rPr sz="1200">
+                <a:solidFill>
+                  <a:srgbClr val="CCCCCC"/>
+                </a:solidFill>
+                <a:latin typeface="Consolas"/>
+              </a:rPr>
+              <a:t>    # A ChVehicle measures its own real-time factor per step. The rover</a:t>
+            </a:r>
+          </a:p>
+          <a:p>
+            <a:r>
+              <a:rPr sz="1200">
+                <a:solidFill>
+                  <a:srgbClr val="CCCCCC"/>
+                </a:solidFill>
+                <a:latin typeface="Consolas"/>
+              </a:rPr>
+              <a:t>    # and the crane do not, so it is measured here over the reporting</a:t>
+            </a:r>
+          </a:p>
+          <a:p>
+            <a:r>
+              <a:rPr sz="1200">
+                <a:solidFill>
+                  <a:srgbClr val="CCCCCC"/>
+                </a:solidFill>
+                <a:latin typeface="Consolas"/>
+              </a:rPr>
+              <a:t>    # interval instead: same quantity, coarser sampling.</a:t>
+            </a:r>
+          </a:p>
+          <a:p>
+            <a:r>
+              <a:rPr sz="1200">
+                <a:solidFill>
+                  <a:srgbClr val="CCCCCC"/>
+                </a:solidFill>
+                <a:latin typeface="Consolas"/>
+              </a:rPr>
+              <a:t>    if vehicle:</a:t>
+            </a:r>
+          </a:p>
+          <a:p>
+            <a:r>
+              <a:rPr sz="1200">
+                <a:solidFill>
+                  <a:srgbClr val="CCCCCC"/>
+                </a:solidFill>
+                <a:latin typeface="Consolas"/>
+              </a:rPr>
+              <a:t>        rtf = vehicle.GetRTF()</a:t>
+            </a:r>
+          </a:p>
+          <a:p>
+            <a:r>
+              <a:rPr sz="1200">
+                <a:solidFill>
+                  <a:srgbClr val="CCCCCC"/>
+                </a:solidFill>
+                <a:latin typeface="Consolas"/>
+              </a:rPr>
+              <a:t>    else:</a:t>
+            </a:r>
+          </a:p>
+          <a:p>
+            <a:r>
+              <a:rPr sz="1200">
+                <a:solidFill>
+                  <a:srgbClr val="CCCCCC"/>
+                </a:solidFill>
+                <a:latin typeface="Consolas"/>
+              </a:rPr>
+              <a:t>        d_wall = wall - last_wall</a:t>
+            </a:r>
+          </a:p>
+          <a:p>
+            <a:r>
+              <a:rPr sz="1200">
+                <a:solidFill>
+                  <a:srgbClr val="CCCCCC"/>
+                </a:solidFill>
+                <a:latin typeface="Consolas"/>
+              </a:rPr>
+              <a:t>        d_sim = sim_time - last_sim</a:t>
+            </a:r>
+          </a:p>
+          <a:p>
+            <a:r>
+              <a:rPr sz="1200">
+                <a:solidFill>
+                  <a:srgbClr val="CCCCCC"/>
+                </a:solidFill>
+                <a:latin typeface="Consolas"/>
+              </a:rPr>
+              <a:t>        rtf = (d_wall / d_sim) if d_sim &gt; 0 else 0.0</a:t>
+            </a:r>
+          </a:p>
+          <a:p>
+            <a:r>
+              <a:rPr sz="1200">
+                <a:solidFill>
+                  <a:srgbClr val="CCCCCC"/>
+                </a:solidFill>
+                <a:latin typeface="Consolas"/>
+              </a:rPr>
+              <a:t>        last_wall, last_sim = wall, sim_time</a:t>
+            </a:r>
+          </a:p>
+          <a:p>
+            <a:r>
+              <a:rPr sz="1200">
+                <a:solidFill>
+                  <a:srgbClr val="CCCCCC"/>
+                </a:solidFill>
+                <a:latin typeface="Consolas"/>
+              </a:rPr>
+              <a:t>    print(f"{sim_time:7.2f} {wall:7.2f} {wall - sim_time:+7.3f} {rtf:6.2f}"</a:t>
+            </a:r>
+          </a:p>
+          <a:p>
+            <a:r>
+              <a:rPr sz="1200">
+                <a:solidFill>
+                  <a:srgbClr val="CCCCCC"/>
+                </a:solidFill>
+                <a:latin typeface="Consolas"/>
+              </a:rPr>
+              <a:t>          f" {plant.speed():7.2f}  {driver_inputs.m_steering:6.2f}"</a:t>
+            </a:r>
+          </a:p>
+          <a:p>
+            <a:r>
+              <a:rPr sz="1200">
+                <a:solidFill>
+                  <a:srgbClr val="CCCCCC"/>
+                </a:solidFill>
+                <a:latin typeface="Consolas"/>
+              </a:rPr>
+              <a:t>          f" {driver_inputs.m_throttle:5.2f} {driver_inputs.m_braking:5.2f}"</a:t>
+            </a:r>
+          </a:p>
+          <a:p>
+            <a:r>
+              <a:rPr sz="1200">
+                <a:solidFill>
+                  <a:srgbClr val="CCCCCC"/>
+                </a:solidFill>
+                <a:latin typeface="Consolas"/>
+              </a:rPr>
+              <a:t>          f"  {plant.status()}")</a:t>
+            </a:r>
+          </a:p>
+        </p:txBody>
+      </p:sp>
+      <p:sp>
+        <p:nvSpPr>
+          <p:cNvPr id="4" name="NoteBox"/>
+          <p:cNvSpPr txBox="1"/>
+          <p:nvPr/>
+        </p:nvSpPr>
+        <p:spPr>
+          <a:xfrm>
+            <a:off x="402336" y="4542282"/>
+            <a:ext cx="11393424" cy="1036701"/>
           </a:xfrm>
           <a:prstGeom prst="rect">
             <a:avLst/>
@@ -5246,6 +5515,53 @@
           <a:noFill/>
         </p:spPr>
         <p:txBody>
+          <a:bodyPr wrap="square">
+            <a:spAutoFit/>
+          </a:bodyPr>
+          <a:lstStyle/>
+          <a:p>
+            <a:r>
+              <a:rPr sz="1800"/>
+              <a:t>drift = wall time - simulation time: negative means the sim is ahead of the clock</a:t>
+            </a:r>
+          </a:p>
+          <a:p>
+            <a:r>
+              <a:rPr sz="1600">
+                <a:latin typeface="Consolas"/>
+              </a:rPr>
+              <a:t>vehicle.GetRTF()</a:t>
+            </a:r>
+            <a:r>
+              <a:rPr sz="1800"/>
+              <a:t> is the true RTF of the last step, even when real time is being enforced</a:t>
+            </a:r>
+          </a:p>
+          <a:p>
+            <a:r>
+              <a:rPr sz="1800"/>
+              <a:t>Measure before you fix. Most of Pattern 1 is knowing the number, not enforcing it</a:t>
+            </a:r>
+          </a:p>
+        </p:txBody>
+      </p:sp>
+      <p:sp>
+        <p:nvSpPr>
+          <p:cNvPr id="5" name="Footer"/>
+          <p:cNvSpPr txBox="1"/>
+          <p:nvPr/>
+        </p:nvSpPr>
+        <p:spPr>
+          <a:xfrm>
+            <a:off x="310974" y="6645811"/>
+            <a:ext cx="11644805" cy="188527"/>
+          </a:xfrm>
+          <a:prstGeom prst="rect">
+            <a:avLst/>
+          </a:prstGeom>
+          <a:noFill/>
+        </p:spPr>
+        <p:txBody>
           <a:bodyPr wrap="none">
             <a:spAutoFit/>
           </a:bodyPr>
@@ -5260,7 +5576,7 @@
       </p:sp>
       <p:sp>
         <p:nvSpPr>
-          <p:cNvPr id="5" name="TextBox 4"/>
+          <p:cNvPr id="6" name="PageNo"/>
           <p:cNvSpPr txBox="1"/>
           <p:nvPr/>
         </p:nvSpPr>
@@ -5317,35 +5633,65 @@
         </p:nvSpPr>
         <p:spPr/>
         <p:txBody>
-          <a:bodyPr/>
-          <a:lstStyle/>
-          <a:p>
-            <a:r>
-              <a:t>Part 2: A human on the keyboard</a:t>
-            </a:r>
-          </a:p>
-        </p:txBody>
-      </p:sp>
-      <p:sp>
-        <p:nvSpPr>
-          <p:cNvPr id="3" name="Text Placeholder 2"/>
-          <p:cNvSpPr>
-            <a:spLocks noGrp="1"/>
-          </p:cNvSpPr>
-          <p:nvPr>
-            <p:ph type="body" idx="1"/>
+          <a:bodyPr wrap="square"/>
+          <a:lstStyle/>
+          <a:p>
+            <a:r>
+              <a:rPr sz="2600"/>
+              <a:t>Show Time</a:t>
+            </a:r>
+          </a:p>
+        </p:txBody>
+      </p:sp>
+      <p:sp>
+        <p:nvSpPr>
+          <p:cNvPr id="3" name="Content Placeholder 2"/>
+          <p:cNvSpPr>
+            <a:spLocks noGrp="1"/>
+          </p:cNvSpPr>
+          <p:nvPr>
+            <p:ph idx="1"/>
           </p:nvPr>
         </p:nvSpPr>
         <p:spPr/>
         <p:txBody>
-          <a:bodyPr/>
-          <a:lstStyle/>
-          <a:p/>
-        </p:txBody>
-      </p:sp>
-      <p:sp>
-        <p:nvSpPr>
-          <p:cNvPr id="4" name="TextBox 3"/>
+          <a:bodyPr wrap="square"/>
+          <a:lstStyle/>
+          <a:p>
+            <a:pPr/>
+            <a:r>
+              <a:rPr sz="1800">
+                <a:latin typeface="Consolas"/>
+              </a:rPr>
+              <a:t>REALTIME = "none"</a:t>
+            </a:r>
+            <a:r>
+              <a:rPr sz="2000"/>
+              <a:t>: watch the drift column run away</a:t>
+            </a:r>
+          </a:p>
+          <a:p>
+            <a:pPr/>
+            <a:r>
+              <a:rPr sz="2000"/>
+              <a:t>Change </a:t>
+            </a:r>
+            <a:r>
+              <a:rPr sz="1800">
+                <a:latin typeface="Consolas"/>
+              </a:rPr>
+              <a:t>step_size</a:t>
+            </a:r>
+            <a:r>
+              <a:rPr sz="2000"/>
+              <a:t> to 5e-4 - RTF goes above 1 and the sim can never be real-time, whatever the timer does</a:t>
+            </a:r>
+          </a:p>
+        </p:txBody>
+      </p:sp>
+      <p:sp>
+        <p:nvSpPr>
+          <p:cNvPr id="4" name="Footer"/>
           <p:cNvSpPr txBox="1"/>
           <p:nvPr/>
         </p:nvSpPr>
@@ -5374,7 +5720,7 @@
       </p:sp>
       <p:sp>
         <p:nvSpPr>
-          <p:cNvPr id="5" name="TextBox 4"/>
+          <p:cNvPr id="5" name="PageNo"/>
           <p:cNvSpPr txBox="1"/>
           <p:nvPr/>
         </p:nvSpPr>
@@ -5429,33 +5775,28 @@
             <p:ph type="title"/>
           </p:nvPr>
         </p:nvSpPr>
-        <p:spPr>
-          <a:xfrm>
-            <a:off x="235228" y="150000"/>
-            <a:ext cx="9875520" cy="800000"/>
-          </a:xfrm>
-        </p:spPr>
+        <p:spPr/>
         <p:txBody>
           <a:bodyPr wrap="square"/>
           <a:lstStyle/>
           <a:p>
             <a:r>
               <a:rPr sz="2600"/>
-              <a:t>Step 1: ChInteractiveDriver (Lines 535 to 572)</a:t>
-            </a:r>
-          </a:p>
-        </p:txBody>
-      </p:sp>
-      <p:sp>
-        <p:nvSpPr>
-          <p:cNvPr id="3" name="TextBox 2"/>
+              <a:t>Enforce real time, three ways (Lines 657 to 671, 71 to 88)</a:t>
+            </a:r>
+          </a:p>
+        </p:txBody>
+      </p:sp>
+      <p:sp>
+        <p:nvSpPr>
+          <p:cNvPr id="3" name="CodeBox"/>
           <p:cNvSpPr txBox="1"/>
           <p:nvPr/>
         </p:nvSpPr>
         <p:spPr>
           <a:xfrm>
-            <a:off x="0" y="1050000"/>
-            <a:ext cx="12192000" cy="2580640"/>
+            <a:off x="0" y="1051560"/>
+            <a:ext cx="12191969" cy="4713351"/>
           </a:xfrm>
           <a:prstGeom prst="rect">
             <a:avLst/>
@@ -5471,148 +5812,335 @@
           <a:lstStyle/>
           <a:p>
             <a:r>
-              <a:rPr sz="1300">
-                <a:solidFill>
-                  <a:srgbClr val="CCCCCC"/>
-                </a:solidFill>
-                <a:latin typeface="Consolas"/>
-              </a:rPr>
-              <a:t>elif INPUT_SOURCE == "keyboard":</a:t>
-            </a:r>
-          </a:p>
-          <a:p>
-            <a:r>
-              <a:rPr sz="1300">
-                <a:solidFill>
-                  <a:srgbClr val="CCCCCC"/>
-                </a:solidFill>
-                <a:latin typeface="Consolas"/>
-              </a:rPr>
-              <a:t>    ### PART 2: keyboard through the Irrlicht window ###</a:t>
-            </a:r>
-          </a:p>
-          <a:p>
-            <a:r>
-              <a:rPr sz="1300">
-                <a:solidFill>
-                  <a:srgbClr val="CCCCCC"/>
-                </a:solidFill>
-                <a:latin typeface="Consolas"/>
-              </a:rPr>
-              <a:t>    # W/A/S/D drive, 'C' centers steering, 'R' releases the pedals, 'L' locks</a:t>
-            </a:r>
-          </a:p>
-          <a:p>
-            <a:r>
-              <a:rPr sz="1300">
-                <a:solidFill>
-                  <a:srgbClr val="CCCCCC"/>
-                </a:solidFill>
-                <a:latin typeface="Consolas"/>
-              </a:rPr>
-              <a:t>    # the inputs.  ARROW keys are the chase camera, not driving controls.</a:t>
-            </a:r>
-          </a:p>
-          <a:p>
-            <a:r>
-              <a:rPr sz="1300">
-                <a:solidFill>
-                  <a:srgbClr val="CCCCCC"/>
-                </a:solidFill>
-                <a:latin typeface="Consolas"/>
-              </a:rPr>
-              <a:t>    driver = veh.ChInteractiveDriver(vehicle)</a:t>
-            </a:r>
-          </a:p>
-          <a:p>
-            <a:r>
-              <a:rPr sz="1300">
-                <a:solidFill>
-                  <a:srgbClr val="CCCCCC"/>
-                </a:solidFill>
-                <a:latin typeface="Consolas"/>
-              </a:rPr>
-              <a:t>    steering_time = 1.0  # time to go from 0 to +1 (or from 0 to -1)</a:t>
-            </a:r>
-          </a:p>
-          <a:p>
-            <a:r>
-              <a:rPr sz="1300">
-                <a:solidFill>
-                  <a:srgbClr val="CCCCCC"/>
-                </a:solidFill>
-                <a:latin typeface="Consolas"/>
-              </a:rPr>
-              <a:t>    throttle_time = 1.0  # time to go from 0 to +1</a:t>
-            </a:r>
-          </a:p>
-          <a:p>
-            <a:r>
-              <a:rPr sz="1300">
-                <a:solidFill>
-                  <a:srgbClr val="CCCCCC"/>
-                </a:solidFill>
-                <a:latin typeface="Consolas"/>
-              </a:rPr>
-              <a:t>    braking_time = 0.3   # time to go from 0 to +1</a:t>
-            </a:r>
-          </a:p>
-          <a:p>
-            <a:r>
-              <a:rPr sz="1300">
-                <a:solidFill>
-                  <a:srgbClr val="CCCCCC"/>
-                </a:solidFill>
-                <a:latin typeface="Consolas"/>
-              </a:rPr>
-              <a:t>    driver.SetSteeringDelta(render_step_size / steering_time)</a:t>
-            </a:r>
-          </a:p>
-          <a:p>
-            <a:r>
-              <a:rPr sz="1300">
-                <a:solidFill>
-                  <a:srgbClr val="CCCCCC"/>
-                </a:solidFill>
-                <a:latin typeface="Consolas"/>
-              </a:rPr>
-              <a:t>    driver.SetThrottleDelta(render_step_size / throttle_time)</a:t>
-            </a:r>
-          </a:p>
-          <a:p>
-            <a:r>
-              <a:rPr sz="1300">
-                <a:solidFill>
-                  <a:srgbClr val="CCCCCC"/>
-                </a:solidFill>
-                <a:latin typeface="Consolas"/>
-              </a:rPr>
-              <a:t>    driver.SetBrakingDelta(render_step_size / braking_time)</a:t>
-            </a:r>
-          </a:p>
-          <a:p>
-            <a:r>
-              <a:rPr sz="1300">
-                <a:solidFill>
-                  <a:srgbClr val="CCCCCC"/>
-                </a:solidFill>
-                <a:latin typeface="Consolas"/>
-              </a:rPr>
-              <a:t>    driver.SetGains(4.0, 4.0, 4.0)  # first-order lag from key target to applied input</a:t>
-            </a:r>
-          </a:p>
-        </p:txBody>
-      </p:sp>
-      <p:sp>
-        <p:nvSpPr>
-          <p:cNvPr id="4" name="TextBox 3"/>
+              <a:rPr sz="1000">
+                <a:solidFill>
+                  <a:srgbClr val="CCCCCC"/>
+                </a:solidFill>
+                <a:latin typeface="Consolas"/>
+              </a:rPr>
+              <a:t># Real-time setup (PART 1)</a:t>
+            </a:r>
+          </a:p>
+          <a:p>
+            <a:r>
+              <a:rPr sz="1000">
+                <a:solidFill>
+                  <a:srgbClr val="CCCCCC"/>
+                </a:solidFill>
+                <a:latin typeface="Consolas"/>
+              </a:rPr>
+              <a:t>realtime_mode = REALTIME</a:t>
+            </a:r>
+          </a:p>
+          <a:p>
+            <a:r>
+              <a:rPr sz="1000">
+                <a:solidFill>
+                  <a:srgbClr val="CCCCCC"/>
+                </a:solidFill>
+                <a:latin typeface="Consolas"/>
+              </a:rPr>
+              <a:t>if REALTIME == "vehicle":</a:t>
+            </a:r>
+          </a:p>
+          <a:p>
+            <a:r>
+              <a:rPr sz="1000">
+                <a:solidFill>
+                  <a:srgbClr val="CCCCCC"/>
+                </a:solidFill>
+                <a:latin typeface="Consolas"/>
+              </a:rPr>
+              <a:t>    if vehicle:</a:t>
+            </a:r>
+          </a:p>
+          <a:p>
+            <a:r>
+              <a:rPr sz="1000">
+                <a:solidFill>
+                  <a:srgbClr val="CCCCCC"/>
+                </a:solidFill>
+                <a:latin typeface="Consolas"/>
+              </a:rPr>
+              <a:t>        vehicle.EnableRealtime(True)</a:t>
+            </a:r>
+          </a:p>
+          <a:p>
+            <a:r>
+              <a:rPr sz="1000">
+                <a:solidFill>
+                  <a:srgbClr val="CCCCCC"/>
+                </a:solidFill>
+                <a:latin typeface="Consolas"/>
+              </a:rPr>
+              <a:t>    else:</a:t>
+            </a:r>
+          </a:p>
+          <a:p>
+            <a:r>
+              <a:rPr sz="1000">
+                <a:solidFill>
+                  <a:srgbClr val="CCCCCC"/>
+                </a:solidFill>
+                <a:latin typeface="Consolas"/>
+              </a:rPr>
+              <a:t>        # PART 8: there is no vehicle to do the spinning, so fall back to</a:t>
+            </a:r>
+          </a:p>
+          <a:p>
+            <a:r>
+              <a:rPr sz="1000">
+                <a:solidFill>
+                  <a:srgbClr val="CCCCCC"/>
+                </a:solidFill>
+                <a:latin typeface="Consolas"/>
+              </a:rPr>
+              <a:t>        # the timer that does the same thing from outside.</a:t>
+            </a:r>
+          </a:p>
+          <a:p>
+            <a:r>
+              <a:rPr sz="1000">
+                <a:solidFill>
+                  <a:srgbClr val="CCCCCC"/>
+                </a:solidFill>
+                <a:latin typeface="Consolas"/>
+              </a:rPr>
+              <a:t>        realtime_mode = "per_step"</a:t>
+            </a:r>
+          </a:p>
+          <a:p>
+            <a:r>
+              <a:rPr sz="1000">
+                <a:solidFill>
+                  <a:srgbClr val="CCCCCC"/>
+                </a:solidFill>
+                <a:latin typeface="Consolas"/>
+              </a:rPr>
+              <a:t>rt_timer = chrono.ChRealtimeStepTimer()  # used when REALTIME == "per_step"</a:t>
+            </a:r>
+          </a:p>
+          <a:p>
+            <a:r>
+              <a:rPr sz="1000">
+                <a:solidFill>
+                  <a:srgbClr val="CCCCCC"/>
+                </a:solidFill>
+                <a:latin typeface="Consolas"/>
+              </a:rPr>
+              <a:t>cum_timer = CumulativeRealtimeTimer()    # used when REALTIME == "cumulative"</a:t>
+            </a:r>
+          </a:p>
+          <a:p>
+            <a:r>
+              <a:rPr sz="1000">
+                <a:solidFill>
+                  <a:srgbClr val="CCCCCC"/>
+                </a:solidFill>
+                <a:latin typeface="Consolas"/>
+              </a:rPr>
+              <a:t/>
+            </a:r>
+          </a:p>
+          <a:p>
+            <a:r>
+              <a:rPr sz="1000">
+                <a:solidFill>
+                  <a:srgbClr val="CCCCCC"/>
+                </a:solidFill>
+                <a:latin typeface="Consolas"/>
+              </a:rPr>
+              <a:t># ... and the third option, defined at the top of the file:</a:t>
+            </a:r>
+          </a:p>
+          <a:p>
+            <a:r>
+              <a:rPr sz="1000">
+                <a:solidFill>
+                  <a:srgbClr val="CCCCCC"/>
+                </a:solidFill>
+                <a:latin typeface="Consolas"/>
+              </a:rPr>
+              <a:t/>
+            </a:r>
+          </a:p>
+          <a:p>
+            <a:r>
+              <a:rPr sz="1000">
+                <a:solidFill>
+                  <a:srgbClr val="CCCCCC"/>
+                </a:solidFill>
+                <a:latin typeface="Consolas"/>
+              </a:rPr>
+              <a:t>class CumulativeRealtimeTimer:</a:t>
+            </a:r>
+          </a:p>
+          <a:p>
+            <a:r>
+              <a:rPr sz="1000">
+                <a:solidFill>
+                  <a:srgbClr val="CCCCCC"/>
+                </a:solidFill>
+                <a:latin typeface="Consolas"/>
+              </a:rPr>
+              <a:t>    """Soft real-time that does not accumulate drift.</a:t>
+            </a:r>
+          </a:p>
+          <a:p>
+            <a:r>
+              <a:rPr sz="1000">
+                <a:solidFill>
+                  <a:srgbClr val="CCCCCC"/>
+                </a:solidFill>
+                <a:latin typeface="Consolas"/>
+              </a:rPr>
+              <a:t/>
+            </a:r>
+          </a:p>
+          <a:p>
+            <a:r>
+              <a:rPr sz="1000">
+                <a:solidFill>
+                  <a:srgbClr val="CCCCCC"/>
+                </a:solidFill>
+                <a:latin typeface="Consolas"/>
+              </a:rPr>
+              <a:t>    ChRealtimeStepTimer measures each step independently: any time lost on a</a:t>
+            </a:r>
+          </a:p>
+          <a:p>
+            <a:r>
+              <a:rPr sz="1000">
+                <a:solidFill>
+                  <a:srgbClr val="CCCCCC"/>
+                </a:solidFill>
+                <a:latin typeface="Consolas"/>
+              </a:rPr>
+              <a:t>    slow step (or spent in Python between steps) is never recovered.  This timer</a:t>
+            </a:r>
+          </a:p>
+          <a:p>
+            <a:r>
+              <a:rPr sz="1000">
+                <a:solidFill>
+                  <a:srgbClr val="CCCCCC"/>
+                </a:solidFill>
+                <a:latin typeface="Consolas"/>
+              </a:rPr>
+              <a:t>    instead compares the *total* simulated time with the *total* wall time, so a</a:t>
+            </a:r>
+          </a:p>
+          <a:p>
+            <a:r>
+              <a:rPr sz="1000">
+                <a:solidFill>
+                  <a:srgbClr val="CCCCCC"/>
+                </a:solidFill>
+                <a:latin typeface="Consolas"/>
+              </a:rPr>
+              <a:t>    slow step is followed by a few fast steps that catch back up.</a:t>
+            </a:r>
+          </a:p>
+          <a:p>
+            <a:r>
+              <a:rPr sz="1000">
+                <a:solidFill>
+                  <a:srgbClr val="CCCCCC"/>
+                </a:solidFill>
+                <a:latin typeface="Consolas"/>
+              </a:rPr>
+              <a:t>    """</a:t>
+            </a:r>
+          </a:p>
+          <a:p>
+            <a:r>
+              <a:rPr sz="1000">
+                <a:solidFill>
+                  <a:srgbClr val="CCCCCC"/>
+                </a:solidFill>
+                <a:latin typeface="Consolas"/>
+              </a:rPr>
+              <a:t/>
+            </a:r>
+          </a:p>
+          <a:p>
+            <a:r>
+              <a:rPr sz="1000">
+                <a:solidFill>
+                  <a:srgbClr val="CCCCCC"/>
+                </a:solidFill>
+                <a:latin typeface="Consolas"/>
+              </a:rPr>
+              <a:t>    def reset(self):</a:t>
+            </a:r>
+          </a:p>
+          <a:p>
+            <a:r>
+              <a:rPr sz="1000">
+                <a:solidFill>
+                  <a:srgbClr val="CCCCCC"/>
+                </a:solidFill>
+                <a:latin typeface="Consolas"/>
+              </a:rPr>
+              <a:t>        self.t_start = time.perf_counter()</a:t>
+            </a:r>
+          </a:p>
+          <a:p>
+            <a:r>
+              <a:rPr sz="1000">
+                <a:solidFill>
+                  <a:srgbClr val="CCCCCC"/>
+                </a:solidFill>
+                <a:latin typeface="Consolas"/>
+              </a:rPr>
+              <a:t/>
+            </a:r>
+          </a:p>
+          <a:p>
+            <a:r>
+              <a:rPr sz="1000">
+                <a:solidFill>
+                  <a:srgbClr val="CCCCCC"/>
+                </a:solidFill>
+                <a:latin typeface="Consolas"/>
+              </a:rPr>
+              <a:t>    def spin(self, sim_time):</a:t>
+            </a:r>
+          </a:p>
+          <a:p>
+            <a:r>
+              <a:rPr sz="1000">
+                <a:solidFill>
+                  <a:srgbClr val="CCCCCC"/>
+                </a:solidFill>
+                <a:latin typeface="Consolas"/>
+              </a:rPr>
+              <a:t>        while time.perf_counter() - self.t_start &lt; sim_time:</a:t>
+            </a:r>
+          </a:p>
+          <a:p>
+            <a:r>
+              <a:rPr sz="1000">
+                <a:solidFill>
+                  <a:srgbClr val="CCCCCC"/>
+                </a:solidFill>
+                <a:latin typeface="Consolas"/>
+              </a:rPr>
+              <a:t>            pass  # spin in place until real time catches up</a:t>
+            </a:r>
+          </a:p>
+        </p:txBody>
+      </p:sp>
+      <p:sp>
+        <p:nvSpPr>
+          <p:cNvPr id="4" name="NoteBox"/>
           <p:cNvSpPr txBox="1"/>
           <p:nvPr/>
         </p:nvSpPr>
         <p:spPr>
           <a:xfrm>
-            <a:off x="400000" y="3730640"/>
-            <a:ext cx="11392000" cy="2727360"/>
+            <a:off x="402336" y="5902071"/>
+            <a:ext cx="11393424" cy="688848"/>
           </a:xfrm>
           <a:prstGeom prst="rect">
             <a:avLst/>
@@ -5625,31 +6153,32 @@
           </a:bodyPr>
           <a:lstStyle/>
           <a:p>
-            <a:pPr/>
-            <a:r>
-              <a:rPr sz="1800"/>
-              <a:t>W/A/S/D drive, C centers steering, R releases the pedals, L locks the inputs (arrows are the chase camera)</a:t>
-            </a:r>
-          </a:p>
-          <a:p>
-            <a:pPr/>
-            <a:r>
-              <a:rPr sz="1800"/>
-              <a:t>Each keypress moves a TARGET by "delta"; the applied input follows the target with a first-order lag (SetGains)</a:t>
-            </a:r>
-          </a:p>
-          <a:p>
-            <a:pPr/>
-            <a:r>
-              <a:rPr sz="1800"/>
-              <a:t>delta = render_step / time-to-full-scale: full steering lock takes 1 s, full braking 0.3 s</a:t>
-            </a:r>
-          </a:p>
-        </p:txBody>
-      </p:sp>
-      <p:sp>
-        <p:nvSpPr>
-          <p:cNvPr id="5" name="TextBox 4"/>
+            <a:r>
+              <a:rPr sz="1600"/>
+              <a:t>"vehicle" spins inside </a:t>
+            </a:r>
+            <a:r>
+              <a:rPr sz="1400">
+                <a:latin typeface="Consolas"/>
+              </a:rPr>
+              <a:t>vehicle.Advance()</a:t>
+            </a:r>
+            <a:r>
+              <a:rPr sz="1600"/>
+              <a:t>; "per_step" is the same timer called explicitly; "cumulative" is ours</a:t>
+            </a:r>
+          </a:p>
+          <a:p>
+            <a:r>
+              <a:rPr sz="1600"/>
+              <a:t>Per-step timers never recover time lost on a slow step. Comparing TOTAL sim time to TOTAL wall time does</a:t>
+            </a:r>
+          </a:p>
+        </p:txBody>
+      </p:sp>
+      <p:sp>
+        <p:nvSpPr>
+          <p:cNvPr id="5" name="Footer"/>
           <p:cNvSpPr txBox="1"/>
           <p:nvPr/>
         </p:nvSpPr>
@@ -5678,7 +6207,7 @@
       </p:sp>
       <p:sp>
         <p:nvSpPr>
-          <p:cNvPr id="6" name="TextBox 5"/>
+          <p:cNvPr id="6" name="PageNo"/>
           <p:cNvSpPr txBox="1"/>
           <p:nvPr/>
         </p:nvSpPr>
@@ -5733,102 +6262,86 @@
             <p:ph type="title"/>
           </p:nvPr>
         </p:nvSpPr>
-        <p:spPr>
-          <a:xfrm>
-            <a:off x="235228" y="150000"/>
-            <a:ext cx="9875520" cy="800000"/>
-          </a:xfrm>
-        </p:spPr>
+        <p:spPr/>
         <p:txBody>
           <a:bodyPr wrap="square"/>
           <a:lstStyle/>
           <a:p>
             <a:r>
               <a:rPr sz="2600"/>
-              <a:t>Step 2: Route the window events to the driver (Lines 615 to 618)</a:t>
-            </a:r>
-          </a:p>
-        </p:txBody>
-      </p:sp>
-      <p:sp>
-        <p:nvSpPr>
-          <p:cNvPr id="3" name="TextBox 2"/>
+              <a:t>Show Time</a:t>
+            </a:r>
+          </a:p>
+        </p:txBody>
+      </p:sp>
+      <p:sp>
+        <p:nvSpPr>
+          <p:cNvPr id="3" name="Content Placeholder 2"/>
+          <p:cNvSpPr>
+            <a:spLocks noGrp="1"/>
+          </p:cNvSpPr>
+          <p:nvPr>
+            <p:ph idx="1"/>
+          </p:nvPr>
+        </p:nvSpPr>
+        <p:spPr/>
+        <p:txBody>
+          <a:bodyPr wrap="square"/>
+          <a:lstStyle/>
+          <a:p>
+            <a:pPr/>
+            <a:r>
+              <a:rPr sz="2000"/>
+              <a:t>Measured on a laptop, HMMWV + TMeasy tires, step 3 ms (RTF ~ 0.14):</a:t>
+            </a:r>
+          </a:p>
+          <a:p>
+            <a:pPr lvl="1"/>
+            <a:r>
+              <a:rPr sz="1800"/>
+              <a:t>"none": drift -69 s after 17 s of wall time</a:t>
+            </a:r>
+          </a:p>
+          <a:p>
+            <a:pPr lvl="1"/>
+            <a:r>
+              <a:rPr sz="1800"/>
+              <a:t>"per_step": drift +0.012 s after 17 s and growing</a:t>
+            </a:r>
+          </a:p>
+          <a:p>
+            <a:pPr lvl="1"/>
+            <a:r>
+              <a:rPr sz="1800"/>
+              <a:t>"vehicle": drift +0.021 s after 17 s and growing</a:t>
+            </a:r>
+          </a:p>
+          <a:p>
+            <a:pPr lvl="1"/>
+            <a:r>
+              <a:rPr sz="1800"/>
+              <a:t>"cumulative": drift +0.000 s</a:t>
+            </a:r>
+          </a:p>
+          <a:p>
+            <a:pPr/>
+            <a:r>
+              <a:rPr sz="2000"/>
+              <a:t>Drift matters more the closer you are to RTF = 1</a:t>
+            </a:r>
+          </a:p>
+        </p:txBody>
+      </p:sp>
+      <p:sp>
+        <p:nvSpPr>
+          <p:cNvPr id="4" name="Footer"/>
           <p:cNvSpPr txBox="1"/>
           <p:nvPr/>
         </p:nvSpPr>
         <p:spPr>
           <a:xfrm>
-            <a:off x="0" y="1050000"/>
-            <a:ext cx="12192000" cy="1270000"/>
-          </a:xfrm>
-          <a:prstGeom prst="rect">
-            <a:avLst/>
-          </a:prstGeom>
-          <a:solidFill>
-            <a:srgbClr val="000000"/>
-          </a:solidFill>
-        </p:spPr>
-        <p:txBody>
-          <a:bodyPr wrap="none" lIns="300000" rIns="300000">
-            <a:noAutofit/>
-          </a:bodyPr>
-          <a:lstStyle/>
-          <a:p>
-            <a:r>
-              <a:rPr sz="1000">
-                <a:solidFill>
-                  <a:srgbClr val="CCCCCC"/>
-                </a:solidFill>
-                <a:latin typeface="Consolas"/>
-              </a:rPr>
-              <a:t>vis.AddSkyBox()</a:t>
-            </a:r>
-          </a:p>
-          <a:p>
-            <a:r>
-              <a:rPr sz="1000">
-                <a:solidFill>
-                  <a:srgbClr val="CCCCCC"/>
-                </a:solidFill>
-                <a:latin typeface="Consolas"/>
-              </a:rPr>
-              <a:t>plant.attach(vis)</a:t>
-            </a:r>
-          </a:p>
-          <a:p>
-            <a:r>
-              <a:rPr sz="1000">
-                <a:solidFill>
-                  <a:srgbClr val="CCCCCC"/>
-                </a:solidFill>
-                <a:latin typeface="Consolas"/>
-              </a:rPr>
-              <a:t>if INPUT_SOURCE in ("keyboard", "gamepad"):</a:t>
-            </a:r>
-          </a:p>
-          <a:p>
-            <a:r>
-              <a:rPr sz="1000">
-                <a:solidFill>
-                  <a:srgbClr val="CCCCCC"/>
-                </a:solidFill>
-                <a:latin typeface="Consolas"/>
-              </a:rPr>
-              <a:t>    vis.AttachDriver(driver)  # route Irrlicht key/joystick events to the driver</a:t>
-            </a:r>
-          </a:p>
-        </p:txBody>
-      </p:sp>
-      <p:sp>
-        <p:nvSpPr>
-          <p:cNvPr id="4" name="TextBox 3"/>
-          <p:cNvSpPr txBox="1"/>
-          <p:nvPr/>
-        </p:nvSpPr>
-        <p:spPr>
-          <a:xfrm>
-            <a:off x="400000" y="2423160"/>
-            <a:ext cx="11392000" cy="1325880"/>
+            <a:off x="310974" y="6645811"/>
+            <a:ext cx="11644805" cy="188527"/>
           </a:xfrm>
           <a:prstGeom prst="rect">
             <a:avLst/>
@@ -5836,54 +6349,6 @@
           <a:noFill/>
         </p:spPr>
         <p:txBody>
-          <a:bodyPr wrap="square">
-            <a:spAutoFit/>
-          </a:bodyPr>
-          <a:lstStyle/>
-          <a:p>
-            <a:pPr/>
-            <a:r>
-              <a:rPr sz="1800"/>
-              <a:t>The Irrlicht visual system owns the keyboard; AttachDriver forwards key events to the driver</a:t>
-            </a:r>
-          </a:p>
-          <a:p>
-            <a:r>
-              <a:rPr sz="1800"/>
-              <a:t>Nothing else in the loop changes - the driver still just returns three floats</a:t>
-            </a:r>
-          </a:p>
-          <a:p>
-            <a:r>
-              <a:rPr sz="1800"/>
-              <a:t>The same driver reads a gamepad or wheel natively - SetInputMode(JOYSTICK), presets ship with Chrono</a:t>
-            </a:r>
-          </a:p>
-          <a:p>
-            <a:r>
-              <a:rPr sz="1800"/>
-              <a:t>PART 6: this one call also binds Chrono's own gear keys - Z, X, T, [ and ] - without a line of your code</a:t>
-            </a:r>
-          </a:p>
-        </p:txBody>
-      </p:sp>
-      <p:sp>
-        <p:nvSpPr>
-          <p:cNvPr id="5" name="TextBox 4"/>
-          <p:cNvSpPr txBox="1"/>
-          <p:nvPr/>
-        </p:nvSpPr>
-        <p:spPr>
-          <a:xfrm>
-            <a:off x="310974" y="6645811"/>
-            <a:ext cx="11644805" cy="188527"/>
-          </a:xfrm>
-          <a:prstGeom prst="rect">
-            <a:avLst/>
-          </a:prstGeom>
-          <a:noFill/>
-        </p:spPr>
-        <p:txBody>
           <a:bodyPr wrap="none">
             <a:spAutoFit/>
           </a:bodyPr>
@@ -5898,7 +6363,7 @@
       </p:sp>
       <p:sp>
         <p:nvSpPr>
-          <p:cNvPr id="6" name="TextBox 5"/>
+          <p:cNvPr id="5" name="PageNo"/>
           <p:cNvSpPr txBox="1"/>
           <p:nvPr/>
         </p:nvSpPr>
@@ -5953,49 +6418,37 @@
             <p:ph type="title"/>
           </p:nvPr>
         </p:nvSpPr>
-        <p:spPr>
-          <a:xfrm>
-            <a:off x="235228" y="150000"/>
-            <a:ext cx="9875520" cy="800000"/>
-          </a:xfrm>
-        </p:spPr>
+        <p:spPr/>
         <p:txBody>
           <a:bodyPr wrap="square"/>
           <a:lstStyle/>
           <a:p>
             <a:r>
-              <a:rPr sz="2600"/>
-              <a:t>Show Time</a:t>
-            </a:r>
-          </a:p>
-        </p:txBody>
-      </p:sp>
-      <p:sp>
-        <p:nvSpPr>
-          <p:cNvPr id="3" name="Content Placeholder 2"/>
-          <p:cNvSpPr>
-            <a:spLocks noGrp="1"/>
-          </p:cNvSpPr>
-          <p:nvPr>
-            <p:ph idx="1"/>
+              <a:t>The easy case: a human on the keyboard</a:t>
+            </a:r>
+          </a:p>
+        </p:txBody>
+      </p:sp>
+      <p:sp>
+        <p:nvSpPr>
+          <p:cNvPr id="3" name="Text Placeholder 2"/>
+          <p:cNvSpPr>
+            <a:spLocks noGrp="1"/>
+          </p:cNvSpPr>
+          <p:nvPr>
+            <p:ph type="body" idx="1"/>
           </p:nvPr>
         </p:nvSpPr>
         <p:spPr/>
         <p:txBody>
-          <a:bodyPr wrap="square"/>
-          <a:lstStyle/>
-          <a:p>
-            <a:pPr/>
-            <a:r>
-              <a:rPr sz="2000"/>
-              <a:t>Driving the HMMWV with W/A/S/D - watch the Irrlicht HUD (speed, inputs, RTF)</a:t>
-            </a:r>
-          </a:p>
-        </p:txBody>
-      </p:sp>
-      <p:sp>
-        <p:nvSpPr>
-          <p:cNvPr id="4" name="TextBox 3"/>
+          <a:bodyPr/>
+          <a:lstStyle/>
+          <a:p/>
+        </p:txBody>
+      </p:sp>
+      <p:sp>
+        <p:nvSpPr>
+          <p:cNvPr id="4" name="Footer"/>
           <p:cNvSpPr txBox="1"/>
           <p:nvPr/>
         </p:nvSpPr>
@@ -6024,7 +6477,7 @@
       </p:sp>
       <p:sp>
         <p:nvSpPr>
-          <p:cNvPr id="5" name="TextBox 4"/>
+          <p:cNvPr id="5" name="PageNo"/>
           <p:cNvSpPr txBox="1"/>
           <p:nvPr/>
         </p:nvSpPr>
@@ -6081,46 +6534,315 @@
         </p:nvSpPr>
         <p:spPr/>
         <p:txBody>
-          <a:bodyPr/>
-          <a:lstStyle/>
-          <a:p>
-            <a:r>
-              <a:t>Part 4: A device Chrono doesn't know about, and closing the loop</a:t>
-            </a:r>
-          </a:p>
-        </p:txBody>
-      </p:sp>
-      <p:sp>
-        <p:nvSpPr>
-          <p:cNvPr id="3" name="Text Placeholder 2"/>
-          <p:cNvSpPr>
-            <a:spLocks noGrp="1"/>
-          </p:cNvSpPr>
-          <p:nvPr>
-            <p:ph type="body" idx="1"/>
-          </p:nvPr>
-        </p:nvSpPr>
-        <p:spPr/>
-        <p:txBody>
-          <a:bodyPr/>
-          <a:lstStyle/>
-          <a:p>
-            <a:r>
-              <a:t>a UDP console, a gamepad, a steering wheel, a phone, another process...</a:t>
-            </a:r>
-          </a:p>
-        </p:txBody>
-      </p:sp>
-      <p:sp>
-        <p:nvSpPr>
-          <p:cNvPr id="4" name="TextBox 3"/>
+          <a:bodyPr wrap="square"/>
+          <a:lstStyle/>
+          <a:p>
+            <a:r>
+              <a:rPr sz="2600"/>
+              <a:t>ChInteractiveDriver, and routing events (Lines 535 to 572, 615 to 618)</a:t>
+            </a:r>
+          </a:p>
+        </p:txBody>
+      </p:sp>
+      <p:sp>
+        <p:nvSpPr>
+          <p:cNvPr id="3" name="CodeBox"/>
           <p:cNvSpPr txBox="1"/>
           <p:nvPr/>
         </p:nvSpPr>
         <p:spPr>
           <a:xfrm>
-            <a:off x="310974" y="6645811"/>
-            <a:ext cx="11644805" cy="188527"/>
+            <a:off x="0" y="1051560"/>
+            <a:ext cx="12191969" cy="4315968"/>
+          </a:xfrm>
+          <a:prstGeom prst="rect">
+            <a:avLst/>
+          </a:prstGeom>
+          <a:solidFill>
+            <a:srgbClr val="000000"/>
+          </a:solidFill>
+        </p:spPr>
+        <p:txBody>
+          <a:bodyPr wrap="none" lIns="300000" rIns="300000">
+            <a:noAutofit/>
+          </a:bodyPr>
+          <a:lstStyle/>
+          <a:p>
+            <a:r>
+              <a:rPr sz="1100">
+                <a:solidFill>
+                  <a:srgbClr val="CCCCCC"/>
+                </a:solidFill>
+                <a:latin typeface="Consolas"/>
+              </a:rPr>
+              <a:t>elif INPUT_SOURCE == "keyboard":</a:t>
+            </a:r>
+          </a:p>
+          <a:p>
+            <a:r>
+              <a:rPr sz="1100">
+                <a:solidFill>
+                  <a:srgbClr val="CCCCCC"/>
+                </a:solidFill>
+                <a:latin typeface="Consolas"/>
+              </a:rPr>
+              <a:t>    ### PART 2: keyboard through the Irrlicht window ###</a:t>
+            </a:r>
+          </a:p>
+          <a:p>
+            <a:r>
+              <a:rPr sz="1100">
+                <a:solidFill>
+                  <a:srgbClr val="CCCCCC"/>
+                </a:solidFill>
+                <a:latin typeface="Consolas"/>
+              </a:rPr>
+              <a:t>    # W/A/S/D drive, 'C' centers steering, 'R' releases the pedals, 'L' locks</a:t>
+            </a:r>
+          </a:p>
+          <a:p>
+            <a:r>
+              <a:rPr sz="1100">
+                <a:solidFill>
+                  <a:srgbClr val="CCCCCC"/>
+                </a:solidFill>
+                <a:latin typeface="Consolas"/>
+              </a:rPr>
+              <a:t>    # the inputs.  ARROW keys are the chase camera, not driving controls.</a:t>
+            </a:r>
+          </a:p>
+          <a:p>
+            <a:r>
+              <a:rPr sz="1100">
+                <a:solidFill>
+                  <a:srgbClr val="CCCCCC"/>
+                </a:solidFill>
+                <a:latin typeface="Consolas"/>
+              </a:rPr>
+              <a:t>    driver = veh.ChInteractiveDriver(vehicle)</a:t>
+            </a:r>
+          </a:p>
+          <a:p>
+            <a:r>
+              <a:rPr sz="1100">
+                <a:solidFill>
+                  <a:srgbClr val="CCCCCC"/>
+                </a:solidFill>
+                <a:latin typeface="Consolas"/>
+              </a:rPr>
+              <a:t>    driver.SetGains(4.0, 4.0, 4.0)  # first-order lag from key target to applied input</a:t>
+            </a:r>
+          </a:p>
+          <a:p>
+            <a:r>
+              <a:rPr sz="1100">
+                <a:solidFill>
+                  <a:srgbClr val="CCCCCC"/>
+                </a:solidFill>
+                <a:latin typeface="Consolas"/>
+              </a:rPr>
+              <a:t/>
+            </a:r>
+          </a:p>
+          <a:p>
+            <a:r>
+              <a:rPr sz="1100">
+                <a:solidFill>
+                  <a:srgbClr val="CCCCCC"/>
+                </a:solidFill>
+                <a:latin typeface="Consolas"/>
+              </a:rPr>
+              <a:t>    # What does a keypress MEAN?  The same question PART 4 answers for its own</a:t>
+            </a:r>
+          </a:p>
+          <a:p>
+            <a:r>
+              <a:rPr sz="1100">
+                <a:solidFill>
+                  <a:srgbClr val="CCCCCC"/>
+                </a:solidFill>
+                <a:latin typeface="Consolas"/>
+              </a:rPr>
+              <a:t>    # device.  "cumulative" nudges a target by a delta and leaves it there;</a:t>
+            </a:r>
+          </a:p>
+          <a:p>
+            <a:r>
+              <a:rPr sz="1100">
+                <a:solidFill>
+                  <a:srgbClr val="CCCCCC"/>
+                </a:solidFill>
+                <a:latin typeface="Consolas"/>
+              </a:rPr>
+              <a:t>    # "held" follows the keys held down and ramps back on release - which is</a:t>
+            </a:r>
+          </a:p>
+          <a:p>
+            <a:r>
+              <a:rPr sz="1100">
+                <a:solidFill>
+                  <a:srgbClr val="CCCCCC"/>
+                </a:solidFill>
+                <a:latin typeface="Consolas"/>
+              </a:rPr>
+              <a:t>    # the model operator_console.py already uses over UDP.</a:t>
+            </a:r>
+          </a:p>
+          <a:p>
+            <a:r>
+              <a:rPr sz="1100">
+                <a:solidFill>
+                  <a:srgbClr val="CCCCCC"/>
+                </a:solidFill>
+                <a:latin typeface="Consolas"/>
+              </a:rPr>
+              <a:t>    if KEYBOARD_MODE == "held":</a:t>
+            </a:r>
+          </a:p>
+          <a:p>
+            <a:r>
+              <a:rPr sz="1100">
+                <a:solidFill>
+                  <a:srgbClr val="CCCCCC"/>
+                </a:solidFill>
+                <a:latin typeface="Consolas"/>
+              </a:rPr>
+              <a:t>        if hasattr(veh.ChInteractiveDriver, "KeyboardMode_HELD"):</a:t>
+            </a:r>
+          </a:p>
+          <a:p>
+            <a:r>
+              <a:rPr sz="1100">
+                <a:solidFill>
+                  <a:srgbClr val="CCCCCC"/>
+                </a:solidFill>
+                <a:latin typeface="Consolas"/>
+              </a:rPr>
+              <a:t>            driver.SetKeyboardMode(veh.ChInteractiveDriver.KeyboardMode_HELD)</a:t>
+            </a:r>
+          </a:p>
+          <a:p>
+            <a:r>
+              <a:rPr sz="1100">
+                <a:solidFill>
+                  <a:srgbClr val="CCCCCC"/>
+                </a:solidFill>
+                <a:latin typeface="Consolas"/>
+              </a:rPr>
+              <a:t/>
+            </a:r>
+          </a:p>
+          <a:p>
+            <a:r>
+              <a:rPr sz="1100">
+                <a:solidFill>
+                  <a:srgbClr val="CCCCCC"/>
+                </a:solidFill>
+                <a:latin typeface="Consolas"/>
+              </a:rPr>
+              <a:t>    driver.SetSteeringDelta(render_step_size / steering_time)   # "cumulative" only</a:t>
+            </a:r>
+          </a:p>
+          <a:p>
+            <a:r>
+              <a:rPr sz="1100">
+                <a:solidFill>
+                  <a:srgbClr val="CCCCCC"/>
+                </a:solidFill>
+                <a:latin typeface="Consolas"/>
+              </a:rPr>
+              <a:t>    driver.SetThrottleDelta(render_step_size / throttle_time)</a:t>
+            </a:r>
+          </a:p>
+          <a:p>
+            <a:r>
+              <a:rPr sz="1100">
+                <a:solidFill>
+                  <a:srgbClr val="CCCCCC"/>
+                </a:solidFill>
+                <a:latin typeface="Consolas"/>
+              </a:rPr>
+              <a:t>    driver.SetBrakingDelta(render_step_size / braking_time)</a:t>
+            </a:r>
+          </a:p>
+          <a:p>
+            <a:r>
+              <a:rPr sz="1100">
+                <a:solidFill>
+                  <a:srgbClr val="CCCCCC"/>
+                </a:solidFill>
+                <a:latin typeface="Consolas"/>
+              </a:rPr>
+              <a:t/>
+            </a:r>
+          </a:p>
+          <a:p>
+            <a:r>
+              <a:rPr sz="1100">
+                <a:solidFill>
+                  <a:srgbClr val="CCCCCC"/>
+                </a:solidFill>
+                <a:latin typeface="Consolas"/>
+              </a:rPr>
+              <a:t># ... and then, when the Irrlicht window is built:</a:t>
+            </a:r>
+          </a:p>
+          <a:p>
+            <a:r>
+              <a:rPr sz="1100">
+                <a:solidFill>
+                  <a:srgbClr val="CCCCCC"/>
+                </a:solidFill>
+                <a:latin typeface="Consolas"/>
+              </a:rPr>
+              <a:t>vis.AddSkyBox()</a:t>
+            </a:r>
+          </a:p>
+          <a:p>
+            <a:r>
+              <a:rPr sz="1100">
+                <a:solidFill>
+                  <a:srgbClr val="CCCCCC"/>
+                </a:solidFill>
+                <a:latin typeface="Consolas"/>
+              </a:rPr>
+              <a:t>plant.attach(vis)</a:t>
+            </a:r>
+          </a:p>
+          <a:p>
+            <a:r>
+              <a:rPr sz="1100">
+                <a:solidFill>
+                  <a:srgbClr val="CCCCCC"/>
+                </a:solidFill>
+                <a:latin typeface="Consolas"/>
+              </a:rPr>
+              <a:t>if INPUT_SOURCE in ("keyboard", "gamepad"):</a:t>
+            </a:r>
+          </a:p>
+          <a:p>
+            <a:r>
+              <a:rPr sz="1100">
+                <a:solidFill>
+                  <a:srgbClr val="CCCCCC"/>
+                </a:solidFill>
+                <a:latin typeface="Consolas"/>
+              </a:rPr>
+              <a:t>    vis.AttachDriver(driver)  # route Irrlicht key/joystick events to the driver</a:t>
+            </a:r>
+          </a:p>
+        </p:txBody>
+      </p:sp>
+      <p:sp>
+        <p:nvSpPr>
+          <p:cNvPr id="4" name="NoteBox"/>
+          <p:cNvSpPr txBox="1"/>
+          <p:nvPr/>
+        </p:nvSpPr>
+        <p:spPr>
+          <a:xfrm>
+            <a:off x="402336" y="5440680"/>
+            <a:ext cx="11393424" cy="1097280"/>
           </a:xfrm>
           <a:prstGeom prst="rect">
             <a:avLst/>
@@ -6128,6 +6850,115 @@
           <a:noFill/>
         </p:spPr>
         <p:txBody>
+          <a:bodyPr wrap="square">
+            <a:spAutoFit/>
+          </a:bodyPr>
+          <a:lstStyle/>
+          <a:p>
+            <a:r>
+              <a:rPr sz="1600">
+                <a:latin typeface="Consolas"/>
+              </a:rPr>
+              <a:t>"cumulative"</a:t>
+            </a:r>
+            <a:r>
+              <a:rPr sz="1600"/>
+              <a:t>: each keypress moves a TARGET by a delta and it stays there. </a:t>
+            </a:r>
+            <a:r>
+              <a:rPr sz="1600">
+                <a:latin typeface="Consolas"/>
+              </a:rPr>
+              <a:t>"held"</a:t>
+            </a:r>
+            <a:r>
+              <a:rPr sz="1600"/>
+              <a:t>: the input follows the keys held down</a:t>
+            </a:r>
+          </a:p>
+          <a:p>
+            <a:r>
+              <a:rPr sz="1600"/>
+              <a:t>Same three floats either way - and </a:t>
+            </a:r>
+            <a:r>
+              <a:rPr sz="1600">
+                <a:latin typeface="Consolas"/>
+              </a:rPr>
+              <a:t>"held"</a:t>
+            </a:r>
+            <a:r>
+              <a:rPr sz="1600"/>
+              <a:t> is the model PART 4's console already uses, with </a:t>
+            </a:r>
+            <a:r>
+              <a:rPr sz="1600">
+                <a:latin typeface="Consolas"/>
+              </a:rPr>
+              <a:t>SetGains</a:t>
+            </a:r>
+            <a:r>
+              <a:rPr sz="1600"/>
+              <a:t> as the shared ramp</a:t>
+            </a:r>
+          </a:p>
+          <a:p>
+            <a:r>
+              <a:rPr sz="1600">
+                <a:latin typeface="Consolas"/>
+              </a:rPr>
+              <a:t>AttachDriver</a:t>
+            </a:r>
+            <a:r>
+              <a:rPr sz="1600"/>
+              <a:t> forwards the window's key events, and binds Chrono's gear keys </a:t>
+            </a:r>
+            <a:r>
+              <a:rPr sz="1600">
+                <a:latin typeface="Consolas"/>
+              </a:rPr>
+              <a:t>Z X T [ ]</a:t>
+            </a:r>
+            <a:r>
+              <a:rPr sz="1600"/>
+              <a:t> for free</a:t>
+            </a:r>
+          </a:p>
+          <a:p>
+            <a:r>
+              <a:rPr sz="1600"/>
+              <a:t>SHOW: drive the HMMWV, then flip </a:t>
+            </a:r>
+            <a:r>
+              <a:rPr sz="1600">
+                <a:latin typeface="Consolas"/>
+              </a:rPr>
+              <a:t>KEYBOARD_MODE</a:t>
+            </a:r>
+            <a:r>
+              <a:rPr sz="1600"/>
+              <a:t> and drive again - the second one feels like a car, not a ratchet</a:t>
+            </a:r>
+          </a:p>
+        </p:txBody>
+      </p:sp>
+      <p:sp>
+        <p:nvSpPr>
+          <p:cNvPr id="5" name="Footer"/>
+          <p:cNvSpPr txBox="1"/>
+          <p:nvPr/>
+        </p:nvSpPr>
+        <p:spPr>
+          <a:xfrm>
+            <a:off x="310974" y="6645811"/>
+            <a:ext cx="11644805" cy="188527"/>
+          </a:xfrm>
+          <a:prstGeom prst="rect">
+            <a:avLst/>
+          </a:prstGeom>
+          <a:noFill/>
+        </p:spPr>
+        <p:txBody>
           <a:bodyPr wrap="none">
             <a:spAutoFit/>
           </a:bodyPr>
@@ -6142,7 +6973,7 @@
       </p:sp>
       <p:sp>
         <p:nvSpPr>
-          <p:cNvPr id="5" name="TextBox 4"/>
+          <p:cNvPr id="6" name="PageNo"/>
           <p:cNvSpPr txBox="1"/>
           <p:nvPr/>
         </p:nvSpPr>
@@ -6199,125 +7030,46 @@
         </p:nvSpPr>
         <p:spPr/>
         <p:txBody>
-          <a:bodyPr/>
-          <a:lstStyle/>
-          <a:p>
-            <a:r>
-              <a:t>Part 4's architecture: two processes, one UDP contract</a:t>
-            </a:r>
-          </a:p>
-        </p:txBody>
-      </p:sp>
-      <p:sp>
-        <p:nvSpPr>
-          <p:cNvPr id="3" name="Box 3"/>
-          <p:cNvSpPr/>
-          <p:nvPr/>
-        </p:nvSpPr>
-        <p:spPr>
-          <a:xfrm>
-            <a:off x="700000" y="2600000"/>
-            <a:ext cx="4300000" cy="1450000"/>
-          </a:xfrm>
-          <a:prstGeom prst="roundRect">
-            <a:avLst/>
-          </a:prstGeom>
-          <a:solidFill>
-            <a:srgbClr val="1F3864"/>
-          </a:solidFill>
-          <a:ln w="12700">
-            <a:solidFill>
-              <a:srgbClr val="0B1E3F"/>
-            </a:solidFill>
-          </a:ln>
-        </p:spPr>
-        <p:txBody>
-          <a:bodyPr anchor="ctr" wrap="square"/>
-          <a:lstStyle/>
-          <a:p>
-            <a:pPr algn="ctr"/>
-            <a:r>
-              <a:rPr sz="1800" b="1">
-                <a:solidFill>
-                  <a:srgbClr val="FFFFFF"/>
-                </a:solidFill>
-              </a:rPr>
-              <a:t>Operator machine</a:t>
-            </a:r>
-          </a:p>
-          <a:p>
-            <a:pPr algn="ctr"/>
-            <a:r>
-              <a:rPr sz="1800">
-                <a:solidFill>
-                  <a:srgbClr val="FFFFFF"/>
-                </a:solidFill>
-              </a:rPr>
-              <a:t>operator_console.py</a:t>
-            </a:r>
-          </a:p>
-        </p:txBody>
-      </p:sp>
-      <p:sp>
-        <p:nvSpPr>
-          <p:cNvPr id="4" name="Box 4"/>
-          <p:cNvSpPr/>
-          <p:nvPr/>
-        </p:nvSpPr>
-        <p:spPr>
-          <a:xfrm>
-            <a:off x="7192000" y="2600000"/>
-            <a:ext cx="4300000" cy="1450000"/>
-          </a:xfrm>
-          <a:prstGeom prst="roundRect">
-            <a:avLst/>
-          </a:prstGeom>
-          <a:solidFill>
-            <a:srgbClr val="1F3864"/>
-          </a:solidFill>
-          <a:ln w="12700">
-            <a:solidFill>
-              <a:srgbClr val="0B1E3F"/>
-            </a:solidFill>
-          </a:ln>
-        </p:spPr>
-        <p:txBody>
-          <a:bodyPr anchor="ctr" wrap="square"/>
-          <a:lstStyle/>
-          <a:p>
-            <a:pPr algn="ctr"/>
-            <a:r>
-              <a:rPr sz="1800" b="1">
-                <a:solidFill>
-                  <a:srgbClr val="FFFFFF"/>
-                </a:solidFill>
-              </a:rPr>
-              <a:t>Simulation machine</a:t>
-            </a:r>
-          </a:p>
-          <a:p>
-            <a:pPr algn="ctr"/>
-            <a:r>
-              <a:rPr sz="1800">
-                <a:solidFill>
-                  <a:srgbClr val="FFFFFF"/>
-                </a:solidFill>
-              </a:rPr>
-              <a:t>tutorial_HIL_driver.py</a:t>
-            </a:r>
-          </a:p>
-        </p:txBody>
-      </p:sp>
-      <p:sp>
-        <p:nvSpPr>
-          <p:cNvPr id="5" name="Label 5"/>
+          <a:bodyPr wrap="square"/>
+          <a:lstStyle/>
+          <a:p>
+            <a:r>
+              <a:t>Pattern 2: a device Chrono doesn't know about</a:t>
+            </a:r>
+          </a:p>
+        </p:txBody>
+      </p:sp>
+      <p:sp>
+        <p:nvSpPr>
+          <p:cNvPr id="3" name="Text Placeholder 2"/>
+          <p:cNvSpPr>
+            <a:spLocks noGrp="1"/>
+          </p:cNvSpPr>
+          <p:nvPr>
+            <p:ph type="body" idx="1"/>
+          </p:nvPr>
+        </p:nvSpPr>
+        <p:spPr/>
+        <p:txBody>
+          <a:bodyPr wrap="square"/>
+          <a:lstStyle/>
+          <a:p>
+            <a:r>
+              <a:t>a UDP console, a phone, a motion platform, another process, another machine...</a:t>
+            </a:r>
+          </a:p>
+        </p:txBody>
+      </p:sp>
+      <p:sp>
+        <p:nvSpPr>
+          <p:cNvPr id="4" name="Footer"/>
           <p:cNvSpPr txBox="1"/>
           <p:nvPr/>
         </p:nvSpPr>
         <p:spPr>
           <a:xfrm>
-            <a:off x="5000000" y="1950000"/>
-            <a:ext cx="2192000" cy="500000"/>
+            <a:off x="310974" y="6645811"/>
+            <a:ext cx="11644805" cy="188527"/>
           </a:xfrm>
           <a:prstGeom prst="rect">
             <a:avLst/>
@@ -6325,89 +7077,6 @@
           <a:noFill/>
         </p:spPr>
         <p:txBody>
-          <a:bodyPr anchor="ctr" wrap="square"/>
-          <a:lstStyle/>
-          <a:p>
-            <a:pPr algn="ctr"/>
-            <a:r>
-              <a:rPr sz="1600"/>
-              <a:t>→ steering, throttle, braking, gear</a:t>
-            </a:r>
-          </a:p>
-        </p:txBody>
-      </p:sp>
-      <p:sp>
-        <p:nvSpPr>
-          <p:cNvPr id="6" name="Label 6"/>
-          <p:cNvSpPr txBox="1"/>
-          <p:nvPr/>
-        </p:nvSpPr>
-        <p:spPr>
-          <a:xfrm>
-            <a:off x="5000000" y="4150000"/>
-            <a:ext cx="2192000" cy="700000"/>
-          </a:xfrm>
-          <a:prstGeom prst="rect">
-            <a:avLst/>
-          </a:prstGeom>
-          <a:noFill/>
-        </p:spPr>
-        <p:txBody>
-          <a:bodyPr anchor="ctr" wrap="square"/>
-          <a:lstStyle/>
-          <a:p>
-            <a:pPr algn="ctr"/>
-            <a:r>
-              <a:rPr sz="1600"/>
-              <a:t>speed, RTF, lateral accel, gear ←</a:t>
-            </a:r>
-          </a:p>
-        </p:txBody>
-      </p:sp>
-      <p:sp>
-        <p:nvSpPr>
-          <p:cNvPr id="7" name="TextBox note"/>
-          <p:cNvSpPr txBox="1"/>
-          <p:nvPr/>
-        </p:nvSpPr>
-        <p:spPr>
-          <a:xfrm>
-            <a:off x="700000" y="5250000"/>
-            <a:ext cx="10792000" cy="700000"/>
-          </a:xfrm>
-          <a:prstGeom prst="rect">
-            <a:avLst/>
-          </a:prstGeom>
-          <a:noFill/>
-        </p:spPr>
-        <p:txBody>
-          <a:bodyPr wrap="square"/>
-          <a:lstStyle/>
-          <a:p>
-            <a:r>
-              <a:rPr sz="1600"/>
-              <a:t>Both directions are plain UDP datagrams - two processes, possibly two machines, no shared memory. The grey arrow only fires when SEND_FEEDBACK = True. PART 6 adds the gear as a fourth field, in both directions.</a:t>
-            </a:r>
-          </a:p>
-        </p:txBody>
-      </p:sp>
-      <p:sp>
-        <p:nvSpPr>
-          <p:cNvPr id="8" name="TextBox 7"/>
-          <p:cNvSpPr txBox="1"/>
-          <p:nvPr/>
-        </p:nvSpPr>
-        <p:spPr>
-          <a:xfrm>
-            <a:off x="310974" y="6645811"/>
-            <a:ext cx="11644805" cy="188527"/>
-          </a:xfrm>
-          <a:prstGeom prst="rect">
-            <a:avLst/>
-          </a:prstGeom>
-          <a:noFill/>
-        </p:spPr>
-        <p:txBody>
           <a:bodyPr wrap="none">
             <a:spAutoFit/>
           </a:bodyPr>
@@ -6422,7 +7091,7 @@
       </p:sp>
       <p:sp>
         <p:nvSpPr>
-          <p:cNvPr id="9" name="TextBox 8"/>
+          <p:cNvPr id="5" name="PageNo"/>
           <p:cNvSpPr txBox="1"/>
           <p:nvPr/>
         </p:nvSpPr>
@@ -6477,130 +7146,27 @@
             <p:ph type="title"/>
           </p:nvPr>
         </p:nvSpPr>
-        <p:spPr>
-          <a:xfrm>
-            <a:off x="235228" y="150000"/>
-            <a:ext cx="9875520" cy="800000"/>
-          </a:xfrm>
-        </p:spPr>
+        <p:spPr/>
         <p:txBody>
           <a:bodyPr wrap="square"/>
           <a:lstStyle/>
           <a:p>
             <a:r>
-              <a:rPr sz="2600"/>
-              <a:t>The human-in-the-loop contract</a:t>
-            </a:r>
-          </a:p>
-        </p:txBody>
-      </p:sp>
-      <p:sp>
-        <p:nvSpPr>
-          <p:cNvPr id="3" name="Content Placeholder 2"/>
-          <p:cNvSpPr>
-            <a:spLocks noGrp="1"/>
-          </p:cNvSpPr>
-          <p:nvPr>
-            <p:ph idx="1"/>
-          </p:nvPr>
-        </p:nvSpPr>
-        <p:spPr/>
-        <p:txBody>
-          <a:bodyPr wrap="square"/>
-          <a:lstStyle/>
-          <a:p>
-            <a:pPr/>
-            <a:r>
-              <a:rPr sz="2000"/>
-              <a:t>A driver is just three floats per step: steering [-1, 1], throttle [0, 1], braking [0, 1]</a:t>
-            </a:r>
-          </a:p>
-          <a:p>
-            <a:pPr/>
-            <a:r>
-              <a:rPr sz="1800">
-                <a:latin typeface="Consolas"/>
-              </a:rPr>
-              <a:t>veh.ChDriver</a:t>
-            </a:r>
-            <a:r>
-              <a:rPr sz="2000"/>
-              <a:t> is the plain container: </a:t>
-            </a:r>
-            <a:r>
-              <a:rPr sz="1800">
-                <a:latin typeface="Consolas"/>
-              </a:rPr>
-              <a:t>SetSteering()</a:t>
-            </a:r>
-            <a:r>
-              <a:rPr sz="2000"/>
-              <a:t>, </a:t>
-            </a:r>
-            <a:r>
-              <a:rPr sz="1800">
-                <a:latin typeface="Consolas"/>
-              </a:rPr>
-              <a:t>SetThrottle()</a:t>
-            </a:r>
-            <a:r>
-              <a:rPr sz="2000"/>
-              <a:t>, </a:t>
-            </a:r>
-            <a:r>
-              <a:rPr sz="1800">
-                <a:latin typeface="Consolas"/>
-              </a:rPr>
-              <a:t>SetBraking()</a:t>
-            </a:r>
-          </a:p>
-          <a:p>
-            <a:pPr/>
-            <a:r>
-              <a:rPr sz="2000"/>
-              <a:t>So the recipe for ANY device is:</a:t>
-            </a:r>
-          </a:p>
-          <a:p>
-            <a:pPr lvl="1"/>
-            <a:r>
-              <a:rPr sz="1800"/>
-              <a:t>1. poll the device (never block the physics loop)</a:t>
-            </a:r>
-          </a:p>
-          <a:p>
-            <a:pPr lvl="1"/>
-            <a:r>
-              <a:rPr sz="1800"/>
-              <a:t>2. rate-limit / smooth (a human arm is not a step function)</a:t>
-            </a:r>
-          </a:p>
-          <a:p>
-            <a:pPr lvl="1"/>
-            <a:r>
-              <a:rPr sz="1800"/>
-              <a:t>3. write into the ChDriver once per step - zero-order hold until the next step</a:t>
-            </a:r>
-          </a:p>
-          <a:p>
-            <a:pPr/>
-            <a:r>
-              <a:rPr sz="2000"/>
-              <a:t>Today: a UDP operator console in a second terminal - the operator side has no Chrono dependency at all</a:t>
-            </a:r>
-          </a:p>
-        </p:txBody>
-      </p:sp>
-      <p:sp>
-        <p:nvSpPr>
-          <p:cNvPr id="4" name="TextBox 3"/>
+              <a:t>Two processes, one UDP contract</a:t>
+            </a:r>
+          </a:p>
+        </p:txBody>
+      </p:sp>
+      <p:sp>
+        <p:nvSpPr>
+          <p:cNvPr id="3" name="NoteBox"/>
           <p:cNvSpPr txBox="1"/>
           <p:nvPr/>
         </p:nvSpPr>
         <p:spPr>
           <a:xfrm>
-            <a:off x="310974" y="6645811"/>
-            <a:ext cx="11644805" cy="188527"/>
+            <a:off x="402336" y="5248656"/>
+            <a:ext cx="11393424" cy="435864"/>
           </a:xfrm>
           <a:prstGeom prst="rect">
             <a:avLst/>
@@ -6608,6 +7174,223 @@
           <a:noFill/>
         </p:spPr>
         <p:txBody>
+          <a:bodyPr wrap="square">
+            <a:spAutoFit/>
+          </a:bodyPr>
+          <a:lstStyle/>
+          <a:p>
+            <a:r>
+              <a:rPr sz="1600"/>
+              <a:t>Both directions are plain UDP datagrams - two processes, possibly two machines, no shared memory. The return arrow only fires when SEND_FEEDBACK = True.</a:t>
+            </a:r>
+          </a:p>
+        </p:txBody>
+      </p:sp>
+      <p:sp>
+        <p:nvSpPr>
+          <p:cNvPr id="4" name="Rounded Rectangle 3"/>
+          <p:cNvSpPr/>
+          <p:nvPr/>
+        </p:nvSpPr>
+        <p:spPr>
+          <a:xfrm>
+            <a:off x="704088" y="2596896"/>
+            <a:ext cx="4297680" cy="1453896"/>
+          </a:xfrm>
+          <a:prstGeom prst="roundRect">
+            <a:avLst/>
+          </a:prstGeom>
+          <a:solidFill>
+            <a:srgbClr val="1F3864"/>
+          </a:solidFill>
+          <a:ln w="12700">
+            <a:solidFill>
+              <a:srgbClr val="0B1E3F"/>
+            </a:solidFill>
+          </a:ln>
+        </p:spPr>
+        <p:style>
+          <a:lnRef idx="1">
+            <a:schemeClr val="accent1"/>
+          </a:lnRef>
+          <a:fillRef idx="3">
+            <a:schemeClr val="accent1"/>
+          </a:fillRef>
+          <a:effectRef idx="2">
+            <a:schemeClr val="accent1"/>
+          </a:effectRef>
+          <a:fontRef idx="minor">
+            <a:schemeClr val="lt1"/>
+          </a:fontRef>
+        </p:style>
+        <p:txBody>
+          <a:bodyPr rtlCol="0" anchor="ctr" wrap="square"/>
+          <a:lstStyle/>
+          <a:p>
+            <a:pPr algn="ctr"/>
+            <a:r>
+              <a:rPr sz="1800" b="1">
+                <a:solidFill>
+                  <a:srgbClr val="FFFFFF"/>
+                </a:solidFill>
+              </a:rPr>
+              <a:t>Operator machine</a:t>
+            </a:r>
+          </a:p>
+          <a:p>
+            <a:pPr algn="ctr"/>
+            <a:r>
+              <a:rPr sz="1800" b="0">
+                <a:solidFill>
+                  <a:srgbClr val="FFFFFF"/>
+                </a:solidFill>
+              </a:rPr>
+              <a:t>operator_console.py</a:t>
+            </a:r>
+          </a:p>
+        </p:txBody>
+      </p:sp>
+      <p:sp>
+        <p:nvSpPr>
+          <p:cNvPr id="5" name="Rounded Rectangle 4"/>
+          <p:cNvSpPr/>
+          <p:nvPr/>
+        </p:nvSpPr>
+        <p:spPr>
+          <a:xfrm>
+            <a:off x="7196328" y="2596896"/>
+            <a:ext cx="4297680" cy="1453896"/>
+          </a:xfrm>
+          <a:prstGeom prst="roundRect">
+            <a:avLst/>
+          </a:prstGeom>
+          <a:solidFill>
+            <a:srgbClr val="1F3864"/>
+          </a:solidFill>
+          <a:ln w="12700">
+            <a:solidFill>
+              <a:srgbClr val="0B1E3F"/>
+            </a:solidFill>
+          </a:ln>
+        </p:spPr>
+        <p:style>
+          <a:lnRef idx="1">
+            <a:schemeClr val="accent1"/>
+          </a:lnRef>
+          <a:fillRef idx="3">
+            <a:schemeClr val="accent1"/>
+          </a:fillRef>
+          <a:effectRef idx="2">
+            <a:schemeClr val="accent1"/>
+          </a:effectRef>
+          <a:fontRef idx="minor">
+            <a:schemeClr val="lt1"/>
+          </a:fontRef>
+        </p:style>
+        <p:txBody>
+          <a:bodyPr rtlCol="0" anchor="ctr" wrap="square"/>
+          <a:lstStyle/>
+          <a:p>
+            <a:pPr algn="ctr"/>
+            <a:r>
+              <a:rPr sz="1800" b="1">
+                <a:solidFill>
+                  <a:srgbClr val="FFFFFF"/>
+                </a:solidFill>
+              </a:rPr>
+              <a:t>Simulation machine</a:t>
+            </a:r>
+          </a:p>
+          <a:p>
+            <a:pPr algn="ctr"/>
+            <a:r>
+              <a:rPr sz="1800" b="0">
+                <a:solidFill>
+                  <a:srgbClr val="FFFFFF"/>
+                </a:solidFill>
+              </a:rPr>
+              <a:t>tutorial_HIL_driver.py</a:t>
+            </a:r>
+          </a:p>
+        </p:txBody>
+      </p:sp>
+      <p:sp>
+        <p:nvSpPr>
+          <p:cNvPr id="6" name="TextBox 5"/>
+          <p:cNvSpPr txBox="1"/>
+          <p:nvPr/>
+        </p:nvSpPr>
+        <p:spPr>
+          <a:xfrm>
+            <a:off x="5001768" y="1947672"/>
+            <a:ext cx="2194560" cy="731520"/>
+          </a:xfrm>
+          <a:prstGeom prst="rect">
+            <a:avLst/>
+          </a:prstGeom>
+          <a:noFill/>
+        </p:spPr>
+        <p:txBody>
+          <a:bodyPr wrap="square">
+            <a:spAutoFit/>
+          </a:bodyPr>
+          <a:lstStyle/>
+          <a:p>
+            <a:pPr algn="ctr"/>
+            <a:r>
+              <a:rPr sz="1600"/>
+              <a:t>→ steering, throttle, braking, gear</a:t>
+            </a:r>
+          </a:p>
+        </p:txBody>
+      </p:sp>
+      <p:sp>
+        <p:nvSpPr>
+          <p:cNvPr id="7" name="TextBox 6"/>
+          <p:cNvSpPr txBox="1"/>
+          <p:nvPr/>
+        </p:nvSpPr>
+        <p:spPr>
+          <a:xfrm>
+            <a:off x="5001768" y="4151376"/>
+            <a:ext cx="2194560" cy="731520"/>
+          </a:xfrm>
+          <a:prstGeom prst="rect">
+            <a:avLst/>
+          </a:prstGeom>
+          <a:noFill/>
+        </p:spPr>
+        <p:txBody>
+          <a:bodyPr wrap="square">
+            <a:spAutoFit/>
+          </a:bodyPr>
+          <a:lstStyle/>
+          <a:p>
+            <a:pPr algn="ctr"/>
+            <a:r>
+              <a:rPr sz="1600"/>
+              <a:t>speed, RTF, lateral accel, gear ←</a:t>
+            </a:r>
+          </a:p>
+        </p:txBody>
+      </p:sp>
+      <p:sp>
+        <p:nvSpPr>
+          <p:cNvPr id="8" name="Footer"/>
+          <p:cNvSpPr txBox="1"/>
+          <p:nvPr/>
+        </p:nvSpPr>
+        <p:spPr>
+          <a:xfrm>
+            <a:off x="310974" y="6645811"/>
+            <a:ext cx="11644805" cy="188527"/>
+          </a:xfrm>
+          <a:prstGeom prst="rect">
+            <a:avLst/>
+          </a:prstGeom>
+          <a:noFill/>
+        </p:spPr>
+        <p:txBody>
           <a:bodyPr wrap="none">
             <a:spAutoFit/>
           </a:bodyPr>
@@ -6622,7 +7405,7 @@
       </p:sp>
       <p:sp>
         <p:nvSpPr>
-          <p:cNvPr id="5" name="TextBox 4"/>
+          <p:cNvPr id="9" name="PageNo"/>
           <p:cNvSpPr txBox="1"/>
           <p:nvPr/>
         </p:nvSpPr>
@@ -6677,33 +7460,28 @@
             <p:ph type="title"/>
           </p:nvPr>
         </p:nvSpPr>
-        <p:spPr>
-          <a:xfrm>
-            <a:off x="235228" y="150000"/>
-            <a:ext cx="9875520" cy="800000"/>
-          </a:xfrm>
-        </p:spPr>
+        <p:spPr/>
         <p:txBody>
           <a:bodyPr wrap="square"/>
           <a:lstStyle/>
           <a:p>
             <a:r>
               <a:rPr sz="2600"/>
-              <a:t>Step 1: A UDP input source (Lines 219 to 269)</a:t>
-            </a:r>
-          </a:p>
-        </p:txBody>
-      </p:sp>
-      <p:sp>
-        <p:nvSpPr>
-          <p:cNvPr id="3" name="TextBox 2"/>
+              <a:t>A UDP input source (Lines 219 to 269)</a:t>
+            </a:r>
+          </a:p>
+        </p:txBody>
+      </p:sp>
+      <p:sp>
+        <p:nvSpPr>
+          <p:cNvPr id="3" name="CodeBox"/>
           <p:cNvSpPr txBox="1"/>
           <p:nvPr/>
         </p:nvSpPr>
         <p:spPr>
           <a:xfrm>
             <a:off x="0" y="978408"/>
-            <a:ext cx="12192000" cy="4800600"/>
+            <a:ext cx="12191969" cy="4824031"/>
           </a:xfrm>
           <a:prstGeom prst="rect">
             <a:avLst/>
@@ -7084,14 +7862,14 @@
       </p:sp>
       <p:sp>
         <p:nvSpPr>
-          <p:cNvPr id="4" name="TextBox 3"/>
+          <p:cNvPr id="4" name="NoteBox"/>
           <p:cNvSpPr txBox="1"/>
           <p:nvPr/>
         </p:nvSpPr>
         <p:spPr>
           <a:xfrm>
-            <a:off x="400000" y="5833872"/>
-            <a:ext cx="11392000" cy="777240"/>
+            <a:off x="402336" y="5939599"/>
+            <a:ext cx="11393424" cy="688848"/>
           </a:xfrm>
           <a:prstGeom prst="rect">
             <a:avLst/>
@@ -7104,29 +7882,22 @@
           </a:bodyPr>
           <a:lstStyle/>
           <a:p>
-            <a:pPr/>
             <a:r>
               <a:rPr sz="1600"/>
-              <a:t>Non-blocking socket, drained every step; the newest packet wins, an empty queue holds the last value</a:t>
+              <a:t>Non-blocking socket, drained every step: the newest packet wins, and an empty queue holds the last value</a:t>
             </a:r>
           </a:p>
           <a:p>
             <a:r>
               <a:rPr sz="1600"/>
-              <a:t>The operator can be anywhere on the network - and the console has no Chrono dependency at all</a:t>
-            </a:r>
-          </a:p>
-          <a:p>
-            <a:r>
-              <a:rPr sz="1600"/>
-              <a:t>PART 6 added the optional 4th field. Keeping it optional is what stops an older console from breaking: 3 fields still parse</a:t>
-            </a:r>
-          </a:p>
-        </p:txBody>
-      </p:sp>
-      <p:sp>
-        <p:nvSpPr>
-          <p:cNvPr id="5" name="TextBox 4"/>
+              <a:t>The operator can be anywhere on the network, and the console has no Chrono dependency at all</a:t>
+            </a:r>
+          </a:p>
+        </p:txBody>
+      </p:sp>
+      <p:sp>
+        <p:nvSpPr>
+          <p:cNvPr id="5" name="Footer"/>
           <p:cNvSpPr txBox="1"/>
           <p:nvPr/>
         </p:nvSpPr>
@@ -7155,7 +7926,7 @@
       </p:sp>
       <p:sp>
         <p:nvSpPr>
-          <p:cNvPr id="6" name="TextBox 5"/>
+          <p:cNvPr id="6" name="PageNo"/>
           <p:cNvSpPr txBox="1"/>
           <p:nvPr/>
         </p:nvSpPr>
@@ -7210,31 +7981,25 @@
             <p:ph type="title"/>
           </p:nvPr>
         </p:nvSpPr>
-        <p:spPr>
-          <a:xfrm>
-            <a:off x="235228" y="150000"/>
-            <a:ext cx="9875520" cy="800000"/>
-          </a:xfrm>
-        </p:spPr>
+        <p:spPr/>
         <p:txBody>
           <a:bodyPr wrap="square"/>
           <a:lstStyle/>
           <a:p>
             <a:r>
-              <a:rPr sz="2600"/>
-              <a:t>Overview of the human-in-the-loop tutorial</a:t>
-            </a:r>
-          </a:p>
-        </p:txBody>
-      </p:sp>
-      <p:sp>
-        <p:nvSpPr>
-          <p:cNvPr id="3" name="Content Placeholder 2"/>
-          <p:cNvSpPr>
-            <a:spLocks noGrp="1"/>
-          </p:cNvSpPr>
-          <p:nvPr>
-            <p:ph idx="1"/>
+              <a:t>Why put a human in the loop at all?</a:t>
+            </a:r>
+          </a:p>
+        </p:txBody>
+      </p:sp>
+      <p:sp>
+        <p:nvSpPr>
+          <p:cNvPr id="3" name="Text Placeholder 2"/>
+          <p:cNvSpPr>
+            <a:spLocks noGrp="1"/>
+          </p:cNvSpPr>
+          <p:nvPr>
+            <p:ph type="body" idx="1"/>
           </p:nvPr>
         </p:nvSpPr>
         <p:spPr/>
@@ -7242,73 +8007,15 @@
           <a:bodyPr wrap="square"/>
           <a:lstStyle/>
           <a:p>
-            <a:pPr/>
-            <a:r>
-              <a:rPr sz="2000"/>
-              <a:t>Human-in-the-loop = the simulation runs at wall-clock speed and a person closes the control loop</a:t>
-            </a:r>
-          </a:p>
-          <a:p>
-            <a:pPr/>
-            <a:r>
-              <a:rPr sz="2000"/>
-              <a:t>In this tutorial, you will learn how to</a:t>
-            </a:r>
-          </a:p>
-          <a:p>
-            <a:pPr lvl="1"/>
-            <a:r>
-              <a:rPr sz="1800"/>
-              <a:t>PART 1: Keep a Chrono::Vehicle simulation real-time and measure how well you did</a:t>
-            </a:r>
-          </a:p>
-          <a:p>
-            <a:pPr lvl="1"/>
-            <a:r>
-              <a:rPr sz="1800"/>
-              <a:t>PART 2: Put a human on the keyboard with ChInteractiveDriver</a:t>
-            </a:r>
-          </a:p>
-          <a:p>
-            <a:pPr lvl="1"/>
-            <a:r>
-              <a:rPr sz="1800"/>
-              <a:t>PART 4: Bring a device Chrono doesn't know about, and close the loop back to it</a:t>
-            </a:r>
-          </a:p>
-          <a:p>
-            <a:pPr lvl="1"/>
-            <a:r>
-              <a:rPr sz="1800"/>
-              <a:t>Then, briefly: PARTS 6-8 - change gear, drive the Mcity digital twin, steer something that is not a car</a:t>
-            </a:r>
-          </a:p>
-          <a:p>
-            <a:pPr lvl="1"/>
-            <a:r>
-              <a:rPr sz="1800"/>
-              <a:t>Parts 3 and 5 (gamepad/wheel, vehicle picker, overlay flags) are in the repo - no time today</a:t>
-            </a:r>
-          </a:p>
-          <a:p>
-            <a:pPr/>
-            <a:r>
-              <a:rPr sz="2000"/>
-              <a:t>Everything runs in PyChrono; no special hardware is required</a:t>
-            </a:r>
-          </a:p>
-          <a:p>
-            <a:pPr/>
-            <a:r>
-              <a:rPr sz="2000"/>
-              <a:t>The whole human-in-the-loop contract is: spin once per step, three floats in, state out</a:t>
-            </a:r>
-          </a:p>
-        </p:txBody>
-      </p:sp>
-      <p:sp>
-        <p:nvSpPr>
-          <p:cNvPr id="4" name="TextBox 3"/>
+            <a:r>
+              <a:t>start with a task that no controller in this tutorial can do for you</a:t>
+            </a:r>
+          </a:p>
+        </p:txBody>
+      </p:sp>
+      <p:sp>
+        <p:nvSpPr>
+          <p:cNvPr id="4" name="Footer"/>
           <p:cNvSpPr txBox="1"/>
           <p:nvPr/>
         </p:nvSpPr>
@@ -7337,7 +8044,7 @@
       </p:sp>
       <p:sp>
         <p:nvSpPr>
-          <p:cNvPr id="5" name="TextBox 4"/>
+          <p:cNvPr id="5" name="PageNo"/>
           <p:cNvSpPr txBox="1"/>
           <p:nvPr/>
         </p:nvSpPr>
@@ -7392,33 +8099,28 @@
             <p:ph type="title"/>
           </p:nvPr>
         </p:nvSpPr>
-        <p:spPr>
-          <a:xfrm>
-            <a:off x="235228" y="150000"/>
-            <a:ext cx="9875520" cy="800000"/>
-          </a:xfrm>
-        </p:spPr>
+        <p:spPr/>
         <p:txBody>
           <a:bodyPr wrap="square"/>
           <a:lstStyle/>
           <a:p>
             <a:r>
               <a:rPr sz="2600"/>
-              <a:t>Step 2: Sample once per step, then hold (Lines 710 to 727)</a:t>
-            </a:r>
-          </a:p>
-        </p:txBody>
-      </p:sp>
-      <p:sp>
-        <p:nvSpPr>
-          <p:cNvPr id="3" name="TextBox 2"/>
+              <a:t>Sample once, hold, then send state back (Lines 710 to 722, 771 to 781)</a:t>
+            </a:r>
+          </a:p>
+        </p:txBody>
+      </p:sp>
+      <p:sp>
+        <p:nvSpPr>
+          <p:cNvPr id="3" name="CodeBox"/>
           <p:cNvSpPr txBox="1"/>
           <p:nvPr/>
         </p:nvSpPr>
         <p:spPr>
           <a:xfrm>
             <a:off x="0" y="1051560"/>
-            <a:ext cx="12192000" cy="3200400"/>
+            <a:ext cx="12191969" cy="4397121"/>
           </a:xfrm>
           <a:prstGeom prst="rect">
             <a:avLst/>
@@ -7434,7 +8136,7 @@
           <a:lstStyle/>
           <a:p>
             <a:r>
-              <a:rPr sz="1200">
+              <a:rPr sz="1000">
                 <a:solidFill>
                   <a:srgbClr val="CCCCCC"/>
                 </a:solidFill>
@@ -7445,7 +8147,7 @@
           </a:p>
           <a:p>
             <a:r>
-              <a:rPr sz="1200">
+              <a:rPr sz="1000">
                 <a:solidFill>
                   <a:srgbClr val="CCCCCC"/>
                 </a:solidFill>
@@ -7456,7 +8158,7 @@
           </a:p>
           <a:p>
             <a:r>
-              <a:rPr sz="1200">
+              <a:rPr sz="1000">
                 <a:solidFill>
                   <a:srgbClr val="CCCCCC"/>
                 </a:solidFill>
@@ -7467,7 +8169,7 @@
           </a:p>
           <a:p>
             <a:r>
-              <a:rPr sz="1200">
+              <a:rPr sz="1000">
                 <a:solidFill>
                   <a:srgbClr val="CCCCCC"/>
                 </a:solidFill>
@@ -7478,7 +8180,7 @@
           </a:p>
           <a:p>
             <a:r>
-              <a:rPr sz="1200">
+              <a:rPr sz="1000">
                 <a:solidFill>
                   <a:srgbClr val="CCCCCC"/>
                 </a:solidFill>
@@ -7489,7 +8191,7 @@
           </a:p>
           <a:p>
             <a:r>
-              <a:rPr sz="1200">
+              <a:rPr sz="1000">
                 <a:solidFill>
                   <a:srgbClr val="CCCCCC"/>
                 </a:solidFill>
@@ -7500,7 +8202,7 @@
           </a:p>
           <a:p>
             <a:r>
-              <a:rPr sz="1200">
+              <a:rPr sz="1000">
                 <a:solidFill>
                   <a:srgbClr val="CCCCCC"/>
                 </a:solidFill>
@@ -7511,7 +8213,7 @@
           </a:p>
           <a:p>
             <a:r>
-              <a:rPr sz="1200">
+              <a:rPr sz="1000">
                 <a:solidFill>
                   <a:srgbClr val="CCCCCC"/>
                 </a:solidFill>
@@ -7522,7 +8224,7 @@
           </a:p>
           <a:p>
             <a:r>
-              <a:rPr sz="1200">
+              <a:rPr sz="1000">
                 <a:solidFill>
                   <a:srgbClr val="CCCCCC"/>
                 </a:solidFill>
@@ -7533,7 +8235,7 @@
           </a:p>
           <a:p>
             <a:r>
-              <a:rPr sz="1200">
+              <a:rPr sz="1000">
                 <a:solidFill>
                   <a:srgbClr val="CCCCCC"/>
                 </a:solidFill>
@@ -7544,7 +8246,7 @@
           </a:p>
           <a:p>
             <a:r>
-              <a:rPr sz="1200">
+              <a:rPr sz="1000">
                 <a:solidFill>
                   <a:srgbClr val="CCCCCC"/>
                 </a:solidFill>
@@ -7555,7 +8257,7 @@
           </a:p>
           <a:p>
             <a:r>
-              <a:rPr sz="1200">
+              <a:rPr sz="1000">
                 <a:solidFill>
                   <a:srgbClr val="CCCCCC"/>
                 </a:solidFill>
@@ -7566,7 +8268,7 @@
           </a:p>
           <a:p>
             <a:r>
-              <a:rPr sz="1200">
+              <a:rPr sz="1000">
                 <a:solidFill>
                   <a:srgbClr val="CCCCCC"/>
                 </a:solidFill>
@@ -7577,7 +8279,7 @@
           </a:p>
           <a:p>
             <a:r>
-              <a:rPr sz="1200">
+              <a:rPr sz="1000">
                 <a:solidFill>
                   <a:srgbClr val="CCCCCC"/>
                 </a:solidFill>
@@ -7588,38 +8290,159 @@
           </a:p>
           <a:p>
             <a:r>
-              <a:rPr sz="1200">
-                <a:solidFill>
-                  <a:srgbClr val="CCCCCC"/>
-                </a:solidFill>
-                <a:latin typeface="Consolas"/>
-              </a:rPr>
-              <a:t># PART 8: hand the three numbers to whatever is being controlled</a:t>
-            </a:r>
-          </a:p>
-          <a:p>
-            <a:r>
-              <a:rPr sz="1200">
-                <a:solidFill>
-                  <a:srgbClr val="CCCCCC"/>
-                </a:solidFill>
-                <a:latin typeface="Consolas"/>
-              </a:rPr>
-              <a:t>plant.apply(driver_inputs)</a:t>
-            </a:r>
-          </a:p>
-        </p:txBody>
-      </p:sp>
-      <p:sp>
-        <p:nvSpPr>
-          <p:cNvPr id="4" name="TextBox 3"/>
+              <a:rPr sz="1000">
+                <a:solidFill>
+                  <a:srgbClr val="CCCCCC"/>
+                </a:solidFill>
+                <a:latin typeface="Consolas"/>
+              </a:rPr>
+              <a:t># ... and at the end of the same step:</a:t>
+            </a:r>
+          </a:p>
+          <a:p>
+            <a:r>
+              <a:rPr sz="1000">
+                <a:solidFill>
+                  <a:srgbClr val="CCCCCC"/>
+                </a:solidFill>
+                <a:latin typeface="Consolas"/>
+              </a:rPr>
+              <a:t/>
+            </a:r>
+          </a:p>
+          <a:p>
+            <a:r>
+              <a:rPr sz="1000">
+                <a:solidFill>
+                  <a:srgbClr val="CCCCCC"/>
+                </a:solidFill>
+                <a:latin typeface="Consolas"/>
+              </a:rPr>
+              <a:t># PART 4: feedback to the operator (speed, RTF, lateral acceleration, applied</a:t>
+            </a:r>
+          </a:p>
+          <a:p>
+            <a:r>
+              <a:rPr sz="1000">
+                <a:solidFill>
+                  <a:srgbClr val="CCCCCC"/>
+                </a:solidFill>
+                <a:latin typeface="Consolas"/>
+              </a:rPr>
+              <a:t># inputs, and since PART 6 the gear)</a:t>
+            </a:r>
+          </a:p>
+          <a:p>
+            <a:r>
+              <a:rPr sz="1000">
+                <a:solidFill>
+                  <a:srgbClr val="CCCCCC"/>
+                </a:solidFill>
+                <a:latin typeface="Consolas"/>
+              </a:rPr>
+              <a:t>if SEND_FEEDBACK and device is not None and step_number % render_steps == 0:</a:t>
+            </a:r>
+          </a:p>
+          <a:p>
+            <a:r>
+              <a:rPr sz="1000">
+                <a:solidFill>
+                  <a:srgbClr val="CCCCCC"/>
+                </a:solidFill>
+                <a:latin typeface="Consolas"/>
+              </a:rPr>
+              <a:t>    acc = (vehicle.GetPointAcceleration(chrono.ChVector3d(0, 0, 0)).y</a:t>
+            </a:r>
+          </a:p>
+          <a:p>
+            <a:r>
+              <a:rPr sz="1000">
+                <a:solidFill>
+                  <a:srgbClr val="CCCCCC"/>
+                </a:solidFill>
+                <a:latin typeface="Consolas"/>
+              </a:rPr>
+              <a:t>           if vehicle else 0.0)</a:t>
+            </a:r>
+          </a:p>
+          <a:p>
+            <a:r>
+              <a:rPr sz="1000">
+                <a:solidFill>
+                  <a:srgbClr val="CCCCCC"/>
+                </a:solidFill>
+                <a:latin typeface="Consolas"/>
+              </a:rPr>
+              <a:t>    rtf = vehicle.GetRTF() if vehicle else 0.0</a:t>
+            </a:r>
+          </a:p>
+          <a:p>
+            <a:r>
+              <a:rPr sz="1000">
+                <a:solidFill>
+                  <a:srgbClr val="CCCCCC"/>
+                </a:solidFill>
+                <a:latin typeface="Consolas"/>
+              </a:rPr>
+              <a:t>    gear = gearbox.describe() if gearbox else plant.status() or "--"</a:t>
+            </a:r>
+          </a:p>
+          <a:p>
+            <a:r>
+              <a:rPr sz="1000">
+                <a:solidFill>
+                  <a:srgbClr val="CCCCCC"/>
+                </a:solidFill>
+                <a:latin typeface="Consolas"/>
+              </a:rPr>
+              <a:t>    device.send_feedback(</a:t>
+            </a:r>
+          </a:p>
+          <a:p>
+            <a:r>
+              <a:rPr sz="1000">
+                <a:solidFill>
+                  <a:srgbClr val="CCCCCC"/>
+                </a:solidFill>
+                <a:latin typeface="Consolas"/>
+              </a:rPr>
+              <a:t>        f"{sim_time:.3f},{plant.speed():.3f},{rtf:.3f},{acc:.3f},"</a:t>
+            </a:r>
+          </a:p>
+          <a:p>
+            <a:r>
+              <a:rPr sz="1000">
+                <a:solidFill>
+                  <a:srgbClr val="CCCCCC"/>
+                </a:solidFill>
+                <a:latin typeface="Consolas"/>
+              </a:rPr>
+              <a:t>        f"{driver_inputs.m_steering:.3f},{driver_inputs.m_throttle:.3f},"</a:t>
+            </a:r>
+          </a:p>
+          <a:p>
+            <a:r>
+              <a:rPr sz="1000">
+                <a:solidFill>
+                  <a:srgbClr val="CCCCCC"/>
+                </a:solidFill>
+                <a:latin typeface="Consolas"/>
+              </a:rPr>
+              <a:t>        f"{driver_inputs.m_braking:.3f},{gear}")</a:t>
+            </a:r>
+          </a:p>
+        </p:txBody>
+      </p:sp>
+      <p:sp>
+        <p:nvSpPr>
+          <p:cNvPr id="4" name="NoteBox"/>
           <p:cNvSpPr txBox="1"/>
           <p:nvPr/>
         </p:nvSpPr>
         <p:spPr>
           <a:xfrm>
-            <a:off x="400000" y="4389120"/>
-            <a:ext cx="11392000" cy="685800"/>
+            <a:off x="402336" y="5585841"/>
+            <a:ext cx="11393424" cy="688848"/>
           </a:xfrm>
           <a:prstGeom prst="rect">
             <a:avLst/>
@@ -7632,23 +8455,32 @@
           </a:bodyPr>
           <a:lstStyle/>
           <a:p>
-            <a:pPr/>
-            <a:r>
-              <a:rPr sz="1800"/>
-              <a:t>poll -&gt; smooth -&gt; write, then GetInputs() as before; the physics loop never waits on the device</a:t>
-            </a:r>
-          </a:p>
-          <a:p>
-            <a:r>
-              <a:rPr sz="1800"/>
-              <a:t>The three numbers are held; the gear commands are drained. One press of ']' is one upshift, not "keep upshifting"</a:t>
-            </a:r>
-          </a:p>
-        </p:txBody>
-      </p:sp>
-      <p:sp>
-        <p:nvSpPr>
-          <p:cNvPr id="5" name="TextBox 4"/>
+            <a:r>
+              <a:rPr sz="1600"/>
+              <a:t>poll -&gt; smooth -&gt; write, then </a:t>
+            </a:r>
+            <a:r>
+              <a:rPr sz="1400">
+                <a:latin typeface="Consolas"/>
+              </a:rPr>
+              <a:t>GetInputs()</a:t>
+            </a:r>
+            <a:r>
+              <a:rPr sz="1600"/>
+              <a:t> as before; the physics loop never waits on the device</a:t>
+            </a:r>
+          </a:p>
+          <a:p>
+            <a:r>
+              <a:rPr sz="1600"/>
+              <a:t>Feedback goes back at render rate (50 Hz), not every physics step - the human cannot use 333 Hz</a:t>
+            </a:r>
+          </a:p>
+        </p:txBody>
+      </p:sp>
+      <p:sp>
+        <p:nvSpPr>
+          <p:cNvPr id="5" name="Footer"/>
           <p:cNvSpPr txBox="1"/>
           <p:nvPr/>
         </p:nvSpPr>
@@ -7677,7 +8509,7 @@
       </p:sp>
       <p:sp>
         <p:nvSpPr>
-          <p:cNvPr id="6" name="TextBox 5"/>
+          <p:cNvPr id="6" name="PageNo"/>
           <p:cNvSpPr txBox="1"/>
           <p:nvPr/>
         </p:nvSpPr>
@@ -7732,179 +8564,71 @@
             <p:ph type="title"/>
           </p:nvPr>
         </p:nvSpPr>
-        <p:spPr>
-          <a:xfrm>
-            <a:off x="235228" y="150000"/>
-            <a:ext cx="9875520" cy="800000"/>
-          </a:xfrm>
-        </p:spPr>
+        <p:spPr/>
         <p:txBody>
           <a:bodyPr wrap="square"/>
           <a:lstStyle/>
           <a:p>
             <a:r>
               <a:rPr sz="2600"/>
-              <a:t>Step 3: Send state back at render rate (Lines 771 to 781)</a:t>
-            </a:r>
-          </a:p>
-        </p:txBody>
-      </p:sp>
-      <p:sp>
-        <p:nvSpPr>
-          <p:cNvPr id="3" name="TextBox 2"/>
+              <a:t>Show Time</a:t>
+            </a:r>
+          </a:p>
+        </p:txBody>
+      </p:sp>
+      <p:sp>
+        <p:nvSpPr>
+          <p:cNvPr id="3" name="Content Placeholder 2"/>
+          <p:cNvSpPr>
+            <a:spLocks noGrp="1"/>
+          </p:cNvSpPr>
+          <p:nvPr>
+            <p:ph idx="1"/>
+          </p:nvPr>
+        </p:nvSpPr>
+        <p:spPr/>
+        <p:txBody>
+          <a:bodyPr wrap="square"/>
+          <a:lstStyle/>
+          <a:p>
+            <a:pPr/>
+            <a:r>
+              <a:rPr sz="2000"/>
+              <a:t>Two terminals on one laptop over localhost - or two machines over the network, same code either way</a:t>
+            </a:r>
+          </a:p>
+          <a:p>
+            <a:pPr/>
+            <a:r>
+              <a:rPr sz="1800">
+                <a:latin typeface="Consolas"/>
+              </a:rPr>
+              <a:t>SEND_FEEDBACK = True</a:t>
+            </a:r>
+            <a:r>
+              <a:rPr sz="2000"/>
+              <a:t>: speed, RTF and lateral acceleration come back to the console while you drive</a:t>
+            </a:r>
+          </a:p>
+          <a:p>
+            <a:pPr/>
+            <a:r>
+              <a:rPr sz="2000"/>
+              <a:t>Stop the console mid-drive: the last input is held - what should a real simulator do here?</a:t>
+            </a:r>
+          </a:p>
+        </p:txBody>
+      </p:sp>
+      <p:sp>
+        <p:nvSpPr>
+          <p:cNvPr id="4" name="Footer"/>
           <p:cNvSpPr txBox="1"/>
           <p:nvPr/>
         </p:nvSpPr>
         <p:spPr>
           <a:xfrm>
-            <a:off x="0" y="1051560"/>
-            <a:ext cx="12192000" cy="2606040"/>
-          </a:xfrm>
-          <a:prstGeom prst="rect">
-            <a:avLst/>
-          </a:prstGeom>
-          <a:solidFill>
-            <a:srgbClr val="000000"/>
-          </a:solidFill>
-        </p:spPr>
-        <p:txBody>
-          <a:bodyPr wrap="none" lIns="300000" rIns="300000">
-            <a:noAutofit/>
-          </a:bodyPr>
-          <a:lstStyle/>
-          <a:p>
-            <a:r>
-              <a:rPr sz="1400">
-                <a:solidFill>
-                  <a:srgbClr val="CCCCCC"/>
-                </a:solidFill>
-                <a:latin typeface="Consolas"/>
-              </a:rPr>
-              <a:t># PART 4: feedback to the operator (speed, RTF, lateral acceleration, applied</a:t>
-            </a:r>
-          </a:p>
-          <a:p>
-            <a:r>
-              <a:rPr sz="1400">
-                <a:solidFill>
-                  <a:srgbClr val="CCCCCC"/>
-                </a:solidFill>
-                <a:latin typeface="Consolas"/>
-              </a:rPr>
-              <a:t># inputs, and since PART 6 the gear)</a:t>
-            </a:r>
-          </a:p>
-          <a:p>
-            <a:r>
-              <a:rPr sz="1400">
-                <a:solidFill>
-                  <a:srgbClr val="CCCCCC"/>
-                </a:solidFill>
-                <a:latin typeface="Consolas"/>
-              </a:rPr>
-              <a:t>if SEND_FEEDBACK and device is not None and step_number % render_steps == 0:</a:t>
-            </a:r>
-          </a:p>
-          <a:p>
-            <a:r>
-              <a:rPr sz="1400">
-                <a:solidFill>
-                  <a:srgbClr val="CCCCCC"/>
-                </a:solidFill>
-                <a:latin typeface="Consolas"/>
-              </a:rPr>
-              <a:t>    acc = (vehicle.GetPointAcceleration(chrono.ChVector3d(0, 0, 0)).y</a:t>
-            </a:r>
-          </a:p>
-          <a:p>
-            <a:r>
-              <a:rPr sz="1400">
-                <a:solidFill>
-                  <a:srgbClr val="CCCCCC"/>
-                </a:solidFill>
-                <a:latin typeface="Consolas"/>
-              </a:rPr>
-              <a:t>           if vehicle else 0.0)</a:t>
-            </a:r>
-          </a:p>
-          <a:p>
-            <a:r>
-              <a:rPr sz="1400">
-                <a:solidFill>
-                  <a:srgbClr val="CCCCCC"/>
-                </a:solidFill>
-                <a:latin typeface="Consolas"/>
-              </a:rPr>
-              <a:t>    rtf = vehicle.GetRTF() if vehicle else 0.0</a:t>
-            </a:r>
-          </a:p>
-          <a:p>
-            <a:r>
-              <a:rPr sz="1400">
-                <a:solidFill>
-                  <a:srgbClr val="CCCCCC"/>
-                </a:solidFill>
-                <a:latin typeface="Consolas"/>
-              </a:rPr>
-              <a:t>    gear = gearbox.describe() if gearbox else plant.status() or "--"</a:t>
-            </a:r>
-          </a:p>
-          <a:p>
-            <a:r>
-              <a:rPr sz="1400">
-                <a:solidFill>
-                  <a:srgbClr val="CCCCCC"/>
-                </a:solidFill>
-                <a:latin typeface="Consolas"/>
-              </a:rPr>
-              <a:t>    device.send_feedback(</a:t>
-            </a:r>
-          </a:p>
-          <a:p>
-            <a:r>
-              <a:rPr sz="1400">
-                <a:solidFill>
-                  <a:srgbClr val="CCCCCC"/>
-                </a:solidFill>
-                <a:latin typeface="Consolas"/>
-              </a:rPr>
-              <a:t>        f"{sim_time:.3f},{plant.speed():.3f},{rtf:.3f},{acc:.3f},"</a:t>
-            </a:r>
-          </a:p>
-          <a:p>
-            <a:r>
-              <a:rPr sz="1400">
-                <a:solidFill>
-                  <a:srgbClr val="CCCCCC"/>
-                </a:solidFill>
-                <a:latin typeface="Consolas"/>
-              </a:rPr>
-              <a:t>        f"{driver_inputs.m_steering:.3f},{driver_inputs.m_throttle:.3f},"</a:t>
-            </a:r>
-          </a:p>
-          <a:p>
-            <a:r>
-              <a:rPr sz="1400">
-                <a:solidFill>
-                  <a:srgbClr val="CCCCCC"/>
-                </a:solidFill>
-                <a:latin typeface="Consolas"/>
-              </a:rPr>
-              <a:t>        f"{driver_inputs.m_braking:.3f},{gear}")</a:t>
-            </a:r>
-          </a:p>
-        </p:txBody>
-      </p:sp>
-      <p:sp>
-        <p:nvSpPr>
-          <p:cNvPr id="4" name="TextBox 3"/>
-          <p:cNvSpPr txBox="1"/>
-          <p:nvPr/>
-        </p:nvSpPr>
-        <p:spPr>
-          <a:xfrm>
-            <a:off x="400000" y="3794760"/>
-            <a:ext cx="11392000" cy="1005840"/>
+            <a:off x="310974" y="6645811"/>
+            <a:ext cx="11644805" cy="188527"/>
           </a:xfrm>
           <a:prstGeom prst="rect">
             <a:avLst/>
@@ -7912,48 +8636,6 @@
           <a:noFill/>
         </p:spPr>
         <p:txBody>
-          <a:bodyPr wrap="square">
-            <a:spAutoFit/>
-          </a:bodyPr>
-          <a:lstStyle/>
-          <a:p>
-            <a:pPr/>
-            <a:r>
-              <a:rPr sz="1800"/>
-              <a:t>Speed, RTF and lateral acceleration go back to whoever sent us inputs (UdpInput remembers the address)</a:t>
-            </a:r>
-          </a:p>
-          <a:p>
-            <a:r>
-              <a:rPr sz="1800"/>
-              <a:t>Send at render rate (50 Hz), not at every physics step - the human cannot use 333 Hz</a:t>
-            </a:r>
-          </a:p>
-          <a:p>
-            <a:r>
-              <a:rPr sz="1800"/>
-              <a:t>Whatever the plant is, the packet has the same shape: the console renders a crane's swing angle the same way it renders a gear</a:t>
-            </a:r>
-          </a:p>
-        </p:txBody>
-      </p:sp>
-      <p:sp>
-        <p:nvSpPr>
-          <p:cNvPr id="5" name="TextBox 4"/>
-          <p:cNvSpPr txBox="1"/>
-          <p:nvPr/>
-        </p:nvSpPr>
-        <p:spPr>
-          <a:xfrm>
-            <a:off x="310974" y="6645811"/>
-            <a:ext cx="11644805" cy="188527"/>
-          </a:xfrm>
-          <a:prstGeom prst="rect">
-            <a:avLst/>
-          </a:prstGeom>
-          <a:noFill/>
-        </p:spPr>
-        <p:txBody>
           <a:bodyPr wrap="none">
             <a:spAutoFit/>
           </a:bodyPr>
@@ -7968,7 +8650,7 @@
       </p:sp>
       <p:sp>
         <p:nvSpPr>
-          <p:cNvPr id="6" name="TextBox 5"/>
+          <p:cNvPr id="5" name="PageNo"/>
           <p:cNvSpPr txBox="1"/>
           <p:nvPr/>
         </p:nvSpPr>
@@ -8023,19 +8705,14 @@
             <p:ph type="title"/>
           </p:nvPr>
         </p:nvSpPr>
-        <p:spPr>
-          <a:xfrm>
-            <a:off x="235228" y="150000"/>
-            <a:ext cx="9875520" cy="800000"/>
-          </a:xfrm>
-        </p:spPr>
+        <p:spPr/>
         <p:txBody>
           <a:bodyPr wrap="square"/>
           <a:lstStyle/>
           <a:p>
             <a:r>
               <a:rPr sz="2600"/>
-              <a:t>Show Time</a:t>
+              <a:t>How far this goes: gear, ground, and plant</a:t>
             </a:r>
           </a:p>
         </p:txBody>
@@ -8058,28 +8735,119 @@
             <a:pPr/>
             <a:r>
               <a:rPr sz="2000"/>
-              <a:t>Two terminals on one laptop over localhost - or two machines over the network, same code either way</a:t>
+              <a:t>PART 6 - change gear. A gear is not a fourth float: it belongs to the vehicle, not to the driver</a:t>
+            </a:r>
+          </a:p>
+          <a:p>
+            <a:pPr lvl="1"/>
+            <a:r>
+              <a:rPr sz="1800"/>
+              <a:t>the keyboard binds </a:t>
+            </a:r>
+            <a:r>
+              <a:rPr sz="1600">
+                <a:latin typeface="Consolas"/>
+              </a:rPr>
+              <a:t>Z X T [ ]</a:t>
+            </a:r>
+            <a:r>
+              <a:rPr sz="1800"/>
+              <a:t> for free once </a:t>
+            </a:r>
+            <a:r>
+              <a:rPr sz="1600">
+                <a:latin typeface="Consolas"/>
+              </a:rPr>
+              <a:t>AttachDriver</a:t>
+            </a:r>
+            <a:r>
+              <a:rPr sz="1800"/>
+              <a:t> is called; a socket needs an adapter and a 4th field</a:t>
+            </a:r>
+          </a:p>
+          <a:p>
+            <a:pPr lvl="1"/>
+            <a:r>
+              <a:rPr sz="1800"/>
+              <a:t>a level is held, an event is drained - one press of ']' is one upshift, not "keep upshifting"</a:t>
             </a:r>
           </a:p>
           <a:p>
             <a:pPr/>
             <a:r>
               <a:rPr sz="2000"/>
-              <a:t>SEND_FEEDBACK = True: speed, RTF and lateral acceleration come back to the console while you drive</a:t>
+              <a:t>PART 7 - drive somewhere real. </a:t>
+            </a:r>
+            <a:r>
+              <a:rPr sz="1800">
+                <a:latin typeface="Consolas"/>
+              </a:rPr>
+              <a:t>SCENE = "mcity"</a:t>
+            </a:r>
+            <a:r>
+              <a:rPr sz="2000"/>
+              <a:t> puts the car in the Mcity digital twin</a:t>
+            </a:r>
+          </a:p>
+          <a:p>
+            <a:pPr lvl="1"/>
+            <a:r>
+              <a:rPr sz="1800"/>
+              <a:t>road surface as a collision mesh, 860 scenery placements over 230 meshes, </a:t>
+            </a:r>
+            <a:r>
+              <a:rPr sz="1600">
+                <a:latin typeface="Consolas"/>
+              </a:rPr>
+              <a:t>MCITY_DETAIL</a:t>
+            </a:r>
+            <a:r>
+              <a:rPr sz="1800"/>
+              <a:t> trades scenery for frame rate</a:t>
             </a:r>
           </a:p>
           <a:p>
             <a:pPr/>
             <a:r>
               <a:rPr sz="2000"/>
-              <a:t>Stop the console mid-drive: the last input is held - what should a real simulator do here?</a:t>
-            </a:r>
-          </a:p>
-        </p:txBody>
-      </p:sp>
-      <p:sp>
-        <p:nvSpPr>
-          <p:cNvPr id="4" name="TextBox 3"/>
+              <a:t>PART 8 - control something that isn't a car. </a:t>
+            </a:r>
+            <a:r>
+              <a:rPr sz="1800">
+                <a:latin typeface="Consolas"/>
+              </a:rPr>
+              <a:t>PLANT = "rover"</a:t>
+            </a:r>
+            <a:r>
+              <a:rPr sz="2000"/>
+              <a:t> or </a:t>
+            </a:r>
+            <a:r>
+              <a:rPr sz="1800">
+                <a:latin typeface="Consolas"/>
+              </a:rPr>
+              <a:t>"crane"</a:t>
+            </a:r>
+          </a:p>
+          <a:p>
+            <a:pPr lvl="1"/>
+            <a:r>
+              <a:rPr sz="1800"/>
+              <a:t>the crane has no Chrono::Vehicle at all, and the payload swings with nothing to damp it but the operator</a:t>
+            </a:r>
+          </a:p>
+          <a:p>
+            <a:pPr/>
+            <a:r>
+              <a:rPr sz="2000"/>
+              <a:t>All three ride the same loop, the same three numbers, and the same operator console, unchanged</a:t>
+            </a:r>
+          </a:p>
+        </p:txBody>
+      </p:sp>
+      <p:sp>
+        <p:nvSpPr>
+          <p:cNvPr id="4" name="Footer"/>
           <p:cNvSpPr txBox="1"/>
           <p:nvPr/>
         </p:nvSpPr>
@@ -8108,7 +8876,7 @@
       </p:sp>
       <p:sp>
         <p:nvSpPr>
-          <p:cNvPr id="5" name="TextBox 4"/>
+          <p:cNvPr id="5" name="PageNo"/>
           <p:cNvSpPr txBox="1"/>
           <p:nvPr/>
         </p:nvSpPr>
@@ -8169,35 +8937,108 @@
           <a:lstStyle/>
           <a:p>
             <a:r>
-              <a:t>Parts 6-8: the same loop, three more things</a:t>
-            </a:r>
-          </a:p>
-        </p:txBody>
-      </p:sp>
-      <p:sp>
-        <p:nvSpPr>
-          <p:cNvPr id="3" name="Text Placeholder 2"/>
-          <p:cNvSpPr>
-            <a:spLocks noGrp="1"/>
-          </p:cNvSpPr>
-          <p:nvPr>
-            <p:ph type="body" idx="1"/>
+              <a:rPr sz="2600"/>
+              <a:t>Where this goes next</a:t>
+            </a:r>
+          </a:p>
+        </p:txBody>
+      </p:sp>
+      <p:sp>
+        <p:nvSpPr>
+          <p:cNvPr id="3" name="Content Placeholder 2"/>
+          <p:cNvSpPr>
+            <a:spLocks noGrp="1"/>
+          </p:cNvSpPr>
+          <p:nvPr>
+            <p:ph idx="1"/>
           </p:nvPr>
         </p:nvSpPr>
         <p:spPr/>
         <p:txBody>
-          <a:bodyPr/>
-          <a:lstStyle/>
-          <a:p>
-            <a:r>
-              <a:t>changing gear, driving somewhere real, and steering something that is not a car</a:t>
-            </a:r>
-          </a:p>
-        </p:txBody>
-      </p:sp>
-      <p:sp>
-        <p:nvSpPr>
-          <p:cNvPr id="4" name="TextBox footer"/>
+          <a:bodyPr wrap="square"/>
+          <a:lstStyle/>
+          <a:p>
+            <a:pPr/>
+            <a:r>
+              <a:rPr sz="2000"/>
+              <a:t>Chrono::HIL (github.com/zzhou292/chrono-HIL): the same three-float interface, scaled up</a:t>
+            </a:r>
+          </a:p>
+          <a:p>
+            <a:pPr lvl="1"/>
+            <a:r>
+              <a:rPr sz="1800"/>
+              <a:t>SDL steering wheels with force feedback, cumulative real-time timer, multi-vehicle traffic</a:t>
+            </a:r>
+          </a:p>
+          <a:p>
+            <a:pPr lvl="1"/>
+            <a:r>
+              <a:rPr sz="1800"/>
+              <a:t>ROS 2 and Unity bridges, teleoperation over the network, deformable (SCM) terrain</a:t>
+            </a:r>
+          </a:p>
+          <a:p>
+            <a:pPr/>
+            <a:r>
+              <a:rPr sz="2000"/>
+              <a:t>Chrono::Sensor: cameras/lidar rendered from the vehicle for the operator's screen</a:t>
+            </a:r>
+          </a:p>
+          <a:p>
+            <a:pPr/>
+            <a:r>
+              <a:rPr sz="2000"/>
+              <a:t>Chrono::Synchrono: several humans in the same world, each on their own machine</a:t>
+            </a:r>
+          </a:p>
+          <a:p>
+            <a:pPr/>
+            <a:r>
+              <a:rPr sz="2000"/>
+              <a:t>Takeaways</a:t>
+            </a:r>
+          </a:p>
+          <a:p>
+            <a:pPr lvl="1"/>
+            <a:r>
+              <a:rPr sz="1800"/>
+              <a:t>Real time in Chrono is soft: spin once per step, and measure the drift</a:t>
+            </a:r>
+          </a:p>
+          <a:p>
+            <a:pPr lvl="1"/>
+            <a:r>
+              <a:rPr sz="1800"/>
+              <a:t>The human interface is three floats per step, sampled once and smoothed</a:t>
+            </a:r>
+          </a:p>
+          <a:p>
+            <a:pPr lvl="1"/>
+            <a:r>
+              <a:rPr sz="1800"/>
+              <a:t>Never let the input device block the physics loop</a:t>
+            </a:r>
+          </a:p>
+          <a:p>
+            <a:pPr lvl="1"/>
+            <a:r>
+              <a:rPr sz="1800"/>
+              <a:t>Levels are held, events are drained - a gear is an event</a:t>
+            </a:r>
+          </a:p>
+          <a:p>
+            <a:pPr lvl="1"/>
+            <a:r>
+              <a:rPr sz="1800"/>
+              <a:t>Nothing in the pattern needs a vehicle: swap the plant, keep the loop</a:t>
+            </a:r>
+          </a:p>
+        </p:txBody>
+      </p:sp>
+      <p:sp>
+        <p:nvSpPr>
+          <p:cNvPr id="4" name="Footer"/>
           <p:cNvSpPr txBox="1"/>
           <p:nvPr/>
         </p:nvSpPr>
@@ -8226,7 +9067,7 @@
       </p:sp>
       <p:sp>
         <p:nvSpPr>
-          <p:cNvPr id="5" name="TextBox pageno"/>
+          <p:cNvPr id="5" name="PageNo"/>
           <p:cNvSpPr txBox="1"/>
           <p:nvPr/>
         </p:nvSpPr>
@@ -8287,201 +9128,38 @@
           <a:lstStyle/>
           <a:p>
             <a:r>
-              <a:rPr sz="2600"/>
-              <a:t>Part 6: Change gear - and why it is not a fourth float</a:t>
-            </a:r>
-          </a:p>
-        </p:txBody>
-      </p:sp>
-      <p:sp>
-        <p:nvSpPr>
-          <p:cNvPr id="3" name="TextBox 2"/>
+              <a:t>Any questions?</a:t>
+            </a:r>
+          </a:p>
+        </p:txBody>
+      </p:sp>
+      <p:sp>
+        <p:nvSpPr>
+          <p:cNvPr id="3" name="Text Placeholder 2"/>
+          <p:cNvSpPr>
+            <a:spLocks noGrp="1"/>
+          </p:cNvSpPr>
+          <p:nvPr>
+            <p:ph type="body" idx="1"/>
+          </p:nvPr>
+        </p:nvSpPr>
+        <p:spPr/>
+        <p:txBody>
+          <a:bodyPr/>
+          <a:lstStyle/>
+          <a:p/>
+        </p:txBody>
+      </p:sp>
+      <p:sp>
+        <p:nvSpPr>
+          <p:cNvPr id="4" name="Footer"/>
           <p:cNvSpPr txBox="1"/>
           <p:nvPr/>
         </p:nvSpPr>
         <p:spPr>
           <a:xfrm>
-            <a:off x="0" y="1051560"/>
-            <a:ext cx="12191969" cy="3017520"/>
-          </a:xfrm>
-          <a:prstGeom prst="rect">
-            <a:avLst/>
-          </a:prstGeom>
-          <a:solidFill>
-            <a:srgbClr val="000000"/>
-          </a:solidFill>
-        </p:spPr>
-        <p:txBody>
-          <a:bodyPr wrap="none" lIns="300000" rIns="300000">
-            <a:noAutofit/>
-          </a:bodyPr>
-          <a:lstStyle/>
-          <a:p>
-            <a:r>
-              <a:rPr sz="1300">
-                <a:solidFill>
-                  <a:srgbClr val="CCCCCC"/>
-                </a:solidFill>
-                <a:latin typeface="Consolas"/>
-              </a:rPr>
-              <a:t># A ChDriver carries three numbers, and a gear is not one of them: the</a:t>
-            </a:r>
-          </a:p>
-          <a:p>
-            <a:r>
-              <a:rPr sz="1300">
-                <a:solidFill>
-                  <a:srgbClr val="CCCCCC"/>
-                </a:solidFill>
-                <a:latin typeface="Consolas"/>
-              </a:rPr>
-              <a:t># gearbox belongs to the VEHICLE, so it is reached through the vehicle.</a:t>
-            </a:r>
-          </a:p>
-          <a:p>
-            <a:r>
-              <a:rPr sz="1300">
-                <a:solidFill>
-                  <a:srgbClr val="CCCCCC"/>
-                </a:solidFill>
-                <a:latin typeface="Consolas"/>
-              </a:rPr>
-              <a:t/>
-            </a:r>
-          </a:p>
-          <a:p>
-            <a:r>
-              <a:rPr sz="1300">
-                <a:solidFill>
-                  <a:srgbClr val="CCCCCC"/>
-                </a:solidFill>
-                <a:latin typeface="Consolas"/>
-              </a:rPr>
-              <a:t>transmission = vehicle.GetTransmission()</a:t>
-            </a:r>
-          </a:p>
-          <a:p>
-            <a:r>
-              <a:rPr sz="1300">
-                <a:solidFill>
-                  <a:srgbClr val="CCCCCC"/>
-                </a:solidFill>
-                <a:latin typeface="Consolas"/>
-              </a:rPr>
-              <a:t>transmission.ShiftUp()                        # or ShiftDown(), SetGear(n)</a:t>
-            </a:r>
-          </a:p>
-          <a:p>
-            <a:r>
-              <a:rPr sz="1300">
-                <a:solidFill>
-                  <a:srgbClr val="CCCCCC"/>
-                </a:solidFill>
-                <a:latin typeface="Consolas"/>
-              </a:rPr>
-              <a:t>transmission.asAutomatic().SetDriveMode(...)  # D / N / R</a:t>
-            </a:r>
-          </a:p>
-          <a:p>
-            <a:r>
-              <a:rPr sz="1300">
-                <a:solidFill>
-                  <a:srgbClr val="CCCCCC"/>
-                </a:solidFill>
-                <a:latin typeface="Consolas"/>
-              </a:rPr>
-              <a:t>transmission.asAutomatic().SetShiftMode(...)  # let it shift, or row it</a:t>
-            </a:r>
-          </a:p>
-          <a:p>
-            <a:r>
-              <a:rPr sz="1300">
-                <a:solidFill>
-                  <a:srgbClr val="CCCCCC"/>
-                </a:solidFill>
-                <a:latin typeface="Consolas"/>
-              </a:rPr>
-              <a:t/>
-            </a:r>
-          </a:p>
-          <a:p>
-            <a:r>
-              <a:rPr sz="1300">
-                <a:solidFill>
-                  <a:srgbClr val="CCCCCC"/>
-                </a:solidFill>
-                <a:latin typeface="Consolas"/>
-              </a:rPr>
-              <a:t># On the keyboard you write none of this - vis.AttachDriver(driver) binds:</a:t>
-            </a:r>
-          </a:p>
-          <a:p>
-            <a:r>
-              <a:rPr sz="1300">
-                <a:solidFill>
-                  <a:srgbClr val="CCCCCC"/>
-                </a:solidFill>
-                <a:latin typeface="Consolas"/>
-              </a:rPr>
-              <a:t>#     Z  D &lt;-&gt; R     X  neutral     T  AUTO &lt;-&gt; MANUAL     [ ]  down / up</a:t>
-            </a:r>
-          </a:p>
-          <a:p>
-            <a:r>
-              <a:rPr sz="1300">
-                <a:solidFill>
-                  <a:srgbClr val="CCCCCC"/>
-                </a:solidFill>
-                <a:latin typeface="Consolas"/>
-              </a:rPr>
-              <a:t>#</a:t>
-            </a:r>
-          </a:p>
-          <a:p>
-            <a:r>
-              <a:rPr sz="1300">
-                <a:solidFill>
-                  <a:srgbClr val="CCCCCC"/>
-                </a:solidFill>
-                <a:latin typeface="Consolas"/>
-              </a:rPr>
-              <a:t># For a device Chrono has never heard of, nothing is wired up. That is the</a:t>
-            </a:r>
-          </a:p>
-          <a:p>
-            <a:r>
-              <a:rPr sz="1300">
-                <a:solidFill>
-                  <a:srgbClr val="CCCCCC"/>
-                </a:solidFill>
-                <a:latin typeface="Consolas"/>
-              </a:rPr>
-              <a:t># point of PART 4: hil_gearbox.Gearbox turns one character off the socket</a:t>
-            </a:r>
-          </a:p>
-          <a:p>
-            <a:r>
-              <a:rPr sz="1300">
-                <a:solidFill>
-                  <a:srgbClr val="CCCCCC"/>
-                </a:solidFill>
-                <a:latin typeface="Consolas"/>
-              </a:rPr>
-              <a:t># into the calls above, and operator_console.py sends it in a 4th field.</a:t>
-            </a:r>
-          </a:p>
-        </p:txBody>
-      </p:sp>
-      <p:sp>
-        <p:nvSpPr>
-          <p:cNvPr id="4" name="TextBox 3"/>
-          <p:cNvSpPr txBox="1"/>
-          <p:nvPr/>
-        </p:nvSpPr>
-        <p:spPr>
-          <a:xfrm>
-            <a:off x="402336" y="4251960"/>
-            <a:ext cx="11393424" cy="1463040"/>
+            <a:off x="310974" y="6645811"/>
+            <a:ext cx="11644805" cy="188527"/>
           </a:xfrm>
           <a:prstGeom prst="rect">
             <a:avLst/>
@@ -8489,47 +9167,6 @@
           <a:noFill/>
         </p:spPr>
         <p:txBody>
-          <a:bodyPr wrap="square">
-            <a:spAutoFit/>
-          </a:bodyPr>
-          <a:lstStyle/>
-          <a:p>
-            <a:r>
-              <a:rPr sz="1800"/>
-              <a:t>A steering value is a LEVEL: re-sent every frame, and a lost packet costs nothing</a:t>
-            </a:r>
-          </a:p>
-          <a:p>
-            <a:r>
-              <a:rPr sz="1800"/>
-              <a:t>A gear change is an EVENT: a lost one is a shift that never happened - so it is sent once, on the key-down edge, and applied exactly once</a:t>
-            </a:r>
-          </a:p>
-          <a:p>
-            <a:r>
-              <a:rPr sz="1800"/>
-              <a:t>VEHICLE = "audi" is the only model here with a manual gearbox: it is assembled from JSON, not from a model wrapper class, and the wrappers each hard-code one powertrain</a:t>
-            </a:r>
-          </a:p>
-        </p:txBody>
-      </p:sp>
-      <p:sp>
-        <p:nvSpPr>
-          <p:cNvPr id="5" name="TextBox footer"/>
-          <p:cNvSpPr txBox="1"/>
-          <p:nvPr/>
-        </p:nvSpPr>
-        <p:spPr>
-          <a:xfrm>
-            <a:off x="310974" y="6645811"/>
-            <a:ext cx="11644805" cy="188527"/>
-          </a:xfrm>
-          <a:prstGeom prst="rect">
-            <a:avLst/>
-          </a:prstGeom>
-          <a:noFill/>
-        </p:spPr>
-        <p:txBody>
           <a:bodyPr wrap="none">
             <a:spAutoFit/>
           </a:bodyPr>
@@ -8544,7 +9181,7 @@
       </p:sp>
       <p:sp>
         <p:nvSpPr>
-          <p:cNvPr id="6" name="TextBox pageno"/>
+          <p:cNvPr id="5" name="PageNo"/>
           <p:cNvSpPr txBox="1"/>
           <p:nvPr/>
         </p:nvSpPr>
@@ -8591,130 +9228,14 @@
       <p:grpSpPr/>
       <p:sp>
         <p:nvSpPr>
-          <p:cNvPr id="2" name="Title 1"/>
-          <p:cNvSpPr>
-            <a:spLocks noGrp="1"/>
-          </p:cNvSpPr>
-          <p:nvPr>
-            <p:ph type="title"/>
-          </p:nvPr>
-        </p:nvSpPr>
-        <p:spPr/>
-        <p:txBody>
-          <a:bodyPr wrap="square"/>
-          <a:lstStyle/>
-          <a:p>
-            <a:r>
-              <a:rPr sz="2600"/>
-              <a:t>Part 7: Drive somewhere real - the Mcity digital twin</a:t>
-            </a:r>
-          </a:p>
-        </p:txBody>
-      </p:sp>
-      <p:sp>
-        <p:nvSpPr>
-          <p:cNvPr id="3" name="Content Placeholder 2"/>
-          <p:cNvSpPr>
-            <a:spLocks noGrp="1"/>
-          </p:cNvSpPr>
-          <p:nvPr>
-            <p:ph idx="1"/>
-          </p:nvPr>
-        </p:nvSpPr>
-        <p:spPr/>
-        <p:txBody>
-          <a:bodyPr wrap="square"/>
-          <a:lstStyle/>
-          <a:p>
-            <a:pPr/>
-            <a:r>
-              <a:rPr sz="1800">
-                <a:latin typeface="Consolas"/>
-              </a:rPr>
-              <a:t>SCENE = "mcity"</a:t>
-            </a:r>
-            <a:r>
-              <a:rPr sz="2000"/>
-              <a:t> swaps the 200 x 200 m patch for a real 32-acre test facility</a:t>
-            </a:r>
-          </a:p>
-          <a:p>
-            <a:pPr lvl="1"/>
-            <a:r>
-              <a:rPr sz="1800"/>
-              <a:t>road surface driven as a collision mesh; buildings, poles, signal heads drawn from a placement manifest</a:t>
-            </a:r>
-          </a:p>
-          <a:p>
-            <a:pPr lvl="1"/>
-            <a:r>
-              <a:rPr sz="1600">
-                <a:latin typeface="Consolas"/>
-              </a:rPr>
-              <a:t>MCITY_DETAIL</a:t>
-            </a:r>
-            <a:r>
-              <a:rPr sz="1800"/>
-              <a:t> = "ground" | "light" | "full" trades scenery for frame rate - start at "ground" on a laptop</a:t>
-            </a:r>
-          </a:p>
-          <a:p>
-            <a:pPr lvl="1"/>
-            <a:r>
-              <a:rPr sz="1800"/>
-              <a:t>860 placements cost 230 meshes: one ChVisualShape, added to a body many times, each time with its own frame</a:t>
-            </a:r>
-          </a:p>
-          <a:p>
-            <a:pPr/>
-            <a:r>
-              <a:rPr sz="2000"/>
-              <a:t>Third-party and generated, not shipped: a missing dataset falls back to flat terrain with instructions</a:t>
-            </a:r>
-          </a:p>
-          <a:p>
-            <a:pPr/>
-            <a:r>
-              <a:rPr sz="2000"/>
-              <a:t>Two things that cost time to rediscover:</a:t>
-            </a:r>
-          </a:p>
-          <a:p>
-            <a:pPr lvl="1"/>
-            <a:r>
-              <a:rPr sz="1800"/>
-              <a:t>Drive the DRAWN geometry: Mcity's OpenDRIVE elevation differs from the road mesh by -0.24 to +0.29 m (5th/95th pct)</a:t>
-            </a:r>
-          </a:p>
-          <a:p>
-            <a:pPr lvl="1"/>
-            <a:r>
-              <a:rPr sz="1800"/>
-              <a:t>Read the spawn height from the mesh: </a:t>
-            </a:r>
-            <a:r>
-              <a:rPr sz="1600">
-                <a:latin typeface="Consolas"/>
-              </a:rPr>
-              <a:t>RigidTerrain</a:t>
-            </a:r>
-            <a:r>
-              <a:rPr sz="1800"/>
-              <a:t> raycasts a collision system that does not exist yet and answers 0, which on a 274 m datum drops the car out of the world</a:t>
-            </a:r>
-          </a:p>
-        </p:txBody>
-      </p:sp>
-      <p:sp>
-        <p:nvSpPr>
-          <p:cNvPr id="4" name="TextBox footer"/>
+          <p:cNvPr id="2" name="TextBox 1"/>
           <p:cNvSpPr txBox="1"/>
           <p:nvPr/>
         </p:nvSpPr>
         <p:spPr>
           <a:xfrm>
-            <a:off x="310974" y="6645811"/>
-            <a:ext cx="11644805" cy="188527"/>
+            <a:off x="914400" y="1371600"/>
+            <a:ext cx="10058400" cy="4059936"/>
           </a:xfrm>
           <a:prstGeom prst="rect">
             <a:avLst/>
@@ -8722,28 +9243,71 @@
           <a:noFill/>
         </p:spPr>
         <p:txBody>
-          <a:bodyPr wrap="none">
+          <a:bodyPr wrap="square">
             <a:spAutoFit/>
           </a:bodyPr>
           <a:lstStyle/>
           <a:p>
             <a:r>
-              <a:rPr sz="1000"/>
+              <a:rPr sz="2000"/>
+              <a:t>Thank you.</a:t>
+            </a:r>
+          </a:p>
+          <a:p>
+            <a:r>
+              <a:rPr sz="2000"/>
+              <a:t>kasha2@wisc.edu</a:t>
+            </a:r>
+          </a:p>
+          <a:p>
+            <a:r>
+              <a:rPr sz="2000"/>
+              <a:t>Simulation-Based Engineering Lab</a:t>
+            </a:r>
+          </a:p>
+          <a:p>
+            <a:r>
+              <a:rPr sz="2000"/>
               <a:t>University of Wisconsin - Madison</a:t>
             </a:r>
           </a:p>
-        </p:txBody>
-      </p:sp>
-      <p:sp>
-        <p:nvSpPr>
-          <p:cNvPr id="5" name="TextBox pageno"/>
+          <a:p/>
+          <a:p>
+            <a:r>
+              <a:rPr sz="2000"/>
+              <a:t>Lab website: http://sbel.wisc.edu</a:t>
+            </a:r>
+          </a:p>
+          <a:p>
+            <a:r>
+              <a:rPr sz="2000"/>
+              <a:t>Chrono website: http://www.projectchrono.org</a:t>
+            </a:r>
+          </a:p>
+          <a:p>
+            <a:r>
+              <a:rPr sz="2000"/>
+              <a:t>Source code: https://github.com/projectchrono</a:t>
+            </a:r>
+          </a:p>
+          <a:p>
+            <a:r>
+              <a:rPr sz="2000"/>
+              <a:t>Tutorial code + slides: https://github.com/ksha23/chrono-hil-tutorial</a:t>
+            </a:r>
+          </a:p>
+        </p:txBody>
+      </p:sp>
+      <p:sp>
+        <p:nvSpPr>
+          <p:cNvPr id="3" name="Footer"/>
           <p:cNvSpPr txBox="1"/>
           <p:nvPr/>
         </p:nvSpPr>
         <p:spPr>
           <a:xfrm>
-            <a:off x="10249563" y="6646310"/>
-            <a:ext cx="1706217" cy="188028"/>
+            <a:off x="310974" y="6645811"/>
+            <a:ext cx="11644805" cy="188527"/>
           </a:xfrm>
           <a:prstGeom prst="rect">
             <a:avLst/>
@@ -8758,163 +9322,21 @@
           <a:p>
             <a:r>
               <a:rPr sz="1000"/>
-              <a:t>25</a:t>
-            </a:r>
-          </a:p>
-        </p:txBody>
-      </p:sp>
-    </p:spTree>
-  </p:cSld>
-  <p:clrMapOvr>
-    <a:masterClrMapping/>
-  </p:clrMapOvr>
-</p:sld>
-</file>
-
-<file path=ppt/slides/slide26.xml><?xml version="1.0" encoding="utf-8"?>
-<p:sld xmlns:a="http://schemas.openxmlformats.org/drawingml/2006/main" xmlns:p="http://schemas.openxmlformats.org/presentationml/2006/main" xmlns:r="http://schemas.openxmlformats.org/officeDocument/2006/relationships">
-  <p:cSld>
-    <p:spTree>
-      <p:nvGrpSpPr>
-        <p:cNvPr id="1" name=""/>
-        <p:cNvGrpSpPr/>
-        <p:nvPr/>
-      </p:nvGrpSpPr>
-      <p:grpSpPr/>
-      <p:sp>
-        <p:nvSpPr>
-          <p:cNvPr id="2" name="Title 1"/>
-          <p:cNvSpPr>
-            <a:spLocks noGrp="1"/>
-          </p:cNvSpPr>
-          <p:nvPr>
-            <p:ph type="title"/>
-          </p:nvPr>
-        </p:nvSpPr>
-        <p:spPr/>
-        <p:txBody>
-          <a:bodyPr wrap="square"/>
-          <a:lstStyle/>
-          <a:p>
-            <a:r>
-              <a:rPr sz="2600"/>
-              <a:t>Part 8: Control something that isn't a car</a:t>
-            </a:r>
-          </a:p>
-        </p:txBody>
-      </p:sp>
-      <p:sp>
-        <p:nvSpPr>
-          <p:cNvPr id="3" name="Content Placeholder 2"/>
-          <p:cNvSpPr>
-            <a:spLocks noGrp="1"/>
-          </p:cNvSpPr>
-          <p:nvPr>
-            <p:ph idx="1"/>
-          </p:nvPr>
-        </p:nvSpPr>
-        <p:spPr/>
-        <p:txBody>
-          <a:bodyPr wrap="square"/>
-          <a:lstStyle/>
-          <a:p>
-            <a:pPr/>
-            <a:r>
-              <a:rPr sz="1800">
-                <a:latin typeface="Consolas"/>
-              </a:rPr>
-              <a:t>PLANT</a:t>
-            </a:r>
-            <a:r>
-              <a:rPr sz="2000"/>
-              <a:t> switches what the same three numbers drive. The devices and the loop do not change</a:t>
-            </a:r>
-          </a:p>
-          <a:p>
-            <a:pPr lvl="1"/>
-            <a:r>
-              <a:rPr sz="1600">
-                <a:latin typeface="Consolas"/>
-              </a:rPr>
-              <a:t>"vehicle"</a:t>
-            </a:r>
-            <a:r>
-              <a:rPr sz="1800"/>
-              <a:t> a Chrono::Vehicle, as in Parts 1-7</a:t>
-            </a:r>
-          </a:p>
-          <a:p>
-            <a:pPr lvl="1"/>
-            <a:r>
-              <a:rPr sz="1600">
-                <a:latin typeface="Consolas"/>
-              </a:rPr>
-              <a:t>"rover"</a:t>
-            </a:r>
-            <a:r>
-              <a:rPr sz="1800"/>
-              <a:t> a Viper rover: steering -&gt; wheel angle, throttle -&gt; commanded wheel speed</a:t>
-            </a:r>
-          </a:p>
-          <a:p>
-            <a:pPr lvl="1"/>
-            <a:r>
-              <a:rPr sz="1600">
-                <a:latin typeface="Consolas"/>
-              </a:rPr>
-              <a:t>"crane"</a:t>
-            </a:r>
-            <a:r>
-              <a:rPr sz="1800"/>
-              <a:t> a gantry crane: steering -&gt; cross-travel, throttle/braking -&gt; forward/reverse travel</a:t>
-            </a:r>
-          </a:p>
-          <a:p>
-            <a:pPr/>
-            <a:r>
-              <a:rPr sz="2000"/>
-              <a:t>The crane has no Chrono::Vehicle at all: four bodies, two motors, a distance constraint</a:t>
-            </a:r>
-          </a:p>
-          <a:p>
-            <a:pPr lvl="1"/>
-            <a:r>
-              <a:rPr sz="1800"/>
-              <a:t>the payload swings with nothing to damp it but the operator - which is the whole point</a:t>
-            </a:r>
-          </a:p>
-          <a:p>
-            <a:pPr/>
-            <a:r>
-              <a:rPr sz="2000"/>
-              <a:t>No ChVehicle means no ChInteractiveDriver: both take input over UDP, console unchanged</a:t>
-            </a:r>
-          </a:p>
-          <a:p>
-            <a:pPr lvl="1"/>
-            <a:r>
-              <a:rPr sz="1600">
-                <a:latin typeface="Consolas"/>
-              </a:rPr>
-              <a:t>DriverInputs</a:t>
-            </a:r>
-            <a:r>
-              <a:rPr sz="1800"/>
-              <a:t> is the whole ChDriver contract in twelve lines of Python: three floats, three setters, GetInputs()</a:t>
-            </a:r>
-          </a:p>
-        </p:txBody>
-      </p:sp>
-      <p:sp>
-        <p:nvSpPr>
-          <p:cNvPr id="4" name="TextBox footer"/>
+              <a:t>University of Wisconsin - Madison</a:t>
+            </a:r>
+          </a:p>
+        </p:txBody>
+      </p:sp>
+      <p:sp>
+        <p:nvSpPr>
+          <p:cNvPr id="4" name="PageNo"/>
           <p:cNvSpPr txBox="1"/>
           <p:nvPr/>
         </p:nvSpPr>
         <p:spPr>
           <a:xfrm>
-            <a:off x="310974" y="6645811"/>
-            <a:ext cx="11644805" cy="188527"/>
+            <a:off x="10249563" y="6646310"/>
+            <a:ext cx="1706217" cy="188028"/>
           </a:xfrm>
           <a:prstGeom prst="rect">
             <a:avLst/>
@@ -8929,549 +9351,7 @@
           <a:p>
             <a:r>
               <a:rPr sz="1000"/>
-              <a:t>University of Wisconsin - Madison</a:t>
-            </a:r>
-          </a:p>
-        </p:txBody>
-      </p:sp>
-      <p:sp>
-        <p:nvSpPr>
-          <p:cNvPr id="5" name="TextBox pageno"/>
-          <p:cNvSpPr txBox="1"/>
-          <p:nvPr/>
-        </p:nvSpPr>
-        <p:spPr>
-          <a:xfrm>
-            <a:off x="10249563" y="6646310"/>
-            <a:ext cx="1706217" cy="188028"/>
-          </a:xfrm>
-          <a:prstGeom prst="rect">
-            <a:avLst/>
-          </a:prstGeom>
-          <a:noFill/>
-        </p:spPr>
-        <p:txBody>
-          <a:bodyPr wrap="none">
-            <a:spAutoFit/>
-          </a:bodyPr>
-          <a:lstStyle/>
-          <a:p>
-            <a:r>
-              <a:rPr sz="1000"/>
-              <a:t>26</a:t>
-            </a:r>
-          </a:p>
-        </p:txBody>
-      </p:sp>
-    </p:spTree>
-  </p:cSld>
-  <p:clrMapOvr>
-    <a:masterClrMapping/>
-  </p:clrMapOvr>
-</p:sld>
-</file>
-
-<file path=ppt/slides/slide27.xml><?xml version="1.0" encoding="utf-8"?>
-<p:sld xmlns:a="http://schemas.openxmlformats.org/drawingml/2006/main" xmlns:p="http://schemas.openxmlformats.org/presentationml/2006/main" xmlns:r="http://schemas.openxmlformats.org/officeDocument/2006/relationships">
-  <p:cSld>
-    <p:spTree>
-      <p:nvGrpSpPr>
-        <p:cNvPr id="1" name=""/>
-        <p:cNvGrpSpPr/>
-        <p:nvPr/>
-      </p:nvGrpSpPr>
-      <p:grpSpPr/>
-      <p:sp>
-        <p:nvSpPr>
-          <p:cNvPr id="2" name="Title 1"/>
-          <p:cNvSpPr>
-            <a:spLocks noGrp="1"/>
-          </p:cNvSpPr>
-          <p:nvPr>
-            <p:ph type="title"/>
-          </p:nvPr>
-        </p:nvSpPr>
-        <p:spPr/>
-        <p:txBody>
-          <a:bodyPr wrap="square"/>
-          <a:lstStyle/>
-          <a:p>
-            <a:r>
-              <a:rPr sz="2600"/>
-              <a:t>Show Time</a:t>
-            </a:r>
-          </a:p>
-        </p:txBody>
-      </p:sp>
-      <p:sp>
-        <p:nvSpPr>
-          <p:cNvPr id="3" name="Content Placeholder 2"/>
-          <p:cNvSpPr>
-            <a:spLocks noGrp="1"/>
-          </p:cNvSpPr>
-          <p:nvPr>
-            <p:ph idx="1"/>
-          </p:nvPr>
-        </p:nvSpPr>
-        <p:spPr/>
-        <p:txBody>
-          <a:bodyPr wrap="square"/>
-          <a:lstStyle/>
-          <a:p>
-            <a:pPr/>
-            <a:r>
-              <a:rPr sz="1800">
-                <a:latin typeface="Consolas"/>
-              </a:rPr>
-              <a:t>PLANT = "crane"</a:t>
-            </a:r>
-            <a:r>
-              <a:rPr sz="2000"/>
-              <a:t> over </a:t>
-            </a:r>
-            <a:r>
-              <a:rPr sz="1800">
-                <a:latin typeface="Consolas"/>
-              </a:rPr>
-              <a:t>udp</a:t>
-            </a:r>
-            <a:r>
-              <a:rPr sz="2000"/>
-              <a:t>: put the load on the green pad with the swing under 2 degrees</a:t>
-            </a:r>
-          </a:p>
-          <a:p>
-            <a:pPr lvl="1"/>
-            <a:r>
-              <a:rPr sz="1800"/>
-              <a:t>the console prints swing angle and miss distance - same telemetry path, same packet shape as the car</a:t>
-            </a:r>
-          </a:p>
-          <a:p>
-            <a:pPr/>
-            <a:r>
-              <a:rPr sz="1800">
-                <a:latin typeface="Consolas"/>
-              </a:rPr>
-              <a:t>VEHICLE = "audi"</a:t>
-            </a:r>
-            <a:r>
-              <a:rPr sz="2000"/>
-              <a:t>, </a:t>
-            </a:r>
-            <a:r>
-              <a:rPr sz="1800">
-                <a:latin typeface="Consolas"/>
-              </a:rPr>
-              <a:t>TRANSMISSION = "manual"</a:t>
-            </a:r>
-            <a:r>
-              <a:rPr sz="2000"/>
-              <a:t>: pull away in third and feel the engine bog down</a:t>
-            </a:r>
-          </a:p>
-          <a:p>
-            <a:pPr/>
-            <a:r>
-              <a:rPr sz="1800">
-                <a:latin typeface="Consolas"/>
-              </a:rPr>
-              <a:t>SCENE = "mcity"</a:t>
-            </a:r>
-            <a:r>
-              <a:rPr sz="2000"/>
-              <a:t> with </a:t>
-            </a:r>
-            <a:r>
-              <a:rPr sz="1800">
-                <a:latin typeface="Consolas"/>
-              </a:rPr>
-              <a:t>MCITY_DETAIL = "ground"</a:t>
-            </a:r>
-            <a:r>
-              <a:rPr sz="2000"/>
-              <a:t>: the same three numbers, somewhere real</a:t>
-            </a:r>
-          </a:p>
-          <a:p>
-            <a:pPr/>
-            <a:r>
-              <a:rPr sz="1800">
-                <a:latin typeface="Consolas"/>
-              </a:rPr>
-              <a:t>PLANT = "rover"</a:t>
-            </a:r>
-            <a:r>
-              <a:rPr sz="2000"/>
-              <a:t> and hold the brake: it coasts rather than stopping - ViperDriver has no brake input</a:t>
-            </a:r>
-          </a:p>
-        </p:txBody>
-      </p:sp>
-      <p:sp>
-        <p:nvSpPr>
-          <p:cNvPr id="4" name="TextBox footer"/>
-          <p:cNvSpPr txBox="1"/>
-          <p:nvPr/>
-        </p:nvSpPr>
-        <p:spPr>
-          <a:xfrm>
-            <a:off x="310974" y="6645811"/>
-            <a:ext cx="11644805" cy="188527"/>
-          </a:xfrm>
-          <a:prstGeom prst="rect">
-            <a:avLst/>
-          </a:prstGeom>
-          <a:noFill/>
-        </p:spPr>
-        <p:txBody>
-          <a:bodyPr wrap="none">
-            <a:spAutoFit/>
-          </a:bodyPr>
-          <a:lstStyle/>
-          <a:p>
-            <a:r>
-              <a:rPr sz="1000"/>
-              <a:t>University of Wisconsin - Madison</a:t>
-            </a:r>
-          </a:p>
-        </p:txBody>
-      </p:sp>
-      <p:sp>
-        <p:nvSpPr>
-          <p:cNvPr id="5" name="TextBox pageno"/>
-          <p:cNvSpPr txBox="1"/>
-          <p:nvPr/>
-        </p:nvSpPr>
-        <p:spPr>
-          <a:xfrm>
-            <a:off x="10249563" y="6646310"/>
-            <a:ext cx="1706217" cy="188028"/>
-          </a:xfrm>
-          <a:prstGeom prst="rect">
-            <a:avLst/>
-          </a:prstGeom>
-          <a:noFill/>
-        </p:spPr>
-        <p:txBody>
-          <a:bodyPr wrap="none">
-            <a:spAutoFit/>
-          </a:bodyPr>
-          <a:lstStyle/>
-          <a:p>
-            <a:r>
-              <a:rPr sz="1000"/>
-              <a:t>27</a:t>
-            </a:r>
-          </a:p>
-        </p:txBody>
-      </p:sp>
-    </p:spTree>
-  </p:cSld>
-  <p:clrMapOvr>
-    <a:masterClrMapping/>
-  </p:clrMapOvr>
-</p:sld>
-</file>
-
-<file path=ppt/slides/slide28.xml><?xml version="1.0" encoding="utf-8"?>
-<p:sld xmlns:a="http://schemas.openxmlformats.org/drawingml/2006/main" xmlns:p="http://schemas.openxmlformats.org/presentationml/2006/main" xmlns:r="http://schemas.openxmlformats.org/officeDocument/2006/relationships">
-  <p:cSld>
-    <p:spTree>
-      <p:nvGrpSpPr>
-        <p:cNvPr id="1" name=""/>
-        <p:cNvGrpSpPr/>
-        <p:nvPr/>
-      </p:nvGrpSpPr>
-      <p:grpSpPr/>
-      <p:sp>
-        <p:nvSpPr>
-          <p:cNvPr id="2" name="Title 1"/>
-          <p:cNvSpPr>
-            <a:spLocks noGrp="1"/>
-          </p:cNvSpPr>
-          <p:nvPr>
-            <p:ph type="title"/>
-          </p:nvPr>
-        </p:nvSpPr>
-        <p:spPr>
-          <a:xfrm>
-            <a:off x="235228" y="150000"/>
-            <a:ext cx="9875520" cy="800000"/>
-          </a:xfrm>
-        </p:spPr>
-        <p:txBody>
-          <a:bodyPr wrap="square"/>
-          <a:lstStyle/>
-          <a:p>
-            <a:r>
-              <a:rPr sz="2600"/>
-              <a:t>Where this goes next</a:t>
-            </a:r>
-          </a:p>
-        </p:txBody>
-      </p:sp>
-      <p:sp>
-        <p:nvSpPr>
-          <p:cNvPr id="3" name="Content Placeholder 2"/>
-          <p:cNvSpPr>
-            <a:spLocks noGrp="1"/>
-          </p:cNvSpPr>
-          <p:nvPr>
-            <p:ph idx="1"/>
-          </p:nvPr>
-        </p:nvSpPr>
-        <p:spPr/>
-        <p:txBody>
-          <a:bodyPr wrap="square"/>
-          <a:lstStyle/>
-          <a:p>
-            <a:pPr/>
-            <a:r>
-              <a:rPr sz="2000"/>
-              <a:t>Chrono::HIL (github.com/zzhou292/chrono-HIL): the same three-float interface, scaled up</a:t>
-            </a:r>
-          </a:p>
-          <a:p>
-            <a:pPr lvl="1"/>
-            <a:r>
-              <a:rPr sz="1800"/>
-              <a:t>SDL steering wheels with force feedback, cumulative real-time timer, multi-vehicle traffic</a:t>
-            </a:r>
-          </a:p>
-          <a:p>
-            <a:pPr lvl="1"/>
-            <a:r>
-              <a:rPr sz="1800"/>
-              <a:t>ROS 2 and Unity bridges, teleoperation over the network, deformable (SCM) terrain</a:t>
-            </a:r>
-          </a:p>
-          <a:p>
-            <a:pPr/>
-            <a:r>
-              <a:rPr sz="2000"/>
-              <a:t>Chrono::Sensor: cameras/lidar rendered from the vehicle for the operator's screen</a:t>
-            </a:r>
-          </a:p>
-          <a:p>
-            <a:pPr/>
-            <a:r>
-              <a:rPr sz="2000"/>
-              <a:t>Chrono::Synchrono: several humans in the same world, each on their own machine</a:t>
-            </a:r>
-          </a:p>
-          <a:p>
-            <a:pPr/>
-            <a:r>
-              <a:rPr sz="2000"/>
-              <a:t>Takeaways</a:t>
-            </a:r>
-          </a:p>
-          <a:p>
-            <a:pPr lvl="1"/>
-            <a:r>
-              <a:rPr sz="1800"/>
-              <a:t>Real time in Chrono is soft: spin once per step, and measure the drift</a:t>
-            </a:r>
-          </a:p>
-          <a:p>
-            <a:pPr lvl="1"/>
-            <a:r>
-              <a:rPr sz="1800"/>
-              <a:t>The human interface is three floats per step, sampled once and smoothed</a:t>
-            </a:r>
-          </a:p>
-          <a:p>
-            <a:pPr lvl="1"/>
-            <a:r>
-              <a:rPr sz="1800"/>
-              <a:t>Never let the input device block the physics loop</a:t>
-            </a:r>
-          </a:p>
-          <a:p>
-            <a:pPr lvl="1"/>
-            <a:r>
-              <a:rPr sz="1800"/>
-              <a:t>Levels are held, events are drained - a gear is an event</a:t>
-            </a:r>
-          </a:p>
-          <a:p>
-            <a:pPr lvl="1"/>
-            <a:r>
-              <a:rPr sz="1800"/>
-              <a:t>Nothing in the pattern needs a vehicle: swap the plant, keep the loop</a:t>
-            </a:r>
-          </a:p>
-        </p:txBody>
-      </p:sp>
-      <p:sp>
-        <p:nvSpPr>
-          <p:cNvPr id="4" name="TextBox 3"/>
-          <p:cNvSpPr txBox="1"/>
-          <p:nvPr/>
-        </p:nvSpPr>
-        <p:spPr>
-          <a:xfrm>
-            <a:off x="310974" y="6645811"/>
-            <a:ext cx="11644805" cy="188527"/>
-          </a:xfrm>
-          <a:prstGeom prst="rect">
-            <a:avLst/>
-          </a:prstGeom>
-          <a:noFill/>
-        </p:spPr>
-        <p:txBody>
-          <a:bodyPr wrap="none">
-            <a:spAutoFit/>
-          </a:bodyPr>
-          <a:lstStyle/>
-          <a:p>
-            <a:r>
-              <a:rPr sz="1000"/>
-              <a:t>University of Wisconsin - Madison</a:t>
-            </a:r>
-          </a:p>
-        </p:txBody>
-      </p:sp>
-      <p:sp>
-        <p:nvSpPr>
-          <p:cNvPr id="5" name="TextBox 4"/>
-          <p:cNvSpPr txBox="1"/>
-          <p:nvPr/>
-        </p:nvSpPr>
-        <p:spPr>
-          <a:xfrm>
-            <a:off x="10249563" y="6646310"/>
-            <a:ext cx="1706217" cy="188028"/>
-          </a:xfrm>
-          <a:prstGeom prst="rect">
-            <a:avLst/>
-          </a:prstGeom>
-          <a:noFill/>
-        </p:spPr>
-        <p:txBody>
-          <a:bodyPr wrap="none">
-            <a:spAutoFit/>
-          </a:bodyPr>
-          <a:lstStyle/>
-          <a:p>
-            <a:r>
-              <a:rPr sz="1000"/>
-              <a:t>28</a:t>
-            </a:r>
-          </a:p>
-        </p:txBody>
-      </p:sp>
-    </p:spTree>
-  </p:cSld>
-  <p:clrMapOvr>
-    <a:masterClrMapping/>
-  </p:clrMapOvr>
-</p:sld>
-</file>
-
-<file path=ppt/slides/slide29.xml><?xml version="1.0" encoding="utf-8"?>
-<p:sld xmlns:a="http://schemas.openxmlformats.org/drawingml/2006/main" xmlns:p="http://schemas.openxmlformats.org/presentationml/2006/main" xmlns:r="http://schemas.openxmlformats.org/officeDocument/2006/relationships">
-  <p:cSld>
-    <p:spTree>
-      <p:nvGrpSpPr>
-        <p:cNvPr id="1" name=""/>
-        <p:cNvGrpSpPr/>
-        <p:nvPr/>
-      </p:nvGrpSpPr>
-      <p:grpSpPr/>
-      <p:sp>
-        <p:nvSpPr>
-          <p:cNvPr id="2" name="Title 1"/>
-          <p:cNvSpPr>
-            <a:spLocks noGrp="1"/>
-          </p:cNvSpPr>
-          <p:nvPr>
-            <p:ph type="title"/>
-          </p:nvPr>
-        </p:nvSpPr>
-        <p:spPr/>
-        <p:txBody>
-          <a:bodyPr/>
-          <a:lstStyle/>
-          <a:p>
-            <a:r>
-              <a:t>Any questions?</a:t>
-            </a:r>
-          </a:p>
-        </p:txBody>
-      </p:sp>
-      <p:sp>
-        <p:nvSpPr>
-          <p:cNvPr id="3" name="Text Placeholder 2"/>
-          <p:cNvSpPr>
-            <a:spLocks noGrp="1"/>
-          </p:cNvSpPr>
-          <p:nvPr>
-            <p:ph type="body" idx="1"/>
-          </p:nvPr>
-        </p:nvSpPr>
-        <p:spPr/>
-        <p:txBody>
-          <a:bodyPr/>
-          <a:lstStyle/>
-          <a:p/>
-        </p:txBody>
-      </p:sp>
-      <p:sp>
-        <p:nvSpPr>
-          <p:cNvPr id="4" name="TextBox 3"/>
-          <p:cNvSpPr txBox="1"/>
-          <p:nvPr/>
-        </p:nvSpPr>
-        <p:spPr>
-          <a:xfrm>
-            <a:off x="310974" y="6645811"/>
-            <a:ext cx="11644805" cy="188527"/>
-          </a:xfrm>
-          <a:prstGeom prst="rect">
-            <a:avLst/>
-          </a:prstGeom>
-          <a:noFill/>
-        </p:spPr>
-        <p:txBody>
-          <a:bodyPr wrap="none">
-            <a:spAutoFit/>
-          </a:bodyPr>
-          <a:lstStyle/>
-          <a:p>
-            <a:r>
-              <a:rPr sz="1000"/>
-              <a:t>University of Wisconsin - Madison</a:t>
-            </a:r>
-          </a:p>
-        </p:txBody>
-      </p:sp>
-      <p:sp>
-        <p:nvSpPr>
-          <p:cNvPr id="5" name="TextBox 4"/>
-          <p:cNvSpPr txBox="1"/>
-          <p:nvPr/>
-        </p:nvSpPr>
-        <p:spPr>
-          <a:xfrm>
-            <a:off x="10249563" y="6646310"/>
-            <a:ext cx="1706217" cy="188028"/>
-          </a:xfrm>
-          <a:prstGeom prst="rect">
-            <a:avLst/>
-          </a:prstGeom>
-          <a:noFill/>
-        </p:spPr>
-        <p:txBody>
-          <a:bodyPr wrap="none">
-            <a:spAutoFit/>
-          </a:bodyPr>
-          <a:lstStyle/>
-          <a:p>
-            <a:r>
-              <a:rPr sz="1000"/>
-              <a:t>29</a:t>
+              <a:t>25</a:t>
             </a:r>
           </a:p>
         </p:txBody>
@@ -9504,19 +9384,14 @@
             <p:ph type="title"/>
           </p:nvPr>
         </p:nvSpPr>
-        <p:spPr>
-          <a:xfrm>
-            <a:off x="235228" y="150000"/>
-            <a:ext cx="9875520" cy="800000"/>
-          </a:xfrm>
-        </p:spPr>
+        <p:spPr/>
         <p:txBody>
           <a:bodyPr wrap="square"/>
           <a:lstStyle/>
           <a:p>
             <a:r>
               <a:rPr sz="2600"/>
-              <a:t>Before we start ......</a:t>
+              <a:t>A load on a cable, and a pad to put it on</a:t>
             </a:r>
           </a:p>
         </p:txBody>
@@ -9539,77 +9414,56 @@
             <a:pPr/>
             <a:r>
               <a:rPr sz="2000"/>
-              <a:t>This is a walkthrough - nothing to install right now; everything runs on my machine</a:t>
+              <a:t>A gantry crane: four rigid bodies, two speed motors, and a payload hanging on a distance constraint</a:t>
+            </a:r>
+          </a:p>
+          <a:p>
+            <a:pPr lvl="1"/>
+            <a:r>
+              <a:rPr sz="1800"/>
+              <a:t>no Chrono::Vehicle anywhere in it, and no autopilot either</a:t>
             </a:r>
           </a:p>
           <a:p>
             <a:pPr/>
             <a:r>
               <a:rPr sz="2000"/>
-              <a:t>Code, slides and a written walkthrough: github.com/ksha23/chrono-hil-tutorial</a:t>
+              <a:t>Steering drives the trolley across, throttle and braking drive it along the rail</a:t>
+            </a:r>
+          </a:p>
+          <a:p>
+            <a:pPr lvl="1"/>
+            <a:r>
+              <a:rPr sz="1800"/>
+              <a:t>the load then does whatever physics says, and it swings, with nothing to damp it but you</a:t>
             </a:r>
           </a:p>
           <a:p>
             <a:pPr/>
             <a:r>
               <a:rPr sz="2000"/>
-              <a:t>To run it yourself afterward:</a:t>
+              <a:t>The task: set it down on the green pad with the swing under 2 degrees</a:t>
             </a:r>
           </a:p>
           <a:p>
             <a:pPr lvl="1"/>
             <a:r>
-              <a:rPr sz="1800">
-                <a:latin typeface="Consolas"/>
-              </a:rPr>
-              <a:t>conda create -n chrono_hil -c projectchrono -c conda-forge pychrono pygame python=3.13</a:t>
-            </a:r>
-          </a:p>
-          <a:p>
-            <a:pPr lvl="1"/>
-            <a:r>
-              <a:rPr sz="1800">
-                <a:latin typeface="Consolas"/>
-              </a:rPr>
-              <a:t>conda activate chrono_hil</a:t>
+              <a:rPr sz="1800"/>
+              <a:t>the console prints the swing angle and how far the load is from the pad</a:t>
             </a:r>
           </a:p>
           <a:p>
             <a:pPr/>
             <a:r>
               <a:rPr sz="2000"/>
-              <a:t>Do NOT </a:t>
-            </a:r>
-            <a:r>
-              <a:rPr sz="1800">
-                <a:latin typeface="Consolas"/>
-              </a:rPr>
-              <a:t>pip install pychrono</a:t>
-            </a:r>
-            <a:r>
-              <a:rPr sz="2000"/>
-              <a:t> - the PyPI package with that name is an unrelated library</a:t>
-            </a:r>
-          </a:p>
-          <a:p>
-            <a:pPr/>
-            <a:r>
-              <a:rPr sz="2000"/>
-              <a:t>python tutorial_HIL_driver.py opens an Irrlicht window with an HMMWV - drive it with W/A/S/D</a:t>
-            </a:r>
-          </a:p>
-          <a:p>
-            <a:pPr/>
-            <a:r>
-              <a:rPr sz="2000"/>
-              <a:t>All switches are in the CONFIGURATION section at the bottom of tutorial_HIL_driver.py</a:t>
-            </a:r>
-          </a:p>
-        </p:txBody>
-      </p:sp>
-      <p:sp>
-        <p:nvSpPr>
-          <p:cNvPr id="4" name="TextBox 3"/>
+              <a:t>It is genuinely hard, and that difficulty is the entire argument for putting a human in a simulation loop</a:t>
+            </a:r>
+          </a:p>
+        </p:txBody>
+      </p:sp>
+      <p:sp>
+        <p:nvSpPr>
+          <p:cNvPr id="4" name="Footer"/>
           <p:cNvSpPr txBox="1"/>
           <p:nvPr/>
         </p:nvSpPr>
@@ -9638,7 +9492,7 @@
       </p:sp>
       <p:sp>
         <p:nvSpPr>
-          <p:cNvPr id="5" name="TextBox 4"/>
+          <p:cNvPr id="5" name="PageNo"/>
           <p:cNvSpPr txBox="1"/>
           <p:nvPr/>
         </p:nvSpPr>
@@ -9661,164 +9515,6 @@
             <a:r>
               <a:rPr sz="1000"/>
               <a:t>3</a:t>
-            </a:r>
-          </a:p>
-        </p:txBody>
-      </p:sp>
-    </p:spTree>
-  </p:cSld>
-  <p:clrMapOvr>
-    <a:masterClrMapping/>
-  </p:clrMapOvr>
-</p:sld>
-</file>
-
-<file path=ppt/slides/slide30.xml><?xml version="1.0" encoding="utf-8"?>
-<p:sld xmlns:a="http://schemas.openxmlformats.org/drawingml/2006/main" xmlns:p="http://schemas.openxmlformats.org/presentationml/2006/main" xmlns:r="http://schemas.openxmlformats.org/officeDocument/2006/relationships">
-  <p:cSld>
-    <p:spTree>
-      <p:nvGrpSpPr>
-        <p:cNvPr id="1" name=""/>
-        <p:cNvGrpSpPr/>
-        <p:nvPr/>
-      </p:nvGrpSpPr>
-      <p:grpSpPr/>
-      <p:sp>
-        <p:nvSpPr>
-          <p:cNvPr id="2" name="TextBox 1"/>
-          <p:cNvSpPr txBox="1"/>
-          <p:nvPr/>
-        </p:nvSpPr>
-        <p:spPr>
-          <a:xfrm>
-            <a:off x="914400" y="1371600"/>
-            <a:ext cx="10058400" cy="4057600"/>
-          </a:xfrm>
-          <a:prstGeom prst="rect">
-            <a:avLst/>
-          </a:prstGeom>
-          <a:noFill/>
-        </p:spPr>
-        <p:txBody>
-          <a:bodyPr wrap="square">
-            <a:spAutoFit/>
-          </a:bodyPr>
-          <a:lstStyle/>
-          <a:p>
-            <a:pPr/>
-            <a:r>
-              <a:rPr sz="2000"/>
-              <a:t>Thank you.</a:t>
-            </a:r>
-          </a:p>
-          <a:p>
-            <a:pPr/>
-            <a:r>
-              <a:rPr sz="2000"/>
-              <a:t>kasha2@wisc.edu</a:t>
-            </a:r>
-          </a:p>
-          <a:p>
-            <a:pPr/>
-            <a:r>
-              <a:rPr sz="2000"/>
-              <a:t>Simulation-Based Engineering Lab</a:t>
-            </a:r>
-          </a:p>
-          <a:p>
-            <a:pPr/>
-            <a:r>
-              <a:rPr sz="2000"/>
-              <a:t>University of Wisconsin - Madison</a:t>
-            </a:r>
-          </a:p>
-          <a:p>
-            <a:pPr/>
-          </a:p>
-          <a:p>
-            <a:pPr/>
-            <a:r>
-              <a:rPr sz="2000"/>
-              <a:t>Lab website: http://sbel.wisc.edu</a:t>
-            </a:r>
-          </a:p>
-          <a:p>
-            <a:pPr/>
-            <a:r>
-              <a:rPr sz="2000"/>
-              <a:t>Chrono website: http://www.projectchrono.org</a:t>
-            </a:r>
-          </a:p>
-          <a:p>
-            <a:pPr/>
-            <a:r>
-              <a:rPr sz="2000"/>
-              <a:t>Source code: https://github.com/projectchrono</a:t>
-            </a:r>
-          </a:p>
-          <a:p>
-            <a:pPr/>
-            <a:r>
-              <a:rPr sz="2000"/>
-              <a:t>Tutorial code + slides: https://github.com/ksha23/chrono-hil-tutorial</a:t>
-            </a:r>
-          </a:p>
-        </p:txBody>
-      </p:sp>
-      <p:sp>
-        <p:nvSpPr>
-          <p:cNvPr id="3" name="TextBox 2"/>
-          <p:cNvSpPr txBox="1"/>
-          <p:nvPr/>
-        </p:nvSpPr>
-        <p:spPr>
-          <a:xfrm>
-            <a:off x="310974" y="6645811"/>
-            <a:ext cx="11644805" cy="188527"/>
-          </a:xfrm>
-          <a:prstGeom prst="rect">
-            <a:avLst/>
-          </a:prstGeom>
-          <a:noFill/>
-        </p:spPr>
-        <p:txBody>
-          <a:bodyPr wrap="none">
-            <a:spAutoFit/>
-          </a:bodyPr>
-          <a:lstStyle/>
-          <a:p>
-            <a:r>
-              <a:rPr sz="1000"/>
-              <a:t>University of Wisconsin - Madison</a:t>
-            </a:r>
-          </a:p>
-        </p:txBody>
-      </p:sp>
-      <p:sp>
-        <p:nvSpPr>
-          <p:cNvPr id="4" name="TextBox 3"/>
-          <p:cNvSpPr txBox="1"/>
-          <p:nvPr/>
-        </p:nvSpPr>
-        <p:spPr>
-          <a:xfrm>
-            <a:off x="10249563" y="6646310"/>
-            <a:ext cx="1706217" cy="188028"/>
-          </a:xfrm>
-          <a:prstGeom prst="rect">
-            <a:avLst/>
-          </a:prstGeom>
-          <a:noFill/>
-        </p:spPr>
-        <p:txBody>
-          <a:bodyPr wrap="none">
-            <a:spAutoFit/>
-          </a:bodyPr>
-          <a:lstStyle/>
-          <a:p>
-            <a:r>
-              <a:rPr sz="1000"/>
-              <a:t>30</a:t>
             </a:r>
           </a:p>
         </p:txBody>
@@ -9853,35 +9549,72 @@
         </p:nvSpPr>
         <p:spPr/>
         <p:txBody>
-          <a:bodyPr/>
-          <a:lstStyle/>
-          <a:p>
-            <a:r>
-              <a:t>Part 1: Keep the simulation real-time</a:t>
-            </a:r>
-          </a:p>
-        </p:txBody>
-      </p:sp>
-      <p:sp>
-        <p:nvSpPr>
-          <p:cNvPr id="3" name="Text Placeholder 2"/>
-          <p:cNvSpPr>
-            <a:spLocks noGrp="1"/>
-          </p:cNvSpPr>
-          <p:nvPr>
-            <p:ph type="body" idx="1"/>
+          <a:bodyPr wrap="square"/>
+          <a:lstStyle/>
+          <a:p>
+            <a:r>
+              <a:rPr sz="2600"/>
+              <a:t>Show Time</a:t>
+            </a:r>
+          </a:p>
+        </p:txBody>
+      </p:sp>
+      <p:sp>
+        <p:nvSpPr>
+          <p:cNvPr id="3" name="Content Placeholder 2"/>
+          <p:cNvSpPr>
+            <a:spLocks noGrp="1"/>
+          </p:cNvSpPr>
+          <p:nvPr>
+            <p:ph idx="1"/>
           </p:nvPr>
         </p:nvSpPr>
         <p:spPr/>
         <p:txBody>
-          <a:bodyPr/>
-          <a:lstStyle/>
-          <a:p/>
-        </p:txBody>
-      </p:sp>
-      <p:sp>
-        <p:nvSpPr>
-          <p:cNvPr id="4" name="TextBox 3"/>
+          <a:bodyPr wrap="square"/>
+          <a:lstStyle/>
+          <a:p>
+            <a:pPr/>
+            <a:r>
+              <a:rPr sz="1800">
+                <a:latin typeface="Consolas"/>
+              </a:rPr>
+              <a:t>PLANT = "crane"</a:t>
+            </a:r>
+            <a:r>
+              <a:rPr sz="2000"/>
+              <a:t>, </a:t>
+            </a:r>
+            <a:r>
+              <a:rPr sz="1800">
+                <a:latin typeface="Consolas"/>
+              </a:rPr>
+              <a:t>INPUT_SOURCE = "udp"</a:t>
+            </a:r>
+            <a:r>
+              <a:rPr sz="2000"/>
+              <a:t> - the operator console in a second terminal</a:t>
+            </a:r>
+          </a:p>
+          <a:p>
+            <a:pPr/>
+            <a:r>
+              <a:rPr sz="2000"/>
+              <a:t>Watch what the operator is doing: leading the swing, not chasing it. No controller here is doing that</a:t>
+            </a:r>
+          </a:p>
+          <a:p>
+            <a:pPr/>
+            <a:r>
+              <a:rPr sz="2000"/>
+              <a:t>Nothing on screen is vehicle-specific. So what does Chrono actually require of a human interface?</a:t>
+            </a:r>
+          </a:p>
+        </p:txBody>
+      </p:sp>
+      <p:sp>
+        <p:nvSpPr>
+          <p:cNvPr id="4" name="Footer"/>
           <p:cNvSpPr txBox="1"/>
           <p:nvPr/>
         </p:nvSpPr>
@@ -9910,7 +9643,7 @@
       </p:sp>
       <p:sp>
         <p:nvSpPr>
-          <p:cNvPr id="5" name="TextBox 4"/>
+          <p:cNvPr id="5" name="PageNo"/>
           <p:cNvSpPr txBox="1"/>
           <p:nvPr/>
         </p:nvSpPr>
@@ -9965,118 +9698,262 @@
             <p:ph type="title"/>
           </p:nvPr>
         </p:nvSpPr>
-        <p:spPr>
-          <a:xfrm>
-            <a:off x="235228" y="150000"/>
-            <a:ext cx="9875520" cy="800000"/>
-          </a:xfrm>
-        </p:spPr>
+        <p:spPr/>
         <p:txBody>
           <a:bodyPr wrap="square"/>
           <a:lstStyle/>
           <a:p>
             <a:r>
               <a:rPr sz="2600"/>
-              <a:t>What "real-time" means in Chrono</a:t>
-            </a:r>
-          </a:p>
-        </p:txBody>
-      </p:sp>
-      <p:sp>
-        <p:nvSpPr>
-          <p:cNvPr id="3" name="Content Placeholder 2"/>
-          <p:cNvSpPr>
-            <a:spLocks noGrp="1"/>
-          </p:cNvSpPr>
-          <p:nvPr>
-            <p:ph idx="1"/>
-          </p:nvPr>
-        </p:nvSpPr>
-        <p:spPr/>
-        <p:txBody>
-          <a:bodyPr wrap="square"/>
-          <a:lstStyle/>
-          <a:p>
-            <a:pPr/>
-            <a:r>
-              <a:rPr sz="2000"/>
-              <a:t>Chrono integrates as fast as it can; it has no notion of wall-clock time by itself</a:t>
-            </a:r>
-          </a:p>
-          <a:p>
-            <a:pPr/>
-            <a:r>
-              <a:rPr sz="2000"/>
-              <a:t>Real Time Factor: RTF = compute time for a step / step size</a:t>
-            </a:r>
-          </a:p>
-          <a:p>
-            <a:pPr lvl="1"/>
-            <a:r>
-              <a:rPr sz="1800"/>
-              <a:t>RTF &lt; 1: faster than real time - we must WAIT after each step</a:t>
-            </a:r>
-          </a:p>
-          <a:p>
-            <a:pPr lvl="1"/>
-            <a:r>
-              <a:rPr sz="1800"/>
-              <a:t>RTF &gt; 1: slower than real time - nothing can be done except a cheaper model or a bigger step</a:t>
-            </a:r>
-          </a:p>
-          <a:p>
-            <a:pPr/>
-            <a:r>
-              <a:rPr sz="2000"/>
-              <a:t>Soft real-time: spin after each step until wall time catches up with simulation time</a:t>
-            </a:r>
-          </a:p>
-          <a:p>
-            <a:pPr lvl="1"/>
-            <a:r>
-              <a:rPr sz="1800"/>
-              <a:t>No OS scheduling guarantees; good enough for a driving simulator, not for a control ECU</a:t>
-            </a:r>
-          </a:p>
-          <a:p>
-            <a:pPr/>
-            <a:r>
-              <a:rPr sz="2000"/>
-              <a:t>Three equivalent mechanisms in PyChrono (next slides): </a:t>
-            </a:r>
-            <a:r>
-              <a:rPr sz="1800">
-                <a:latin typeface="Consolas"/>
-              </a:rPr>
-              <a:t>ChRealtimeStepTimer</a:t>
-            </a:r>
-            <a:r>
-              <a:rPr sz="2000"/>
-              <a:t>, </a:t>
-            </a:r>
-            <a:r>
-              <a:rPr sz="1800">
-                <a:latin typeface="Consolas"/>
-              </a:rPr>
-              <a:t>ChVehicle.EnableRealtime</a:t>
-            </a:r>
-            <a:r>
-              <a:rPr sz="2000"/>
-              <a:t>, or your own</a:t>
-            </a:r>
-          </a:p>
-        </p:txBody>
-      </p:sp>
-      <p:sp>
-        <p:nvSpPr>
-          <p:cNvPr id="4" name="TextBox 3"/>
+              <a:t>What Chrono actually requires of a human interface (Lines 151 to 178)</a:t>
+            </a:r>
+          </a:p>
+        </p:txBody>
+      </p:sp>
+      <p:sp>
+        <p:nvSpPr>
+          <p:cNvPr id="3" name="CodeBox"/>
           <p:cNvSpPr txBox="1"/>
           <p:nvPr/>
         </p:nvSpPr>
         <p:spPr>
           <a:xfrm>
-            <a:off x="310974" y="6645811"/>
-            <a:ext cx="11644805" cy="188527"/>
+            <a:off x="0" y="1051560"/>
+            <a:ext cx="12191969" cy="3733038"/>
+          </a:xfrm>
+          <a:prstGeom prst="rect">
+            <a:avLst/>
+          </a:prstGeom>
+          <a:solidFill>
+            <a:srgbClr val="000000"/>
+          </a:solidFill>
+        </p:spPr>
+        <p:txBody>
+          <a:bodyPr wrap="none" lIns="300000" rIns="300000">
+            <a:noAutofit/>
+          </a:bodyPr>
+          <a:lstStyle/>
+          <a:p>
+            <a:r>
+              <a:rPr sz="1200">
+                <a:solidFill>
+                  <a:srgbClr val="CCCCCC"/>
+                </a:solidFill>
+                <a:latin typeface="Consolas"/>
+              </a:rPr>
+              <a:t>class DriverInputs:</a:t>
+            </a:r>
+          </a:p>
+          <a:p>
+            <a:r>
+              <a:rPr sz="1200">
+                <a:solidFill>
+                  <a:srgbClr val="CCCCCC"/>
+                </a:solidFill>
+                <a:latin typeface="Consolas"/>
+              </a:rPr>
+              <a:t>    """The whole ChDriver contract, in Python."""</a:t>
+            </a:r>
+          </a:p>
+          <a:p>
+            <a:r>
+              <a:rPr sz="1200">
+                <a:solidFill>
+                  <a:srgbClr val="CCCCCC"/>
+                </a:solidFill>
+                <a:latin typeface="Consolas"/>
+              </a:rPr>
+              <a:t/>
+            </a:r>
+          </a:p>
+          <a:p>
+            <a:r>
+              <a:rPr sz="1200">
+                <a:solidFill>
+                  <a:srgbClr val="CCCCCC"/>
+                </a:solidFill>
+                <a:latin typeface="Consolas"/>
+              </a:rPr>
+              <a:t>    def __init__(self):</a:t>
+            </a:r>
+          </a:p>
+          <a:p>
+            <a:r>
+              <a:rPr sz="1200">
+                <a:solidFill>
+                  <a:srgbClr val="CCCCCC"/>
+                </a:solidFill>
+                <a:latin typeface="Consolas"/>
+              </a:rPr>
+              <a:t>        self.m_steering = 0.0</a:t>
+            </a:r>
+          </a:p>
+          <a:p>
+            <a:r>
+              <a:rPr sz="1200">
+                <a:solidFill>
+                  <a:srgbClr val="CCCCCC"/>
+                </a:solidFill>
+                <a:latin typeface="Consolas"/>
+              </a:rPr>
+              <a:t>        self.m_throttle = 0.0</a:t>
+            </a:r>
+          </a:p>
+          <a:p>
+            <a:r>
+              <a:rPr sz="1200">
+                <a:solidFill>
+                  <a:srgbClr val="CCCCCC"/>
+                </a:solidFill>
+                <a:latin typeface="Consolas"/>
+              </a:rPr>
+              <a:t>        self.m_braking = 0.0</a:t>
+            </a:r>
+          </a:p>
+          <a:p>
+            <a:r>
+              <a:rPr sz="1200">
+                <a:solidFill>
+                  <a:srgbClr val="CCCCCC"/>
+                </a:solidFill>
+                <a:latin typeface="Consolas"/>
+              </a:rPr>
+              <a:t/>
+            </a:r>
+          </a:p>
+          <a:p>
+            <a:r>
+              <a:rPr sz="1200">
+                <a:solidFill>
+                  <a:srgbClr val="CCCCCC"/>
+                </a:solidFill>
+                <a:latin typeface="Consolas"/>
+              </a:rPr>
+              <a:t>    def SetSteering(self, v):</a:t>
+            </a:r>
+          </a:p>
+          <a:p>
+            <a:r>
+              <a:rPr sz="1200">
+                <a:solidFill>
+                  <a:srgbClr val="CCCCCC"/>
+                </a:solidFill>
+                <a:latin typeface="Consolas"/>
+              </a:rPr>
+              <a:t>        self.m_steering = v</a:t>
+            </a:r>
+          </a:p>
+          <a:p>
+            <a:r>
+              <a:rPr sz="1200">
+                <a:solidFill>
+                  <a:srgbClr val="CCCCCC"/>
+                </a:solidFill>
+                <a:latin typeface="Consolas"/>
+              </a:rPr>
+              <a:t/>
+            </a:r>
+          </a:p>
+          <a:p>
+            <a:r>
+              <a:rPr sz="1200">
+                <a:solidFill>
+                  <a:srgbClr val="CCCCCC"/>
+                </a:solidFill>
+                <a:latin typeface="Consolas"/>
+              </a:rPr>
+              <a:t>    def SetThrottle(self, v):</a:t>
+            </a:r>
+          </a:p>
+          <a:p>
+            <a:r>
+              <a:rPr sz="1200">
+                <a:solidFill>
+                  <a:srgbClr val="CCCCCC"/>
+                </a:solidFill>
+                <a:latin typeface="Consolas"/>
+              </a:rPr>
+              <a:t>        self.m_throttle = v</a:t>
+            </a:r>
+          </a:p>
+          <a:p>
+            <a:r>
+              <a:rPr sz="1200">
+                <a:solidFill>
+                  <a:srgbClr val="CCCCCC"/>
+                </a:solidFill>
+                <a:latin typeface="Consolas"/>
+              </a:rPr>
+              <a:t/>
+            </a:r>
+          </a:p>
+          <a:p>
+            <a:r>
+              <a:rPr sz="1200">
+                <a:solidFill>
+                  <a:srgbClr val="CCCCCC"/>
+                </a:solidFill>
+                <a:latin typeface="Consolas"/>
+              </a:rPr>
+              <a:t>    def SetBraking(self, v):</a:t>
+            </a:r>
+          </a:p>
+          <a:p>
+            <a:r>
+              <a:rPr sz="1200">
+                <a:solidFill>
+                  <a:srgbClr val="CCCCCC"/>
+                </a:solidFill>
+                <a:latin typeface="Consolas"/>
+              </a:rPr>
+              <a:t>        self.m_braking = v</a:t>
+            </a:r>
+          </a:p>
+          <a:p>
+            <a:r>
+              <a:rPr sz="1200">
+                <a:solidFill>
+                  <a:srgbClr val="CCCCCC"/>
+                </a:solidFill>
+                <a:latin typeface="Consolas"/>
+              </a:rPr>
+              <a:t/>
+            </a:r>
+          </a:p>
+          <a:p>
+            <a:r>
+              <a:rPr sz="1200">
+                <a:solidFill>
+                  <a:srgbClr val="CCCCCC"/>
+                </a:solidFill>
+                <a:latin typeface="Consolas"/>
+              </a:rPr>
+              <a:t>    def GetInputs(self):</a:t>
+            </a:r>
+          </a:p>
+          <a:p>
+            <a:r>
+              <a:rPr sz="1200">
+                <a:solidFill>
+                  <a:srgbClr val="CCCCCC"/>
+                </a:solidFill>
+                <a:latin typeface="Consolas"/>
+              </a:rPr>
+              <a:t>        return self</a:t>
+            </a:r>
+          </a:p>
+        </p:txBody>
+      </p:sp>
+      <p:sp>
+        <p:nvSpPr>
+          <p:cNvPr id="4" name="NoteBox"/>
+          <p:cNvSpPr txBox="1"/>
+          <p:nvPr/>
+        </p:nvSpPr>
+        <p:spPr>
+          <a:xfrm>
+            <a:off x="402336" y="4921758"/>
+            <a:ext cx="11393424" cy="1036701"/>
           </a:xfrm>
           <a:prstGeom prst="rect">
             <a:avLst/>
@@ -10084,6 +9961,53 @@
           <a:noFill/>
         </p:spPr>
         <p:txBody>
+          <a:bodyPr wrap="square">
+            <a:spAutoFit/>
+          </a:bodyPr>
+          <a:lstStyle/>
+          <a:p>
+            <a:r>
+              <a:rPr sz="1800"/>
+              <a:t>Three floats per step: steering [-1, 1], throttle [0, 1], braking [0, 1]</a:t>
+            </a:r>
+          </a:p>
+          <a:p>
+            <a:r>
+              <a:rPr sz="1600">
+                <a:latin typeface="Consolas"/>
+              </a:rPr>
+              <a:t>veh.ChDriver</a:t>
+            </a:r>
+            <a:r>
+              <a:rPr sz="1800"/>
+              <a:t> is the same container in C++; this Python stand-in is what the rover and the crane use</a:t>
+            </a:r>
+          </a:p>
+          <a:p>
+            <a:r>
+              <a:rPr sz="1800"/>
+              <a:t>That is the entire contract. Everything else in this talk is about filling it in, on time, from somewhere real</a:t>
+            </a:r>
+          </a:p>
+        </p:txBody>
+      </p:sp>
+      <p:sp>
+        <p:nvSpPr>
+          <p:cNvPr id="5" name="Footer"/>
+          <p:cNvSpPr txBox="1"/>
+          <p:nvPr/>
+        </p:nvSpPr>
+        <p:spPr>
+          <a:xfrm>
+            <a:off x="310974" y="6645811"/>
+            <a:ext cx="11644805" cy="188527"/>
+          </a:xfrm>
+          <a:prstGeom prst="rect">
+            <a:avLst/>
+          </a:prstGeom>
+          <a:noFill/>
+        </p:spPr>
+        <p:txBody>
           <a:bodyPr wrap="none">
             <a:spAutoFit/>
           </a:bodyPr>
@@ -10098,7 +10022,7 @@
       </p:sp>
       <p:sp>
         <p:nvSpPr>
-          <p:cNvPr id="5" name="TextBox 4"/>
+          <p:cNvPr id="6" name="PageNo"/>
           <p:cNvSpPr txBox="1"/>
           <p:nvPr/>
         </p:nvSpPr>
@@ -10153,399 +10077,93 @@
             <p:ph type="title"/>
           </p:nvPr>
         </p:nvSpPr>
-        <p:spPr>
-          <a:xfrm>
-            <a:off x="235228" y="150000"/>
-            <a:ext cx="9875520" cy="800000"/>
-          </a:xfrm>
-        </p:spPr>
+        <p:spPr/>
         <p:txBody>
           <a:bodyPr wrap="square"/>
           <a:lstStyle/>
           <a:p>
             <a:r>
               <a:rPr sz="2600"/>
-              <a:t>Step 1: The simulation loop (Lines 700 to 751)</a:t>
-            </a:r>
-          </a:p>
-        </p:txBody>
-      </p:sp>
-      <p:sp>
-        <p:nvSpPr>
-          <p:cNvPr id="3" name="TextBox 2"/>
+              <a:t>Two hard parts, and one easy one</a:t>
+            </a:r>
+          </a:p>
+        </p:txBody>
+      </p:sp>
+      <p:sp>
+        <p:nvSpPr>
+          <p:cNvPr id="3" name="Content Placeholder 2"/>
+          <p:cNvSpPr>
+            <a:spLocks noGrp="1"/>
+          </p:cNvSpPr>
+          <p:nvPr>
+            <p:ph idx="1"/>
+          </p:nvPr>
+        </p:nvSpPr>
+        <p:spPr/>
+        <p:txBody>
+          <a:bodyPr wrap="square"/>
+          <a:lstStyle/>
+          <a:p>
+            <a:pPr/>
+            <a:r>
+              <a:rPr sz="2000"/>
+              <a:t>You have just seen the whole contract. Two things around it are hard, and both are the part that transfers:</a:t>
+            </a:r>
+          </a:p>
+          <a:p>
+            <a:pPr lvl="1"/>
+            <a:r>
+              <a:rPr sz="1800"/>
+              <a:t>PATTERN 1: keeping the simulation running at wall-clock speed, and knowing when it isn't</a:t>
+            </a:r>
+          </a:p>
+          <a:p>
+            <a:pPr lvl="1"/>
+            <a:r>
+              <a:rPr sz="1800"/>
+              <a:t>PATTERN 2: taking input from a device Chrono has never heard of, and closing the loop back to it</a:t>
+            </a:r>
+          </a:p>
+          <a:p>
+            <a:pPr/>
+            <a:r>
+              <a:rPr sz="2000"/>
+              <a:t>Between them, the easy case: a human on the keyboard, which Chrono already does for you</a:t>
+            </a:r>
+          </a:p>
+          <a:p>
+            <a:pPr/>
+            <a:r>
+              <a:rPr sz="2000"/>
+              <a:t>Both patterns show up anywhere a person or outside hardware talks to a live simulation - not just here</a:t>
+            </a:r>
+          </a:p>
+          <a:p>
+            <a:pPr/>
+            <a:r>
+              <a:rPr sz="2000"/>
+              <a:t>Everything runs in PyChrono; no special hardware is required</a:t>
+            </a:r>
+          </a:p>
+          <a:p>
+            <a:pPr lvl="1"/>
+            <a:r>
+              <a:rPr sz="1800"/>
+              <a:t>the rest of the repo - gamepad and wheel, gears, Mcity, a rover - is one slide at the end, and a README</a:t>
+            </a:r>
+          </a:p>
+        </p:txBody>
+      </p:sp>
+      <p:sp>
+        <p:nvSpPr>
+          <p:cNvPr id="4" name="Footer"/>
           <p:cNvSpPr txBox="1"/>
           <p:nvPr/>
         </p:nvSpPr>
         <p:spPr>
           <a:xfrm>
-            <a:off x="0" y="1051560"/>
-            <a:ext cx="12192000" cy="4526280"/>
-          </a:xfrm>
-          <a:prstGeom prst="rect">
-            <a:avLst/>
-          </a:prstGeom>
-          <a:solidFill>
-            <a:srgbClr val="000000"/>
-          </a:solidFill>
-        </p:spPr>
-        <p:txBody>
-          <a:bodyPr wrap="none" lIns="300000" rIns="300000">
-            <a:noAutofit/>
-          </a:bodyPr>
-          <a:lstStyle/>
-          <a:p>
-            <a:r>
-              <a:rPr sz="900">
-                <a:solidFill>
-                  <a:srgbClr val="CCCCCC"/>
-                </a:solidFill>
-                <a:latin typeface="Consolas"/>
-              </a:rPr>
-              <a:t>while vis.Run():</a:t>
-            </a:r>
-          </a:p>
-          <a:p>
-            <a:r>
-              <a:rPr sz="900">
-                <a:solidFill>
-                  <a:srgbClr val="CCCCCC"/>
-                </a:solidFill>
-                <a:latin typeface="Consolas"/>
-              </a:rPr>
-              <a:t>    sim_time = system.GetChTime()</a:t>
-            </a:r>
-          </a:p>
-          <a:p>
-            <a:r>
-              <a:rPr sz="900">
-                <a:solidFill>
-                  <a:srgbClr val="CCCCCC"/>
-                </a:solidFill>
-                <a:latin typeface="Consolas"/>
-              </a:rPr>
-              <a:t/>
-            </a:r>
-          </a:p>
-          <a:p>
-            <a:r>
-              <a:rPr sz="900">
-                <a:solidFill>
-                  <a:srgbClr val="CCCCCC"/>
-                </a:solidFill>
-                <a:latin typeface="Consolas"/>
-              </a:rPr>
-              <a:t>    # Render scene</a:t>
-            </a:r>
-          </a:p>
-          <a:p>
-            <a:r>
-              <a:rPr sz="900">
-                <a:solidFill>
-                  <a:srgbClr val="CCCCCC"/>
-                </a:solidFill>
-                <a:latin typeface="Consolas"/>
-              </a:rPr>
-              <a:t>    if step_number % render_steps == 0:</a:t>
-            </a:r>
-          </a:p>
-          <a:p>
-            <a:r>
-              <a:rPr sz="900">
-                <a:solidFill>
-                  <a:srgbClr val="CCCCCC"/>
-                </a:solidFill>
-                <a:latin typeface="Consolas"/>
-              </a:rPr>
-              <a:t>        follow_camera()</a:t>
-            </a:r>
-          </a:p>
-          <a:p>
-            <a:r>
-              <a:rPr sz="900">
-                <a:solidFill>
-                  <a:srgbClr val="CCCCCC"/>
-                </a:solidFill>
-                <a:latin typeface="Consolas"/>
-              </a:rPr>
-              <a:t>        vis.BeginScene()</a:t>
-            </a:r>
-          </a:p>
-          <a:p>
-            <a:r>
-              <a:rPr sz="900">
-                <a:solidFill>
-                  <a:srgbClr val="CCCCCC"/>
-                </a:solidFill>
-                <a:latin typeface="Consolas"/>
-              </a:rPr>
-              <a:t>        vis.Render()</a:t>
-            </a:r>
-          </a:p>
-          <a:p>
-            <a:r>
-              <a:rPr sz="900">
-                <a:solidFill>
-                  <a:srgbClr val="CCCCCC"/>
-                </a:solidFill>
-                <a:latin typeface="Consolas"/>
-              </a:rPr>
-              <a:t>        vis.EndScene()</a:t>
-            </a:r>
-          </a:p>
-          <a:p>
-            <a:r>
-              <a:rPr sz="900">
-                <a:solidFill>
-                  <a:srgbClr val="CCCCCC"/>
-                </a:solidFill>
-                <a:latin typeface="Consolas"/>
-              </a:rPr>
-              <a:t/>
-            </a:r>
-          </a:p>
-          <a:p>
-            <a:r>
-              <a:rPr sz="900">
-                <a:solidFill>
-                  <a:srgbClr val="CCCCCC"/>
-                </a:solidFill>
-                <a:latin typeface="Consolas"/>
-              </a:rPr>
-              <a:t>    # PART 4 samples the device here; PART 6 applies any gear command</a:t>
-            </a:r>
-          </a:p>
-          <a:p>
-            <a:r>
-              <a:rPr sz="900">
-                <a:solidFill>
-                  <a:srgbClr val="CCCCCC"/>
-                </a:solidFill>
-                <a:latin typeface="Consolas"/>
-              </a:rPr>
-              <a:t>    ...</a:t>
-            </a:r>
-          </a:p>
-          <a:p>
-            <a:r>
-              <a:rPr sz="900">
-                <a:solidFill>
-                  <a:srgbClr val="CCCCCC"/>
-                </a:solidFill>
-                <a:latin typeface="Consolas"/>
-              </a:rPr>
-              <a:t/>
-            </a:r>
-          </a:p>
-          <a:p>
-            <a:r>
-              <a:rPr sz="900">
-                <a:solidFill>
-                  <a:srgbClr val="CCCCCC"/>
-                </a:solidFill>
-                <a:latin typeface="Consolas"/>
-              </a:rPr>
-              <a:t>    # Get driver inputs (three floats) - the whole human-in-the-loop contract</a:t>
-            </a:r>
-          </a:p>
-          <a:p>
-            <a:r>
-              <a:rPr sz="900">
-                <a:solidFill>
-                  <a:srgbClr val="CCCCCC"/>
-                </a:solidFill>
-                <a:latin typeface="Consolas"/>
-              </a:rPr>
-              <a:t>    driver_inputs = driver.GetInputs()</a:t>
-            </a:r>
-          </a:p>
-          <a:p>
-            <a:r>
-              <a:rPr sz="900">
-                <a:solidFill>
-                  <a:srgbClr val="CCCCCC"/>
-                </a:solidFill>
-                <a:latin typeface="Consolas"/>
-              </a:rPr>
-              <a:t/>
-            </a:r>
-          </a:p>
-          <a:p>
-            <a:r>
-              <a:rPr sz="900">
-                <a:solidFill>
-                  <a:srgbClr val="CCCCCC"/>
-                </a:solidFill>
-                <a:latin typeface="Consolas"/>
-              </a:rPr>
-              <a:t>    # PART 8: hand the three numbers to whatever is being controlled</a:t>
-            </a:r>
-          </a:p>
-          <a:p>
-            <a:r>
-              <a:rPr sz="900">
-                <a:solidFill>
-                  <a:srgbClr val="CCCCCC"/>
-                </a:solidFill>
-                <a:latin typeface="Consolas"/>
-              </a:rPr>
-              <a:t>    plant.apply(driver_inputs)</a:t>
-            </a:r>
-          </a:p>
-          <a:p>
-            <a:r>
-              <a:rPr sz="900">
-                <a:solidFill>
-                  <a:srgbClr val="CCCCCC"/>
-                </a:solidFill>
-                <a:latin typeface="Consolas"/>
-              </a:rPr>
-              <a:t/>
-            </a:r>
-          </a:p>
-          <a:p>
-            <a:r>
-              <a:rPr sz="900">
-                <a:solidFill>
-                  <a:srgbClr val="CCCCCC"/>
-                </a:solidFill>
-                <a:latin typeface="Consolas"/>
-              </a:rPr>
-              <a:t>    # Update modules (process inputs from other modules)</a:t>
-            </a:r>
-          </a:p>
-          <a:p>
-            <a:r>
-              <a:rPr sz="900">
-                <a:solidFill>
-                  <a:srgbClr val="CCCCCC"/>
-                </a:solidFill>
-                <a:latin typeface="Consolas"/>
-              </a:rPr>
-              <a:t>    driver.Synchronize(sim_time)</a:t>
-            </a:r>
-          </a:p>
-          <a:p>
-            <a:r>
-              <a:rPr sz="900">
-                <a:solidFill>
-                  <a:srgbClr val="CCCCCC"/>
-                </a:solidFill>
-                <a:latin typeface="Consolas"/>
-              </a:rPr>
-              <a:t>    terrain.Synchronize(sim_time)</a:t>
-            </a:r>
-          </a:p>
-          <a:p>
-            <a:r>
-              <a:rPr sz="900">
-                <a:solidFill>
-                  <a:srgbClr val="CCCCCC"/>
-                </a:solidFill>
-                <a:latin typeface="Consolas"/>
-              </a:rPr>
-              <a:t>    plant.synchronize(sim_time, driver_inputs)</a:t>
-            </a:r>
-          </a:p>
-          <a:p>
-            <a:r>
-              <a:rPr sz="900">
-                <a:solidFill>
-                  <a:srgbClr val="CCCCCC"/>
-                </a:solidFill>
-                <a:latin typeface="Consolas"/>
-              </a:rPr>
-              <a:t>    vis.Synchronize(sim_time, driver_inputs)</a:t>
-            </a:r>
-          </a:p>
-          <a:p>
-            <a:r>
-              <a:rPr sz="900">
-                <a:solidFill>
-                  <a:srgbClr val="CCCCCC"/>
-                </a:solidFill>
-                <a:latin typeface="Consolas"/>
-              </a:rPr>
-              <a:t/>
-            </a:r>
-          </a:p>
-          <a:p>
-            <a:r>
-              <a:rPr sz="900">
-                <a:solidFill>
-                  <a:srgbClr val="CCCCCC"/>
-                </a:solidFill>
-                <a:latin typeface="Consolas"/>
-              </a:rPr>
-              <a:t>    # Advance simulation for one timestep for all modules</a:t>
-            </a:r>
-          </a:p>
-          <a:p>
-            <a:r>
-              <a:rPr sz="900">
-                <a:solidFill>
-                  <a:srgbClr val="CCCCCC"/>
-                </a:solidFill>
-                <a:latin typeface="Consolas"/>
-              </a:rPr>
-              <a:t>    driver.Advance(step_size)</a:t>
-            </a:r>
-          </a:p>
-          <a:p>
-            <a:r>
-              <a:rPr sz="900">
-                <a:solidFill>
-                  <a:srgbClr val="CCCCCC"/>
-                </a:solidFill>
-                <a:latin typeface="Consolas"/>
-              </a:rPr>
-              <a:t>    terrain.Advance(step_size)</a:t>
-            </a:r>
-          </a:p>
-          <a:p>
-            <a:r>
-              <a:rPr sz="900">
-                <a:solidFill>
-                  <a:srgbClr val="CCCCCC"/>
-                </a:solidFill>
-                <a:latin typeface="Consolas"/>
-              </a:rPr>
-              <a:t>    plant.advance(step_size)          # spins here if REALTIME == "vehicle"</a:t>
-            </a:r>
-          </a:p>
-          <a:p>
-            <a:r>
-              <a:rPr sz="900">
-                <a:solidFill>
-                  <a:srgbClr val="CCCCCC"/>
-                </a:solidFill>
-                <a:latin typeface="Consolas"/>
-              </a:rPr>
-              <a:t>    system.DoStepDynamics(step_size)  # only for a plant that does not step itself</a:t>
-            </a:r>
-          </a:p>
-          <a:p>
-            <a:r>
-              <a:rPr sz="900">
-                <a:solidFill>
-                  <a:srgbClr val="CCCCCC"/>
-                </a:solidFill>
-                <a:latin typeface="Consolas"/>
-              </a:rPr>
-              <a:t>    vis.Advance(step_size)</a:t>
-            </a:r>
-          </a:p>
-        </p:txBody>
-      </p:sp>
-      <p:sp>
-        <p:nvSpPr>
-          <p:cNvPr id="4" name="TextBox 3"/>
-          <p:cNvSpPr txBox="1"/>
-          <p:nvPr/>
-        </p:nvSpPr>
-        <p:spPr>
-          <a:xfrm>
-            <a:off x="400000" y="5669280"/>
-            <a:ext cx="11392000" cy="877824"/>
+            <a:off x="310974" y="6645811"/>
+            <a:ext cx="11644805" cy="188527"/>
           </a:xfrm>
           <a:prstGeom prst="rect">
             <a:avLst/>
@@ -10553,48 +10171,6 @@
           <a:noFill/>
         </p:spPr>
         <p:txBody>
-          <a:bodyPr wrap="square">
-            <a:spAutoFit/>
-          </a:bodyPr>
-          <a:lstStyle/>
-          <a:p>
-            <a:pPr/>
-            <a:r>
-              <a:rPr sz="1600"/>
-              <a:t>Synchronize: every module reads what it needs from the others at time t. Advance: every module integrates from t to t + step</a:t>
-            </a:r>
-          </a:p>
-          <a:p>
-            <a:r>
-              <a:rPr sz="1600"/>
-              <a:t>The driver is queried BEFORE Synchronize - inputs are sampled once and held for the step</a:t>
-            </a:r>
-          </a:p>
-          <a:p>
-            <a:r>
-              <a:rPr sz="1600"/>
-              <a:t>Elided: the device/gear block (Parts 4 and 6), and the guards that let a plant run with no terrain and no vehicle camera (Part 8)</a:t>
-            </a:r>
-          </a:p>
-        </p:txBody>
-      </p:sp>
-      <p:sp>
-        <p:nvSpPr>
-          <p:cNvPr id="5" name="TextBox 4"/>
-          <p:cNvSpPr txBox="1"/>
-          <p:nvPr/>
-        </p:nvSpPr>
-        <p:spPr>
-          <a:xfrm>
-            <a:off x="310974" y="6645811"/>
-            <a:ext cx="11644805" cy="188527"/>
-          </a:xfrm>
-          <a:prstGeom prst="rect">
-            <a:avLst/>
-          </a:prstGeom>
-          <a:noFill/>
-        </p:spPr>
-        <p:txBody>
           <a:bodyPr wrap="none">
             <a:spAutoFit/>
           </a:bodyPr>
@@ -10609,7 +10185,7 @@
       </p:sp>
       <p:sp>
         <p:nvSpPr>
-          <p:cNvPr id="6" name="TextBox 5"/>
+          <p:cNvPr id="5" name="PageNo"/>
           <p:cNvSpPr txBox="1"/>
           <p:nvPr/>
         </p:nvSpPr>
@@ -10664,245 +10240,166 @@
             <p:ph type="title"/>
           </p:nvPr>
         </p:nvSpPr>
-        <p:spPr>
-          <a:xfrm>
-            <a:off x="235228" y="150000"/>
-            <a:ext cx="9875520" cy="800000"/>
-          </a:xfrm>
-        </p:spPr>
+        <p:spPr/>
         <p:txBody>
           <a:bodyPr wrap="square"/>
           <a:lstStyle/>
           <a:p>
             <a:r>
               <a:rPr sz="2600"/>
-              <a:t>Step 2: Measure it - sim time vs wall time (Lines 753 to 769)</a:t>
-            </a:r>
-          </a:p>
-        </p:txBody>
-      </p:sp>
-      <p:sp>
-        <p:nvSpPr>
-          <p:cNvPr id="3" name="TextBox 2"/>
+              <a:t>Before we start ......</a:t>
+            </a:r>
+          </a:p>
+        </p:txBody>
+      </p:sp>
+      <p:sp>
+        <p:nvSpPr>
+          <p:cNvPr id="3" name="Content Placeholder 2"/>
+          <p:cNvSpPr>
+            <a:spLocks noGrp="1"/>
+          </p:cNvSpPr>
+          <p:nvPr>
+            <p:ph idx="1"/>
+          </p:nvPr>
+        </p:nvSpPr>
+        <p:spPr/>
+        <p:txBody>
+          <a:bodyPr wrap="square"/>
+          <a:lstStyle/>
+          <a:p>
+            <a:pPr/>
+            <a:r>
+              <a:rPr sz="2000"/>
+              <a:t>This is a walkthrough - nothing to install right now; everything runs on my machine</a:t>
+            </a:r>
+          </a:p>
+          <a:p>
+            <a:pPr/>
+            <a:r>
+              <a:rPr sz="2000"/>
+              <a:t>Code, slides and a written walkthrough: github.com/ksha23/chrono-hil-tutorial</a:t>
+            </a:r>
+          </a:p>
+          <a:p>
+            <a:pPr/>
+            <a:r>
+              <a:rPr sz="2000"/>
+              <a:t>To run it yourself afterward:</a:t>
+            </a:r>
+          </a:p>
+          <a:p>
+            <a:pPr lvl="1"/>
+            <a:r>
+              <a:rPr sz="1600">
+                <a:latin typeface="Consolas"/>
+              </a:rPr>
+              <a:t>conda create -n chrono_hil -c conda-forge projectchrono::pychrono pygame python=3.13</a:t>
+            </a:r>
+          </a:p>
+          <a:p>
+            <a:pPr lvl="1"/>
+            <a:r>
+              <a:rPr sz="1600">
+                <a:latin typeface="Consolas"/>
+              </a:rPr>
+              <a:t>conda activate chrono_hil</a:t>
+            </a:r>
+          </a:p>
+          <a:p>
+            <a:pPr/>
+            <a:r>
+              <a:rPr sz="2000"/>
+              <a:t>Two other packages are also called </a:t>
+            </a:r>
+            <a:r>
+              <a:rPr sz="1800">
+                <a:latin typeface="Consolas"/>
+              </a:rPr>
+              <a:t>pychrono</a:t>
+            </a:r>
+            <a:r>
+              <a:rPr sz="2000"/>
+              <a:t>: the one on PyPI, and conda-forge's (no </a:t>
+            </a:r>
+            <a:r>
+              <a:rPr sz="1800">
+                <a:latin typeface="Consolas"/>
+              </a:rPr>
+              <a:t>vehicle</a:t>
+            </a:r>
+            <a:r>
+              <a:rPr sz="2000"/>
+              <a:t>, no </a:t>
+            </a:r>
+            <a:r>
+              <a:rPr sz="1800">
+                <a:latin typeface="Consolas"/>
+              </a:rPr>
+              <a:t>irrlicht</a:t>
+            </a:r>
+            <a:r>
+              <a:rPr sz="2000"/>
+              <a:t>) - the </a:t>
+            </a:r>
+            <a:r>
+              <a:rPr sz="1800">
+                <a:latin typeface="Consolas"/>
+              </a:rPr>
+              <a:t>projectchrono::</a:t>
+            </a:r>
+            <a:r>
+              <a:rPr sz="2000"/>
+              <a:t> prefix pins the right one</a:t>
+            </a:r>
+          </a:p>
+          <a:p>
+            <a:pPr/>
+            <a:r>
+              <a:rPr sz="1800">
+                <a:latin typeface="Consolas"/>
+              </a:rPr>
+              <a:t>python tutorial_HIL_driver.py</a:t>
+            </a:r>
+            <a:r>
+              <a:rPr sz="2000"/>
+              <a:t> opens an Irrlicht window with an HMMWV - drive it with W/A/S/D</a:t>
+            </a:r>
+          </a:p>
+          <a:p>
+            <a:pPr/>
+            <a:r>
+              <a:rPr sz="2000"/>
+              <a:t>All switches are in the </a:t>
+            </a:r>
+            <a:r>
+              <a:rPr sz="1800">
+                <a:latin typeface="Consolas"/>
+              </a:rPr>
+              <a:t>CONFIGURATION</a:t>
+            </a:r>
+            <a:r>
+              <a:rPr sz="2000"/>
+              <a:t> section at the bottom of </a:t>
+            </a:r>
+            <a:r>
+              <a:rPr sz="1800">
+                <a:latin typeface="Consolas"/>
+              </a:rPr>
+              <a:t>tutorial_HIL_driver.py</a:t>
+            </a:r>
+          </a:p>
+        </p:txBody>
+      </p:sp>
+      <p:sp>
+        <p:nvSpPr>
+          <p:cNvPr id="4" name="Footer"/>
           <p:cNvSpPr txBox="1"/>
           <p:nvPr/>
         </p:nvSpPr>
         <p:spPr>
           <a:xfrm>
-            <a:off x="0" y="1051560"/>
-            <a:ext cx="12192000" cy="3383280"/>
-          </a:xfrm>
-          <a:prstGeom prst="rect">
-            <a:avLst/>
-          </a:prstGeom>
-          <a:solidFill>
-            <a:srgbClr val="000000"/>
-          </a:solidFill>
-        </p:spPr>
-        <p:txBody>
-          <a:bodyPr wrap="none" lIns="300000" rIns="300000">
-            <a:noAutofit/>
-          </a:bodyPr>
-          <a:lstStyle/>
-          <a:p>
-            <a:r>
-              <a:rPr sz="1200">
-                <a:solidFill>
-                  <a:srgbClr val="CCCCCC"/>
-                </a:solidFill>
-                <a:latin typeface="Consolas"/>
-              </a:rPr>
-              <a:t># Console report: how far is the sim from wall time?</a:t>
-            </a:r>
-          </a:p>
-          <a:p>
-            <a:r>
-              <a:rPr sz="1200">
-                <a:solidFill>
-                  <a:srgbClr val="CCCCCC"/>
-                </a:solidFill>
-                <a:latin typeface="Consolas"/>
-              </a:rPr>
-              <a:t>if step_number % report_steps == 0:</a:t>
-            </a:r>
-          </a:p>
-          <a:p>
-            <a:r>
-              <a:rPr sz="1200">
-                <a:solidFill>
-                  <a:srgbClr val="CCCCCC"/>
-                </a:solidFill>
-                <a:latin typeface="Consolas"/>
-              </a:rPr>
-              <a:t>    wall = time.perf_counter() - wall_start</a:t>
-            </a:r>
-          </a:p>
-          <a:p>
-            <a:r>
-              <a:rPr sz="1200">
-                <a:solidFill>
-                  <a:srgbClr val="CCCCCC"/>
-                </a:solidFill>
-                <a:latin typeface="Consolas"/>
-              </a:rPr>
-              <a:t>    # A ChVehicle measures its own real-time factor per step. The rover</a:t>
-            </a:r>
-          </a:p>
-          <a:p>
-            <a:r>
-              <a:rPr sz="1200">
-                <a:solidFill>
-                  <a:srgbClr val="CCCCCC"/>
-                </a:solidFill>
-                <a:latin typeface="Consolas"/>
-              </a:rPr>
-              <a:t>    # and the crane do not, so it is measured here over the reporting</a:t>
-            </a:r>
-          </a:p>
-          <a:p>
-            <a:r>
-              <a:rPr sz="1200">
-                <a:solidFill>
-                  <a:srgbClr val="CCCCCC"/>
-                </a:solidFill>
-                <a:latin typeface="Consolas"/>
-              </a:rPr>
-              <a:t>    # interval instead: same quantity, coarser sampling.</a:t>
-            </a:r>
-          </a:p>
-          <a:p>
-            <a:r>
-              <a:rPr sz="1200">
-                <a:solidFill>
-                  <a:srgbClr val="CCCCCC"/>
-                </a:solidFill>
-                <a:latin typeface="Consolas"/>
-              </a:rPr>
-              <a:t>    if vehicle:</a:t>
-            </a:r>
-          </a:p>
-          <a:p>
-            <a:r>
-              <a:rPr sz="1200">
-                <a:solidFill>
-                  <a:srgbClr val="CCCCCC"/>
-                </a:solidFill>
-                <a:latin typeface="Consolas"/>
-              </a:rPr>
-              <a:t>        rtf = vehicle.GetRTF()</a:t>
-            </a:r>
-          </a:p>
-          <a:p>
-            <a:r>
-              <a:rPr sz="1200">
-                <a:solidFill>
-                  <a:srgbClr val="CCCCCC"/>
-                </a:solidFill>
-                <a:latin typeface="Consolas"/>
-              </a:rPr>
-              <a:t>    else:</a:t>
-            </a:r>
-          </a:p>
-          <a:p>
-            <a:r>
-              <a:rPr sz="1200">
-                <a:solidFill>
-                  <a:srgbClr val="CCCCCC"/>
-                </a:solidFill>
-                <a:latin typeface="Consolas"/>
-              </a:rPr>
-              <a:t>        d_wall = wall - last_wall</a:t>
-            </a:r>
-          </a:p>
-          <a:p>
-            <a:r>
-              <a:rPr sz="1200">
-                <a:solidFill>
-                  <a:srgbClr val="CCCCCC"/>
-                </a:solidFill>
-                <a:latin typeface="Consolas"/>
-              </a:rPr>
-              <a:t>        d_sim = sim_time - last_sim</a:t>
-            </a:r>
-          </a:p>
-          <a:p>
-            <a:r>
-              <a:rPr sz="1200">
-                <a:solidFill>
-                  <a:srgbClr val="CCCCCC"/>
-                </a:solidFill>
-                <a:latin typeface="Consolas"/>
-              </a:rPr>
-              <a:t>        rtf = (d_wall / d_sim) if d_sim &gt; 0 else 0.0</a:t>
-            </a:r>
-          </a:p>
-          <a:p>
-            <a:r>
-              <a:rPr sz="1200">
-                <a:solidFill>
-                  <a:srgbClr val="CCCCCC"/>
-                </a:solidFill>
-                <a:latin typeface="Consolas"/>
-              </a:rPr>
-              <a:t>        last_wall, last_sim = wall, sim_time</a:t>
-            </a:r>
-          </a:p>
-          <a:p>
-            <a:r>
-              <a:rPr sz="1200">
-                <a:solidFill>
-                  <a:srgbClr val="CCCCCC"/>
-                </a:solidFill>
-                <a:latin typeface="Consolas"/>
-              </a:rPr>
-              <a:t>    print(f"{sim_time:7.2f} {wall:7.2f} {wall - sim_time:+7.3f} {rtf:6.2f}"</a:t>
-            </a:r>
-          </a:p>
-          <a:p>
-            <a:r>
-              <a:rPr sz="1200">
-                <a:solidFill>
-                  <a:srgbClr val="CCCCCC"/>
-                </a:solidFill>
-                <a:latin typeface="Consolas"/>
-              </a:rPr>
-              <a:t>          f" {plant.speed():7.2f}  {driver_inputs.m_steering:6.2f}"</a:t>
-            </a:r>
-          </a:p>
-          <a:p>
-            <a:r>
-              <a:rPr sz="1200">
-                <a:solidFill>
-                  <a:srgbClr val="CCCCCC"/>
-                </a:solidFill>
-                <a:latin typeface="Consolas"/>
-              </a:rPr>
-              <a:t>          f" {driver_inputs.m_throttle:5.2f} {driver_inputs.m_braking:5.2f}"</a:t>
-            </a:r>
-          </a:p>
-          <a:p>
-            <a:r>
-              <a:rPr sz="1200">
-                <a:solidFill>
-                  <a:srgbClr val="CCCCCC"/>
-                </a:solidFill>
-                <a:latin typeface="Consolas"/>
-              </a:rPr>
-              <a:t>          f"  {plant.status()}")</a:t>
-            </a:r>
-          </a:p>
-        </p:txBody>
-      </p:sp>
-      <p:sp>
-        <p:nvSpPr>
-          <p:cNvPr id="4" name="TextBox 3"/>
-          <p:cNvSpPr txBox="1"/>
-          <p:nvPr/>
-        </p:nvSpPr>
-        <p:spPr>
-          <a:xfrm>
-            <a:off x="400000" y="4526280"/>
-            <a:ext cx="11392000" cy="1005840"/>
+            <a:off x="310974" y="6645811"/>
+            <a:ext cx="11644805" cy="188527"/>
           </a:xfrm>
           <a:prstGeom prst="rect">
             <a:avLst/>
@@ -10910,64 +10407,6 @@
           <a:noFill/>
         </p:spPr>
         <p:txBody>
-          <a:bodyPr wrap="square">
-            <a:spAutoFit/>
-          </a:bodyPr>
-          <a:lstStyle/>
-          <a:p>
-            <a:pPr/>
-            <a:r>
-              <a:rPr sz="1800"/>
-              <a:t>drift = wall time - simulation time: negative means the sim is ahead of the clock</a:t>
-            </a:r>
-          </a:p>
-          <a:p>
-            <a:r>
-              <a:rPr sz="1800">
-                <a:latin typeface="Consolas"/>
-              </a:rPr>
-              <a:t>vehicle.GetRTF()</a:t>
-            </a:r>
-            <a:r>
-              <a:rPr sz="1800"/>
-              <a:t> is the true RTF of the last step, even when real time is enforced</a:t>
-            </a:r>
-          </a:p>
-          <a:p>
-            <a:r>
-              <a:rPr sz="1800"/>
-              <a:t>PART 8: a rover or a crane has no </a:t>
-            </a:r>
-            <a:r>
-              <a:rPr sz="1800">
-                <a:latin typeface="Consolas"/>
-              </a:rPr>
-              <a:t>GetRTF()</a:t>
-            </a:r>
-            <a:r>
-              <a:rPr sz="1800"/>
-              <a:t>, so the same number is measured here over the reporting interval</a:t>
-            </a:r>
-          </a:p>
-        </p:txBody>
-      </p:sp>
-      <p:sp>
-        <p:nvSpPr>
-          <p:cNvPr id="5" name="TextBox 4"/>
-          <p:cNvSpPr txBox="1"/>
-          <p:nvPr/>
-        </p:nvSpPr>
-        <p:spPr>
-          <a:xfrm>
-            <a:off x="310974" y="6645811"/>
-            <a:ext cx="11644805" cy="188527"/>
-          </a:xfrm>
-          <a:prstGeom prst="rect">
-            <a:avLst/>
-          </a:prstGeom>
-          <a:noFill/>
-        </p:spPr>
-        <p:txBody>
           <a:bodyPr wrap="none">
             <a:spAutoFit/>
           </a:bodyPr>
@@ -10982,7 +10421,7 @@
       </p:sp>
       <p:sp>
         <p:nvSpPr>
-          <p:cNvPr id="6" name="TextBox 5"/>
+          <p:cNvPr id="5" name="PageNo"/>
           <p:cNvSpPr txBox="1"/>
           <p:nvPr/>
         </p:nvSpPr>
@@ -11037,56 +10476,37 @@
             <p:ph type="title"/>
           </p:nvPr>
         </p:nvSpPr>
-        <p:spPr>
-          <a:xfrm>
-            <a:off x="235228" y="150000"/>
-            <a:ext cx="9875520" cy="800000"/>
-          </a:xfrm>
-        </p:spPr>
+        <p:spPr/>
         <p:txBody>
           <a:bodyPr wrap="square"/>
           <a:lstStyle/>
           <a:p>
             <a:r>
-              <a:rPr sz="2600"/>
-              <a:t>Show Time</a:t>
-            </a:r>
-          </a:p>
-        </p:txBody>
-      </p:sp>
-      <p:sp>
-        <p:nvSpPr>
-          <p:cNvPr id="3" name="Content Placeholder 2"/>
-          <p:cNvSpPr>
-            <a:spLocks noGrp="1"/>
-          </p:cNvSpPr>
-          <p:nvPr>
-            <p:ph idx="1"/>
+              <a:t>Pattern 1: keep the simulation real-time</a:t>
+            </a:r>
+          </a:p>
+        </p:txBody>
+      </p:sp>
+      <p:sp>
+        <p:nvSpPr>
+          <p:cNvPr id="3" name="Text Placeholder 2"/>
+          <p:cNvSpPr>
+            <a:spLocks noGrp="1"/>
+          </p:cNvSpPr>
+          <p:nvPr>
+            <p:ph type="body" idx="1"/>
           </p:nvPr>
         </p:nvSpPr>
         <p:spPr/>
         <p:txBody>
-          <a:bodyPr wrap="square"/>
-          <a:lstStyle/>
-          <a:p>
-            <a:pPr/>
-            <a:r>
-              <a:rPr sz="2000"/>
-              <a:t>REALTIME = "none": watch the drift column run away</a:t>
-            </a:r>
-          </a:p>
-          <a:p>
-            <a:pPr/>
-            <a:r>
-              <a:rPr sz="2000"/>
-              <a:t>Change step_size to 5e-4 - RTF goes above 1 and the sim can never be real-time</a:t>
-            </a:r>
-          </a:p>
-        </p:txBody>
-      </p:sp>
-      <p:sp>
-        <p:nvSpPr>
-          <p:cNvPr id="4" name="TextBox 3"/>
+          <a:bodyPr/>
+          <a:lstStyle/>
+          <a:p/>
+        </p:txBody>
+      </p:sp>
+      <p:sp>
+        <p:nvSpPr>
+          <p:cNvPr id="4" name="Footer"/>
           <p:cNvSpPr txBox="1"/>
           <p:nvPr/>
         </p:nvSpPr>
@@ -11115,7 +10535,7 @@
       </p:sp>
       <p:sp>
         <p:nvSpPr>
-          <p:cNvPr id="5" name="TextBox 4"/>
+          <p:cNvPr id="5" name="PageNo"/>
           <p:cNvSpPr txBox="1"/>
           <p:nvPr/>
         </p:nvSpPr>
@@ -11170,201 +10590,113 @@
             <p:ph type="title"/>
           </p:nvPr>
         </p:nvSpPr>
-        <p:spPr>
-          <a:xfrm>
-            <a:off x="235228" y="150000"/>
-            <a:ext cx="9875520" cy="800000"/>
-          </a:xfrm>
-        </p:spPr>
+        <p:spPr/>
         <p:txBody>
           <a:bodyPr wrap="square"/>
           <a:lstStyle/>
           <a:p>
             <a:r>
               <a:rPr sz="2600"/>
-              <a:t>Step 3: Enforce real time, three ways (Lines 656 to 671)</a:t>
-            </a:r>
-          </a:p>
-        </p:txBody>
-      </p:sp>
-      <p:sp>
-        <p:nvSpPr>
-          <p:cNvPr id="3" name="TextBox 2"/>
+              <a:t>What "real-time" means in Chrono</a:t>
+            </a:r>
+          </a:p>
+        </p:txBody>
+      </p:sp>
+      <p:sp>
+        <p:nvSpPr>
+          <p:cNvPr id="3" name="Content Placeholder 2"/>
+          <p:cNvSpPr>
+            <a:spLocks noGrp="1"/>
+          </p:cNvSpPr>
+          <p:nvPr>
+            <p:ph idx="1"/>
+          </p:nvPr>
+        </p:nvSpPr>
+        <p:spPr/>
+        <p:txBody>
+          <a:bodyPr wrap="square"/>
+          <a:lstStyle/>
+          <a:p>
+            <a:pPr/>
+            <a:r>
+              <a:rPr sz="2000"/>
+              <a:t>Chrono integrates as fast as it can; it has no notion of wall-clock time by itself</a:t>
+            </a:r>
+          </a:p>
+          <a:p>
+            <a:pPr/>
+            <a:r>
+              <a:rPr sz="2000"/>
+              <a:t>Real Time Factor: RTF = compute time for a step / step size</a:t>
+            </a:r>
+          </a:p>
+          <a:p>
+            <a:pPr lvl="1"/>
+            <a:r>
+              <a:rPr sz="1800"/>
+              <a:t>RTF &lt; 1: faster than real time - we must WAIT after each step</a:t>
+            </a:r>
+          </a:p>
+          <a:p>
+            <a:pPr lvl="1"/>
+            <a:r>
+              <a:rPr sz="1800"/>
+              <a:t>RTF &gt; 1: slower than real time - nothing can be done except a cheaper model or a bigger step</a:t>
+            </a:r>
+          </a:p>
+          <a:p>
+            <a:pPr/>
+            <a:r>
+              <a:rPr sz="2000"/>
+              <a:t>Soft real-time: spin after each step until wall time catches up with simulation time</a:t>
+            </a:r>
+          </a:p>
+          <a:p>
+            <a:pPr lvl="1"/>
+            <a:r>
+              <a:rPr sz="1800"/>
+              <a:t>No OS scheduling guarantees; good enough for a driving simulator, not for a control ECU</a:t>
+            </a:r>
+          </a:p>
+          <a:p>
+            <a:pPr/>
+            <a:r>
+              <a:rPr sz="2000"/>
+              <a:t>Three equivalent mechanisms in PyChrono: </a:t>
+            </a:r>
+            <a:r>
+              <a:rPr sz="1800">
+                <a:latin typeface="Consolas"/>
+              </a:rPr>
+              <a:t>ChRealtimeStepTimer</a:t>
+            </a:r>
+            <a:r>
+              <a:rPr sz="2000"/>
+              <a:t>, </a:t>
+            </a:r>
+            <a:r>
+              <a:rPr sz="1800">
+                <a:latin typeface="Consolas"/>
+              </a:rPr>
+              <a:t>ChVehicle.EnableRealtime</a:t>
+            </a:r>
+            <a:r>
+              <a:rPr sz="2000"/>
+              <a:t>, or your own</a:t>
+            </a:r>
+          </a:p>
+        </p:txBody>
+      </p:sp>
+      <p:sp>
+        <p:nvSpPr>
+          <p:cNvPr id="4" name="Footer"/>
           <p:cNvSpPr txBox="1"/>
           <p:nvPr/>
         </p:nvSpPr>
         <p:spPr>
           <a:xfrm>
-            <a:off x="0" y="1051560"/>
-            <a:ext cx="12192000" cy="3063240"/>
-          </a:xfrm>
-          <a:prstGeom prst="rect">
-            <a:avLst/>
-          </a:prstGeom>
-          <a:solidFill>
-            <a:srgbClr val="000000"/>
-          </a:solidFill>
-        </p:spPr>
-        <p:txBody>
-          <a:bodyPr wrap="none" lIns="300000" rIns="300000">
-            <a:noAutofit/>
-          </a:bodyPr>
-          <a:lstStyle/>
-          <a:p>
-            <a:r>
-              <a:rPr sz="1400">
-                <a:solidFill>
-                  <a:srgbClr val="CCCCCC"/>
-                </a:solidFill>
-                <a:latin typeface="Consolas"/>
-              </a:rPr>
-              <a:t># -----------------------------------------------------------------------</a:t>
-            </a:r>
-          </a:p>
-          <a:p>
-            <a:r>
-              <a:rPr sz="1400">
-                <a:solidFill>
-                  <a:srgbClr val="CCCCCC"/>
-                </a:solidFill>
-                <a:latin typeface="Consolas"/>
-              </a:rPr>
-              <a:t># Real-time setup (PART 1)</a:t>
-            </a:r>
-          </a:p>
-          <a:p>
-            <a:r>
-              <a:rPr sz="1400">
-                <a:solidFill>
-                  <a:srgbClr val="CCCCCC"/>
-                </a:solidFill>
-                <a:latin typeface="Consolas"/>
-              </a:rPr>
-              <a:t># -----------------------------------------------------------------------</a:t>
-            </a:r>
-          </a:p>
-          <a:p>
-            <a:r>
-              <a:rPr sz="1400">
-                <a:solidFill>
-                  <a:srgbClr val="CCCCCC"/>
-                </a:solidFill>
-                <a:latin typeface="Consolas"/>
-              </a:rPr>
-              <a:t>realtime_mode = REALTIME</a:t>
-            </a:r>
-          </a:p>
-          <a:p>
-            <a:r>
-              <a:rPr sz="1400">
-                <a:solidFill>
-                  <a:srgbClr val="CCCCCC"/>
-                </a:solidFill>
-                <a:latin typeface="Consolas"/>
-              </a:rPr>
-              <a:t>if REALTIME == "vehicle":</a:t>
-            </a:r>
-          </a:p>
-          <a:p>
-            <a:r>
-              <a:rPr sz="1400">
-                <a:solidFill>
-                  <a:srgbClr val="CCCCCC"/>
-                </a:solidFill>
-                <a:latin typeface="Consolas"/>
-              </a:rPr>
-              <a:t>    if vehicle:</a:t>
-            </a:r>
-          </a:p>
-          <a:p>
-            <a:r>
-              <a:rPr sz="1400">
-                <a:solidFill>
-                  <a:srgbClr val="CCCCCC"/>
-                </a:solidFill>
-                <a:latin typeface="Consolas"/>
-              </a:rPr>
-              <a:t>        vehicle.EnableRealtime(True)</a:t>
-            </a:r>
-          </a:p>
-          <a:p>
-            <a:r>
-              <a:rPr sz="1400">
-                <a:solidFill>
-                  <a:srgbClr val="CCCCCC"/>
-                </a:solidFill>
-                <a:latin typeface="Consolas"/>
-              </a:rPr>
-              <a:t>    else:</a:t>
-            </a:r>
-          </a:p>
-          <a:p>
-            <a:r>
-              <a:rPr sz="1400">
-                <a:solidFill>
-                  <a:srgbClr val="CCCCCC"/>
-                </a:solidFill>
-                <a:latin typeface="Consolas"/>
-              </a:rPr>
-              <a:t>        # PART 8: there is no vehicle to do the spinning, so fall back to</a:t>
-            </a:r>
-          </a:p>
-          <a:p>
-            <a:r>
-              <a:rPr sz="1400">
-                <a:solidFill>
-                  <a:srgbClr val="CCCCCC"/>
-                </a:solidFill>
-                <a:latin typeface="Consolas"/>
-              </a:rPr>
-              <a:t>        # the timer that does the same thing from outside.</a:t>
-            </a:r>
-          </a:p>
-          <a:p>
-            <a:r>
-              <a:rPr sz="1400">
-                <a:solidFill>
-                  <a:srgbClr val="CCCCCC"/>
-                </a:solidFill>
-                <a:latin typeface="Consolas"/>
-              </a:rPr>
-              <a:t>        realtime_mode = "per_step"</a:t>
-            </a:r>
-          </a:p>
-          <a:p>
-            <a:r>
-              <a:rPr sz="1400">
-                <a:solidFill>
-                  <a:srgbClr val="CCCCCC"/>
-                </a:solidFill>
-                <a:latin typeface="Consolas"/>
-              </a:rPr>
-              <a:t>rt_timer = chrono.ChRealtimeStepTimer()  # used when REALTIME == "per_step"</a:t>
-            </a:r>
-          </a:p>
-          <a:p>
-            <a:r>
-              <a:rPr sz="1400">
-                <a:solidFill>
-                  <a:srgbClr val="CCCCCC"/>
-                </a:solidFill>
-                <a:latin typeface="Consolas"/>
-              </a:rPr>
-              <a:t>cum_timer = CumulativeRealtimeTimer()    # used when REALTIME == "cumulative"</a:t>
-            </a:r>
-          </a:p>
-        </p:txBody>
-      </p:sp>
-      <p:sp>
-        <p:nvSpPr>
-          <p:cNvPr id="4" name="TextBox 3"/>
-          <p:cNvSpPr txBox="1"/>
-          <p:nvPr/>
-        </p:nvSpPr>
-        <p:spPr>
-          <a:xfrm>
-            <a:off x="400000" y="4206240"/>
-            <a:ext cx="11392000" cy="1325880"/>
+            <a:off x="310974" y="6645811"/>
+            <a:ext cx="11644805" cy="188527"/>
           </a:xfrm>
           <a:prstGeom prst="rect">
             <a:avLst/>
@@ -11372,54 +10704,6 @@
           <a:noFill/>
         </p:spPr>
         <p:txBody>
-          <a:bodyPr wrap="square">
-            <a:spAutoFit/>
-          </a:bodyPr>
-          <a:lstStyle/>
-          <a:p>
-            <a:pPr/>
-            <a:r>
-              <a:rPr sz="1800"/>
-              <a:t>"vehicle": ChVehicle::EnableRealtime(True) spins inside vehicle.Advance() using a ChRealtimeStepTimer</a:t>
-            </a:r>
-          </a:p>
-          <a:p>
-            <a:r>
-              <a:rPr sz="1800"/>
-              <a:t>"per_step": the same timer, called explicitly at the end of the loop (next slide)</a:t>
-            </a:r>
-          </a:p>
-          <a:p>
-            <a:r>
-              <a:rPr sz="1800"/>
-              <a:t>"cumulative": our own timer that compares total simulated time to total wall time</a:t>
-            </a:r>
-          </a:p>
-          <a:p>
-            <a:r>
-              <a:rPr sz="1800"/>
-              <a:t>PART 8: a rover or a crane has no vehicle to spin for it, so "vehicle" quietly becomes "per_step" - same policy</a:t>
-            </a:r>
-          </a:p>
-        </p:txBody>
-      </p:sp>
-      <p:sp>
-        <p:nvSpPr>
-          <p:cNvPr id="5" name="TextBox 4"/>
-          <p:cNvSpPr txBox="1"/>
-          <p:nvPr/>
-        </p:nvSpPr>
-        <p:spPr>
-          <a:xfrm>
-            <a:off x="310974" y="6645811"/>
-            <a:ext cx="11644805" cy="188527"/>
-          </a:xfrm>
-          <a:prstGeom prst="rect">
-            <a:avLst/>
-          </a:prstGeom>
-          <a:noFill/>
-        </p:spPr>
-        <p:txBody>
           <a:bodyPr wrap="none">
             <a:spAutoFit/>
           </a:bodyPr>
@@ -11434,7 +10718,7 @@
       </p:sp>
       <p:sp>
         <p:nvSpPr>
-          <p:cNvPr id="6" name="TextBox 5"/>
+          <p:cNvPr id="5" name="PageNo"/>
           <p:cNvSpPr txBox="1"/>
           <p:nvPr/>
         </p:nvSpPr>

--- a/tutorial_HIL_driver.pptx
+++ b/tutorial_HIL_driver.pptx
@@ -8677,6 +8677,60 @@
           </a:p>
         </p:txBody>
       </p:sp>
+      <p:pic>
+        <p:nvPicPr>
+          <p:cNvPr id="6" name="Picture 5" descr="showtime_udp.png"/>
+          <p:cNvPicPr>
+            <a:picLocks noChangeAspect="1"/>
+          </p:cNvPicPr>
+          <p:nvPr/>
+        </p:nvPicPr>
+        <p:blipFill>
+          <a:blip r:embed="rId2"/>
+          <a:stretch>
+            <a:fillRect/>
+          </a:stretch>
+        </p:blipFill>
+        <p:spPr>
+          <a:xfrm>
+            <a:off x="3997568" y="3218688"/>
+            <a:ext cx="4196833" cy="2743200"/>
+          </a:xfrm>
+          <a:prstGeom prst="rect">
+            <a:avLst/>
+          </a:prstGeom>
+        </p:spPr>
+      </p:pic>
+      <p:sp>
+        <p:nvSpPr>
+          <p:cNvPr id="7" name="Caption"/>
+          <p:cNvSpPr txBox="1"/>
+          <p:nvPr/>
+        </p:nvSpPr>
+        <p:spPr>
+          <a:xfrm>
+            <a:off x="1097280" y="6007607"/>
+            <a:ext cx="9997409" cy="274320"/>
+          </a:xfrm>
+          <a:prstGeom prst="rect">
+            <a:avLst/>
+          </a:prstGeom>
+          <a:noFill/>
+        </p:spPr>
+        <p:txBody>
+          <a:bodyPr wrap="square">
+            <a:spAutoFit/>
+          </a:bodyPr>
+          <a:lstStyle/>
+          <a:p>
+            <a:pPr algn="ctr"/>
+            <a:r>
+              <a:rPr sz="1300"/>
+              <a:t>the operator console and the simulation it drives</a:t>
+            </a:r>
+          </a:p>
+        </p:txBody>
+      </p:sp>
     </p:spTree>
   </p:cSld>
   <p:clrMapOvr>
@@ -8903,6 +8957,60 @@
           </a:p>
         </p:txBody>
       </p:sp>
+      <p:pic>
+        <p:nvPicPr>
+          <p:cNvPr id="6" name="Picture 5" descr="rover.png"/>
+          <p:cNvPicPr>
+            <a:picLocks noChangeAspect="1"/>
+          </p:cNvPicPr>
+          <p:nvPr/>
+        </p:nvPicPr>
+        <p:blipFill>
+          <a:blip r:embed="rId2"/>
+          <a:stretch>
+            <a:fillRect/>
+          </a:stretch>
+        </p:blipFill>
+        <p:spPr>
+          <a:xfrm>
+            <a:off x="5023443" y="4645152"/>
+            <a:ext cx="2145081" cy="1316735"/>
+          </a:xfrm>
+          <a:prstGeom prst="rect">
+            <a:avLst/>
+          </a:prstGeom>
+        </p:spPr>
+      </p:pic>
+      <p:sp>
+        <p:nvSpPr>
+          <p:cNvPr id="7" name="Caption"/>
+          <p:cNvSpPr txBox="1"/>
+          <p:nvPr/>
+        </p:nvSpPr>
+        <p:spPr>
+          <a:xfrm>
+            <a:off x="1097280" y="6007607"/>
+            <a:ext cx="9997409" cy="274320"/>
+          </a:xfrm>
+          <a:prstGeom prst="rect">
+            <a:avLst/>
+          </a:prstGeom>
+          <a:noFill/>
+        </p:spPr>
+        <p:txBody>
+          <a:bodyPr wrap="square">
+            <a:spAutoFit/>
+          </a:bodyPr>
+          <a:lstStyle/>
+          <a:p>
+            <a:pPr algn="ctr"/>
+            <a:r>
+              <a:rPr sz="1300"/>
+              <a:t>PLANT = "rover": same three numbers, six driven wheels</a:t>
+            </a:r>
+          </a:p>
+        </p:txBody>
+      </p:sp>
     </p:spTree>
   </p:cSld>
   <p:clrMapOvr>
@@ -9519,6 +9627,60 @@
           </a:p>
         </p:txBody>
       </p:sp>
+      <p:pic>
+        <p:nvPicPr>
+          <p:cNvPr id="6" name="Picture 5" descr="crane_swing.png"/>
+          <p:cNvPicPr>
+            <a:picLocks noChangeAspect="1"/>
+          </p:cNvPicPr>
+          <p:nvPr/>
+        </p:nvPicPr>
+        <p:blipFill>
+          <a:blip r:embed="rId2"/>
+          <a:stretch>
+            <a:fillRect/>
+          </a:stretch>
+        </p:blipFill>
+        <p:spPr>
+          <a:xfrm>
+            <a:off x="4296445" y="4370832"/>
+            <a:ext cx="3599076" cy="1591055"/>
+          </a:xfrm>
+          <a:prstGeom prst="rect">
+            <a:avLst/>
+          </a:prstGeom>
+        </p:spPr>
+      </p:pic>
+      <p:sp>
+        <p:nvSpPr>
+          <p:cNvPr id="7" name="Caption"/>
+          <p:cNvSpPr txBox="1"/>
+          <p:nvPr/>
+        </p:nvSpPr>
+        <p:spPr>
+          <a:xfrm>
+            <a:off x="1097280" y="6007607"/>
+            <a:ext cx="9997409" cy="274320"/>
+          </a:xfrm>
+          <a:prstGeom prst="rect">
+            <a:avLst/>
+          </a:prstGeom>
+          <a:noFill/>
+        </p:spPr>
+        <p:txBody>
+          <a:bodyPr wrap="square">
+            <a:spAutoFit/>
+          </a:bodyPr>
+          <a:lstStyle/>
+          <a:p>
+            <a:pPr algn="ctr"/>
+            <a:r>
+              <a:rPr sz="1300"/>
+              <a:t>the load mid-swing, and the pad it has to end up on</a:t>
+            </a:r>
+          </a:p>
+        </p:txBody>
+      </p:sp>
     </p:spTree>
   </p:cSld>
   <p:clrMapOvr>
@@ -10444,6 +10606,60 @@
             <a:r>
               <a:rPr sz="1000"/>
               <a:t>7</a:t>
+            </a:r>
+          </a:p>
+        </p:txBody>
+      </p:sp>
+      <p:pic>
+        <p:nvPicPr>
+          <p:cNvPr id="6" name="Picture 5" descr="hmmwv.png"/>
+          <p:cNvPicPr>
+            <a:picLocks noChangeAspect="1"/>
+          </p:cNvPicPr>
+          <p:nvPr/>
+        </p:nvPicPr>
+        <p:blipFill>
+          <a:blip r:embed="rId3"/>
+          <a:stretch>
+            <a:fillRect/>
+          </a:stretch>
+        </p:blipFill>
+        <p:spPr>
+          <a:xfrm>
+            <a:off x="5390408" y="4882896"/>
+            <a:ext cx="1411152" cy="1078992"/>
+          </a:xfrm>
+          <a:prstGeom prst="rect">
+            <a:avLst/>
+          </a:prstGeom>
+        </p:spPr>
+      </p:pic>
+      <p:sp>
+        <p:nvSpPr>
+          <p:cNvPr id="7" name="Caption"/>
+          <p:cNvSpPr txBox="1"/>
+          <p:nvPr/>
+        </p:nvSpPr>
+        <p:spPr>
+          <a:xfrm>
+            <a:off x="1097280" y="6007607"/>
+            <a:ext cx="9994392" cy="274320"/>
+          </a:xfrm>
+          <a:prstGeom prst="rect">
+            <a:avLst/>
+          </a:prstGeom>
+          <a:noFill/>
+        </p:spPr>
+        <p:txBody>
+          <a:bodyPr wrap="square">
+            <a:spAutoFit/>
+          </a:bodyPr>
+          <a:lstStyle/>
+          <a:p>
+            <a:pPr algn="ctr"/>
+            <a:r>
+              <a:rPr sz="1300"/>
+              <a:t>the default: an HMMWV on flat rigid terrain</a:t>
             </a:r>
           </a:p>
         </p:txBody>

--- a/tutorial_HIL_driver.pptx
+++ b/tutorial_HIL_driver.pptx
@@ -8586,7 +8586,12 @@
             <p:ph idx="1"/>
           </p:nvPr>
         </p:nvSpPr>
-        <p:spPr/>
+        <p:spPr>
+          <a:xfrm>
+            <a:off x="640080" y="1316736"/>
+            <a:ext cx="7132320" cy="4946904"/>
+          </a:xfrm>
+        </p:spPr>
         <p:txBody>
           <a:bodyPr wrap="square"/>
           <a:lstStyle/>
@@ -8679,7 +8684,7 @@
       </p:sp>
       <p:pic>
         <p:nvPicPr>
-          <p:cNvPr id="6" name="Picture 5" descr="showtime_udp.png"/>
+          <p:cNvPr id="6" name="Picture 5" descr="image.png"/>
           <p:cNvPicPr>
             <a:picLocks noChangeAspect="1"/>
           </p:cNvPicPr>
@@ -8693,8 +8698,8 @@
         </p:blipFill>
         <p:spPr>
           <a:xfrm>
-            <a:off x="3997568" y="3218688"/>
-            <a:ext cx="4196833" cy="2743200"/>
+            <a:off x="8046720" y="2427774"/>
+            <a:ext cx="3749039" cy="2450506"/>
           </a:xfrm>
           <a:prstGeom prst="rect">
             <a:avLst/>
@@ -8709,8 +8714,8 @@
         </p:nvSpPr>
         <p:spPr>
           <a:xfrm>
-            <a:off x="1097280" y="6007607"/>
-            <a:ext cx="9997409" cy="274320"/>
+            <a:off x="7863840" y="4924001"/>
+            <a:ext cx="4114800" cy="274320"/>
           </a:xfrm>
           <a:prstGeom prst="rect">
             <a:avLst/>
@@ -8725,8 +8730,8 @@
           <a:p>
             <a:pPr algn="ctr"/>
             <a:r>
-              <a:rPr sz="1300"/>
-              <a:t>the operator console and the simulation it drives</a:t>
+              <a:rPr sz="1200"/>
+              <a:t>operator console, and the sim it drives</a:t>
             </a:r>
           </a:p>
         </p:txBody>
@@ -8781,7 +8786,12 @@
             <p:ph idx="1"/>
           </p:nvPr>
         </p:nvSpPr>
-        <p:spPr/>
+        <p:spPr>
+          <a:xfrm>
+            <a:off x="640080" y="1316736"/>
+            <a:ext cx="7132320" cy="4946904"/>
+          </a:xfrm>
+        </p:spPr>
         <p:txBody>
           <a:bodyPr wrap="square"/>
           <a:lstStyle/>
@@ -8959,7 +8969,7 @@
       </p:sp>
       <p:pic>
         <p:nvPicPr>
-          <p:cNvPr id="6" name="Picture 5" descr="rover.png"/>
+          <p:cNvPr id="6" name="Picture 5" descr="image.png"/>
           <p:cNvPicPr>
             <a:picLocks noChangeAspect="1"/>
           </p:cNvPicPr>
@@ -8973,8 +8983,8 @@
         </p:blipFill>
         <p:spPr>
           <a:xfrm>
-            <a:off x="5023443" y="4645152"/>
-            <a:ext cx="2145081" cy="1316735"/>
+            <a:off x="8046720" y="2502373"/>
+            <a:ext cx="3749039" cy="2301307"/>
           </a:xfrm>
           <a:prstGeom prst="rect">
             <a:avLst/>
@@ -8989,8 +8999,8 @@
         </p:nvSpPr>
         <p:spPr>
           <a:xfrm>
-            <a:off x="1097280" y="6007607"/>
-            <a:ext cx="9997409" cy="274320"/>
+            <a:off x="7863840" y="4849402"/>
+            <a:ext cx="4114800" cy="274320"/>
           </a:xfrm>
           <a:prstGeom prst="rect">
             <a:avLst/>
@@ -9005,8 +9015,8 @@
           <a:p>
             <a:pPr algn="ctr"/>
             <a:r>
-              <a:rPr sz="1300"/>
-              <a:t>PLANT = "rover": same three numbers, six driven wheels</a:t>
+              <a:rPr sz="1200"/>
+              <a:t>PLANT = "rover": same three numbers</a:t>
             </a:r>
           </a:p>
         </p:txBody>
@@ -9514,7 +9524,12 @@
             <p:ph idx="1"/>
           </p:nvPr>
         </p:nvSpPr>
-        <p:spPr/>
+        <p:spPr>
+          <a:xfrm>
+            <a:off x="640080" y="1316736"/>
+            <a:ext cx="7132320" cy="4946904"/>
+          </a:xfrm>
+        </p:spPr>
         <p:txBody>
           <a:bodyPr wrap="square"/>
           <a:lstStyle/>
@@ -9629,7 +9644,7 @@
       </p:sp>
       <p:pic>
         <p:nvPicPr>
-          <p:cNvPr id="6" name="Picture 5" descr="crane_swing.png"/>
+          <p:cNvPr id="6" name="Picture 5" descr="image.png"/>
           <p:cNvPicPr>
             <a:picLocks noChangeAspect="1"/>
           </p:cNvPicPr>
@@ -9643,8 +9658,8 @@
         </p:blipFill>
         <p:spPr>
           <a:xfrm>
-            <a:off x="4296445" y="4370832"/>
-            <a:ext cx="3599076" cy="1591055"/>
+            <a:off x="8046720" y="2824353"/>
+            <a:ext cx="3749039" cy="1657350"/>
           </a:xfrm>
           <a:prstGeom prst="rect">
             <a:avLst/>
@@ -9659,8 +9674,8 @@
         </p:nvSpPr>
         <p:spPr>
           <a:xfrm>
-            <a:off x="1097280" y="6007607"/>
-            <a:ext cx="9997409" cy="274320"/>
+            <a:off x="7863840" y="4527423"/>
+            <a:ext cx="4114800" cy="274320"/>
           </a:xfrm>
           <a:prstGeom prst="rect">
             <a:avLst/>
@@ -9675,8 +9690,8 @@
           <a:p>
             <a:pPr algn="ctr"/>
             <a:r>
-              <a:rPr sz="1300"/>
-              <a:t>the load mid-swing, and the pad it has to end up on</a:t>
+              <a:rPr sz="1200"/>
+              <a:t>the load mid-swing, and the pad it must reach</a:t>
             </a:r>
           </a:p>
         </p:txBody>
@@ -10424,7 +10439,12 @@
             <p:ph idx="1"/>
           </p:nvPr>
         </p:nvSpPr>
-        <p:spPr/>
+        <p:spPr>
+          <a:xfrm>
+            <a:off x="640080" y="1316736"/>
+            <a:ext cx="7132320" cy="4946904"/>
+          </a:xfrm>
+        </p:spPr>
         <p:txBody>
           <a:bodyPr wrap="square"/>
           <a:lstStyle/>
@@ -10612,7 +10632,7 @@
       </p:sp>
       <p:pic>
         <p:nvPicPr>
-          <p:cNvPr id="6" name="Picture 5" descr="hmmwv.png"/>
+          <p:cNvPr id="6" name="Picture 5" descr="image.png"/>
           <p:cNvPicPr>
             <a:picLocks noChangeAspect="1"/>
           </p:cNvPicPr>
@@ -10626,8 +10646,8 @@
         </p:blipFill>
         <p:spPr>
           <a:xfrm>
-            <a:off x="5390408" y="4882896"/>
-            <a:ext cx="1411152" cy="1078992"/>
+            <a:off x="8046720" y="2219736"/>
+            <a:ext cx="3749039" cy="2866582"/>
           </a:xfrm>
           <a:prstGeom prst="rect">
             <a:avLst/>
@@ -10642,8 +10662,8 @@
         </p:nvSpPr>
         <p:spPr>
           <a:xfrm>
-            <a:off x="1097280" y="6007607"/>
-            <a:ext cx="9994392" cy="274320"/>
+            <a:off x="7863840" y="5132039"/>
+            <a:ext cx="4114800" cy="274320"/>
           </a:xfrm>
           <a:prstGeom prst="rect">
             <a:avLst/>
@@ -10658,7 +10678,7 @@
           <a:p>
             <a:pPr algn="ctr"/>
             <a:r>
-              <a:rPr sz="1300"/>
+              <a:rPr sz="1200"/>
               <a:t>the default: an HMMWV on flat rigid terrain</a:t>
             </a:r>
           </a:p>

--- a/tutorial_HIL_driver.pptx
+++ b/tutorial_HIL_driver.pptx
@@ -4782,7 +4782,7 @@
           <a:p>
             <a:r>
               <a:rPr sz="2600"/>
-              <a:t>The loop, and where the driver is queried (Lines 700 to 751)</a:t>
+              <a:t>The loop, and where the driver is queried (Lines 714 to 765)</a:t>
             </a:r>
           </a:p>
         </p:txBody>
@@ -4961,7 +4961,7 @@
                 </a:solidFill>
                 <a:latin typeface="Consolas"/>
               </a:rPr>
-              <a:t>    # Get driver inputs (three floats) - the whole human-in-the-loop contract</a:t>
+              <a:t>    # Get driver inputs (three floats) - the shape every plant is driven through</a:t>
             </a:r>
           </a:p>
           <a:p>
@@ -5281,7 +5281,7 @@
           <a:p>
             <a:r>
               <a:rPr sz="2600"/>
-              <a:t>Measure it: sim time vs wall time (Lines 753 to 769)</a:t>
+              <a:t>Measure it: sim time vs wall time (Lines 767 to 783)</a:t>
             </a:r>
           </a:p>
         </p:txBody>
@@ -5782,7 +5782,7 @@
           <a:p>
             <a:r>
               <a:rPr sz="2600"/>
-              <a:t>Enforce real time, three ways (Lines 657 to 671, 71 to 88)</a:t>
+              <a:t>Enforce real time, three ways (Lines 671 to 685, 71 to 88)</a:t>
             </a:r>
           </a:p>
         </p:txBody>
@@ -6539,7 +6539,7 @@
           <a:p>
             <a:r>
               <a:rPr sz="2600"/>
-              <a:t>ChInteractiveDriver, and routing events (Lines 535 to 572, 615 to 618)</a:t>
+              <a:t>ChInteractiveDriver, and routing events (Lines 545 to 582, 625 to 628)</a:t>
             </a:r>
           </a:p>
         </p:txBody>
@@ -7467,7 +7467,7 @@
           <a:p>
             <a:r>
               <a:rPr sz="2600"/>
-              <a:t>A UDP input source (Lines 219 to 269)</a:t>
+              <a:t>A UDP input source (Lines 229 to 279)</a:t>
             </a:r>
           </a:p>
         </p:txBody>
@@ -8106,7 +8106,7 @@
           <a:p>
             <a:r>
               <a:rPr sz="2600"/>
-              <a:t>Sample once, hold, then send state back (Lines 710 to 722, 771 to 781)</a:t>
+              <a:t>Sample once, hold, then send state back (Lines 724 to 736, 785 to 795)</a:t>
             </a:r>
           </a:p>
         </p:txBody>
@@ -8263,7 +8263,7 @@
                 </a:solidFill>
                 <a:latin typeface="Consolas"/>
               </a:rPr>
-              <a:t># Get driver inputs (three floats) - this is the whole human-in-the-loop contract</a:t>
+              <a:t># Get driver inputs (three floats) - the shape every plant here is driven through</a:t>
             </a:r>
           </a:p>
           <a:p>
@@ -9784,7 +9784,7 @@
             <a:pPr/>
             <a:r>
               <a:rPr sz="2000"/>
-              <a:t>Nothing on screen is vehicle-specific. So what does Chrono actually require of a human interface?</a:t>
+              <a:t>Nothing on screen is vehicle-specific. So what does a human-in-the-loop interface actually look like?</a:t>
             </a:r>
           </a:p>
         </p:txBody>
@@ -9882,7 +9882,7 @@
           <a:p>
             <a:r>
               <a:rPr sz="2600"/>
-              <a:t>What Chrono actually requires of a human interface (Lines 151 to 178)</a:t>
+              <a:t>The pattern, and two interfaces that fit it</a:t>
             </a:r>
           </a:p>
         </p:txBody>
@@ -9896,7 +9896,7 @@
         <p:spPr>
           <a:xfrm>
             <a:off x="0" y="1051560"/>
-            <a:ext cx="12191969" cy="3733038"/>
+            <a:ext cx="12191969" cy="3547872"/>
           </a:xfrm>
           <a:prstGeom prst="rect">
             <a:avLst/>
@@ -9918,7 +9918,7 @@
                 </a:solidFill>
                 <a:latin typeface="Consolas"/>
               </a:rPr>
-              <a:t>class DriverInputs:</a:t>
+              <a:t># The pattern, whatever is being driven:</a:t>
             </a:r>
           </a:p>
           <a:p>
@@ -9929,7 +9929,7 @@
                 </a:solidFill>
                 <a:latin typeface="Consolas"/>
               </a:rPr>
-              <a:t>    """The whole ChDriver contract, in Python."""</a:t>
+              <a:t>#   read numbers from the human  -&gt;  push them into the model  -&gt;  step it</a:t>
             </a:r>
           </a:p>
           <a:p>
@@ -9940,6 +9940,39 @@
                 </a:solidFill>
                 <a:latin typeface="Consolas"/>
               </a:rPr>
+              <a:t>#   -&gt;  hold to real time  -&gt;  send some state back</a:t>
+            </a:r>
+          </a:p>
+          <a:p>
+            <a:r>
+              <a:rPr sz="1200">
+                <a:solidFill>
+                  <a:srgbClr val="CCCCCC"/>
+                </a:solidFill>
+                <a:latin typeface="Consolas"/>
+              </a:rPr>
+              <a:t>#</a:t>
+            </a:r>
+          </a:p>
+          <a:p>
+            <a:r>
+              <a:rPr sz="1200">
+                <a:solidFill>
+                  <a:srgbClr val="CCCCCC"/>
+                </a:solidFill>
+                <a:latin typeface="Consolas"/>
+              </a:rPr>
+              <a:t># Only the middle step is plant-specific.  Two examples:</a:t>
+            </a:r>
+          </a:p>
+          <a:p>
+            <a:r>
+              <a:rPr sz="1200">
+                <a:solidFill>
+                  <a:srgbClr val="CCCCCC"/>
+                </a:solidFill>
+                <a:latin typeface="Consolas"/>
+              </a:rPr>
               <a:t/>
             </a:r>
           </a:p>
@@ -9951,7 +9984,7 @@
                 </a:solidFill>
                 <a:latin typeface="Consolas"/>
               </a:rPr>
-              <a:t>    def __init__(self):</a:t>
+              <a:t># A Chrono::Vehicle                        (tutorial_HIL_driver.py 724-736)</a:t>
             </a:r>
           </a:p>
           <a:p>
@@ -9962,7 +9995,7 @@
                 </a:solidFill>
                 <a:latin typeface="Consolas"/>
               </a:rPr>
-              <a:t>        self.m_steering = 0.0</a:t>
+              <a:t>driver_inputs = driver.GetInputs()   # ChDriver: steering, throttle, braking, clutch</a:t>
             </a:r>
           </a:p>
           <a:p>
@@ -9973,7 +10006,7 @@
                 </a:solidFill>
                 <a:latin typeface="Consolas"/>
               </a:rPr>
-              <a:t>        self.m_throttle = 0.0</a:t>
+              <a:t>plant.apply(driver_inputs)           # nothing to do: the vehicle reads them itself</a:t>
             </a:r>
           </a:p>
           <a:p>
@@ -9984,7 +10017,7 @@
                 </a:solidFill>
                 <a:latin typeface="Consolas"/>
               </a:rPr>
-              <a:t>        self.m_braking = 0.0</a:t>
+              <a:t>vehicle_model.Synchronize(t, driver_inputs, terrain)</a:t>
             </a:r>
           </a:p>
           <a:p>
@@ -10006,7 +10039,7 @@
                 </a:solidFill>
                 <a:latin typeface="Consolas"/>
               </a:rPr>
-              <a:t>    def SetSteering(self, v):</a:t>
+              <a:t># The gantry crane, with no ChDriver in it        (hil_plants.py 333-338)</a:t>
             </a:r>
           </a:p>
           <a:p>
@@ -10017,7 +10050,7 @@
                 </a:solidFill>
                 <a:latin typeface="Consolas"/>
               </a:rPr>
-              <a:t>        self.m_steering = v</a:t>
+              <a:t>def apply(self, inputs):</a:t>
             </a:r>
           </a:p>
           <a:p>
@@ -10028,7 +10061,7 @@
                 </a:solidFill>
                 <a:latin typeface="Consolas"/>
               </a:rPr>
-              <a:t/>
+              <a:t>    t = self.system.GetChTime()</a:t>
             </a:r>
           </a:p>
           <a:p>
@@ -10039,7 +10072,7 @@
                 </a:solidFill>
                 <a:latin typeface="Consolas"/>
               </a:rPr>
-              <a:t>    def SetThrottle(self, v):</a:t>
+              <a:t>    # Throttle drives forward, braking drives back: two pedals, one axis.</a:t>
             </a:r>
           </a:p>
           <a:p>
@@ -10050,7 +10083,7 @@
                 </a:solidFill>
                 <a:latin typeface="Consolas"/>
               </a:rPr>
-              <a:t>        self.m_throttle = v</a:t>
+              <a:t>    long_cmd = (inputs.m_throttle - inputs.m_braking) * self.MAX_LONG_SPEED</a:t>
             </a:r>
           </a:p>
           <a:p>
@@ -10061,7 +10094,7 @@
                 </a:solidFill>
                 <a:latin typeface="Consolas"/>
               </a:rPr>
-              <a:t/>
+              <a:t>    self.long_speed.SetSetpoint(long_cmd, t)        # ChFunctionSetpoint</a:t>
             </a:r>
           </a:p>
           <a:p>
@@ -10072,51 +10105,7 @@
                 </a:solidFill>
                 <a:latin typeface="Consolas"/>
               </a:rPr>
-              <a:t>    def SetBraking(self, v):</a:t>
-            </a:r>
-          </a:p>
-          <a:p>
-            <a:r>
-              <a:rPr sz="1200">
-                <a:solidFill>
-                  <a:srgbClr val="CCCCCC"/>
-                </a:solidFill>
-                <a:latin typeface="Consolas"/>
-              </a:rPr>
-              <a:t>        self.m_braking = v</a:t>
-            </a:r>
-          </a:p>
-          <a:p>
-            <a:r>
-              <a:rPr sz="1200">
-                <a:solidFill>
-                  <a:srgbClr val="CCCCCC"/>
-                </a:solidFill>
-                <a:latin typeface="Consolas"/>
-              </a:rPr>
-              <a:t/>
-            </a:r>
-          </a:p>
-          <a:p>
-            <a:r>
-              <a:rPr sz="1200">
-                <a:solidFill>
-                  <a:srgbClr val="CCCCCC"/>
-                </a:solidFill>
-                <a:latin typeface="Consolas"/>
-              </a:rPr>
-              <a:t>    def GetInputs(self):</a:t>
-            </a:r>
-          </a:p>
-          <a:p>
-            <a:r>
-              <a:rPr sz="1200">
-                <a:solidFill>
-                  <a:srgbClr val="CCCCCC"/>
-                </a:solidFill>
-                <a:latin typeface="Consolas"/>
-              </a:rPr>
-              <a:t>        return self</a:t>
+              <a:t>    self.cross_speed.SetSetpoint(inputs.m_steering * self.MAX_CROSS_SPEED, t)</a:t>
             </a:r>
           </a:p>
         </p:txBody>
@@ -10129,8 +10118,8 @@
         </p:nvSpPr>
         <p:spPr>
           <a:xfrm>
-            <a:off x="402336" y="4921758"/>
-            <a:ext cx="11393424" cy="1036701"/>
+            <a:off x="402336" y="4736592"/>
+            <a:ext cx="11393424" cy="1280160"/>
           </a:xfrm>
           <a:prstGeom prst="rect">
             <a:avLst/>
@@ -10144,26 +10133,78 @@
           <a:lstStyle/>
           <a:p>
             <a:r>
-              <a:rPr sz="1800"/>
-              <a:t>Three floats per step: steering [-1, 1], throttle [0, 1], braking [0, 1]</a:t>
-            </a:r>
-          </a:p>
-          <a:p>
+              <a:rPr sz="1600"/>
+              <a:t>The pattern is the invariant. The interface is not: </a:t>
+            </a:r>
             <a:r>
               <a:rPr sz="1600">
                 <a:latin typeface="Consolas"/>
               </a:rPr>
-              <a:t>veh.ChDriver</a:t>
-            </a:r>
-            <a:r>
-              <a:rPr sz="1800"/>
-              <a:t> is the same container in C++; this Python stand-in is what the rover and the crane use</a:t>
-            </a:r>
-          </a:p>
-          <a:p>
-            <a:r>
-              <a:rPr sz="1800"/>
-              <a:t>That is the entire contract. Everything else in this talk is about filling it in, on time, from somewhere real</a:t>
+              <a:t>ChDriver</a:t>
+            </a:r>
+            <a:r>
+              <a:rPr sz="1600"/>
+              <a:t> is a Chrono::Vehicle class, and its constructor demands a </a:t>
+            </a:r>
+            <a:r>
+              <a:rPr sz="1600">
+                <a:latin typeface="Consolas"/>
+              </a:rPr>
+              <a:t>ChVehicle&amp;</a:t>
+            </a:r>
+          </a:p>
+          <a:p>
+            <a:r>
+              <a:rPr sz="1600"/>
+              <a:t>The crane has no driver class at all - its whole input surface is two </a:t>
+            </a:r>
+            <a:r>
+              <a:rPr sz="1600">
+                <a:latin typeface="Consolas"/>
+              </a:rPr>
+              <a:t>SetSetpoint()</a:t>
+            </a:r>
+            <a:r>
+              <a:rPr sz="1600"/>
+              <a:t> calls on a </a:t>
+            </a:r>
+            <a:r>
+              <a:rPr sz="1600">
+                <a:latin typeface="Consolas"/>
+              </a:rPr>
+              <a:t>ChFunctionSetpoint</a:t>
+            </a:r>
+          </a:p>
+          <a:p>
+            <a:r>
+              <a:rPr sz="1600"/>
+              <a:t>It is handed the same three numbers only so one console drives either; </a:t>
+            </a:r>
+            <a:r>
+              <a:rPr sz="1600">
+                <a:latin typeface="Consolas"/>
+              </a:rPr>
+              <a:t>DriverInputs</a:t>
+            </a:r>
+            <a:r>
+              <a:rPr sz="1600"/>
+              <a:t>, twelve lines of Python, is that ChDriver-shaped box</a:t>
+            </a:r>
+          </a:p>
+          <a:p>
+            <a:r>
+              <a:rPr sz="1600"/>
+              <a:t>And the shape has a cost the crane shows plainly: </a:t>
+            </a:r>
+            <a:r>
+              <a:rPr sz="1600">
+                <a:latin typeface="Consolas"/>
+              </a:rPr>
+              <a:t>throttle - braking</a:t>
+            </a:r>
+            <a:r>
+              <a:rPr sz="1600"/>
+              <a:t>, two pedals recovered into the one signed axis it actually wanted</a:t>
             </a:r>
           </a:p>
         </p:txBody>
@@ -10284,7 +10325,7 @@
             <a:pPr/>
             <a:r>
               <a:rPr sz="2000"/>
-              <a:t>You have just seen the whole contract. Two things around it are hard, and both are the part that transfers:</a:t>
+              <a:t>You have just seen the pattern. Two things around it are hard, and both are the part that transfers:</a:t>
             </a:r>
           </a:p>
           <a:p>

--- a/tutorial_HIL_driver.pptx
+++ b/tutorial_HIL_driver.pptx
@@ -14877,7 +14877,7 @@
       </p:sp>
       <p:pic>
         <p:nvPicPr>
-          <p:cNvPr id="4" name="Picture 3" descr="demo_go2.png"/>
+          <p:cNvPr id="4" name="Picture 3" descr="hmmwv.png"/>
           <p:cNvPicPr>
             <a:picLocks noChangeAspect="1"/>
           </p:cNvPicPr>
@@ -14891,8 +14891,8 @@
         </p:blipFill>
         <p:spPr>
           <a:xfrm>
-            <a:off x="2776407" y="3880104"/>
-            <a:ext cx="2181098" cy="1688592"/>
+            <a:off x="1535041" y="3880104"/>
+            <a:ext cx="2208413" cy="1688592"/>
           </a:xfrm>
           <a:prstGeom prst="rect">
             <a:avLst/>
@@ -14901,7 +14901,7 @@
       </p:pic>
       <p:pic>
         <p:nvPicPr>
-          <p:cNvPr id="5" name="Picture 4" descr="demo_arm.png"/>
+          <p:cNvPr id="5" name="Picture 4" descr="demo_go2.png"/>
           <p:cNvPicPr>
             <a:picLocks noChangeAspect="1"/>
           </p:cNvPicPr>
@@ -14915,8 +14915,8 @@
         </p:blipFill>
         <p:spPr>
           <a:xfrm>
-            <a:off x="5231825" y="3880104"/>
-            <a:ext cx="1725300" cy="1688592"/>
+            <a:off x="4017774" y="3880104"/>
+            <a:ext cx="2181098" cy="1688592"/>
           </a:xfrm>
           <a:prstGeom prst="rect">
             <a:avLst/>
@@ -14925,7 +14925,7 @@
       </p:pic>
       <p:pic>
         <p:nvPicPr>
-          <p:cNvPr id="6" name="Picture 5" descr="demo_push.png"/>
+          <p:cNvPr id="6" name="Picture 5" descr="demo_arm.png"/>
           <p:cNvPicPr>
             <a:picLocks noChangeAspect="1"/>
           </p:cNvPicPr>
@@ -14939,7 +14939,31 @@
         </p:blipFill>
         <p:spPr>
           <a:xfrm>
-            <a:off x="7231446" y="3880104"/>
+            <a:off x="6473192" y="3880104"/>
+            <a:ext cx="1725300" cy="1688592"/>
+          </a:xfrm>
+          <a:prstGeom prst="rect">
+            <a:avLst/>
+          </a:prstGeom>
+        </p:spPr>
+      </p:pic>
+      <p:pic>
+        <p:nvPicPr>
+          <p:cNvPr id="7" name="Picture 6" descr="demo_push.png"/>
+          <p:cNvPicPr>
+            <a:picLocks noChangeAspect="1"/>
+          </p:cNvPicPr>
+          <p:nvPr/>
+        </p:nvPicPr>
+        <p:blipFill>
+          <a:blip r:embed="rId5"/>
+          <a:stretch>
+            <a:fillRect/>
+          </a:stretch>
+        </p:blipFill>
+        <p:spPr>
+          <a:xfrm>
+            <a:off x="8472812" y="3880104"/>
             <a:ext cx="2181098" cy="1688592"/>
           </a:xfrm>
           <a:prstGeom prst="rect">
@@ -14949,7 +14973,7 @@
       </p:pic>
       <p:sp>
         <p:nvSpPr>
-          <p:cNvPr id="7" name="NoteBox"/>
+          <p:cNvPr id="8" name="NoteBox"/>
           <p:cNvSpPr txBox="1"/>
           <p:nvPr/>
         </p:nvSpPr>
@@ -14983,7 +15007,7 @@
       </p:sp>
       <p:sp>
         <p:nvSpPr>
-          <p:cNvPr id="8" name="Footer"/>
+          <p:cNvPr id="9" name="Footer"/>
           <p:cNvSpPr txBox="1"/>
           <p:nvPr/>
         </p:nvSpPr>
@@ -15012,7 +15036,7 @@
       </p:sp>
       <p:sp>
         <p:nvSpPr>
-          <p:cNvPr id="9" name="PageNo"/>
+          <p:cNvPr id="10" name="PageNo"/>
           <p:cNvSpPr txBox="1"/>
           <p:nvPr/>
         </p:nvSpPr>

--- a/tutorial_HIL_driver.pptx
+++ b/tutorial_HIL_driver.pptx
@@ -4924,7 +4924,12 @@
             <p:ph idx="1"/>
           </p:nvPr>
         </p:nvSpPr>
-        <p:spPr/>
+        <p:spPr>
+          <a:xfrm>
+            <a:off x="642552" y="1313782"/>
+            <a:ext cx="10936224" cy="5203976"/>
+          </a:xfrm>
+        </p:spPr>
         <p:txBody>
           <a:bodyPr wrap="square"/>
           <a:lstStyle/>
@@ -5936,7 +5941,12 @@
             <p:ph idx="1"/>
           </p:nvPr>
         </p:nvSpPr>
-        <p:spPr/>
+        <p:spPr>
+          <a:xfrm>
+            <a:off x="642552" y="1313782"/>
+            <a:ext cx="10936224" cy="5203976"/>
+          </a:xfrm>
+        </p:spPr>
         <p:txBody>
           <a:bodyPr wrap="square"/>
           <a:lstStyle/>
@@ -6164,7 +6174,12 @@
             <p:ph idx="1"/>
           </p:nvPr>
         </p:nvSpPr>
-        <p:spPr/>
+        <p:spPr>
+          <a:xfrm>
+            <a:off x="642552" y="1313782"/>
+            <a:ext cx="10936224" cy="5203976"/>
+          </a:xfrm>
+        </p:spPr>
         <p:txBody>
           <a:bodyPr wrap="square"/>
           <a:lstStyle/>
@@ -6368,7 +6383,12 @@
             <p:ph idx="1"/>
           </p:nvPr>
         </p:nvSpPr>
-        <p:spPr/>
+        <p:spPr>
+          <a:xfrm>
+            <a:off x="642552" y="1313782"/>
+            <a:ext cx="10936224" cy="5203976"/>
+          </a:xfrm>
+        </p:spPr>
         <p:txBody>
           <a:bodyPr wrap="square"/>
           <a:lstStyle/>
@@ -9132,7 +9152,12 @@
             <p:ph idx="1"/>
           </p:nvPr>
         </p:nvSpPr>
-        <p:spPr/>
+        <p:spPr>
+          <a:xfrm>
+            <a:off x="642552" y="1313782"/>
+            <a:ext cx="10936224" cy="5203976"/>
+          </a:xfrm>
+        </p:spPr>
         <p:txBody>
           <a:bodyPr wrap="square"/>
           <a:lstStyle/>
@@ -9376,7 +9401,12 @@
             <p:ph idx="1"/>
           </p:nvPr>
         </p:nvSpPr>
-        <p:spPr/>
+        <p:spPr>
+          <a:xfrm>
+            <a:off x="642552" y="1313782"/>
+            <a:ext cx="10936224" cy="5203976"/>
+          </a:xfrm>
+        </p:spPr>
         <p:txBody>
           <a:bodyPr wrap="square"/>
           <a:lstStyle/>
@@ -9685,7 +9715,12 @@
             <p:ph idx="1"/>
           </p:nvPr>
         </p:nvSpPr>
-        <p:spPr/>
+        <p:spPr>
+          <a:xfrm>
+            <a:off x="642552" y="1313782"/>
+            <a:ext cx="10936224" cy="5203976"/>
+          </a:xfrm>
+        </p:spPr>
         <p:txBody>
           <a:bodyPr wrap="square"/>
           <a:lstStyle/>
@@ -9929,7 +9964,12 @@
             <p:ph idx="1"/>
           </p:nvPr>
         </p:nvSpPr>
-        <p:spPr/>
+        <p:spPr>
+          <a:xfrm>
+            <a:off x="642552" y="1313782"/>
+            <a:ext cx="6446520" cy="5203976"/>
+          </a:xfrm>
+        </p:spPr>
         <p:txBody>
           <a:bodyPr wrap="square"/>
           <a:lstStyle/>
@@ -10040,8 +10080,8 @@
         </p:blipFill>
         <p:spPr>
           <a:xfrm>
-            <a:off x="5272632" y="4311903"/>
-            <a:ext cx="1643686" cy="1256792"/>
+            <a:off x="7269480" y="1707707"/>
+            <a:ext cx="4526280" cy="3460873"/>
           </a:xfrm>
           <a:prstGeom prst="rect">
             <a:avLst/>
@@ -10310,7 +10350,12 @@
             <p:ph idx="1"/>
           </p:nvPr>
         </p:nvSpPr>
-        <p:spPr/>
+        <p:spPr>
+          <a:xfrm>
+            <a:off x="642552" y="1313782"/>
+            <a:ext cx="10936224" cy="5203976"/>
+          </a:xfrm>
+        </p:spPr>
         <p:txBody>
           <a:bodyPr wrap="square"/>
           <a:lstStyle/>
@@ -13583,7 +13628,12 @@
             <p:ph idx="1"/>
           </p:nvPr>
         </p:nvSpPr>
-        <p:spPr/>
+        <p:spPr>
+          <a:xfrm>
+            <a:off x="642552" y="1313782"/>
+            <a:ext cx="10936224" cy="5203976"/>
+          </a:xfrm>
+        </p:spPr>
         <p:txBody>
           <a:bodyPr wrap="square"/>
           <a:lstStyle/>
@@ -14785,7 +14835,12 @@
             <p:ph idx="1"/>
           </p:nvPr>
         </p:nvSpPr>
-        <p:spPr/>
+        <p:spPr>
+          <a:xfrm>
+            <a:off x="642552" y="1313782"/>
+            <a:ext cx="10936224" cy="5203976"/>
+          </a:xfrm>
+        </p:spPr>
         <p:txBody>
           <a:bodyPr wrap="square"/>
           <a:lstStyle/>
@@ -15114,114 +15169,119 @@
             <p:ph idx="1"/>
           </p:nvPr>
         </p:nvSpPr>
-        <p:spPr/>
+        <p:spPr>
+          <a:xfrm>
+            <a:off x="642552" y="1313782"/>
+            <a:ext cx="6446520" cy="5203976"/>
+          </a:xfrm>
+        </p:spPr>
         <p:txBody>
           <a:bodyPr wrap="square"/>
           <a:lstStyle/>
           <a:p>
             <a:pPr>
               <a:spcAft>
-                <a:spcPts val="900"/>
-              </a:spcAft>
-            </a:pPr>
-            <a:r>
-              <a:rPr sz="1800">
+                <a:spcPts val="500"/>
+              </a:spcAft>
+            </a:pPr>
+            <a:r>
+              <a:rPr sz="1400">
                 <a:latin typeface="Consolas"/>
               </a:rPr>
               <a:t>WHAT</a:t>
             </a:r>
             <a:r>
-              <a:rPr sz="2000"/>
+              <a:rPr sz="1600"/>
               <a:t>  click where the push lands, set direction and magnitude, fire a measured impulse, watch the controller recover or fail</a:t>
             </a:r>
           </a:p>
           <a:p>
             <a:pPr>
               <a:spcAft>
-                <a:spcPts val="900"/>
-              </a:spcAft>
-            </a:pPr>
-            <a:r>
-              <a:rPr sz="1800">
+                <a:spcPts val="500"/>
+              </a:spcAft>
+            </a:pPr>
+            <a:r>
+              <a:rPr sz="1400">
                 <a:latin typeface="Consolas"/>
               </a:rPr>
               <a:t>WHY</a:t>
             </a:r>
             <a:r>
-              <a:rPr sz="2000"/>
+              <a:rPr sz="1600"/>
               <a:t>   robustness testing that produces a NUMBER, so the result can go in a report and somebody else can reproduce it</a:t>
             </a:r>
           </a:p>
           <a:p>
             <a:pPr>
               <a:spcAft>
-                <a:spcPts val="900"/>
-              </a:spcAft>
-            </a:pPr>
-            <a:r>
-              <a:rPr sz="2000"/>
+                <a:spcPts val="500"/>
+              </a:spcAft>
+            </a:pPr>
+            <a:r>
+              <a:rPr sz="1600"/>
               <a:t>Forward at the base COM: </a:t>
             </a:r>
             <a:r>
-              <a:rPr sz="1800">
+              <a:rPr sz="1400">
                 <a:latin typeface="Consolas"/>
               </a:rPr>
               <a:t>325 N</a:t>
             </a:r>
             <a:r>
-              <a:rPr sz="2000"/>
+              <a:rPr sz="1600"/>
               <a:t> recovers, </a:t>
             </a:r>
             <a:r>
-              <a:rPr sz="1800">
+              <a:rPr sz="1400">
                 <a:latin typeface="Consolas"/>
               </a:rPr>
               <a:t>330 N</a:t>
             </a:r>
             <a:r>
-              <a:rPr sz="2000"/>
+              <a:rPr sz="1600"/>
               <a:t> does not</a:t>
             </a:r>
           </a:p>
           <a:p>
             <a:pPr>
               <a:spcAft>
-                <a:spcPts val="900"/>
-              </a:spcAft>
-            </a:pPr>
-            <a:r>
-              <a:rPr sz="2000"/>
+                <a:spcPts val="500"/>
+              </a:spcAft>
+            </a:pPr>
+            <a:r>
+              <a:rPr sz="1600"/>
               <a:t>Sideways: </a:t>
             </a:r>
             <a:r>
-              <a:rPr sz="1800">
+              <a:rPr sz="1400">
                 <a:latin typeface="Consolas"/>
               </a:rPr>
               <a:t>280 N</a:t>
             </a:r>
             <a:r>
-              <a:rPr sz="2000"/>
+              <a:rPr sz="1600"/>
               <a:t> recovers, </a:t>
             </a:r>
             <a:r>
-              <a:rPr sz="1800">
+              <a:rPr sz="1400">
                 <a:latin typeface="Consolas"/>
               </a:rPr>
               <a:t>290 N</a:t>
             </a:r>
             <a:r>
-              <a:rPr sz="2000"/>
+              <a:rPr sz="1600"/>
               <a:t> does not</a:t>
             </a:r>
           </a:p>
           <a:p>
             <a:pPr>
               <a:spcAft>
-                <a:spcPts val="900"/>
-              </a:spcAft>
-            </a:pPr>
-            <a:r>
-              <a:rPr sz="2000"/>
+                <a:spcPts val="500"/>
+              </a:spcAft>
+            </a:pPr>
+            <a:r>
+              <a:rPr sz="1600"/>
               <a:t>Same impulse, applied 5 cm higher up the torso: the verdict flips</a:t>
             </a:r>
           </a:p>
@@ -15243,8 +15303,8 @@
         </p:blipFill>
         <p:spPr>
           <a:xfrm>
-            <a:off x="5282797" y="4311903"/>
-            <a:ext cx="1623356" cy="1256792"/>
+            <a:off x="7269480" y="1686035"/>
+            <a:ext cx="4526280" cy="3504216"/>
           </a:xfrm>
           <a:prstGeom prst="rect">
             <a:avLst/>
@@ -15394,7 +15454,12 @@
             <p:ph idx="1"/>
           </p:nvPr>
         </p:nvSpPr>
-        <p:spPr/>
+        <p:spPr>
+          <a:xfrm>
+            <a:off x="642552" y="1313782"/>
+            <a:ext cx="10936224" cy="5203976"/>
+          </a:xfrm>
+        </p:spPr>
         <p:txBody>
           <a:bodyPr wrap="square"/>
           <a:lstStyle/>
@@ -15908,7 +15973,12 @@
             <p:ph idx="1"/>
           </p:nvPr>
         </p:nvSpPr>
-        <p:spPr/>
+        <p:spPr>
+          <a:xfrm>
+            <a:off x="642552" y="1313782"/>
+            <a:ext cx="10936224" cy="5203976"/>
+          </a:xfrm>
+        </p:spPr>
         <p:txBody>
           <a:bodyPr wrap="square"/>
           <a:lstStyle/>
@@ -16145,7 +16215,12 @@
             <p:ph idx="1"/>
           </p:nvPr>
         </p:nvSpPr>
-        <p:spPr/>
+        <p:spPr>
+          <a:xfrm>
+            <a:off x="642552" y="1313782"/>
+            <a:ext cx="6446520" cy="5203976"/>
+          </a:xfrm>
+        </p:spPr>
         <p:txBody>
           <a:bodyPr wrap="square"/>
           <a:lstStyle/>
@@ -16223,8 +16298,8 @@
         </p:blipFill>
         <p:spPr>
           <a:xfrm>
-            <a:off x="4875125" y="4197603"/>
-            <a:ext cx="2438701" cy="1371092"/>
+            <a:off x="7269480" y="2165756"/>
+            <a:ext cx="4526280" cy="2544775"/>
           </a:xfrm>
           <a:prstGeom prst="rect">
             <a:avLst/>
@@ -16374,7 +16449,12 @@
             <p:ph idx="1"/>
           </p:nvPr>
         </p:nvSpPr>
-        <p:spPr/>
+        <p:spPr>
+          <a:xfrm>
+            <a:off x="642552" y="1313782"/>
+            <a:ext cx="10936224" cy="5203976"/>
+          </a:xfrm>
+        </p:spPr>
         <p:txBody>
           <a:bodyPr wrap="square"/>
           <a:lstStyle/>
@@ -17213,7 +17293,12 @@
             <p:ph idx="1"/>
           </p:nvPr>
         </p:nvSpPr>
-        <p:spPr/>
+        <p:spPr>
+          <a:xfrm>
+            <a:off x="642552" y="1313782"/>
+            <a:ext cx="10936224" cy="5203976"/>
+          </a:xfrm>
+        </p:spPr>
         <p:txBody>
           <a:bodyPr wrap="square"/>
           <a:lstStyle/>

--- a/tutorial_HIL_driver.pptx
+++ b/tutorial_HIL_driver.pptx
@@ -6395,167 +6395,167 @@
           <a:p>
             <a:pPr>
               <a:spcAft>
-                <a:spcPts val="500"/>
-              </a:spcAft>
-            </a:pPr>
-            <a:r>
-              <a:rPr sz="1500"/>
+                <a:spcPts val="900"/>
+              </a:spcAft>
+            </a:pPr>
+            <a:r>
+              <a:rPr sz="1800"/>
               <a:t>1.  </a:t>
             </a:r>
             <a:r>
-              <a:rPr sz="1300">
+              <a:rPr sz="1600">
                 <a:latin typeface="Consolas"/>
               </a:rPr>
               <a:t>Step size</a:t>
             </a:r>
             <a:r>
-              <a:rPr sz="1500"/>
+              <a:rPr sz="1800"/>
               <a:t>. Everything scales with steps per second. The largest step that stays stable is the single biggest lever there is.</a:t>
             </a:r>
           </a:p>
           <a:p>
             <a:pPr>
               <a:spcAft>
-                <a:spcPts val="500"/>
-              </a:spcAft>
-            </a:pPr>
-            <a:r>
-              <a:rPr sz="1500"/>
+                <a:spcPts val="900"/>
+              </a:spcAft>
+            </a:pPr>
+            <a:r>
+              <a:rPr sz="1800"/>
               <a:t>2.  </a:t>
             </a:r>
             <a:r>
-              <a:rPr sz="1300">
+              <a:rPr sz="1600">
                 <a:latin typeface="Consolas"/>
               </a:rPr>
               <a:t>Collision geometry</a:t>
             </a:r>
             <a:r>
-              <a:rPr sz="1500"/>
+              <a:rPr sz="1800"/>
               <a:t>. Primitives beat convex hulls beat triangle meshes, by a lot. Most imported assets arrive as the slowest option.</a:t>
             </a:r>
           </a:p>
           <a:p>
             <a:pPr>
               <a:spcAft>
-                <a:spcPts val="500"/>
-              </a:spcAft>
-            </a:pPr>
-            <a:r>
-              <a:rPr sz="1500"/>
+                <a:spcPts val="900"/>
+              </a:spcAft>
+            </a:pPr>
+            <a:r>
+              <a:rPr sz="1800"/>
               <a:t>3.  </a:t>
             </a:r>
             <a:r>
-              <a:rPr sz="1300">
+              <a:rPr sz="1600">
                 <a:latin typeface="Consolas"/>
               </a:rPr>
               <a:t>Which pairs are tested at all</a:t>
             </a:r>
             <a:r>
-              <a:rPr sz="1500"/>
+              <a:rPr sz="1800"/>
               <a:t>. Families and masks remove whole classes of pair from the broadphase, including self-collision.</a:t>
             </a:r>
           </a:p>
           <a:p>
             <a:pPr>
               <a:spcAft>
-                <a:spcPts val="500"/>
-              </a:spcAft>
-            </a:pPr>
-            <a:r>
-              <a:rPr sz="1500"/>
+                <a:spcPts val="900"/>
+              </a:spcAft>
+            </a:pPr>
+            <a:r>
+              <a:rPr sz="1800"/>
               <a:t>4.  </a:t>
             </a:r>
             <a:r>
-              <a:rPr sz="1300">
+              <a:rPr sz="1600">
                 <a:latin typeface="Consolas"/>
               </a:rPr>
               <a:t>Active domains</a:t>
             </a:r>
             <a:r>
-              <a:rPr sz="1500"/>
+              <a:rPr sz="1800"/>
               <a:t>. Let the expensive physics happen only where it matters: deformable terrain near the wheels, fluid near the hull.</a:t>
             </a:r>
           </a:p>
           <a:p>
             <a:pPr>
               <a:spcAft>
-                <a:spcPts val="500"/>
-              </a:spcAft>
-            </a:pPr>
-            <a:r>
-              <a:rPr sz="1500"/>
+                <a:spcPts val="900"/>
+              </a:spcAft>
+            </a:pPr>
+            <a:r>
+              <a:rPr sz="1800"/>
               <a:t>5.  </a:t>
             </a:r>
             <a:r>
-              <a:rPr sz="1300">
+              <a:rPr sz="1600">
                 <a:latin typeface="Consolas"/>
               </a:rPr>
               <a:t>Solver type and iteration cap</a:t>
             </a:r>
             <a:r>
-              <a:rPr sz="1500"/>
+              <a:rPr sz="1800"/>
               <a:t>. Iterations buy convergence and cost time, and you pay out of the same step you wanted to sleep in.</a:t>
             </a:r>
           </a:p>
           <a:p>
             <a:pPr>
               <a:spcAft>
-                <a:spcPts val="500"/>
-              </a:spcAft>
-            </a:pPr>
-            <a:r>
-              <a:rPr sz="1500"/>
+                <a:spcPts val="900"/>
+              </a:spcAft>
+            </a:pPr>
+            <a:r>
+              <a:rPr sz="1800"/>
               <a:t>6.  </a:t>
             </a:r>
             <a:r>
-              <a:rPr sz="1300">
+              <a:rPr sz="1600">
                 <a:latin typeface="Consolas"/>
               </a:rPr>
               <a:t>Threads</a:t>
             </a:r>
             <a:r>
-              <a:rPr sz="1500"/>
+              <a:rPr sz="1800"/>
               <a:t>, </a:t>
             </a:r>
             <a:r>
-              <a:rPr sz="1300">
+              <a:rPr sz="1600">
                 <a:latin typeface="Consolas"/>
               </a:rPr>
               <a:t>sleeping bodies</a:t>
             </a:r>
             <a:r>
-              <a:rPr sz="1500"/>
+              <a:rPr sz="1800"/>
               <a:t>, and </a:t>
             </a:r>
             <a:r>
-              <a:rPr sz="1300">
+              <a:rPr sz="1600">
                 <a:latin typeface="Consolas"/>
               </a:rPr>
               <a:t>model reduction</a:t>
             </a:r>
             <a:r>
-              <a:rPr sz="1500"/>
+              <a:rPr sz="1800"/>
               <a:t> for elastic subassemblies.</a:t>
             </a:r>
           </a:p>
           <a:p>
             <a:pPr>
               <a:spcAft>
-                <a:spcPts val="500"/>
-              </a:spcAft>
-            </a:pPr>
-            <a:r>
-              <a:rPr sz="1500"/>
+                <a:spcPts val="900"/>
+              </a:spcAft>
+            </a:pPr>
+            <a:r>
+              <a:rPr sz="1800"/>
               <a:t>7.  </a:t>
             </a:r>
             <a:r>
-              <a:rPr sz="1300">
+              <a:rPr sz="1600">
                 <a:latin typeface="Consolas"/>
               </a:rPr>
               <a:t>Render less often than you step</a:t>
             </a:r>
             <a:r>
-              <a:rPr sz="1500"/>
+              <a:rPr sz="1800"/>
               <a:t>. Drawing is not free, and the eye does not need 500 Hz.</a:t>
             </a:r>
           </a:p>
@@ -9413,48 +9413,48 @@
           <a:p>
             <a:pPr>
               <a:spcAft>
-                <a:spcPts val="500"/>
-              </a:spcAft>
-            </a:pPr>
-            <a:r>
-              <a:rPr sz="1300">
+                <a:spcPts val="900"/>
+              </a:spcAft>
+            </a:pPr>
+            <a:r>
+              <a:rPr sz="1600">
                 <a:latin typeface="Consolas"/>
               </a:rPr>
               <a:t>ChInteractiveDriver</a:t>
             </a:r>
             <a:r>
-              <a:rPr sz="1500"/>
+              <a:rPr sz="1800"/>
               <a:t> covers two CLASSES of device, not two devices:</a:t>
             </a:r>
           </a:p>
           <a:p>
             <a:pPr lvl="1">
               <a:spcAft>
-                <a:spcPts val="500"/>
-              </a:spcAft>
-            </a:pPr>
-            <a:r>
-              <a:rPr sz="1100">
+                <a:spcPts val="900"/>
+              </a:spcAft>
+            </a:pPr>
+            <a:r>
+              <a:rPr sz="1400">
                 <a:latin typeface="Consolas"/>
               </a:rPr>
               <a:t>InputMode_KEYBOARD</a:t>
             </a:r>
             <a:r>
-              <a:rPr sz="1300"/>
+              <a:rPr sz="1600"/>
               <a:t>  -  with </a:t>
             </a:r>
             <a:r>
-              <a:rPr sz="1100">
+              <a:rPr sz="1400">
                 <a:latin typeface="Consolas"/>
               </a:rPr>
               <a:t>KeyboardMode_HELD</a:t>
             </a:r>
             <a:r>
-              <a:rPr sz="1300"/>
+              <a:rPr sz="1600"/>
               <a:t> or </a:t>
             </a:r>
             <a:r>
-              <a:rPr sz="1100">
+              <a:rPr sz="1400">
                 <a:latin typeface="Consolas"/>
               </a:rPr>
               <a:t>_CUMULATIVE</a:t>
@@ -9463,32 +9463,32 @@
           <a:p>
             <a:pPr lvl="1">
               <a:spcAft>
-                <a:spcPts val="500"/>
-              </a:spcAft>
-            </a:pPr>
-            <a:r>
-              <a:rPr sz="1100">
+                <a:spcPts val="900"/>
+              </a:spcAft>
+            </a:pPr>
+            <a:r>
+              <a:rPr sz="1400">
                 <a:latin typeface="Consolas"/>
               </a:rPr>
               <a:t>InputMode_JOYSTICK</a:t>
             </a:r>
             <a:r>
-              <a:rPr sz="1300"/>
+              <a:rPr sz="1600"/>
               <a:t>  -  anything the windowing layer enumerates as one</a:t>
             </a:r>
           </a:p>
           <a:p>
             <a:pPr>
               <a:spcAft>
-                <a:spcPts val="500"/>
-              </a:spcAft>
-            </a:pPr>
-            <a:r>
-              <a:rPr sz="1500"/>
+                <a:spcPts val="900"/>
+              </a:spcAft>
+            </a:pPr>
+            <a:r>
+              <a:rPr sz="1800"/>
               <a:t>A joystick is mapped by a JSON file, not by code: </a:t>
             </a:r>
             <a:r>
-              <a:rPr sz="1300">
+              <a:rPr sz="1600">
                 <a:latin typeface="Consolas"/>
               </a:rPr>
               <a:t>SetJoystickConfigFile(path)</a:t>
@@ -9497,65 +9497,65 @@
           <a:p>
             <a:pPr lvl="1">
               <a:spcAft>
-                <a:spcPts val="500"/>
-              </a:spcAft>
-            </a:pPr>
-            <a:r>
-              <a:rPr sz="1300"/>
+                <a:spcPts val="900"/>
+              </a:spcAft>
+            </a:pPr>
+            <a:r>
+              <a:rPr sz="1600"/>
               <a:t>mapped axes: steering, throttle, brake, CLUTCH</a:t>
             </a:r>
           </a:p>
           <a:p>
             <a:pPr lvl="1">
               <a:spcAft>
-                <a:spcPts val="500"/>
-              </a:spcAft>
-            </a:pPr>
-            <a:r>
-              <a:rPr sz="1300"/>
+                <a:spcPts val="900"/>
+              </a:spcAft>
+            </a:pPr>
+            <a:r>
+              <a:rPr sz="1600"/>
               <a:t>mapped buttons: shift up/down, reverse, gears 1-9, manual-gearbox toggle, plus one user callback</a:t>
             </a:r>
           </a:p>
           <a:p>
             <a:pPr>
               <a:spcAft>
-                <a:spcPts val="500"/>
-              </a:spcAft>
-            </a:pPr>
-            <a:r>
-              <a:rPr sz="1500"/>
+                <a:spcPts val="900"/>
+              </a:spcAft>
+            </a:pPr>
+            <a:r>
+              <a:rPr sz="1800"/>
               <a:t>Four configs ship in </a:t>
             </a:r>
             <a:r>
-              <a:rPr sz="1300">
+              <a:rPr sz="1600">
                 <a:latin typeface="Consolas"/>
               </a:rPr>
               <a:t>data/vehicle/joystick/</a:t>
             </a:r>
             <a:r>
-              <a:rPr sz="1500"/>
+              <a:rPr sz="1800"/>
               <a:t>: Default, Logitech RumblePad 2, Xbox One, and Wheel+Pedals+Shifters</a:t>
             </a:r>
           </a:p>
           <a:p>
             <a:pPr>
               <a:spcAft>
-                <a:spcPts val="500"/>
-              </a:spcAft>
-            </a:pPr>
-            <a:r>
-              <a:rPr sz="1500"/>
+                <a:spcPts val="900"/>
+              </a:spcAft>
+            </a:pPr>
+            <a:r>
+              <a:rPr sz="1800"/>
               <a:t>Each control names its own DEVICE, so a wheel, a pedal box and an H-shifter enumerating as three separate USB devices all map at once</a:t>
             </a:r>
           </a:p>
           <a:p>
             <a:pPr>
               <a:spcAft>
-                <a:spcPts val="500"/>
-              </a:spcAft>
-            </a:pPr>
-            <a:r>
-              <a:rPr sz="1500"/>
+                <a:spcPts val="900"/>
+              </a:spcAft>
+            </a:pPr>
+            <a:r>
+              <a:rPr sz="1800"/>
               <a:t>Not hypothetical: the remote-driving study on slide 5 ran on a Logitech G29 wheel and pedal set through this path</a:t>
             </a:r>
           </a:p>
@@ -13742,8 +13742,8 @@
         </p:blipFill>
         <p:spPr>
           <a:xfrm>
-            <a:off x="4870834" y="4629404"/>
-            <a:ext cx="1213252" cy="939291"/>
+            <a:off x="4305558" y="4140708"/>
+            <a:ext cx="1844484" cy="1427987"/>
           </a:xfrm>
           <a:prstGeom prst="rect">
             <a:avLst/>
@@ -13766,8 +13766,8 @@
         </p:blipFill>
         <p:spPr>
           <a:xfrm>
-            <a:off x="6358406" y="4629404"/>
-            <a:ext cx="959711" cy="939291"/>
+            <a:off x="6424362" y="4140708"/>
+            <a:ext cx="1459031" cy="1427987"/>
           </a:xfrm>
           <a:prstGeom prst="rect">
             <a:avLst/>
@@ -14946,8 +14946,8 @@
         </p:blipFill>
         <p:spPr>
           <a:xfrm>
-            <a:off x="1535041" y="3880104"/>
-            <a:ext cx="2208413" cy="1688592"/>
+            <a:off x="1894430" y="4026408"/>
+            <a:ext cx="2017070" cy="1542287"/>
           </a:xfrm>
           <a:prstGeom prst="rect">
             <a:avLst/>
@@ -14970,8 +14970,8 @@
         </p:blipFill>
         <p:spPr>
           <a:xfrm>
-            <a:off x="4017774" y="3880104"/>
-            <a:ext cx="2181098" cy="1688592"/>
+            <a:off x="4185821" y="4026408"/>
+            <a:ext cx="1992122" cy="1542287"/>
           </a:xfrm>
           <a:prstGeom prst="rect">
             <a:avLst/>
@@ -14994,8 +14994,8 @@
         </p:blipFill>
         <p:spPr>
           <a:xfrm>
-            <a:off x="6473192" y="3880104"/>
-            <a:ext cx="1725300" cy="1688592"/>
+            <a:off x="6452263" y="4026408"/>
+            <a:ext cx="1575816" cy="1542287"/>
           </a:xfrm>
           <a:prstGeom prst="rect">
             <a:avLst/>
@@ -15018,8 +15018,8 @@
         </p:blipFill>
         <p:spPr>
           <a:xfrm>
-            <a:off x="8472812" y="3880104"/>
-            <a:ext cx="2181098" cy="1688592"/>
+            <a:off x="8302399" y="4026408"/>
+            <a:ext cx="1992122" cy="1542287"/>
           </a:xfrm>
           <a:prstGeom prst="rect">
             <a:avLst/>
@@ -15181,107 +15181,107 @@
           <a:p>
             <a:pPr>
               <a:spcAft>
-                <a:spcPts val="500"/>
-              </a:spcAft>
-            </a:pPr>
-            <a:r>
-              <a:rPr sz="1400">
+                <a:spcPts val="900"/>
+              </a:spcAft>
+            </a:pPr>
+            <a:r>
+              <a:rPr sz="1800">
                 <a:latin typeface="Consolas"/>
               </a:rPr>
               <a:t>WHAT</a:t>
             </a:r>
             <a:r>
-              <a:rPr sz="1600"/>
+              <a:rPr sz="2000"/>
               <a:t>  click where the push lands, set direction and magnitude, fire a measured impulse, watch the controller recover or fail</a:t>
             </a:r>
           </a:p>
           <a:p>
             <a:pPr>
               <a:spcAft>
-                <a:spcPts val="500"/>
-              </a:spcAft>
-            </a:pPr>
-            <a:r>
-              <a:rPr sz="1400">
+                <a:spcPts val="900"/>
+              </a:spcAft>
+            </a:pPr>
+            <a:r>
+              <a:rPr sz="1800">
                 <a:latin typeface="Consolas"/>
               </a:rPr>
               <a:t>WHY</a:t>
             </a:r>
             <a:r>
-              <a:rPr sz="1600"/>
+              <a:rPr sz="2000"/>
               <a:t>   robustness testing that produces a NUMBER, so the result can go in a report and somebody else can reproduce it</a:t>
             </a:r>
           </a:p>
           <a:p>
             <a:pPr>
               <a:spcAft>
-                <a:spcPts val="500"/>
-              </a:spcAft>
-            </a:pPr>
-            <a:r>
-              <a:rPr sz="1600"/>
+                <a:spcPts val="900"/>
+              </a:spcAft>
+            </a:pPr>
+            <a:r>
+              <a:rPr sz="2000"/>
               <a:t>Forward at the base COM: </a:t>
             </a:r>
             <a:r>
-              <a:rPr sz="1400">
+              <a:rPr sz="1800">
                 <a:latin typeface="Consolas"/>
               </a:rPr>
               <a:t>325 N</a:t>
             </a:r>
             <a:r>
-              <a:rPr sz="1600"/>
+              <a:rPr sz="2000"/>
               <a:t> recovers, </a:t>
             </a:r>
             <a:r>
-              <a:rPr sz="1400">
+              <a:rPr sz="1800">
                 <a:latin typeface="Consolas"/>
               </a:rPr>
               <a:t>330 N</a:t>
             </a:r>
             <a:r>
-              <a:rPr sz="1600"/>
+              <a:rPr sz="2000"/>
               <a:t> does not</a:t>
             </a:r>
           </a:p>
           <a:p>
             <a:pPr>
               <a:spcAft>
-                <a:spcPts val="500"/>
-              </a:spcAft>
-            </a:pPr>
-            <a:r>
-              <a:rPr sz="1600"/>
+                <a:spcPts val="900"/>
+              </a:spcAft>
+            </a:pPr>
+            <a:r>
+              <a:rPr sz="2000"/>
               <a:t>Sideways: </a:t>
             </a:r>
             <a:r>
-              <a:rPr sz="1400">
+              <a:rPr sz="1800">
                 <a:latin typeface="Consolas"/>
               </a:rPr>
               <a:t>280 N</a:t>
             </a:r>
             <a:r>
-              <a:rPr sz="1600"/>
+              <a:rPr sz="2000"/>
               <a:t> recovers, </a:t>
             </a:r>
             <a:r>
-              <a:rPr sz="1400">
+              <a:rPr sz="1800">
                 <a:latin typeface="Consolas"/>
               </a:rPr>
               <a:t>290 N</a:t>
             </a:r>
             <a:r>
-              <a:rPr sz="1600"/>
+              <a:rPr sz="2000"/>
               <a:t> does not</a:t>
             </a:r>
           </a:p>
           <a:p>
             <a:pPr>
               <a:spcAft>
-                <a:spcPts val="500"/>
-              </a:spcAft>
-            </a:pPr>
-            <a:r>
-              <a:rPr sz="1600"/>
+                <a:spcPts val="900"/>
+              </a:spcAft>
+            </a:pPr>
+            <a:r>
+              <a:rPr sz="2000"/>
               <a:t>Same impulse, applied 5 cm higher up the torso: the verdict flips</a:t>
             </a:r>
           </a:p>
@@ -16218,7 +16218,7 @@
         <p:spPr>
           <a:xfrm>
             <a:off x="642552" y="1313782"/>
-            <a:ext cx="6446520" cy="5203976"/>
+            <a:ext cx="10936224" cy="5203976"/>
           </a:xfrm>
         </p:spPr>
         <p:txBody>
@@ -16227,95 +16227,134 @@
           <a:p>
             <a:pPr>
               <a:spcAft>
-                <a:spcPts val="900"/>
-              </a:spcAft>
-            </a:pPr>
-            <a:r>
-              <a:rPr sz="2000"/>
-              <a:t>Two reasons, and they are different jobs:</a:t>
-            </a:r>
-          </a:p>
-          <a:p>
-            <a:pPr>
-              <a:spcAft>
-                <a:spcPts val="900"/>
-              </a:spcAft>
-            </a:pPr>
-            <a:r>
-              <a:rPr sz="1800">
-                <a:latin typeface="Consolas"/>
-              </a:rPr>
-              <a:t>The person is the SUBJECT.</a:t>
-            </a:r>
-            <a:r>
-              <a:rPr sz="2000"/>
-              <a:t> You are measuring the human. What does an operator do when the controls are delayed?</a:t>
-            </a:r>
-          </a:p>
-          <a:p>
-            <a:pPr>
-              <a:spcAft>
-                <a:spcPts val="900"/>
-              </a:spcAft>
-            </a:pPr>
-            <a:r>
-              <a:rPr sz="1800">
-                <a:latin typeface="Consolas"/>
-              </a:rPr>
-              <a:t>The person is the CONTROLLER.</a:t>
-            </a:r>
-            <a:r>
-              <a:rPr sz="2000"/>
-              <a:t> No controller you have can do the task, so a human closes the loop.</a:t>
-            </a:r>
-          </a:p>
-          <a:p>
-            <a:pPr>
-              <a:spcAft>
-                <a:spcPts val="900"/>
-              </a:spcAft>
-            </a:pPr>
-            <a:r>
-              <a:rPr sz="2000"/>
-              <a:t>Either way the simulator has to hold wall-clock time, or you are measuring the simulator instead of the person.</a:t>
-            </a:r>
-          </a:p>
-        </p:txBody>
-      </p:sp>
-      <p:pic>
-        <p:nvPicPr>
-          <p:cNvPr id="4" name="Picture 3" descr="hil_rig.png"/>
-          <p:cNvPicPr>
-            <a:picLocks noChangeAspect="1"/>
-          </p:cNvPicPr>
-          <p:nvPr/>
-        </p:nvPicPr>
-        <p:blipFill>
-          <a:blip r:embed="rId2"/>
-          <a:stretch>
-            <a:fillRect/>
-          </a:stretch>
-        </p:blipFill>
-        <p:spPr>
-          <a:xfrm>
-            <a:off x="7269480" y="2165756"/>
-            <a:ext cx="4526280" cy="2544775"/>
-          </a:xfrm>
-          <a:prstGeom prst="rect">
-            <a:avLst/>
-          </a:prstGeom>
-        </p:spPr>
-      </p:pic>
-      <p:sp>
-        <p:nvSpPr>
-          <p:cNvPr id="5" name="NoteBox"/>
+                <a:spcPts val="500"/>
+              </a:spcAft>
+            </a:pPr>
+            <a:r>
+              <a:rPr sz="1300">
+                <a:latin typeface="Consolas"/>
+              </a:rPr>
+              <a:t>Measuring the person.</a:t>
+            </a:r>
+            <a:r>
+              <a:rPr sz="1500"/>
+              <a:t> Human factors: what does an operator do when the controls are delayed, when an assist takes authority, when a hazard appears late?</a:t>
+            </a:r>
+          </a:p>
+          <a:p>
+            <a:pPr>
+              <a:spcAft>
+                <a:spcPts val="500"/>
+              </a:spcAft>
+            </a:pPr>
+            <a:r>
+              <a:rPr sz="1300">
+                <a:latin typeface="Consolas"/>
+              </a:rPr>
+              <a:t>Training the person.</a:t>
+            </a:r>
+            <a:r>
+              <a:rPr sz="1500"/>
+              <a:t> Here the simulator IS the product, and the fidelity bar is whether it feels like the real thing.</a:t>
+            </a:r>
+          </a:p>
+          <a:p>
+            <a:pPr>
+              <a:spcAft>
+                <a:spcPts val="500"/>
+              </a:spcAft>
+            </a:pPr>
+            <a:r>
+              <a:rPr sz="1300">
+                <a:latin typeface="Consolas"/>
+              </a:rPr>
+              <a:t>Collecting data from the person.</a:t>
+            </a:r>
+            <a:r>
+              <a:rPr sz="1500"/>
+              <a:t> Demonstrations for imitation learning, driver models, reference trajectories no controller would have produced.</a:t>
+            </a:r>
+          </a:p>
+          <a:p>
+            <a:pPr>
+              <a:spcAft>
+                <a:spcPts val="500"/>
+              </a:spcAft>
+            </a:pPr>
+            <a:r>
+              <a:rPr sz="1300">
+                <a:latin typeface="Consolas"/>
+              </a:rPr>
+              <a:t>Testing the machine against a person.</a:t>
+            </a:r>
+            <a:r>
+              <a:rPr sz="1500"/>
+              <a:t> Someone perturbs a controller in ways a scripted test would never have thought to try.</a:t>
+            </a:r>
+          </a:p>
+          <a:p>
+            <a:pPr>
+              <a:spcAft>
+                <a:spcPts val="500"/>
+              </a:spcAft>
+            </a:pPr>
+            <a:r>
+              <a:rPr sz="1300">
+                <a:latin typeface="Consolas"/>
+              </a:rPr>
+              <a:t>Judging the machine by feel.</a:t>
+            </a:r>
+            <a:r>
+              <a:rPr sz="1500"/>
+              <a:t> Reach in, pull on it, see whether it behaves plausibly. Faster than any metric at answering 'something is wrong here'.</a:t>
+            </a:r>
+          </a:p>
+          <a:p>
+            <a:pPr>
+              <a:spcAft>
+                <a:spcPts val="500"/>
+              </a:spcAft>
+            </a:pPr>
+            <a:r>
+              <a:rPr sz="1300">
+                <a:latin typeface="Consolas"/>
+              </a:rPr>
+              <a:t>Designing shared control.</a:t>
+            </a:r>
+            <a:r>
+              <a:rPr sz="1500"/>
+              <a:t> When authority is split between a person and a controller, neither half can be evaluated alone.</a:t>
+            </a:r>
+          </a:p>
+          <a:p>
+            <a:pPr>
+              <a:spcAft>
+                <a:spcPts val="500"/>
+              </a:spcAft>
+            </a:pPr>
+            <a:r>
+              <a:rPr sz="1300">
+                <a:latin typeface="Consolas"/>
+              </a:rPr>
+              <a:t>Setting a scene up.</a:t>
+            </a:r>
+            <a:r>
+              <a:rPr sz="1500"/>
+              <a:t> Placing things by hand where a script would take twenty guesses. Useful, and not in the loop.</a:t>
+            </a:r>
+          </a:p>
+        </p:txBody>
+      </p:sp>
+      <p:sp>
+        <p:nvSpPr>
+          <p:cNvPr id="4" name="NoteBox"/>
           <p:cNvSpPr txBox="1"/>
           <p:nvPr/>
         </p:nvSpPr>
         <p:spPr>
           <a:xfrm>
             <a:off x="402336" y="5532120"/>
-            <a:ext cx="11393424" cy="713232"/>
+            <a:ext cx="11393424" cy="987551"/>
           </a:xfrm>
           <a:prstGeom prst="rect">
             <a:avLst/>
@@ -16335,14 +16374,14 @@
             </a:pPr>
             <a:r>
               <a:rPr sz="1600"/>
-              <a:t>The first reason is why pacing is not a detail. A human-factors result taken from a simulation running at 0.6x real time is a result about a slow simulation.</a:t>
-            </a:r>
-          </a:p>
-        </p:txBody>
-      </p:sp>
-      <p:sp>
-        <p:nvSpPr>
-          <p:cNvPr id="6" name="Footer"/>
+              <a:t>Two different jobs hide in that list. Sometimes the person is the SUBJECT being measured; sometimes the person is the CONTROLLER, because nothing else can do the task. Either way the simulator has to hold wall-clock time, or you are measuring the simulator instead of the person.</a:t>
+            </a:r>
+          </a:p>
+        </p:txBody>
+      </p:sp>
+      <p:sp>
+        <p:nvSpPr>
+          <p:cNvPr id="5" name="Footer"/>
           <p:cNvSpPr txBox="1"/>
           <p:nvPr/>
         </p:nvSpPr>
@@ -16371,7 +16410,7 @@
       </p:sp>
       <p:sp>
         <p:nvSpPr>
-          <p:cNvPr id="7" name="PageNo"/>
+          <p:cNvPr id="6" name="PageNo"/>
           <p:cNvSpPr txBox="1"/>
           <p:nvPr/>
         </p:nvSpPr>
@@ -16531,7 +16570,7 @@
       </p:sp>
       <p:pic>
         <p:nvPicPr>
-          <p:cNvPr id="4" name="Picture 3" descr="remote_driving_study.png"/>
+          <p:cNvPr id="4" name="Picture 3" descr="hil_rig.png"/>
           <p:cNvPicPr>
             <a:picLocks noChangeAspect="1"/>
           </p:cNvPicPr>
@@ -16545,17 +16584,41 @@
         </p:blipFill>
         <p:spPr>
           <a:xfrm>
-            <a:off x="4242050" y="4400804"/>
-            <a:ext cx="3704850" cy="1167891"/>
+            <a:off x="1856506" y="3912108"/>
+            <a:ext cx="2946500" cy="1656587"/>
           </a:xfrm>
           <a:prstGeom prst="rect">
             <a:avLst/>
           </a:prstGeom>
         </p:spPr>
       </p:pic>
-      <p:sp>
-        <p:nvSpPr>
-          <p:cNvPr id="5" name="NoteBox"/>
+      <p:pic>
+        <p:nvPicPr>
+          <p:cNvPr id="5" name="Picture 4" descr="remote_driving_study.png"/>
+          <p:cNvPicPr>
+            <a:picLocks noChangeAspect="1"/>
+          </p:cNvPicPr>
+          <p:nvPr/>
+        </p:nvPicPr>
+        <p:blipFill>
+          <a:blip r:embed="rId3"/>
+          <a:stretch>
+            <a:fillRect/>
+          </a:stretch>
+        </p:blipFill>
+        <p:spPr>
+          <a:xfrm>
+            <a:off x="5077326" y="3912108"/>
+            <a:ext cx="5255118" cy="1656587"/>
+          </a:xfrm>
+          <a:prstGeom prst="rect">
+            <a:avLst/>
+          </a:prstGeom>
+        </p:spPr>
+      </p:pic>
+      <p:sp>
+        <p:nvSpPr>
+          <p:cNvPr id="6" name="NoteBox"/>
           <p:cNvSpPr txBox="1"/>
           <p:nvPr/>
         </p:nvSpPr>
@@ -16589,7 +16652,7 @@
       </p:sp>
       <p:sp>
         <p:nvSpPr>
-          <p:cNvPr id="6" name="Footer"/>
+          <p:cNvPr id="7" name="Footer"/>
           <p:cNvSpPr txBox="1"/>
           <p:nvPr/>
         </p:nvSpPr>
@@ -16618,7 +16681,7 @@
       </p:sp>
       <p:sp>
         <p:nvSpPr>
-          <p:cNvPr id="7" name="PageNo"/>
+          <p:cNvPr id="8" name="PageNo"/>
           <p:cNvSpPr txBox="1"/>
           <p:nvPr/>
         </p:nvSpPr>

--- a/tutorial_HIL_driver.pptx
+++ b/tutorial_HIL_driver.pptx
@@ -5041,37 +5041,14 @@
               <a:t>do not run SLOW  -  make the step cheap enough to have slack (the real work)</a:t>
             </a:r>
           </a:p>
-        </p:txBody>
-      </p:sp>
-      <p:sp>
-        <p:nvSpPr>
-          <p:cNvPr id="4" name="NoteBox"/>
-          <p:cNvSpPr txBox="1"/>
-          <p:nvPr/>
-        </p:nvSpPr>
-        <p:spPr>
-          <a:xfrm>
-            <a:off x="402336" y="5532120"/>
-            <a:ext cx="11393424" cy="713232"/>
-          </a:xfrm>
-          <a:prstGeom prst="rect">
-            <a:avLst/>
-          </a:prstGeom>
-          <a:noFill/>
-        </p:spPr>
-        <p:txBody>
-          <a:bodyPr wrap="square">
-            <a:spAutoFit/>
-          </a:bodyPr>
-          <a:lstStyle/>
-          <a:p>
-            <a:pPr>
-              <a:spcAft>
-                <a:spcPts val="400"/>
-              </a:spcAft>
-            </a:pPr>
-            <a:r>
-              <a:rPr sz="1600"/>
+          <a:p>
+            <a:pPr>
+              <a:spcAft>
+                <a:spcPts val="900"/>
+              </a:spcAft>
+            </a:pPr>
+            <a:r>
+              <a:rPr sz="2000"/>
               <a:t>Unpaced, a box being dragged by hand travelled 88.7 m in one wall-clock second instead of 1.8 m. The physics was right both times. Only one of them was usable by a person.</a:t>
             </a:r>
           </a:p>
@@ -5079,7 +5056,7 @@
       </p:sp>
       <p:sp>
         <p:nvSpPr>
-          <p:cNvPr id="5" name="Footer"/>
+          <p:cNvPr id="4" name="Footer"/>
           <p:cNvSpPr txBox="1"/>
           <p:nvPr/>
         </p:nvSpPr>
@@ -5108,7 +5085,7 @@
       </p:sp>
       <p:sp>
         <p:nvSpPr>
-          <p:cNvPr id="6" name="PageNo"/>
+          <p:cNvPr id="5" name="PageNo"/>
           <p:cNvSpPr txBox="1"/>
           <p:nvPr/>
         </p:nvSpPr>
@@ -6029,37 +6006,14 @@
               <a:t>Same physics in both runs. The only difference is whether the process sleeps.</a:t>
             </a:r>
           </a:p>
-        </p:txBody>
-      </p:sp>
-      <p:sp>
-        <p:nvSpPr>
-          <p:cNvPr id="4" name="NoteBox"/>
-          <p:cNvSpPr txBox="1"/>
-          <p:nvPr/>
-        </p:nvSpPr>
-        <p:spPr>
-          <a:xfrm>
-            <a:off x="402336" y="5532120"/>
-            <a:ext cx="11393424" cy="713232"/>
-          </a:xfrm>
-          <a:prstGeom prst="rect">
-            <a:avLst/>
-          </a:prstGeom>
-          <a:noFill/>
-        </p:spPr>
-        <p:txBody>
-          <a:bodyPr wrap="square">
-            <a:spAutoFit/>
-          </a:bodyPr>
-          <a:lstStyle/>
-          <a:p>
-            <a:pPr>
-              <a:spcAft>
-                <a:spcPts val="400"/>
-              </a:spcAft>
-            </a:pPr>
-            <a:r>
-              <a:rPr sz="1600"/>
+          <a:p>
+            <a:pPr>
+              <a:spcAft>
+                <a:spcPts val="900"/>
+              </a:spcAft>
+            </a:pPr>
+            <a:r>
+              <a:rPr sz="2000"/>
               <a:t>The drift column is the honest one. RTF can look fine on average while the sim has already lost a second of wall clock.</a:t>
             </a:r>
           </a:p>
@@ -6067,7 +6021,7 @@
       </p:sp>
       <p:sp>
         <p:nvSpPr>
-          <p:cNvPr id="5" name="Footer"/>
+          <p:cNvPr id="4" name="Footer"/>
           <p:cNvSpPr txBox="1"/>
           <p:nvPr/>
         </p:nvSpPr>
@@ -6096,7 +6050,7 @@
       </p:sp>
       <p:sp>
         <p:nvSpPr>
-          <p:cNvPr id="6" name="PageNo"/>
+          <p:cNvPr id="5" name="PageNo"/>
           <p:cNvSpPr txBox="1"/>
           <p:nvPr/>
         </p:nvSpPr>
@@ -6238,37 +6192,14 @@
               <a:t>What follows is the set of levers Chrono gives you for the second problem, in rough order of how much they usually buy.</a:t>
             </a:r>
           </a:p>
-        </p:txBody>
-      </p:sp>
-      <p:sp>
-        <p:nvSpPr>
-          <p:cNvPr id="4" name="NoteBox"/>
-          <p:cNvSpPr txBox="1"/>
-          <p:nvPr/>
-        </p:nvSpPr>
-        <p:spPr>
-          <a:xfrm>
-            <a:off x="402336" y="5532120"/>
-            <a:ext cx="11393424" cy="713232"/>
-          </a:xfrm>
-          <a:prstGeom prst="rect">
-            <a:avLst/>
-          </a:prstGeom>
-          <a:noFill/>
-        </p:spPr>
-        <p:txBody>
-          <a:bodyPr wrap="square">
-            <a:spAutoFit/>
-          </a:bodyPr>
-          <a:lstStyle/>
-          <a:p>
-            <a:pPr>
-              <a:spcAft>
-                <a:spcPts val="400"/>
-              </a:spcAft>
-            </a:pPr>
-            <a:r>
-              <a:rPr sz="1600"/>
+          <a:p>
+            <a:pPr>
+              <a:spcAft>
+                <a:spcPts val="900"/>
+              </a:spcAft>
+            </a:pPr>
+            <a:r>
+              <a:rPr sz="2000"/>
               <a:t>Reach for them in this order. People tend to start at the solver, which is near the bottom of the list and the easiest place to spend an afternoon for nothing.</a:t>
             </a:r>
           </a:p>
@@ -6276,7 +6207,7 @@
       </p:sp>
       <p:sp>
         <p:nvSpPr>
-          <p:cNvPr id="5" name="Footer"/>
+          <p:cNvPr id="4" name="Footer"/>
           <p:cNvSpPr txBox="1"/>
           <p:nvPr/>
         </p:nvSpPr>
@@ -6305,7 +6236,7 @@
       </p:sp>
       <p:sp>
         <p:nvSpPr>
-          <p:cNvPr id="6" name="PageNo"/>
+          <p:cNvPr id="5" name="PageNo"/>
           <p:cNvSpPr txBox="1"/>
           <p:nvPr/>
         </p:nvSpPr>
@@ -6559,37 +6490,14 @@
               <a:t>. Drawing is not free, and the eye does not need 500 Hz.</a:t>
             </a:r>
           </a:p>
-        </p:txBody>
-      </p:sp>
-      <p:sp>
-        <p:nvSpPr>
-          <p:cNvPr id="4" name="NoteBox"/>
-          <p:cNvSpPr txBox="1"/>
-          <p:nvPr/>
-        </p:nvSpPr>
-        <p:spPr>
-          <a:xfrm>
-            <a:off x="402336" y="5532120"/>
-            <a:ext cx="11393424" cy="713232"/>
-          </a:xfrm>
-          <a:prstGeom prst="rect">
-            <a:avLst/>
-          </a:prstGeom>
-          <a:noFill/>
-        </p:spPr>
-        <p:txBody>
-          <a:bodyPr wrap="square">
-            <a:spAutoFit/>
-          </a:bodyPr>
-          <a:lstStyle/>
-          <a:p>
-            <a:pPr>
-              <a:spcAft>
-                <a:spcPts val="400"/>
-              </a:spcAft>
-            </a:pPr>
-            <a:r>
-              <a:rPr sz="1600"/>
+          <a:p>
+            <a:pPr>
+              <a:spcAft>
+                <a:spcPts val="900"/>
+              </a:spcAft>
+            </a:pPr>
+            <a:r>
+              <a:rPr sz="1800"/>
               <a:t>None of this is specific to having a human in the loop. It becomes urgent when there is one, because a batch job that runs at 0.6x real time is merely slow, and an interactive one is broken.</a:t>
             </a:r>
           </a:p>
@@ -6597,7 +6505,7 @@
       </p:sp>
       <p:sp>
         <p:nvSpPr>
-          <p:cNvPr id="5" name="Footer"/>
+          <p:cNvPr id="4" name="Footer"/>
           <p:cNvSpPr txBox="1"/>
           <p:nvPr/>
         </p:nvSpPr>
@@ -6626,7 +6534,7 @@
       </p:sp>
       <p:sp>
         <p:nvSpPr>
-          <p:cNvPr id="6" name="PageNo"/>
+          <p:cNvPr id="5" name="PageNo"/>
           <p:cNvSpPr txBox="1"/>
           <p:nvPr/>
         </p:nvSpPr>
@@ -9256,37 +9164,14 @@
               <a:t>Four demos along the way, and the code is all in one repository you can clone.</a:t>
             </a:r>
           </a:p>
-        </p:txBody>
-      </p:sp>
-      <p:sp>
-        <p:nvSpPr>
-          <p:cNvPr id="4" name="NoteBox"/>
-          <p:cNvSpPr txBox="1"/>
-          <p:nvPr/>
-        </p:nvSpPr>
-        <p:spPr>
-          <a:xfrm>
-            <a:off x="402336" y="5532120"/>
-            <a:ext cx="11393424" cy="713232"/>
-          </a:xfrm>
-          <a:prstGeom prst="rect">
-            <a:avLst/>
-          </a:prstGeom>
-          <a:noFill/>
-        </p:spPr>
-        <p:txBody>
-          <a:bodyPr wrap="square">
-            <a:spAutoFit/>
-          </a:bodyPr>
-          <a:lstStyle/>
-          <a:p>
-            <a:pPr>
-              <a:spcAft>
-                <a:spcPts val="400"/>
-              </a:spcAft>
-            </a:pPr>
-            <a:r>
-              <a:rPr sz="1600"/>
+          <a:p>
+            <a:pPr>
+              <a:spcAft>
+                <a:spcPts val="900"/>
+              </a:spcAft>
+            </a:pPr>
+            <a:r>
+              <a:rPr sz="2000"/>
               <a:t>The order is deliberate. The clock comes before the input, because input into a simulation that cannot hold real time is not human-in-the-loop, whatever else it is.</a:t>
             </a:r>
           </a:p>
@@ -9294,7 +9179,7 @@
       </p:sp>
       <p:sp>
         <p:nvSpPr>
-          <p:cNvPr id="5" name="Footer"/>
+          <p:cNvPr id="4" name="Footer"/>
           <p:cNvSpPr txBox="1"/>
           <p:nvPr/>
         </p:nvSpPr>
@@ -9323,7 +9208,7 @@
       </p:sp>
       <p:sp>
         <p:nvSpPr>
-          <p:cNvPr id="6" name="PageNo"/>
+          <p:cNvPr id="5" name="PageNo"/>
           <p:cNvSpPr txBox="1"/>
           <p:nvPr/>
         </p:nvSpPr>
@@ -9413,179 +9298,156 @@
           <a:p>
             <a:pPr>
               <a:spcAft>
-                <a:spcPts val="900"/>
-              </a:spcAft>
-            </a:pPr>
-            <a:r>
-              <a:rPr sz="1600">
+                <a:spcPts val="500"/>
+              </a:spcAft>
+            </a:pPr>
+            <a:r>
+              <a:rPr sz="1400">
                 <a:latin typeface="Consolas"/>
               </a:rPr>
               <a:t>ChInteractiveDriver</a:t>
             </a:r>
             <a:r>
-              <a:rPr sz="1800"/>
+              <a:rPr sz="1600"/>
               <a:t> covers two CLASSES of device, not two devices:</a:t>
             </a:r>
           </a:p>
           <a:p>
             <a:pPr lvl="1">
               <a:spcAft>
-                <a:spcPts val="900"/>
-              </a:spcAft>
-            </a:pPr>
+                <a:spcPts val="500"/>
+              </a:spcAft>
+            </a:pPr>
+            <a:r>
+              <a:rPr sz="1200">
+                <a:latin typeface="Consolas"/>
+              </a:rPr>
+              <a:t>InputMode_KEYBOARD</a:t>
+            </a:r>
+            <a:r>
+              <a:rPr sz="1400"/>
+              <a:t>  -  with </a:t>
+            </a:r>
+            <a:r>
+              <a:rPr sz="1200">
+                <a:latin typeface="Consolas"/>
+              </a:rPr>
+              <a:t>KeyboardMode_HELD</a:t>
+            </a:r>
+            <a:r>
+              <a:rPr sz="1400"/>
+              <a:t> or </a:t>
+            </a:r>
+            <a:r>
+              <a:rPr sz="1200">
+                <a:latin typeface="Consolas"/>
+              </a:rPr>
+              <a:t>_CUMULATIVE</a:t>
+            </a:r>
+          </a:p>
+          <a:p>
+            <a:pPr lvl="1">
+              <a:spcAft>
+                <a:spcPts val="500"/>
+              </a:spcAft>
+            </a:pPr>
+            <a:r>
+              <a:rPr sz="1200">
+                <a:latin typeface="Consolas"/>
+              </a:rPr>
+              <a:t>InputMode_JOYSTICK</a:t>
+            </a:r>
+            <a:r>
+              <a:rPr sz="1400"/>
+              <a:t>  -  anything the windowing layer enumerates as one</a:t>
+            </a:r>
+          </a:p>
+          <a:p>
+            <a:pPr>
+              <a:spcAft>
+                <a:spcPts val="500"/>
+              </a:spcAft>
+            </a:pPr>
+            <a:r>
+              <a:rPr sz="1600"/>
+              <a:t>A joystick is mapped by a JSON file, not by code: </a:t>
+            </a:r>
             <a:r>
               <a:rPr sz="1400">
                 <a:latin typeface="Consolas"/>
               </a:rPr>
-              <a:t>InputMode_KEYBOARD</a:t>
-            </a:r>
+              <a:t>SetJoystickConfigFile(path)</a:t>
+            </a:r>
+          </a:p>
+          <a:p>
+            <a:pPr lvl="1">
+              <a:spcAft>
+                <a:spcPts val="500"/>
+              </a:spcAft>
+            </a:pPr>
+            <a:r>
+              <a:rPr sz="1400"/>
+              <a:t>mapped axes: steering, throttle, brake, CLUTCH</a:t>
+            </a:r>
+          </a:p>
+          <a:p>
+            <a:pPr lvl="1">
+              <a:spcAft>
+                <a:spcPts val="500"/>
+              </a:spcAft>
+            </a:pPr>
+            <a:r>
+              <a:rPr sz="1400"/>
+              <a:t>mapped buttons: shift up/down, reverse, gears 1-9, manual-gearbox toggle, plus one user callback</a:t>
+            </a:r>
+          </a:p>
+          <a:p>
+            <a:pPr>
+              <a:spcAft>
+                <a:spcPts val="500"/>
+              </a:spcAft>
+            </a:pPr>
             <a:r>
               <a:rPr sz="1600"/>
-              <a:t>  -  with </a:t>
+              <a:t>Four configs ship in </a:t>
             </a:r>
             <a:r>
               <a:rPr sz="1400">
                 <a:latin typeface="Consolas"/>
               </a:rPr>
-              <a:t>KeyboardMode_HELD</a:t>
+              <a:t>data/vehicle/joystick/</a:t>
             </a:r>
             <a:r>
               <a:rPr sz="1600"/>
-              <a:t> or </a:t>
-            </a:r>
-            <a:r>
-              <a:rPr sz="1400">
-                <a:latin typeface="Consolas"/>
-              </a:rPr>
-              <a:t>_CUMULATIVE</a:t>
-            </a:r>
-          </a:p>
-          <a:p>
-            <a:pPr lvl="1">
-              <a:spcAft>
-                <a:spcPts val="900"/>
-              </a:spcAft>
-            </a:pPr>
-            <a:r>
-              <a:rPr sz="1400">
-                <a:latin typeface="Consolas"/>
-              </a:rPr>
-              <a:t>InputMode_JOYSTICK</a:t>
-            </a:r>
+              <a:t>: Default, Logitech RumblePad 2, Xbox One, and Wheel+Pedals+Shifters</a:t>
+            </a:r>
+          </a:p>
+          <a:p>
+            <a:pPr>
+              <a:spcAft>
+                <a:spcPts val="500"/>
+              </a:spcAft>
+            </a:pPr>
             <a:r>
               <a:rPr sz="1600"/>
-              <a:t>  -  anything the windowing layer enumerates as one</a:t>
-            </a:r>
-          </a:p>
-          <a:p>
-            <a:pPr>
-              <a:spcAft>
-                <a:spcPts val="900"/>
-              </a:spcAft>
-            </a:pPr>
-            <a:r>
-              <a:rPr sz="1800"/>
-              <a:t>A joystick is mapped by a JSON file, not by code: </a:t>
-            </a:r>
-            <a:r>
-              <a:rPr sz="1600">
-                <a:latin typeface="Consolas"/>
-              </a:rPr>
-              <a:t>SetJoystickConfigFile(path)</a:t>
-            </a:r>
-          </a:p>
-          <a:p>
-            <a:pPr lvl="1">
-              <a:spcAft>
-                <a:spcPts val="900"/>
+              <a:t>Each control names its own DEVICE, so a wheel, a pedal box and an H-shifter enumerating as three separate USB devices all map at once</a:t>
+            </a:r>
+          </a:p>
+          <a:p>
+            <a:pPr>
+              <a:spcAft>
+                <a:spcPts val="500"/>
               </a:spcAft>
             </a:pPr>
             <a:r>
               <a:rPr sz="1600"/>
-              <a:t>mapped axes: steering, throttle, brake, CLUTCH</a:t>
-            </a:r>
-          </a:p>
-          <a:p>
-            <a:pPr lvl="1">
-              <a:spcAft>
-                <a:spcPts val="900"/>
-              </a:spcAft>
-            </a:pPr>
-            <a:r>
-              <a:rPr sz="1600"/>
-              <a:t>mapped buttons: shift up/down, reverse, gears 1-9, manual-gearbox toggle, plus one user callback</a:t>
-            </a:r>
-          </a:p>
-          <a:p>
-            <a:pPr>
-              <a:spcAft>
-                <a:spcPts val="900"/>
-              </a:spcAft>
-            </a:pPr>
-            <a:r>
-              <a:rPr sz="1800"/>
-              <a:t>Four configs ship in </a:t>
-            </a:r>
-            <a:r>
-              <a:rPr sz="1600">
-                <a:latin typeface="Consolas"/>
-              </a:rPr>
-              <a:t>data/vehicle/joystick/</a:t>
-            </a:r>
-            <a:r>
-              <a:rPr sz="1800"/>
-              <a:t>: Default, Logitech RumblePad 2, Xbox One, and Wheel+Pedals+Shifters</a:t>
-            </a:r>
-          </a:p>
-          <a:p>
-            <a:pPr>
-              <a:spcAft>
-                <a:spcPts val="900"/>
-              </a:spcAft>
-            </a:pPr>
-            <a:r>
-              <a:rPr sz="1800"/>
-              <a:t>Each control names its own DEVICE, so a wheel, a pedal box and an H-shifter enumerating as three separate USB devices all map at once</a:t>
-            </a:r>
-          </a:p>
-          <a:p>
-            <a:pPr>
-              <a:spcAft>
-                <a:spcPts val="900"/>
-              </a:spcAft>
-            </a:pPr>
-            <a:r>
-              <a:rPr sz="1800"/>
               <a:t>Not hypothetical: the remote-driving study on slide 5 ran on a Logitech G29 wheel and pedal set through this path</a:t>
             </a:r>
           </a:p>
-        </p:txBody>
-      </p:sp>
-      <p:sp>
-        <p:nvSpPr>
-          <p:cNvPr id="4" name="NoteBox"/>
-          <p:cNvSpPr txBox="1"/>
-          <p:nvPr/>
-        </p:nvSpPr>
-        <p:spPr>
-          <a:xfrm>
-            <a:off x="402336" y="5532120"/>
-            <a:ext cx="11393424" cy="1261872"/>
-          </a:xfrm>
-          <a:prstGeom prst="rect">
-            <a:avLst/>
-          </a:prstGeom>
-          <a:noFill/>
-        </p:spPr>
-        <p:txBody>
-          <a:bodyPr wrap="square">
-            <a:spAutoFit/>
-          </a:bodyPr>
-          <a:lstStyle/>
-          <a:p>
-            <a:pPr>
-              <a:spcAft>
-                <a:spcPts val="400"/>
+          <a:p>
+            <a:pPr>
+              <a:spcAft>
+                <a:spcPts val="500"/>
               </a:spcAft>
             </a:pPr>
             <a:r>
@@ -9596,7 +9458,7 @@
           <a:p>
             <a:pPr>
               <a:spcAft>
-                <a:spcPts val="400"/>
+                <a:spcPts val="500"/>
               </a:spcAft>
             </a:pPr>
             <a:r>
@@ -9608,7 +9470,7 @@
       </p:sp>
       <p:sp>
         <p:nvSpPr>
-          <p:cNvPr id="5" name="Footer"/>
+          <p:cNvPr id="4" name="Footer"/>
           <p:cNvSpPr txBox="1"/>
           <p:nvPr/>
         </p:nvSpPr>
@@ -9637,7 +9499,7 @@
       </p:sp>
       <p:sp>
         <p:nvSpPr>
-          <p:cNvPr id="6" name="PageNo"/>
+          <p:cNvPr id="5" name="PageNo"/>
           <p:cNvSpPr txBox="1"/>
           <p:nvPr/>
         </p:nvSpPr>
@@ -9819,37 +9681,14 @@
               <a:t>Obey those and the transport does not matter: a socket, a serial port, shared memory, a ROS topic, another simulator.</a:t>
             </a:r>
           </a:p>
-        </p:txBody>
-      </p:sp>
-      <p:sp>
-        <p:nvSpPr>
-          <p:cNvPr id="4" name="NoteBox"/>
-          <p:cNvSpPr txBox="1"/>
-          <p:nvPr/>
-        </p:nvSpPr>
-        <p:spPr>
-          <a:xfrm>
-            <a:off x="402336" y="5532120"/>
-            <a:ext cx="11393424" cy="713232"/>
-          </a:xfrm>
-          <a:prstGeom prst="rect">
-            <a:avLst/>
-          </a:prstGeom>
-          <a:noFill/>
-        </p:spPr>
-        <p:txBody>
-          <a:bodyPr wrap="square">
-            <a:spAutoFit/>
-          </a:bodyPr>
-          <a:lstStyle/>
-          <a:p>
-            <a:pPr>
-              <a:spcAft>
-                <a:spcPts val="400"/>
-              </a:spcAft>
-            </a:pPr>
-            <a:r>
-              <a:rPr sz="1600"/>
+          <a:p>
+            <a:pPr>
+              <a:spcAft>
+                <a:spcPts val="900"/>
+              </a:spcAft>
+            </a:pPr>
+            <a:r>
+              <a:rPr sz="2000"/>
               <a:t>This tutorial ships one of these, an operator console on UDP, so a second machine can drive the simulation and watch telemetry come back.</a:t>
             </a:r>
           </a:p>
@@ -9857,7 +9696,7 @@
       </p:sp>
       <p:sp>
         <p:nvSpPr>
-          <p:cNvPr id="5" name="Footer"/>
+          <p:cNvPr id="4" name="Footer"/>
           <p:cNvSpPr txBox="1"/>
           <p:nvPr/>
         </p:nvSpPr>
@@ -9886,7 +9725,7 @@
       </p:sp>
       <p:sp>
         <p:nvSpPr>
-          <p:cNvPr id="6" name="PageNo"/>
+          <p:cNvPr id="5" name="PageNo"/>
           <p:cNvSpPr txBox="1"/>
           <p:nvPr/>
         </p:nvSpPr>
@@ -10062,6 +9901,17 @@
               <a:t> and feel the difference a key-state API makes.</a:t>
             </a:r>
           </a:p>
+          <a:p>
+            <a:pPr>
+              <a:spcAft>
+                <a:spcPts val="900"/>
+              </a:spcAft>
+            </a:pPr>
+            <a:r>
+              <a:rPr sz="2000"/>
+              <a:t>This is the whole definition satisfied in one window: input reaches the state, the state comes back on screen, and the timer holds the pace.</a:t>
+            </a:r>
+          </a:p>
         </p:txBody>
       </p:sp>
       <p:pic>
@@ -10080,7 +9930,7 @@
         </p:blipFill>
         <p:spPr>
           <a:xfrm>
-            <a:off x="7269480" y="1707707"/>
+            <a:off x="7269480" y="2187767"/>
             <a:ext cx="4526280" cy="3460873"/>
           </a:xfrm>
           <a:prstGeom prst="rect">
@@ -10090,41 +9940,7 @@
       </p:pic>
       <p:sp>
         <p:nvSpPr>
-          <p:cNvPr id="5" name="NoteBox"/>
-          <p:cNvSpPr txBox="1"/>
-          <p:nvPr/>
-        </p:nvSpPr>
-        <p:spPr>
-          <a:xfrm>
-            <a:off x="402336" y="5532120"/>
-            <a:ext cx="11393424" cy="713232"/>
-          </a:xfrm>
-          <a:prstGeom prst="rect">
-            <a:avLst/>
-          </a:prstGeom>
-          <a:noFill/>
-        </p:spPr>
-        <p:txBody>
-          <a:bodyPr wrap="square">
-            <a:spAutoFit/>
-          </a:bodyPr>
-          <a:lstStyle/>
-          <a:p>
-            <a:pPr>
-              <a:spcAft>
-                <a:spcPts val="400"/>
-              </a:spcAft>
-            </a:pPr>
-            <a:r>
-              <a:rPr sz="1600"/>
-              <a:t>This is the whole definition satisfied in one window: input reaches the state, the state comes back on screen, and the timer holds the pace.</a:t>
-            </a:r>
-          </a:p>
-        </p:txBody>
-      </p:sp>
-      <p:sp>
-        <p:nvSpPr>
-          <p:cNvPr id="6" name="Footer"/>
+          <p:cNvPr id="5" name="Footer"/>
           <p:cNvSpPr txBox="1"/>
           <p:nvPr/>
         </p:nvSpPr>
@@ -10153,7 +9969,7 @@
       </p:sp>
       <p:sp>
         <p:nvSpPr>
-          <p:cNvPr id="7" name="PageNo"/>
+          <p:cNvPr id="6" name="PageNo"/>
           <p:cNvSpPr txBox="1"/>
           <p:nvPr/>
         </p:nvSpPr>
@@ -10471,37 +10287,14 @@
               <a:t>What is NOT there: any built-in mouse pick-and-drag. No module in the tree implements one.</a:t>
             </a:r>
           </a:p>
-        </p:txBody>
-      </p:sp>
-      <p:sp>
-        <p:nvSpPr>
-          <p:cNvPr id="4" name="NoteBox"/>
-          <p:cNvSpPr txBox="1"/>
-          <p:nvPr/>
-        </p:nvSpPr>
-        <p:spPr>
-          <a:xfrm>
-            <a:off x="402336" y="5532120"/>
-            <a:ext cx="11393424" cy="713232"/>
-          </a:xfrm>
-          <a:prstGeom prst="rect">
-            <a:avLst/>
-          </a:prstGeom>
-          <a:noFill/>
-        </p:spPr>
-        <p:txBody>
-          <a:bodyPr wrap="square">
-            <a:spAutoFit/>
-          </a:bodyPr>
-          <a:lstStyle/>
-          <a:p>
-            <a:pPr>
-              <a:spcAft>
-                <a:spcPts val="400"/>
-              </a:spcAft>
-            </a:pPr>
-            <a:r>
-              <a:rPr sz="1600"/>
+          <a:p>
+            <a:pPr>
+              <a:spcAft>
+                <a:spcPts val="900"/>
+              </a:spcAft>
+            </a:pPr>
+            <a:r>
+              <a:rPr sz="2000"/>
               <a:t>That last line is the gap this tutorial walks into. Everything needed to build one is already exposed; what is missing is the ability to receive the mouse event in the first place.</a:t>
             </a:r>
           </a:p>
@@ -10509,7 +10302,7 @@
       </p:sp>
       <p:sp>
         <p:nvSpPr>
-          <p:cNvPr id="5" name="Footer"/>
+          <p:cNvPr id="4" name="Footer"/>
           <p:cNvSpPr txBox="1"/>
           <p:nvPr/>
         </p:nvSpPr>
@@ -10538,7 +10331,7 @@
       </p:sp>
       <p:sp>
         <p:nvSpPr>
-          <p:cNvPr id="6" name="PageNo"/>
+          <p:cNvPr id="5" name="PageNo"/>
           <p:cNvSpPr txBox="1"/>
           <p:nvPr/>
         </p:nvSpPr>
@@ -13724,6 +13517,17 @@
               <a:t> after</a:t>
             </a:r>
           </a:p>
+          <a:p>
+            <a:pPr>
+              <a:spcAft>
+                <a:spcPts val="900"/>
+              </a:spcAft>
+            </a:pPr>
+            <a:r>
+              <a:rPr sz="2000"/>
+              <a:t>This is the clearest case of the definition on the whole deck: you pull, the controller resists, you feel it resist, and you pull differently.</a:t>
+            </a:r>
+          </a:p>
         </p:txBody>
       </p:sp>
       <p:pic>
@@ -13742,8 +13546,8 @@
         </p:blipFill>
         <p:spPr>
           <a:xfrm>
-            <a:off x="4305558" y="4140708"/>
-            <a:ext cx="1844484" cy="1427987"/>
+            <a:off x="4492416" y="5134355"/>
+            <a:ext cx="1635823" cy="1266444"/>
           </a:xfrm>
           <a:prstGeom prst="rect">
             <a:avLst/>
@@ -13766,8 +13570,8 @@
         </p:blipFill>
         <p:spPr>
           <a:xfrm>
-            <a:off x="6424362" y="4140708"/>
-            <a:ext cx="1459031" cy="1427987"/>
+            <a:off x="6402560" y="5134355"/>
+            <a:ext cx="1293975" cy="1266444"/>
           </a:xfrm>
           <a:prstGeom prst="rect">
             <a:avLst/>
@@ -13776,41 +13580,7 @@
       </p:pic>
       <p:sp>
         <p:nvSpPr>
-          <p:cNvPr id="6" name="NoteBox"/>
-          <p:cNvSpPr txBox="1"/>
-          <p:nvPr/>
-        </p:nvSpPr>
-        <p:spPr>
-          <a:xfrm>
-            <a:off x="402336" y="5532120"/>
-            <a:ext cx="11393424" cy="713232"/>
-          </a:xfrm>
-          <a:prstGeom prst="rect">
-            <a:avLst/>
-          </a:prstGeom>
-          <a:noFill/>
-        </p:spPr>
-        <p:txBody>
-          <a:bodyPr wrap="square">
-            <a:spAutoFit/>
-          </a:bodyPr>
-          <a:lstStyle/>
-          <a:p>
-            <a:pPr>
-              <a:spcAft>
-                <a:spcPts val="400"/>
-              </a:spcAft>
-            </a:pPr>
-            <a:r>
-              <a:rPr sz="1600"/>
-              <a:t>This is the clearest case of the definition on the whole deck: you pull, the controller resists, you feel it resist, and you pull differently.</a:t>
-            </a:r>
-          </a:p>
-        </p:txBody>
-      </p:sp>
-      <p:sp>
-        <p:nvSpPr>
-          <p:cNvPr id="7" name="Footer"/>
+          <p:cNvPr id="6" name="Footer"/>
           <p:cNvSpPr txBox="1"/>
           <p:nvPr/>
         </p:nvSpPr>
@@ -13839,7 +13609,7 @@
       </p:sp>
       <p:sp>
         <p:nvSpPr>
-          <p:cNvPr id="8" name="PageNo"/>
+          <p:cNvPr id="7" name="PageNo"/>
           <p:cNvSpPr txBox="1"/>
           <p:nvPr/>
         </p:nvSpPr>
@@ -14946,8 +14716,8 @@
         </p:blipFill>
         <p:spPr>
           <a:xfrm>
-            <a:off x="1894430" y="4026408"/>
-            <a:ext cx="2017070" cy="1542287"/>
+            <a:off x="425195" y="3953256"/>
+            <a:ext cx="2799306" cy="2140399"/>
           </a:xfrm>
           <a:prstGeom prst="rect">
             <a:avLst/>
@@ -14970,8 +14740,8 @@
         </p:blipFill>
         <p:spPr>
           <a:xfrm>
-            <a:off x="4185821" y="4026408"/>
-            <a:ext cx="1992122" cy="1542287"/>
+            <a:off x="3498822" y="3953256"/>
+            <a:ext cx="2764682" cy="2140399"/>
           </a:xfrm>
           <a:prstGeom prst="rect">
             <a:avLst/>
@@ -14994,8 +14764,8 @@
         </p:blipFill>
         <p:spPr>
           <a:xfrm>
-            <a:off x="6452263" y="4026408"/>
-            <a:ext cx="1575816" cy="1542287"/>
+            <a:off x="6537824" y="3953256"/>
+            <a:ext cx="2186929" cy="2140399"/>
           </a:xfrm>
           <a:prstGeom prst="rect">
             <a:avLst/>
@@ -15018,8 +14788,8 @@
         </p:blipFill>
         <p:spPr>
           <a:xfrm>
-            <a:off x="8302399" y="4026408"/>
-            <a:ext cx="1992122" cy="1542287"/>
+            <a:off x="8999073" y="3953256"/>
+            <a:ext cx="2764682" cy="2140399"/>
           </a:xfrm>
           <a:prstGeom prst="rect">
             <a:avLst/>
@@ -15028,41 +14798,7 @@
       </p:pic>
       <p:sp>
         <p:nvSpPr>
-          <p:cNvPr id="8" name="NoteBox"/>
-          <p:cNvSpPr txBox="1"/>
-          <p:nvPr/>
-        </p:nvSpPr>
-        <p:spPr>
-          <a:xfrm>
-            <a:off x="402336" y="5532120"/>
-            <a:ext cx="11393424" cy="713232"/>
-          </a:xfrm>
-          <a:prstGeom prst="rect">
-            <a:avLst/>
-          </a:prstGeom>
-          <a:noFill/>
-        </p:spPr>
-        <p:txBody>
-          <a:bodyPr wrap="square">
-            <a:spAutoFit/>
-          </a:bodyPr>
-          <a:lstStyle/>
-          <a:p>
-            <a:pPr>
-              <a:spcAft>
-                <a:spcPts val="400"/>
-              </a:spcAft>
-            </a:pPr>
-            <a:r>
-              <a:rPr sz="1600"/>
-              <a:t>Two of them are a person inside the loop, one is a person setting up an experiment and watching, and the first one has no human in it at all. That distinction is the next slide.</a:t>
-            </a:r>
-          </a:p>
-        </p:txBody>
-      </p:sp>
-      <p:sp>
-        <p:nvSpPr>
-          <p:cNvPr id="9" name="Footer"/>
+          <p:cNvPr id="8" name="Footer"/>
           <p:cNvSpPr txBox="1"/>
           <p:nvPr/>
         </p:nvSpPr>
@@ -15091,7 +14827,7 @@
       </p:sp>
       <p:sp>
         <p:nvSpPr>
-          <p:cNvPr id="10" name="PageNo"/>
+          <p:cNvPr id="9" name="PageNo"/>
           <p:cNvSpPr txBox="1"/>
           <p:nvPr/>
         </p:nvSpPr>
@@ -15285,6 +15021,17 @@
               <a:t>Same impulse, applied 5 cm higher up the torso: the verdict flips</a:t>
             </a:r>
           </a:p>
+          <a:p>
+            <a:pPr>
+              <a:spcAft>
+                <a:spcPts val="900"/>
+              </a:spcAft>
+            </a:pPr>
+            <a:r>
+              <a:rPr sz="2000"/>
+              <a:t>That last line is the reason a human is still in this one. Where to push is a judgement call, and it changes the answer as much as how hard you push does.</a:t>
+            </a:r>
+          </a:p>
         </p:txBody>
       </p:sp>
       <p:pic>
@@ -15303,7 +15050,7 @@
         </p:blipFill>
         <p:spPr>
           <a:xfrm>
-            <a:off x="7269480" y="1686035"/>
+            <a:off x="7269480" y="2166095"/>
             <a:ext cx="4526280" cy="3504216"/>
           </a:xfrm>
           <a:prstGeom prst="rect">
@@ -15313,41 +15060,7 @@
       </p:pic>
       <p:sp>
         <p:nvSpPr>
-          <p:cNvPr id="5" name="NoteBox"/>
-          <p:cNvSpPr txBox="1"/>
-          <p:nvPr/>
-        </p:nvSpPr>
-        <p:spPr>
-          <a:xfrm>
-            <a:off x="402336" y="5532120"/>
-            <a:ext cx="11393424" cy="713232"/>
-          </a:xfrm>
-          <a:prstGeom prst="rect">
-            <a:avLst/>
-          </a:prstGeom>
-          <a:noFill/>
-        </p:spPr>
-        <p:txBody>
-          <a:bodyPr wrap="square">
-            <a:spAutoFit/>
-          </a:bodyPr>
-          <a:lstStyle/>
-          <a:p>
-            <a:pPr>
-              <a:spcAft>
-                <a:spcPts val="400"/>
-              </a:spcAft>
-            </a:pPr>
-            <a:r>
-              <a:rPr sz="1600"/>
-              <a:t>That last line is the reason a human is still in this one. Where to push is a judgement call, and it changes the answer as much as how hard you push does.</a:t>
-            </a:r>
-          </a:p>
-        </p:txBody>
-      </p:sp>
-      <p:sp>
-        <p:nvSpPr>
-          <p:cNvPr id="6" name="Footer"/>
+          <p:cNvPr id="5" name="Footer"/>
           <p:cNvSpPr txBox="1"/>
           <p:nvPr/>
         </p:nvSpPr>
@@ -15376,7 +15089,7 @@
       </p:sp>
       <p:sp>
         <p:nvSpPr>
-          <p:cNvPr id="7" name="PageNo"/>
+          <p:cNvPr id="6" name="PageNo"/>
           <p:cNvSpPr txBox="1"/>
           <p:nvPr/>
         </p:nvSpPr>
@@ -15593,37 +15306,14 @@
               <a:t>copy the nearest config, change the axis and button numbers</a:t>
             </a:r>
           </a:p>
-        </p:txBody>
-      </p:sp>
-      <p:sp>
-        <p:nvSpPr>
-          <p:cNvPr id="4" name="NoteBox"/>
-          <p:cNvSpPr txBox="1"/>
-          <p:nvPr/>
-        </p:nvSpPr>
-        <p:spPr>
-          <a:xfrm>
-            <a:off x="402336" y="5532120"/>
-            <a:ext cx="11393424" cy="713232"/>
-          </a:xfrm>
-          <a:prstGeom prst="rect">
-            <a:avLst/>
-          </a:prstGeom>
-          <a:noFill/>
-        </p:spPr>
-        <p:txBody>
-          <a:bodyPr wrap="square">
-            <a:spAutoFit/>
-          </a:bodyPr>
-          <a:lstStyle/>
-          <a:p>
-            <a:pPr>
-              <a:spcAft>
-                <a:spcPts val="400"/>
-              </a:spcAft>
-            </a:pPr>
-            <a:r>
-              <a:rPr sz="1600"/>
+          <a:p>
+            <a:pPr>
+              <a:spcAft>
+                <a:spcPts val="900"/>
+              </a:spcAft>
+            </a:pPr>
+            <a:r>
+              <a:rPr sz="2000"/>
               <a:t>The gap this talk found is small and specific, which is the good kind: one line to let Python receive the event, and a utility on top of primitives Chrono already exposes. Upstream PR to follow.</a:t>
             </a:r>
           </a:p>
@@ -15631,7 +15321,7 @@
       </p:sp>
       <p:sp>
         <p:nvSpPr>
-          <p:cNvPr id="5" name="Footer"/>
+          <p:cNvPr id="4" name="Footer"/>
           <p:cNvSpPr txBox="1"/>
           <p:nvPr/>
         </p:nvSpPr>
@@ -15660,7 +15350,7 @@
       </p:sp>
       <p:sp>
         <p:nvSpPr>
-          <p:cNvPr id="6" name="PageNo"/>
+          <p:cNvPr id="5" name="PageNo"/>
           <p:cNvSpPr txBox="1"/>
           <p:nvPr/>
         </p:nvSpPr>
@@ -16070,37 +15760,14 @@
               <a:t>drop 3 and you have a batch job with a joystick attached</a:t>
             </a:r>
           </a:p>
-        </p:txBody>
-      </p:sp>
-      <p:sp>
-        <p:nvSpPr>
-          <p:cNvPr id="4" name="NoteBox"/>
-          <p:cNvSpPr txBox="1"/>
-          <p:nvPr/>
-        </p:nvSpPr>
-        <p:spPr>
-          <a:xfrm>
-            <a:off x="402336" y="5532120"/>
-            <a:ext cx="11393424" cy="713232"/>
-          </a:xfrm>
-          <a:prstGeom prst="rect">
-            <a:avLst/>
-          </a:prstGeom>
-          <a:noFill/>
-        </p:spPr>
-        <p:txBody>
-          <a:bodyPr wrap="square">
-            <a:spAutoFit/>
-          </a:bodyPr>
-          <a:lstStyle/>
-          <a:p>
-            <a:pPr>
-              <a:spcAft>
-                <a:spcPts val="400"/>
-              </a:spcAft>
-            </a:pPr>
-            <a:r>
-              <a:rPr sz="1600"/>
+          <a:p>
+            <a:pPr>
+              <a:spcAft>
+                <a:spcPts val="900"/>
+              </a:spcAft>
+            </a:pPr>
+            <a:r>
+              <a:rPr sz="2000"/>
               <a:t>Nothing in that definition mentions vehicles. That is the whole point of the tutorial: a car, a crane, a gearbox and a quadruped's leg all satisfy it, and they satisfy it the same way.</a:t>
             </a:r>
           </a:p>
@@ -16108,7 +15775,7 @@
       </p:sp>
       <p:sp>
         <p:nvSpPr>
-          <p:cNvPr id="5" name="Footer"/>
+          <p:cNvPr id="4" name="Footer"/>
           <p:cNvSpPr txBox="1"/>
           <p:nvPr/>
         </p:nvSpPr>
@@ -16137,7 +15804,7 @@
       </p:sp>
       <p:sp>
         <p:nvSpPr>
-          <p:cNvPr id="6" name="PageNo"/>
+          <p:cNvPr id="5" name="PageNo"/>
           <p:cNvSpPr txBox="1"/>
           <p:nvPr/>
         </p:nvSpPr>
@@ -16231,13 +15898,13 @@
               </a:spcAft>
             </a:pPr>
             <a:r>
-              <a:rPr sz="1300">
+              <a:rPr sz="1500">
                 <a:latin typeface="Consolas"/>
               </a:rPr>
               <a:t>Measuring the person.</a:t>
             </a:r>
             <a:r>
-              <a:rPr sz="1500"/>
+              <a:rPr sz="1700"/>
               <a:t> Human factors: what does an operator do when the controls are delayed, when an assist takes authority, when a hazard appears late?</a:t>
             </a:r>
           </a:p>
@@ -16248,13 +15915,13 @@
               </a:spcAft>
             </a:pPr>
             <a:r>
-              <a:rPr sz="1300">
+              <a:rPr sz="1500">
                 <a:latin typeface="Consolas"/>
               </a:rPr>
               <a:t>Training the person.</a:t>
             </a:r>
             <a:r>
-              <a:rPr sz="1500"/>
+              <a:rPr sz="1700"/>
               <a:t> Here the simulator IS the product, and the fidelity bar is whether it feels like the real thing.</a:t>
             </a:r>
           </a:p>
@@ -16265,13 +15932,13 @@
               </a:spcAft>
             </a:pPr>
             <a:r>
-              <a:rPr sz="1300">
+              <a:rPr sz="1500">
                 <a:latin typeface="Consolas"/>
               </a:rPr>
               <a:t>Collecting data from the person.</a:t>
             </a:r>
             <a:r>
-              <a:rPr sz="1500"/>
+              <a:rPr sz="1700"/>
               <a:t> Demonstrations for imitation learning, driver models, reference trajectories no controller would have produced.</a:t>
             </a:r>
           </a:p>
@@ -16282,13 +15949,13 @@
               </a:spcAft>
             </a:pPr>
             <a:r>
-              <a:rPr sz="1300">
+              <a:rPr sz="1500">
                 <a:latin typeface="Consolas"/>
               </a:rPr>
               <a:t>Testing the machine against a person.</a:t>
             </a:r>
             <a:r>
-              <a:rPr sz="1500"/>
+              <a:rPr sz="1700"/>
               <a:t> Someone perturbs a controller in ways a scripted test would never have thought to try.</a:t>
             </a:r>
           </a:p>
@@ -16299,13 +15966,13 @@
               </a:spcAft>
             </a:pPr>
             <a:r>
-              <a:rPr sz="1300">
+              <a:rPr sz="1500">
                 <a:latin typeface="Consolas"/>
               </a:rPr>
               <a:t>Judging the machine by feel.</a:t>
             </a:r>
             <a:r>
-              <a:rPr sz="1500"/>
+              <a:rPr sz="1700"/>
               <a:t> Reach in, pull on it, see whether it behaves plausibly. Faster than any metric at answering 'something is wrong here'.</a:t>
             </a:r>
           </a:p>
@@ -16316,13 +15983,13 @@
               </a:spcAft>
             </a:pPr>
             <a:r>
-              <a:rPr sz="1300">
+              <a:rPr sz="1500">
                 <a:latin typeface="Consolas"/>
               </a:rPr>
               <a:t>Designing shared control.</a:t>
             </a:r>
             <a:r>
-              <a:rPr sz="1500"/>
+              <a:rPr sz="1700"/>
               <a:t> When authority is split between a person and a controller, neither half can be evaluated alone.</a:t>
             </a:r>
           </a:p>
@@ -16333,47 +16000,7 @@
               </a:spcAft>
             </a:pPr>
             <a:r>
-              <a:rPr sz="1300">
-                <a:latin typeface="Consolas"/>
-              </a:rPr>
-              <a:t>Setting a scene up.</a:t>
-            </a:r>
-            <a:r>
-              <a:rPr sz="1500"/>
-              <a:t> Placing things by hand where a script would take twenty guesses. Useful, and not in the loop.</a:t>
-            </a:r>
-          </a:p>
-        </p:txBody>
-      </p:sp>
-      <p:sp>
-        <p:nvSpPr>
-          <p:cNvPr id="4" name="NoteBox"/>
-          <p:cNvSpPr txBox="1"/>
-          <p:nvPr/>
-        </p:nvSpPr>
-        <p:spPr>
-          <a:xfrm>
-            <a:off x="402336" y="5532120"/>
-            <a:ext cx="11393424" cy="987551"/>
-          </a:xfrm>
-          <a:prstGeom prst="rect">
-            <a:avLst/>
-          </a:prstGeom>
-          <a:noFill/>
-        </p:spPr>
-        <p:txBody>
-          <a:bodyPr wrap="square">
-            <a:spAutoFit/>
-          </a:bodyPr>
-          <a:lstStyle/>
-          <a:p>
-            <a:pPr>
-              <a:spcAft>
-                <a:spcPts val="400"/>
-              </a:spcAft>
-            </a:pPr>
-            <a:r>
-              <a:rPr sz="1600"/>
+              <a:rPr sz="1700"/>
               <a:t>Two different jobs hide in that list. Sometimes the person is the SUBJECT being measured; sometimes the person is the CONTROLLER, because nothing else can do the task. Either way the simulator has to hold wall-clock time, or you are measuring the simulator instead of the person.</a:t>
             </a:r>
           </a:p>
@@ -16381,7 +16008,7 @@
       </p:sp>
       <p:sp>
         <p:nvSpPr>
-          <p:cNvPr id="5" name="Footer"/>
+          <p:cNvPr id="4" name="Footer"/>
           <p:cNvSpPr txBox="1"/>
           <p:nvPr/>
         </p:nvSpPr>
@@ -16410,7 +16037,7 @@
       </p:sp>
       <p:sp>
         <p:nvSpPr>
-          <p:cNvPr id="6" name="PageNo"/>
+          <p:cNvPr id="5" name="PageNo"/>
           <p:cNvSpPr txBox="1"/>
           <p:nvPr/>
         </p:nvSpPr>
@@ -16584,8 +16211,8 @@
         </p:blipFill>
         <p:spPr>
           <a:xfrm>
-            <a:off x="1856506" y="3912108"/>
-            <a:ext cx="2946500" cy="1656587"/>
+            <a:off x="3111522" y="4473956"/>
+            <a:ext cx="2044750" cy="1149604"/>
           </a:xfrm>
           <a:prstGeom prst="rect">
             <a:avLst/>
@@ -16608,8 +16235,8 @@
         </p:blipFill>
         <p:spPr>
           <a:xfrm>
-            <a:off x="5077326" y="3912108"/>
-            <a:ext cx="5255118" cy="1656587"/>
+            <a:off x="5430592" y="4473956"/>
+            <a:ext cx="3646836" cy="1149604"/>
           </a:xfrm>
           <a:prstGeom prst="rect">
             <a:avLst/>
@@ -16624,7 +16251,7 @@
         </p:nvSpPr>
         <p:spPr>
           <a:xfrm>
-            <a:off x="402336" y="5532120"/>
+            <a:off x="402336" y="5760720"/>
             <a:ext cx="11393424" cy="713232"/>
           </a:xfrm>
           <a:prstGeom prst="rect">
@@ -16644,7 +16271,7 @@
               </a:spcAft>
             </a:pPr>
             <a:r>
-              <a:rPr sz="1600"/>
+              <a:rPr sz="1300"/>
               <a:t>Ma, McDonald, Sha, Zhang, Xu, Negrut. "Evaluating a delay-compensated shared-control system in high- and low-speed remote car-following."</a:t>
             </a:r>
           </a:p>
@@ -17431,37 +17058,14 @@
               <a:t>the top-down placement tool: kinematic, no dynamics, a scene-authoring tool</a:t>
             </a:r>
           </a:p>
-        </p:txBody>
-      </p:sp>
-      <p:sp>
-        <p:nvSpPr>
-          <p:cNvPr id="4" name="NoteBox"/>
-          <p:cNvSpPr txBox="1"/>
-          <p:nvPr/>
-        </p:nvSpPr>
-        <p:spPr>
-          <a:xfrm>
-            <a:off x="402336" y="5532120"/>
-            <a:ext cx="11393424" cy="713232"/>
-          </a:xfrm>
-          <a:prstGeom prst="rect">
-            <a:avLst/>
-          </a:prstGeom>
-          <a:noFill/>
-        </p:spPr>
-        <p:txBody>
-          <a:bodyPr wrap="square">
-            <a:spAutoFit/>
-          </a:bodyPr>
-          <a:lstStyle/>
-          <a:p>
-            <a:pPr>
-              <a:spcAft>
-                <a:spcPts val="400"/>
-              </a:spcAft>
-            </a:pPr>
-            <a:r>
-              <a:rPr sz="1600"/>
+          <a:p>
+            <a:pPr>
+              <a:spcAft>
+                <a:spcPts val="900"/>
+              </a:spcAft>
+            </a:pPr>
+            <a:r>
+              <a:rPr sz="2000"/>
               <a:t>Worth saying out loud, because 'interactive' and 'in the loop' get used interchangeably and only one of them has a clock in it. All three are useful. Only the first two are what the phrase means.</a:t>
             </a:r>
           </a:p>
@@ -17469,7 +17073,7 @@
       </p:sp>
       <p:sp>
         <p:nvSpPr>
-          <p:cNvPr id="5" name="Footer"/>
+          <p:cNvPr id="4" name="Footer"/>
           <p:cNvSpPr txBox="1"/>
           <p:nvPr/>
         </p:nvSpPr>
@@ -17498,7 +17102,7 @@
       </p:sp>
       <p:sp>
         <p:nvSpPr>
-          <p:cNvPr id="6" name="PageNo"/>
+          <p:cNvPr id="5" name="PageNo"/>
           <p:cNvSpPr txBox="1"/>
           <p:nvPr/>
         </p:nvSpPr>

--- a/tutorial_HIL_driver.pptx
+++ b/tutorial_HIL_driver.pptx
@@ -5041,17 +5041,6 @@
               <a:t>do not run SLOW  -  make the step cheap enough to have slack (the real work)</a:t>
             </a:r>
           </a:p>
-          <a:p>
-            <a:pPr>
-              <a:spcAft>
-                <a:spcPts val="900"/>
-              </a:spcAft>
-            </a:pPr>
-            <a:r>
-              <a:rPr sz="2000"/>
-              <a:t>Unpaced, a box being dragged by hand travelled 88.7 m in one wall-clock second instead of 1.8 m. The physics was right both times. Only one of them was usable by a person.</a:t>
-            </a:r>
-          </a:p>
         </p:txBody>
       </p:sp>
       <p:sp>
@@ -13494,27 +13483,7 @@
             </a:pPr>
             <a:r>
               <a:rPr sz="2000"/>
-              <a:t>Yanking a link into the floor: </a:t>
-            </a:r>
-            <a:r>
-              <a:rPr sz="1800">
-                <a:latin typeface="Consolas"/>
-              </a:rPr>
-              <a:t>35.14 m/s</a:t>
-            </a:r>
-            <a:r>
-              <a:rPr sz="2000"/>
-              <a:t> before the gains were bounded, </a:t>
-            </a:r>
-            <a:r>
-              <a:rPr sz="1800">
-                <a:latin typeface="Consolas"/>
-              </a:rPr>
-              <a:t>3.25 m/s</a:t>
-            </a:r>
-            <a:r>
-              <a:rPr sz="2000"/>
-              <a:t> after</a:t>
+              <a:t>The same drag works on a 0.15 kg shin and a 2.7 kg arm link, because the spring is built from the mass it is pulling</a:t>
             </a:r>
           </a:p>
           <a:p>
@@ -14917,118 +14886,146 @@
           <a:p>
             <a:pPr>
               <a:spcAft>
-                <a:spcPts val="900"/>
-              </a:spcAft>
-            </a:pPr>
-            <a:r>
-              <a:rPr sz="1800">
+                <a:spcPts val="500"/>
+              </a:spcAft>
+            </a:pPr>
+            <a:r>
+              <a:rPr sz="1100">
                 <a:latin typeface="Consolas"/>
               </a:rPr>
               <a:t>WHAT</a:t>
             </a:r>
             <a:r>
-              <a:rPr sz="2000"/>
-              <a:t>  click where the push lands, set direction and magnitude, fire a measured impulse, watch the controller recover or fail</a:t>
-            </a:r>
-          </a:p>
-          <a:p>
-            <a:pPr>
-              <a:spcAft>
-                <a:spcPts val="900"/>
-              </a:spcAft>
-            </a:pPr>
-            <a:r>
-              <a:rPr sz="1800">
+              <a:rPr sz="1300"/>
+              <a:t>  click where the push lands, set direction and magnitude, fire a measured impulse, and see whether the controller holds</a:t>
+            </a:r>
+          </a:p>
+          <a:p>
+            <a:pPr>
+              <a:spcAft>
+                <a:spcPts val="500"/>
+              </a:spcAft>
+            </a:pPr>
+            <a:r>
+              <a:rPr sz="1100">
                 <a:latin typeface="Consolas"/>
               </a:rPr>
               <a:t>WHY</a:t>
             </a:r>
             <a:r>
-              <a:rPr sz="2000"/>
+              <a:rPr sz="1300"/>
               <a:t>   robustness testing that produces a NUMBER, so the result can go in a report and somebody else can reproduce it</a:t>
             </a:r>
           </a:p>
           <a:p>
             <a:pPr>
               <a:spcAft>
-                <a:spcPts val="900"/>
-              </a:spcAft>
-            </a:pPr>
-            <a:r>
-              <a:rPr sz="2000"/>
+                <a:spcPts val="500"/>
+              </a:spcAft>
+            </a:pPr>
+            <a:r>
+              <a:rPr sz="1300"/>
               <a:t>Forward at the base COM: </a:t>
             </a:r>
             <a:r>
-              <a:rPr sz="1800">
+              <a:rPr sz="1100">
                 <a:latin typeface="Consolas"/>
               </a:rPr>
               <a:t>325 N</a:t>
             </a:r>
             <a:r>
-              <a:rPr sz="2000"/>
+              <a:rPr sz="1300"/>
               <a:t> recovers, </a:t>
             </a:r>
             <a:r>
-              <a:rPr sz="1800">
+              <a:rPr sz="1100">
                 <a:latin typeface="Consolas"/>
               </a:rPr>
               <a:t>330 N</a:t>
             </a:r>
             <a:r>
-              <a:rPr sz="2000"/>
+              <a:rPr sz="1300"/>
               <a:t> does not</a:t>
             </a:r>
           </a:p>
           <a:p>
             <a:pPr>
               <a:spcAft>
-                <a:spcPts val="900"/>
-              </a:spcAft>
-            </a:pPr>
-            <a:r>
-              <a:rPr sz="2000"/>
+                <a:spcPts val="500"/>
+              </a:spcAft>
+            </a:pPr>
+            <a:r>
+              <a:rPr sz="1300"/>
               <a:t>Sideways: </a:t>
             </a:r>
             <a:r>
-              <a:rPr sz="1800">
+              <a:rPr sz="1100">
                 <a:latin typeface="Consolas"/>
               </a:rPr>
               <a:t>280 N</a:t>
             </a:r>
             <a:r>
-              <a:rPr sz="2000"/>
+              <a:rPr sz="1300"/>
               <a:t> recovers, </a:t>
             </a:r>
             <a:r>
-              <a:rPr sz="1800">
+              <a:rPr sz="1100">
                 <a:latin typeface="Consolas"/>
               </a:rPr>
               <a:t>290 N</a:t>
             </a:r>
             <a:r>
-              <a:rPr sz="2000"/>
+              <a:rPr sz="1300"/>
               <a:t> does not</a:t>
             </a:r>
           </a:p>
           <a:p>
             <a:pPr>
               <a:spcAft>
-                <a:spcPts val="900"/>
-              </a:spcAft>
-            </a:pPr>
-            <a:r>
-              <a:rPr sz="2000"/>
+                <a:spcPts val="500"/>
+              </a:spcAft>
+            </a:pPr>
+            <a:r>
+              <a:rPr sz="1300"/>
               <a:t>Same impulse, applied 5 cm higher up the torso: the verdict flips</a:t>
             </a:r>
           </a:p>
           <a:p>
             <a:pPr>
               <a:spcAft>
-                <a:spcPts val="900"/>
-              </a:spcAft>
-            </a:pPr>
-            <a:r>
-              <a:rPr sz="2000"/>
+                <a:spcPts val="500"/>
+              </a:spcAft>
+            </a:pPr>
+            <a:r>
+              <a:rPr sz="1100">
+                <a:latin typeface="Consolas"/>
+              </a:rPr>
+              <a:t>What is holding it up matters.</a:t>
+            </a:r>
+            <a:r>
+              <a:rPr sz="1300"/>
+              <a:t> Here it is a PD law holding a fixed stance, not a learned policy. It stiffens and resists, and it cannot take a step, so past the tipping point it simply topples.</a:t>
+            </a:r>
+          </a:p>
+          <a:p>
+            <a:pPr>
+              <a:spcAft>
+                <a:spcPts val="500"/>
+              </a:spcAft>
+            </a:pPr>
+            <a:r>
+              <a:rPr sz="1300"/>
+              <a:t>That is a property of the CONTROLLER, not of the rig. Put a locomotion policy behind the same joints and the rig measures that instead, including whether it steps to catch itself.</a:t>
+            </a:r>
+          </a:p>
+          <a:p>
+            <a:pPr>
+              <a:spcAft>
+                <a:spcPts val="500"/>
+              </a:spcAft>
+            </a:pPr>
+            <a:r>
+              <a:rPr sz="1300"/>
               <a:t>That last line is the reason a human is still in this one. Where to push is a judgement call, and it changes the answer as much as how hard you push does.</a:t>
             </a:r>
           </a:p>

--- a/tutorial_HIL_driver.pptx
+++ b/tutorial_HIL_driver.pptx
@@ -13433,7 +13433,7 @@
             </a:r>
             <a:r>
               <a:rPr sz="2000"/>
-              <a:t>  click a link and drag it while its controller tries to hold position</a:t>
+              <a:t>  click a link and drag it while its controller fights to stay standing</a:t>
             </a:r>
           </a:p>
           <a:p>
@@ -13461,7 +13461,7 @@
             </a:pPr>
             <a:r>
               <a:rPr sz="2000"/>
-              <a:t>Drag a leg while the stance controller fights back</a:t>
+              <a:t>Drag a leg while the locomotion policy steps to keep its feet</a:t>
             </a:r>
           </a:p>
           <a:p>
@@ -14643,7 +14643,7 @@
             </a:r>
             <a:r>
               <a:rPr sz="2000"/>
-              <a:t> Drag a quadruped's leg while its controller resists, and a Franka arm with the motors on or off.</a:t>
+              <a:t> Drag a quadruped's leg while a trained locomotion policy fights you, and a Franka arm with the motors on or off.</a:t>
             </a:r>
           </a:p>
           <a:p>
@@ -14897,7 +14897,7 @@
             </a:r>
             <a:r>
               <a:rPr sz="1300"/>
-              <a:t>  click where the push lands, set direction and magnitude, fire a measured impulse, and see whether the controller holds</a:t>
+              <a:t>  click where the push lands, set direction and magnitude, fire a measured impulse, and find the magnitude where recovery stops</a:t>
             </a:r>
           </a:p>
           <a:p>
@@ -14924,28 +14924,127 @@
               </a:spcAft>
             </a:pPr>
             <a:r>
+              <a:rPr sz="1100">
+                <a:latin typeface="Consolas"/>
+              </a:rPr>
+              <a:t>The rig measures the controller.</a:t>
+            </a:r>
+            <a:r>
               <a:rPr sz="1300"/>
-              <a:t>Forward at the base COM: </a:t>
+              <a:t> Same robot, same push, same 50 ms window, two things holding it up:</a:t>
+            </a:r>
+          </a:p>
+          <a:p>
+            <a:pPr lvl="1">
+              <a:spcAft>
+                <a:spcPts val="500"/>
+              </a:spcAft>
+            </a:pPr>
+            <a:r>
+              <a:rPr sz="1100"/>
+              <a:t>a PD holding a stance: </a:t>
+            </a:r>
+            <a:r>
+              <a:rPr sz="900">
+                <a:latin typeface="Consolas"/>
+              </a:rPr>
+              <a:t>325 N</a:t>
+            </a:r>
+            <a:r>
+              <a:rPr sz="1100"/>
+              <a:t> recovers, </a:t>
+            </a:r>
+            <a:r>
+              <a:rPr sz="900">
+                <a:latin typeface="Consolas"/>
+              </a:rPr>
+              <a:t>330 N</a:t>
+            </a:r>
+            <a:r>
+              <a:rPr sz="1100"/>
+              <a:t> does not</a:t>
+            </a:r>
+          </a:p>
+          <a:p>
+            <a:pPr lvl="1">
+              <a:spcAft>
+                <a:spcPts val="500"/>
+              </a:spcAft>
+            </a:pPr>
+            <a:r>
+              <a:rPr sz="1100"/>
+              <a:t>a trained locomotion policy: </a:t>
+            </a:r>
+            <a:r>
+              <a:rPr sz="900">
+                <a:latin typeface="Consolas"/>
+              </a:rPr>
+              <a:t>1850 N</a:t>
+            </a:r>
+            <a:r>
+              <a:rPr sz="1100"/>
+              <a:t> recovers, </a:t>
+            </a:r>
+            <a:r>
+              <a:rPr sz="900">
+                <a:latin typeface="Consolas"/>
+              </a:rPr>
+              <a:t>1900 N</a:t>
+            </a:r>
+            <a:r>
+              <a:rPr sz="1100"/>
+              <a:t> does not</a:t>
+            </a:r>
+          </a:p>
+          <a:p>
+            <a:pPr>
+              <a:spcAft>
+                <a:spcPts val="500"/>
+              </a:spcAft>
+            </a:pPr>
+            <a:r>
+              <a:rPr sz="1300"/>
+              <a:t>Sideways is weaker for both: </a:t>
             </a:r>
             <a:r>
               <a:rPr sz="1100">
                 <a:latin typeface="Consolas"/>
               </a:rPr>
-              <a:t>325 N</a:t>
+              <a:t>280 N</a:t>
             </a:r>
             <a:r>
               <a:rPr sz="1300"/>
-              <a:t> recovers, </a:t>
+              <a:t>/</a:t>
             </a:r>
             <a:r>
               <a:rPr sz="1100">
                 <a:latin typeface="Consolas"/>
               </a:rPr>
-              <a:t>330 N</a:t>
+              <a:t>290 N</a:t>
             </a:r>
             <a:r>
               <a:rPr sz="1300"/>
-              <a:t> does not</a:t>
+              <a:t> for the stance, </a:t>
+            </a:r>
+            <a:r>
+              <a:rPr sz="1100">
+                <a:latin typeface="Consolas"/>
+              </a:rPr>
+              <a:t>1100 N</a:t>
+            </a:r>
+            <a:r>
+              <a:rPr sz="1300"/>
+              <a:t>/</a:t>
+            </a:r>
+            <a:r>
+              <a:rPr sz="1100">
+                <a:latin typeface="Consolas"/>
+              </a:rPr>
+              <a:t>1200 N</a:t>
+            </a:r>
+            <a:r>
+              <a:rPr sz="1300"/>
+              <a:t> for the policy.</a:t>
             </a:r>
           </a:p>
           <a:p>
@@ -14956,27 +15055,7 @@
             </a:pPr>
             <a:r>
               <a:rPr sz="1300"/>
-              <a:t>Sideways: </a:t>
-            </a:r>
-            <a:r>
-              <a:rPr sz="1100">
-                <a:latin typeface="Consolas"/>
-              </a:rPr>
-              <a:t>280 N</a:t>
-            </a:r>
-            <a:r>
-              <a:rPr sz="1300"/>
-              <a:t> recovers, </a:t>
-            </a:r>
-            <a:r>
-              <a:rPr sz="1100">
-                <a:latin typeface="Consolas"/>
-              </a:rPr>
-              <a:t>290 N</a:t>
-            </a:r>
-            <a:r>
-              <a:rPr sz="1300"/>
-              <a:t> does not</a:t>
+              <a:t>The difference is that the stance can only stiffen. The policy picks a foot up and steps into the shove, and will be carried five metres doing it rather than fall over.</a:t>
             </a:r>
           </a:p>
           <a:p>
@@ -14988,34 +15067,6 @@
             <a:r>
               <a:rPr sz="1300"/>
               <a:t>Same impulse, applied 5 cm higher up the torso: the verdict flips</a:t>
-            </a:r>
-          </a:p>
-          <a:p>
-            <a:pPr>
-              <a:spcAft>
-                <a:spcPts val="500"/>
-              </a:spcAft>
-            </a:pPr>
-            <a:r>
-              <a:rPr sz="1100">
-                <a:latin typeface="Consolas"/>
-              </a:rPr>
-              <a:t>What is holding it up matters.</a:t>
-            </a:r>
-            <a:r>
-              <a:rPr sz="1300"/>
-              <a:t> Here it is a PD law holding a fixed stance, not a learned policy. It stiffens and resists, and it cannot take a step, so past the tipping point it simply topples.</a:t>
-            </a:r>
-          </a:p>
-          <a:p>
-            <a:pPr>
-              <a:spcAft>
-                <a:spcPts val="500"/>
-              </a:spcAft>
-            </a:pPr>
-            <a:r>
-              <a:rPr sz="1300"/>
-              <a:t>That is a property of the CONTROLLER, not of the rig. Put a locomotion policy behind the same joints and the rig measures that instead, including whether it steps to catch itself.</a:t>
             </a:r>
           </a:p>
           <a:p>

--- a/tutorial_HIL_driver.pptx
+++ b/tutorial_HIL_driver.pptx
@@ -5578,7 +5578,7 @@
                 </a:solidFill>
                 <a:latin typeface="Consolas"/>
               </a:rPr>
-              <a:t># ---- and how this tutorial calls it (tutorial_HIL_driver.py, lines 812 to 816) ------</a:t>
+              <a:t># ---- and how this tutorial calls it (tutorial_HIL_driver.py, lines 832 to 836) ------</a:t>
             </a:r>
           </a:p>
           <a:p>
@@ -8667,7 +8667,7 @@
                 </a:solidFill>
                 <a:latin typeface="Consolas"/>
               </a:rPr>
-              <a:t># ---- and how this tutorial calls it (tutorial_HIL_driver.py, lines 583 to 585) ------</a:t>
+              <a:t># ---- and how this tutorial calls it (tutorial_HIL_driver.py, lines 603 to 605) ------</a:t>
             </a:r>
           </a:p>
           <a:p>
@@ -13433,7 +13433,7 @@
             </a:r>
             <a:r>
               <a:rPr sz="2000"/>
-              <a:t>  click a link and drag it while its controller fights to stay standing</a:t>
+              <a:t>  click a link and drag it while its controller keeps working</a:t>
             </a:r>
           </a:p>
           <a:p>
@@ -13460,8 +13460,14 @@
               </a:spcAft>
             </a:pPr>
             <a:r>
+              <a:rPr sz="1800">
+                <a:latin typeface="Consolas"/>
+              </a:rPr>
+              <a:t>Go2</a:t>
+            </a:r>
+            <a:r>
               <a:rPr sz="2000"/>
-              <a:t>Drag a leg while the locomotion policy steps to keep its feet</a:t>
+              <a:t>, driven by a trained locomotion policy: pull on a leg and it steps to keep its feet.</a:t>
             </a:r>
           </a:p>
           <a:p>
@@ -13471,8 +13477,14 @@
               </a:spcAft>
             </a:pPr>
             <a:r>
+              <a:rPr sz="1800">
+                <a:latin typeface="Consolas"/>
+              </a:rPr>
+              <a:t>Franka</a:t>
+            </a:r>
+            <a:r>
               <a:rPr sz="2000"/>
-              <a:t>Drag a Franka link, hand-guided or fully unactuated</a:t>
+              <a:t>, hand-guided: the motors hold position, and the arm follows your hand and returns when you let go.</a:t>
             </a:r>
           </a:p>
           <a:p>
@@ -13482,19 +13494,14 @@
               </a:spcAft>
             </a:pPr>
             <a:r>
+              <a:rPr sz="1800">
+                <a:latin typeface="Consolas"/>
+              </a:rPr>
+              <a:t>Franka</a:t>
+            </a:r>
+            <a:r>
               <a:rPr sz="2000"/>
-              <a:t>The same drag works on a 0.15 kg shin and a 2.7 kg arm link, because the spring is built from the mass it is pulling</a:t>
-            </a:r>
-          </a:p>
-          <a:p>
-            <a:pPr>
-              <a:spcAft>
-                <a:spcPts val="900"/>
-              </a:spcAft>
-            </a:pPr>
-            <a:r>
-              <a:rPr sz="2000"/>
-              <a:t>This is the clearest case of the definition on the whole deck: you pull, the controller resists, you feel it resist, and you pull differently.</a:t>
+              <a:t>, unactuated: the motors are off, so it collapses under gravity and you can pose the dead weight by hand.</a:t>
             </a:r>
           </a:p>
         </p:txBody>
@@ -13515,8 +13522,8 @@
         </p:blipFill>
         <p:spPr>
           <a:xfrm>
-            <a:off x="4492416" y="5134355"/>
-            <a:ext cx="1635823" cy="1266444"/>
+            <a:off x="4360205" y="5020055"/>
+            <a:ext cx="1783461" cy="1380744"/>
           </a:xfrm>
           <a:prstGeom prst="rect">
             <a:avLst/>
@@ -13539,8 +13546,8 @@
         </p:blipFill>
         <p:spPr>
           <a:xfrm>
-            <a:off x="6402560" y="5134355"/>
-            <a:ext cx="1293975" cy="1266444"/>
+            <a:off x="6417986" y="5020055"/>
+            <a:ext cx="1410760" cy="1380744"/>
           </a:xfrm>
           <a:prstGeom prst="rect">
             <a:avLst/>
@@ -14890,14 +14897,14 @@
               </a:spcAft>
             </a:pPr>
             <a:r>
-              <a:rPr sz="1100">
+              <a:rPr sz="1500">
                 <a:latin typeface="Consolas"/>
               </a:rPr>
               <a:t>WHAT</a:t>
             </a:r>
             <a:r>
-              <a:rPr sz="1300"/>
-              <a:t>  click where the push lands, set direction and magnitude, fire a measured impulse, and find the magnitude where recovery stops</a:t>
+              <a:rPr sz="1700"/>
+              <a:t>  click a point on the robot, set a direction and a magnitude, and fire an impulse of fixed duration</a:t>
             </a:r>
           </a:p>
           <a:p>
@@ -14907,14 +14914,14 @@
               </a:spcAft>
             </a:pPr>
             <a:r>
-              <a:rPr sz="1100">
+              <a:rPr sz="1500">
                 <a:latin typeface="Consolas"/>
               </a:rPr>
               <a:t>WHY</a:t>
             </a:r>
             <a:r>
-              <a:rPr sz="1300"/>
-              <a:t>   robustness testing that produces a NUMBER, so the result can go in a report and somebody else can reproduce it</a:t>
+              <a:rPr sz="1700"/>
+              <a:t>   it turns 'is this controller robust' into a number, which is something you can put in a report and somebody else can reproduce</a:t>
             </a:r>
           </a:p>
           <a:p>
@@ -14924,160 +14931,91 @@
               </a:spcAft>
             </a:pPr>
             <a:r>
-              <a:rPr sz="1100">
-                <a:latin typeface="Consolas"/>
-              </a:rPr>
-              <a:t>The rig measures the controller.</a:t>
-            </a:r>
-            <a:r>
-              <a:rPr sz="1300"/>
-              <a:t> Same robot, same push, same 50 ms window, two things holding it up:</a:t>
-            </a:r>
-          </a:p>
-          <a:p>
-            <a:pPr lvl="1">
+              <a:rPr sz="1700"/>
+              <a:t>The panel reports the impulse, the peak tilt, how far the robot was carried, and how long it took to settle.</a:t>
+            </a:r>
+          </a:p>
+          <a:p>
+            <a:pPr>
               <a:spcAft>
                 <a:spcPts val="500"/>
               </a:spcAft>
             </a:pPr>
             <a:r>
-              <a:rPr sz="1100"/>
-              <a:t>a PD holding a stance: </a:t>
-            </a:r>
-            <a:r>
-              <a:rPr sz="900">
+              <a:rPr sz="1700"/>
+              <a:t>Sweep the magnitude and it finds the threshold. With the locomotion policy driving: </a:t>
+            </a:r>
+            <a:r>
+              <a:rPr sz="1500">
+                <a:latin typeface="Consolas"/>
+              </a:rPr>
+              <a:t>1850 N</a:t>
+            </a:r>
+            <a:r>
+              <a:rPr sz="1700"/>
+              <a:t> recovers, </a:t>
+            </a:r>
+            <a:r>
+              <a:rPr sz="1500">
+                <a:latin typeface="Consolas"/>
+              </a:rPr>
+              <a:t>1900 N</a:t>
+            </a:r>
+            <a:r>
+              <a:rPr sz="1700"/>
+              <a:t> does not. Sideways is weaker, at </a:t>
+            </a:r>
+            <a:r>
+              <a:rPr sz="1500">
+                <a:latin typeface="Consolas"/>
+              </a:rPr>
+              <a:t>1100 N</a:t>
+            </a:r>
+            <a:r>
+              <a:rPr sz="1700"/>
+              <a:t>/</a:t>
+            </a:r>
+            <a:r>
+              <a:rPr sz="1500">
+                <a:latin typeface="Consolas"/>
+              </a:rPr>
+              <a:t>1200 N</a:t>
+            </a:r>
+            <a:r>
+              <a:rPr sz="1700"/>
+              <a:t>.</a:t>
+            </a:r>
+          </a:p>
+          <a:p>
+            <a:pPr>
+              <a:spcAft>
+                <a:spcPts val="500"/>
+              </a:spcAft>
+            </a:pPr>
+            <a:r>
+              <a:rPr sz="1700"/>
+              <a:t>Change the controller and the threshold moves. The same robot held by a PD stance instead tips at </a:t>
+            </a:r>
+            <a:r>
+              <a:rPr sz="1500">
                 <a:latin typeface="Consolas"/>
               </a:rPr>
               <a:t>325 N</a:t>
             </a:r>
             <a:r>
-              <a:rPr sz="1100"/>
-              <a:t> recovers, </a:t>
-            </a:r>
-            <a:r>
-              <a:rPr sz="900">
-                <a:latin typeface="Consolas"/>
-              </a:rPr>
-              <a:t>330 N</a:t>
-            </a:r>
-            <a:r>
-              <a:rPr sz="1100"/>
-              <a:t> does not</a:t>
-            </a:r>
-          </a:p>
-          <a:p>
-            <a:pPr lvl="1">
+              <a:rPr sz="1700"/>
+              <a:t>, because a stance can only stiffen while the policy steps into the push.</a:t>
+            </a:r>
+          </a:p>
+          <a:p>
+            <a:pPr>
               <a:spcAft>
                 <a:spcPts val="500"/>
               </a:spcAft>
             </a:pPr>
             <a:r>
-              <a:rPr sz="1100"/>
-              <a:t>a trained locomotion policy: </a:t>
-            </a:r>
-            <a:r>
-              <a:rPr sz="900">
-                <a:latin typeface="Consolas"/>
-              </a:rPr>
-              <a:t>1850 N</a:t>
-            </a:r>
-            <a:r>
-              <a:rPr sz="1100"/>
-              <a:t> recovers, </a:t>
-            </a:r>
-            <a:r>
-              <a:rPr sz="900">
-                <a:latin typeface="Consolas"/>
-              </a:rPr>
-              <a:t>1900 N</a:t>
-            </a:r>
-            <a:r>
-              <a:rPr sz="1100"/>
-              <a:t> does not</a:t>
-            </a:r>
-          </a:p>
-          <a:p>
-            <a:pPr>
-              <a:spcAft>
-                <a:spcPts val="500"/>
-              </a:spcAft>
-            </a:pPr>
-            <a:r>
-              <a:rPr sz="1300"/>
-              <a:t>Sideways is weaker for both: </a:t>
-            </a:r>
-            <a:r>
-              <a:rPr sz="1100">
-                <a:latin typeface="Consolas"/>
-              </a:rPr>
-              <a:t>280 N</a:t>
-            </a:r>
-            <a:r>
-              <a:rPr sz="1300"/>
-              <a:t>/</a:t>
-            </a:r>
-            <a:r>
-              <a:rPr sz="1100">
-                <a:latin typeface="Consolas"/>
-              </a:rPr>
-              <a:t>290 N</a:t>
-            </a:r>
-            <a:r>
-              <a:rPr sz="1300"/>
-              <a:t> for the stance, </a:t>
-            </a:r>
-            <a:r>
-              <a:rPr sz="1100">
-                <a:latin typeface="Consolas"/>
-              </a:rPr>
-              <a:t>1100 N</a:t>
-            </a:r>
-            <a:r>
-              <a:rPr sz="1300"/>
-              <a:t>/</a:t>
-            </a:r>
-            <a:r>
-              <a:rPr sz="1100">
-                <a:latin typeface="Consolas"/>
-              </a:rPr>
-              <a:t>1200 N</a:t>
-            </a:r>
-            <a:r>
-              <a:rPr sz="1300"/>
-              <a:t> for the policy.</a:t>
-            </a:r>
-          </a:p>
-          <a:p>
-            <a:pPr>
-              <a:spcAft>
-                <a:spcPts val="500"/>
-              </a:spcAft>
-            </a:pPr>
-            <a:r>
-              <a:rPr sz="1300"/>
-              <a:t>The difference is that the stance can only stiffen. The policy picks a foot up and steps into the shove, and will be carried five metres doing it rather than fall over.</a:t>
-            </a:r>
-          </a:p>
-          <a:p>
-            <a:pPr>
-              <a:spcAft>
-                <a:spcPts val="500"/>
-              </a:spcAft>
-            </a:pPr>
-            <a:r>
-              <a:rPr sz="1300"/>
-              <a:t>Same impulse, applied 5 cm higher up the torso: the verdict flips</a:t>
-            </a:r>
-          </a:p>
-          <a:p>
-            <a:pPr>
-              <a:spcAft>
-                <a:spcPts val="500"/>
-              </a:spcAft>
-            </a:pPr>
-            <a:r>
-              <a:rPr sz="1300"/>
-              <a:t>That last line is the reason a human is still in this one. Where to push is a judgement call, and it changes the answer as much as how hard you push does.</a:t>
+              <a:rPr sz="1700"/>
+              <a:t>Where you click matters too: the same impulse 5 cm higher up the torso can flip the verdict.</a:t>
             </a:r>
           </a:p>
         </p:txBody>

--- a/tutorial_HIL_driver.pptx
+++ b/tutorial_HIL_driver.pptx
@@ -40,6 +40,7 @@
     <p:sldId id="285" r:id="rId37"/>
     <p:sldId id="286" r:id="rId38"/>
     <p:sldId id="287" r:id="rId39"/>
+    <p:sldId id="288" r:id="rId40"/>
   </p:sldIdLst>
   <p:sldSz cx="12192000" cy="6858000"/>
   <p:notesSz cx="6858000" cy="9144000"/>
@@ -9260,206 +9261,692 @@
           <a:p>
             <a:r>
               <a:rPr sz="2600"/>
-              <a:t>Input devices Chrono already speaks</a:t>
-            </a:r>
-          </a:p>
-        </p:txBody>
-      </p:sp>
-      <p:sp>
-        <p:nvSpPr>
-          <p:cNvPr id="3" name="Content Placeholder 2"/>
-          <p:cNvSpPr>
-            <a:spLocks noGrp="1"/>
-          </p:cNvSpPr>
-          <p:nvPr>
-            <p:ph idx="1"/>
-          </p:nvPr>
+              <a:t>Driving something that is NOT a vehicle</a:t>
+            </a:r>
+          </a:p>
+        </p:txBody>
+      </p:sp>
+      <p:sp>
+        <p:nvSpPr>
+          <p:cNvPr id="3" name="CodeBox"/>
+          <p:cNvSpPr txBox="1"/>
+          <p:nvPr/>
         </p:nvSpPr>
         <p:spPr>
           <a:xfrm>
-            <a:off x="642552" y="1313782"/>
-            <a:ext cx="10936224" cy="5203976"/>
+            <a:off x="0" y="1207008"/>
+            <a:ext cx="12188952" cy="3566160"/>
           </a:xfrm>
+          <a:prstGeom prst="rect">
+            <a:avLst/>
+          </a:prstGeom>
+          <a:solidFill>
+            <a:srgbClr val="000000"/>
+          </a:solidFill>
         </p:spPr>
         <p:txBody>
-          <a:bodyPr wrap="square"/>
-          <a:lstStyle/>
-          <a:p>
-            <a:pPr>
-              <a:spcAft>
-                <a:spcPts val="500"/>
+          <a:bodyPr wrap="none" lIns="320040" tIns="91440">
+            <a:spAutoFit/>
+          </a:bodyPr>
+          <a:lstStyle/>
+          <a:p>
+            <a:pPr>
+              <a:spcAft>
+                <a:spcPts val="0"/>
+              </a:spcAft>
+            </a:pPr>
+            <a:r>
+              <a:rPr sz="900">
+                <a:solidFill>
+                  <a:srgbClr val="7FAF7F"/>
+                </a:solidFill>
+                <a:latin typeface="Consolas"/>
+              </a:rPr>
+              <a:t># Nothing outside Chrono::Vehicle has a driver abstraction, so this</a:t>
+            </a:r>
+          </a:p>
+          <a:p>
+            <a:pPr>
+              <a:spcAft>
+                <a:spcPts val="0"/>
+              </a:spcAft>
+            </a:pPr>
+            <a:r>
+              <a:rPr sz="900">
+                <a:solidFill>
+                  <a:srgbClr val="7FAF7F"/>
+                </a:solidFill>
+                <a:latin typeface="Consolas"/>
+              </a:rPr>
+              <a:t># is a pattern rather than an API. Three decisions:</a:t>
+            </a:r>
+          </a:p>
+          <a:p>
+            <a:pPr>
+              <a:spcAft>
+                <a:spcPts val="0"/>
+              </a:spcAft>
+            </a:pPr>
+            <a:r>
+              <a:rPr sz="900">
+                <a:solidFill>
+                  <a:srgbClr val="7FAF7F"/>
+                </a:solidFill>
+                <a:latin typeface="Consolas"/>
+              </a:rPr>
+              <a:t>#</a:t>
+            </a:r>
+          </a:p>
+          <a:p>
+            <a:pPr>
+              <a:spcAft>
+                <a:spcPts val="0"/>
+              </a:spcAft>
+            </a:pPr>
+            <a:r>
+              <a:rPr sz="900">
+                <a:solidFill>
+                  <a:srgbClr val="7FAF7F"/>
+                </a:solidFill>
+                <a:latin typeface="Consolas"/>
+              </a:rPr>
+              <a:t>#   1. NORMALISE THE INPUT. A few bounded numbers a device produces</a:t>
+            </a:r>
+          </a:p>
+          <a:p>
+            <a:pPr>
+              <a:spcAft>
+                <a:spcPts val="0"/>
+              </a:spcAft>
+            </a:pPr>
+            <a:r>
+              <a:rPr sz="900">
+                <a:solidFill>
+                  <a:srgbClr val="7FAF7F"/>
+                </a:solidFill>
+                <a:latin typeface="Consolas"/>
+              </a:rPr>
+              <a:t>#      and a plant consumes, so one console drives any of them.</a:t>
+            </a:r>
+          </a:p>
+          <a:p>
+            <a:pPr>
+              <a:spcAft>
+                <a:spcPts val="0"/>
+              </a:spcAft>
+            </a:pPr>
+            <a:r>
+              <a:rPr sz="900">
+                <a:solidFill>
+                  <a:srgbClr val="7FAF7F"/>
+                </a:solidFill>
+                <a:latin typeface="Consolas"/>
+              </a:rPr>
+              <a:t>#   2. BIND THEM TO ACTUATION. The only plant-specific part.</a:t>
+            </a:r>
+          </a:p>
+          <a:p>
+            <a:pPr>
+              <a:spcAft>
+                <a:spcPts val="0"/>
+              </a:spcAft>
+            </a:pPr>
+            <a:r>
+              <a:rPr sz="900">
+                <a:solidFill>
+                  <a:srgbClr val="7FAF7F"/>
+                </a:solidFill>
+                <a:latin typeface="Consolas"/>
+              </a:rPr>
+              <a:t>#   3. SEND SOMETHING BACK, or the person is driving open loop.</a:t>
+            </a:r>
+          </a:p>
+          <a:p>
+            <a:pPr>
+              <a:spcAft>
+                <a:spcPts val="0"/>
+              </a:spcAft>
+            </a:pPr>
+            <a:r>
+              <a:rPr sz="900">
+                <a:solidFill>
+                  <a:srgbClr val="CCCCCC"/>
+                </a:solidFill>
+                <a:latin typeface="Consolas"/>
+              </a:rPr>
+              <a:t> </a:t>
+            </a:r>
+          </a:p>
+          <a:p>
+            <a:pPr>
+              <a:spcAft>
+                <a:spcPts val="0"/>
+              </a:spcAft>
+            </a:pPr>
+            <a:r>
+              <a:rPr sz="900">
+                <a:solidFill>
+                  <a:srgbClr val="CCCCCC"/>
+                </a:solidFill>
+                <a:latin typeface="Consolas"/>
+              </a:rPr>
+              <a:t>class Plant:                     </a:t>
+            </a:r>
+            <a:r>
+              <a:rPr sz="900">
+                <a:solidFill>
+                  <a:srgbClr val="7FAF7F"/>
+                </a:solidFill>
+                <a:latin typeface="Consolas"/>
+              </a:rPr>
+              <a:t># every plant, one shape</a:t>
+            </a:r>
+          </a:p>
+          <a:p>
+            <a:pPr>
+              <a:spcAft>
+                <a:spcPts val="0"/>
+              </a:spcAft>
+            </a:pPr>
+            <a:r>
+              <a:rPr sz="900">
+                <a:solidFill>
+                  <a:srgbClr val="CCCCCC"/>
+                </a:solidFill>
+                <a:latin typeface="Consolas"/>
+              </a:rPr>
+              <a:t>    def </a:t>
+            </a:r>
+            <a:r>
+              <a:rPr sz="900">
+                <a:solidFill>
+                  <a:srgbClr val="7FC7E8"/>
+                </a:solidFill>
+                <a:latin typeface="Consolas"/>
+              </a:rPr>
+              <a:t>apply</a:t>
+            </a:r>
+            <a:r>
+              <a:rPr sz="900">
+                <a:solidFill>
+                  <a:srgbClr val="CCCCCC"/>
+                </a:solidFill>
+                <a:latin typeface="Consolas"/>
+              </a:rPr>
+              <a:t>(self, inputs):          ...  </a:t>
+            </a:r>
+            <a:r>
+              <a:rPr sz="900">
+                <a:solidFill>
+                  <a:srgbClr val="7FAF7F"/>
+                </a:solidFill>
+                <a:latin typeface="Consolas"/>
+              </a:rPr>
+              <a:t># THE BINDING</a:t>
+            </a:r>
+          </a:p>
+          <a:p>
+            <a:pPr>
+              <a:spcAft>
+                <a:spcPts val="0"/>
+              </a:spcAft>
+            </a:pPr>
+            <a:r>
+              <a:rPr sz="900">
+                <a:solidFill>
+                  <a:srgbClr val="CCCCCC"/>
+                </a:solidFill>
+                <a:latin typeface="Consolas"/>
+              </a:rPr>
+              <a:t>    def </a:t>
+            </a:r>
+            <a:r>
+              <a:rPr sz="900">
+                <a:solidFill>
+                  <a:srgbClr val="7FC7E8"/>
+                </a:solidFill>
+                <a:latin typeface="Consolas"/>
+              </a:rPr>
+              <a:t>synchronize</a:t>
+            </a:r>
+            <a:r>
+              <a:rPr sz="900">
+                <a:solidFill>
+                  <a:srgbClr val="CCCCCC"/>
+                </a:solidFill>
+                <a:latin typeface="Consolas"/>
+              </a:rPr>
+              <a:t>(self, t, inputs): ...</a:t>
+            </a:r>
+          </a:p>
+          <a:p>
+            <a:pPr>
+              <a:spcAft>
+                <a:spcPts val="0"/>
+              </a:spcAft>
+            </a:pPr>
+            <a:r>
+              <a:rPr sz="900">
+                <a:solidFill>
+                  <a:srgbClr val="CCCCCC"/>
+                </a:solidFill>
+                <a:latin typeface="Consolas"/>
+              </a:rPr>
+              <a:t>    def </a:t>
+            </a:r>
+            <a:r>
+              <a:rPr sz="900">
+                <a:solidFill>
+                  <a:srgbClr val="7FC7E8"/>
+                </a:solidFill>
+                <a:latin typeface="Consolas"/>
+              </a:rPr>
+              <a:t>advance</a:t>
+            </a:r>
+            <a:r>
+              <a:rPr sz="900">
+                <a:solidFill>
+                  <a:srgbClr val="CCCCCC"/>
+                </a:solidFill>
+                <a:latin typeface="Consolas"/>
+              </a:rPr>
+              <a:t>(self, step):          ...</a:t>
+            </a:r>
+          </a:p>
+          <a:p>
+            <a:pPr>
+              <a:spcAft>
+                <a:spcPts val="0"/>
+              </a:spcAft>
+            </a:pPr>
+            <a:r>
+              <a:rPr sz="900">
+                <a:solidFill>
+                  <a:srgbClr val="CCCCCC"/>
+                </a:solidFill>
+                <a:latin typeface="Consolas"/>
+              </a:rPr>
+              <a:t>    def </a:t>
+            </a:r>
+            <a:r>
+              <a:rPr sz="900">
+                <a:solidFill>
+                  <a:srgbClr val="7FC7E8"/>
+                </a:solidFill>
+                <a:latin typeface="Consolas"/>
+              </a:rPr>
+              <a:t>speed</a:t>
+            </a:r>
+            <a:r>
+              <a:rPr sz="900">
+                <a:solidFill>
+                  <a:srgbClr val="CCCCCC"/>
+                </a:solidFill>
+                <a:latin typeface="Consolas"/>
+              </a:rPr>
+              <a:t>(self): ...; def </a:t>
+            </a:r>
+            <a:r>
+              <a:rPr sz="900">
+                <a:solidFill>
+                  <a:srgbClr val="7FC7E8"/>
+                </a:solidFill>
+                <a:latin typeface="Consolas"/>
+              </a:rPr>
+              <a:t>status</a:t>
+            </a:r>
+            <a:r>
+              <a:rPr sz="900">
+                <a:solidFill>
+                  <a:srgbClr val="CCCCCC"/>
+                </a:solidFill>
+                <a:latin typeface="Consolas"/>
+              </a:rPr>
+              <a:t>(self): ...</a:t>
+            </a:r>
+          </a:p>
+          <a:p>
+            <a:pPr>
+              <a:spcAft>
+                <a:spcPts val="0"/>
+              </a:spcAft>
+            </a:pPr>
+            <a:r>
+              <a:rPr sz="900">
+                <a:solidFill>
+                  <a:srgbClr val="CCCCCC"/>
+                </a:solidFill>
+                <a:latin typeface="Consolas"/>
+              </a:rPr>
+              <a:t> </a:t>
+            </a:r>
+          </a:p>
+          <a:p>
+            <a:pPr>
+              <a:spcAft>
+                <a:spcPts val="0"/>
+              </a:spcAft>
+            </a:pPr>
+            <a:r>
+              <a:rPr sz="900">
+                <a:solidFill>
+                  <a:srgbClr val="7FAF7F"/>
+                </a:solidFill>
+                <a:latin typeface="Consolas"/>
+              </a:rPr>
+              <a:t># A crane's entire input surface: two motors and a setpoint each.</a:t>
+            </a:r>
+          </a:p>
+          <a:p>
+            <a:pPr>
+              <a:spcAft>
+                <a:spcPts val="0"/>
+              </a:spcAft>
+            </a:pPr>
+            <a:r>
+              <a:rPr sz="900">
+                <a:solidFill>
+                  <a:srgbClr val="CCCCCC"/>
+                </a:solidFill>
+                <a:latin typeface="Consolas"/>
+              </a:rPr>
+              <a:t>self.long_motor = chrono.</a:t>
+            </a:r>
+            <a:r>
+              <a:rPr sz="900">
+                <a:solidFill>
+                  <a:srgbClr val="F0A040"/>
+                </a:solidFill>
+                <a:latin typeface="Consolas"/>
+              </a:rPr>
+              <a:t>ChLinkMotorLinearSpeed</a:t>
+            </a:r>
+            <a:r>
+              <a:rPr sz="900">
+                <a:solidFill>
+                  <a:srgbClr val="CCCCCC"/>
+                </a:solidFill>
+                <a:latin typeface="Consolas"/>
+              </a:rPr>
+              <a:t>()</a:t>
+            </a:r>
+          </a:p>
+          <a:p>
+            <a:pPr>
+              <a:spcAft>
+                <a:spcPts val="0"/>
+              </a:spcAft>
+            </a:pPr>
+            <a:r>
+              <a:rPr sz="900">
+                <a:solidFill>
+                  <a:srgbClr val="CCCCCC"/>
+                </a:solidFill>
+                <a:latin typeface="Consolas"/>
+              </a:rPr>
+              <a:t>self.long_speed = chrono.</a:t>
+            </a:r>
+            <a:r>
+              <a:rPr sz="900">
+                <a:solidFill>
+                  <a:srgbClr val="F0A040"/>
+                </a:solidFill>
+                <a:latin typeface="Consolas"/>
+              </a:rPr>
+              <a:t>ChFunctionSetpoint</a:t>
+            </a:r>
+            <a:r>
+              <a:rPr sz="900">
+                <a:solidFill>
+                  <a:srgbClr val="CCCCCC"/>
+                </a:solidFill>
+                <a:latin typeface="Consolas"/>
+              </a:rPr>
+              <a:t>()</a:t>
+            </a:r>
+          </a:p>
+          <a:p>
+            <a:pPr>
+              <a:spcAft>
+                <a:spcPts val="0"/>
+              </a:spcAft>
+            </a:pPr>
+            <a:r>
+              <a:rPr sz="900">
+                <a:solidFill>
+                  <a:srgbClr val="CCCCCC"/>
+                </a:solidFill>
+                <a:latin typeface="Consolas"/>
+              </a:rPr>
+              <a:t>self.long_motor.</a:t>
+            </a:r>
+            <a:r>
+              <a:rPr sz="900">
+                <a:solidFill>
+                  <a:srgbClr val="7FC7E8"/>
+                </a:solidFill>
+                <a:latin typeface="Consolas"/>
+              </a:rPr>
+              <a:t>SetSpeedFunction</a:t>
+            </a:r>
+            <a:r>
+              <a:rPr sz="900">
+                <a:solidFill>
+                  <a:srgbClr val="CCCCCC"/>
+                </a:solidFill>
+                <a:latin typeface="Consolas"/>
+              </a:rPr>
+              <a:t>(self.long_speed)</a:t>
+            </a:r>
+          </a:p>
+          <a:p>
+            <a:pPr>
+              <a:spcAft>
+                <a:spcPts val="0"/>
+              </a:spcAft>
+            </a:pPr>
+            <a:r>
+              <a:rPr sz="900">
+                <a:solidFill>
+                  <a:srgbClr val="CCCCCC"/>
+                </a:solidFill>
+                <a:latin typeface="Consolas"/>
+              </a:rPr>
+              <a:t> </a:t>
+            </a:r>
+          </a:p>
+          <a:p>
+            <a:pPr>
+              <a:spcAft>
+                <a:spcPts val="0"/>
+              </a:spcAft>
+            </a:pPr>
+            <a:r>
+              <a:rPr sz="900">
+                <a:solidFill>
+                  <a:srgbClr val="7FAF7F"/>
+                </a:solidFill>
+                <a:latin typeface="Consolas"/>
+              </a:rPr>
+              <a:t># ---- and how this tutorial calls it (hil_plants.py, lines 335 to 338) ------</a:t>
+            </a:r>
+          </a:p>
+          <a:p>
+            <a:pPr>
+              <a:spcAft>
+                <a:spcPts val="0"/>
+              </a:spcAft>
+            </a:pPr>
+            <a:r>
+              <a:rPr sz="900">
+                <a:solidFill>
+                  <a:srgbClr val="7FAF7F"/>
+                </a:solidFill>
+                <a:latin typeface="Consolas"/>
+              </a:rPr>
+              <a:t># Throttle drives forward, braking drives back: two pedals, one axis.</a:t>
+            </a:r>
+          </a:p>
+          <a:p>
+            <a:pPr>
+              <a:spcAft>
+                <a:spcPts val="0"/>
+              </a:spcAft>
+            </a:pPr>
+            <a:r>
+              <a:rPr sz="900">
+                <a:solidFill>
+                  <a:srgbClr val="CCCCCC"/>
+                </a:solidFill>
+                <a:latin typeface="Consolas"/>
+              </a:rPr>
+              <a:t>long_cmd = (inputs.m_throttle - inputs.m_braking) * self.MAX_LONG_SPEED</a:t>
+            </a:r>
+          </a:p>
+          <a:p>
+            <a:pPr>
+              <a:spcAft>
+                <a:spcPts val="0"/>
+              </a:spcAft>
+            </a:pPr>
+            <a:r>
+              <a:rPr sz="900">
+                <a:solidFill>
+                  <a:srgbClr val="CCCCCC"/>
+                </a:solidFill>
+                <a:latin typeface="Consolas"/>
+              </a:rPr>
+              <a:t>self.long_speed.</a:t>
+            </a:r>
+            <a:r>
+              <a:rPr sz="900">
+                <a:solidFill>
+                  <a:srgbClr val="7FC7E8"/>
+                </a:solidFill>
+                <a:latin typeface="Consolas"/>
+              </a:rPr>
+              <a:t>SetSetpoint</a:t>
+            </a:r>
+            <a:r>
+              <a:rPr sz="900">
+                <a:solidFill>
+                  <a:srgbClr val="CCCCCC"/>
+                </a:solidFill>
+                <a:latin typeface="Consolas"/>
+              </a:rPr>
+              <a:t>(long_cmd, t)</a:t>
+            </a:r>
+          </a:p>
+          <a:p>
+            <a:pPr>
+              <a:spcAft>
+                <a:spcPts val="0"/>
+              </a:spcAft>
+            </a:pPr>
+            <a:r>
+              <a:rPr sz="900">
+                <a:solidFill>
+                  <a:srgbClr val="CCCCCC"/>
+                </a:solidFill>
+                <a:latin typeface="Consolas"/>
+              </a:rPr>
+              <a:t>self.cross_speed.</a:t>
+            </a:r>
+            <a:r>
+              <a:rPr sz="900">
+                <a:solidFill>
+                  <a:srgbClr val="7FC7E8"/>
+                </a:solidFill>
+                <a:latin typeface="Consolas"/>
+              </a:rPr>
+              <a:t>SetSetpoint</a:t>
+            </a:r>
+            <a:r>
+              <a:rPr sz="900">
+                <a:solidFill>
+                  <a:srgbClr val="CCCCCC"/>
+                </a:solidFill>
+                <a:latin typeface="Consolas"/>
+              </a:rPr>
+              <a:t>(inputs.m_steering * self.MAX_CROSS_SPEED, t)</a:t>
+            </a:r>
+          </a:p>
+        </p:txBody>
+      </p:sp>
+      <p:sp>
+        <p:nvSpPr>
+          <p:cNvPr id="4" name="NoteBox"/>
+          <p:cNvSpPr txBox="1"/>
+          <p:nvPr/>
+        </p:nvSpPr>
+        <p:spPr>
+          <a:xfrm>
+            <a:off x="402336" y="4882896"/>
+            <a:ext cx="11393424" cy="1536192"/>
+          </a:xfrm>
+          <a:prstGeom prst="rect">
+            <a:avLst/>
+          </a:prstGeom>
+          <a:noFill/>
+        </p:spPr>
+        <p:txBody>
+          <a:bodyPr wrap="square">
+            <a:spAutoFit/>
+          </a:bodyPr>
+          <a:lstStyle/>
+          <a:p>
+            <a:pPr>
+              <a:spcAft>
+                <a:spcPts val="400"/>
               </a:spcAft>
             </a:pPr>
             <a:r>
               <a:rPr sz="1400">
                 <a:latin typeface="Consolas"/>
               </a:rPr>
-              <a:t>ChInteractiveDriver</a:t>
+              <a:t>ChFunctionSetpoint</a:t>
             </a:r>
             <a:r>
               <a:rPr sz="1600"/>
-              <a:t> covers two CLASSES of device, not two devices:</a:t>
-            </a:r>
-          </a:p>
-          <a:p>
-            <a:pPr lvl="1">
-              <a:spcAft>
-                <a:spcPts val="500"/>
-              </a:spcAft>
-            </a:pPr>
-            <a:r>
-              <a:rPr sz="1200">
-                <a:latin typeface="Consolas"/>
-              </a:rPr>
-              <a:t>InputMode_KEYBOARD</a:t>
-            </a:r>
-            <a:r>
-              <a:rPr sz="1400"/>
-              <a:t>  -  with </a:t>
-            </a:r>
-            <a:r>
-              <a:rPr sz="1200">
-                <a:latin typeface="Consolas"/>
-              </a:rPr>
-              <a:t>KeyboardMode_HELD</a:t>
-            </a:r>
-            <a:r>
-              <a:rPr sz="1400"/>
-              <a:t> or </a:t>
-            </a:r>
-            <a:r>
-              <a:rPr sz="1200">
-                <a:latin typeface="Consolas"/>
-              </a:rPr>
-              <a:t>_CUMULATIVE</a:t>
-            </a:r>
-          </a:p>
-          <a:p>
-            <a:pPr lvl="1">
-              <a:spcAft>
-                <a:spcPts val="500"/>
-              </a:spcAft>
-            </a:pPr>
-            <a:r>
-              <a:rPr sz="1200">
-                <a:latin typeface="Consolas"/>
-              </a:rPr>
-              <a:t>InputMode_JOYSTICK</a:t>
-            </a:r>
-            <a:r>
-              <a:rPr sz="1400"/>
-              <a:t>  -  anything the windowing layer enumerates as one</a:t>
-            </a:r>
-          </a:p>
-          <a:p>
-            <a:pPr>
-              <a:spcAft>
-                <a:spcPts val="500"/>
-              </a:spcAft>
-            </a:pPr>
+              <a:t> is the piece worth knowing. A Chrono motor is driven by a </a:t>
+            </a:r>
+            <a:r>
+              <a:rPr sz="1400">
+                <a:latin typeface="Consolas"/>
+              </a:rPr>
+              <a:t>ChFunction</a:t>
+            </a:r>
             <a:r>
               <a:rPr sz="1600"/>
-              <a:t>A joystick is mapped by a JSON file, not by code: </a:t>
+              <a:t> of time, and a human's input is not a function of time anyone can write down in advance. The setpoint function is the adapter: push a value in each step, the motor reads it as the current one.</a:t>
+            </a:r>
+          </a:p>
+          <a:p>
+            <a:pPr>
+              <a:spcAft>
+                <a:spcPts val="400"/>
+              </a:spcAft>
+            </a:pPr>
+            <a:r>
+              <a:rPr sz="1600"/>
+              <a:t>The convention costs something, and the crane shows the bill: it has one travel axis and was handed two pedals, so it computes </a:t>
             </a:r>
             <a:r>
               <a:rPr sz="1400">
                 <a:latin typeface="Consolas"/>
               </a:rPr>
-              <a:t>SetJoystickConfigFile(path)</a:t>
-            </a:r>
-          </a:p>
-          <a:p>
-            <a:pPr lvl="1">
-              <a:spcAft>
-                <a:spcPts val="500"/>
-              </a:spcAft>
-            </a:pPr>
-            <a:r>
-              <a:rPr sz="1400"/>
-              <a:t>mapped axes: steering, throttle, brake, CLUTCH</a:t>
-            </a:r>
-          </a:p>
-          <a:p>
-            <a:pPr lvl="1">
-              <a:spcAft>
-                <a:spcPts val="500"/>
-              </a:spcAft>
-            </a:pPr>
-            <a:r>
-              <a:rPr sz="1400"/>
-              <a:t>mapped buttons: shift up/down, reverse, gears 1-9, manual-gearbox toggle, plus one user callback</a:t>
-            </a:r>
-          </a:p>
-          <a:p>
-            <a:pPr>
-              <a:spcAft>
-                <a:spcPts val="500"/>
-              </a:spcAft>
-            </a:pPr>
+              <a:t>throttle - braking</a:t>
+            </a:r>
             <a:r>
               <a:rPr sz="1600"/>
-              <a:t>Four configs ship in </a:t>
-            </a:r>
-            <a:r>
-              <a:rPr sz="1400">
-                <a:latin typeface="Consolas"/>
-              </a:rPr>
-              <a:t>data/vehicle/joystick/</a:t>
-            </a:r>
-            <a:r>
-              <a:rPr sz="1600"/>
-              <a:t>: Default, Logitech RumblePad 2, Xbox One, and Wheel+Pedals+Shifters</a:t>
-            </a:r>
-          </a:p>
-          <a:p>
-            <a:pPr>
-              <a:spcAft>
-                <a:spcPts val="500"/>
-              </a:spcAft>
-            </a:pPr>
-            <a:r>
-              <a:rPr sz="1600"/>
-              <a:t>Each control names its own DEVICE, so a wheel, a pedal box and an H-shifter enumerating as three separate USB devices all map at once</a:t>
-            </a:r>
-          </a:p>
-          <a:p>
-            <a:pPr>
-              <a:spcAft>
-                <a:spcPts val="500"/>
-              </a:spcAft>
-            </a:pPr>
-            <a:r>
-              <a:rPr sz="1600"/>
-              <a:t>Not hypothetical: the remote-driving study on slide 5 ran on a Logitech G29 wheel and pedal set through this path</a:t>
-            </a:r>
-          </a:p>
-          <a:p>
-            <a:pPr>
-              <a:spcAft>
-                <a:spcPts val="500"/>
-              </a:spcAft>
-            </a:pPr>
-            <a:r>
-              <a:rPr sz="1600"/>
-              <a:t>So a G923-class rig is a config file, not a port. The mapping and the semantics are Chrono's and cross-platform; enumerating the device is delegated to the windowing layer, so which platforms see your wheel follows that layer, and I have not tested it here.</a:t>
-            </a:r>
-          </a:p>
-          <a:p>
-            <a:pPr>
-              <a:spcAft>
-                <a:spcPts val="500"/>
-              </a:spcAft>
-            </a:pPr>
-            <a:r>
-              <a:rPr sz="1600"/>
-              <a:t>All of it is exposed to PyChrono.</a:t>
-            </a:r>
-          </a:p>
-        </p:txBody>
-      </p:sp>
-      <p:sp>
-        <p:nvSpPr>
-          <p:cNvPr id="4" name="Footer"/>
+              <a:t>. No crane operator would recognise that.</a:t>
+            </a:r>
+          </a:p>
+        </p:txBody>
+      </p:sp>
+      <p:sp>
+        <p:nvSpPr>
+          <p:cNvPr id="5" name="Footer"/>
           <p:cNvSpPr txBox="1"/>
           <p:nvPr/>
         </p:nvSpPr>
@@ -9488,7 +9975,7 @@
       </p:sp>
       <p:sp>
         <p:nvSpPr>
-          <p:cNvPr id="5" name="PageNo"/>
+          <p:cNvPr id="6" name="PageNo"/>
           <p:cNvSpPr txBox="1"/>
           <p:nvPr/>
         </p:nvSpPr>
@@ -9551,7 +10038,7 @@
           <a:p>
             <a:r>
               <a:rPr sz="2600"/>
-              <a:t>And for a device Chrono does not know about</a:t>
+              <a:t>Input devices Chrono already speaks</a:t>
             </a:r>
           </a:p>
         </p:txBody>
@@ -9578,107 +10065,172 @@
           <a:p>
             <a:pPr>
               <a:spcAft>
-                <a:spcPts val="900"/>
-              </a:spcAft>
-            </a:pPr>
-            <a:r>
-              <a:rPr sz="2000"/>
-              <a:t>Subclass </a:t>
-            </a:r>
-            <a:r>
-              <a:rPr sz="1800">
-                <a:latin typeface="Consolas"/>
-              </a:rPr>
-              <a:t>ChDriver</a:t>
-            </a:r>
-            <a:r>
-              <a:rPr sz="2000"/>
-              <a:t>, read whatever you like, and obey three rules:</a:t>
-            </a:r>
-          </a:p>
-          <a:p>
-            <a:pPr>
-              <a:spcAft>
-                <a:spcPts val="900"/>
-              </a:spcAft>
-            </a:pPr>
-            <a:r>
-              <a:rPr sz="2000"/>
-              <a:t>1.  </a:t>
-            </a:r>
-            <a:r>
-              <a:rPr sz="1800">
-                <a:latin typeface="Consolas"/>
-              </a:rPr>
-              <a:t>NEVER BLOCK.</a:t>
-            </a:r>
-            <a:r>
-              <a:rPr sz="2000"/>
-              <a:t> A simulation that waits on a human is not real-time. Late input means hold the last value, not stall the loop.</a:t>
-            </a:r>
-          </a:p>
-          <a:p>
-            <a:pPr>
-              <a:spcAft>
-                <a:spcPts val="900"/>
-              </a:spcAft>
-            </a:pPr>
-            <a:r>
-              <a:rPr sz="2000"/>
-              <a:t>2.  </a:t>
-            </a:r>
-            <a:r>
-              <a:rPr sz="1800">
-                <a:latin typeface="Consolas"/>
-              </a:rPr>
-              <a:t>SAMPLE ONCE PER STEP, THEN HOLD.</a:t>
-            </a:r>
-            <a:r>
-              <a:rPr sz="2000"/>
-              <a:t> Read at the top of the step and reuse that value for the whole step, or the physics sees inputs change for reasons the operator can neither perceive nor reproduce.</a:t>
-            </a:r>
-          </a:p>
-          <a:p>
-            <a:pPr>
-              <a:spcAft>
-                <a:spcPts val="900"/>
-              </a:spcAft>
-            </a:pPr>
-            <a:r>
-              <a:rPr sz="2000"/>
-              <a:t>3.  </a:t>
-            </a:r>
-            <a:r>
-              <a:rPr sz="1800">
-                <a:latin typeface="Consolas"/>
-              </a:rPr>
-              <a:t>SEND SOMETHING BACK.</a:t>
-            </a:r>
-            <a:r>
-              <a:rPr sz="2000"/>
-              <a:t> With no return path the operator is driving open loop, which is not human-in-the-loop by our definition.</a:t>
-            </a:r>
-          </a:p>
-          <a:p>
-            <a:pPr>
-              <a:spcAft>
-                <a:spcPts val="900"/>
-              </a:spcAft>
-            </a:pPr>
-            <a:r>
-              <a:rPr sz="2000"/>
-              <a:t>Obey those and the transport does not matter: a socket, a serial port, shared memory, a ROS topic, another simulator.</a:t>
-            </a:r>
-          </a:p>
-          <a:p>
-            <a:pPr>
-              <a:spcAft>
-                <a:spcPts val="900"/>
-              </a:spcAft>
-            </a:pPr>
-            <a:r>
-              <a:rPr sz="2000"/>
-              <a:t>This tutorial ships one of these, an operator console on UDP, so a second machine can drive the simulation and watch telemetry come back.</a:t>
+                <a:spcPts val="500"/>
+              </a:spcAft>
+            </a:pPr>
+            <a:r>
+              <a:rPr sz="1400">
+                <a:latin typeface="Consolas"/>
+              </a:rPr>
+              <a:t>ChInteractiveDriver</a:t>
+            </a:r>
+            <a:r>
+              <a:rPr sz="1600"/>
+              <a:t> covers two CLASSES of device, not two devices:</a:t>
+            </a:r>
+          </a:p>
+          <a:p>
+            <a:pPr lvl="1">
+              <a:spcAft>
+                <a:spcPts val="500"/>
+              </a:spcAft>
+            </a:pPr>
+            <a:r>
+              <a:rPr sz="1200">
+                <a:latin typeface="Consolas"/>
+              </a:rPr>
+              <a:t>InputMode_KEYBOARD</a:t>
+            </a:r>
+            <a:r>
+              <a:rPr sz="1400"/>
+              <a:t>  -  with </a:t>
+            </a:r>
+            <a:r>
+              <a:rPr sz="1200">
+                <a:latin typeface="Consolas"/>
+              </a:rPr>
+              <a:t>KeyboardMode_HELD</a:t>
+            </a:r>
+            <a:r>
+              <a:rPr sz="1400"/>
+              <a:t> or </a:t>
+            </a:r>
+            <a:r>
+              <a:rPr sz="1200">
+                <a:latin typeface="Consolas"/>
+              </a:rPr>
+              <a:t>_CUMULATIVE</a:t>
+            </a:r>
+          </a:p>
+          <a:p>
+            <a:pPr lvl="1">
+              <a:spcAft>
+                <a:spcPts val="500"/>
+              </a:spcAft>
+            </a:pPr>
+            <a:r>
+              <a:rPr sz="1200">
+                <a:latin typeface="Consolas"/>
+              </a:rPr>
+              <a:t>InputMode_JOYSTICK</a:t>
+            </a:r>
+            <a:r>
+              <a:rPr sz="1400"/>
+              <a:t>  -  anything the windowing layer enumerates as one</a:t>
+            </a:r>
+          </a:p>
+          <a:p>
+            <a:pPr>
+              <a:spcAft>
+                <a:spcPts val="500"/>
+              </a:spcAft>
+            </a:pPr>
+            <a:r>
+              <a:rPr sz="1600"/>
+              <a:t>A joystick is mapped by a JSON file, not by code: </a:t>
+            </a:r>
+            <a:r>
+              <a:rPr sz="1400">
+                <a:latin typeface="Consolas"/>
+              </a:rPr>
+              <a:t>SetJoystickConfigFile(path)</a:t>
+            </a:r>
+          </a:p>
+          <a:p>
+            <a:pPr lvl="1">
+              <a:spcAft>
+                <a:spcPts val="500"/>
+              </a:spcAft>
+            </a:pPr>
+            <a:r>
+              <a:rPr sz="1400"/>
+              <a:t>mapped axes: steering, throttle, brake, CLUTCH</a:t>
+            </a:r>
+          </a:p>
+          <a:p>
+            <a:pPr lvl="1">
+              <a:spcAft>
+                <a:spcPts val="500"/>
+              </a:spcAft>
+            </a:pPr>
+            <a:r>
+              <a:rPr sz="1400"/>
+              <a:t>mapped buttons: shift up/down, reverse, gears 1-9, manual-gearbox toggle, plus one user callback</a:t>
+            </a:r>
+          </a:p>
+          <a:p>
+            <a:pPr>
+              <a:spcAft>
+                <a:spcPts val="500"/>
+              </a:spcAft>
+            </a:pPr>
+            <a:r>
+              <a:rPr sz="1600"/>
+              <a:t>Four configs ship in </a:t>
+            </a:r>
+            <a:r>
+              <a:rPr sz="1400">
+                <a:latin typeface="Consolas"/>
+              </a:rPr>
+              <a:t>data/vehicle/joystick/</a:t>
+            </a:r>
+            <a:r>
+              <a:rPr sz="1600"/>
+              <a:t>: Default, Logitech RumblePad 2, Xbox One, and Wheel+Pedals+Shifters</a:t>
+            </a:r>
+          </a:p>
+          <a:p>
+            <a:pPr>
+              <a:spcAft>
+                <a:spcPts val="500"/>
+              </a:spcAft>
+            </a:pPr>
+            <a:r>
+              <a:rPr sz="1600"/>
+              <a:t>Each control names its own DEVICE, so a wheel, a pedal box and an H-shifter enumerating as three separate USB devices all map at once</a:t>
+            </a:r>
+          </a:p>
+          <a:p>
+            <a:pPr>
+              <a:spcAft>
+                <a:spcPts val="500"/>
+              </a:spcAft>
+            </a:pPr>
+            <a:r>
+              <a:rPr sz="1600"/>
+              <a:t>Not hypothetical: the remote-driving study on slide 5 ran on a Logitech G29 wheel and pedal set through this path</a:t>
+            </a:r>
+          </a:p>
+          <a:p>
+            <a:pPr>
+              <a:spcAft>
+                <a:spcPts val="500"/>
+              </a:spcAft>
+            </a:pPr>
+            <a:r>
+              <a:rPr sz="1600"/>
+              <a:t>So a G923-class rig is a config file, not a port. The mapping and the semantics are Chrono's and cross-platform; enumerating the device is delegated to the windowing layer, so which platforms see your wheel follows that layer, and I have not tested it here.</a:t>
+            </a:r>
+          </a:p>
+          <a:p>
+            <a:pPr>
+              <a:spcAft>
+                <a:spcPts val="500"/>
+              </a:spcAft>
+            </a:pPr>
+            <a:r>
+              <a:rPr sz="1600"/>
+              <a:t>All of it is exposed to PyChrono.</a:t>
             </a:r>
           </a:p>
         </p:txBody>
@@ -9751,6 +10303,232 @@
 </file>
 
 <file path=ppt/slides/slide22.xml><?xml version="1.0" encoding="utf-8"?>
+<p:sld xmlns:a="http://schemas.openxmlformats.org/drawingml/2006/main" xmlns:p="http://schemas.openxmlformats.org/presentationml/2006/main" xmlns:r="http://schemas.openxmlformats.org/officeDocument/2006/relationships">
+  <p:cSld>
+    <p:spTree>
+      <p:nvGrpSpPr>
+        <p:cNvPr id="1" name=""/>
+        <p:cNvGrpSpPr/>
+        <p:nvPr/>
+      </p:nvGrpSpPr>
+      <p:grpSpPr/>
+      <p:sp>
+        <p:nvSpPr>
+          <p:cNvPr id="2" name="Title 1"/>
+          <p:cNvSpPr>
+            <a:spLocks noGrp="1"/>
+          </p:cNvSpPr>
+          <p:nvPr>
+            <p:ph type="title"/>
+          </p:nvPr>
+        </p:nvSpPr>
+        <p:spPr/>
+        <p:txBody>
+          <a:bodyPr/>
+          <a:lstStyle/>
+          <a:p>
+            <a:r>
+              <a:rPr sz="2600"/>
+              <a:t>And for a device Chrono does not know about</a:t>
+            </a:r>
+          </a:p>
+        </p:txBody>
+      </p:sp>
+      <p:sp>
+        <p:nvSpPr>
+          <p:cNvPr id="3" name="Content Placeholder 2"/>
+          <p:cNvSpPr>
+            <a:spLocks noGrp="1"/>
+          </p:cNvSpPr>
+          <p:nvPr>
+            <p:ph idx="1"/>
+          </p:nvPr>
+        </p:nvSpPr>
+        <p:spPr>
+          <a:xfrm>
+            <a:off x="642552" y="1313782"/>
+            <a:ext cx="10936224" cy="5203976"/>
+          </a:xfrm>
+        </p:spPr>
+        <p:txBody>
+          <a:bodyPr wrap="square"/>
+          <a:lstStyle/>
+          <a:p>
+            <a:pPr>
+              <a:spcAft>
+                <a:spcPts val="900"/>
+              </a:spcAft>
+            </a:pPr>
+            <a:r>
+              <a:rPr sz="2000"/>
+              <a:t>Subclass </a:t>
+            </a:r>
+            <a:r>
+              <a:rPr sz="1800">
+                <a:latin typeface="Consolas"/>
+              </a:rPr>
+              <a:t>ChDriver</a:t>
+            </a:r>
+            <a:r>
+              <a:rPr sz="2000"/>
+              <a:t>, read whatever you like, and obey three rules:</a:t>
+            </a:r>
+          </a:p>
+          <a:p>
+            <a:pPr>
+              <a:spcAft>
+                <a:spcPts val="900"/>
+              </a:spcAft>
+            </a:pPr>
+            <a:r>
+              <a:rPr sz="2000"/>
+              <a:t>1.  </a:t>
+            </a:r>
+            <a:r>
+              <a:rPr sz="1800">
+                <a:latin typeface="Consolas"/>
+              </a:rPr>
+              <a:t>NEVER BLOCK.</a:t>
+            </a:r>
+            <a:r>
+              <a:rPr sz="2000"/>
+              <a:t> A simulation that waits on a human is not real-time. Late input means hold the last value, not stall the loop.</a:t>
+            </a:r>
+          </a:p>
+          <a:p>
+            <a:pPr>
+              <a:spcAft>
+                <a:spcPts val="900"/>
+              </a:spcAft>
+            </a:pPr>
+            <a:r>
+              <a:rPr sz="2000"/>
+              <a:t>2.  </a:t>
+            </a:r>
+            <a:r>
+              <a:rPr sz="1800">
+                <a:latin typeface="Consolas"/>
+              </a:rPr>
+              <a:t>SAMPLE ONCE PER STEP, THEN HOLD.</a:t>
+            </a:r>
+            <a:r>
+              <a:rPr sz="2000"/>
+              <a:t> Read at the top of the step and reuse that value for the whole step, or the physics sees inputs change for reasons the operator can neither perceive nor reproduce.</a:t>
+            </a:r>
+          </a:p>
+          <a:p>
+            <a:pPr>
+              <a:spcAft>
+                <a:spcPts val="900"/>
+              </a:spcAft>
+            </a:pPr>
+            <a:r>
+              <a:rPr sz="2000"/>
+              <a:t>3.  </a:t>
+            </a:r>
+            <a:r>
+              <a:rPr sz="1800">
+                <a:latin typeface="Consolas"/>
+              </a:rPr>
+              <a:t>SEND SOMETHING BACK.</a:t>
+            </a:r>
+            <a:r>
+              <a:rPr sz="2000"/>
+              <a:t> With no return path the operator is driving open loop, which is not human-in-the-loop by our definition.</a:t>
+            </a:r>
+          </a:p>
+          <a:p>
+            <a:pPr>
+              <a:spcAft>
+                <a:spcPts val="900"/>
+              </a:spcAft>
+            </a:pPr>
+            <a:r>
+              <a:rPr sz="2000"/>
+              <a:t>Obey those and the transport does not matter: a socket, a serial port, shared memory, a ROS topic, another simulator.</a:t>
+            </a:r>
+          </a:p>
+          <a:p>
+            <a:pPr>
+              <a:spcAft>
+                <a:spcPts val="900"/>
+              </a:spcAft>
+            </a:pPr>
+            <a:r>
+              <a:rPr sz="2000"/>
+              <a:t>This tutorial ships one of these, an operator console on UDP, so a second machine can drive the simulation and watch telemetry come back.</a:t>
+            </a:r>
+          </a:p>
+        </p:txBody>
+      </p:sp>
+      <p:sp>
+        <p:nvSpPr>
+          <p:cNvPr id="4" name="Footer"/>
+          <p:cNvSpPr txBox="1"/>
+          <p:nvPr/>
+        </p:nvSpPr>
+        <p:spPr>
+          <a:xfrm>
+            <a:off x="310896" y="6647688"/>
+            <a:ext cx="11640312" cy="192024"/>
+          </a:xfrm>
+          <a:prstGeom prst="rect">
+            <a:avLst/>
+          </a:prstGeom>
+          <a:noFill/>
+        </p:spPr>
+        <p:txBody>
+          <a:bodyPr wrap="none">
+            <a:spAutoFit/>
+          </a:bodyPr>
+          <a:lstStyle/>
+          <a:p>
+            <a:r>
+              <a:rPr sz="1000"/>
+              <a:t>University of Wisconsin - Madison</a:t>
+            </a:r>
+          </a:p>
+        </p:txBody>
+      </p:sp>
+      <p:sp>
+        <p:nvSpPr>
+          <p:cNvPr id="5" name="PageNo"/>
+          <p:cNvSpPr txBox="1"/>
+          <p:nvPr/>
+        </p:nvSpPr>
+        <p:spPr>
+          <a:xfrm>
+            <a:off x="10250424" y="6647688"/>
+            <a:ext cx="1709928" cy="192024"/>
+          </a:xfrm>
+          <a:prstGeom prst="rect">
+            <a:avLst/>
+          </a:prstGeom>
+          <a:noFill/>
+        </p:spPr>
+        <p:txBody>
+          <a:bodyPr wrap="none">
+            <a:spAutoFit/>
+          </a:bodyPr>
+          <a:lstStyle/>
+          <a:p>
+            <a:pPr algn="r"/>
+            <a:r>
+              <a:rPr sz="1000"/>
+              <a:t>22</a:t>
+            </a:r>
+          </a:p>
+        </p:txBody>
+      </p:sp>
+    </p:spTree>
+  </p:cSld>
+  <p:clrMapOvr>
+    <a:masterClrMapping/>
+  </p:clrMapOvr>
+</p:sld>
+</file>
+
+<file path=ppt/slides/slide23.xml><?xml version="1.0" encoding="utf-8"?>
 <p:sld xmlns:a="http://schemas.openxmlformats.org/drawingml/2006/main" xmlns:p="http://schemas.openxmlformats.org/presentationml/2006/main" xmlns:r="http://schemas.openxmlformats.org/officeDocument/2006/relationships">
   <p:cSld>
     <p:spTree>
@@ -9981,125 +10759,6 @@
             <a:pPr algn="r"/>
             <a:r>
               <a:rPr sz="1000"/>
-              <a:t>22</a:t>
-            </a:r>
-          </a:p>
-        </p:txBody>
-      </p:sp>
-    </p:spTree>
-  </p:cSld>
-  <p:clrMapOvr>
-    <a:masterClrMapping/>
-  </p:clrMapOvr>
-</p:sld>
-</file>
-
-<file path=ppt/slides/slide23.xml><?xml version="1.0" encoding="utf-8"?>
-<p:sld xmlns:a="http://schemas.openxmlformats.org/drawingml/2006/main" xmlns:p="http://schemas.openxmlformats.org/presentationml/2006/main" xmlns:r="http://schemas.openxmlformats.org/officeDocument/2006/relationships">
-  <p:cSld>
-    <p:spTree>
-      <p:nvGrpSpPr>
-        <p:cNvPr id="1" name=""/>
-        <p:cNvGrpSpPr/>
-        <p:nvPr/>
-      </p:nvGrpSpPr>
-      <p:grpSpPr/>
-      <p:sp>
-        <p:nvSpPr>
-          <p:cNvPr id="2" name="Title 1"/>
-          <p:cNvSpPr>
-            <a:spLocks noGrp="1"/>
-          </p:cNvSpPr>
-          <p:nvPr>
-            <p:ph type="title"/>
-          </p:nvPr>
-        </p:nvSpPr>
-        <p:spPr/>
-        <p:txBody>
-          <a:bodyPr/>
-          <a:lstStyle/>
-          <a:p>
-            <a:r>
-              <a:t>Reaching into the scene with a mouse</a:t>
-            </a:r>
-          </a:p>
-        </p:txBody>
-      </p:sp>
-      <p:sp>
-        <p:nvSpPr>
-          <p:cNvPr id="3" name="Text Placeholder 2"/>
-          <p:cNvSpPr>
-            <a:spLocks noGrp="1"/>
-          </p:cNvSpPr>
-          <p:nvPr>
-            <p:ph type="body" idx="1"/>
-          </p:nvPr>
-        </p:nvSpPr>
-        <p:spPr/>
-        <p:txBody>
-          <a:bodyPr/>
-          <a:lstStyle/>
-          <a:p>
-            <a:r>
-              <a:t>what Chrono provides today, the one line it is missing, and what that buys</a:t>
-            </a:r>
-          </a:p>
-        </p:txBody>
-      </p:sp>
-      <p:sp>
-        <p:nvSpPr>
-          <p:cNvPr id="4" name="Footer"/>
-          <p:cNvSpPr txBox="1"/>
-          <p:nvPr/>
-        </p:nvSpPr>
-        <p:spPr>
-          <a:xfrm>
-            <a:off x="310896" y="6647688"/>
-            <a:ext cx="11640312" cy="192024"/>
-          </a:xfrm>
-          <a:prstGeom prst="rect">
-            <a:avLst/>
-          </a:prstGeom>
-          <a:noFill/>
-        </p:spPr>
-        <p:txBody>
-          <a:bodyPr wrap="none">
-            <a:spAutoFit/>
-          </a:bodyPr>
-          <a:lstStyle/>
-          <a:p>
-            <a:r>
-              <a:rPr sz="1000"/>
-              <a:t>University of Wisconsin - Madison</a:t>
-            </a:r>
-          </a:p>
-        </p:txBody>
-      </p:sp>
-      <p:sp>
-        <p:nvSpPr>
-          <p:cNvPr id="5" name="PageNo"/>
-          <p:cNvSpPr txBox="1"/>
-          <p:nvPr/>
-        </p:nvSpPr>
-        <p:spPr>
-          <a:xfrm>
-            <a:off x="10250424" y="6647688"/>
-            <a:ext cx="1709928" cy="192024"/>
-          </a:xfrm>
-          <a:prstGeom prst="rect">
-            <a:avLst/>
-          </a:prstGeom>
-          <a:noFill/>
-        </p:spPr>
-        <p:txBody>
-          <a:bodyPr wrap="none">
-            <a:spAutoFit/>
-          </a:bodyPr>
-          <a:lstStyle/>
-          <a:p>
-            <a:pPr algn="r"/>
-            <a:r>
-              <a:rPr sz="1000"/>
               <a:t>23</a:t>
             </a:r>
           </a:p>
@@ -10139,152 +10798,28 @@
           <a:lstStyle/>
           <a:p>
             <a:r>
-              <a:rPr sz="2600"/>
-              <a:t>What Chrono gives you today</a:t>
-            </a:r>
-          </a:p>
-        </p:txBody>
-      </p:sp>
-      <p:sp>
-        <p:nvSpPr>
-          <p:cNvPr id="3" name="Content Placeholder 2"/>
+              <a:t>Reaching into the scene with a mouse</a:t>
+            </a:r>
+          </a:p>
+        </p:txBody>
+      </p:sp>
+      <p:sp>
+        <p:nvSpPr>
+          <p:cNvPr id="3" name="Text Placeholder 2"/>
           <p:cNvSpPr>
             <a:spLocks noGrp="1"/>
           </p:cNvSpPr>
           <p:nvPr>
-            <p:ph idx="1"/>
+            <p:ph type="body" idx="1"/>
           </p:nvPr>
         </p:nvSpPr>
-        <p:spPr>
-          <a:xfrm>
-            <a:off x="642552" y="1313782"/>
-            <a:ext cx="10936224" cy="5203976"/>
-          </a:xfrm>
-        </p:spPr>
-        <p:txBody>
-          <a:bodyPr wrap="square"/>
-          <a:lstStyle/>
-          <a:p>
-            <a:pPr>
-              <a:spcAft>
-                <a:spcPts val="900"/>
-              </a:spcAft>
-            </a:pPr>
-            <a:r>
-              <a:rPr sz="1800">
-                <a:latin typeface="Consolas"/>
-              </a:rPr>
-              <a:t>ChRealtimeStepTimer</a:t>
-            </a:r>
-            <a:r>
-              <a:rPr sz="2000"/>
-              <a:t>  -  the pacing, exposed to Python</a:t>
-            </a:r>
-          </a:p>
-          <a:p>
-            <a:pPr>
-              <a:spcAft>
-                <a:spcPts val="900"/>
-              </a:spcAft>
-            </a:pPr>
-            <a:r>
-              <a:rPr sz="1800">
-                <a:latin typeface="Consolas"/>
-              </a:rPr>
-              <a:t>ChInteractiveDriver</a:t>
-            </a:r>
-            <a:r>
-              <a:rPr sz="2000"/>
-              <a:t>  -  keyboard and joystick input, with </a:t>
-            </a:r>
-            <a:r>
-              <a:rPr sz="1800">
-                <a:latin typeface="Consolas"/>
-              </a:rPr>
-              <a:t>KeyboardMode::HELD</a:t>
-            </a:r>
-          </a:p>
-          <a:p>
-            <a:pPr>
-              <a:spcAft>
-                <a:spcPts val="900"/>
-              </a:spcAft>
-            </a:pPr>
-            <a:r>
-              <a:rPr sz="1800">
-                <a:latin typeface="Consolas"/>
-              </a:rPr>
-              <a:t>ChCollisionSystem::RayHit</a:t>
-            </a:r>
-            <a:r>
-              <a:rPr sz="2000"/>
-              <a:t>  -  click-to-pick, exposed to Python</a:t>
-            </a:r>
-          </a:p>
-          <a:p>
-            <a:pPr>
-              <a:spcAft>
-                <a:spcPts val="900"/>
-              </a:spcAft>
-            </a:pPr>
-            <a:r>
-              <a:rPr sz="1800">
-                <a:latin typeface="Consolas"/>
-              </a:rPr>
-              <a:t>AccumulateForce</a:t>
-            </a:r>
-            <a:r>
-              <a:rPr sz="2000"/>
-              <a:t>, </a:t>
-            </a:r>
-            <a:r>
-              <a:rPr sz="1800">
-                <a:latin typeface="Consolas"/>
-              </a:rPr>
-              <a:t>ChLinkTSDA</a:t>
-            </a:r>
-            <a:r>
-              <a:rPr sz="2000"/>
-              <a:t>  -  a human's pull as a term in the dynamics</a:t>
-            </a:r>
-          </a:p>
-          <a:p>
-            <a:pPr>
-              <a:spcAft>
-                <a:spcPts val="900"/>
-              </a:spcAft>
-            </a:pPr>
-            <a:r>
-              <a:rPr sz="1800">
-                <a:latin typeface="Consolas"/>
-              </a:rPr>
-              <a:t>ChVisualSystemIrrlicht::AddUserEventReceiver(IEventReceiver*)</a:t>
-            </a:r>
-            <a:r>
-              <a:rPr sz="2000"/>
-              <a:t>  -  the socket for any input device, and it IS bound in Python</a:t>
-            </a:r>
-          </a:p>
-          <a:p>
-            <a:pPr>
-              <a:spcAft>
-                <a:spcPts val="900"/>
-              </a:spcAft>
-            </a:pPr>
-            <a:r>
-              <a:rPr sz="2000"/>
-              <a:t>What is NOT there: any built-in mouse pick-and-drag. No module in the tree implements one.</a:t>
-            </a:r>
-          </a:p>
-          <a:p>
-            <a:pPr>
-              <a:spcAft>
-                <a:spcPts val="900"/>
-              </a:spcAft>
-            </a:pPr>
-            <a:r>
-              <a:rPr sz="2000"/>
-              <a:t>That last line is the gap this tutorial walks into. Everything needed to build one is already exposed; what is missing is the ability to receive the mouse event in the first place.</a:t>
+        <p:spPr/>
+        <p:txBody>
+          <a:bodyPr/>
+          <a:lstStyle/>
+          <a:p>
+            <a:r>
+              <a:t>what Chrono provides today, the one line it is missing, and what that buys</a:t>
             </a:r>
           </a:p>
         </p:txBody>
@@ -10383,757 +10918,158 @@
           <a:p>
             <a:r>
               <a:rPr sz="2600"/>
-              <a:t>The gap, and the one line that closes it (native_pick.py lines 10 to 26)</a:t>
-            </a:r>
-          </a:p>
-        </p:txBody>
-      </p:sp>
-      <p:sp>
-        <p:nvSpPr>
-          <p:cNvPr id="3" name="CodeBox"/>
-          <p:cNvSpPr txBox="1"/>
-          <p:nvPr/>
+              <a:t>What Chrono gives you today</a:t>
+            </a:r>
+          </a:p>
+        </p:txBody>
+      </p:sp>
+      <p:sp>
+        <p:nvSpPr>
+          <p:cNvPr id="3" name="Content Placeholder 2"/>
+          <p:cNvSpPr>
+            <a:spLocks noGrp="1"/>
+          </p:cNvSpPr>
+          <p:nvPr>
+            <p:ph idx="1"/>
+          </p:nvPr>
         </p:nvSpPr>
         <p:spPr>
           <a:xfrm>
-            <a:off x="0" y="1207008"/>
-            <a:ext cx="12188952" cy="3957319"/>
+            <a:off x="642552" y="1313782"/>
+            <a:ext cx="10936224" cy="5203976"/>
           </a:xfrm>
-          <a:prstGeom prst="rect">
-            <a:avLst/>
-          </a:prstGeom>
-          <a:solidFill>
-            <a:srgbClr val="000000"/>
-          </a:solidFill>
         </p:spPr>
         <p:txBody>
-          <a:bodyPr wrap="none" lIns="320040" tIns="91440">
-            <a:spAutoFit/>
-          </a:bodyPr>
-          <a:lstStyle/>
-          <a:p>
-            <a:pPr>
-              <a:spcAft>
-                <a:spcPts val="0"/>
-              </a:spcAft>
-            </a:pPr>
-            <a:r>
-              <a:rPr sz="800">
-                <a:solidFill>
-                  <a:srgbClr val="7FAF7F"/>
-                </a:solidFill>
-                <a:latin typeface="Consolas"/>
-              </a:rPr>
-              <a:t># chrono_swig/interface/irrlicht/ChModuleIrrlicht.i</a:t>
-            </a:r>
-          </a:p>
-          <a:p>
-            <a:pPr>
-              <a:spcAft>
-                <a:spcPts val="0"/>
-              </a:spcAft>
-            </a:pPr>
-            <a:r>
-              <a:rPr sz="800">
-                <a:solidFill>
-                  <a:srgbClr val="CCCCCC"/>
-                </a:solidFill>
-                <a:latin typeface="Consolas"/>
-              </a:rPr>
-              <a:t>+%</a:t>
-            </a:r>
-            <a:r>
-              <a:rPr sz="800">
-                <a:solidFill>
-                  <a:srgbClr val="7FC7E8"/>
-                </a:solidFill>
-                <a:latin typeface="Consolas"/>
-              </a:rPr>
-              <a:t>feature</a:t>
-            </a:r>
-            <a:r>
-              <a:rPr sz="800">
-                <a:solidFill>
-                  <a:srgbClr val="CCCCCC"/>
-                </a:solidFill>
-                <a:latin typeface="Consolas"/>
-              </a:rPr>
-              <a:t>(</a:t>
-            </a:r>
-            <a:r>
-              <a:rPr sz="800">
-                <a:solidFill>
-                  <a:srgbClr val="D8A0C0"/>
-                </a:solidFill>
-                <a:latin typeface="Consolas"/>
-              </a:rPr>
-              <a:t>"director"</a:t>
-            </a:r>
-            <a:r>
-              <a:rPr sz="800">
-                <a:solidFill>
-                  <a:srgbClr val="CCCCCC"/>
-                </a:solidFill>
-                <a:latin typeface="Consolas"/>
-              </a:rPr>
-              <a:t>) irr::IEventReceiver;</a:t>
-            </a:r>
-          </a:p>
-          <a:p>
-            <a:pPr>
-              <a:spcAft>
-                <a:spcPts val="0"/>
-              </a:spcAft>
-            </a:pPr>
-            <a:r>
-              <a:rPr sz="800">
-                <a:solidFill>
-                  <a:srgbClr val="CCCCCC"/>
-                </a:solidFill>
-                <a:latin typeface="Consolas"/>
-              </a:rPr>
-              <a:t>%include </a:t>
-            </a:r>
-            <a:r>
-              <a:rPr sz="800">
-                <a:solidFill>
-                  <a:srgbClr val="D8A0C0"/>
-                </a:solidFill>
-                <a:latin typeface="Consolas"/>
-              </a:rPr>
-              <a:t>"IEventReceiver.h"</a:t>
-            </a:r>
-          </a:p>
-          <a:p>
-            <a:pPr>
-              <a:spcAft>
-                <a:spcPts val="0"/>
-              </a:spcAft>
-            </a:pPr>
-            <a:r>
-              <a:rPr sz="800">
-                <a:solidFill>
-                  <a:srgbClr val="CCCCCC"/>
-                </a:solidFill>
-                <a:latin typeface="Consolas"/>
-              </a:rPr>
-              <a:t> </a:t>
-            </a:r>
-          </a:p>
-          <a:p>
-            <a:pPr>
-              <a:spcAft>
-                <a:spcPts val="0"/>
-              </a:spcAft>
-            </a:pPr>
-            <a:r>
-              <a:rPr sz="800">
-                <a:solidFill>
-                  <a:srgbClr val="7FAF7F"/>
-                </a:solidFill>
-                <a:latin typeface="Consolas"/>
-              </a:rPr>
-              <a:t># The module ALREADY compiles with directors enabled:</a:t>
-            </a:r>
-          </a:p>
-          <a:p>
-            <a:pPr>
-              <a:spcAft>
-                <a:spcPts val="0"/>
-              </a:spcAft>
-            </a:pPr>
-            <a:r>
-              <a:rPr sz="800">
-                <a:solidFill>
-                  <a:srgbClr val="7FAF7F"/>
-                </a:solidFill>
-                <a:latin typeface="Consolas"/>
-              </a:rPr>
-              <a:t>#     %module(directors="1", threads="1") irrlicht</a:t>
-            </a:r>
-          </a:p>
-          <a:p>
-            <a:pPr>
-              <a:spcAft>
-                <a:spcPts val="0"/>
-              </a:spcAft>
-            </a:pPr>
-            <a:r>
-              <a:rPr sz="800">
-                <a:solidFill>
-                  <a:srgbClr val="7FAF7F"/>
-                </a:solidFill>
-                <a:latin typeface="Consolas"/>
-              </a:rPr>
-              <a:t># and AddUserEventReceiver is ALREADY bound. Without the</a:t>
-            </a:r>
-          </a:p>
-          <a:p>
-            <a:pPr>
-              <a:spcAft>
-                <a:spcPts val="0"/>
-              </a:spcAft>
-            </a:pPr>
-            <a:r>
-              <a:rPr sz="800">
-                <a:solidFill>
-                  <a:srgbClr val="7FAF7F"/>
-                </a:solidFill>
-                <a:latin typeface="Consolas"/>
-              </a:rPr>
-              <a:t># director, though, Python gets an abstract class:</a:t>
-            </a:r>
-          </a:p>
-          <a:p>
-            <a:pPr>
-              <a:spcAft>
-                <a:spcPts val="0"/>
-              </a:spcAft>
-            </a:pPr>
-            <a:r>
-              <a:rPr sz="800">
-                <a:solidFill>
-                  <a:srgbClr val="7FAF7F"/>
-                </a:solidFill>
-                <a:latin typeface="Consolas"/>
-              </a:rPr>
-              <a:t>#     &gt;&gt;&gt; ci.IEventReceiver()</a:t>
-            </a:r>
-          </a:p>
-          <a:p>
-            <a:pPr>
-              <a:spcAft>
-                <a:spcPts val="0"/>
-              </a:spcAft>
-            </a:pPr>
-            <a:r>
-              <a:rPr sz="800">
-                <a:solidFill>
-                  <a:srgbClr val="7FAF7F"/>
-                </a:solidFill>
-                <a:latin typeface="Consolas"/>
-              </a:rPr>
-              <a:t>#     AttributeError: No constructor defined - class is abstract</a:t>
-            </a:r>
-          </a:p>
-          <a:p>
-            <a:pPr>
-              <a:spcAft>
-                <a:spcPts val="0"/>
-              </a:spcAft>
-            </a:pPr>
-            <a:r>
-              <a:rPr sz="800">
-                <a:solidFill>
-                  <a:srgbClr val="7FAF7F"/>
-                </a:solidFill>
-                <a:latin typeface="Consolas"/>
-              </a:rPr>
-              <a:t># so there is a socket, and nothing you can plug into it.</a:t>
-            </a:r>
-          </a:p>
-          <a:p>
-            <a:pPr>
-              <a:spcAft>
-                <a:spcPts val="0"/>
-              </a:spcAft>
-            </a:pPr>
-            <a:r>
-              <a:rPr sz="800">
-                <a:solidFill>
-                  <a:srgbClr val="CCCCCC"/>
-                </a:solidFill>
-                <a:latin typeface="Consolas"/>
-              </a:rPr>
-              <a:t> </a:t>
-            </a:r>
-          </a:p>
-          <a:p>
-            <a:pPr>
-              <a:spcAft>
-                <a:spcPts val="0"/>
-              </a:spcAft>
-            </a:pPr>
-            <a:r>
-              <a:rPr sz="800">
-                <a:solidFill>
-                  <a:srgbClr val="CCCCCC"/>
-                </a:solidFill>
-                <a:latin typeface="Consolas"/>
-              </a:rPr>
-              <a:t>class </a:t>
-            </a:r>
-            <a:r>
-              <a:rPr sz="800">
-                <a:solidFill>
-                  <a:srgbClr val="7FC7E8"/>
-                </a:solidFill>
-                <a:latin typeface="Consolas"/>
-              </a:rPr>
-              <a:t>MouseReceiver</a:t>
-            </a:r>
-            <a:r>
-              <a:rPr sz="800">
-                <a:solidFill>
-                  <a:srgbClr val="CCCCCC"/>
-                </a:solidFill>
-                <a:latin typeface="Consolas"/>
-              </a:rPr>
-              <a:t>(irr.IEventReceiver):</a:t>
-            </a:r>
-          </a:p>
-          <a:p>
-            <a:pPr>
-              <a:spcAft>
-                <a:spcPts val="0"/>
-              </a:spcAft>
-            </a:pPr>
-            <a:r>
-              <a:rPr sz="800">
-                <a:solidFill>
-                  <a:srgbClr val="CCCCCC"/>
-                </a:solidFill>
-                <a:latin typeface="Consolas"/>
-              </a:rPr>
-              <a:t>    </a:t>
-            </a:r>
-            <a:r>
-              <a:rPr sz="800">
-                <a:solidFill>
-                  <a:srgbClr val="D8A0C0"/>
-                </a:solidFill>
-                <a:latin typeface="Consolas"/>
-              </a:rPr>
-              <a:t>""</a:t>
-            </a:r>
-            <a:r>
-              <a:rPr sz="800">
-                <a:solidFill>
-                  <a:srgbClr val="D8A0C0"/>
-                </a:solidFill>
-                <a:latin typeface="Consolas"/>
-              </a:rPr>
-              <a:t>"No Quartz, no CGWindowList, no NSEvent. No macOS. Just Irrlicht."</a:t>
-            </a:r>
-            <a:r>
-              <a:rPr sz="800">
-                <a:solidFill>
-                  <a:srgbClr val="D8A0C0"/>
-                </a:solidFill>
-                <a:latin typeface="Consolas"/>
-              </a:rPr>
-              <a:t>""</a:t>
-            </a:r>
-          </a:p>
-          <a:p>
-            <a:pPr>
-              <a:spcAft>
-                <a:spcPts val="0"/>
-              </a:spcAft>
-            </a:pPr>
-            <a:r>
-              <a:rPr sz="800">
-                <a:solidFill>
-                  <a:srgbClr val="CCCCCC"/>
-                </a:solidFill>
-                <a:latin typeface="Consolas"/>
-              </a:rPr>
-              <a:t> </a:t>
-            </a:r>
-          </a:p>
-          <a:p>
-            <a:pPr>
-              <a:spcAft>
-                <a:spcPts val="0"/>
-              </a:spcAft>
-            </a:pPr>
-            <a:r>
-              <a:rPr sz="800">
-                <a:solidFill>
-                  <a:srgbClr val="CCCCCC"/>
-                </a:solidFill>
-                <a:latin typeface="Consolas"/>
-              </a:rPr>
-              <a:t>    def </a:t>
-            </a:r>
-            <a:r>
-              <a:rPr sz="800">
-                <a:solidFill>
-                  <a:srgbClr val="7FC7E8"/>
-                </a:solidFill>
-                <a:latin typeface="Consolas"/>
-              </a:rPr>
-              <a:t>__init__</a:t>
-            </a:r>
-            <a:r>
-              <a:rPr sz="800">
-                <a:solidFill>
-                  <a:srgbClr val="CCCCCC"/>
-                </a:solidFill>
-                <a:latin typeface="Consolas"/>
-              </a:rPr>
-              <a:t>(self):</a:t>
-            </a:r>
-          </a:p>
-          <a:p>
-            <a:pPr>
-              <a:spcAft>
-                <a:spcPts val="0"/>
-              </a:spcAft>
-            </a:pPr>
-            <a:r>
-              <a:rPr sz="800">
-                <a:solidFill>
-                  <a:srgbClr val="CCCCCC"/>
-                </a:solidFill>
-                <a:latin typeface="Consolas"/>
-              </a:rPr>
-              <a:t>        </a:t>
-            </a:r>
-            <a:r>
-              <a:rPr sz="800">
-                <a:solidFill>
-                  <a:srgbClr val="7FC7E8"/>
-                </a:solidFill>
-                <a:latin typeface="Consolas"/>
-              </a:rPr>
-              <a:t>super</a:t>
-            </a:r>
-            <a:r>
-              <a:rPr sz="800">
-                <a:solidFill>
-                  <a:srgbClr val="CCCCCC"/>
-                </a:solidFill>
-                <a:latin typeface="Consolas"/>
-              </a:rPr>
-              <a:t>().</a:t>
-            </a:r>
-            <a:r>
-              <a:rPr sz="800">
-                <a:solidFill>
-                  <a:srgbClr val="7FC7E8"/>
-                </a:solidFill>
-                <a:latin typeface="Consolas"/>
-              </a:rPr>
-              <a:t>__init__</a:t>
-            </a:r>
-            <a:r>
-              <a:rPr sz="800">
-                <a:solidFill>
-                  <a:srgbClr val="CCCCCC"/>
-                </a:solidFill>
-                <a:latin typeface="Consolas"/>
-              </a:rPr>
-              <a:t>()</a:t>
-            </a:r>
-          </a:p>
-          <a:p>
-            <a:pPr>
-              <a:spcAft>
-                <a:spcPts val="0"/>
-              </a:spcAft>
-            </a:pPr>
-            <a:r>
-              <a:rPr sz="800">
-                <a:solidFill>
-                  <a:srgbClr val="CCCCCC"/>
-                </a:solidFill>
-                <a:latin typeface="Consolas"/>
-              </a:rPr>
-              <a:t>        self.x = self.y = 0</a:t>
-            </a:r>
-          </a:p>
-          <a:p>
-            <a:pPr>
-              <a:spcAft>
-                <a:spcPts val="0"/>
-              </a:spcAft>
-            </a:pPr>
-            <a:r>
-              <a:rPr sz="800">
-                <a:solidFill>
-                  <a:srgbClr val="CCCCCC"/>
-                </a:solidFill>
-                <a:latin typeface="Consolas"/>
-              </a:rPr>
-              <a:t>        self.down = False</a:t>
-            </a:r>
-          </a:p>
-          <a:p>
-            <a:pPr>
-              <a:spcAft>
-                <a:spcPts val="0"/>
-              </a:spcAft>
-            </a:pPr>
-            <a:r>
-              <a:rPr sz="800">
-                <a:solidFill>
-                  <a:srgbClr val="CCCCCC"/>
-                </a:solidFill>
-                <a:latin typeface="Consolas"/>
-              </a:rPr>
-              <a:t>        self.pressed = False          </a:t>
-            </a:r>
-            <a:r>
-              <a:rPr sz="800">
-                <a:solidFill>
-                  <a:srgbClr val="7FAF7F"/>
-                </a:solidFill>
-                <a:latin typeface="Consolas"/>
-              </a:rPr>
-              <a:t># edge, consumed by the loop</a:t>
-            </a:r>
-          </a:p>
-          <a:p>
-            <a:pPr>
-              <a:spcAft>
-                <a:spcPts val="0"/>
-              </a:spcAft>
-            </a:pPr>
-            <a:r>
-              <a:rPr sz="800">
-                <a:solidFill>
-                  <a:srgbClr val="CCCCCC"/>
-                </a:solidFill>
-                <a:latin typeface="Consolas"/>
-              </a:rPr>
-              <a:t>        self.keys = </a:t>
-            </a:r>
-            <a:r>
-              <a:rPr sz="800">
-                <a:solidFill>
-                  <a:srgbClr val="7FC7E8"/>
-                </a:solidFill>
-                <a:latin typeface="Consolas"/>
-              </a:rPr>
-              <a:t>set</a:t>
-            </a:r>
-            <a:r>
-              <a:rPr sz="800">
-                <a:solidFill>
-                  <a:srgbClr val="CCCCCC"/>
-                </a:solidFill>
-                <a:latin typeface="Consolas"/>
-              </a:rPr>
-              <a:t>()</a:t>
-            </a:r>
-          </a:p>
-          <a:p>
-            <a:pPr>
-              <a:spcAft>
-                <a:spcPts val="0"/>
-              </a:spcAft>
-            </a:pPr>
-            <a:r>
-              <a:rPr sz="800">
-                <a:solidFill>
-                  <a:srgbClr val="CCCCCC"/>
-                </a:solidFill>
-                <a:latin typeface="Consolas"/>
-              </a:rPr>
-              <a:t> </a:t>
-            </a:r>
-          </a:p>
-          <a:p>
-            <a:pPr>
-              <a:spcAft>
-                <a:spcPts val="0"/>
-              </a:spcAft>
-            </a:pPr>
-            <a:r>
-              <a:rPr sz="800">
-                <a:solidFill>
-                  <a:srgbClr val="CCCCCC"/>
-                </a:solidFill>
-                <a:latin typeface="Consolas"/>
-              </a:rPr>
-              <a:t>    def </a:t>
-            </a:r>
-            <a:r>
-              <a:rPr sz="800">
-                <a:solidFill>
-                  <a:srgbClr val="7FC7E8"/>
-                </a:solidFill>
-                <a:latin typeface="Consolas"/>
-              </a:rPr>
-              <a:t>OnEvent</a:t>
-            </a:r>
-            <a:r>
-              <a:rPr sz="800">
-                <a:solidFill>
-                  <a:srgbClr val="CCCCCC"/>
-                </a:solidFill>
-                <a:latin typeface="Consolas"/>
-              </a:rPr>
-              <a:t>(self, ev):</a:t>
-            </a:r>
-          </a:p>
-          <a:p>
-            <a:pPr>
-              <a:spcAft>
-                <a:spcPts val="0"/>
-              </a:spcAft>
-            </a:pPr>
-            <a:r>
-              <a:rPr sz="800">
-                <a:solidFill>
-                  <a:srgbClr val="CCCCCC"/>
-                </a:solidFill>
-                <a:latin typeface="Consolas"/>
-              </a:rPr>
-              <a:t>        if ev.EventType == irr.EET_MOUSE_INPUT_EVENT:</a:t>
-            </a:r>
-          </a:p>
-          <a:p>
-            <a:pPr>
-              <a:spcAft>
-                <a:spcPts val="0"/>
-              </a:spcAft>
-            </a:pPr>
-            <a:r>
-              <a:rPr sz="800">
-                <a:solidFill>
-                  <a:srgbClr val="CCCCCC"/>
-                </a:solidFill>
-                <a:latin typeface="Consolas"/>
-              </a:rPr>
-              <a:t>            self.x, self.y = ev.MouseInput.X, ev.MouseInput.Y</a:t>
-            </a:r>
-          </a:p>
-          <a:p>
-            <a:pPr>
-              <a:spcAft>
-                <a:spcPts val="0"/>
-              </a:spcAft>
-            </a:pPr>
-            <a:r>
-              <a:rPr sz="800">
-                <a:solidFill>
-                  <a:srgbClr val="CCCCCC"/>
-                </a:solidFill>
-                <a:latin typeface="Consolas"/>
-              </a:rPr>
-              <a:t>            if ev.MouseInput.Event == irr.EMIE_LMOUSE_PRESSED_DOWN:</a:t>
-            </a:r>
-          </a:p>
-          <a:p>
-            <a:pPr>
-              <a:spcAft>
-                <a:spcPts val="0"/>
-              </a:spcAft>
-            </a:pPr>
-            <a:r>
-              <a:rPr sz="800">
-                <a:solidFill>
-                  <a:srgbClr val="CCCCCC"/>
-                </a:solidFill>
-                <a:latin typeface="Consolas"/>
-              </a:rPr>
-              <a:t>                self.down = self.pressed = True</a:t>
-            </a:r>
-          </a:p>
-          <a:p>
-            <a:pPr>
-              <a:spcAft>
-                <a:spcPts val="0"/>
-              </a:spcAft>
-            </a:pPr>
-            <a:r>
-              <a:rPr sz="800">
-                <a:solidFill>
-                  <a:srgbClr val="CCCCCC"/>
-                </a:solidFill>
-                <a:latin typeface="Consolas"/>
-              </a:rPr>
-              <a:t>            elif ev.MouseInput.Event == irr.EMIE_LMOUSE_LEFT_UP:</a:t>
-            </a:r>
-          </a:p>
-          <a:p>
-            <a:pPr>
-              <a:spcAft>
-                <a:spcPts val="0"/>
-              </a:spcAft>
-            </a:pPr>
-            <a:r>
-              <a:rPr sz="800">
-                <a:solidFill>
-                  <a:srgbClr val="CCCCCC"/>
-                </a:solidFill>
-                <a:latin typeface="Consolas"/>
-              </a:rPr>
-              <a:t>                self.down = False</a:t>
-            </a:r>
-          </a:p>
-        </p:txBody>
-      </p:sp>
-      <p:sp>
-        <p:nvSpPr>
-          <p:cNvPr id="4" name="NoteBox"/>
-          <p:cNvSpPr txBox="1"/>
-          <p:nvPr/>
-        </p:nvSpPr>
-        <p:spPr>
-          <a:xfrm>
-            <a:off x="402336" y="5274056"/>
-            <a:ext cx="11393424" cy="987551"/>
-          </a:xfrm>
-          <a:prstGeom prst="rect">
-            <a:avLst/>
-          </a:prstGeom>
-          <a:noFill/>
-        </p:spPr>
-        <p:txBody>
-          <a:bodyPr wrap="square">
-            <a:spAutoFit/>
-          </a:bodyPr>
-          <a:lstStyle/>
-          <a:p>
-            <a:pPr>
-              <a:spcAft>
-                <a:spcPts val="400"/>
-              </a:spcAft>
-            </a:pPr>
-            <a:r>
-              <a:rPr sz="1600"/>
-              <a:t>Without it, reading the mouse means going around Chrono to the operating system: </a:t>
-            </a:r>
-            <a:r>
-              <a:rPr sz="1400">
-                <a:latin typeface="Consolas"/>
-              </a:rPr>
-              <a:t>135 lines</a:t>
-            </a:r>
-            <a:r>
-              <a:rPr sz="1600"/>
-              <a:t>, macOS only, and it breaks when another window takes focus.</a:t>
-            </a:r>
-          </a:p>
-          <a:p>
-            <a:pPr>
-              <a:spcAft>
-                <a:spcPts val="400"/>
-              </a:spcAft>
-            </a:pPr>
-            <a:r>
-              <a:rPr sz="1600"/>
-              <a:t>With it, the same capability is </a:t>
-            </a:r>
-            <a:r>
-              <a:rPr sz="1400">
-                <a:latin typeface="Consolas"/>
-              </a:rPr>
-              <a:t>56 lines</a:t>
-            </a:r>
-            <a:r>
-              <a:rPr sz="1600"/>
-              <a:t> of ordinary PyChrono. Upstream PR to follow this talk.</a:t>
-            </a:r>
-          </a:p>
-        </p:txBody>
-      </p:sp>
-      <p:sp>
-        <p:nvSpPr>
-          <p:cNvPr id="5" name="Footer"/>
+          <a:bodyPr wrap="square"/>
+          <a:lstStyle/>
+          <a:p>
+            <a:pPr>
+              <a:spcAft>
+                <a:spcPts val="900"/>
+              </a:spcAft>
+            </a:pPr>
+            <a:r>
+              <a:rPr sz="1800">
+                <a:latin typeface="Consolas"/>
+              </a:rPr>
+              <a:t>ChRealtimeStepTimer</a:t>
+            </a:r>
+            <a:r>
+              <a:rPr sz="2000"/>
+              <a:t>  -  the pacing, exposed to Python</a:t>
+            </a:r>
+          </a:p>
+          <a:p>
+            <a:pPr>
+              <a:spcAft>
+                <a:spcPts val="900"/>
+              </a:spcAft>
+            </a:pPr>
+            <a:r>
+              <a:rPr sz="1800">
+                <a:latin typeface="Consolas"/>
+              </a:rPr>
+              <a:t>ChInteractiveDriver</a:t>
+            </a:r>
+            <a:r>
+              <a:rPr sz="2000"/>
+              <a:t>  -  keyboard and joystick input, with </a:t>
+            </a:r>
+            <a:r>
+              <a:rPr sz="1800">
+                <a:latin typeface="Consolas"/>
+              </a:rPr>
+              <a:t>KeyboardMode::HELD</a:t>
+            </a:r>
+          </a:p>
+          <a:p>
+            <a:pPr>
+              <a:spcAft>
+                <a:spcPts val="900"/>
+              </a:spcAft>
+            </a:pPr>
+            <a:r>
+              <a:rPr sz="1800">
+                <a:latin typeface="Consolas"/>
+              </a:rPr>
+              <a:t>ChCollisionSystem::RayHit</a:t>
+            </a:r>
+            <a:r>
+              <a:rPr sz="2000"/>
+              <a:t>  -  click-to-pick, exposed to Python</a:t>
+            </a:r>
+          </a:p>
+          <a:p>
+            <a:pPr>
+              <a:spcAft>
+                <a:spcPts val="900"/>
+              </a:spcAft>
+            </a:pPr>
+            <a:r>
+              <a:rPr sz="1800">
+                <a:latin typeface="Consolas"/>
+              </a:rPr>
+              <a:t>AccumulateForce</a:t>
+            </a:r>
+            <a:r>
+              <a:rPr sz="2000"/>
+              <a:t>, </a:t>
+            </a:r>
+            <a:r>
+              <a:rPr sz="1800">
+                <a:latin typeface="Consolas"/>
+              </a:rPr>
+              <a:t>ChLinkTSDA</a:t>
+            </a:r>
+            <a:r>
+              <a:rPr sz="2000"/>
+              <a:t>  -  a human's pull as a term in the dynamics</a:t>
+            </a:r>
+          </a:p>
+          <a:p>
+            <a:pPr>
+              <a:spcAft>
+                <a:spcPts val="900"/>
+              </a:spcAft>
+            </a:pPr>
+            <a:r>
+              <a:rPr sz="1800">
+                <a:latin typeface="Consolas"/>
+              </a:rPr>
+              <a:t>ChVisualSystemIrrlicht::AddUserEventReceiver(IEventReceiver*)</a:t>
+            </a:r>
+            <a:r>
+              <a:rPr sz="2000"/>
+              <a:t>  -  the socket for any input device, and it IS bound in Python</a:t>
+            </a:r>
+          </a:p>
+          <a:p>
+            <a:pPr>
+              <a:spcAft>
+                <a:spcPts val="900"/>
+              </a:spcAft>
+            </a:pPr>
+            <a:r>
+              <a:rPr sz="2000"/>
+              <a:t>What is NOT there: any built-in mouse pick-and-drag. No module in the tree implements one.</a:t>
+            </a:r>
+          </a:p>
+          <a:p>
+            <a:pPr>
+              <a:spcAft>
+                <a:spcPts val="900"/>
+              </a:spcAft>
+            </a:pPr>
+            <a:r>
+              <a:rPr sz="2000"/>
+              <a:t>That last line is the gap this tutorial walks into. Everything needed to build one is already exposed; what is missing is the ability to receive the mouse event in the first place.</a:t>
+            </a:r>
+          </a:p>
+        </p:txBody>
+      </p:sp>
+      <p:sp>
+        <p:nvSpPr>
+          <p:cNvPr id="4" name="Footer"/>
           <p:cNvSpPr txBox="1"/>
           <p:nvPr/>
         </p:nvSpPr>
@@ -11162,7 +11098,7 @@
       </p:sp>
       <p:sp>
         <p:nvSpPr>
-          <p:cNvPr id="6" name="PageNo"/>
+          <p:cNvPr id="5" name="PageNo"/>
           <p:cNvSpPr txBox="1"/>
           <p:nvPr/>
         </p:nvSpPr>
@@ -11225,7 +11161,7 @@
           <a:p>
             <a:r>
               <a:rPr sz="2600"/>
-              <a:t>Turning a click into a body: the ray-cast surface</a:t>
+              <a:t>The gap, and the one line that closes it (native_pick.py lines 10 to 26)</a:t>
             </a:r>
           </a:p>
         </p:txBody>
@@ -11239,7 +11175,7 @@
         <p:spPr>
           <a:xfrm>
             <a:off x="0" y="1207008"/>
-            <a:ext cx="12188952" cy="4389119"/>
+            <a:ext cx="12188952" cy="3957319"/>
           </a:xfrm>
           <a:prstGeom prst="rect">
             <a:avLst/>
@@ -11260,73 +11196,278 @@
               </a:spcAft>
             </a:pPr>
             <a:r>
-              <a:rPr sz="900">
+              <a:rPr sz="800">
                 <a:solidFill>
                   <a:srgbClr val="7FAF7F"/>
                 </a:solidFill>
                 <a:latin typeface="Consolas"/>
               </a:rPr>
-              <a:t>// chrono/collision/ChCollisionSystem.h</a:t>
-            </a:r>
-          </a:p>
-          <a:p>
-            <a:pPr>
-              <a:spcAft>
-                <a:spcPts val="0"/>
-              </a:spcAft>
-            </a:pPr>
-            <a:r>
-              <a:rPr sz="900">
-                <a:solidFill>
-                  <a:srgbClr val="CCCCCC"/>
-                </a:solidFill>
-                <a:latin typeface="Consolas"/>
-              </a:rPr>
-              <a:t>struct </a:t>
-            </a:r>
-            <a:r>
-              <a:rPr sz="900">
-                <a:solidFill>
-                  <a:srgbClr val="F0A040"/>
-                </a:solidFill>
-                <a:latin typeface="Consolas"/>
-              </a:rPr>
-              <a:t>ChRayhitResult</a:t>
-            </a:r>
-            <a:r>
-              <a:rPr sz="900">
-                <a:solidFill>
-                  <a:srgbClr val="CCCCCC"/>
-                </a:solidFill>
-                <a:latin typeface="Consolas"/>
-              </a:rPr>
-              <a:t> {</a:t>
-            </a:r>
-          </a:p>
-          <a:p>
-            <a:pPr>
-              <a:spcAft>
-                <a:spcPts val="0"/>
-              </a:spcAft>
-            </a:pPr>
-            <a:r>
-              <a:rPr sz="900">
-                <a:solidFill>
-                  <a:srgbClr val="CCCCCC"/>
-                </a:solidFill>
-                <a:latin typeface="Consolas"/>
-              </a:rPr>
-              <a:t>    bool hit;</a:t>
-            </a:r>
-          </a:p>
-          <a:p>
-            <a:pPr>
-              <a:spcAft>
-                <a:spcPts val="0"/>
-              </a:spcAft>
-            </a:pPr>
-            <a:r>
-              <a:rPr sz="900">
+              <a:t># chrono_swig/interface/irrlicht/ChModuleIrrlicht.i</a:t>
+            </a:r>
+          </a:p>
+          <a:p>
+            <a:pPr>
+              <a:spcAft>
+                <a:spcPts val="0"/>
+              </a:spcAft>
+            </a:pPr>
+            <a:r>
+              <a:rPr sz="800">
+                <a:solidFill>
+                  <a:srgbClr val="CCCCCC"/>
+                </a:solidFill>
+                <a:latin typeface="Consolas"/>
+              </a:rPr>
+              <a:t>+%</a:t>
+            </a:r>
+            <a:r>
+              <a:rPr sz="800">
+                <a:solidFill>
+                  <a:srgbClr val="7FC7E8"/>
+                </a:solidFill>
+                <a:latin typeface="Consolas"/>
+              </a:rPr>
+              <a:t>feature</a:t>
+            </a:r>
+            <a:r>
+              <a:rPr sz="800">
+                <a:solidFill>
+                  <a:srgbClr val="CCCCCC"/>
+                </a:solidFill>
+                <a:latin typeface="Consolas"/>
+              </a:rPr>
+              <a:t>(</a:t>
+            </a:r>
+            <a:r>
+              <a:rPr sz="800">
+                <a:solidFill>
+                  <a:srgbClr val="D8A0C0"/>
+                </a:solidFill>
+                <a:latin typeface="Consolas"/>
+              </a:rPr>
+              <a:t>"director"</a:t>
+            </a:r>
+            <a:r>
+              <a:rPr sz="800">
+                <a:solidFill>
+                  <a:srgbClr val="CCCCCC"/>
+                </a:solidFill>
+                <a:latin typeface="Consolas"/>
+              </a:rPr>
+              <a:t>) irr::IEventReceiver;</a:t>
+            </a:r>
+          </a:p>
+          <a:p>
+            <a:pPr>
+              <a:spcAft>
+                <a:spcPts val="0"/>
+              </a:spcAft>
+            </a:pPr>
+            <a:r>
+              <a:rPr sz="800">
+                <a:solidFill>
+                  <a:srgbClr val="CCCCCC"/>
+                </a:solidFill>
+                <a:latin typeface="Consolas"/>
+              </a:rPr>
+              <a:t>%include </a:t>
+            </a:r>
+            <a:r>
+              <a:rPr sz="800">
+                <a:solidFill>
+                  <a:srgbClr val="D8A0C0"/>
+                </a:solidFill>
+                <a:latin typeface="Consolas"/>
+              </a:rPr>
+              <a:t>"IEventReceiver.h"</a:t>
+            </a:r>
+          </a:p>
+          <a:p>
+            <a:pPr>
+              <a:spcAft>
+                <a:spcPts val="0"/>
+              </a:spcAft>
+            </a:pPr>
+            <a:r>
+              <a:rPr sz="800">
+                <a:solidFill>
+                  <a:srgbClr val="CCCCCC"/>
+                </a:solidFill>
+                <a:latin typeface="Consolas"/>
+              </a:rPr>
+              <a:t> </a:t>
+            </a:r>
+          </a:p>
+          <a:p>
+            <a:pPr>
+              <a:spcAft>
+                <a:spcPts val="0"/>
+              </a:spcAft>
+            </a:pPr>
+            <a:r>
+              <a:rPr sz="800">
+                <a:solidFill>
+                  <a:srgbClr val="7FAF7F"/>
+                </a:solidFill>
+                <a:latin typeface="Consolas"/>
+              </a:rPr>
+              <a:t># The module ALREADY compiles with directors enabled:</a:t>
+            </a:r>
+          </a:p>
+          <a:p>
+            <a:pPr>
+              <a:spcAft>
+                <a:spcPts val="0"/>
+              </a:spcAft>
+            </a:pPr>
+            <a:r>
+              <a:rPr sz="800">
+                <a:solidFill>
+                  <a:srgbClr val="7FAF7F"/>
+                </a:solidFill>
+                <a:latin typeface="Consolas"/>
+              </a:rPr>
+              <a:t>#     %module(directors="1", threads="1") irrlicht</a:t>
+            </a:r>
+          </a:p>
+          <a:p>
+            <a:pPr>
+              <a:spcAft>
+                <a:spcPts val="0"/>
+              </a:spcAft>
+            </a:pPr>
+            <a:r>
+              <a:rPr sz="800">
+                <a:solidFill>
+                  <a:srgbClr val="7FAF7F"/>
+                </a:solidFill>
+                <a:latin typeface="Consolas"/>
+              </a:rPr>
+              <a:t># and AddUserEventReceiver is ALREADY bound. Without the</a:t>
+            </a:r>
+          </a:p>
+          <a:p>
+            <a:pPr>
+              <a:spcAft>
+                <a:spcPts val="0"/>
+              </a:spcAft>
+            </a:pPr>
+            <a:r>
+              <a:rPr sz="800">
+                <a:solidFill>
+                  <a:srgbClr val="7FAF7F"/>
+                </a:solidFill>
+                <a:latin typeface="Consolas"/>
+              </a:rPr>
+              <a:t># director, though, Python gets an abstract class:</a:t>
+            </a:r>
+          </a:p>
+          <a:p>
+            <a:pPr>
+              <a:spcAft>
+                <a:spcPts val="0"/>
+              </a:spcAft>
+            </a:pPr>
+            <a:r>
+              <a:rPr sz="800">
+                <a:solidFill>
+                  <a:srgbClr val="7FAF7F"/>
+                </a:solidFill>
+                <a:latin typeface="Consolas"/>
+              </a:rPr>
+              <a:t>#     &gt;&gt;&gt; ci.IEventReceiver()</a:t>
+            </a:r>
+          </a:p>
+          <a:p>
+            <a:pPr>
+              <a:spcAft>
+                <a:spcPts val="0"/>
+              </a:spcAft>
+            </a:pPr>
+            <a:r>
+              <a:rPr sz="800">
+                <a:solidFill>
+                  <a:srgbClr val="7FAF7F"/>
+                </a:solidFill>
+                <a:latin typeface="Consolas"/>
+              </a:rPr>
+              <a:t>#     AttributeError: No constructor defined - class is abstract</a:t>
+            </a:r>
+          </a:p>
+          <a:p>
+            <a:pPr>
+              <a:spcAft>
+                <a:spcPts val="0"/>
+              </a:spcAft>
+            </a:pPr>
+            <a:r>
+              <a:rPr sz="800">
+                <a:solidFill>
+                  <a:srgbClr val="7FAF7F"/>
+                </a:solidFill>
+                <a:latin typeface="Consolas"/>
+              </a:rPr>
+              <a:t># so there is a socket, and nothing you can plug into it.</a:t>
+            </a:r>
+          </a:p>
+          <a:p>
+            <a:pPr>
+              <a:spcAft>
+                <a:spcPts val="0"/>
+              </a:spcAft>
+            </a:pPr>
+            <a:r>
+              <a:rPr sz="800">
+                <a:solidFill>
+                  <a:srgbClr val="CCCCCC"/>
+                </a:solidFill>
+                <a:latin typeface="Consolas"/>
+              </a:rPr>
+              <a:t> </a:t>
+            </a:r>
+          </a:p>
+          <a:p>
+            <a:pPr>
+              <a:spcAft>
+                <a:spcPts val="0"/>
+              </a:spcAft>
+            </a:pPr>
+            <a:r>
+              <a:rPr sz="800">
+                <a:solidFill>
+                  <a:srgbClr val="CCCCCC"/>
+                </a:solidFill>
+                <a:latin typeface="Consolas"/>
+              </a:rPr>
+              <a:t>class </a:t>
+            </a:r>
+            <a:r>
+              <a:rPr sz="800">
+                <a:solidFill>
+                  <a:srgbClr val="7FC7E8"/>
+                </a:solidFill>
+                <a:latin typeface="Consolas"/>
+              </a:rPr>
+              <a:t>MouseReceiver</a:t>
+            </a:r>
+            <a:r>
+              <a:rPr sz="800">
+                <a:solidFill>
+                  <a:srgbClr val="CCCCCC"/>
+                </a:solidFill>
+                <a:latin typeface="Consolas"/>
+              </a:rPr>
+              <a:t>(irr.IEventReceiver):</a:t>
+            </a:r>
+          </a:p>
+          <a:p>
+            <a:pPr>
+              <a:spcAft>
+                <a:spcPts val="0"/>
+              </a:spcAft>
+            </a:pPr>
+            <a:r>
+              <a:rPr sz="800">
                 <a:solidFill>
                   <a:srgbClr val="CCCCCC"/>
                 </a:solidFill>
@@ -11335,168 +11476,234 @@
               <a:t>    </a:t>
             </a:r>
             <a:r>
-              <a:rPr sz="900">
-                <a:solidFill>
-                  <a:srgbClr val="F0A040"/>
-                </a:solidFill>
-                <a:latin typeface="Consolas"/>
-              </a:rPr>
-              <a:t>ChVector3d</a:t>
-            </a:r>
-            <a:r>
-              <a:rPr sz="900">
-                <a:solidFill>
-                  <a:srgbClr val="CCCCCC"/>
-                </a:solidFill>
-                <a:latin typeface="Consolas"/>
-              </a:rPr>
-              <a:t> abs_hitPoint;     </a:t>
-            </a:r>
-            <a:r>
-              <a:rPr sz="900">
+              <a:rPr sz="800">
+                <a:solidFill>
+                  <a:srgbClr val="D8A0C0"/>
+                </a:solidFill>
+                <a:latin typeface="Consolas"/>
+              </a:rPr>
+              <a:t>""</a:t>
+            </a:r>
+            <a:r>
+              <a:rPr sz="800">
+                <a:solidFill>
+                  <a:srgbClr val="D8A0C0"/>
+                </a:solidFill>
+                <a:latin typeface="Consolas"/>
+              </a:rPr>
+              <a:t>"No Quartz, no CGWindowList, no NSEvent. No macOS. Just Irrlicht."</a:t>
+            </a:r>
+            <a:r>
+              <a:rPr sz="800">
+                <a:solidFill>
+                  <a:srgbClr val="D8A0C0"/>
+                </a:solidFill>
+                <a:latin typeface="Consolas"/>
+              </a:rPr>
+              <a:t>""</a:t>
+            </a:r>
+          </a:p>
+          <a:p>
+            <a:pPr>
+              <a:spcAft>
+                <a:spcPts val="0"/>
+              </a:spcAft>
+            </a:pPr>
+            <a:r>
+              <a:rPr sz="800">
+                <a:solidFill>
+                  <a:srgbClr val="CCCCCC"/>
+                </a:solidFill>
+                <a:latin typeface="Consolas"/>
+              </a:rPr>
+              <a:t> </a:t>
+            </a:r>
+          </a:p>
+          <a:p>
+            <a:pPr>
+              <a:spcAft>
+                <a:spcPts val="0"/>
+              </a:spcAft>
+            </a:pPr>
+            <a:r>
+              <a:rPr sz="800">
+                <a:solidFill>
+                  <a:srgbClr val="CCCCCC"/>
+                </a:solidFill>
+                <a:latin typeface="Consolas"/>
+              </a:rPr>
+              <a:t>    def </a:t>
+            </a:r>
+            <a:r>
+              <a:rPr sz="800">
+                <a:solidFill>
+                  <a:srgbClr val="7FC7E8"/>
+                </a:solidFill>
+                <a:latin typeface="Consolas"/>
+              </a:rPr>
+              <a:t>__init__</a:t>
+            </a:r>
+            <a:r>
+              <a:rPr sz="800">
+                <a:solidFill>
+                  <a:srgbClr val="CCCCCC"/>
+                </a:solidFill>
+                <a:latin typeface="Consolas"/>
+              </a:rPr>
+              <a:t>(self):</a:t>
+            </a:r>
+          </a:p>
+          <a:p>
+            <a:pPr>
+              <a:spcAft>
+                <a:spcPts val="0"/>
+              </a:spcAft>
+            </a:pPr>
+            <a:r>
+              <a:rPr sz="800">
+                <a:solidFill>
+                  <a:srgbClr val="CCCCCC"/>
+                </a:solidFill>
+                <a:latin typeface="Consolas"/>
+              </a:rPr>
+              <a:t>        </a:t>
+            </a:r>
+            <a:r>
+              <a:rPr sz="800">
+                <a:solidFill>
+                  <a:srgbClr val="7FC7E8"/>
+                </a:solidFill>
+                <a:latin typeface="Consolas"/>
+              </a:rPr>
+              <a:t>super</a:t>
+            </a:r>
+            <a:r>
+              <a:rPr sz="800">
+                <a:solidFill>
+                  <a:srgbClr val="CCCCCC"/>
+                </a:solidFill>
+                <a:latin typeface="Consolas"/>
+              </a:rPr>
+              <a:t>().</a:t>
+            </a:r>
+            <a:r>
+              <a:rPr sz="800">
+                <a:solidFill>
+                  <a:srgbClr val="7FC7E8"/>
+                </a:solidFill>
+                <a:latin typeface="Consolas"/>
+              </a:rPr>
+              <a:t>__init__</a:t>
+            </a:r>
+            <a:r>
+              <a:rPr sz="800">
+                <a:solidFill>
+                  <a:srgbClr val="CCCCCC"/>
+                </a:solidFill>
+                <a:latin typeface="Consolas"/>
+              </a:rPr>
+              <a:t>()</a:t>
+            </a:r>
+          </a:p>
+          <a:p>
+            <a:pPr>
+              <a:spcAft>
+                <a:spcPts val="0"/>
+              </a:spcAft>
+            </a:pPr>
+            <a:r>
+              <a:rPr sz="800">
+                <a:solidFill>
+                  <a:srgbClr val="CCCCCC"/>
+                </a:solidFill>
+                <a:latin typeface="Consolas"/>
+              </a:rPr>
+              <a:t>        self.x = self.y = 0</a:t>
+            </a:r>
+          </a:p>
+          <a:p>
+            <a:pPr>
+              <a:spcAft>
+                <a:spcPts val="0"/>
+              </a:spcAft>
+            </a:pPr>
+            <a:r>
+              <a:rPr sz="800">
+                <a:solidFill>
+                  <a:srgbClr val="CCCCCC"/>
+                </a:solidFill>
+                <a:latin typeface="Consolas"/>
+              </a:rPr>
+              <a:t>        self.down = False</a:t>
+            </a:r>
+          </a:p>
+          <a:p>
+            <a:pPr>
+              <a:spcAft>
+                <a:spcPts val="0"/>
+              </a:spcAft>
+            </a:pPr>
+            <a:r>
+              <a:rPr sz="800">
+                <a:solidFill>
+                  <a:srgbClr val="CCCCCC"/>
+                </a:solidFill>
+                <a:latin typeface="Consolas"/>
+              </a:rPr>
+              <a:t>        self.pressed = False          </a:t>
+            </a:r>
+            <a:r>
+              <a:rPr sz="800">
                 <a:solidFill>
                   <a:srgbClr val="7FAF7F"/>
                 </a:solidFill>
                 <a:latin typeface="Consolas"/>
               </a:rPr>
-              <a:t>// where, in world coordinates</a:t>
-            </a:r>
-          </a:p>
-          <a:p>
-            <a:pPr>
-              <a:spcAft>
-                <a:spcPts val="0"/>
-              </a:spcAft>
-            </a:pPr>
-            <a:r>
-              <a:rPr sz="900">
-                <a:solidFill>
-                  <a:srgbClr val="CCCCCC"/>
-                </a:solidFill>
-                <a:latin typeface="Consolas"/>
-              </a:rPr>
-              <a:t>    </a:t>
-            </a:r>
-            <a:r>
-              <a:rPr sz="900">
-                <a:solidFill>
-                  <a:srgbClr val="F0A040"/>
-                </a:solidFill>
-                <a:latin typeface="Consolas"/>
-              </a:rPr>
-              <a:t>ChVector3d</a:t>
-            </a:r>
-            <a:r>
-              <a:rPr sz="900">
-                <a:solidFill>
-                  <a:srgbClr val="CCCCCC"/>
-                </a:solidFill>
-                <a:latin typeface="Consolas"/>
-              </a:rPr>
-              <a:t> abs_hitNormal;    </a:t>
-            </a:r>
-            <a:r>
-              <a:rPr sz="900">
-                <a:solidFill>
-                  <a:srgbClr val="7FAF7F"/>
-                </a:solidFill>
-                <a:latin typeface="Consolas"/>
-              </a:rPr>
-              <a:t>// the surface normal there</a:t>
-            </a:r>
-          </a:p>
-          <a:p>
-            <a:pPr>
-              <a:spcAft>
-                <a:spcPts val="0"/>
-              </a:spcAft>
-            </a:pPr>
-            <a:r>
-              <a:rPr sz="900">
-                <a:solidFill>
-                  <a:srgbClr val="CCCCCC"/>
-                </a:solidFill>
-                <a:latin typeface="Consolas"/>
-              </a:rPr>
-              <a:t>    double dist_factor;          </a:t>
-            </a:r>
-            <a:r>
-              <a:rPr sz="900">
-                <a:solidFill>
-                  <a:srgbClr val="7FAF7F"/>
-                </a:solidFill>
-                <a:latin typeface="Consolas"/>
-              </a:rPr>
-              <a:t>// 0 .. 1 along the segment</a:t>
-            </a:r>
-          </a:p>
-          <a:p>
-            <a:pPr>
-              <a:spcAft>
-                <a:spcPts val="0"/>
-              </a:spcAft>
-            </a:pPr>
-            <a:r>
-              <a:rPr sz="900">
-                <a:solidFill>
-                  <a:srgbClr val="CCCCCC"/>
-                </a:solidFill>
-                <a:latin typeface="Consolas"/>
-              </a:rPr>
-              <a:t>    </a:t>
-            </a:r>
-            <a:r>
-              <a:rPr sz="900">
-                <a:solidFill>
-                  <a:srgbClr val="F0A040"/>
-                </a:solidFill>
-                <a:latin typeface="Consolas"/>
-              </a:rPr>
-              <a:t>ChCollisionModel</a:t>
-            </a:r>
-            <a:r>
-              <a:rPr sz="900">
-                <a:solidFill>
-                  <a:srgbClr val="CCCCCC"/>
-                </a:solidFill>
-                <a:latin typeface="Consolas"/>
-              </a:rPr>
-              <a:t>* hitModel;  </a:t>
-            </a:r>
-            <a:r>
-              <a:rPr sz="900">
-                <a:solidFill>
-                  <a:srgbClr val="7FAF7F"/>
-                </a:solidFill>
-                <a:latin typeface="Consolas"/>
-              </a:rPr>
-              <a:t>// -&gt; CastToChBody() for the body</a:t>
-            </a:r>
-          </a:p>
-          <a:p>
-            <a:pPr>
-              <a:spcAft>
-                <a:spcPts val="0"/>
-              </a:spcAft>
-            </a:pPr>
-            <a:r>
-              <a:rPr sz="900">
-                <a:solidFill>
-                  <a:srgbClr val="CCCCCC"/>
-                </a:solidFill>
-                <a:latin typeface="Consolas"/>
-              </a:rPr>
-              <a:t>};</a:t>
-            </a:r>
-          </a:p>
-          <a:p>
-            <a:pPr>
-              <a:spcAft>
-                <a:spcPts val="0"/>
-              </a:spcAft>
-            </a:pPr>
-            <a:r>
-              <a:rPr sz="900">
+              <a:t># edge, consumed by the loop</a:t>
+            </a:r>
+          </a:p>
+          <a:p>
+            <a:pPr>
+              <a:spcAft>
+                <a:spcPts val="0"/>
+              </a:spcAft>
+            </a:pPr>
+            <a:r>
+              <a:rPr sz="800">
+                <a:solidFill>
+                  <a:srgbClr val="CCCCCC"/>
+                </a:solidFill>
+                <a:latin typeface="Consolas"/>
+              </a:rPr>
+              <a:t>        self.keys = </a:t>
+            </a:r>
+            <a:r>
+              <a:rPr sz="800">
+                <a:solidFill>
+                  <a:srgbClr val="7FC7E8"/>
+                </a:solidFill>
+                <a:latin typeface="Consolas"/>
+              </a:rPr>
+              <a:t>set</a:t>
+            </a:r>
+            <a:r>
+              <a:rPr sz="800">
+                <a:solidFill>
+                  <a:srgbClr val="CCCCCC"/>
+                </a:solidFill>
+                <a:latin typeface="Consolas"/>
+              </a:rPr>
+              <a:t>()</a:t>
+            </a:r>
+          </a:p>
+          <a:p>
+            <a:pPr>
+              <a:spcAft>
+                <a:spcPts val="0"/>
+              </a:spcAft>
+            </a:pPr>
+            <a:r>
+              <a:rPr sz="800">
                 <a:solidFill>
                   <a:srgbClr val="CCCCCC"/>
                 </a:solidFill>
@@ -11512,594 +11719,127 @@
               </a:spcAft>
             </a:pPr>
             <a:r>
-              <a:rPr sz="900">
-                <a:solidFill>
-                  <a:srgbClr val="CCCCCC"/>
-                </a:solidFill>
-                <a:latin typeface="Consolas"/>
-              </a:rPr>
-              <a:t>virtual bool </a:t>
-            </a:r>
-            <a:r>
-              <a:rPr sz="900">
+              <a:rPr sz="800">
+                <a:solidFill>
+                  <a:srgbClr val="CCCCCC"/>
+                </a:solidFill>
+                <a:latin typeface="Consolas"/>
+              </a:rPr>
+              <a:t>    def </a:t>
+            </a:r>
+            <a:r>
+              <a:rPr sz="800">
                 <a:solidFill>
                   <a:srgbClr val="7FC7E8"/>
                 </a:solidFill>
                 <a:latin typeface="Consolas"/>
               </a:rPr>
-              <a:t>RayHit</a:t>
-            </a:r>
-            <a:r>
-              <a:rPr sz="900">
-                <a:solidFill>
-                  <a:srgbClr val="CCCCCC"/>
-                </a:solidFill>
-                <a:latin typeface="Consolas"/>
-              </a:rPr>
-              <a:t>(const </a:t>
-            </a:r>
-            <a:r>
-              <a:rPr sz="900">
-                <a:solidFill>
-                  <a:srgbClr val="F0A040"/>
-                </a:solidFill>
-                <a:latin typeface="Consolas"/>
-              </a:rPr>
-              <a:t>ChVector3d</a:t>
-            </a:r>
-            <a:r>
-              <a:rPr sz="900">
-                <a:solidFill>
-                  <a:srgbClr val="CCCCCC"/>
-                </a:solidFill>
-                <a:latin typeface="Consolas"/>
-              </a:rPr>
-              <a:t>&amp; from,</a:t>
-            </a:r>
-          </a:p>
-          <a:p>
-            <a:pPr>
-              <a:spcAft>
-                <a:spcPts val="0"/>
-              </a:spcAft>
-            </a:pPr>
-            <a:r>
-              <a:rPr sz="900">
-                <a:solidFill>
-                  <a:srgbClr val="CCCCCC"/>
-                </a:solidFill>
-                <a:latin typeface="Consolas"/>
-              </a:rPr>
-              <a:t>                    const </a:t>
-            </a:r>
-            <a:r>
-              <a:rPr sz="900">
-                <a:solidFill>
-                  <a:srgbClr val="F0A040"/>
-                </a:solidFill>
-                <a:latin typeface="Consolas"/>
-              </a:rPr>
-              <a:t>ChVector3d</a:t>
-            </a:r>
-            <a:r>
-              <a:rPr sz="900">
-                <a:solidFill>
-                  <a:srgbClr val="CCCCCC"/>
-                </a:solidFill>
-                <a:latin typeface="Consolas"/>
-              </a:rPr>
-              <a:t>&amp; to,</a:t>
-            </a:r>
-          </a:p>
-          <a:p>
-            <a:pPr>
-              <a:spcAft>
-                <a:spcPts val="0"/>
-              </a:spcAft>
-            </a:pPr>
-            <a:r>
-              <a:rPr sz="900">
-                <a:solidFill>
-                  <a:srgbClr val="CCCCCC"/>
-                </a:solidFill>
-                <a:latin typeface="Consolas"/>
-              </a:rPr>
-              <a:t>                    </a:t>
-            </a:r>
-            <a:r>
-              <a:rPr sz="900">
-                <a:solidFill>
-                  <a:srgbClr val="F0A040"/>
-                </a:solidFill>
-                <a:latin typeface="Consolas"/>
-              </a:rPr>
-              <a:t>ChRayhitResult</a:t>
-            </a:r>
-            <a:r>
-              <a:rPr sz="900">
-                <a:solidFill>
-                  <a:srgbClr val="CCCCCC"/>
-                </a:solidFill>
-                <a:latin typeface="Consolas"/>
-              </a:rPr>
-              <a:t>&amp; result) const;</a:t>
-            </a:r>
-          </a:p>
-          <a:p>
-            <a:pPr>
-              <a:spcAft>
-                <a:spcPts val="0"/>
-              </a:spcAft>
-            </a:pPr>
-            <a:r>
-              <a:rPr sz="900">
-                <a:solidFill>
-                  <a:srgbClr val="CCCCCC"/>
-                </a:solidFill>
-                <a:latin typeface="Consolas"/>
-              </a:rPr>
-              <a:t> </a:t>
-            </a:r>
-          </a:p>
-          <a:p>
-            <a:pPr>
-              <a:spcAft>
-                <a:spcPts val="0"/>
-              </a:spcAft>
-            </a:pPr>
-            <a:r>
-              <a:rPr sz="900">
-                <a:solidFill>
-                  <a:srgbClr val="7FAF7F"/>
-                </a:solidFill>
-                <a:latin typeface="Consolas"/>
-              </a:rPr>
-              <a:t>// A ray sees COLLISION geometry, never visual geometry. A link you</a:t>
-            </a:r>
-          </a:p>
-          <a:p>
-            <a:pPr>
-              <a:spcAft>
-                <a:spcPts val="0"/>
-              </a:spcAft>
-            </a:pPr>
-            <a:r>
-              <a:rPr sz="900">
-                <a:solidFill>
-                  <a:srgbClr val="7FAF7F"/>
-                </a:solidFill>
-                <a:latin typeface="Consolas"/>
-              </a:rPr>
-              <a:t>// can see but whose collision is off is invisible to every click.</a:t>
-            </a:r>
-          </a:p>
-          <a:p>
-            <a:pPr>
-              <a:spcAft>
-                <a:spcPts val="0"/>
-              </a:spcAft>
-            </a:pPr>
-            <a:r>
-              <a:rPr sz="900">
-                <a:solidFill>
-                  <a:srgbClr val="7FAF7F"/>
-                </a:solidFill>
-                <a:latin typeface="Consolas"/>
-              </a:rPr>
-              <a:t>// That one sentence accounted for every 'it will not pick' bug here.</a:t>
-            </a:r>
-          </a:p>
-          <a:p>
-            <a:pPr>
-              <a:spcAft>
-                <a:spcPts val="0"/>
-              </a:spcAft>
-            </a:pPr>
-            <a:r>
-              <a:rPr sz="900">
-                <a:solidFill>
-                  <a:srgbClr val="CCCCCC"/>
-                </a:solidFill>
-                <a:latin typeface="Consolas"/>
-              </a:rPr>
-              <a:t> </a:t>
-            </a:r>
-          </a:p>
-          <a:p>
-            <a:pPr>
-              <a:spcAft>
-                <a:spcPts val="0"/>
-              </a:spcAft>
-            </a:pPr>
-            <a:r>
-              <a:rPr sz="900">
-                <a:solidFill>
-                  <a:srgbClr val="7FAF7F"/>
-                </a:solidFill>
-                <a:latin typeface="Consolas"/>
-              </a:rPr>
-              <a:t># ---- and how this tutorial calls it (hil_manipulate.py, lines 338 to 349) ------</a:t>
-            </a:r>
-          </a:p>
-          <a:p>
-            <a:pPr>
-              <a:spcAft>
-                <a:spcPts val="0"/>
-              </a:spcAft>
-            </a:pPr>
-            <a:r>
-              <a:rPr sz="900">
-                <a:solidFill>
-                  <a:srgbClr val="CCCCCC"/>
-                </a:solidFill>
-                <a:latin typeface="Consolas"/>
-              </a:rPr>
-              <a:t>def </a:t>
-            </a:r>
-            <a:r>
-              <a:rPr sz="900">
-                <a:solidFill>
-                  <a:srgbClr val="7FC7E8"/>
-                </a:solidFill>
-                <a:latin typeface="Consolas"/>
-              </a:rPr>
-              <a:t>pick_along_ray</a:t>
-            </a:r>
-            <a:r>
-              <a:rPr sz="900">
-                <a:solidFill>
-                  <a:srgbClr val="CCCCCC"/>
-                </a:solidFill>
-                <a:latin typeface="Consolas"/>
-              </a:rPr>
-              <a:t>(system, start, end):</a:t>
-            </a:r>
-          </a:p>
-          <a:p>
-            <a:pPr>
-              <a:spcAft>
-                <a:spcPts val="0"/>
-              </a:spcAft>
-            </a:pPr>
-            <a:r>
-              <a:rPr sz="900">
-                <a:solidFill>
-                  <a:srgbClr val="CCCCCC"/>
-                </a:solidFill>
-                <a:latin typeface="Consolas"/>
-              </a:rPr>
-              <a:t>    </a:t>
-            </a:r>
-            <a:r>
-              <a:rPr sz="900">
-                <a:solidFill>
-                  <a:srgbClr val="D8A0C0"/>
-                </a:solidFill>
-                <a:latin typeface="Consolas"/>
-              </a:rPr>
-              <a:t>""</a:t>
-            </a:r>
-            <a:r>
-              <a:rPr sz="900">
-                <a:solidFill>
-                  <a:srgbClr val="D8A0C0"/>
-                </a:solidFill>
-                <a:latin typeface="Consolas"/>
-              </a:rPr>
-              <a:t>"The primitive a mouse click would use. Returns (body, world_point) or None."</a:t>
-            </a:r>
-            <a:r>
-              <a:rPr sz="900">
-                <a:solidFill>
-                  <a:srgbClr val="D8A0C0"/>
-                </a:solidFill>
-                <a:latin typeface="Consolas"/>
-              </a:rPr>
-              <a:t>""</a:t>
-            </a:r>
-          </a:p>
-          <a:p>
-            <a:pPr>
-              <a:spcAft>
-                <a:spcPts val="0"/>
-              </a:spcAft>
-            </a:pPr>
-            <a:r>
-              <a:rPr sz="900">
-                <a:solidFill>
-                  <a:srgbClr val="CCCCCC"/>
-                </a:solidFill>
-                <a:latin typeface="Consolas"/>
-              </a:rPr>
-              <a:t>    res = chrono.</a:t>
-            </a:r>
-            <a:r>
-              <a:rPr sz="900">
-                <a:solidFill>
-                  <a:srgbClr val="F0A040"/>
-                </a:solidFill>
-                <a:latin typeface="Consolas"/>
-              </a:rPr>
-              <a:t>ChRayhitResult</a:t>
-            </a:r>
-            <a:r>
-              <a:rPr sz="900">
-                <a:solidFill>
-                  <a:srgbClr val="CCCCCC"/>
-                </a:solidFill>
-                <a:latin typeface="Consolas"/>
-              </a:rPr>
-              <a:t>()</a:t>
-            </a:r>
-          </a:p>
-          <a:p>
-            <a:pPr>
-              <a:spcAft>
-                <a:spcPts val="0"/>
-              </a:spcAft>
-            </a:pPr>
-            <a:r>
-              <a:rPr sz="900">
-                <a:solidFill>
-                  <a:srgbClr val="CCCCCC"/>
-                </a:solidFill>
-                <a:latin typeface="Consolas"/>
-              </a:rPr>
-              <a:t>    system.</a:t>
-            </a:r>
-            <a:r>
-              <a:rPr sz="900">
-                <a:solidFill>
-                  <a:srgbClr val="7FC7E8"/>
-                </a:solidFill>
-                <a:latin typeface="Consolas"/>
-              </a:rPr>
-              <a:t>GetCollisionSystem</a:t>
-            </a:r>
-            <a:r>
-              <a:rPr sz="900">
-                <a:solidFill>
-                  <a:srgbClr val="CCCCCC"/>
-                </a:solidFill>
-                <a:latin typeface="Consolas"/>
-              </a:rPr>
-              <a:t>().</a:t>
-            </a:r>
-            <a:r>
-              <a:rPr sz="900">
-                <a:solidFill>
-                  <a:srgbClr val="7FC7E8"/>
-                </a:solidFill>
-                <a:latin typeface="Consolas"/>
-              </a:rPr>
-              <a:t>RayHit</a:t>
-            </a:r>
-            <a:r>
-              <a:rPr sz="900">
-                <a:solidFill>
-                  <a:srgbClr val="CCCCCC"/>
-                </a:solidFill>
-                <a:latin typeface="Consolas"/>
-              </a:rPr>
-              <a:t>(start, end, res)</a:t>
-            </a:r>
-          </a:p>
-          <a:p>
-            <a:pPr>
-              <a:spcAft>
-                <a:spcPts val="0"/>
-              </a:spcAft>
-            </a:pPr>
-            <a:r>
-              <a:rPr sz="900">
-                <a:solidFill>
-                  <a:srgbClr val="CCCCCC"/>
-                </a:solidFill>
-                <a:latin typeface="Consolas"/>
-              </a:rPr>
-              <a:t>    if not res.hit:</a:t>
-            </a:r>
-          </a:p>
-          <a:p>
-            <a:pPr>
-              <a:spcAft>
-                <a:spcPts val="0"/>
-              </a:spcAft>
-            </a:pPr>
-            <a:r>
-              <a:rPr sz="900">
-                <a:solidFill>
-                  <a:srgbClr val="CCCCCC"/>
-                </a:solidFill>
-                <a:latin typeface="Consolas"/>
-              </a:rPr>
-              <a:t>        return None</a:t>
-            </a:r>
-          </a:p>
-          <a:p>
-            <a:pPr>
-              <a:spcAft>
-                <a:spcPts val="0"/>
-              </a:spcAft>
-            </a:pPr>
-            <a:r>
-              <a:rPr sz="900">
-                <a:solidFill>
-                  <a:srgbClr val="CCCCCC"/>
-                </a:solidFill>
-                <a:latin typeface="Consolas"/>
-              </a:rPr>
-              <a:t>    body = chrono.</a:t>
-            </a:r>
-            <a:r>
-              <a:rPr sz="900">
-                <a:solidFill>
-                  <a:srgbClr val="7FC7E8"/>
-                </a:solidFill>
-                <a:latin typeface="Consolas"/>
-              </a:rPr>
-              <a:t>CastToChBody</a:t>
-            </a:r>
-            <a:r>
-              <a:rPr sz="900">
-                <a:solidFill>
-                  <a:srgbClr val="CCCCCC"/>
-                </a:solidFill>
-                <a:latin typeface="Consolas"/>
-              </a:rPr>
-              <a:t>(res.hitModel.</a:t>
-            </a:r>
-            <a:r>
-              <a:rPr sz="900">
-                <a:solidFill>
-                  <a:srgbClr val="7FC7E8"/>
-                </a:solidFill>
-                <a:latin typeface="Consolas"/>
-              </a:rPr>
-              <a:t>GetContactable</a:t>
-            </a:r>
-            <a:r>
-              <a:rPr sz="900">
-                <a:solidFill>
-                  <a:srgbClr val="CCCCCC"/>
-                </a:solidFill>
-                <a:latin typeface="Consolas"/>
-              </a:rPr>
-              <a:t>())</a:t>
-            </a:r>
-          </a:p>
-          <a:p>
-            <a:pPr>
-              <a:spcAft>
-                <a:spcPts val="0"/>
-              </a:spcAft>
-            </a:pPr>
-            <a:r>
-              <a:rPr sz="900">
-                <a:solidFill>
-                  <a:srgbClr val="CCCCCC"/>
-                </a:solidFill>
-                <a:latin typeface="Consolas"/>
-              </a:rPr>
-              <a:t>    if body is None:</a:t>
-            </a:r>
-          </a:p>
-          <a:p>
-            <a:pPr>
-              <a:spcAft>
-                <a:spcPts val="0"/>
-              </a:spcAft>
-            </a:pPr>
-            <a:r>
-              <a:rPr sz="900">
-                <a:solidFill>
-                  <a:srgbClr val="CCCCCC"/>
-                </a:solidFill>
-                <a:latin typeface="Consolas"/>
-              </a:rPr>
-              <a:t>        return None</a:t>
-            </a:r>
-          </a:p>
-          <a:p>
-            <a:pPr>
-              <a:spcAft>
-                <a:spcPts val="0"/>
-              </a:spcAft>
-            </a:pPr>
-            <a:r>
-              <a:rPr sz="900">
-                <a:solidFill>
-                  <a:srgbClr val="CCCCCC"/>
-                </a:solidFill>
-                <a:latin typeface="Consolas"/>
-              </a:rPr>
-              <a:t>    p, nrm = res.abs_hitPoint, res.abs_hitNormal</a:t>
-            </a:r>
-          </a:p>
-          <a:p>
-            <a:pPr>
-              <a:spcAft>
-                <a:spcPts val="0"/>
-              </a:spcAft>
-            </a:pPr>
-            <a:r>
-              <a:rPr sz="900">
-                <a:solidFill>
-                  <a:srgbClr val="CCCCCC"/>
-                </a:solidFill>
-                <a:latin typeface="Consolas"/>
-              </a:rPr>
-              <a:t>    </a:t>
-            </a:r>
-            <a:r>
-              <a:rPr sz="900">
-                <a:solidFill>
-                  <a:srgbClr val="7FC7E8"/>
-                </a:solidFill>
-                <a:latin typeface="Consolas"/>
-              </a:rPr>
-              <a:t>return</a:t>
-            </a:r>
-            <a:r>
-              <a:rPr sz="900">
-                <a:solidFill>
-                  <a:srgbClr val="CCCCCC"/>
-                </a:solidFill>
-                <a:latin typeface="Consolas"/>
-              </a:rPr>
-              <a:t> (body, chrono.</a:t>
-            </a:r>
-            <a:r>
-              <a:rPr sz="900">
-                <a:solidFill>
-                  <a:srgbClr val="F0A040"/>
-                </a:solidFill>
-                <a:latin typeface="Consolas"/>
-              </a:rPr>
-              <a:t>ChVector3d</a:t>
-            </a:r>
-            <a:r>
-              <a:rPr sz="900">
-                <a:solidFill>
-                  <a:srgbClr val="CCCCCC"/>
-                </a:solidFill>
-                <a:latin typeface="Consolas"/>
-              </a:rPr>
-              <a:t>(p.x, p.y, p.z),</a:t>
-            </a:r>
-          </a:p>
-          <a:p>
-            <a:pPr>
-              <a:spcAft>
-                <a:spcPts val="0"/>
-              </a:spcAft>
-            </a:pPr>
-            <a:r>
-              <a:rPr sz="900">
-                <a:solidFill>
-                  <a:srgbClr val="CCCCCC"/>
-                </a:solidFill>
-                <a:latin typeface="Consolas"/>
-              </a:rPr>
-              <a:t>            chrono.</a:t>
-            </a:r>
-            <a:r>
-              <a:rPr sz="900">
-                <a:solidFill>
-                  <a:srgbClr val="F0A040"/>
-                </a:solidFill>
-                <a:latin typeface="Consolas"/>
-              </a:rPr>
-              <a:t>ChVector3d</a:t>
-            </a:r>
-            <a:r>
-              <a:rPr sz="900">
-                <a:solidFill>
-                  <a:srgbClr val="CCCCCC"/>
-                </a:solidFill>
-                <a:latin typeface="Consolas"/>
-              </a:rPr>
-              <a:t>(nrm.x, nrm.y, nrm.z))</a:t>
+              <a:t>OnEvent</a:t>
+            </a:r>
+            <a:r>
+              <a:rPr sz="800">
+                <a:solidFill>
+                  <a:srgbClr val="CCCCCC"/>
+                </a:solidFill>
+                <a:latin typeface="Consolas"/>
+              </a:rPr>
+              <a:t>(self, ev):</a:t>
+            </a:r>
+          </a:p>
+          <a:p>
+            <a:pPr>
+              <a:spcAft>
+                <a:spcPts val="0"/>
+              </a:spcAft>
+            </a:pPr>
+            <a:r>
+              <a:rPr sz="800">
+                <a:solidFill>
+                  <a:srgbClr val="CCCCCC"/>
+                </a:solidFill>
+                <a:latin typeface="Consolas"/>
+              </a:rPr>
+              <a:t>        if ev.EventType == irr.EET_MOUSE_INPUT_EVENT:</a:t>
+            </a:r>
+          </a:p>
+          <a:p>
+            <a:pPr>
+              <a:spcAft>
+                <a:spcPts val="0"/>
+              </a:spcAft>
+            </a:pPr>
+            <a:r>
+              <a:rPr sz="800">
+                <a:solidFill>
+                  <a:srgbClr val="CCCCCC"/>
+                </a:solidFill>
+                <a:latin typeface="Consolas"/>
+              </a:rPr>
+              <a:t>            self.x, self.y = ev.MouseInput.X, ev.MouseInput.Y</a:t>
+            </a:r>
+          </a:p>
+          <a:p>
+            <a:pPr>
+              <a:spcAft>
+                <a:spcPts val="0"/>
+              </a:spcAft>
+            </a:pPr>
+            <a:r>
+              <a:rPr sz="800">
+                <a:solidFill>
+                  <a:srgbClr val="CCCCCC"/>
+                </a:solidFill>
+                <a:latin typeface="Consolas"/>
+              </a:rPr>
+              <a:t>            if ev.MouseInput.Event == irr.EMIE_LMOUSE_PRESSED_DOWN:</a:t>
+            </a:r>
+          </a:p>
+          <a:p>
+            <a:pPr>
+              <a:spcAft>
+                <a:spcPts val="0"/>
+              </a:spcAft>
+            </a:pPr>
+            <a:r>
+              <a:rPr sz="800">
+                <a:solidFill>
+                  <a:srgbClr val="CCCCCC"/>
+                </a:solidFill>
+                <a:latin typeface="Consolas"/>
+              </a:rPr>
+              <a:t>                self.down = self.pressed = True</a:t>
+            </a:r>
+          </a:p>
+          <a:p>
+            <a:pPr>
+              <a:spcAft>
+                <a:spcPts val="0"/>
+              </a:spcAft>
+            </a:pPr>
+            <a:r>
+              <a:rPr sz="800">
+                <a:solidFill>
+                  <a:srgbClr val="CCCCCC"/>
+                </a:solidFill>
+                <a:latin typeface="Consolas"/>
+              </a:rPr>
+              <a:t>            elif ev.MouseInput.Event == irr.EMIE_LMOUSE_LEFT_UP:</a:t>
+            </a:r>
+          </a:p>
+          <a:p>
+            <a:pPr>
+              <a:spcAft>
+                <a:spcPts val="0"/>
+              </a:spcAft>
+            </a:pPr>
+            <a:r>
+              <a:rPr sz="800">
+                <a:solidFill>
+                  <a:srgbClr val="CCCCCC"/>
+                </a:solidFill>
+                <a:latin typeface="Consolas"/>
+              </a:rPr>
+              <a:t>                self.down = False</a:t>
             </a:r>
           </a:p>
         </p:txBody>
@@ -12112,8 +11852,8 @@
         </p:nvSpPr>
         <p:spPr>
           <a:xfrm>
-            <a:off x="402336" y="5705855"/>
-            <a:ext cx="11393424" cy="713232"/>
+            <a:off x="402336" y="5274056"/>
+            <a:ext cx="11393424" cy="987551"/>
           </a:xfrm>
           <a:prstGeom prst="rect">
             <a:avLst/>
@@ -12133,7 +11873,38 @@
             </a:pPr>
             <a:r>
               <a:rPr sz="1600"/>
-              <a:t>Exposed in PyChrono already, and exact: the same primitive a native mouse handler would call. Screen pixel to ray is your arithmetic; ray to body is Chrono's.</a:t>
+              <a:t>Without it, reading the mouse means going around Chrono to the operating system: </a:t>
+            </a:r>
+            <a:r>
+              <a:rPr sz="1400">
+                <a:latin typeface="Consolas"/>
+              </a:rPr>
+              <a:t>135 lines</a:t>
+            </a:r>
+            <a:r>
+              <a:rPr sz="1600"/>
+              <a:t>, macOS only, and it breaks when another window takes focus.</a:t>
+            </a:r>
+          </a:p>
+          <a:p>
+            <a:pPr>
+              <a:spcAft>
+                <a:spcPts val="400"/>
+              </a:spcAft>
+            </a:pPr>
+            <a:r>
+              <a:rPr sz="1600"/>
+              <a:t>With it, the same capability is </a:t>
+            </a:r>
+            <a:r>
+              <a:rPr sz="1400">
+                <a:latin typeface="Consolas"/>
+              </a:rPr>
+              <a:t>56 lines</a:t>
+            </a:r>
+            <a:r>
+              <a:rPr sz="1600"/>
+              <a:t> of ordinary PyChrono. Upstream PR to follow this talk.</a:t>
             </a:r>
           </a:p>
         </p:txBody>
@@ -12232,6 +12003,1013 @@
           <a:p>
             <a:r>
               <a:rPr sz="2600"/>
+              <a:t>Turning a click into a body: the ray-cast surface</a:t>
+            </a:r>
+          </a:p>
+        </p:txBody>
+      </p:sp>
+      <p:sp>
+        <p:nvSpPr>
+          <p:cNvPr id="3" name="CodeBox"/>
+          <p:cNvSpPr txBox="1"/>
+          <p:nvPr/>
+        </p:nvSpPr>
+        <p:spPr>
+          <a:xfrm>
+            <a:off x="0" y="1207008"/>
+            <a:ext cx="12188952" cy="4389119"/>
+          </a:xfrm>
+          <a:prstGeom prst="rect">
+            <a:avLst/>
+          </a:prstGeom>
+          <a:solidFill>
+            <a:srgbClr val="000000"/>
+          </a:solidFill>
+        </p:spPr>
+        <p:txBody>
+          <a:bodyPr wrap="none" lIns="320040" tIns="91440">
+            <a:spAutoFit/>
+          </a:bodyPr>
+          <a:lstStyle/>
+          <a:p>
+            <a:pPr>
+              <a:spcAft>
+                <a:spcPts val="0"/>
+              </a:spcAft>
+            </a:pPr>
+            <a:r>
+              <a:rPr sz="900">
+                <a:solidFill>
+                  <a:srgbClr val="7FAF7F"/>
+                </a:solidFill>
+                <a:latin typeface="Consolas"/>
+              </a:rPr>
+              <a:t>// chrono/collision/ChCollisionSystem.h</a:t>
+            </a:r>
+          </a:p>
+          <a:p>
+            <a:pPr>
+              <a:spcAft>
+                <a:spcPts val="0"/>
+              </a:spcAft>
+            </a:pPr>
+            <a:r>
+              <a:rPr sz="900">
+                <a:solidFill>
+                  <a:srgbClr val="CCCCCC"/>
+                </a:solidFill>
+                <a:latin typeface="Consolas"/>
+              </a:rPr>
+              <a:t>struct </a:t>
+            </a:r>
+            <a:r>
+              <a:rPr sz="900">
+                <a:solidFill>
+                  <a:srgbClr val="F0A040"/>
+                </a:solidFill>
+                <a:latin typeface="Consolas"/>
+              </a:rPr>
+              <a:t>ChRayhitResult</a:t>
+            </a:r>
+            <a:r>
+              <a:rPr sz="900">
+                <a:solidFill>
+                  <a:srgbClr val="CCCCCC"/>
+                </a:solidFill>
+                <a:latin typeface="Consolas"/>
+              </a:rPr>
+              <a:t> {</a:t>
+            </a:r>
+          </a:p>
+          <a:p>
+            <a:pPr>
+              <a:spcAft>
+                <a:spcPts val="0"/>
+              </a:spcAft>
+            </a:pPr>
+            <a:r>
+              <a:rPr sz="900">
+                <a:solidFill>
+                  <a:srgbClr val="CCCCCC"/>
+                </a:solidFill>
+                <a:latin typeface="Consolas"/>
+              </a:rPr>
+              <a:t>    bool hit;</a:t>
+            </a:r>
+          </a:p>
+          <a:p>
+            <a:pPr>
+              <a:spcAft>
+                <a:spcPts val="0"/>
+              </a:spcAft>
+            </a:pPr>
+            <a:r>
+              <a:rPr sz="900">
+                <a:solidFill>
+                  <a:srgbClr val="CCCCCC"/>
+                </a:solidFill>
+                <a:latin typeface="Consolas"/>
+              </a:rPr>
+              <a:t>    </a:t>
+            </a:r>
+            <a:r>
+              <a:rPr sz="900">
+                <a:solidFill>
+                  <a:srgbClr val="F0A040"/>
+                </a:solidFill>
+                <a:latin typeface="Consolas"/>
+              </a:rPr>
+              <a:t>ChVector3d</a:t>
+            </a:r>
+            <a:r>
+              <a:rPr sz="900">
+                <a:solidFill>
+                  <a:srgbClr val="CCCCCC"/>
+                </a:solidFill>
+                <a:latin typeface="Consolas"/>
+              </a:rPr>
+              <a:t> abs_hitPoint;     </a:t>
+            </a:r>
+            <a:r>
+              <a:rPr sz="900">
+                <a:solidFill>
+                  <a:srgbClr val="7FAF7F"/>
+                </a:solidFill>
+                <a:latin typeface="Consolas"/>
+              </a:rPr>
+              <a:t>// where, in world coordinates</a:t>
+            </a:r>
+          </a:p>
+          <a:p>
+            <a:pPr>
+              <a:spcAft>
+                <a:spcPts val="0"/>
+              </a:spcAft>
+            </a:pPr>
+            <a:r>
+              <a:rPr sz="900">
+                <a:solidFill>
+                  <a:srgbClr val="CCCCCC"/>
+                </a:solidFill>
+                <a:latin typeface="Consolas"/>
+              </a:rPr>
+              <a:t>    </a:t>
+            </a:r>
+            <a:r>
+              <a:rPr sz="900">
+                <a:solidFill>
+                  <a:srgbClr val="F0A040"/>
+                </a:solidFill>
+                <a:latin typeface="Consolas"/>
+              </a:rPr>
+              <a:t>ChVector3d</a:t>
+            </a:r>
+            <a:r>
+              <a:rPr sz="900">
+                <a:solidFill>
+                  <a:srgbClr val="CCCCCC"/>
+                </a:solidFill>
+                <a:latin typeface="Consolas"/>
+              </a:rPr>
+              <a:t> abs_hitNormal;    </a:t>
+            </a:r>
+            <a:r>
+              <a:rPr sz="900">
+                <a:solidFill>
+                  <a:srgbClr val="7FAF7F"/>
+                </a:solidFill>
+                <a:latin typeface="Consolas"/>
+              </a:rPr>
+              <a:t>// the surface normal there</a:t>
+            </a:r>
+          </a:p>
+          <a:p>
+            <a:pPr>
+              <a:spcAft>
+                <a:spcPts val="0"/>
+              </a:spcAft>
+            </a:pPr>
+            <a:r>
+              <a:rPr sz="900">
+                <a:solidFill>
+                  <a:srgbClr val="CCCCCC"/>
+                </a:solidFill>
+                <a:latin typeface="Consolas"/>
+              </a:rPr>
+              <a:t>    double dist_factor;          </a:t>
+            </a:r>
+            <a:r>
+              <a:rPr sz="900">
+                <a:solidFill>
+                  <a:srgbClr val="7FAF7F"/>
+                </a:solidFill>
+                <a:latin typeface="Consolas"/>
+              </a:rPr>
+              <a:t>// 0 .. 1 along the segment</a:t>
+            </a:r>
+          </a:p>
+          <a:p>
+            <a:pPr>
+              <a:spcAft>
+                <a:spcPts val="0"/>
+              </a:spcAft>
+            </a:pPr>
+            <a:r>
+              <a:rPr sz="900">
+                <a:solidFill>
+                  <a:srgbClr val="CCCCCC"/>
+                </a:solidFill>
+                <a:latin typeface="Consolas"/>
+              </a:rPr>
+              <a:t>    </a:t>
+            </a:r>
+            <a:r>
+              <a:rPr sz="900">
+                <a:solidFill>
+                  <a:srgbClr val="F0A040"/>
+                </a:solidFill>
+                <a:latin typeface="Consolas"/>
+              </a:rPr>
+              <a:t>ChCollisionModel</a:t>
+            </a:r>
+            <a:r>
+              <a:rPr sz="900">
+                <a:solidFill>
+                  <a:srgbClr val="CCCCCC"/>
+                </a:solidFill>
+                <a:latin typeface="Consolas"/>
+              </a:rPr>
+              <a:t>* hitModel;  </a:t>
+            </a:r>
+            <a:r>
+              <a:rPr sz="900">
+                <a:solidFill>
+                  <a:srgbClr val="7FAF7F"/>
+                </a:solidFill>
+                <a:latin typeface="Consolas"/>
+              </a:rPr>
+              <a:t>// -&gt; CastToChBody() for the body</a:t>
+            </a:r>
+          </a:p>
+          <a:p>
+            <a:pPr>
+              <a:spcAft>
+                <a:spcPts val="0"/>
+              </a:spcAft>
+            </a:pPr>
+            <a:r>
+              <a:rPr sz="900">
+                <a:solidFill>
+                  <a:srgbClr val="CCCCCC"/>
+                </a:solidFill>
+                <a:latin typeface="Consolas"/>
+              </a:rPr>
+              <a:t>};</a:t>
+            </a:r>
+          </a:p>
+          <a:p>
+            <a:pPr>
+              <a:spcAft>
+                <a:spcPts val="0"/>
+              </a:spcAft>
+            </a:pPr>
+            <a:r>
+              <a:rPr sz="900">
+                <a:solidFill>
+                  <a:srgbClr val="CCCCCC"/>
+                </a:solidFill>
+                <a:latin typeface="Consolas"/>
+              </a:rPr>
+              <a:t> </a:t>
+            </a:r>
+          </a:p>
+          <a:p>
+            <a:pPr>
+              <a:spcAft>
+                <a:spcPts val="0"/>
+              </a:spcAft>
+            </a:pPr>
+            <a:r>
+              <a:rPr sz="900">
+                <a:solidFill>
+                  <a:srgbClr val="CCCCCC"/>
+                </a:solidFill>
+                <a:latin typeface="Consolas"/>
+              </a:rPr>
+              <a:t>virtual bool </a:t>
+            </a:r>
+            <a:r>
+              <a:rPr sz="900">
+                <a:solidFill>
+                  <a:srgbClr val="7FC7E8"/>
+                </a:solidFill>
+                <a:latin typeface="Consolas"/>
+              </a:rPr>
+              <a:t>RayHit</a:t>
+            </a:r>
+            <a:r>
+              <a:rPr sz="900">
+                <a:solidFill>
+                  <a:srgbClr val="CCCCCC"/>
+                </a:solidFill>
+                <a:latin typeface="Consolas"/>
+              </a:rPr>
+              <a:t>(const </a:t>
+            </a:r>
+            <a:r>
+              <a:rPr sz="900">
+                <a:solidFill>
+                  <a:srgbClr val="F0A040"/>
+                </a:solidFill>
+                <a:latin typeface="Consolas"/>
+              </a:rPr>
+              <a:t>ChVector3d</a:t>
+            </a:r>
+            <a:r>
+              <a:rPr sz="900">
+                <a:solidFill>
+                  <a:srgbClr val="CCCCCC"/>
+                </a:solidFill>
+                <a:latin typeface="Consolas"/>
+              </a:rPr>
+              <a:t>&amp; from,</a:t>
+            </a:r>
+          </a:p>
+          <a:p>
+            <a:pPr>
+              <a:spcAft>
+                <a:spcPts val="0"/>
+              </a:spcAft>
+            </a:pPr>
+            <a:r>
+              <a:rPr sz="900">
+                <a:solidFill>
+                  <a:srgbClr val="CCCCCC"/>
+                </a:solidFill>
+                <a:latin typeface="Consolas"/>
+              </a:rPr>
+              <a:t>                    const </a:t>
+            </a:r>
+            <a:r>
+              <a:rPr sz="900">
+                <a:solidFill>
+                  <a:srgbClr val="F0A040"/>
+                </a:solidFill>
+                <a:latin typeface="Consolas"/>
+              </a:rPr>
+              <a:t>ChVector3d</a:t>
+            </a:r>
+            <a:r>
+              <a:rPr sz="900">
+                <a:solidFill>
+                  <a:srgbClr val="CCCCCC"/>
+                </a:solidFill>
+                <a:latin typeface="Consolas"/>
+              </a:rPr>
+              <a:t>&amp; to,</a:t>
+            </a:r>
+          </a:p>
+          <a:p>
+            <a:pPr>
+              <a:spcAft>
+                <a:spcPts val="0"/>
+              </a:spcAft>
+            </a:pPr>
+            <a:r>
+              <a:rPr sz="900">
+                <a:solidFill>
+                  <a:srgbClr val="CCCCCC"/>
+                </a:solidFill>
+                <a:latin typeface="Consolas"/>
+              </a:rPr>
+              <a:t>                    </a:t>
+            </a:r>
+            <a:r>
+              <a:rPr sz="900">
+                <a:solidFill>
+                  <a:srgbClr val="F0A040"/>
+                </a:solidFill>
+                <a:latin typeface="Consolas"/>
+              </a:rPr>
+              <a:t>ChRayhitResult</a:t>
+            </a:r>
+            <a:r>
+              <a:rPr sz="900">
+                <a:solidFill>
+                  <a:srgbClr val="CCCCCC"/>
+                </a:solidFill>
+                <a:latin typeface="Consolas"/>
+              </a:rPr>
+              <a:t>&amp; result) const;</a:t>
+            </a:r>
+          </a:p>
+          <a:p>
+            <a:pPr>
+              <a:spcAft>
+                <a:spcPts val="0"/>
+              </a:spcAft>
+            </a:pPr>
+            <a:r>
+              <a:rPr sz="900">
+                <a:solidFill>
+                  <a:srgbClr val="CCCCCC"/>
+                </a:solidFill>
+                <a:latin typeface="Consolas"/>
+              </a:rPr>
+              <a:t> </a:t>
+            </a:r>
+          </a:p>
+          <a:p>
+            <a:pPr>
+              <a:spcAft>
+                <a:spcPts val="0"/>
+              </a:spcAft>
+            </a:pPr>
+            <a:r>
+              <a:rPr sz="900">
+                <a:solidFill>
+                  <a:srgbClr val="7FAF7F"/>
+                </a:solidFill>
+                <a:latin typeface="Consolas"/>
+              </a:rPr>
+              <a:t>// A ray sees COLLISION geometry, never visual geometry. A link you</a:t>
+            </a:r>
+          </a:p>
+          <a:p>
+            <a:pPr>
+              <a:spcAft>
+                <a:spcPts val="0"/>
+              </a:spcAft>
+            </a:pPr>
+            <a:r>
+              <a:rPr sz="900">
+                <a:solidFill>
+                  <a:srgbClr val="7FAF7F"/>
+                </a:solidFill>
+                <a:latin typeface="Consolas"/>
+              </a:rPr>
+              <a:t>// can see but whose collision is off is invisible to every click.</a:t>
+            </a:r>
+          </a:p>
+          <a:p>
+            <a:pPr>
+              <a:spcAft>
+                <a:spcPts val="0"/>
+              </a:spcAft>
+            </a:pPr>
+            <a:r>
+              <a:rPr sz="900">
+                <a:solidFill>
+                  <a:srgbClr val="7FAF7F"/>
+                </a:solidFill>
+                <a:latin typeface="Consolas"/>
+              </a:rPr>
+              <a:t>// That one sentence accounted for every 'it will not pick' bug here.</a:t>
+            </a:r>
+          </a:p>
+          <a:p>
+            <a:pPr>
+              <a:spcAft>
+                <a:spcPts val="0"/>
+              </a:spcAft>
+            </a:pPr>
+            <a:r>
+              <a:rPr sz="900">
+                <a:solidFill>
+                  <a:srgbClr val="CCCCCC"/>
+                </a:solidFill>
+                <a:latin typeface="Consolas"/>
+              </a:rPr>
+              <a:t> </a:t>
+            </a:r>
+          </a:p>
+          <a:p>
+            <a:pPr>
+              <a:spcAft>
+                <a:spcPts val="0"/>
+              </a:spcAft>
+            </a:pPr>
+            <a:r>
+              <a:rPr sz="900">
+                <a:solidFill>
+                  <a:srgbClr val="7FAF7F"/>
+                </a:solidFill>
+                <a:latin typeface="Consolas"/>
+              </a:rPr>
+              <a:t># ---- and how this tutorial calls it (hil_manipulate.py, lines 338 to 349) ------</a:t>
+            </a:r>
+          </a:p>
+          <a:p>
+            <a:pPr>
+              <a:spcAft>
+                <a:spcPts val="0"/>
+              </a:spcAft>
+            </a:pPr>
+            <a:r>
+              <a:rPr sz="900">
+                <a:solidFill>
+                  <a:srgbClr val="CCCCCC"/>
+                </a:solidFill>
+                <a:latin typeface="Consolas"/>
+              </a:rPr>
+              <a:t>def </a:t>
+            </a:r>
+            <a:r>
+              <a:rPr sz="900">
+                <a:solidFill>
+                  <a:srgbClr val="7FC7E8"/>
+                </a:solidFill>
+                <a:latin typeface="Consolas"/>
+              </a:rPr>
+              <a:t>pick_along_ray</a:t>
+            </a:r>
+            <a:r>
+              <a:rPr sz="900">
+                <a:solidFill>
+                  <a:srgbClr val="CCCCCC"/>
+                </a:solidFill>
+                <a:latin typeface="Consolas"/>
+              </a:rPr>
+              <a:t>(system, start, end):</a:t>
+            </a:r>
+          </a:p>
+          <a:p>
+            <a:pPr>
+              <a:spcAft>
+                <a:spcPts val="0"/>
+              </a:spcAft>
+            </a:pPr>
+            <a:r>
+              <a:rPr sz="900">
+                <a:solidFill>
+                  <a:srgbClr val="CCCCCC"/>
+                </a:solidFill>
+                <a:latin typeface="Consolas"/>
+              </a:rPr>
+              <a:t>    </a:t>
+            </a:r>
+            <a:r>
+              <a:rPr sz="900">
+                <a:solidFill>
+                  <a:srgbClr val="D8A0C0"/>
+                </a:solidFill>
+                <a:latin typeface="Consolas"/>
+              </a:rPr>
+              <a:t>""</a:t>
+            </a:r>
+            <a:r>
+              <a:rPr sz="900">
+                <a:solidFill>
+                  <a:srgbClr val="D8A0C0"/>
+                </a:solidFill>
+                <a:latin typeface="Consolas"/>
+              </a:rPr>
+              <a:t>"The primitive a mouse click would use. Returns (body, world_point) or None."</a:t>
+            </a:r>
+            <a:r>
+              <a:rPr sz="900">
+                <a:solidFill>
+                  <a:srgbClr val="D8A0C0"/>
+                </a:solidFill>
+                <a:latin typeface="Consolas"/>
+              </a:rPr>
+              <a:t>""</a:t>
+            </a:r>
+          </a:p>
+          <a:p>
+            <a:pPr>
+              <a:spcAft>
+                <a:spcPts val="0"/>
+              </a:spcAft>
+            </a:pPr>
+            <a:r>
+              <a:rPr sz="900">
+                <a:solidFill>
+                  <a:srgbClr val="CCCCCC"/>
+                </a:solidFill>
+                <a:latin typeface="Consolas"/>
+              </a:rPr>
+              <a:t>    res = chrono.</a:t>
+            </a:r>
+            <a:r>
+              <a:rPr sz="900">
+                <a:solidFill>
+                  <a:srgbClr val="F0A040"/>
+                </a:solidFill>
+                <a:latin typeface="Consolas"/>
+              </a:rPr>
+              <a:t>ChRayhitResult</a:t>
+            </a:r>
+            <a:r>
+              <a:rPr sz="900">
+                <a:solidFill>
+                  <a:srgbClr val="CCCCCC"/>
+                </a:solidFill>
+                <a:latin typeface="Consolas"/>
+              </a:rPr>
+              <a:t>()</a:t>
+            </a:r>
+          </a:p>
+          <a:p>
+            <a:pPr>
+              <a:spcAft>
+                <a:spcPts val="0"/>
+              </a:spcAft>
+            </a:pPr>
+            <a:r>
+              <a:rPr sz="900">
+                <a:solidFill>
+                  <a:srgbClr val="CCCCCC"/>
+                </a:solidFill>
+                <a:latin typeface="Consolas"/>
+              </a:rPr>
+              <a:t>    system.</a:t>
+            </a:r>
+            <a:r>
+              <a:rPr sz="900">
+                <a:solidFill>
+                  <a:srgbClr val="7FC7E8"/>
+                </a:solidFill>
+                <a:latin typeface="Consolas"/>
+              </a:rPr>
+              <a:t>GetCollisionSystem</a:t>
+            </a:r>
+            <a:r>
+              <a:rPr sz="900">
+                <a:solidFill>
+                  <a:srgbClr val="CCCCCC"/>
+                </a:solidFill>
+                <a:latin typeface="Consolas"/>
+              </a:rPr>
+              <a:t>().</a:t>
+            </a:r>
+            <a:r>
+              <a:rPr sz="900">
+                <a:solidFill>
+                  <a:srgbClr val="7FC7E8"/>
+                </a:solidFill>
+                <a:latin typeface="Consolas"/>
+              </a:rPr>
+              <a:t>RayHit</a:t>
+            </a:r>
+            <a:r>
+              <a:rPr sz="900">
+                <a:solidFill>
+                  <a:srgbClr val="CCCCCC"/>
+                </a:solidFill>
+                <a:latin typeface="Consolas"/>
+              </a:rPr>
+              <a:t>(start, end, res)</a:t>
+            </a:r>
+          </a:p>
+          <a:p>
+            <a:pPr>
+              <a:spcAft>
+                <a:spcPts val="0"/>
+              </a:spcAft>
+            </a:pPr>
+            <a:r>
+              <a:rPr sz="900">
+                <a:solidFill>
+                  <a:srgbClr val="CCCCCC"/>
+                </a:solidFill>
+                <a:latin typeface="Consolas"/>
+              </a:rPr>
+              <a:t>    if not res.hit:</a:t>
+            </a:r>
+          </a:p>
+          <a:p>
+            <a:pPr>
+              <a:spcAft>
+                <a:spcPts val="0"/>
+              </a:spcAft>
+            </a:pPr>
+            <a:r>
+              <a:rPr sz="900">
+                <a:solidFill>
+                  <a:srgbClr val="CCCCCC"/>
+                </a:solidFill>
+                <a:latin typeface="Consolas"/>
+              </a:rPr>
+              <a:t>        return None</a:t>
+            </a:r>
+          </a:p>
+          <a:p>
+            <a:pPr>
+              <a:spcAft>
+                <a:spcPts val="0"/>
+              </a:spcAft>
+            </a:pPr>
+            <a:r>
+              <a:rPr sz="900">
+                <a:solidFill>
+                  <a:srgbClr val="CCCCCC"/>
+                </a:solidFill>
+                <a:latin typeface="Consolas"/>
+              </a:rPr>
+              <a:t>    body = chrono.</a:t>
+            </a:r>
+            <a:r>
+              <a:rPr sz="900">
+                <a:solidFill>
+                  <a:srgbClr val="7FC7E8"/>
+                </a:solidFill>
+                <a:latin typeface="Consolas"/>
+              </a:rPr>
+              <a:t>CastToChBody</a:t>
+            </a:r>
+            <a:r>
+              <a:rPr sz="900">
+                <a:solidFill>
+                  <a:srgbClr val="CCCCCC"/>
+                </a:solidFill>
+                <a:latin typeface="Consolas"/>
+              </a:rPr>
+              <a:t>(res.hitModel.</a:t>
+            </a:r>
+            <a:r>
+              <a:rPr sz="900">
+                <a:solidFill>
+                  <a:srgbClr val="7FC7E8"/>
+                </a:solidFill>
+                <a:latin typeface="Consolas"/>
+              </a:rPr>
+              <a:t>GetContactable</a:t>
+            </a:r>
+            <a:r>
+              <a:rPr sz="900">
+                <a:solidFill>
+                  <a:srgbClr val="CCCCCC"/>
+                </a:solidFill>
+                <a:latin typeface="Consolas"/>
+              </a:rPr>
+              <a:t>())</a:t>
+            </a:r>
+          </a:p>
+          <a:p>
+            <a:pPr>
+              <a:spcAft>
+                <a:spcPts val="0"/>
+              </a:spcAft>
+            </a:pPr>
+            <a:r>
+              <a:rPr sz="900">
+                <a:solidFill>
+                  <a:srgbClr val="CCCCCC"/>
+                </a:solidFill>
+                <a:latin typeface="Consolas"/>
+              </a:rPr>
+              <a:t>    if body is None:</a:t>
+            </a:r>
+          </a:p>
+          <a:p>
+            <a:pPr>
+              <a:spcAft>
+                <a:spcPts val="0"/>
+              </a:spcAft>
+            </a:pPr>
+            <a:r>
+              <a:rPr sz="900">
+                <a:solidFill>
+                  <a:srgbClr val="CCCCCC"/>
+                </a:solidFill>
+                <a:latin typeface="Consolas"/>
+              </a:rPr>
+              <a:t>        return None</a:t>
+            </a:r>
+          </a:p>
+          <a:p>
+            <a:pPr>
+              <a:spcAft>
+                <a:spcPts val="0"/>
+              </a:spcAft>
+            </a:pPr>
+            <a:r>
+              <a:rPr sz="900">
+                <a:solidFill>
+                  <a:srgbClr val="CCCCCC"/>
+                </a:solidFill>
+                <a:latin typeface="Consolas"/>
+              </a:rPr>
+              <a:t>    p, nrm = res.abs_hitPoint, res.abs_hitNormal</a:t>
+            </a:r>
+          </a:p>
+          <a:p>
+            <a:pPr>
+              <a:spcAft>
+                <a:spcPts val="0"/>
+              </a:spcAft>
+            </a:pPr>
+            <a:r>
+              <a:rPr sz="900">
+                <a:solidFill>
+                  <a:srgbClr val="CCCCCC"/>
+                </a:solidFill>
+                <a:latin typeface="Consolas"/>
+              </a:rPr>
+              <a:t>    </a:t>
+            </a:r>
+            <a:r>
+              <a:rPr sz="900">
+                <a:solidFill>
+                  <a:srgbClr val="7FC7E8"/>
+                </a:solidFill>
+                <a:latin typeface="Consolas"/>
+              </a:rPr>
+              <a:t>return</a:t>
+            </a:r>
+            <a:r>
+              <a:rPr sz="900">
+                <a:solidFill>
+                  <a:srgbClr val="CCCCCC"/>
+                </a:solidFill>
+                <a:latin typeface="Consolas"/>
+              </a:rPr>
+              <a:t> (body, chrono.</a:t>
+            </a:r>
+            <a:r>
+              <a:rPr sz="900">
+                <a:solidFill>
+                  <a:srgbClr val="F0A040"/>
+                </a:solidFill>
+                <a:latin typeface="Consolas"/>
+              </a:rPr>
+              <a:t>ChVector3d</a:t>
+            </a:r>
+            <a:r>
+              <a:rPr sz="900">
+                <a:solidFill>
+                  <a:srgbClr val="CCCCCC"/>
+                </a:solidFill>
+                <a:latin typeface="Consolas"/>
+              </a:rPr>
+              <a:t>(p.x, p.y, p.z),</a:t>
+            </a:r>
+          </a:p>
+          <a:p>
+            <a:pPr>
+              <a:spcAft>
+                <a:spcPts val="0"/>
+              </a:spcAft>
+            </a:pPr>
+            <a:r>
+              <a:rPr sz="900">
+                <a:solidFill>
+                  <a:srgbClr val="CCCCCC"/>
+                </a:solidFill>
+                <a:latin typeface="Consolas"/>
+              </a:rPr>
+              <a:t>            chrono.</a:t>
+            </a:r>
+            <a:r>
+              <a:rPr sz="900">
+                <a:solidFill>
+                  <a:srgbClr val="F0A040"/>
+                </a:solidFill>
+                <a:latin typeface="Consolas"/>
+              </a:rPr>
+              <a:t>ChVector3d</a:t>
+            </a:r>
+            <a:r>
+              <a:rPr sz="900">
+                <a:solidFill>
+                  <a:srgbClr val="CCCCCC"/>
+                </a:solidFill>
+                <a:latin typeface="Consolas"/>
+              </a:rPr>
+              <a:t>(nrm.x, nrm.y, nrm.z))</a:t>
+            </a:r>
+          </a:p>
+        </p:txBody>
+      </p:sp>
+      <p:sp>
+        <p:nvSpPr>
+          <p:cNvPr id="4" name="NoteBox"/>
+          <p:cNvSpPr txBox="1"/>
+          <p:nvPr/>
+        </p:nvSpPr>
+        <p:spPr>
+          <a:xfrm>
+            <a:off x="402336" y="5705855"/>
+            <a:ext cx="11393424" cy="713232"/>
+          </a:xfrm>
+          <a:prstGeom prst="rect">
+            <a:avLst/>
+          </a:prstGeom>
+          <a:noFill/>
+        </p:spPr>
+        <p:txBody>
+          <a:bodyPr wrap="square">
+            <a:spAutoFit/>
+          </a:bodyPr>
+          <a:lstStyle/>
+          <a:p>
+            <a:pPr>
+              <a:spcAft>
+                <a:spcPts val="400"/>
+              </a:spcAft>
+            </a:pPr>
+            <a:r>
+              <a:rPr sz="1600"/>
+              <a:t>Exposed in PyChrono already, and exact: the same primitive a native mouse handler would call. Screen pixel to ray is your arithmetic; ray to body is Chrono's.</a:t>
+            </a:r>
+          </a:p>
+        </p:txBody>
+      </p:sp>
+      <p:sp>
+        <p:nvSpPr>
+          <p:cNvPr id="5" name="Footer"/>
+          <p:cNvSpPr txBox="1"/>
+          <p:nvPr/>
+        </p:nvSpPr>
+        <p:spPr>
+          <a:xfrm>
+            <a:off x="310896" y="6647688"/>
+            <a:ext cx="11640312" cy="192024"/>
+          </a:xfrm>
+          <a:prstGeom prst="rect">
+            <a:avLst/>
+          </a:prstGeom>
+          <a:noFill/>
+        </p:spPr>
+        <p:txBody>
+          <a:bodyPr wrap="none">
+            <a:spAutoFit/>
+          </a:bodyPr>
+          <a:lstStyle/>
+          <a:p>
+            <a:r>
+              <a:rPr sz="1000"/>
+              <a:t>University of Wisconsin - Madison</a:t>
+            </a:r>
+          </a:p>
+        </p:txBody>
+      </p:sp>
+      <p:sp>
+        <p:nvSpPr>
+          <p:cNvPr id="6" name="PageNo"/>
+          <p:cNvSpPr txBox="1"/>
+          <p:nvPr/>
+        </p:nvSpPr>
+        <p:spPr>
+          <a:xfrm>
+            <a:off x="10250424" y="6647688"/>
+            <a:ext cx="1709928" cy="192024"/>
+          </a:xfrm>
+          <a:prstGeom prst="rect">
+            <a:avLst/>
+          </a:prstGeom>
+          <a:noFill/>
+        </p:spPr>
+        <p:txBody>
+          <a:bodyPr wrap="none">
+            <a:spAutoFit/>
+          </a:bodyPr>
+          <a:lstStyle/>
+          <a:p>
+            <a:pPr algn="r"/>
+            <a:r>
+              <a:rPr sz="1000"/>
+              <a:t>27</a:t>
+            </a:r>
+          </a:p>
+        </p:txBody>
+      </p:sp>
+    </p:spTree>
+  </p:cSld>
+  <p:clrMapOvr>
+    <a:masterClrMapping/>
+  </p:clrMapOvr>
+</p:sld>
+</file>
+
+<file path=ppt/slides/slide28.xml><?xml version="1.0" encoding="utf-8"?>
+<p:sld xmlns:a="http://schemas.openxmlformats.org/drawingml/2006/main" xmlns:p="http://schemas.openxmlformats.org/presentationml/2006/main" xmlns:r="http://schemas.openxmlformats.org/officeDocument/2006/relationships">
+  <p:cSld>
+    <p:spTree>
+      <p:nvGrpSpPr>
+        <p:cNvPr id="1" name=""/>
+        <p:cNvGrpSpPr/>
+        <p:nvPr/>
+      </p:nvGrpSpPr>
+      <p:grpSpPr/>
+      <p:sp>
+        <p:nvSpPr>
+          <p:cNvPr id="2" name="Title 1"/>
+          <p:cNvSpPr>
+            <a:spLocks noGrp="1"/>
+          </p:cNvSpPr>
+          <p:nvPr>
+            <p:ph type="title"/>
+          </p:nvPr>
+        </p:nvSpPr>
+        <p:spPr/>
+        <p:txBody>
+          <a:bodyPr/>
+          <a:lstStyle/>
+          <a:p>
+            <a:r>
+              <a:rPr sz="2600"/>
               <a:t>Turning a pull into physics: force, or constraint</a:t>
             </a:r>
           </a:p>
@@ -13355,7 +14133,7 @@
             <a:pPr algn="r"/>
             <a:r>
               <a:rPr sz="1000"/>
-              <a:t>27</a:t>
+              <a:t>28</a:t>
             </a:r>
           </a:p>
         </p:txBody>
@@ -13368,7 +14146,7 @@
 </p:sld>
 </file>
 
-<file path=ppt/slides/slide28.xml><?xml version="1.0" encoding="utf-8"?>
+<file path=ppt/slides/slide29.xml><?xml version="1.0" encoding="utf-8"?>
 <p:sld xmlns:a="http://schemas.openxmlformats.org/drawingml/2006/main" xmlns:p="http://schemas.openxmlformats.org/presentationml/2006/main" xmlns:r="http://schemas.openxmlformats.org/officeDocument/2006/relationships">
   <p:cSld>
     <p:spTree>
@@ -13586,924 +14364,6 @@
       <p:sp>
         <p:nvSpPr>
           <p:cNvPr id="7" name="PageNo"/>
-          <p:cNvSpPr txBox="1"/>
-          <p:nvPr/>
-        </p:nvSpPr>
-        <p:spPr>
-          <a:xfrm>
-            <a:off x="10250424" y="6647688"/>
-            <a:ext cx="1709928" cy="192024"/>
-          </a:xfrm>
-          <a:prstGeom prst="rect">
-            <a:avLst/>
-          </a:prstGeom>
-          <a:noFill/>
-        </p:spPr>
-        <p:txBody>
-          <a:bodyPr wrap="none">
-            <a:spAutoFit/>
-          </a:bodyPr>
-          <a:lstStyle/>
-          <a:p>
-            <a:pPr algn="r"/>
-            <a:r>
-              <a:rPr sz="1000"/>
-              <a:t>28</a:t>
-            </a:r>
-          </a:p>
-        </p:txBody>
-      </p:sp>
-    </p:spTree>
-  </p:cSld>
-  <p:clrMapOvr>
-    <a:masterClrMapping/>
-  </p:clrMapOvr>
-</p:sld>
-</file>
-
-<file path=ppt/slides/slide29.xml><?xml version="1.0" encoding="utf-8"?>
-<p:sld xmlns:a="http://schemas.openxmlformats.org/drawingml/2006/main" xmlns:p="http://schemas.openxmlformats.org/presentationml/2006/main" xmlns:r="http://schemas.openxmlformats.org/officeDocument/2006/relationships">
-  <p:cSld>
-    <p:spTree>
-      <p:nvGrpSpPr>
-        <p:cNvPr id="1" name=""/>
-        <p:cNvGrpSpPr/>
-        <p:nvPr/>
-      </p:nvGrpSpPr>
-      <p:grpSpPr/>
-      <p:sp>
-        <p:nvSpPr>
-          <p:cNvPr id="2" name="Title 1"/>
-          <p:cNvSpPr>
-            <a:spLocks noGrp="1"/>
-          </p:cNvSpPr>
-          <p:nvPr>
-            <p:ph type="title"/>
-          </p:nvPr>
-        </p:nvSpPr>
-        <p:spPr/>
-        <p:txBody>
-          <a:bodyPr/>
-          <a:lstStyle/>
-          <a:p>
-            <a:r>
-              <a:rPr sz="2600"/>
-              <a:t>Taking the human out of the part that must repeat</a:t>
-            </a:r>
-          </a:p>
-        </p:txBody>
-      </p:sp>
-      <p:sp>
-        <p:nvSpPr>
-          <p:cNvPr id="3" name="CodeBox"/>
-          <p:cNvSpPr txBox="1"/>
-          <p:nvPr/>
-        </p:nvSpPr>
-        <p:spPr>
-          <a:xfrm>
-            <a:off x="0" y="1207008"/>
-            <a:ext cx="12188952" cy="4389119"/>
-          </a:xfrm>
-          <a:prstGeom prst="rect">
-            <a:avLst/>
-          </a:prstGeom>
-          <a:solidFill>
-            <a:srgbClr val="000000"/>
-          </a:solidFill>
-        </p:spPr>
-        <p:txBody>
-          <a:bodyPr wrap="none" lIns="320040" tIns="91440">
-            <a:spAutoFit/>
-          </a:bodyPr>
-          <a:lstStyle/>
-          <a:p>
-            <a:pPr>
-              <a:spcAft>
-                <a:spcPts val="0"/>
-              </a:spcAft>
-            </a:pPr>
-            <a:r>
-              <a:rPr sz="800">
-                <a:solidFill>
-                  <a:srgbClr val="7FAF7F"/>
-                </a:solidFill>
-                <a:latin typeface="Consolas"/>
-              </a:rPr>
-              <a:t># The pattern, not the API: decide which half of the human's input</a:t>
-            </a:r>
-          </a:p>
-          <a:p>
-            <a:pPr>
-              <a:spcAft>
-                <a:spcPts val="0"/>
-              </a:spcAft>
-            </a:pPr>
-            <a:r>
-              <a:rPr sz="800">
-                <a:solidFill>
-                  <a:srgbClr val="7FAF7F"/>
-                </a:solidFill>
-                <a:latin typeface="Consolas"/>
-              </a:rPr>
-              <a:t># has to be repeatable, and script only that half.</a:t>
-            </a:r>
-          </a:p>
-          <a:p>
-            <a:pPr>
-              <a:spcAft>
-                <a:spcPts val="0"/>
-              </a:spcAft>
-            </a:pPr>
-            <a:r>
-              <a:rPr sz="800">
-                <a:solidFill>
-                  <a:srgbClr val="7FAF7F"/>
-                </a:solidFill>
-                <a:latin typeface="Consolas"/>
-              </a:rPr>
-              <a:t>#</a:t>
-            </a:r>
-          </a:p>
-          <a:p>
-            <a:pPr>
-              <a:spcAft>
-                <a:spcPts val="0"/>
-              </a:spcAft>
-            </a:pPr>
-            <a:r>
-              <a:rPr sz="800">
-                <a:solidFill>
-                  <a:srgbClr val="7FAF7F"/>
-                </a:solidFill>
-                <a:latin typeface="Consolas"/>
-              </a:rPr>
-              <a:t>#   the person keeps:   WHERE on the body, and WHICH DIRECTION</a:t>
-            </a:r>
-          </a:p>
-          <a:p>
-            <a:pPr>
-              <a:spcAft>
-                <a:spcPts val="0"/>
-              </a:spcAft>
-            </a:pPr>
-            <a:r>
-              <a:rPr sz="800">
-                <a:solidFill>
-                  <a:srgbClr val="7FAF7F"/>
-                </a:solidFill>
-                <a:latin typeface="Consolas"/>
-              </a:rPr>
-              <a:t>#   the machine keeps:  a constant force F held for a fixed window dt</a:t>
-            </a:r>
-          </a:p>
-          <a:p>
-            <a:pPr>
-              <a:spcAft>
-                <a:spcPts val="0"/>
-              </a:spcAft>
-            </a:pPr>
-            <a:r>
-              <a:rPr sz="800">
-                <a:solidFill>
-                  <a:srgbClr val="7FAF7F"/>
-                </a:solidFill>
-                <a:latin typeface="Consolas"/>
-              </a:rPr>
-              <a:t>#</a:t>
-            </a:r>
-          </a:p>
-          <a:p>
-            <a:pPr>
-              <a:spcAft>
-                <a:spcPts val="0"/>
-              </a:spcAft>
-            </a:pPr>
-            <a:r>
-              <a:rPr sz="800">
-                <a:solidFill>
-                  <a:srgbClr val="7FAF7F"/>
-                </a:solidFill>
-                <a:latin typeface="Consolas"/>
-              </a:rPr>
-              <a:t>#   impulse  J = F * dt      both printed, both logged</a:t>
-            </a:r>
-          </a:p>
-          <a:p>
-            <a:pPr>
-              <a:spcAft>
-                <a:spcPts val="0"/>
-              </a:spcAft>
-            </a:pPr>
-            <a:r>
-              <a:rPr sz="800">
-                <a:solidFill>
-                  <a:srgbClr val="7FAF7F"/>
-                </a:solidFill>
-                <a:latin typeface="Consolas"/>
-              </a:rPr>
-              <a:t>#</a:t>
-            </a:r>
-          </a:p>
-          <a:p>
-            <a:pPr>
-              <a:spcAft>
-                <a:spcPts val="0"/>
-              </a:spcAft>
-            </a:pPr>
-            <a:r>
-              <a:rPr sz="800">
-                <a:solidFill>
-                  <a:srgbClr val="7FAF7F"/>
-                </a:solidFill>
-                <a:latin typeface="Consolas"/>
-              </a:rPr>
-              <a:t># A freehand drag cannot answer 'how hard can I shove it', because</a:t>
-            </a:r>
-          </a:p>
-          <a:p>
-            <a:pPr>
-              <a:spcAft>
-                <a:spcPts val="0"/>
-              </a:spcAft>
-            </a:pPr>
-            <a:r>
-              <a:rPr sz="800">
-                <a:solidFill>
-                  <a:srgbClr val="7FAF7F"/>
-                </a:solidFill>
-                <a:latin typeface="Consolas"/>
-              </a:rPr>
-              <a:t># no two drags are the same: the force depends on how fast a hand</a:t>
-            </a:r>
-          </a:p>
-          <a:p>
-            <a:pPr>
-              <a:spcAft>
-                <a:spcPts val="0"/>
-              </a:spcAft>
-            </a:pPr>
-            <a:r>
-              <a:rPr sz="800">
-                <a:solidFill>
-                  <a:srgbClr val="7FAF7F"/>
-                </a:solidFill>
-                <a:latin typeface="Consolas"/>
-              </a:rPr>
-              <a:t># moved and how long a button was held. There is no number at the end.</a:t>
-            </a:r>
-          </a:p>
-          <a:p>
-            <a:pPr>
-              <a:spcAft>
-                <a:spcPts val="0"/>
-              </a:spcAft>
-            </a:pPr>
-            <a:r>
-              <a:rPr sz="800">
-                <a:solidFill>
-                  <a:srgbClr val="7FAF7F"/>
-                </a:solidFill>
-                <a:latin typeface="Consolas"/>
-              </a:rPr>
-              <a:t># Script the magnitude and you get one you can put in a report.</a:t>
-            </a:r>
-          </a:p>
-          <a:p>
-            <a:pPr>
-              <a:spcAft>
-                <a:spcPts val="0"/>
-              </a:spcAft>
-            </a:pPr>
-            <a:r>
-              <a:rPr sz="800">
-                <a:solidFill>
-                  <a:srgbClr val="CCCCCC"/>
-                </a:solidFill>
-                <a:latin typeface="Consolas"/>
-              </a:rPr>
-              <a:t> </a:t>
-            </a:r>
-          </a:p>
-          <a:p>
-            <a:pPr>
-              <a:spcAft>
-                <a:spcPts val="0"/>
-              </a:spcAft>
-            </a:pPr>
-            <a:r>
-              <a:rPr sz="800">
-                <a:solidFill>
-                  <a:srgbClr val="7FAF7F"/>
-                </a:solidFill>
-                <a:latin typeface="Consolas"/>
-              </a:rPr>
-              <a:t># ---- and how this tutorial calls it (hil_push.py, lines 264 to 283) ------</a:t>
-            </a:r>
-          </a:p>
-          <a:p>
-            <a:pPr>
-              <a:spcAft>
-                <a:spcPts val="0"/>
-              </a:spcAft>
-            </a:pPr>
-            <a:r>
-              <a:rPr sz="800">
-                <a:solidFill>
-                  <a:srgbClr val="CCCCCC"/>
-                </a:solidFill>
-                <a:latin typeface="Consolas"/>
-              </a:rPr>
-              <a:t>def </a:t>
-            </a:r>
-            <a:r>
-              <a:rPr sz="800">
-                <a:solidFill>
-                  <a:srgbClr val="7FC7E8"/>
-                </a:solidFill>
-                <a:latin typeface="Consolas"/>
-              </a:rPr>
-              <a:t>fire</a:t>
-            </a:r>
-            <a:r>
-              <a:rPr sz="800">
-                <a:solidFill>
-                  <a:srgbClr val="CCCCCC"/>
-                </a:solidFill>
-                <a:latin typeface="Consolas"/>
-              </a:rPr>
-              <a:t>(self, cfg, t):</a:t>
-            </a:r>
-          </a:p>
-          <a:p>
-            <a:pPr>
-              <a:spcAft>
-                <a:spcPts val="0"/>
-              </a:spcAft>
-            </a:pPr>
-            <a:r>
-              <a:rPr sz="800">
-                <a:solidFill>
-                  <a:srgbClr val="CCCCCC"/>
-                </a:solidFill>
-                <a:latin typeface="Consolas"/>
-              </a:rPr>
-              <a:t>    body = cfg.body</a:t>
-            </a:r>
-          </a:p>
-          <a:p>
-            <a:pPr>
-              <a:spcAft>
-                <a:spcPts val="0"/>
-              </a:spcAft>
-            </a:pPr>
-            <a:r>
-              <a:rPr sz="800">
-                <a:solidFill>
-                  <a:srgbClr val="CCCCCC"/>
-                </a:solidFill>
-                <a:latin typeface="Consolas"/>
-              </a:rPr>
-              <a:t>    self.active = (body, cfg.</a:t>
-            </a:r>
-            <a:r>
-              <a:rPr sz="800">
-                <a:solidFill>
-                  <a:srgbClr val="7FC7E8"/>
-                </a:solidFill>
-                <a:latin typeface="Consolas"/>
-              </a:rPr>
-              <a:t>force</a:t>
-            </a:r>
-            <a:r>
-              <a:rPr sz="800">
-                <a:solidFill>
-                  <a:srgbClr val="CCCCCC"/>
-                </a:solidFill>
-                <a:latin typeface="Consolas"/>
-              </a:rPr>
-              <a:t>(), chrono.</a:t>
-            </a:r>
-            <a:r>
-              <a:rPr sz="800">
-                <a:solidFill>
-                  <a:srgbClr val="F0A040"/>
-                </a:solidFill>
-                <a:latin typeface="Consolas"/>
-              </a:rPr>
-              <a:t>ChVector3d</a:t>
-            </a:r>
-            <a:r>
-              <a:rPr sz="800">
-                <a:solidFill>
-                  <a:srgbClr val="CCCCCC"/>
-                </a:solidFill>
-                <a:latin typeface="Consolas"/>
-              </a:rPr>
-              <a:t>(cfg.local_point),</a:t>
-            </a:r>
-          </a:p>
-          <a:p>
-            <a:pPr>
-              <a:spcAft>
-                <a:spcPts val="0"/>
-              </a:spcAft>
-            </a:pPr>
-            <a:r>
-              <a:rPr sz="800">
-                <a:solidFill>
-                  <a:srgbClr val="CCCCCC"/>
-                </a:solidFill>
-                <a:latin typeface="Consolas"/>
-              </a:rPr>
-              <a:t>                   t + cfg.duration)</a:t>
-            </a:r>
-          </a:p>
-          <a:p>
-            <a:pPr>
-              <a:spcAft>
-                <a:spcPts val="0"/>
-              </a:spcAft>
-            </a:pPr>
-            <a:r>
-              <a:rPr sz="800">
-                <a:solidFill>
-                  <a:srgbClr val="CCCCCC"/>
-                </a:solidFill>
-                <a:latin typeface="Consolas"/>
-              </a:rPr>
-              <a:t>    self.fired_at = t</a:t>
-            </a:r>
-          </a:p>
-          <a:p>
-            <a:pPr>
-              <a:spcAft>
-                <a:spcPts val="0"/>
-              </a:spcAft>
-            </a:pPr>
-            <a:r>
-              <a:rPr sz="800">
-                <a:solidFill>
-                  <a:srgbClr val="CCCCCC"/>
-                </a:solidFill>
-                <a:latin typeface="Consolas"/>
-              </a:rPr>
-              <a:t>    return self.</a:t>
-            </a:r>
-            <a:r>
-              <a:rPr sz="800">
-                <a:solidFill>
-                  <a:srgbClr val="7FC7E8"/>
-                </a:solidFill>
-                <a:latin typeface="Consolas"/>
-              </a:rPr>
-              <a:t>_slot</a:t>
-            </a:r>
-            <a:r>
-              <a:rPr sz="800">
-                <a:solidFill>
-                  <a:srgbClr val="CCCCCC"/>
-                </a:solidFill>
-                <a:latin typeface="Consolas"/>
-              </a:rPr>
-              <a:t>(body)</a:t>
-            </a:r>
-          </a:p>
-          <a:p>
-            <a:pPr>
-              <a:spcAft>
-                <a:spcPts val="0"/>
-              </a:spcAft>
-            </a:pPr>
-            <a:r>
-              <a:rPr sz="800">
-                <a:solidFill>
-                  <a:srgbClr val="CCCCCC"/>
-                </a:solidFill>
-                <a:latin typeface="Consolas"/>
-              </a:rPr>
-              <a:t> </a:t>
-            </a:r>
-          </a:p>
-          <a:p>
-            <a:pPr>
-              <a:spcAft>
-                <a:spcPts val="0"/>
-              </a:spcAft>
-            </a:pPr>
-            <a:r>
-              <a:rPr sz="800">
-                <a:solidFill>
-                  <a:srgbClr val="CCCCCC"/>
-                </a:solidFill>
-                <a:latin typeface="Consolas"/>
-              </a:rPr>
-              <a:t>def </a:t>
-            </a:r>
-            <a:r>
-              <a:rPr sz="800">
-                <a:solidFill>
-                  <a:srgbClr val="7FC7E8"/>
-                </a:solidFill>
-                <a:latin typeface="Consolas"/>
-              </a:rPr>
-              <a:t>update</a:t>
-            </a:r>
-            <a:r>
-              <a:rPr sz="800">
-                <a:solidFill>
-                  <a:srgbClr val="CCCCCC"/>
-                </a:solidFill>
-                <a:latin typeface="Consolas"/>
-              </a:rPr>
-              <a:t>(self, t):</a:t>
-            </a:r>
-          </a:p>
-          <a:p>
-            <a:pPr>
-              <a:spcAft>
-                <a:spcPts val="0"/>
-              </a:spcAft>
-            </a:pPr>
-            <a:r>
-              <a:rPr sz="800">
-                <a:solidFill>
-                  <a:srgbClr val="CCCCCC"/>
-                </a:solidFill>
-                <a:latin typeface="Consolas"/>
-              </a:rPr>
-              <a:t>    </a:t>
-            </a:r>
-            <a:r>
-              <a:rPr sz="800">
-                <a:solidFill>
-                  <a:srgbClr val="D8A0C0"/>
-                </a:solidFill>
-                <a:latin typeface="Consolas"/>
-              </a:rPr>
-              <a:t>""</a:t>
-            </a:r>
-            <a:r>
-              <a:rPr sz="800">
-                <a:solidFill>
-                  <a:srgbClr val="D8A0C0"/>
-                </a:solidFill>
-                <a:latin typeface="Consolas"/>
-              </a:rPr>
-              <a:t>"Call every step, BEFORE DoStepDynamics. Returns True while pushing."</a:t>
-            </a:r>
-            <a:r>
-              <a:rPr sz="800">
-                <a:solidFill>
-                  <a:srgbClr val="D8A0C0"/>
-                </a:solidFill>
-                <a:latin typeface="Consolas"/>
-              </a:rPr>
-              <a:t>""</a:t>
-            </a:r>
-          </a:p>
-          <a:p>
-            <a:pPr>
-              <a:spcAft>
-                <a:spcPts val="0"/>
-              </a:spcAft>
-            </a:pPr>
-            <a:r>
-              <a:rPr sz="800">
-                <a:solidFill>
-                  <a:srgbClr val="CCCCCC"/>
-                </a:solidFill>
-                <a:latin typeface="Consolas"/>
-              </a:rPr>
-              <a:t>    if self.active is None:</a:t>
-            </a:r>
-          </a:p>
-          <a:p>
-            <a:pPr>
-              <a:spcAft>
-                <a:spcPts val="0"/>
-              </a:spcAft>
-            </a:pPr>
-            <a:r>
-              <a:rPr sz="800">
-                <a:solidFill>
-                  <a:srgbClr val="CCCCCC"/>
-                </a:solidFill>
-                <a:latin typeface="Consolas"/>
-              </a:rPr>
-              <a:t>        return False</a:t>
-            </a:r>
-          </a:p>
-          <a:p>
-            <a:pPr>
-              <a:spcAft>
-                <a:spcPts val="0"/>
-              </a:spcAft>
-            </a:pPr>
-            <a:r>
-              <a:rPr sz="800">
-                <a:solidFill>
-                  <a:srgbClr val="CCCCCC"/>
-                </a:solidFill>
-                <a:latin typeface="Consolas"/>
-              </a:rPr>
-              <a:t>    body, force, local, t_end = self.active</a:t>
-            </a:r>
-          </a:p>
-          <a:p>
-            <a:pPr>
-              <a:spcAft>
-                <a:spcPts val="0"/>
-              </a:spcAft>
-            </a:pPr>
-            <a:r>
-              <a:rPr sz="800">
-                <a:solidFill>
-                  <a:srgbClr val="CCCCCC"/>
-                </a:solidFill>
-                <a:latin typeface="Consolas"/>
-              </a:rPr>
-              <a:t>    idx = self.</a:t>
-            </a:r>
-            <a:r>
-              <a:rPr sz="800">
-                <a:solidFill>
-                  <a:srgbClr val="7FC7E8"/>
-                </a:solidFill>
-                <a:latin typeface="Consolas"/>
-              </a:rPr>
-              <a:t>_slot</a:t>
-            </a:r>
-            <a:r>
-              <a:rPr sz="800">
-                <a:solidFill>
-                  <a:srgbClr val="CCCCCC"/>
-                </a:solidFill>
-                <a:latin typeface="Consolas"/>
-              </a:rPr>
-              <a:t>(body)</a:t>
-            </a:r>
-          </a:p>
-          <a:p>
-            <a:pPr>
-              <a:spcAft>
-                <a:spcPts val="0"/>
-              </a:spcAft>
-            </a:pPr>
-            <a:r>
-              <a:rPr sz="800">
-                <a:solidFill>
-                  <a:srgbClr val="CCCCCC"/>
-                </a:solidFill>
-                <a:latin typeface="Consolas"/>
-              </a:rPr>
-              <a:t>    body.</a:t>
-            </a:r>
-            <a:r>
-              <a:rPr sz="800">
-                <a:solidFill>
-                  <a:srgbClr val="7FC7E8"/>
-                </a:solidFill>
-                <a:latin typeface="Consolas"/>
-              </a:rPr>
-              <a:t>EmptyAccumulator</a:t>
-            </a:r>
-            <a:r>
-              <a:rPr sz="800">
-                <a:solidFill>
-                  <a:srgbClr val="CCCCCC"/>
-                </a:solidFill>
-                <a:latin typeface="Consolas"/>
-              </a:rPr>
-              <a:t>(idx)            </a:t>
-            </a:r>
-            <a:r>
-              <a:rPr sz="800">
-                <a:solidFill>
-                  <a:srgbClr val="7FAF7F"/>
-                </a:solidFill>
-                <a:latin typeface="Consolas"/>
-              </a:rPr>
-              <a:t># Chrono never clears these for you</a:t>
-            </a:r>
-          </a:p>
-          <a:p>
-            <a:pPr>
-              <a:spcAft>
-                <a:spcPts val="0"/>
-              </a:spcAft>
-            </a:pPr>
-            <a:r>
-              <a:rPr sz="800">
-                <a:solidFill>
-                  <a:srgbClr val="CCCCCC"/>
-                </a:solidFill>
-                <a:latin typeface="Consolas"/>
-              </a:rPr>
-              <a:t>    if t &gt;= t_end:</a:t>
-            </a:r>
-          </a:p>
-          <a:p>
-            <a:pPr>
-              <a:spcAft>
-                <a:spcPts val="0"/>
-              </a:spcAft>
-            </a:pPr>
-            <a:r>
-              <a:rPr sz="800">
-                <a:solidFill>
-                  <a:srgbClr val="CCCCCC"/>
-                </a:solidFill>
-                <a:latin typeface="Consolas"/>
-              </a:rPr>
-              <a:t>        self.active = None</a:t>
-            </a:r>
-          </a:p>
-          <a:p>
-            <a:pPr>
-              <a:spcAft>
-                <a:spcPts val="0"/>
-              </a:spcAft>
-            </a:pPr>
-            <a:r>
-              <a:rPr sz="800">
-                <a:solidFill>
-                  <a:srgbClr val="CCCCCC"/>
-                </a:solidFill>
-                <a:latin typeface="Consolas"/>
-              </a:rPr>
-              <a:t>        return False</a:t>
-            </a:r>
-          </a:p>
-          <a:p>
-            <a:pPr>
-              <a:spcAft>
-                <a:spcPts val="0"/>
-              </a:spcAft>
-            </a:pPr>
-            <a:r>
-              <a:rPr sz="800">
-                <a:solidFill>
-                  <a:srgbClr val="CCCCCC"/>
-                </a:solidFill>
-                <a:latin typeface="Consolas"/>
-              </a:rPr>
-              <a:t>    </a:t>
-            </a:r>
-            <a:r>
-              <a:rPr sz="800">
-                <a:solidFill>
-                  <a:srgbClr val="7FAF7F"/>
-                </a:solidFill>
-                <a:latin typeface="Consolas"/>
-              </a:rPr>
-              <a:t># The point travels with the link: a shove on the shoulder stays on the</a:t>
-            </a:r>
-          </a:p>
-          <a:p>
-            <a:pPr>
-              <a:spcAft>
-                <a:spcPts val="0"/>
-              </a:spcAft>
-            </a:pPr>
-            <a:r>
-              <a:rPr sz="800">
-                <a:solidFill>
-                  <a:srgbClr val="CCCCCC"/>
-                </a:solidFill>
-                <a:latin typeface="Consolas"/>
-              </a:rPr>
-              <a:t>    </a:t>
-            </a:r>
-            <a:r>
-              <a:rPr sz="800">
-                <a:solidFill>
-                  <a:srgbClr val="7FAF7F"/>
-                </a:solidFill>
-                <a:latin typeface="Consolas"/>
-              </a:rPr>
-              <a:t># shoulder even as the shoulder is being shoved away.</a:t>
-            </a:r>
-          </a:p>
-          <a:p>
-            <a:pPr>
-              <a:spcAft>
-                <a:spcPts val="0"/>
-              </a:spcAft>
-            </a:pPr>
-            <a:r>
-              <a:rPr sz="800">
-                <a:solidFill>
-                  <a:srgbClr val="CCCCCC"/>
-                </a:solidFill>
-                <a:latin typeface="Consolas"/>
-              </a:rPr>
-              <a:t>    body.</a:t>
-            </a:r>
-            <a:r>
-              <a:rPr sz="800">
-                <a:solidFill>
-                  <a:srgbClr val="7FC7E8"/>
-                </a:solidFill>
-                <a:latin typeface="Consolas"/>
-              </a:rPr>
-              <a:t>AccumulateForce</a:t>
-            </a:r>
-            <a:r>
-              <a:rPr sz="800">
-                <a:solidFill>
-                  <a:srgbClr val="CCCCCC"/>
-                </a:solidFill>
-                <a:latin typeface="Consolas"/>
-              </a:rPr>
-              <a:t>(idx, force, body.</a:t>
-            </a:r>
-            <a:r>
-              <a:rPr sz="800">
-                <a:solidFill>
-                  <a:srgbClr val="7FC7E8"/>
-                </a:solidFill>
-                <a:latin typeface="Consolas"/>
-              </a:rPr>
-              <a:t>TransformPointLocalToParent</a:t>
-            </a:r>
-            <a:r>
-              <a:rPr sz="800">
-                <a:solidFill>
-                  <a:srgbClr val="CCCCCC"/>
-                </a:solidFill>
-                <a:latin typeface="Consolas"/>
-              </a:rPr>
-              <a:t>(local),</a:t>
-            </a:r>
-          </a:p>
-        </p:txBody>
-      </p:sp>
-      <p:sp>
-        <p:nvSpPr>
-          <p:cNvPr id="4" name="NoteBox"/>
-          <p:cNvSpPr txBox="1"/>
-          <p:nvPr/>
-        </p:nvSpPr>
-        <p:spPr>
-          <a:xfrm>
-            <a:off x="402336" y="5705855"/>
-            <a:ext cx="11393424" cy="713232"/>
-          </a:xfrm>
-          <a:prstGeom prst="rect">
-            <a:avLst/>
-          </a:prstGeom>
-          <a:noFill/>
-        </p:spPr>
-        <p:txBody>
-          <a:bodyPr wrap="square">
-            <a:spAutoFit/>
-          </a:bodyPr>
-          <a:lstStyle/>
-          <a:p>
-            <a:pPr>
-              <a:spcAft>
-                <a:spcPts val="400"/>
-              </a:spcAft>
-            </a:pPr>
-            <a:r>
-              <a:rPr sz="1600"/>
-              <a:t>This is the human-ON-the-loop half of the taxonomy: the person sets up the experiment and reads the verdict, and is deliberately not in the inner loop, because being in it would destroy repeatability.</a:t>
-            </a:r>
-          </a:p>
-        </p:txBody>
-      </p:sp>
-      <p:sp>
-        <p:nvSpPr>
-          <p:cNvPr id="5" name="Footer"/>
-          <p:cNvSpPr txBox="1"/>
-          <p:nvPr/>
-        </p:nvSpPr>
-        <p:spPr>
-          <a:xfrm>
-            <a:off x="310896" y="6647688"/>
-            <a:ext cx="11640312" cy="192024"/>
-          </a:xfrm>
-          <a:prstGeom prst="rect">
-            <a:avLst/>
-          </a:prstGeom>
-          <a:noFill/>
-        </p:spPr>
-        <p:txBody>
-          <a:bodyPr wrap="none">
-            <a:spAutoFit/>
-          </a:bodyPr>
-          <a:lstStyle/>
-          <a:p>
-            <a:r>
-              <a:rPr sz="1000"/>
-              <a:t>University of Wisconsin - Madison</a:t>
-            </a:r>
-          </a:p>
-        </p:txBody>
-      </p:sp>
-      <p:sp>
-        <p:nvSpPr>
-          <p:cNvPr id="6" name="PageNo"/>
           <p:cNvSpPr txBox="1"/>
           <p:nvPr/>
         </p:nvSpPr>
@@ -14866,6 +14726,924 @@
           <a:p>
             <a:r>
               <a:rPr sz="2600"/>
+              <a:t>Taking the human out of the part that must repeat</a:t>
+            </a:r>
+          </a:p>
+        </p:txBody>
+      </p:sp>
+      <p:sp>
+        <p:nvSpPr>
+          <p:cNvPr id="3" name="CodeBox"/>
+          <p:cNvSpPr txBox="1"/>
+          <p:nvPr/>
+        </p:nvSpPr>
+        <p:spPr>
+          <a:xfrm>
+            <a:off x="0" y="1207008"/>
+            <a:ext cx="12188952" cy="4389119"/>
+          </a:xfrm>
+          <a:prstGeom prst="rect">
+            <a:avLst/>
+          </a:prstGeom>
+          <a:solidFill>
+            <a:srgbClr val="000000"/>
+          </a:solidFill>
+        </p:spPr>
+        <p:txBody>
+          <a:bodyPr wrap="none" lIns="320040" tIns="91440">
+            <a:spAutoFit/>
+          </a:bodyPr>
+          <a:lstStyle/>
+          <a:p>
+            <a:pPr>
+              <a:spcAft>
+                <a:spcPts val="0"/>
+              </a:spcAft>
+            </a:pPr>
+            <a:r>
+              <a:rPr sz="800">
+                <a:solidFill>
+                  <a:srgbClr val="7FAF7F"/>
+                </a:solidFill>
+                <a:latin typeface="Consolas"/>
+              </a:rPr>
+              <a:t># The pattern, not the API: decide which half of the human's input</a:t>
+            </a:r>
+          </a:p>
+          <a:p>
+            <a:pPr>
+              <a:spcAft>
+                <a:spcPts val="0"/>
+              </a:spcAft>
+            </a:pPr>
+            <a:r>
+              <a:rPr sz="800">
+                <a:solidFill>
+                  <a:srgbClr val="7FAF7F"/>
+                </a:solidFill>
+                <a:latin typeface="Consolas"/>
+              </a:rPr>
+              <a:t># has to be repeatable, and script only that half.</a:t>
+            </a:r>
+          </a:p>
+          <a:p>
+            <a:pPr>
+              <a:spcAft>
+                <a:spcPts val="0"/>
+              </a:spcAft>
+            </a:pPr>
+            <a:r>
+              <a:rPr sz="800">
+                <a:solidFill>
+                  <a:srgbClr val="7FAF7F"/>
+                </a:solidFill>
+                <a:latin typeface="Consolas"/>
+              </a:rPr>
+              <a:t>#</a:t>
+            </a:r>
+          </a:p>
+          <a:p>
+            <a:pPr>
+              <a:spcAft>
+                <a:spcPts val="0"/>
+              </a:spcAft>
+            </a:pPr>
+            <a:r>
+              <a:rPr sz="800">
+                <a:solidFill>
+                  <a:srgbClr val="7FAF7F"/>
+                </a:solidFill>
+                <a:latin typeface="Consolas"/>
+              </a:rPr>
+              <a:t>#   the person keeps:   WHERE on the body, and WHICH DIRECTION</a:t>
+            </a:r>
+          </a:p>
+          <a:p>
+            <a:pPr>
+              <a:spcAft>
+                <a:spcPts val="0"/>
+              </a:spcAft>
+            </a:pPr>
+            <a:r>
+              <a:rPr sz="800">
+                <a:solidFill>
+                  <a:srgbClr val="7FAF7F"/>
+                </a:solidFill>
+                <a:latin typeface="Consolas"/>
+              </a:rPr>
+              <a:t>#   the machine keeps:  a constant force F held for a fixed window dt</a:t>
+            </a:r>
+          </a:p>
+          <a:p>
+            <a:pPr>
+              <a:spcAft>
+                <a:spcPts val="0"/>
+              </a:spcAft>
+            </a:pPr>
+            <a:r>
+              <a:rPr sz="800">
+                <a:solidFill>
+                  <a:srgbClr val="7FAF7F"/>
+                </a:solidFill>
+                <a:latin typeface="Consolas"/>
+              </a:rPr>
+              <a:t>#</a:t>
+            </a:r>
+          </a:p>
+          <a:p>
+            <a:pPr>
+              <a:spcAft>
+                <a:spcPts val="0"/>
+              </a:spcAft>
+            </a:pPr>
+            <a:r>
+              <a:rPr sz="800">
+                <a:solidFill>
+                  <a:srgbClr val="7FAF7F"/>
+                </a:solidFill>
+                <a:latin typeface="Consolas"/>
+              </a:rPr>
+              <a:t>#   impulse  J = F * dt      both printed, both logged</a:t>
+            </a:r>
+          </a:p>
+          <a:p>
+            <a:pPr>
+              <a:spcAft>
+                <a:spcPts val="0"/>
+              </a:spcAft>
+            </a:pPr>
+            <a:r>
+              <a:rPr sz="800">
+                <a:solidFill>
+                  <a:srgbClr val="7FAF7F"/>
+                </a:solidFill>
+                <a:latin typeface="Consolas"/>
+              </a:rPr>
+              <a:t>#</a:t>
+            </a:r>
+          </a:p>
+          <a:p>
+            <a:pPr>
+              <a:spcAft>
+                <a:spcPts val="0"/>
+              </a:spcAft>
+            </a:pPr>
+            <a:r>
+              <a:rPr sz="800">
+                <a:solidFill>
+                  <a:srgbClr val="7FAF7F"/>
+                </a:solidFill>
+                <a:latin typeface="Consolas"/>
+              </a:rPr>
+              <a:t># A freehand drag cannot answer 'how hard can I shove it', because</a:t>
+            </a:r>
+          </a:p>
+          <a:p>
+            <a:pPr>
+              <a:spcAft>
+                <a:spcPts val="0"/>
+              </a:spcAft>
+            </a:pPr>
+            <a:r>
+              <a:rPr sz="800">
+                <a:solidFill>
+                  <a:srgbClr val="7FAF7F"/>
+                </a:solidFill>
+                <a:latin typeface="Consolas"/>
+              </a:rPr>
+              <a:t># no two drags are the same: the force depends on how fast a hand</a:t>
+            </a:r>
+          </a:p>
+          <a:p>
+            <a:pPr>
+              <a:spcAft>
+                <a:spcPts val="0"/>
+              </a:spcAft>
+            </a:pPr>
+            <a:r>
+              <a:rPr sz="800">
+                <a:solidFill>
+                  <a:srgbClr val="7FAF7F"/>
+                </a:solidFill>
+                <a:latin typeface="Consolas"/>
+              </a:rPr>
+              <a:t># moved and how long a button was held. There is no number at the end.</a:t>
+            </a:r>
+          </a:p>
+          <a:p>
+            <a:pPr>
+              <a:spcAft>
+                <a:spcPts val="0"/>
+              </a:spcAft>
+            </a:pPr>
+            <a:r>
+              <a:rPr sz="800">
+                <a:solidFill>
+                  <a:srgbClr val="7FAF7F"/>
+                </a:solidFill>
+                <a:latin typeface="Consolas"/>
+              </a:rPr>
+              <a:t># Script the magnitude and you get one you can put in a report.</a:t>
+            </a:r>
+          </a:p>
+          <a:p>
+            <a:pPr>
+              <a:spcAft>
+                <a:spcPts val="0"/>
+              </a:spcAft>
+            </a:pPr>
+            <a:r>
+              <a:rPr sz="800">
+                <a:solidFill>
+                  <a:srgbClr val="CCCCCC"/>
+                </a:solidFill>
+                <a:latin typeface="Consolas"/>
+              </a:rPr>
+              <a:t> </a:t>
+            </a:r>
+          </a:p>
+          <a:p>
+            <a:pPr>
+              <a:spcAft>
+                <a:spcPts val="0"/>
+              </a:spcAft>
+            </a:pPr>
+            <a:r>
+              <a:rPr sz="800">
+                <a:solidFill>
+                  <a:srgbClr val="7FAF7F"/>
+                </a:solidFill>
+                <a:latin typeface="Consolas"/>
+              </a:rPr>
+              <a:t># ---- and how this tutorial calls it (hil_push.py, lines 264 to 283) ------</a:t>
+            </a:r>
+          </a:p>
+          <a:p>
+            <a:pPr>
+              <a:spcAft>
+                <a:spcPts val="0"/>
+              </a:spcAft>
+            </a:pPr>
+            <a:r>
+              <a:rPr sz="800">
+                <a:solidFill>
+                  <a:srgbClr val="CCCCCC"/>
+                </a:solidFill>
+                <a:latin typeface="Consolas"/>
+              </a:rPr>
+              <a:t>def </a:t>
+            </a:r>
+            <a:r>
+              <a:rPr sz="800">
+                <a:solidFill>
+                  <a:srgbClr val="7FC7E8"/>
+                </a:solidFill>
+                <a:latin typeface="Consolas"/>
+              </a:rPr>
+              <a:t>fire</a:t>
+            </a:r>
+            <a:r>
+              <a:rPr sz="800">
+                <a:solidFill>
+                  <a:srgbClr val="CCCCCC"/>
+                </a:solidFill>
+                <a:latin typeface="Consolas"/>
+              </a:rPr>
+              <a:t>(self, cfg, t):</a:t>
+            </a:r>
+          </a:p>
+          <a:p>
+            <a:pPr>
+              <a:spcAft>
+                <a:spcPts val="0"/>
+              </a:spcAft>
+            </a:pPr>
+            <a:r>
+              <a:rPr sz="800">
+                <a:solidFill>
+                  <a:srgbClr val="CCCCCC"/>
+                </a:solidFill>
+                <a:latin typeface="Consolas"/>
+              </a:rPr>
+              <a:t>    body = cfg.body</a:t>
+            </a:r>
+          </a:p>
+          <a:p>
+            <a:pPr>
+              <a:spcAft>
+                <a:spcPts val="0"/>
+              </a:spcAft>
+            </a:pPr>
+            <a:r>
+              <a:rPr sz="800">
+                <a:solidFill>
+                  <a:srgbClr val="CCCCCC"/>
+                </a:solidFill>
+                <a:latin typeface="Consolas"/>
+              </a:rPr>
+              <a:t>    self.active = (body, cfg.</a:t>
+            </a:r>
+            <a:r>
+              <a:rPr sz="800">
+                <a:solidFill>
+                  <a:srgbClr val="7FC7E8"/>
+                </a:solidFill>
+                <a:latin typeface="Consolas"/>
+              </a:rPr>
+              <a:t>force</a:t>
+            </a:r>
+            <a:r>
+              <a:rPr sz="800">
+                <a:solidFill>
+                  <a:srgbClr val="CCCCCC"/>
+                </a:solidFill>
+                <a:latin typeface="Consolas"/>
+              </a:rPr>
+              <a:t>(), chrono.</a:t>
+            </a:r>
+            <a:r>
+              <a:rPr sz="800">
+                <a:solidFill>
+                  <a:srgbClr val="F0A040"/>
+                </a:solidFill>
+                <a:latin typeface="Consolas"/>
+              </a:rPr>
+              <a:t>ChVector3d</a:t>
+            </a:r>
+            <a:r>
+              <a:rPr sz="800">
+                <a:solidFill>
+                  <a:srgbClr val="CCCCCC"/>
+                </a:solidFill>
+                <a:latin typeface="Consolas"/>
+              </a:rPr>
+              <a:t>(cfg.local_point),</a:t>
+            </a:r>
+          </a:p>
+          <a:p>
+            <a:pPr>
+              <a:spcAft>
+                <a:spcPts val="0"/>
+              </a:spcAft>
+            </a:pPr>
+            <a:r>
+              <a:rPr sz="800">
+                <a:solidFill>
+                  <a:srgbClr val="CCCCCC"/>
+                </a:solidFill>
+                <a:latin typeface="Consolas"/>
+              </a:rPr>
+              <a:t>                   t + cfg.duration)</a:t>
+            </a:r>
+          </a:p>
+          <a:p>
+            <a:pPr>
+              <a:spcAft>
+                <a:spcPts val="0"/>
+              </a:spcAft>
+            </a:pPr>
+            <a:r>
+              <a:rPr sz="800">
+                <a:solidFill>
+                  <a:srgbClr val="CCCCCC"/>
+                </a:solidFill>
+                <a:latin typeface="Consolas"/>
+              </a:rPr>
+              <a:t>    self.fired_at = t</a:t>
+            </a:r>
+          </a:p>
+          <a:p>
+            <a:pPr>
+              <a:spcAft>
+                <a:spcPts val="0"/>
+              </a:spcAft>
+            </a:pPr>
+            <a:r>
+              <a:rPr sz="800">
+                <a:solidFill>
+                  <a:srgbClr val="CCCCCC"/>
+                </a:solidFill>
+                <a:latin typeface="Consolas"/>
+              </a:rPr>
+              <a:t>    return self.</a:t>
+            </a:r>
+            <a:r>
+              <a:rPr sz="800">
+                <a:solidFill>
+                  <a:srgbClr val="7FC7E8"/>
+                </a:solidFill>
+                <a:latin typeface="Consolas"/>
+              </a:rPr>
+              <a:t>_slot</a:t>
+            </a:r>
+            <a:r>
+              <a:rPr sz="800">
+                <a:solidFill>
+                  <a:srgbClr val="CCCCCC"/>
+                </a:solidFill>
+                <a:latin typeface="Consolas"/>
+              </a:rPr>
+              <a:t>(body)</a:t>
+            </a:r>
+          </a:p>
+          <a:p>
+            <a:pPr>
+              <a:spcAft>
+                <a:spcPts val="0"/>
+              </a:spcAft>
+            </a:pPr>
+            <a:r>
+              <a:rPr sz="800">
+                <a:solidFill>
+                  <a:srgbClr val="CCCCCC"/>
+                </a:solidFill>
+                <a:latin typeface="Consolas"/>
+              </a:rPr>
+              <a:t> </a:t>
+            </a:r>
+          </a:p>
+          <a:p>
+            <a:pPr>
+              <a:spcAft>
+                <a:spcPts val="0"/>
+              </a:spcAft>
+            </a:pPr>
+            <a:r>
+              <a:rPr sz="800">
+                <a:solidFill>
+                  <a:srgbClr val="CCCCCC"/>
+                </a:solidFill>
+                <a:latin typeface="Consolas"/>
+              </a:rPr>
+              <a:t>def </a:t>
+            </a:r>
+            <a:r>
+              <a:rPr sz="800">
+                <a:solidFill>
+                  <a:srgbClr val="7FC7E8"/>
+                </a:solidFill>
+                <a:latin typeface="Consolas"/>
+              </a:rPr>
+              <a:t>update</a:t>
+            </a:r>
+            <a:r>
+              <a:rPr sz="800">
+                <a:solidFill>
+                  <a:srgbClr val="CCCCCC"/>
+                </a:solidFill>
+                <a:latin typeface="Consolas"/>
+              </a:rPr>
+              <a:t>(self, t):</a:t>
+            </a:r>
+          </a:p>
+          <a:p>
+            <a:pPr>
+              <a:spcAft>
+                <a:spcPts val="0"/>
+              </a:spcAft>
+            </a:pPr>
+            <a:r>
+              <a:rPr sz="800">
+                <a:solidFill>
+                  <a:srgbClr val="CCCCCC"/>
+                </a:solidFill>
+                <a:latin typeface="Consolas"/>
+              </a:rPr>
+              <a:t>    </a:t>
+            </a:r>
+            <a:r>
+              <a:rPr sz="800">
+                <a:solidFill>
+                  <a:srgbClr val="D8A0C0"/>
+                </a:solidFill>
+                <a:latin typeface="Consolas"/>
+              </a:rPr>
+              <a:t>""</a:t>
+            </a:r>
+            <a:r>
+              <a:rPr sz="800">
+                <a:solidFill>
+                  <a:srgbClr val="D8A0C0"/>
+                </a:solidFill>
+                <a:latin typeface="Consolas"/>
+              </a:rPr>
+              <a:t>"Call every step, BEFORE DoStepDynamics. Returns True while pushing."</a:t>
+            </a:r>
+            <a:r>
+              <a:rPr sz="800">
+                <a:solidFill>
+                  <a:srgbClr val="D8A0C0"/>
+                </a:solidFill>
+                <a:latin typeface="Consolas"/>
+              </a:rPr>
+              <a:t>""</a:t>
+            </a:r>
+          </a:p>
+          <a:p>
+            <a:pPr>
+              <a:spcAft>
+                <a:spcPts val="0"/>
+              </a:spcAft>
+            </a:pPr>
+            <a:r>
+              <a:rPr sz="800">
+                <a:solidFill>
+                  <a:srgbClr val="CCCCCC"/>
+                </a:solidFill>
+                <a:latin typeface="Consolas"/>
+              </a:rPr>
+              <a:t>    if self.active is None:</a:t>
+            </a:r>
+          </a:p>
+          <a:p>
+            <a:pPr>
+              <a:spcAft>
+                <a:spcPts val="0"/>
+              </a:spcAft>
+            </a:pPr>
+            <a:r>
+              <a:rPr sz="800">
+                <a:solidFill>
+                  <a:srgbClr val="CCCCCC"/>
+                </a:solidFill>
+                <a:latin typeface="Consolas"/>
+              </a:rPr>
+              <a:t>        return False</a:t>
+            </a:r>
+          </a:p>
+          <a:p>
+            <a:pPr>
+              <a:spcAft>
+                <a:spcPts val="0"/>
+              </a:spcAft>
+            </a:pPr>
+            <a:r>
+              <a:rPr sz="800">
+                <a:solidFill>
+                  <a:srgbClr val="CCCCCC"/>
+                </a:solidFill>
+                <a:latin typeface="Consolas"/>
+              </a:rPr>
+              <a:t>    body, force, local, t_end = self.active</a:t>
+            </a:r>
+          </a:p>
+          <a:p>
+            <a:pPr>
+              <a:spcAft>
+                <a:spcPts val="0"/>
+              </a:spcAft>
+            </a:pPr>
+            <a:r>
+              <a:rPr sz="800">
+                <a:solidFill>
+                  <a:srgbClr val="CCCCCC"/>
+                </a:solidFill>
+                <a:latin typeface="Consolas"/>
+              </a:rPr>
+              <a:t>    idx = self.</a:t>
+            </a:r>
+            <a:r>
+              <a:rPr sz="800">
+                <a:solidFill>
+                  <a:srgbClr val="7FC7E8"/>
+                </a:solidFill>
+                <a:latin typeface="Consolas"/>
+              </a:rPr>
+              <a:t>_slot</a:t>
+            </a:r>
+            <a:r>
+              <a:rPr sz="800">
+                <a:solidFill>
+                  <a:srgbClr val="CCCCCC"/>
+                </a:solidFill>
+                <a:latin typeface="Consolas"/>
+              </a:rPr>
+              <a:t>(body)</a:t>
+            </a:r>
+          </a:p>
+          <a:p>
+            <a:pPr>
+              <a:spcAft>
+                <a:spcPts val="0"/>
+              </a:spcAft>
+            </a:pPr>
+            <a:r>
+              <a:rPr sz="800">
+                <a:solidFill>
+                  <a:srgbClr val="CCCCCC"/>
+                </a:solidFill>
+                <a:latin typeface="Consolas"/>
+              </a:rPr>
+              <a:t>    body.</a:t>
+            </a:r>
+            <a:r>
+              <a:rPr sz="800">
+                <a:solidFill>
+                  <a:srgbClr val="7FC7E8"/>
+                </a:solidFill>
+                <a:latin typeface="Consolas"/>
+              </a:rPr>
+              <a:t>EmptyAccumulator</a:t>
+            </a:r>
+            <a:r>
+              <a:rPr sz="800">
+                <a:solidFill>
+                  <a:srgbClr val="CCCCCC"/>
+                </a:solidFill>
+                <a:latin typeface="Consolas"/>
+              </a:rPr>
+              <a:t>(idx)            </a:t>
+            </a:r>
+            <a:r>
+              <a:rPr sz="800">
+                <a:solidFill>
+                  <a:srgbClr val="7FAF7F"/>
+                </a:solidFill>
+                <a:latin typeface="Consolas"/>
+              </a:rPr>
+              <a:t># Chrono never clears these for you</a:t>
+            </a:r>
+          </a:p>
+          <a:p>
+            <a:pPr>
+              <a:spcAft>
+                <a:spcPts val="0"/>
+              </a:spcAft>
+            </a:pPr>
+            <a:r>
+              <a:rPr sz="800">
+                <a:solidFill>
+                  <a:srgbClr val="CCCCCC"/>
+                </a:solidFill>
+                <a:latin typeface="Consolas"/>
+              </a:rPr>
+              <a:t>    if t &gt;= t_end:</a:t>
+            </a:r>
+          </a:p>
+          <a:p>
+            <a:pPr>
+              <a:spcAft>
+                <a:spcPts val="0"/>
+              </a:spcAft>
+            </a:pPr>
+            <a:r>
+              <a:rPr sz="800">
+                <a:solidFill>
+                  <a:srgbClr val="CCCCCC"/>
+                </a:solidFill>
+                <a:latin typeface="Consolas"/>
+              </a:rPr>
+              <a:t>        self.active = None</a:t>
+            </a:r>
+          </a:p>
+          <a:p>
+            <a:pPr>
+              <a:spcAft>
+                <a:spcPts val="0"/>
+              </a:spcAft>
+            </a:pPr>
+            <a:r>
+              <a:rPr sz="800">
+                <a:solidFill>
+                  <a:srgbClr val="CCCCCC"/>
+                </a:solidFill>
+                <a:latin typeface="Consolas"/>
+              </a:rPr>
+              <a:t>        return False</a:t>
+            </a:r>
+          </a:p>
+          <a:p>
+            <a:pPr>
+              <a:spcAft>
+                <a:spcPts val="0"/>
+              </a:spcAft>
+            </a:pPr>
+            <a:r>
+              <a:rPr sz="800">
+                <a:solidFill>
+                  <a:srgbClr val="CCCCCC"/>
+                </a:solidFill>
+                <a:latin typeface="Consolas"/>
+              </a:rPr>
+              <a:t>    </a:t>
+            </a:r>
+            <a:r>
+              <a:rPr sz="800">
+                <a:solidFill>
+                  <a:srgbClr val="7FAF7F"/>
+                </a:solidFill>
+                <a:latin typeface="Consolas"/>
+              </a:rPr>
+              <a:t># The point travels with the link: a shove on the shoulder stays on the</a:t>
+            </a:r>
+          </a:p>
+          <a:p>
+            <a:pPr>
+              <a:spcAft>
+                <a:spcPts val="0"/>
+              </a:spcAft>
+            </a:pPr>
+            <a:r>
+              <a:rPr sz="800">
+                <a:solidFill>
+                  <a:srgbClr val="CCCCCC"/>
+                </a:solidFill>
+                <a:latin typeface="Consolas"/>
+              </a:rPr>
+              <a:t>    </a:t>
+            </a:r>
+            <a:r>
+              <a:rPr sz="800">
+                <a:solidFill>
+                  <a:srgbClr val="7FAF7F"/>
+                </a:solidFill>
+                <a:latin typeface="Consolas"/>
+              </a:rPr>
+              <a:t># shoulder even as the shoulder is being shoved away.</a:t>
+            </a:r>
+          </a:p>
+          <a:p>
+            <a:pPr>
+              <a:spcAft>
+                <a:spcPts val="0"/>
+              </a:spcAft>
+            </a:pPr>
+            <a:r>
+              <a:rPr sz="800">
+                <a:solidFill>
+                  <a:srgbClr val="CCCCCC"/>
+                </a:solidFill>
+                <a:latin typeface="Consolas"/>
+              </a:rPr>
+              <a:t>    body.</a:t>
+            </a:r>
+            <a:r>
+              <a:rPr sz="800">
+                <a:solidFill>
+                  <a:srgbClr val="7FC7E8"/>
+                </a:solidFill>
+                <a:latin typeface="Consolas"/>
+              </a:rPr>
+              <a:t>AccumulateForce</a:t>
+            </a:r>
+            <a:r>
+              <a:rPr sz="800">
+                <a:solidFill>
+                  <a:srgbClr val="CCCCCC"/>
+                </a:solidFill>
+                <a:latin typeface="Consolas"/>
+              </a:rPr>
+              <a:t>(idx, force, body.</a:t>
+            </a:r>
+            <a:r>
+              <a:rPr sz="800">
+                <a:solidFill>
+                  <a:srgbClr val="7FC7E8"/>
+                </a:solidFill>
+                <a:latin typeface="Consolas"/>
+              </a:rPr>
+              <a:t>TransformPointLocalToParent</a:t>
+            </a:r>
+            <a:r>
+              <a:rPr sz="800">
+                <a:solidFill>
+                  <a:srgbClr val="CCCCCC"/>
+                </a:solidFill>
+                <a:latin typeface="Consolas"/>
+              </a:rPr>
+              <a:t>(local),</a:t>
+            </a:r>
+          </a:p>
+        </p:txBody>
+      </p:sp>
+      <p:sp>
+        <p:nvSpPr>
+          <p:cNvPr id="4" name="NoteBox"/>
+          <p:cNvSpPr txBox="1"/>
+          <p:nvPr/>
+        </p:nvSpPr>
+        <p:spPr>
+          <a:xfrm>
+            <a:off x="402336" y="5705855"/>
+            <a:ext cx="11393424" cy="713232"/>
+          </a:xfrm>
+          <a:prstGeom prst="rect">
+            <a:avLst/>
+          </a:prstGeom>
+          <a:noFill/>
+        </p:spPr>
+        <p:txBody>
+          <a:bodyPr wrap="square">
+            <a:spAutoFit/>
+          </a:bodyPr>
+          <a:lstStyle/>
+          <a:p>
+            <a:pPr>
+              <a:spcAft>
+                <a:spcPts val="400"/>
+              </a:spcAft>
+            </a:pPr>
+            <a:r>
+              <a:rPr sz="1600"/>
+              <a:t>This is the human-ON-the-loop half of the taxonomy: the person sets up the experiment and reads the verdict, and is deliberately not in the inner loop, because being in it would destroy repeatability.</a:t>
+            </a:r>
+          </a:p>
+        </p:txBody>
+      </p:sp>
+      <p:sp>
+        <p:nvSpPr>
+          <p:cNvPr id="5" name="Footer"/>
+          <p:cNvSpPr txBox="1"/>
+          <p:nvPr/>
+        </p:nvSpPr>
+        <p:spPr>
+          <a:xfrm>
+            <a:off x="310896" y="6647688"/>
+            <a:ext cx="11640312" cy="192024"/>
+          </a:xfrm>
+          <a:prstGeom prst="rect">
+            <a:avLst/>
+          </a:prstGeom>
+          <a:noFill/>
+        </p:spPr>
+        <p:txBody>
+          <a:bodyPr wrap="none">
+            <a:spAutoFit/>
+          </a:bodyPr>
+          <a:lstStyle/>
+          <a:p>
+            <a:r>
+              <a:rPr sz="1000"/>
+              <a:t>University of Wisconsin - Madison</a:t>
+            </a:r>
+          </a:p>
+        </p:txBody>
+      </p:sp>
+      <p:sp>
+        <p:nvSpPr>
+          <p:cNvPr id="6" name="PageNo"/>
+          <p:cNvSpPr txBox="1"/>
+          <p:nvPr/>
+        </p:nvSpPr>
+        <p:spPr>
+          <a:xfrm>
+            <a:off x="10250424" y="6647688"/>
+            <a:ext cx="1709928" cy="192024"/>
+          </a:xfrm>
+          <a:prstGeom prst="rect">
+            <a:avLst/>
+          </a:prstGeom>
+          <a:noFill/>
+        </p:spPr>
+        <p:txBody>
+          <a:bodyPr wrap="none">
+            <a:spAutoFit/>
+          </a:bodyPr>
+          <a:lstStyle/>
+          <a:p>
+            <a:pPr algn="r"/>
+            <a:r>
+              <a:rPr sz="1000"/>
+              <a:t>30</a:t>
+            </a:r>
+          </a:p>
+        </p:txBody>
+      </p:sp>
+    </p:spTree>
+  </p:cSld>
+  <p:clrMapOvr>
+    <a:masterClrMapping/>
+  </p:clrMapOvr>
+</p:sld>
+</file>
+
+<file path=ppt/slides/slide31.xml><?xml version="1.0" encoding="utf-8"?>
+<p:sld xmlns:a="http://schemas.openxmlformats.org/drawingml/2006/main" xmlns:p="http://schemas.openxmlformats.org/presentationml/2006/main" xmlns:r="http://schemas.openxmlformats.org/officeDocument/2006/relationships">
+  <p:cSld>
+    <p:spTree>
+      <p:nvGrpSpPr>
+        <p:cNvPr id="1" name=""/>
+        <p:cNvGrpSpPr/>
+        <p:nvPr/>
+      </p:nvGrpSpPr>
+      <p:grpSpPr/>
+      <p:sp>
+        <p:nvSpPr>
+          <p:cNvPr id="2" name="Title 1"/>
+          <p:cNvSpPr>
+            <a:spLocks noGrp="1"/>
+          </p:cNvSpPr>
+          <p:nvPr>
+            <p:ph type="title"/>
+          </p:nvPr>
+        </p:nvSpPr>
+        <p:spPr/>
+        <p:txBody>
+          <a:bodyPr/>
+          <a:lstStyle/>
+          <a:p>
+            <a:r>
+              <a:rPr sz="2600"/>
               <a:t>Demo Time: how hard can you shove it</a:t>
             </a:r>
           </a:p>
@@ -15098,267 +15876,6 @@
             <a:pPr algn="r"/>
             <a:r>
               <a:rPr sz="1000"/>
-              <a:t>30</a:t>
-            </a:r>
-          </a:p>
-        </p:txBody>
-      </p:sp>
-    </p:spTree>
-  </p:cSld>
-  <p:clrMapOvr>
-    <a:masterClrMapping/>
-  </p:clrMapOvr>
-</p:sld>
-</file>
-
-<file path=ppt/slides/slide31.xml><?xml version="1.0" encoding="utf-8"?>
-<p:sld xmlns:a="http://schemas.openxmlformats.org/drawingml/2006/main" xmlns:p="http://schemas.openxmlformats.org/presentationml/2006/main" xmlns:r="http://schemas.openxmlformats.org/officeDocument/2006/relationships">
-  <p:cSld>
-    <p:spTree>
-      <p:nvGrpSpPr>
-        <p:cNvPr id="1" name=""/>
-        <p:cNvGrpSpPr/>
-        <p:nvPr/>
-      </p:nvGrpSpPr>
-      <p:grpSpPr/>
-      <p:sp>
-        <p:nvSpPr>
-          <p:cNvPr id="2" name="Title 1"/>
-          <p:cNvSpPr>
-            <a:spLocks noGrp="1"/>
-          </p:cNvSpPr>
-          <p:nvPr>
-            <p:ph type="title"/>
-          </p:nvPr>
-        </p:nvSpPr>
-        <p:spPr/>
-        <p:txBody>
-          <a:bodyPr/>
-          <a:lstStyle/>
-          <a:p>
-            <a:r>
-              <a:rPr sz="2600"/>
-              <a:t>Where to go next</a:t>
-            </a:r>
-          </a:p>
-        </p:txBody>
-      </p:sp>
-      <p:sp>
-        <p:nvSpPr>
-          <p:cNvPr id="3" name="Content Placeholder 2"/>
-          <p:cNvSpPr>
-            <a:spLocks noGrp="1"/>
-          </p:cNvSpPr>
-          <p:nvPr>
-            <p:ph idx="1"/>
-          </p:nvPr>
-        </p:nvSpPr>
-        <p:spPr>
-          <a:xfrm>
-            <a:off x="642552" y="1313782"/>
-            <a:ext cx="10936224" cy="5203976"/>
-          </a:xfrm>
-        </p:spPr>
-        <p:txBody>
-          <a:bodyPr wrap="square"/>
-          <a:lstStyle/>
-          <a:p>
-            <a:pPr>
-              <a:spcAft>
-                <a:spcPts val="900"/>
-              </a:spcAft>
-            </a:pPr>
-            <a:r>
-              <a:rPr sz="2000"/>
-              <a:t>This tutorial   </a:t>
-            </a:r>
-            <a:r>
-              <a:rPr sz="1800">
-                <a:latin typeface="Consolas"/>
-              </a:rPr>
-              <a:t>github.com/ksha23/chrono-hil-tutorial</a:t>
-            </a:r>
-          </a:p>
-          <a:p>
-            <a:pPr lvl="1">
-              <a:spcAft>
-                <a:spcPts val="900"/>
-              </a:spcAft>
-            </a:pPr>
-            <a:r>
-              <a:rPr sz="1800"/>
-              <a:t>every part, the demos, and the SWIG director patch under </a:t>
-            </a:r>
-            <a:r>
-              <a:rPr sz="1600">
-                <a:latin typeface="Consolas"/>
-              </a:rPr>
-              <a:t>experimental/</a:t>
-            </a:r>
-          </a:p>
-          <a:p>
-            <a:pPr>
-              <a:spcAft>
-                <a:spcPts val="900"/>
-              </a:spcAft>
-            </a:pPr>
-            <a:r>
-              <a:rPr sz="2000"/>
-              <a:t>Chrono   </a:t>
-            </a:r>
-            <a:r>
-              <a:rPr sz="1800">
-                <a:latin typeface="Consolas"/>
-              </a:rPr>
-              <a:t>projectchrono.org</a:t>
-            </a:r>
-            <a:r>
-              <a:rPr sz="2000"/>
-              <a:t>   </a:t>
-            </a:r>
-            <a:r>
-              <a:rPr sz="1800">
-                <a:latin typeface="Consolas"/>
-              </a:rPr>
-              <a:t>github.com/projectchrono/chrono</a:t>
-            </a:r>
-          </a:p>
-          <a:p>
-            <a:pPr lvl="1">
-              <a:spcAft>
-                <a:spcPts val="900"/>
-              </a:spcAft>
-            </a:pPr>
-            <a:r>
-              <a:rPr sz="1600">
-                <a:latin typeface="Consolas"/>
-              </a:rPr>
-              <a:t>conda install -c projectchrono pychrono</a:t>
-            </a:r>
-          </a:p>
-          <a:p>
-            <a:pPr>
-              <a:spcAft>
-                <a:spcPts val="900"/>
-              </a:spcAft>
-            </a:pPr>
-            <a:r>
-              <a:rPr sz="2000"/>
-              <a:t>Chrono::HIL   </a:t>
-            </a:r>
-            <a:r>
-              <a:rPr sz="1800">
-                <a:latin typeface="Consolas"/>
-              </a:rPr>
-              <a:t>github.com/zzhou292/chrono-HIL</a:t>
-            </a:r>
-          </a:p>
-          <a:p>
-            <a:pPr lvl="1">
-              <a:spcAft>
-                <a:spcPts val="900"/>
-              </a:spcAft>
-            </a:pPr>
-            <a:r>
-              <a:rPr sz="1800"/>
-              <a:t>driving rigs, steering wheels, multi-user sessions, the same three floats</a:t>
-            </a:r>
-          </a:p>
-          <a:p>
-            <a:pPr>
-              <a:spcAft>
-                <a:spcPts val="900"/>
-              </a:spcAft>
-            </a:pPr>
-            <a:r>
-              <a:rPr sz="2000"/>
-              <a:t>Joystick and wheel mappings   </a:t>
-            </a:r>
-            <a:r>
-              <a:rPr sz="1800">
-                <a:latin typeface="Consolas"/>
-              </a:rPr>
-              <a:t>data/vehicle/joystick/</a:t>
-            </a:r>
-          </a:p>
-          <a:p>
-            <a:pPr lvl="1">
-              <a:spcAft>
-                <a:spcPts val="900"/>
-              </a:spcAft>
-            </a:pPr>
-            <a:r>
-              <a:rPr sz="1800"/>
-              <a:t>copy the nearest config, change the axis and button numbers</a:t>
-            </a:r>
-          </a:p>
-          <a:p>
-            <a:pPr>
-              <a:spcAft>
-                <a:spcPts val="900"/>
-              </a:spcAft>
-            </a:pPr>
-            <a:r>
-              <a:rPr sz="2000"/>
-              <a:t>The gap this talk found is small and specific, which is the good kind: one line to let Python receive the event, and a utility on top of primitives Chrono already exposes. Upstream PR to follow.</a:t>
-            </a:r>
-          </a:p>
-        </p:txBody>
-      </p:sp>
-      <p:sp>
-        <p:nvSpPr>
-          <p:cNvPr id="4" name="Footer"/>
-          <p:cNvSpPr txBox="1"/>
-          <p:nvPr/>
-        </p:nvSpPr>
-        <p:spPr>
-          <a:xfrm>
-            <a:off x="310896" y="6647688"/>
-            <a:ext cx="11640312" cy="192024"/>
-          </a:xfrm>
-          <a:prstGeom prst="rect">
-            <a:avLst/>
-          </a:prstGeom>
-          <a:noFill/>
-        </p:spPr>
-        <p:txBody>
-          <a:bodyPr wrap="none">
-            <a:spAutoFit/>
-          </a:bodyPr>
-          <a:lstStyle/>
-          <a:p>
-            <a:r>
-              <a:rPr sz="1000"/>
-              <a:t>University of Wisconsin - Madison</a:t>
-            </a:r>
-          </a:p>
-        </p:txBody>
-      </p:sp>
-      <p:sp>
-        <p:nvSpPr>
-          <p:cNvPr id="5" name="PageNo"/>
-          <p:cNvSpPr txBox="1"/>
-          <p:nvPr/>
-        </p:nvSpPr>
-        <p:spPr>
-          <a:xfrm>
-            <a:off x="10250424" y="6647688"/>
-            <a:ext cx="1709928" cy="192024"/>
-          </a:xfrm>
-          <a:prstGeom prst="rect">
-            <a:avLst/>
-          </a:prstGeom>
-          <a:noFill/>
-        </p:spPr>
-        <p:txBody>
-          <a:bodyPr wrap="none">
-            <a:spAutoFit/>
-          </a:bodyPr>
-          <a:lstStyle/>
-          <a:p>
-            <a:pPr algn="r"/>
-            <a:r>
-              <a:rPr sz="1000"/>
               <a:t>31</a:t>
             </a:r>
           </a:p>
@@ -15384,6 +15901,267 @@
       <p:grpSpPr/>
       <p:sp>
         <p:nvSpPr>
+          <p:cNvPr id="2" name="Title 1"/>
+          <p:cNvSpPr>
+            <a:spLocks noGrp="1"/>
+          </p:cNvSpPr>
+          <p:nvPr>
+            <p:ph type="title"/>
+          </p:nvPr>
+        </p:nvSpPr>
+        <p:spPr/>
+        <p:txBody>
+          <a:bodyPr/>
+          <a:lstStyle/>
+          <a:p>
+            <a:r>
+              <a:rPr sz="2600"/>
+              <a:t>Where to go next</a:t>
+            </a:r>
+          </a:p>
+        </p:txBody>
+      </p:sp>
+      <p:sp>
+        <p:nvSpPr>
+          <p:cNvPr id="3" name="Content Placeholder 2"/>
+          <p:cNvSpPr>
+            <a:spLocks noGrp="1"/>
+          </p:cNvSpPr>
+          <p:nvPr>
+            <p:ph idx="1"/>
+          </p:nvPr>
+        </p:nvSpPr>
+        <p:spPr>
+          <a:xfrm>
+            <a:off x="642552" y="1313782"/>
+            <a:ext cx="10936224" cy="5203976"/>
+          </a:xfrm>
+        </p:spPr>
+        <p:txBody>
+          <a:bodyPr wrap="square"/>
+          <a:lstStyle/>
+          <a:p>
+            <a:pPr>
+              <a:spcAft>
+                <a:spcPts val="900"/>
+              </a:spcAft>
+            </a:pPr>
+            <a:r>
+              <a:rPr sz="2000"/>
+              <a:t>This tutorial   </a:t>
+            </a:r>
+            <a:r>
+              <a:rPr sz="1800">
+                <a:latin typeface="Consolas"/>
+              </a:rPr>
+              <a:t>github.com/ksha23/chrono-hil-tutorial</a:t>
+            </a:r>
+          </a:p>
+          <a:p>
+            <a:pPr lvl="1">
+              <a:spcAft>
+                <a:spcPts val="900"/>
+              </a:spcAft>
+            </a:pPr>
+            <a:r>
+              <a:rPr sz="1800"/>
+              <a:t>every part, the demos, and the SWIG director patch under </a:t>
+            </a:r>
+            <a:r>
+              <a:rPr sz="1600">
+                <a:latin typeface="Consolas"/>
+              </a:rPr>
+              <a:t>experimental/</a:t>
+            </a:r>
+          </a:p>
+          <a:p>
+            <a:pPr>
+              <a:spcAft>
+                <a:spcPts val="900"/>
+              </a:spcAft>
+            </a:pPr>
+            <a:r>
+              <a:rPr sz="2000"/>
+              <a:t>Chrono   </a:t>
+            </a:r>
+            <a:r>
+              <a:rPr sz="1800">
+                <a:latin typeface="Consolas"/>
+              </a:rPr>
+              <a:t>projectchrono.org</a:t>
+            </a:r>
+            <a:r>
+              <a:rPr sz="2000"/>
+              <a:t>   </a:t>
+            </a:r>
+            <a:r>
+              <a:rPr sz="1800">
+                <a:latin typeface="Consolas"/>
+              </a:rPr>
+              <a:t>github.com/projectchrono/chrono</a:t>
+            </a:r>
+          </a:p>
+          <a:p>
+            <a:pPr lvl="1">
+              <a:spcAft>
+                <a:spcPts val="900"/>
+              </a:spcAft>
+            </a:pPr>
+            <a:r>
+              <a:rPr sz="1600">
+                <a:latin typeface="Consolas"/>
+              </a:rPr>
+              <a:t>conda install -c projectchrono pychrono</a:t>
+            </a:r>
+          </a:p>
+          <a:p>
+            <a:pPr>
+              <a:spcAft>
+                <a:spcPts val="900"/>
+              </a:spcAft>
+            </a:pPr>
+            <a:r>
+              <a:rPr sz="2000"/>
+              <a:t>Chrono::HIL   </a:t>
+            </a:r>
+            <a:r>
+              <a:rPr sz="1800">
+                <a:latin typeface="Consolas"/>
+              </a:rPr>
+              <a:t>github.com/zzhou292/chrono-HIL</a:t>
+            </a:r>
+          </a:p>
+          <a:p>
+            <a:pPr lvl="1">
+              <a:spcAft>
+                <a:spcPts val="900"/>
+              </a:spcAft>
+            </a:pPr>
+            <a:r>
+              <a:rPr sz="1800"/>
+              <a:t>driving rigs, steering wheels, multi-user sessions, the same three floats</a:t>
+            </a:r>
+          </a:p>
+          <a:p>
+            <a:pPr>
+              <a:spcAft>
+                <a:spcPts val="900"/>
+              </a:spcAft>
+            </a:pPr>
+            <a:r>
+              <a:rPr sz="2000"/>
+              <a:t>Joystick and wheel mappings   </a:t>
+            </a:r>
+            <a:r>
+              <a:rPr sz="1800">
+                <a:latin typeface="Consolas"/>
+              </a:rPr>
+              <a:t>data/vehicle/joystick/</a:t>
+            </a:r>
+          </a:p>
+          <a:p>
+            <a:pPr lvl="1">
+              <a:spcAft>
+                <a:spcPts val="900"/>
+              </a:spcAft>
+            </a:pPr>
+            <a:r>
+              <a:rPr sz="1800"/>
+              <a:t>copy the nearest config, change the axis and button numbers</a:t>
+            </a:r>
+          </a:p>
+          <a:p>
+            <a:pPr>
+              <a:spcAft>
+                <a:spcPts val="900"/>
+              </a:spcAft>
+            </a:pPr>
+            <a:r>
+              <a:rPr sz="2000"/>
+              <a:t>The gap this talk found is small and specific, which is the good kind: one line to let Python receive the event, and a utility on top of primitives Chrono already exposes. Upstream PR to follow.</a:t>
+            </a:r>
+          </a:p>
+        </p:txBody>
+      </p:sp>
+      <p:sp>
+        <p:nvSpPr>
+          <p:cNvPr id="4" name="Footer"/>
+          <p:cNvSpPr txBox="1"/>
+          <p:nvPr/>
+        </p:nvSpPr>
+        <p:spPr>
+          <a:xfrm>
+            <a:off x="310896" y="6647688"/>
+            <a:ext cx="11640312" cy="192024"/>
+          </a:xfrm>
+          <a:prstGeom prst="rect">
+            <a:avLst/>
+          </a:prstGeom>
+          <a:noFill/>
+        </p:spPr>
+        <p:txBody>
+          <a:bodyPr wrap="none">
+            <a:spAutoFit/>
+          </a:bodyPr>
+          <a:lstStyle/>
+          <a:p>
+            <a:r>
+              <a:rPr sz="1000"/>
+              <a:t>University of Wisconsin - Madison</a:t>
+            </a:r>
+          </a:p>
+        </p:txBody>
+      </p:sp>
+      <p:sp>
+        <p:nvSpPr>
+          <p:cNvPr id="5" name="PageNo"/>
+          <p:cNvSpPr txBox="1"/>
+          <p:nvPr/>
+        </p:nvSpPr>
+        <p:spPr>
+          <a:xfrm>
+            <a:off x="10250424" y="6647688"/>
+            <a:ext cx="1709928" cy="192024"/>
+          </a:xfrm>
+          <a:prstGeom prst="rect">
+            <a:avLst/>
+          </a:prstGeom>
+          <a:noFill/>
+        </p:spPr>
+        <p:txBody>
+          <a:bodyPr wrap="none">
+            <a:spAutoFit/>
+          </a:bodyPr>
+          <a:lstStyle/>
+          <a:p>
+            <a:pPr algn="r"/>
+            <a:r>
+              <a:rPr sz="1000"/>
+              <a:t>32</a:t>
+            </a:r>
+          </a:p>
+        </p:txBody>
+      </p:sp>
+    </p:spTree>
+  </p:cSld>
+  <p:clrMapOvr>
+    <a:masterClrMapping/>
+  </p:clrMapOvr>
+</p:sld>
+</file>
+
+<file path=ppt/slides/slide33.xml><?xml version="1.0" encoding="utf-8"?>
+<p:sld xmlns:a="http://schemas.openxmlformats.org/drawingml/2006/main" xmlns:p="http://schemas.openxmlformats.org/presentationml/2006/main" xmlns:r="http://schemas.openxmlformats.org/officeDocument/2006/relationships">
+  <p:cSld>
+    <p:spTree>
+      <p:nvGrpSpPr>
+        <p:cNvPr id="1" name=""/>
+        <p:cNvGrpSpPr/>
+        <p:nvPr/>
+      </p:nvGrpSpPr>
+      <p:grpSpPr/>
+      <p:sp>
+        <p:nvSpPr>
           <p:cNvPr id="2" name="TextBox 1"/>
           <p:cNvSpPr txBox="1"/>
           <p:nvPr/>
@@ -15475,7 +16253,7 @@
             <a:pPr algn="r"/>
             <a:r>
               <a:rPr sz="1000"/>
-              <a:t>32</a:t>
+              <a:t>33</a:t>
             </a:r>
           </a:p>
         </p:txBody>

--- a/tutorial_HIL_driver.pptx
+++ b/tutorial_HIL_driver.pptx
@@ -6316,178 +6316,178 @@
           <a:p>
             <a:pPr>
               <a:spcAft>
-                <a:spcPts val="900"/>
-              </a:spcAft>
-            </a:pPr>
-            <a:r>
-              <a:rPr sz="1800"/>
+                <a:spcPts val="500"/>
+              </a:spcAft>
+            </a:pPr>
+            <a:r>
+              <a:rPr sz="1700"/>
               <a:t>1.  </a:t>
             </a:r>
             <a:r>
-              <a:rPr sz="1600">
+              <a:rPr sz="1500">
                 <a:latin typeface="Consolas"/>
               </a:rPr>
               <a:t>Step size</a:t>
             </a:r>
             <a:r>
-              <a:rPr sz="1800"/>
+              <a:rPr sz="1700"/>
               <a:t>. Everything scales with steps per second. The largest step that stays stable is the single biggest lever there is.</a:t>
             </a:r>
           </a:p>
           <a:p>
             <a:pPr>
               <a:spcAft>
-                <a:spcPts val="900"/>
-              </a:spcAft>
-            </a:pPr>
-            <a:r>
-              <a:rPr sz="1800"/>
+                <a:spcPts val="500"/>
+              </a:spcAft>
+            </a:pPr>
+            <a:r>
+              <a:rPr sz="1700"/>
               <a:t>2.  </a:t>
             </a:r>
             <a:r>
-              <a:rPr sz="1600">
+              <a:rPr sz="1500">
                 <a:latin typeface="Consolas"/>
               </a:rPr>
               <a:t>Collision geometry</a:t>
             </a:r>
             <a:r>
-              <a:rPr sz="1800"/>
+              <a:rPr sz="1700"/>
               <a:t>. Primitives beat convex hulls beat triangle meshes, by a lot. Most imported assets arrive as the slowest option.</a:t>
             </a:r>
           </a:p>
           <a:p>
             <a:pPr>
               <a:spcAft>
-                <a:spcPts val="900"/>
-              </a:spcAft>
-            </a:pPr>
-            <a:r>
-              <a:rPr sz="1800"/>
+                <a:spcPts val="500"/>
+              </a:spcAft>
+            </a:pPr>
+            <a:r>
+              <a:rPr sz="1700"/>
               <a:t>3.  </a:t>
             </a:r>
             <a:r>
-              <a:rPr sz="1600">
+              <a:rPr sz="1500">
                 <a:latin typeface="Consolas"/>
               </a:rPr>
               <a:t>Which pairs are tested at all</a:t>
             </a:r>
             <a:r>
-              <a:rPr sz="1800"/>
+              <a:rPr sz="1700"/>
               <a:t>. Families and masks remove whole classes of pair from the broadphase, including self-collision.</a:t>
             </a:r>
           </a:p>
           <a:p>
             <a:pPr>
               <a:spcAft>
-                <a:spcPts val="900"/>
-              </a:spcAft>
-            </a:pPr>
-            <a:r>
-              <a:rPr sz="1800"/>
+                <a:spcPts val="500"/>
+              </a:spcAft>
+            </a:pPr>
+            <a:r>
+              <a:rPr sz="1700"/>
               <a:t>4.  </a:t>
             </a:r>
             <a:r>
-              <a:rPr sz="1600">
+              <a:rPr sz="1500">
                 <a:latin typeface="Consolas"/>
               </a:rPr>
               <a:t>Active domains</a:t>
             </a:r>
             <a:r>
-              <a:rPr sz="1800"/>
+              <a:rPr sz="1700"/>
               <a:t>. Let the expensive physics happen only where it matters: deformable terrain near the wheels, fluid near the hull.</a:t>
             </a:r>
           </a:p>
           <a:p>
             <a:pPr>
               <a:spcAft>
-                <a:spcPts val="900"/>
-              </a:spcAft>
-            </a:pPr>
-            <a:r>
-              <a:rPr sz="1800"/>
+                <a:spcPts val="500"/>
+              </a:spcAft>
+            </a:pPr>
+            <a:r>
+              <a:rPr sz="1700"/>
               <a:t>5.  </a:t>
             </a:r>
             <a:r>
-              <a:rPr sz="1600">
+              <a:rPr sz="1500">
                 <a:latin typeface="Consolas"/>
               </a:rPr>
               <a:t>Solver type and iteration cap</a:t>
             </a:r>
             <a:r>
-              <a:rPr sz="1800"/>
+              <a:rPr sz="1700"/>
               <a:t>. Iterations buy convergence and cost time, and you pay out of the same step you wanted to sleep in.</a:t>
             </a:r>
           </a:p>
           <a:p>
             <a:pPr>
               <a:spcAft>
-                <a:spcPts val="900"/>
-              </a:spcAft>
-            </a:pPr>
-            <a:r>
-              <a:rPr sz="1800"/>
+                <a:spcPts val="500"/>
+              </a:spcAft>
+            </a:pPr>
+            <a:r>
+              <a:rPr sz="1700"/>
               <a:t>6.  </a:t>
             </a:r>
             <a:r>
-              <a:rPr sz="1600">
+              <a:rPr sz="1500">
                 <a:latin typeface="Consolas"/>
               </a:rPr>
               <a:t>Threads</a:t>
             </a:r>
             <a:r>
-              <a:rPr sz="1800"/>
+              <a:rPr sz="1700"/>
               <a:t>, </a:t>
             </a:r>
             <a:r>
-              <a:rPr sz="1600">
+              <a:rPr sz="1500">
                 <a:latin typeface="Consolas"/>
               </a:rPr>
               <a:t>sleeping bodies</a:t>
             </a:r>
             <a:r>
-              <a:rPr sz="1800"/>
+              <a:rPr sz="1700"/>
               <a:t>, and </a:t>
             </a:r>
             <a:r>
-              <a:rPr sz="1600">
+              <a:rPr sz="1500">
                 <a:latin typeface="Consolas"/>
               </a:rPr>
               <a:t>model reduction</a:t>
             </a:r>
             <a:r>
-              <a:rPr sz="1800"/>
+              <a:rPr sz="1700"/>
               <a:t> for elastic subassemblies.</a:t>
             </a:r>
           </a:p>
           <a:p>
             <a:pPr>
               <a:spcAft>
-                <a:spcPts val="900"/>
-              </a:spcAft>
-            </a:pPr>
-            <a:r>
-              <a:rPr sz="1800"/>
+                <a:spcPts val="500"/>
+              </a:spcAft>
+            </a:pPr>
+            <a:r>
+              <a:rPr sz="1700"/>
               <a:t>7.  </a:t>
             </a:r>
             <a:r>
-              <a:rPr sz="1600">
+              <a:rPr sz="1500">
                 <a:latin typeface="Consolas"/>
               </a:rPr>
               <a:t>Render less often than you step</a:t>
             </a:r>
             <a:r>
-              <a:rPr sz="1800"/>
+              <a:rPr sz="1700"/>
               <a:t>. Drawing is not free, and the eye does not need 500 Hz.</a:t>
             </a:r>
           </a:p>
           <a:p>
             <a:pPr>
               <a:spcAft>
-                <a:spcPts val="900"/>
-              </a:spcAft>
-            </a:pPr>
-            <a:r>
-              <a:rPr sz="1800"/>
+                <a:spcPts val="500"/>
+              </a:spcAft>
+            </a:pPr>
+            <a:r>
+              <a:rPr sz="1700"/>
               <a:t>None of this is specific to having a human in the loop. It becomes urgent when there is one, because a batch job that runs at 0.6x real time is merely slow, and an interactive one is broken.</a:t>
             </a:r>
           </a:p>

--- a/tutorial_HIL_driver.pptx
+++ b/tutorial_HIL_driver.pptx
@@ -4811,7 +4811,7 @@
           <a:lstStyle/>
           <a:p>
             <a:r>
-              <a:t>it decides whether the other two requirements are worth anything</a:t>
+              <a:t>the definition is settled, so start with the clause that decides whether the other two are worth anything</a:t>
             </a:r>
           </a:p>
         </p:txBody>
@@ -5794,7 +5794,17 @@
             </a:pPr>
             <a:r>
               <a:rPr sz="1600"/>
-              <a:t>Per-step timers never recover time lost on a slow step. If you need the sim to catch up after a stall, pace against TOTAL elapsed time instead, which is the third mode in this tutorial.</a:t>
+              <a:t>Per-step timers never recover time lost on a slow step. If you need the sim to catch up after a stall, pace against TOTAL elapsed time instead, which is the </a:t>
+            </a:r>
+            <a:r>
+              <a:rPr sz="1400">
+                <a:latin typeface="Consolas"/>
+              </a:rPr>
+              <a:t>cumulative</a:t>
+            </a:r>
+            <a:r>
+              <a:rPr sz="1600"/>
+              <a:t> mode above.</a:t>
             </a:r>
           </a:p>
         </p:txBody>
@@ -5893,7 +5903,7 @@
           <a:p>
             <a:r>
               <a:rPr sz="2600"/>
-              <a:t>Demo Time: does the clock actually matter</a:t>
+              <a:t>Demo 1: does the clock actually matter</a:t>
             </a:r>
           </a:p>
         </p:txBody>
@@ -6135,29 +6145,49 @@
             </a:pPr>
             <a:r>
               <a:rPr sz="2000"/>
-              <a:t>Holding the clock is two problems, and only one of them is a call:</a:t>
-            </a:r>
-          </a:p>
-          <a:p>
-            <a:pPr lvl="1">
+              <a:t>That demo was the easy half. </a:t>
+            </a:r>
+            <a:r>
+              <a:rPr sz="1800">
+                <a:latin typeface="Consolas"/>
+              </a:rPr>
+              <a:t>Spin(step)</a:t>
+            </a:r>
+            <a:r>
+              <a:rPr sz="2000"/>
+              <a:t> hands back time the step did not use, and if the step costs more than </a:t>
+            </a:r>
+            <a:r>
+              <a:rPr sz="1800">
+                <a:latin typeface="Consolas"/>
+              </a:rPr>
+              <a:t>step</a:t>
+            </a:r>
+            <a:r>
+              <a:rPr sz="2000"/>
+              <a:t> there is nothing to hand back and no call that changes it.</a:t>
+            </a:r>
+          </a:p>
+          <a:p>
+            <a:pPr>
               <a:spcAft>
                 <a:spcPts val="900"/>
               </a:spcAft>
             </a:pPr>
             <a:r>
-              <a:rPr sz="1800"/>
-              <a:t>do not run FAST  -  sleep off the slack</a:t>
-            </a:r>
-          </a:p>
-          <a:p>
-            <a:pPr lvl="1">
+              <a:rPr sz="2000"/>
+              <a:t>The budget is fixed: one step of wall clock, minus what you spend drawing, minus what you leave as margin for a bad step. Contacts, solver iterations, terrain and drawing all come out of the same one.</a:t>
+            </a:r>
+          </a:p>
+          <a:p>
+            <a:pPr>
               <a:spcAft>
                 <a:spcPts val="900"/>
               </a:spcAft>
             </a:pPr>
             <a:r>
-              <a:rPr sz="1800"/>
-              <a:t>do not run SLOW  -  make the step cheap enough to HAVE slack</a:t>
+              <a:rPr sz="2000"/>
+              <a:t>So the hard half is the only half left: make the step cheap enough that there is slack to sleep off in the first place.</a:t>
             </a:r>
           </a:p>
           <a:p>
@@ -6168,7 +6198,7 @@
             </a:pPr>
             <a:r>
               <a:rPr sz="2000"/>
-              <a:t>The budget is fixed: one step of wall clock, minus what you spend drawing, minus what you leave as margin for a bad step.</a:t>
+              <a:t>What follows is the set of levers Chrono gives you for that, in rough order of how much they usually buy.</a:t>
             </a:r>
           </a:p>
           <a:p>
@@ -6179,18 +6209,7 @@
             </a:pPr>
             <a:r>
               <a:rPr sz="2000"/>
-              <a:t>What follows is the set of levers Chrono gives you for the second problem, in rough order of how much they usually buy.</a:t>
-            </a:r>
-          </a:p>
-          <a:p>
-            <a:pPr>
-              <a:spcAft>
-                <a:spcPts val="900"/>
-              </a:spcAft>
-            </a:pPr>
-            <a:r>
-              <a:rPr sz="2000"/>
-              <a:t>Reach for them in this order. People tend to start at the solver, which is near the bottom of the list and the easiest place to spend an afternoon for nothing.</a:t>
+              <a:t>Reach for them in that order. People tend to start at the solver, which is near the bottom of the list and the easiest place to spend an afternoon for nothing.</a:t>
             </a:r>
           </a:p>
         </p:txBody>
@@ -7485,7 +7504,7 @@
           <a:lstStyle/>
           <a:p>
             <a:r>
-              <a:t>Requirement 1: a path into the state</a:t>
+              <a:t>Requirements 1 and 2: a path in, and a path back</a:t>
             </a:r>
           </a:p>
         </p:txBody>
@@ -7506,7 +7525,7 @@
           <a:lstStyle/>
           <a:p>
             <a:r>
-              <a:t>how a person's action actually reaches the equations</a:t>
+              <a:t>the clock is held, so now the person needs a way to act on the state and a way to see what happened</a:t>
             </a:r>
           </a:p>
         </p:txBody>
@@ -7860,7 +7879,7 @@
             <a:pPr algn="ctr"/>
             <a:r>
               <a:rPr sz="1500"/>
-              <a:t>the vehicle demos  (Parts 2-4)</a:t>
+              <a:t>demos 1 and 2, the vehicle</a:t>
             </a:r>
           </a:p>
         </p:txBody>
@@ -7890,7 +7909,7 @@
             <a:pPr algn="ctr"/>
             <a:r>
               <a:rPr sz="1500"/>
-              <a:t>the drag and push demos  (Parts 9-10)</a:t>
+              <a:t>demos 3 and 4, the drag and the push</a:t>
             </a:r>
           </a:p>
         </p:txBody>
@@ -9098,7 +9117,7 @@
             </a:r>
             <a:r>
               <a:rPr sz="2000"/>
-              <a:t> Why pacing comes first, and the levers Chrono gives you for buying enough slack to pace at all.</a:t>
+              <a:t> Why pacing comes first, and the levers Chrono gives you for making a step cheap enough to pace at all.</a:t>
             </a:r>
           </a:p>
           <a:p>
@@ -9151,7 +9170,7 @@
             </a:pPr>
             <a:r>
               <a:rPr sz="2000"/>
-              <a:t>Four demos along the way, and the code is all in one repository you can clone.</a:t>
+              <a:t>Four demos along the way. All the code is in one repository you can clone.</a:t>
             </a:r>
           </a:p>
           <a:p>
@@ -10069,13 +10088,13 @@
               </a:spcAft>
             </a:pPr>
             <a:r>
-              <a:rPr sz="1400">
+              <a:rPr sz="1500">
                 <a:latin typeface="Consolas"/>
               </a:rPr>
               <a:t>ChInteractiveDriver</a:t>
             </a:r>
             <a:r>
-              <a:rPr sz="1600"/>
+              <a:rPr sz="1700"/>
               <a:t> covers two CLASSES of device, not two devices:</a:t>
             </a:r>
           </a:p>
@@ -10086,27 +10105,27 @@
               </a:spcAft>
             </a:pPr>
             <a:r>
-              <a:rPr sz="1200">
+              <a:rPr sz="1300">
                 <a:latin typeface="Consolas"/>
               </a:rPr>
               <a:t>InputMode_KEYBOARD</a:t>
             </a:r>
             <a:r>
-              <a:rPr sz="1400"/>
+              <a:rPr sz="1500"/>
               <a:t>  -  with </a:t>
             </a:r>
             <a:r>
-              <a:rPr sz="1200">
+              <a:rPr sz="1300">
                 <a:latin typeface="Consolas"/>
               </a:rPr>
               <a:t>KeyboardMode_HELD</a:t>
             </a:r>
             <a:r>
-              <a:rPr sz="1400"/>
+              <a:rPr sz="1500"/>
               <a:t> or </a:t>
             </a:r>
             <a:r>
-              <a:rPr sz="1200">
+              <a:rPr sz="1300">
                 <a:latin typeface="Consolas"/>
               </a:rPr>
               <a:t>_CUMULATIVE</a:t>
@@ -10119,13 +10138,13 @@
               </a:spcAft>
             </a:pPr>
             <a:r>
-              <a:rPr sz="1200">
+              <a:rPr sz="1300">
                 <a:latin typeface="Consolas"/>
               </a:rPr>
               <a:t>InputMode_JOYSTICK</a:t>
             </a:r>
             <a:r>
-              <a:rPr sz="1400"/>
+              <a:rPr sz="1500"/>
               <a:t>  -  anything the windowing layer enumerates as one</a:t>
             </a:r>
           </a:p>
@@ -10136,11 +10155,11 @@
               </a:spcAft>
             </a:pPr>
             <a:r>
-              <a:rPr sz="1600"/>
+              <a:rPr sz="1700"/>
               <a:t>A joystick is mapped by a JSON file, not by code: </a:t>
             </a:r>
             <a:r>
-              <a:rPr sz="1400">
+              <a:rPr sz="1500">
                 <a:latin typeface="Consolas"/>
               </a:rPr>
               <a:t>SetJoystickConfigFile(path)</a:t>
@@ -10153,7 +10172,7 @@
               </a:spcAft>
             </a:pPr>
             <a:r>
-              <a:rPr sz="1400"/>
+              <a:rPr sz="1500"/>
               <a:t>mapped axes: steering, throttle, brake, CLUTCH</a:t>
             </a:r>
           </a:p>
@@ -10164,7 +10183,7 @@
               </a:spcAft>
             </a:pPr>
             <a:r>
-              <a:rPr sz="1400"/>
+              <a:rPr sz="1500"/>
               <a:t>mapped buttons: shift up/down, reverse, gears 1-9, manual-gearbox toggle, plus one user callback</a:t>
             </a:r>
           </a:p>
@@ -10175,18 +10194,18 @@
               </a:spcAft>
             </a:pPr>
             <a:r>
-              <a:rPr sz="1600"/>
-              <a:t>Four configs ship in </a:t>
-            </a:r>
-            <a:r>
-              <a:rPr sz="1400">
+              <a:rPr sz="1700"/>
+              <a:t>So a G923-class rig is a config file, not a port. Four ship in </a:t>
+            </a:r>
+            <a:r>
+              <a:rPr sz="1500">
                 <a:latin typeface="Consolas"/>
               </a:rPr>
               <a:t>data/vehicle/joystick/</a:t>
             </a:r>
             <a:r>
-              <a:rPr sz="1600"/>
-              <a:t>: Default, Logitech RumblePad 2, Xbox One, and Wheel+Pedals+Shifters</a:t>
+              <a:rPr sz="1700"/>
+              <a:t>: Default, Logitech RumblePad 2, Xbox One, and Wheel+Pedals+Shifters.</a:t>
             </a:r>
           </a:p>
           <a:p>
@@ -10196,8 +10215,8 @@
               </a:spcAft>
             </a:pPr>
             <a:r>
-              <a:rPr sz="1600"/>
-              <a:t>Each control names its own DEVICE, so a wheel, a pedal box and an H-shifter enumerating as three separate USB devices all map at once</a:t>
+              <a:rPr sz="1700"/>
+              <a:t>Each control names its own DEVICE, so a wheel, a pedal box and an H-shifter enumerating as three separate USB devices all map at once.</a:t>
             </a:r>
           </a:p>
           <a:p>
@@ -10207,8 +10226,8 @@
               </a:spcAft>
             </a:pPr>
             <a:r>
-              <a:rPr sz="1600"/>
-              <a:t>Not hypothetical: the remote-driving study on slide 5 ran on a Logitech G29 wheel and pedal set through this path</a:t>
+              <a:rPr sz="1700"/>
+              <a:t>Not hypothetical: the car-following study earlier in this talk ran on a Logitech G29 wheel and pedal set through this path.</a:t>
             </a:r>
           </a:p>
           <a:p>
@@ -10218,19 +10237,8 @@
               </a:spcAft>
             </a:pPr>
             <a:r>
-              <a:rPr sz="1600"/>
-              <a:t>So a G923-class rig is a config file, not a port. The mapping and the semantics are Chrono's and cross-platform; enumerating the device is delegated to the windowing layer, so which platforms see your wheel follows that layer, and I have not tested it here.</a:t>
-            </a:r>
-          </a:p>
-          <a:p>
-            <a:pPr>
-              <a:spcAft>
-                <a:spcPts val="500"/>
-              </a:spcAft>
-            </a:pPr>
-            <a:r>
-              <a:rPr sz="1600"/>
-              <a:t>All of it is exposed to PyChrono.</a:t>
+              <a:rPr sz="1700"/>
+              <a:t>The mapping and the semantics are Chrono's, and all of it is exposed to PyChrono. Enumerating the device is delegated to the windowing layer, so which platforms see your wheel follows that layer, and I have not tested it here.</a:t>
             </a:r>
           </a:p>
         </p:txBody>
@@ -10456,7 +10464,7 @@
             </a:pPr>
             <a:r>
               <a:rPr sz="2000"/>
-              <a:t>This tutorial ships one of these, an operator console on UDP, so a second machine can drive the simulation and watch telemetry come back.</a:t>
+              <a:t>The repository has one of these in its archive, an operator console on UDP, so a second machine can drive the simulation and watch telemetry come back.</a:t>
             </a:r>
           </a:p>
         </p:txBody>
@@ -10555,7 +10563,7 @@
           <a:p>
             <a:r>
               <a:rPr sz="2600"/>
-              <a:t>Demo Time: a person driving the vehicle</a:t>
+              <a:t>Demo 2: a person driving the vehicle</a:t>
             </a:r>
           </a:p>
         </p:txBody>
@@ -10819,7 +10827,7 @@
           <a:lstStyle/>
           <a:p>
             <a:r>
-              <a:t>what Chrono provides today, the one line it is missing, and what that buys</a:t>
+              <a:t>the driver class only covers vehicles, so here is what Chrono gives everything else, the one line it is missing, and what that buys</a:t>
             </a:r>
           </a:p>
         </p:txBody>
@@ -11062,7 +11070,7 @@
             </a:pPr>
             <a:r>
               <a:rPr sz="2000"/>
-              <a:t>That last line is the gap this tutorial walks into. Everything needed to build one is already exposed; what is missing is the ability to receive the mouse event in the first place.</a:t>
+              <a:t>A mouse drag is three steps: hear the click, turn it into a body, turn the pull into physics. Chrono exposes the last two, and they come next. The first one is the gap, and it comes after them.</a:t>
             </a:r>
           </a:p>
         </p:txBody>
@@ -11161,7 +11169,7 @@
           <a:p>
             <a:r>
               <a:rPr sz="2600"/>
-              <a:t>The gap, and the one line that closes it (native_pick.py lines 10 to 26)</a:t>
+              <a:t>Turning a click into a body: the ray-cast surface</a:t>
             </a:r>
           </a:p>
         </p:txBody>
@@ -11175,7 +11183,7 @@
         <p:spPr>
           <a:xfrm>
             <a:off x="0" y="1207008"/>
-            <a:ext cx="12188952" cy="3957319"/>
+            <a:ext cx="12188952" cy="4389119"/>
           </a:xfrm>
           <a:prstGeom prst="rect">
             <a:avLst/>
@@ -11196,278 +11204,770 @@
               </a:spcAft>
             </a:pPr>
             <a:r>
-              <a:rPr sz="800">
+              <a:rPr sz="900">
                 <a:solidFill>
                   <a:srgbClr val="7FAF7F"/>
                 </a:solidFill>
                 <a:latin typeface="Consolas"/>
               </a:rPr>
-              <a:t># chrono_swig/interface/irrlicht/ChModuleIrrlicht.i</a:t>
-            </a:r>
-          </a:p>
-          <a:p>
-            <a:pPr>
-              <a:spcAft>
-                <a:spcPts val="0"/>
-              </a:spcAft>
-            </a:pPr>
-            <a:r>
-              <a:rPr sz="800">
-                <a:solidFill>
-                  <a:srgbClr val="CCCCCC"/>
-                </a:solidFill>
-                <a:latin typeface="Consolas"/>
-              </a:rPr>
-              <a:t>+%</a:t>
-            </a:r>
-            <a:r>
-              <a:rPr sz="800">
+              <a:t>// chrono/collision/ChCollisionSystem.h</a:t>
+            </a:r>
+          </a:p>
+          <a:p>
+            <a:pPr>
+              <a:spcAft>
+                <a:spcPts val="0"/>
+              </a:spcAft>
+            </a:pPr>
+            <a:r>
+              <a:rPr sz="900">
+                <a:solidFill>
+                  <a:srgbClr val="CCCCCC"/>
+                </a:solidFill>
+                <a:latin typeface="Consolas"/>
+              </a:rPr>
+              <a:t>struct </a:t>
+            </a:r>
+            <a:r>
+              <a:rPr sz="900">
+                <a:solidFill>
+                  <a:srgbClr val="F0A040"/>
+                </a:solidFill>
+                <a:latin typeface="Consolas"/>
+              </a:rPr>
+              <a:t>ChRayhitResult</a:t>
+            </a:r>
+            <a:r>
+              <a:rPr sz="900">
+                <a:solidFill>
+                  <a:srgbClr val="CCCCCC"/>
+                </a:solidFill>
+                <a:latin typeface="Consolas"/>
+              </a:rPr>
+              <a:t> {</a:t>
+            </a:r>
+          </a:p>
+          <a:p>
+            <a:pPr>
+              <a:spcAft>
+                <a:spcPts val="0"/>
+              </a:spcAft>
+            </a:pPr>
+            <a:r>
+              <a:rPr sz="900">
+                <a:solidFill>
+                  <a:srgbClr val="CCCCCC"/>
+                </a:solidFill>
+                <a:latin typeface="Consolas"/>
+              </a:rPr>
+              <a:t>    bool hit;</a:t>
+            </a:r>
+          </a:p>
+          <a:p>
+            <a:pPr>
+              <a:spcAft>
+                <a:spcPts val="0"/>
+              </a:spcAft>
+            </a:pPr>
+            <a:r>
+              <a:rPr sz="900">
+                <a:solidFill>
+                  <a:srgbClr val="CCCCCC"/>
+                </a:solidFill>
+                <a:latin typeface="Consolas"/>
+              </a:rPr>
+              <a:t>    </a:t>
+            </a:r>
+            <a:r>
+              <a:rPr sz="900">
+                <a:solidFill>
+                  <a:srgbClr val="F0A040"/>
+                </a:solidFill>
+                <a:latin typeface="Consolas"/>
+              </a:rPr>
+              <a:t>ChVector3d</a:t>
+            </a:r>
+            <a:r>
+              <a:rPr sz="900">
+                <a:solidFill>
+                  <a:srgbClr val="CCCCCC"/>
+                </a:solidFill>
+                <a:latin typeface="Consolas"/>
+              </a:rPr>
+              <a:t> abs_hitPoint;     </a:t>
+            </a:r>
+            <a:r>
+              <a:rPr sz="900">
+                <a:solidFill>
+                  <a:srgbClr val="7FAF7F"/>
+                </a:solidFill>
+                <a:latin typeface="Consolas"/>
+              </a:rPr>
+              <a:t>// where, in world coordinates</a:t>
+            </a:r>
+          </a:p>
+          <a:p>
+            <a:pPr>
+              <a:spcAft>
+                <a:spcPts val="0"/>
+              </a:spcAft>
+            </a:pPr>
+            <a:r>
+              <a:rPr sz="900">
+                <a:solidFill>
+                  <a:srgbClr val="CCCCCC"/>
+                </a:solidFill>
+                <a:latin typeface="Consolas"/>
+              </a:rPr>
+              <a:t>    </a:t>
+            </a:r>
+            <a:r>
+              <a:rPr sz="900">
+                <a:solidFill>
+                  <a:srgbClr val="F0A040"/>
+                </a:solidFill>
+                <a:latin typeface="Consolas"/>
+              </a:rPr>
+              <a:t>ChVector3d</a:t>
+            </a:r>
+            <a:r>
+              <a:rPr sz="900">
+                <a:solidFill>
+                  <a:srgbClr val="CCCCCC"/>
+                </a:solidFill>
+                <a:latin typeface="Consolas"/>
+              </a:rPr>
+              <a:t> abs_hitNormal;    </a:t>
+            </a:r>
+            <a:r>
+              <a:rPr sz="900">
+                <a:solidFill>
+                  <a:srgbClr val="7FAF7F"/>
+                </a:solidFill>
+                <a:latin typeface="Consolas"/>
+              </a:rPr>
+              <a:t>// the surface normal there</a:t>
+            </a:r>
+          </a:p>
+          <a:p>
+            <a:pPr>
+              <a:spcAft>
+                <a:spcPts val="0"/>
+              </a:spcAft>
+            </a:pPr>
+            <a:r>
+              <a:rPr sz="900">
+                <a:solidFill>
+                  <a:srgbClr val="CCCCCC"/>
+                </a:solidFill>
+                <a:latin typeface="Consolas"/>
+              </a:rPr>
+              <a:t>    double dist_factor;          </a:t>
+            </a:r>
+            <a:r>
+              <a:rPr sz="900">
+                <a:solidFill>
+                  <a:srgbClr val="7FAF7F"/>
+                </a:solidFill>
+                <a:latin typeface="Consolas"/>
+              </a:rPr>
+              <a:t>// 0 .. 1 along the segment</a:t>
+            </a:r>
+          </a:p>
+          <a:p>
+            <a:pPr>
+              <a:spcAft>
+                <a:spcPts val="0"/>
+              </a:spcAft>
+            </a:pPr>
+            <a:r>
+              <a:rPr sz="900">
+                <a:solidFill>
+                  <a:srgbClr val="CCCCCC"/>
+                </a:solidFill>
+                <a:latin typeface="Consolas"/>
+              </a:rPr>
+              <a:t>    </a:t>
+            </a:r>
+            <a:r>
+              <a:rPr sz="900">
+                <a:solidFill>
+                  <a:srgbClr val="F0A040"/>
+                </a:solidFill>
+                <a:latin typeface="Consolas"/>
+              </a:rPr>
+              <a:t>ChCollisionModel</a:t>
+            </a:r>
+            <a:r>
+              <a:rPr sz="900">
+                <a:solidFill>
+                  <a:srgbClr val="CCCCCC"/>
+                </a:solidFill>
+                <a:latin typeface="Consolas"/>
+              </a:rPr>
+              <a:t>* hitModel;  </a:t>
+            </a:r>
+            <a:r>
+              <a:rPr sz="900">
+                <a:solidFill>
+                  <a:srgbClr val="7FAF7F"/>
+                </a:solidFill>
+                <a:latin typeface="Consolas"/>
+              </a:rPr>
+              <a:t>// -&gt; CastToChBody() for the body</a:t>
+            </a:r>
+          </a:p>
+          <a:p>
+            <a:pPr>
+              <a:spcAft>
+                <a:spcPts val="0"/>
+              </a:spcAft>
+            </a:pPr>
+            <a:r>
+              <a:rPr sz="900">
+                <a:solidFill>
+                  <a:srgbClr val="CCCCCC"/>
+                </a:solidFill>
+                <a:latin typeface="Consolas"/>
+              </a:rPr>
+              <a:t>};</a:t>
+            </a:r>
+          </a:p>
+          <a:p>
+            <a:pPr>
+              <a:spcAft>
+                <a:spcPts val="0"/>
+              </a:spcAft>
+            </a:pPr>
+            <a:r>
+              <a:rPr sz="900">
+                <a:solidFill>
+                  <a:srgbClr val="CCCCCC"/>
+                </a:solidFill>
+                <a:latin typeface="Consolas"/>
+              </a:rPr>
+              <a:t> </a:t>
+            </a:r>
+          </a:p>
+          <a:p>
+            <a:pPr>
+              <a:spcAft>
+                <a:spcPts val="0"/>
+              </a:spcAft>
+            </a:pPr>
+            <a:r>
+              <a:rPr sz="900">
+                <a:solidFill>
+                  <a:srgbClr val="CCCCCC"/>
+                </a:solidFill>
+                <a:latin typeface="Consolas"/>
+              </a:rPr>
+              <a:t>virtual bool </a:t>
+            </a:r>
+            <a:r>
+              <a:rPr sz="900">
                 <a:solidFill>
                   <a:srgbClr val="7FC7E8"/>
                 </a:solidFill>
                 <a:latin typeface="Consolas"/>
               </a:rPr>
-              <a:t>feature</a:t>
-            </a:r>
-            <a:r>
-              <a:rPr sz="800">
-                <a:solidFill>
-                  <a:srgbClr val="CCCCCC"/>
-                </a:solidFill>
-                <a:latin typeface="Consolas"/>
-              </a:rPr>
-              <a:t>(</a:t>
-            </a:r>
-            <a:r>
-              <a:rPr sz="800">
+              <a:t>RayHit</a:t>
+            </a:r>
+            <a:r>
+              <a:rPr sz="900">
+                <a:solidFill>
+                  <a:srgbClr val="CCCCCC"/>
+                </a:solidFill>
+                <a:latin typeface="Consolas"/>
+              </a:rPr>
+              <a:t>(const </a:t>
+            </a:r>
+            <a:r>
+              <a:rPr sz="900">
+                <a:solidFill>
+                  <a:srgbClr val="F0A040"/>
+                </a:solidFill>
+                <a:latin typeface="Consolas"/>
+              </a:rPr>
+              <a:t>ChVector3d</a:t>
+            </a:r>
+            <a:r>
+              <a:rPr sz="900">
+                <a:solidFill>
+                  <a:srgbClr val="CCCCCC"/>
+                </a:solidFill>
+                <a:latin typeface="Consolas"/>
+              </a:rPr>
+              <a:t>&amp; from,</a:t>
+            </a:r>
+          </a:p>
+          <a:p>
+            <a:pPr>
+              <a:spcAft>
+                <a:spcPts val="0"/>
+              </a:spcAft>
+            </a:pPr>
+            <a:r>
+              <a:rPr sz="900">
+                <a:solidFill>
+                  <a:srgbClr val="CCCCCC"/>
+                </a:solidFill>
+                <a:latin typeface="Consolas"/>
+              </a:rPr>
+              <a:t>                    const </a:t>
+            </a:r>
+            <a:r>
+              <a:rPr sz="900">
+                <a:solidFill>
+                  <a:srgbClr val="F0A040"/>
+                </a:solidFill>
+                <a:latin typeface="Consolas"/>
+              </a:rPr>
+              <a:t>ChVector3d</a:t>
+            </a:r>
+            <a:r>
+              <a:rPr sz="900">
+                <a:solidFill>
+                  <a:srgbClr val="CCCCCC"/>
+                </a:solidFill>
+                <a:latin typeface="Consolas"/>
+              </a:rPr>
+              <a:t>&amp; to,</a:t>
+            </a:r>
+          </a:p>
+          <a:p>
+            <a:pPr>
+              <a:spcAft>
+                <a:spcPts val="0"/>
+              </a:spcAft>
+            </a:pPr>
+            <a:r>
+              <a:rPr sz="900">
+                <a:solidFill>
+                  <a:srgbClr val="CCCCCC"/>
+                </a:solidFill>
+                <a:latin typeface="Consolas"/>
+              </a:rPr>
+              <a:t>                    </a:t>
+            </a:r>
+            <a:r>
+              <a:rPr sz="900">
+                <a:solidFill>
+                  <a:srgbClr val="F0A040"/>
+                </a:solidFill>
+                <a:latin typeface="Consolas"/>
+              </a:rPr>
+              <a:t>ChRayhitResult</a:t>
+            </a:r>
+            <a:r>
+              <a:rPr sz="900">
+                <a:solidFill>
+                  <a:srgbClr val="CCCCCC"/>
+                </a:solidFill>
+                <a:latin typeface="Consolas"/>
+              </a:rPr>
+              <a:t>&amp; result) const;</a:t>
+            </a:r>
+          </a:p>
+          <a:p>
+            <a:pPr>
+              <a:spcAft>
+                <a:spcPts val="0"/>
+              </a:spcAft>
+            </a:pPr>
+            <a:r>
+              <a:rPr sz="900">
+                <a:solidFill>
+                  <a:srgbClr val="CCCCCC"/>
+                </a:solidFill>
+                <a:latin typeface="Consolas"/>
+              </a:rPr>
+              <a:t> </a:t>
+            </a:r>
+          </a:p>
+          <a:p>
+            <a:pPr>
+              <a:spcAft>
+                <a:spcPts val="0"/>
+              </a:spcAft>
+            </a:pPr>
+            <a:r>
+              <a:rPr sz="900">
+                <a:solidFill>
+                  <a:srgbClr val="7FAF7F"/>
+                </a:solidFill>
+                <a:latin typeface="Consolas"/>
+              </a:rPr>
+              <a:t>// A ray sees COLLISION geometry, never visual geometry. A link you</a:t>
+            </a:r>
+          </a:p>
+          <a:p>
+            <a:pPr>
+              <a:spcAft>
+                <a:spcPts val="0"/>
+              </a:spcAft>
+            </a:pPr>
+            <a:r>
+              <a:rPr sz="900">
+                <a:solidFill>
+                  <a:srgbClr val="7FAF7F"/>
+                </a:solidFill>
+                <a:latin typeface="Consolas"/>
+              </a:rPr>
+              <a:t>// can see but whose collision is off is invisible to every click.</a:t>
+            </a:r>
+          </a:p>
+          <a:p>
+            <a:pPr>
+              <a:spcAft>
+                <a:spcPts val="0"/>
+              </a:spcAft>
+            </a:pPr>
+            <a:r>
+              <a:rPr sz="900">
+                <a:solidFill>
+                  <a:srgbClr val="7FAF7F"/>
+                </a:solidFill>
+                <a:latin typeface="Consolas"/>
+              </a:rPr>
+              <a:t>// That one sentence accounted for every 'it will not pick' bug here.</a:t>
+            </a:r>
+          </a:p>
+          <a:p>
+            <a:pPr>
+              <a:spcAft>
+                <a:spcPts val="0"/>
+              </a:spcAft>
+            </a:pPr>
+            <a:r>
+              <a:rPr sz="900">
+                <a:solidFill>
+                  <a:srgbClr val="CCCCCC"/>
+                </a:solidFill>
+                <a:latin typeface="Consolas"/>
+              </a:rPr>
+              <a:t> </a:t>
+            </a:r>
+          </a:p>
+          <a:p>
+            <a:pPr>
+              <a:spcAft>
+                <a:spcPts val="0"/>
+              </a:spcAft>
+            </a:pPr>
+            <a:r>
+              <a:rPr sz="900">
+                <a:solidFill>
+                  <a:srgbClr val="7FAF7F"/>
+                </a:solidFill>
+                <a:latin typeface="Consolas"/>
+              </a:rPr>
+              <a:t># ---- and how this tutorial calls it (hil_manipulate.py, lines 338 to 349) ------</a:t>
+            </a:r>
+          </a:p>
+          <a:p>
+            <a:pPr>
+              <a:spcAft>
+                <a:spcPts val="0"/>
+              </a:spcAft>
+            </a:pPr>
+            <a:r>
+              <a:rPr sz="900">
+                <a:solidFill>
+                  <a:srgbClr val="CCCCCC"/>
+                </a:solidFill>
+                <a:latin typeface="Consolas"/>
+              </a:rPr>
+              <a:t>def </a:t>
+            </a:r>
+            <a:r>
+              <a:rPr sz="900">
+                <a:solidFill>
+                  <a:srgbClr val="7FC7E8"/>
+                </a:solidFill>
+                <a:latin typeface="Consolas"/>
+              </a:rPr>
+              <a:t>pick_along_ray</a:t>
+            </a:r>
+            <a:r>
+              <a:rPr sz="900">
+                <a:solidFill>
+                  <a:srgbClr val="CCCCCC"/>
+                </a:solidFill>
+                <a:latin typeface="Consolas"/>
+              </a:rPr>
+              <a:t>(system, start, end):</a:t>
+            </a:r>
+          </a:p>
+          <a:p>
+            <a:pPr>
+              <a:spcAft>
+                <a:spcPts val="0"/>
+              </a:spcAft>
+            </a:pPr>
+            <a:r>
+              <a:rPr sz="900">
+                <a:solidFill>
+                  <a:srgbClr val="CCCCCC"/>
+                </a:solidFill>
+                <a:latin typeface="Consolas"/>
+              </a:rPr>
+              <a:t>    </a:t>
+            </a:r>
+            <a:r>
+              <a:rPr sz="900">
                 <a:solidFill>
                   <a:srgbClr val="D8A0C0"/>
                 </a:solidFill>
                 <a:latin typeface="Consolas"/>
               </a:rPr>
-              <a:t>"director"</a:t>
-            </a:r>
-            <a:r>
-              <a:rPr sz="800">
-                <a:solidFill>
-                  <a:srgbClr val="CCCCCC"/>
-                </a:solidFill>
-                <a:latin typeface="Consolas"/>
-              </a:rPr>
-              <a:t>) irr::IEventReceiver;</a:t>
-            </a:r>
-          </a:p>
-          <a:p>
-            <a:pPr>
-              <a:spcAft>
-                <a:spcPts val="0"/>
-              </a:spcAft>
-            </a:pPr>
-            <a:r>
-              <a:rPr sz="800">
-                <a:solidFill>
-                  <a:srgbClr val="CCCCCC"/>
-                </a:solidFill>
-                <a:latin typeface="Consolas"/>
-              </a:rPr>
-              <a:t>%include </a:t>
-            </a:r>
-            <a:r>
-              <a:rPr sz="800">
+              <a:t>""</a:t>
+            </a:r>
+            <a:r>
+              <a:rPr sz="900">
                 <a:solidFill>
                   <a:srgbClr val="D8A0C0"/>
                 </a:solidFill>
                 <a:latin typeface="Consolas"/>
               </a:rPr>
-              <a:t>"IEventReceiver.h"</a:t>
-            </a:r>
-          </a:p>
-          <a:p>
-            <a:pPr>
-              <a:spcAft>
-                <a:spcPts val="0"/>
-              </a:spcAft>
-            </a:pPr>
-            <a:r>
-              <a:rPr sz="800">
-                <a:solidFill>
-                  <a:srgbClr val="CCCCCC"/>
-                </a:solidFill>
-                <a:latin typeface="Consolas"/>
-              </a:rPr>
-              <a:t> </a:t>
-            </a:r>
-          </a:p>
-          <a:p>
-            <a:pPr>
-              <a:spcAft>
-                <a:spcPts val="0"/>
-              </a:spcAft>
-            </a:pPr>
-            <a:r>
-              <a:rPr sz="800">
-                <a:solidFill>
-                  <a:srgbClr val="7FAF7F"/>
-                </a:solidFill>
-                <a:latin typeface="Consolas"/>
-              </a:rPr>
-              <a:t># The module ALREADY compiles with directors enabled:</a:t>
-            </a:r>
-          </a:p>
-          <a:p>
-            <a:pPr>
-              <a:spcAft>
-                <a:spcPts val="0"/>
-              </a:spcAft>
-            </a:pPr>
-            <a:r>
-              <a:rPr sz="800">
-                <a:solidFill>
-                  <a:srgbClr val="7FAF7F"/>
-                </a:solidFill>
-                <a:latin typeface="Consolas"/>
-              </a:rPr>
-              <a:t>#     %module(directors="1", threads="1") irrlicht</a:t>
-            </a:r>
-          </a:p>
-          <a:p>
-            <a:pPr>
-              <a:spcAft>
-                <a:spcPts val="0"/>
-              </a:spcAft>
-            </a:pPr>
-            <a:r>
-              <a:rPr sz="800">
-                <a:solidFill>
-                  <a:srgbClr val="7FAF7F"/>
-                </a:solidFill>
-                <a:latin typeface="Consolas"/>
-              </a:rPr>
-              <a:t># and AddUserEventReceiver is ALREADY bound. Without the</a:t>
-            </a:r>
-          </a:p>
-          <a:p>
-            <a:pPr>
-              <a:spcAft>
-                <a:spcPts val="0"/>
-              </a:spcAft>
-            </a:pPr>
-            <a:r>
-              <a:rPr sz="800">
-                <a:solidFill>
-                  <a:srgbClr val="7FAF7F"/>
-                </a:solidFill>
-                <a:latin typeface="Consolas"/>
-              </a:rPr>
-              <a:t># director, though, Python gets an abstract class:</a:t>
-            </a:r>
-          </a:p>
-          <a:p>
-            <a:pPr>
-              <a:spcAft>
-                <a:spcPts val="0"/>
-              </a:spcAft>
-            </a:pPr>
-            <a:r>
-              <a:rPr sz="800">
-                <a:solidFill>
-                  <a:srgbClr val="7FAF7F"/>
-                </a:solidFill>
-                <a:latin typeface="Consolas"/>
-              </a:rPr>
-              <a:t>#     &gt;&gt;&gt; ci.IEventReceiver()</a:t>
-            </a:r>
-          </a:p>
-          <a:p>
-            <a:pPr>
-              <a:spcAft>
-                <a:spcPts val="0"/>
-              </a:spcAft>
-            </a:pPr>
-            <a:r>
-              <a:rPr sz="800">
-                <a:solidFill>
-                  <a:srgbClr val="7FAF7F"/>
-                </a:solidFill>
-                <a:latin typeface="Consolas"/>
-              </a:rPr>
-              <a:t>#     AttributeError: No constructor defined - class is abstract</a:t>
-            </a:r>
-          </a:p>
-          <a:p>
-            <a:pPr>
-              <a:spcAft>
-                <a:spcPts val="0"/>
-              </a:spcAft>
-            </a:pPr>
-            <a:r>
-              <a:rPr sz="800">
-                <a:solidFill>
-                  <a:srgbClr val="7FAF7F"/>
-                </a:solidFill>
-                <a:latin typeface="Consolas"/>
-              </a:rPr>
-              <a:t># so there is a socket, and nothing you can plug into it.</a:t>
-            </a:r>
-          </a:p>
-          <a:p>
-            <a:pPr>
-              <a:spcAft>
-                <a:spcPts val="0"/>
-              </a:spcAft>
-            </a:pPr>
-            <a:r>
-              <a:rPr sz="800">
-                <a:solidFill>
-                  <a:srgbClr val="CCCCCC"/>
-                </a:solidFill>
-                <a:latin typeface="Consolas"/>
-              </a:rPr>
-              <a:t> </a:t>
-            </a:r>
-          </a:p>
-          <a:p>
-            <a:pPr>
-              <a:spcAft>
-                <a:spcPts val="0"/>
-              </a:spcAft>
-            </a:pPr>
-            <a:r>
-              <a:rPr sz="800">
-                <a:solidFill>
-                  <a:srgbClr val="CCCCCC"/>
-                </a:solidFill>
-                <a:latin typeface="Consolas"/>
-              </a:rPr>
-              <a:t>class </a:t>
-            </a:r>
-            <a:r>
-              <a:rPr sz="800">
+              <a:t>"The primitive a mouse click would use. Returns (body, world_point) or None."</a:t>
+            </a:r>
+            <a:r>
+              <a:rPr sz="900">
+                <a:solidFill>
+                  <a:srgbClr val="D8A0C0"/>
+                </a:solidFill>
+                <a:latin typeface="Consolas"/>
+              </a:rPr>
+              <a:t>""</a:t>
+            </a:r>
+          </a:p>
+          <a:p>
+            <a:pPr>
+              <a:spcAft>
+                <a:spcPts val="0"/>
+              </a:spcAft>
+            </a:pPr>
+            <a:r>
+              <a:rPr sz="900">
+                <a:solidFill>
+                  <a:srgbClr val="CCCCCC"/>
+                </a:solidFill>
+                <a:latin typeface="Consolas"/>
+              </a:rPr>
+              <a:t>    res = chrono.</a:t>
+            </a:r>
+            <a:r>
+              <a:rPr sz="900">
+                <a:solidFill>
+                  <a:srgbClr val="F0A040"/>
+                </a:solidFill>
+                <a:latin typeface="Consolas"/>
+              </a:rPr>
+              <a:t>ChRayhitResult</a:t>
+            </a:r>
+            <a:r>
+              <a:rPr sz="900">
+                <a:solidFill>
+                  <a:srgbClr val="CCCCCC"/>
+                </a:solidFill>
+                <a:latin typeface="Consolas"/>
+              </a:rPr>
+              <a:t>()</a:t>
+            </a:r>
+          </a:p>
+          <a:p>
+            <a:pPr>
+              <a:spcAft>
+                <a:spcPts val="0"/>
+              </a:spcAft>
+            </a:pPr>
+            <a:r>
+              <a:rPr sz="900">
+                <a:solidFill>
+                  <a:srgbClr val="CCCCCC"/>
+                </a:solidFill>
+                <a:latin typeface="Consolas"/>
+              </a:rPr>
+              <a:t>    system.</a:t>
+            </a:r>
+            <a:r>
+              <a:rPr sz="900">
                 <a:solidFill>
                   <a:srgbClr val="7FC7E8"/>
                 </a:solidFill>
                 <a:latin typeface="Consolas"/>
               </a:rPr>
-              <a:t>MouseReceiver</a:t>
-            </a:r>
-            <a:r>
-              <a:rPr sz="800">
-                <a:solidFill>
-                  <a:srgbClr val="CCCCCC"/>
-                </a:solidFill>
-                <a:latin typeface="Consolas"/>
-              </a:rPr>
-              <a:t>(irr.IEventReceiver):</a:t>
-            </a:r>
-          </a:p>
-          <a:p>
-            <a:pPr>
-              <a:spcAft>
-                <a:spcPts val="0"/>
-              </a:spcAft>
-            </a:pPr>
-            <a:r>
-              <a:rPr sz="800">
+              <a:t>GetCollisionSystem</a:t>
+            </a:r>
+            <a:r>
+              <a:rPr sz="900">
+                <a:solidFill>
+                  <a:srgbClr val="CCCCCC"/>
+                </a:solidFill>
+                <a:latin typeface="Consolas"/>
+              </a:rPr>
+              <a:t>().</a:t>
+            </a:r>
+            <a:r>
+              <a:rPr sz="900">
+                <a:solidFill>
+                  <a:srgbClr val="7FC7E8"/>
+                </a:solidFill>
+                <a:latin typeface="Consolas"/>
+              </a:rPr>
+              <a:t>RayHit</a:t>
+            </a:r>
+            <a:r>
+              <a:rPr sz="900">
+                <a:solidFill>
+                  <a:srgbClr val="CCCCCC"/>
+                </a:solidFill>
+                <a:latin typeface="Consolas"/>
+              </a:rPr>
+              <a:t>(start, end, res)</a:t>
+            </a:r>
+          </a:p>
+          <a:p>
+            <a:pPr>
+              <a:spcAft>
+                <a:spcPts val="0"/>
+              </a:spcAft>
+            </a:pPr>
+            <a:r>
+              <a:rPr sz="900">
+                <a:solidFill>
+                  <a:srgbClr val="CCCCCC"/>
+                </a:solidFill>
+                <a:latin typeface="Consolas"/>
+              </a:rPr>
+              <a:t>    if not res.hit:</a:t>
+            </a:r>
+          </a:p>
+          <a:p>
+            <a:pPr>
+              <a:spcAft>
+                <a:spcPts val="0"/>
+              </a:spcAft>
+            </a:pPr>
+            <a:r>
+              <a:rPr sz="900">
+                <a:solidFill>
+                  <a:srgbClr val="CCCCCC"/>
+                </a:solidFill>
+                <a:latin typeface="Consolas"/>
+              </a:rPr>
+              <a:t>        return None</a:t>
+            </a:r>
+          </a:p>
+          <a:p>
+            <a:pPr>
+              <a:spcAft>
+                <a:spcPts val="0"/>
+              </a:spcAft>
+            </a:pPr>
+            <a:r>
+              <a:rPr sz="900">
+                <a:solidFill>
+                  <a:srgbClr val="CCCCCC"/>
+                </a:solidFill>
+                <a:latin typeface="Consolas"/>
+              </a:rPr>
+              <a:t>    body = chrono.</a:t>
+            </a:r>
+            <a:r>
+              <a:rPr sz="900">
+                <a:solidFill>
+                  <a:srgbClr val="7FC7E8"/>
+                </a:solidFill>
+                <a:latin typeface="Consolas"/>
+              </a:rPr>
+              <a:t>CastToChBody</a:t>
+            </a:r>
+            <a:r>
+              <a:rPr sz="900">
+                <a:solidFill>
+                  <a:srgbClr val="CCCCCC"/>
+                </a:solidFill>
+                <a:latin typeface="Consolas"/>
+              </a:rPr>
+              <a:t>(res.hitModel.</a:t>
+            </a:r>
+            <a:r>
+              <a:rPr sz="900">
+                <a:solidFill>
+                  <a:srgbClr val="7FC7E8"/>
+                </a:solidFill>
+                <a:latin typeface="Consolas"/>
+              </a:rPr>
+              <a:t>GetContactable</a:t>
+            </a:r>
+            <a:r>
+              <a:rPr sz="900">
+                <a:solidFill>
+                  <a:srgbClr val="CCCCCC"/>
+                </a:solidFill>
+                <a:latin typeface="Consolas"/>
+              </a:rPr>
+              <a:t>())</a:t>
+            </a:r>
+          </a:p>
+          <a:p>
+            <a:pPr>
+              <a:spcAft>
+                <a:spcPts val="0"/>
+              </a:spcAft>
+            </a:pPr>
+            <a:r>
+              <a:rPr sz="900">
+                <a:solidFill>
+                  <a:srgbClr val="CCCCCC"/>
+                </a:solidFill>
+                <a:latin typeface="Consolas"/>
+              </a:rPr>
+              <a:t>    if body is None:</a:t>
+            </a:r>
+          </a:p>
+          <a:p>
+            <a:pPr>
+              <a:spcAft>
+                <a:spcPts val="0"/>
+              </a:spcAft>
+            </a:pPr>
+            <a:r>
+              <a:rPr sz="900">
+                <a:solidFill>
+                  <a:srgbClr val="CCCCCC"/>
+                </a:solidFill>
+                <a:latin typeface="Consolas"/>
+              </a:rPr>
+              <a:t>        return None</a:t>
+            </a:r>
+          </a:p>
+          <a:p>
+            <a:pPr>
+              <a:spcAft>
+                <a:spcPts val="0"/>
+              </a:spcAft>
+            </a:pPr>
+            <a:r>
+              <a:rPr sz="900">
+                <a:solidFill>
+                  <a:srgbClr val="CCCCCC"/>
+                </a:solidFill>
+                <a:latin typeface="Consolas"/>
+              </a:rPr>
+              <a:t>    p, nrm = res.abs_hitPoint, res.abs_hitNormal</a:t>
+            </a:r>
+          </a:p>
+          <a:p>
+            <a:pPr>
+              <a:spcAft>
+                <a:spcPts val="0"/>
+              </a:spcAft>
+            </a:pPr>
+            <a:r>
+              <a:rPr sz="900">
                 <a:solidFill>
                   <a:srgbClr val="CCCCCC"/>
                 </a:solidFill>
@@ -11476,370 +11976,74 @@
               <a:t>    </a:t>
             </a:r>
             <a:r>
-              <a:rPr sz="800">
-                <a:solidFill>
-                  <a:srgbClr val="D8A0C0"/>
-                </a:solidFill>
-                <a:latin typeface="Consolas"/>
-              </a:rPr>
-              <a:t>""</a:t>
-            </a:r>
-            <a:r>
-              <a:rPr sz="800">
-                <a:solidFill>
-                  <a:srgbClr val="D8A0C0"/>
-                </a:solidFill>
-                <a:latin typeface="Consolas"/>
-              </a:rPr>
-              <a:t>"No Quartz, no CGWindowList, no NSEvent. No macOS. Just Irrlicht."</a:t>
-            </a:r>
-            <a:r>
-              <a:rPr sz="800">
-                <a:solidFill>
-                  <a:srgbClr val="D8A0C0"/>
-                </a:solidFill>
-                <a:latin typeface="Consolas"/>
-              </a:rPr>
-              <a:t>""</a:t>
-            </a:r>
-          </a:p>
-          <a:p>
-            <a:pPr>
-              <a:spcAft>
-                <a:spcPts val="0"/>
-              </a:spcAft>
-            </a:pPr>
-            <a:r>
-              <a:rPr sz="800">
-                <a:solidFill>
-                  <a:srgbClr val="CCCCCC"/>
-                </a:solidFill>
-                <a:latin typeface="Consolas"/>
-              </a:rPr>
-              <a:t> </a:t>
-            </a:r>
-          </a:p>
-          <a:p>
-            <a:pPr>
-              <a:spcAft>
-                <a:spcPts val="0"/>
-              </a:spcAft>
-            </a:pPr>
-            <a:r>
-              <a:rPr sz="800">
-                <a:solidFill>
-                  <a:srgbClr val="CCCCCC"/>
-                </a:solidFill>
-                <a:latin typeface="Consolas"/>
-              </a:rPr>
-              <a:t>    def </a:t>
-            </a:r>
-            <a:r>
-              <a:rPr sz="800">
+              <a:rPr sz="900">
                 <a:solidFill>
                   <a:srgbClr val="7FC7E8"/>
                 </a:solidFill>
                 <a:latin typeface="Consolas"/>
               </a:rPr>
-              <a:t>__init__</a:t>
-            </a:r>
-            <a:r>
-              <a:rPr sz="800">
-                <a:solidFill>
-                  <a:srgbClr val="CCCCCC"/>
-                </a:solidFill>
-                <a:latin typeface="Consolas"/>
-              </a:rPr>
-              <a:t>(self):</a:t>
-            </a:r>
-          </a:p>
-          <a:p>
-            <a:pPr>
-              <a:spcAft>
-                <a:spcPts val="0"/>
-              </a:spcAft>
-            </a:pPr>
-            <a:r>
-              <a:rPr sz="800">
-                <a:solidFill>
-                  <a:srgbClr val="CCCCCC"/>
-                </a:solidFill>
-                <a:latin typeface="Consolas"/>
-              </a:rPr>
-              <a:t>        </a:t>
-            </a:r>
-            <a:r>
-              <a:rPr sz="800">
-                <a:solidFill>
-                  <a:srgbClr val="7FC7E8"/>
-                </a:solidFill>
-                <a:latin typeface="Consolas"/>
-              </a:rPr>
-              <a:t>super</a:t>
-            </a:r>
-            <a:r>
-              <a:rPr sz="800">
-                <a:solidFill>
-                  <a:srgbClr val="CCCCCC"/>
-                </a:solidFill>
-                <a:latin typeface="Consolas"/>
-              </a:rPr>
-              <a:t>().</a:t>
-            </a:r>
-            <a:r>
-              <a:rPr sz="800">
-                <a:solidFill>
-                  <a:srgbClr val="7FC7E8"/>
-                </a:solidFill>
-                <a:latin typeface="Consolas"/>
-              </a:rPr>
-              <a:t>__init__</a:t>
-            </a:r>
-            <a:r>
-              <a:rPr sz="800">
-                <a:solidFill>
-                  <a:srgbClr val="CCCCCC"/>
-                </a:solidFill>
-                <a:latin typeface="Consolas"/>
-              </a:rPr>
-              <a:t>()</a:t>
-            </a:r>
-          </a:p>
-          <a:p>
-            <a:pPr>
-              <a:spcAft>
-                <a:spcPts val="0"/>
-              </a:spcAft>
-            </a:pPr>
-            <a:r>
-              <a:rPr sz="800">
-                <a:solidFill>
-                  <a:srgbClr val="CCCCCC"/>
-                </a:solidFill>
-                <a:latin typeface="Consolas"/>
-              </a:rPr>
-              <a:t>        self.x = self.y = 0</a:t>
-            </a:r>
-          </a:p>
-          <a:p>
-            <a:pPr>
-              <a:spcAft>
-                <a:spcPts val="0"/>
-              </a:spcAft>
-            </a:pPr>
-            <a:r>
-              <a:rPr sz="800">
-                <a:solidFill>
-                  <a:srgbClr val="CCCCCC"/>
-                </a:solidFill>
-                <a:latin typeface="Consolas"/>
-              </a:rPr>
-              <a:t>        self.down = False</a:t>
-            </a:r>
-          </a:p>
-          <a:p>
-            <a:pPr>
-              <a:spcAft>
-                <a:spcPts val="0"/>
-              </a:spcAft>
-            </a:pPr>
-            <a:r>
-              <a:rPr sz="800">
-                <a:solidFill>
-                  <a:srgbClr val="CCCCCC"/>
-                </a:solidFill>
-                <a:latin typeface="Consolas"/>
-              </a:rPr>
-              <a:t>        self.pressed = False          </a:t>
-            </a:r>
-            <a:r>
-              <a:rPr sz="800">
-                <a:solidFill>
-                  <a:srgbClr val="7FAF7F"/>
-                </a:solidFill>
-                <a:latin typeface="Consolas"/>
-              </a:rPr>
-              <a:t># edge, consumed by the loop</a:t>
-            </a:r>
-          </a:p>
-          <a:p>
-            <a:pPr>
-              <a:spcAft>
-                <a:spcPts val="0"/>
-              </a:spcAft>
-            </a:pPr>
-            <a:r>
-              <a:rPr sz="800">
-                <a:solidFill>
-                  <a:srgbClr val="CCCCCC"/>
-                </a:solidFill>
-                <a:latin typeface="Consolas"/>
-              </a:rPr>
-              <a:t>        self.keys = </a:t>
-            </a:r>
-            <a:r>
-              <a:rPr sz="800">
-                <a:solidFill>
-                  <a:srgbClr val="7FC7E8"/>
-                </a:solidFill>
-                <a:latin typeface="Consolas"/>
-              </a:rPr>
-              <a:t>set</a:t>
-            </a:r>
-            <a:r>
-              <a:rPr sz="800">
-                <a:solidFill>
-                  <a:srgbClr val="CCCCCC"/>
-                </a:solidFill>
-                <a:latin typeface="Consolas"/>
-              </a:rPr>
-              <a:t>()</a:t>
-            </a:r>
-          </a:p>
-          <a:p>
-            <a:pPr>
-              <a:spcAft>
-                <a:spcPts val="0"/>
-              </a:spcAft>
-            </a:pPr>
-            <a:r>
-              <a:rPr sz="800">
-                <a:solidFill>
-                  <a:srgbClr val="CCCCCC"/>
-                </a:solidFill>
-                <a:latin typeface="Consolas"/>
-              </a:rPr>
-              <a:t> </a:t>
-            </a:r>
-          </a:p>
-          <a:p>
-            <a:pPr>
-              <a:spcAft>
-                <a:spcPts val="0"/>
-              </a:spcAft>
-            </a:pPr>
-            <a:r>
-              <a:rPr sz="800">
-                <a:solidFill>
-                  <a:srgbClr val="CCCCCC"/>
-                </a:solidFill>
-                <a:latin typeface="Consolas"/>
-              </a:rPr>
-              <a:t>    def </a:t>
-            </a:r>
-            <a:r>
-              <a:rPr sz="800">
-                <a:solidFill>
-                  <a:srgbClr val="7FC7E8"/>
-                </a:solidFill>
-                <a:latin typeface="Consolas"/>
-              </a:rPr>
-              <a:t>OnEvent</a:t>
-            </a:r>
-            <a:r>
-              <a:rPr sz="800">
-                <a:solidFill>
-                  <a:srgbClr val="CCCCCC"/>
-                </a:solidFill>
-                <a:latin typeface="Consolas"/>
-              </a:rPr>
-              <a:t>(self, ev):</a:t>
-            </a:r>
-          </a:p>
-          <a:p>
-            <a:pPr>
-              <a:spcAft>
-                <a:spcPts val="0"/>
-              </a:spcAft>
-            </a:pPr>
-            <a:r>
-              <a:rPr sz="800">
-                <a:solidFill>
-                  <a:srgbClr val="CCCCCC"/>
-                </a:solidFill>
-                <a:latin typeface="Consolas"/>
-              </a:rPr>
-              <a:t>        if ev.EventType == irr.EET_MOUSE_INPUT_EVENT:</a:t>
-            </a:r>
-          </a:p>
-          <a:p>
-            <a:pPr>
-              <a:spcAft>
-                <a:spcPts val="0"/>
-              </a:spcAft>
-            </a:pPr>
-            <a:r>
-              <a:rPr sz="800">
-                <a:solidFill>
-                  <a:srgbClr val="CCCCCC"/>
-                </a:solidFill>
-                <a:latin typeface="Consolas"/>
-              </a:rPr>
-              <a:t>            self.x, self.y = ev.MouseInput.X, ev.MouseInput.Y</a:t>
-            </a:r>
-          </a:p>
-          <a:p>
-            <a:pPr>
-              <a:spcAft>
-                <a:spcPts val="0"/>
-              </a:spcAft>
-            </a:pPr>
-            <a:r>
-              <a:rPr sz="800">
-                <a:solidFill>
-                  <a:srgbClr val="CCCCCC"/>
-                </a:solidFill>
-                <a:latin typeface="Consolas"/>
-              </a:rPr>
-              <a:t>            if ev.MouseInput.Event == irr.EMIE_LMOUSE_PRESSED_DOWN:</a:t>
-            </a:r>
-          </a:p>
-          <a:p>
-            <a:pPr>
-              <a:spcAft>
-                <a:spcPts val="0"/>
-              </a:spcAft>
-            </a:pPr>
-            <a:r>
-              <a:rPr sz="800">
-                <a:solidFill>
-                  <a:srgbClr val="CCCCCC"/>
-                </a:solidFill>
-                <a:latin typeface="Consolas"/>
-              </a:rPr>
-              <a:t>                self.down = self.pressed = True</a:t>
-            </a:r>
-          </a:p>
-          <a:p>
-            <a:pPr>
-              <a:spcAft>
-                <a:spcPts val="0"/>
-              </a:spcAft>
-            </a:pPr>
-            <a:r>
-              <a:rPr sz="800">
-                <a:solidFill>
-                  <a:srgbClr val="CCCCCC"/>
-                </a:solidFill>
-                <a:latin typeface="Consolas"/>
-              </a:rPr>
-              <a:t>            elif ev.MouseInput.Event == irr.EMIE_LMOUSE_LEFT_UP:</a:t>
-            </a:r>
-          </a:p>
-          <a:p>
-            <a:pPr>
-              <a:spcAft>
-                <a:spcPts val="0"/>
-              </a:spcAft>
-            </a:pPr>
-            <a:r>
-              <a:rPr sz="800">
-                <a:solidFill>
-                  <a:srgbClr val="CCCCCC"/>
-                </a:solidFill>
-                <a:latin typeface="Consolas"/>
-              </a:rPr>
-              <a:t>                self.down = False</a:t>
+              <a:t>return</a:t>
+            </a:r>
+            <a:r>
+              <a:rPr sz="900">
+                <a:solidFill>
+                  <a:srgbClr val="CCCCCC"/>
+                </a:solidFill>
+                <a:latin typeface="Consolas"/>
+              </a:rPr>
+              <a:t> (body, chrono.</a:t>
+            </a:r>
+            <a:r>
+              <a:rPr sz="900">
+                <a:solidFill>
+                  <a:srgbClr val="F0A040"/>
+                </a:solidFill>
+                <a:latin typeface="Consolas"/>
+              </a:rPr>
+              <a:t>ChVector3d</a:t>
+            </a:r>
+            <a:r>
+              <a:rPr sz="900">
+                <a:solidFill>
+                  <a:srgbClr val="CCCCCC"/>
+                </a:solidFill>
+                <a:latin typeface="Consolas"/>
+              </a:rPr>
+              <a:t>(p.x, p.y, p.z),</a:t>
+            </a:r>
+          </a:p>
+          <a:p>
+            <a:pPr>
+              <a:spcAft>
+                <a:spcPts val="0"/>
+              </a:spcAft>
+            </a:pPr>
+            <a:r>
+              <a:rPr sz="900">
+                <a:solidFill>
+                  <a:srgbClr val="CCCCCC"/>
+                </a:solidFill>
+                <a:latin typeface="Consolas"/>
+              </a:rPr>
+              <a:t>            chrono.</a:t>
+            </a:r>
+            <a:r>
+              <a:rPr sz="900">
+                <a:solidFill>
+                  <a:srgbClr val="F0A040"/>
+                </a:solidFill>
+                <a:latin typeface="Consolas"/>
+              </a:rPr>
+              <a:t>ChVector3d</a:t>
+            </a:r>
+            <a:r>
+              <a:rPr sz="900">
+                <a:solidFill>
+                  <a:srgbClr val="CCCCCC"/>
+                </a:solidFill>
+                <a:latin typeface="Consolas"/>
+              </a:rPr>
+              <a:t>(nrm.x, nrm.y, nrm.z))</a:t>
             </a:r>
           </a:p>
         </p:txBody>
@@ -11852,8 +12056,8 @@
         </p:nvSpPr>
         <p:spPr>
           <a:xfrm>
-            <a:off x="402336" y="5274056"/>
-            <a:ext cx="11393424" cy="987551"/>
+            <a:off x="402336" y="5705855"/>
+            <a:ext cx="11393424" cy="713232"/>
           </a:xfrm>
           <a:prstGeom prst="rect">
             <a:avLst/>
@@ -11873,38 +12077,7 @@
             </a:pPr>
             <a:r>
               <a:rPr sz="1600"/>
-              <a:t>Without it, reading the mouse means going around Chrono to the operating system: </a:t>
-            </a:r>
-            <a:r>
-              <a:rPr sz="1400">
-                <a:latin typeface="Consolas"/>
-              </a:rPr>
-              <a:t>135 lines</a:t>
-            </a:r>
-            <a:r>
-              <a:rPr sz="1600"/>
-              <a:t>, macOS only, and it breaks when another window takes focus.</a:t>
-            </a:r>
-          </a:p>
-          <a:p>
-            <a:pPr>
-              <a:spcAft>
-                <a:spcPts val="400"/>
-              </a:spcAft>
-            </a:pPr>
-            <a:r>
-              <a:rPr sz="1600"/>
-              <a:t>With it, the same capability is </a:t>
-            </a:r>
-            <a:r>
-              <a:rPr sz="1400">
-                <a:latin typeface="Consolas"/>
-              </a:rPr>
-              <a:t>56 lines</a:t>
-            </a:r>
-            <a:r>
-              <a:rPr sz="1600"/>
-              <a:t> of ordinary PyChrono. Upstream PR to follow this talk.</a:t>
+              <a:t>Exposed in PyChrono already, and exact: the same primitive a native mouse handler would call. Screen pixel to ray is your arithmetic; ray to body is Chrono's.</a:t>
             </a:r>
           </a:p>
         </p:txBody>
@@ -12003,7 +12176,7 @@
           <a:p>
             <a:r>
               <a:rPr sz="2600"/>
-              <a:t>Turning a click into a body: the ray-cast surface</a:t>
+              <a:t>Turning a pull into physics: force, or constraint</a:t>
             </a:r>
           </a:p>
         </p:txBody>
@@ -12017,7 +12190,7 @@
         <p:spPr>
           <a:xfrm>
             <a:off x="0" y="1207008"/>
-            <a:ext cx="12188952" cy="4389119"/>
+            <a:ext cx="12188952" cy="3719195"/>
           </a:xfrm>
           <a:prstGeom prst="rect">
             <a:avLst/>
@@ -12038,846 +12211,961 @@
               </a:spcAft>
             </a:pPr>
             <a:r>
-              <a:rPr sz="900">
+              <a:rPr sz="700">
                 <a:solidFill>
                   <a:srgbClr val="7FAF7F"/>
                 </a:solidFill>
                 <a:latin typeface="Consolas"/>
               </a:rPr>
-              <a:t>// chrono/collision/ChCollisionSystem.h</a:t>
-            </a:r>
-          </a:p>
-          <a:p>
-            <a:pPr>
-              <a:spcAft>
-                <a:spcPts val="0"/>
-              </a:spcAft>
-            </a:pPr>
-            <a:r>
-              <a:rPr sz="900">
-                <a:solidFill>
-                  <a:srgbClr val="CCCCCC"/>
-                </a:solidFill>
-                <a:latin typeface="Consolas"/>
-              </a:rPr>
-              <a:t>struct </a:t>
-            </a:r>
-            <a:r>
-              <a:rPr sz="900">
+              <a:t>// A human pulling on something is one of exactly two things.</a:t>
+            </a:r>
+          </a:p>
+          <a:p>
+            <a:pPr>
+              <a:spcAft>
+                <a:spcPts val="0"/>
+              </a:spcAft>
+            </a:pPr>
+            <a:r>
+              <a:rPr sz="700">
+                <a:solidFill>
+                  <a:srgbClr val="CCCCCC"/>
+                </a:solidFill>
+                <a:latin typeface="Consolas"/>
+              </a:rPr>
+              <a:t> </a:t>
+            </a:r>
+          </a:p>
+          <a:p>
+            <a:pPr>
+              <a:spcAft>
+                <a:spcPts val="0"/>
+              </a:spcAft>
+            </a:pPr>
+            <a:r>
+              <a:rPr sz="700">
+                <a:solidFill>
+                  <a:srgbClr val="7FAF7F"/>
+                </a:solidFill>
+                <a:latin typeface="Consolas"/>
+              </a:rPr>
+              <a:t>// 1. A FORCE, when you want a push of known size (chrono/physics/ChBody.h)</a:t>
+            </a:r>
+          </a:p>
+          <a:p>
+            <a:pPr>
+              <a:spcAft>
+                <a:spcPts val="0"/>
+              </a:spcAft>
+            </a:pPr>
+            <a:r>
+              <a:rPr sz="700">
+                <a:solidFill>
+                  <a:srgbClr val="CCCCCC"/>
+                </a:solidFill>
+                <a:latin typeface="Consolas"/>
+              </a:rPr>
+              <a:t>unsigned int idx = body-&gt;</a:t>
+            </a:r>
+            <a:r>
+              <a:rPr sz="700">
+                <a:solidFill>
+                  <a:srgbClr val="7FC7E8"/>
+                </a:solidFill>
+                <a:latin typeface="Consolas"/>
+              </a:rPr>
+              <a:t>AddAccumulator</a:t>
+            </a:r>
+            <a:r>
+              <a:rPr sz="700">
+                <a:solidFill>
+                  <a:srgbClr val="CCCCCC"/>
+                </a:solidFill>
+                <a:latin typeface="Consolas"/>
+              </a:rPr>
+              <a:t>();       </a:t>
+            </a:r>
+            <a:r>
+              <a:rPr sz="700">
+                <a:solidFill>
+                  <a:srgbClr val="7FAF7F"/>
+                </a:solidFill>
+                <a:latin typeface="Consolas"/>
+              </a:rPr>
+              <a:t>// ONCE per body</a:t>
+            </a:r>
+          </a:p>
+          <a:p>
+            <a:pPr>
+              <a:spcAft>
+                <a:spcPts val="0"/>
+              </a:spcAft>
+            </a:pPr>
+            <a:r>
+              <a:rPr sz="700">
+                <a:solidFill>
+                  <a:srgbClr val="CCCCCC"/>
+                </a:solidFill>
+                <a:latin typeface="Consolas"/>
+              </a:rPr>
+              <a:t>body-&gt;</a:t>
+            </a:r>
+            <a:r>
+              <a:rPr sz="700">
+                <a:solidFill>
+                  <a:srgbClr val="7FC7E8"/>
+                </a:solidFill>
+                <a:latin typeface="Consolas"/>
+              </a:rPr>
+              <a:t>EmptyAccumulator</a:t>
+            </a:r>
+            <a:r>
+              <a:rPr sz="700">
+                <a:solidFill>
+                  <a:srgbClr val="CCCCCC"/>
+                </a:solidFill>
+                <a:latin typeface="Consolas"/>
+              </a:rPr>
+              <a:t>(idx);                     </a:t>
+            </a:r>
+            <a:r>
+              <a:rPr sz="700">
+                <a:solidFill>
+                  <a:srgbClr val="7FAF7F"/>
+                </a:solidFill>
+                <a:latin typeface="Consolas"/>
+              </a:rPr>
+              <a:t>// your job, EVERY step</a:t>
+            </a:r>
+          </a:p>
+          <a:p>
+            <a:pPr>
+              <a:spcAft>
+                <a:spcPts val="0"/>
+              </a:spcAft>
+            </a:pPr>
+            <a:r>
+              <a:rPr sz="700">
+                <a:solidFill>
+                  <a:srgbClr val="CCCCCC"/>
+                </a:solidFill>
+                <a:latin typeface="Consolas"/>
+              </a:rPr>
+              <a:t>body-&gt;</a:t>
+            </a:r>
+            <a:r>
+              <a:rPr sz="700">
+                <a:solidFill>
+                  <a:srgbClr val="7FC7E8"/>
+                </a:solidFill>
+                <a:latin typeface="Consolas"/>
+              </a:rPr>
+              <a:t>AccumulateForce</a:t>
+            </a:r>
+            <a:r>
+              <a:rPr sz="700">
+                <a:solidFill>
+                  <a:srgbClr val="CCCCCC"/>
+                </a:solidFill>
+                <a:latin typeface="Consolas"/>
+              </a:rPr>
+              <a:t>(idx, force, appl_point, local);</a:t>
+            </a:r>
+          </a:p>
+          <a:p>
+            <a:pPr>
+              <a:spcAft>
+                <a:spcPts val="0"/>
+              </a:spcAft>
+            </a:pPr>
+            <a:r>
+              <a:rPr sz="700">
+                <a:solidFill>
+                  <a:srgbClr val="CCCCCC"/>
+                </a:solidFill>
+                <a:latin typeface="Consolas"/>
+              </a:rPr>
+              <a:t>body-&gt;</a:t>
+            </a:r>
+            <a:r>
+              <a:rPr sz="700">
+                <a:solidFill>
+                  <a:srgbClr val="7FC7E8"/>
+                </a:solidFill>
+                <a:latin typeface="Consolas"/>
+              </a:rPr>
+              <a:t>AccumulateTorque</a:t>
+            </a:r>
+            <a:r>
+              <a:rPr sz="700">
+                <a:solidFill>
+                  <a:srgbClr val="CCCCCC"/>
+                </a:solidFill>
+                <a:latin typeface="Consolas"/>
+              </a:rPr>
+              <a:t>(idx, torque, local);</a:t>
+            </a:r>
+          </a:p>
+          <a:p>
+            <a:pPr>
+              <a:spcAft>
+                <a:spcPts val="0"/>
+              </a:spcAft>
+            </a:pPr>
+            <a:r>
+              <a:rPr sz="700">
+                <a:solidFill>
+                  <a:srgbClr val="CCCCCC"/>
+                </a:solidFill>
+                <a:latin typeface="Consolas"/>
+              </a:rPr>
+              <a:t> </a:t>
+            </a:r>
+          </a:p>
+          <a:p>
+            <a:pPr>
+              <a:spcAft>
+                <a:spcPts val="0"/>
+              </a:spcAft>
+            </a:pPr>
+            <a:r>
+              <a:rPr sz="700">
+                <a:solidFill>
+                  <a:srgbClr val="7FAF7F"/>
+                </a:solidFill>
+                <a:latin typeface="Consolas"/>
+              </a:rPr>
+              <a:t>// 2. A CONSTRAINT, when you want a hand (chrono/physics/ChLinkTSDA.h)</a:t>
+            </a:r>
+          </a:p>
+          <a:p>
+            <a:pPr>
+              <a:spcAft>
+                <a:spcPts val="0"/>
+              </a:spcAft>
+            </a:pPr>
+            <a:r>
+              <a:rPr sz="700">
+                <a:solidFill>
+                  <a:srgbClr val="CCCCCC"/>
+                </a:solidFill>
+                <a:latin typeface="Consolas"/>
+              </a:rPr>
+              <a:t>spring-&gt;</a:t>
+            </a:r>
+            <a:r>
+              <a:rPr sz="700">
+                <a:solidFill>
+                  <a:srgbClr val="7FC7E8"/>
+                </a:solidFill>
+                <a:latin typeface="Consolas"/>
+              </a:rPr>
+              <a:t>Initialize</a:t>
+            </a:r>
+            <a:r>
+              <a:rPr sz="700">
+                <a:solidFill>
+                  <a:srgbClr val="CCCCCC"/>
+                </a:solidFill>
+                <a:latin typeface="Consolas"/>
+              </a:rPr>
+              <a:t>(handle, body, local, point1, point2);</a:t>
+            </a:r>
+          </a:p>
+          <a:p>
+            <a:pPr>
+              <a:spcAft>
+                <a:spcPts val="0"/>
+              </a:spcAft>
+            </a:pPr>
+            <a:r>
+              <a:rPr sz="700">
+                <a:solidFill>
+                  <a:srgbClr val="CCCCCC"/>
+                </a:solidFill>
+                <a:latin typeface="Consolas"/>
+              </a:rPr>
+              <a:t>spring-&gt;</a:t>
+            </a:r>
+            <a:r>
+              <a:rPr sz="700">
+                <a:solidFill>
+                  <a:srgbClr val="7FC7E8"/>
+                </a:solidFill>
+                <a:latin typeface="Consolas"/>
+              </a:rPr>
+              <a:t>SetRestLength</a:t>
+            </a:r>
+            <a:r>
+              <a:rPr sz="700">
+                <a:solidFill>
+                  <a:srgbClr val="CCCCCC"/>
+                </a:solidFill>
+                <a:latin typeface="Consolas"/>
+              </a:rPr>
+              <a:t>(0.0);</a:t>
+            </a:r>
+          </a:p>
+          <a:p>
+            <a:pPr>
+              <a:spcAft>
+                <a:spcPts val="0"/>
+              </a:spcAft>
+            </a:pPr>
+            <a:r>
+              <a:rPr sz="700">
+                <a:solidFill>
+                  <a:srgbClr val="CCCCCC"/>
+                </a:solidFill>
+                <a:latin typeface="Consolas"/>
+              </a:rPr>
+              <a:t>spring-&gt;</a:t>
+            </a:r>
+            <a:r>
+              <a:rPr sz="700">
+                <a:solidFill>
+                  <a:srgbClr val="7FC7E8"/>
+                </a:solidFill>
+                <a:latin typeface="Consolas"/>
+              </a:rPr>
+              <a:t>SetSpringCoefficient</a:t>
+            </a:r>
+            <a:r>
+              <a:rPr sz="700">
+                <a:solidFill>
+                  <a:srgbClr val="CCCCCC"/>
+                </a:solidFill>
+                <a:latin typeface="Consolas"/>
+              </a:rPr>
+              <a:t>(k);   </a:t>
+            </a:r>
+            <a:r>
+              <a:rPr sz="700">
+                <a:solidFill>
+                  <a:srgbClr val="7FAF7F"/>
+                </a:solidFill>
+                <a:latin typeface="Consolas"/>
+              </a:rPr>
+              <a:t>// k = m*w^2   scale with the MASS</a:t>
+            </a:r>
+          </a:p>
+          <a:p>
+            <a:pPr>
+              <a:spcAft>
+                <a:spcPts val="0"/>
+              </a:spcAft>
+            </a:pPr>
+            <a:r>
+              <a:rPr sz="700">
+                <a:solidFill>
+                  <a:srgbClr val="CCCCCC"/>
+                </a:solidFill>
+                <a:latin typeface="Consolas"/>
+              </a:rPr>
+              <a:t>spring-&gt;</a:t>
+            </a:r>
+            <a:r>
+              <a:rPr sz="700">
+                <a:solidFill>
+                  <a:srgbClr val="7FC7E8"/>
+                </a:solidFill>
+                <a:latin typeface="Consolas"/>
+              </a:rPr>
+              <a:t>SetDampingCoefficient</a:t>
+            </a:r>
+            <a:r>
+              <a:rPr sz="700">
+                <a:solidFill>
+                  <a:srgbClr val="CCCCCC"/>
+                </a:solidFill>
+                <a:latin typeface="Consolas"/>
+              </a:rPr>
+              <a:t>(c);  </a:t>
+            </a:r>
+            <a:r>
+              <a:rPr sz="700">
+                <a:solidFill>
+                  <a:srgbClr val="7FAF7F"/>
+                </a:solidFill>
+                <a:latin typeface="Consolas"/>
+              </a:rPr>
+              <a:t>// c = 2*m*w    critically damped</a:t>
+            </a:r>
+          </a:p>
+          <a:p>
+            <a:pPr>
+              <a:spcAft>
+                <a:spcPts val="0"/>
+              </a:spcAft>
+            </a:pPr>
+            <a:r>
+              <a:rPr sz="700">
+                <a:solidFill>
+                  <a:srgbClr val="CCCCCC"/>
+                </a:solidFill>
+                <a:latin typeface="Consolas"/>
+              </a:rPr>
+              <a:t>sys.</a:t>
+            </a:r>
+            <a:r>
+              <a:rPr sz="700">
+                <a:solidFill>
+                  <a:srgbClr val="7FC7E8"/>
+                </a:solidFill>
+                <a:latin typeface="Consolas"/>
+              </a:rPr>
+              <a:t>AddLink</a:t>
+            </a:r>
+            <a:r>
+              <a:rPr sz="700">
+                <a:solidFill>
+                  <a:srgbClr val="CCCCCC"/>
+                </a:solidFill>
+                <a:latin typeface="Consolas"/>
+              </a:rPr>
+              <a:t>(spring);</a:t>
+            </a:r>
+          </a:p>
+          <a:p>
+            <a:pPr>
+              <a:spcAft>
+                <a:spcPts val="0"/>
+              </a:spcAft>
+            </a:pPr>
+            <a:r>
+              <a:rPr sz="700">
+                <a:solidFill>
+                  <a:srgbClr val="CCCCCC"/>
+                </a:solidFill>
+                <a:latin typeface="Consolas"/>
+              </a:rPr>
+              <a:t> </a:t>
+            </a:r>
+          </a:p>
+          <a:p>
+            <a:pPr>
+              <a:spcAft>
+                <a:spcPts val="0"/>
+              </a:spcAft>
+            </a:pPr>
+            <a:r>
+              <a:rPr sz="700">
+                <a:solidFill>
+                  <a:srgbClr val="7FAF7F"/>
+                </a:solidFill>
+                <a:latin typeface="Consolas"/>
+              </a:rPr>
+              <a:t># ---- and how this tutorial calls it (hil_manipulate.py, lines 488 to 502) ------</a:t>
+            </a:r>
+          </a:p>
+          <a:p>
+            <a:pPr>
+              <a:spcAft>
+                <a:spcPts val="0"/>
+              </a:spcAft>
+            </a:pPr>
+            <a:r>
+              <a:rPr sz="700">
+                <a:solidFill>
+                  <a:srgbClr val="CCCCCC"/>
+                </a:solidFill>
+                <a:latin typeface="Consolas"/>
+              </a:rPr>
+              <a:t>omega = </a:t>
+            </a:r>
+            <a:r>
+              <a:rPr sz="700">
+                <a:solidFill>
+                  <a:srgbClr val="7FC7E8"/>
+                </a:solidFill>
+                <a:latin typeface="Consolas"/>
+              </a:rPr>
+              <a:t>getattr</a:t>
+            </a:r>
+            <a:r>
+              <a:rPr sz="700">
+                <a:solidFill>
+                  <a:srgbClr val="CCCCCC"/>
+                </a:solidFill>
+                <a:latin typeface="Consolas"/>
+              </a:rPr>
+              <a:t>(self.system, </a:t>
+            </a:r>
+            <a:r>
+              <a:rPr sz="700">
+                <a:solidFill>
+                  <a:srgbClr val="D8A0C0"/>
+                </a:solidFill>
+                <a:latin typeface="Consolas"/>
+              </a:rPr>
+              <a:t>"grab_omega"</a:t>
+            </a:r>
+            <a:r>
+              <a:rPr sz="700">
+                <a:solidFill>
+                  <a:srgbClr val="CCCCCC"/>
+                </a:solidFill>
+                <a:latin typeface="Consolas"/>
+              </a:rPr>
+              <a:t>, GRAB_OMEGA)</a:t>
+            </a:r>
+          </a:p>
+          <a:p>
+            <a:pPr>
+              <a:spcAft>
+                <a:spcPts val="0"/>
+              </a:spcAft>
+            </a:pPr>
+            <a:r>
+              <a:rPr sz="700">
+                <a:solidFill>
+                  <a:srgbClr val="CCCCCC"/>
+                </a:solidFill>
+                <a:latin typeface="Consolas"/>
+              </a:rPr>
+              <a:t>m = </a:t>
+            </a:r>
+            <a:r>
+              <a:rPr sz="700">
+                <a:solidFill>
+                  <a:srgbClr val="7FC7E8"/>
+                </a:solidFill>
+                <a:latin typeface="Consolas"/>
+              </a:rPr>
+              <a:t>max</a:t>
+            </a:r>
+            <a:r>
+              <a:rPr sz="700">
+                <a:solidFill>
+                  <a:srgbClr val="CCCCCC"/>
+                </a:solidFill>
+                <a:latin typeface="Consolas"/>
+              </a:rPr>
+              <a:t>(body.</a:t>
+            </a:r>
+            <a:r>
+              <a:rPr sz="700">
+                <a:solidFill>
+                  <a:srgbClr val="7FC7E8"/>
+                </a:solidFill>
+                <a:latin typeface="Consolas"/>
+              </a:rPr>
+              <a:t>GetMass</a:t>
+            </a:r>
+            <a:r>
+              <a:rPr sz="700">
+                <a:solidFill>
+                  <a:srgbClr val="CCCCCC"/>
+                </a:solidFill>
+                <a:latin typeface="Consolas"/>
+              </a:rPr>
+              <a:t>(), 1e-3)</a:t>
+            </a:r>
+          </a:p>
+          <a:p>
+            <a:pPr>
+              <a:spcAft>
+                <a:spcPts val="0"/>
+              </a:spcAft>
+            </a:pPr>
+            <a:r>
+              <a:rPr sz="700">
+                <a:solidFill>
+                  <a:srgbClr val="CCCCCC"/>
+                </a:solidFill>
+                <a:latin typeface="Consolas"/>
+              </a:rPr>
+              <a:t>k = m * omega * omega</a:t>
+            </a:r>
+          </a:p>
+          <a:p>
+            <a:pPr>
+              <a:spcAft>
+                <a:spcPts val="0"/>
+              </a:spcAft>
+            </a:pPr>
+            <a:r>
+              <a:rPr sz="700">
+                <a:solidFill>
+                  <a:srgbClr val="CCCCCC"/>
+                </a:solidFill>
+                <a:latin typeface="Consolas"/>
+              </a:rPr>
+              <a:t>c = 2.0 * m * omega * GRAB_ZETA</a:t>
+            </a:r>
+          </a:p>
+          <a:p>
+            <a:pPr>
+              <a:spcAft>
+                <a:spcPts val="0"/>
+              </a:spcAft>
+            </a:pPr>
+            <a:r>
+              <a:rPr sz="700">
+                <a:solidFill>
+                  <a:srgbClr val="7FAF7F"/>
+                </a:solidFill>
+                <a:latin typeface="Consolas"/>
+              </a:rPr>
+              <a:t># Belt and braces against tunnelling: a grabbed body may not move faster</a:t>
+            </a:r>
+          </a:p>
+          <a:p>
+            <a:pPr>
+              <a:spcAft>
+                <a:spcPts val="0"/>
+              </a:spcAft>
+            </a:pPr>
+            <a:r>
+              <a:rPr sz="700">
+                <a:solidFill>
+                  <a:srgbClr val="7FAF7F"/>
+                </a:solidFill>
+                <a:latin typeface="Consolas"/>
+              </a:rPr>
+              <a:t># than contact detection can keep up with at this step size.</a:t>
+            </a:r>
+          </a:p>
+          <a:p>
+            <a:pPr>
+              <a:spcAft>
+                <a:spcPts val="0"/>
+              </a:spcAft>
+            </a:pPr>
+            <a:r>
+              <a:rPr sz="700">
+                <a:solidFill>
+                  <a:srgbClr val="CCCCCC"/>
+                </a:solidFill>
+                <a:latin typeface="Consolas"/>
+              </a:rPr>
+              <a:t>self._had_limit = body.</a:t>
+            </a:r>
+            <a:r>
+              <a:rPr sz="700">
+                <a:solidFill>
+                  <a:srgbClr val="7FC7E8"/>
+                </a:solidFill>
+                <a:latin typeface="Consolas"/>
+              </a:rPr>
+              <a:t>GetLimitSpeed</a:t>
+            </a:r>
+            <a:r>
+              <a:rPr sz="700">
+                <a:solidFill>
+                  <a:srgbClr val="CCCCCC"/>
+                </a:solidFill>
+                <a:latin typeface="Consolas"/>
+              </a:rPr>
+              <a:t>() if </a:t>
+            </a:r>
+            <a:r>
+              <a:rPr sz="700">
+                <a:solidFill>
+                  <a:srgbClr val="7FC7E8"/>
+                </a:solidFill>
+                <a:latin typeface="Consolas"/>
+              </a:rPr>
+              <a:t>hasattr</a:t>
+            </a:r>
+            <a:r>
+              <a:rPr sz="700">
+                <a:solidFill>
+                  <a:srgbClr val="CCCCCC"/>
+                </a:solidFill>
+                <a:latin typeface="Consolas"/>
+              </a:rPr>
+              <a:t>(body, </a:t>
+            </a:r>
+            <a:r>
+              <a:rPr sz="700">
+                <a:solidFill>
+                  <a:srgbClr val="D8A0C0"/>
+                </a:solidFill>
+                <a:latin typeface="Consolas"/>
+              </a:rPr>
+              <a:t>"GetLimitSpeed"</a:t>
+            </a:r>
+            <a:r>
+              <a:rPr sz="700">
+                <a:solidFill>
+                  <a:srgbClr val="CCCCCC"/>
+                </a:solidFill>
+                <a:latin typeface="Consolas"/>
+              </a:rPr>
+              <a:t>) else False</a:t>
+            </a:r>
+          </a:p>
+          <a:p>
+            <a:pPr>
+              <a:spcAft>
+                <a:spcPts val="0"/>
+              </a:spcAft>
+            </a:pPr>
+            <a:r>
+              <a:rPr sz="700">
+                <a:solidFill>
+                  <a:srgbClr val="CCCCCC"/>
+                </a:solidFill>
+                <a:latin typeface="Consolas"/>
+              </a:rPr>
+              <a:t>body.</a:t>
+            </a:r>
+            <a:r>
+              <a:rPr sz="700">
+                <a:solidFill>
+                  <a:srgbClr val="7FC7E8"/>
+                </a:solidFill>
+                <a:latin typeface="Consolas"/>
+              </a:rPr>
+              <a:t>SetLimitSpeed</a:t>
+            </a:r>
+            <a:r>
+              <a:rPr sz="700">
+                <a:solidFill>
+                  <a:srgbClr val="CCCCCC"/>
+                </a:solidFill>
+                <a:latin typeface="Consolas"/>
+              </a:rPr>
+              <a:t>(True)</a:t>
+            </a:r>
+          </a:p>
+          <a:p>
+            <a:pPr>
+              <a:spcAft>
+                <a:spcPts val="0"/>
+              </a:spcAft>
+            </a:pPr>
+            <a:r>
+              <a:rPr sz="700">
+                <a:solidFill>
+                  <a:srgbClr val="CCCCCC"/>
+                </a:solidFill>
+                <a:latin typeface="Consolas"/>
+              </a:rPr>
+              <a:t>body.</a:t>
+            </a:r>
+            <a:r>
+              <a:rPr sz="700">
+                <a:solidFill>
+                  <a:srgbClr val="7FC7E8"/>
+                </a:solidFill>
+                <a:latin typeface="Consolas"/>
+              </a:rPr>
+              <a:t>SetMaxLinVel</a:t>
+            </a:r>
+            <a:r>
+              <a:rPr sz="700">
+                <a:solidFill>
+                  <a:srgbClr val="CCCCCC"/>
+                </a:solidFill>
+                <a:latin typeface="Consolas"/>
+              </a:rPr>
+              <a:t>(GRAB_MAX_SPEED)</a:t>
+            </a:r>
+          </a:p>
+          <a:p>
+            <a:pPr>
+              <a:spcAft>
+                <a:spcPts val="0"/>
+              </a:spcAft>
+            </a:pPr>
+            <a:r>
+              <a:rPr sz="700">
+                <a:solidFill>
+                  <a:srgbClr val="CCCCCC"/>
+                </a:solidFill>
+                <a:latin typeface="Consolas"/>
+              </a:rPr>
+              <a:t>self.spring = chrono.</a:t>
+            </a:r>
+            <a:r>
+              <a:rPr sz="700">
                 <a:solidFill>
                   <a:srgbClr val="F0A040"/>
                 </a:solidFill>
                 <a:latin typeface="Consolas"/>
               </a:rPr>
-              <a:t>ChRayhitResult</a:t>
-            </a:r>
-            <a:r>
-              <a:rPr sz="900">
-                <a:solidFill>
-                  <a:srgbClr val="CCCCCC"/>
-                </a:solidFill>
-                <a:latin typeface="Consolas"/>
-              </a:rPr>
-              <a:t> {</a:t>
-            </a:r>
-          </a:p>
-          <a:p>
-            <a:pPr>
-              <a:spcAft>
-                <a:spcPts val="0"/>
-              </a:spcAft>
-            </a:pPr>
-            <a:r>
-              <a:rPr sz="900">
-                <a:solidFill>
-                  <a:srgbClr val="CCCCCC"/>
-                </a:solidFill>
-                <a:latin typeface="Consolas"/>
-              </a:rPr>
-              <a:t>    bool hit;</a:t>
-            </a:r>
-          </a:p>
-          <a:p>
-            <a:pPr>
-              <a:spcAft>
-                <a:spcPts val="0"/>
-              </a:spcAft>
-            </a:pPr>
-            <a:r>
-              <a:rPr sz="900">
-                <a:solidFill>
-                  <a:srgbClr val="CCCCCC"/>
-                </a:solidFill>
-                <a:latin typeface="Consolas"/>
-              </a:rPr>
-              <a:t>    </a:t>
-            </a:r>
-            <a:r>
-              <a:rPr sz="900">
-                <a:solidFill>
-                  <a:srgbClr val="F0A040"/>
-                </a:solidFill>
-                <a:latin typeface="Consolas"/>
-              </a:rPr>
-              <a:t>ChVector3d</a:t>
-            </a:r>
-            <a:r>
-              <a:rPr sz="900">
-                <a:solidFill>
-                  <a:srgbClr val="CCCCCC"/>
-                </a:solidFill>
-                <a:latin typeface="Consolas"/>
-              </a:rPr>
-              <a:t> abs_hitPoint;     </a:t>
-            </a:r>
-            <a:r>
-              <a:rPr sz="900">
-                <a:solidFill>
-                  <a:srgbClr val="7FAF7F"/>
-                </a:solidFill>
-                <a:latin typeface="Consolas"/>
-              </a:rPr>
-              <a:t>// where, in world coordinates</a:t>
-            </a:r>
-          </a:p>
-          <a:p>
-            <a:pPr>
-              <a:spcAft>
-                <a:spcPts val="0"/>
-              </a:spcAft>
-            </a:pPr>
-            <a:r>
-              <a:rPr sz="900">
-                <a:solidFill>
-                  <a:srgbClr val="CCCCCC"/>
-                </a:solidFill>
-                <a:latin typeface="Consolas"/>
-              </a:rPr>
-              <a:t>    </a:t>
-            </a:r>
-            <a:r>
-              <a:rPr sz="900">
-                <a:solidFill>
-                  <a:srgbClr val="F0A040"/>
-                </a:solidFill>
-                <a:latin typeface="Consolas"/>
-              </a:rPr>
-              <a:t>ChVector3d</a:t>
-            </a:r>
-            <a:r>
-              <a:rPr sz="900">
-                <a:solidFill>
-                  <a:srgbClr val="CCCCCC"/>
-                </a:solidFill>
-                <a:latin typeface="Consolas"/>
-              </a:rPr>
-              <a:t> abs_hitNormal;    </a:t>
-            </a:r>
-            <a:r>
-              <a:rPr sz="900">
-                <a:solidFill>
-                  <a:srgbClr val="7FAF7F"/>
-                </a:solidFill>
-                <a:latin typeface="Consolas"/>
-              </a:rPr>
-              <a:t>// the surface normal there</a:t>
-            </a:r>
-          </a:p>
-          <a:p>
-            <a:pPr>
-              <a:spcAft>
-                <a:spcPts val="0"/>
-              </a:spcAft>
-            </a:pPr>
-            <a:r>
-              <a:rPr sz="900">
-                <a:solidFill>
-                  <a:srgbClr val="CCCCCC"/>
-                </a:solidFill>
-                <a:latin typeface="Consolas"/>
-              </a:rPr>
-              <a:t>    double dist_factor;          </a:t>
-            </a:r>
-            <a:r>
-              <a:rPr sz="900">
-                <a:solidFill>
-                  <a:srgbClr val="7FAF7F"/>
-                </a:solidFill>
-                <a:latin typeface="Consolas"/>
-              </a:rPr>
-              <a:t>// 0 .. 1 along the segment</a:t>
-            </a:r>
-          </a:p>
-          <a:p>
-            <a:pPr>
-              <a:spcAft>
-                <a:spcPts val="0"/>
-              </a:spcAft>
-            </a:pPr>
-            <a:r>
-              <a:rPr sz="900">
-                <a:solidFill>
-                  <a:srgbClr val="CCCCCC"/>
-                </a:solidFill>
-                <a:latin typeface="Consolas"/>
-              </a:rPr>
-              <a:t>    </a:t>
-            </a:r>
-            <a:r>
-              <a:rPr sz="900">
-                <a:solidFill>
-                  <a:srgbClr val="F0A040"/>
-                </a:solidFill>
-                <a:latin typeface="Consolas"/>
-              </a:rPr>
-              <a:t>ChCollisionModel</a:t>
-            </a:r>
-            <a:r>
-              <a:rPr sz="900">
-                <a:solidFill>
-                  <a:srgbClr val="CCCCCC"/>
-                </a:solidFill>
-                <a:latin typeface="Consolas"/>
-              </a:rPr>
-              <a:t>* hitModel;  </a:t>
-            </a:r>
-            <a:r>
-              <a:rPr sz="900">
-                <a:solidFill>
-                  <a:srgbClr val="7FAF7F"/>
-                </a:solidFill>
-                <a:latin typeface="Consolas"/>
-              </a:rPr>
-              <a:t>// -&gt; CastToChBody() for the body</a:t>
-            </a:r>
-          </a:p>
-          <a:p>
-            <a:pPr>
-              <a:spcAft>
-                <a:spcPts val="0"/>
-              </a:spcAft>
-            </a:pPr>
-            <a:r>
-              <a:rPr sz="900">
-                <a:solidFill>
-                  <a:srgbClr val="CCCCCC"/>
-                </a:solidFill>
-                <a:latin typeface="Consolas"/>
-              </a:rPr>
-              <a:t>};</a:t>
-            </a:r>
-          </a:p>
-          <a:p>
-            <a:pPr>
-              <a:spcAft>
-                <a:spcPts val="0"/>
-              </a:spcAft>
-            </a:pPr>
-            <a:r>
-              <a:rPr sz="900">
-                <a:solidFill>
-                  <a:srgbClr val="CCCCCC"/>
-                </a:solidFill>
-                <a:latin typeface="Consolas"/>
-              </a:rPr>
-              <a:t> </a:t>
-            </a:r>
-          </a:p>
-          <a:p>
-            <a:pPr>
-              <a:spcAft>
-                <a:spcPts val="0"/>
-              </a:spcAft>
-            </a:pPr>
-            <a:r>
-              <a:rPr sz="900">
-                <a:solidFill>
-                  <a:srgbClr val="CCCCCC"/>
-                </a:solidFill>
-                <a:latin typeface="Consolas"/>
-              </a:rPr>
-              <a:t>virtual bool </a:t>
-            </a:r>
-            <a:r>
-              <a:rPr sz="900">
+              <a:t>ChLinkTSDA</a:t>
+            </a:r>
+            <a:r>
+              <a:rPr sz="700">
+                <a:solidFill>
+                  <a:srgbClr val="CCCCCC"/>
+                </a:solidFill>
+                <a:latin typeface="Consolas"/>
+              </a:rPr>
+              <a:t>()</a:t>
+            </a:r>
+          </a:p>
+          <a:p>
+            <a:pPr>
+              <a:spcAft>
+                <a:spcPts val="0"/>
+              </a:spcAft>
+            </a:pPr>
+            <a:r>
+              <a:rPr sz="700">
+                <a:solidFill>
+                  <a:srgbClr val="CCCCCC"/>
+                </a:solidFill>
+                <a:latin typeface="Consolas"/>
+              </a:rPr>
+              <a:t>self.spring.</a:t>
+            </a:r>
+            <a:r>
+              <a:rPr sz="700">
                 <a:solidFill>
                   <a:srgbClr val="7FC7E8"/>
                 </a:solidFill>
                 <a:latin typeface="Consolas"/>
               </a:rPr>
-              <a:t>RayHit</a:t>
-            </a:r>
-            <a:r>
-              <a:rPr sz="900">
-                <a:solidFill>
-                  <a:srgbClr val="CCCCCC"/>
-                </a:solidFill>
-                <a:latin typeface="Consolas"/>
-              </a:rPr>
-              <a:t>(const </a:t>
-            </a:r>
-            <a:r>
-              <a:rPr sz="900">
-                <a:solidFill>
-                  <a:srgbClr val="F0A040"/>
-                </a:solidFill>
-                <a:latin typeface="Consolas"/>
-              </a:rPr>
-              <a:t>ChVector3d</a:t>
-            </a:r>
-            <a:r>
-              <a:rPr sz="900">
-                <a:solidFill>
-                  <a:srgbClr val="CCCCCC"/>
-                </a:solidFill>
-                <a:latin typeface="Consolas"/>
-              </a:rPr>
-              <a:t>&amp; from,</a:t>
-            </a:r>
-          </a:p>
-          <a:p>
-            <a:pPr>
-              <a:spcAft>
-                <a:spcPts val="0"/>
-              </a:spcAft>
-            </a:pPr>
-            <a:r>
-              <a:rPr sz="900">
-                <a:solidFill>
-                  <a:srgbClr val="CCCCCC"/>
-                </a:solidFill>
-                <a:latin typeface="Consolas"/>
-              </a:rPr>
-              <a:t>                    const </a:t>
-            </a:r>
-            <a:r>
-              <a:rPr sz="900">
-                <a:solidFill>
-                  <a:srgbClr val="F0A040"/>
-                </a:solidFill>
-                <a:latin typeface="Consolas"/>
-              </a:rPr>
-              <a:t>ChVector3d</a:t>
-            </a:r>
-            <a:r>
-              <a:rPr sz="900">
-                <a:solidFill>
-                  <a:srgbClr val="CCCCCC"/>
-                </a:solidFill>
-                <a:latin typeface="Consolas"/>
-              </a:rPr>
-              <a:t>&amp; to,</a:t>
-            </a:r>
-          </a:p>
-          <a:p>
-            <a:pPr>
-              <a:spcAft>
-                <a:spcPts val="0"/>
-              </a:spcAft>
-            </a:pPr>
-            <a:r>
-              <a:rPr sz="900">
-                <a:solidFill>
-                  <a:srgbClr val="CCCCCC"/>
-                </a:solidFill>
-                <a:latin typeface="Consolas"/>
-              </a:rPr>
-              <a:t>                    </a:t>
-            </a:r>
-            <a:r>
-              <a:rPr sz="900">
-                <a:solidFill>
-                  <a:srgbClr val="F0A040"/>
-                </a:solidFill>
-                <a:latin typeface="Consolas"/>
-              </a:rPr>
-              <a:t>ChRayhitResult</a:t>
-            </a:r>
-            <a:r>
-              <a:rPr sz="900">
-                <a:solidFill>
-                  <a:srgbClr val="CCCCCC"/>
-                </a:solidFill>
-                <a:latin typeface="Consolas"/>
-              </a:rPr>
-              <a:t>&amp; result) const;</a:t>
-            </a:r>
-          </a:p>
-          <a:p>
-            <a:pPr>
-              <a:spcAft>
-                <a:spcPts val="0"/>
-              </a:spcAft>
-            </a:pPr>
-            <a:r>
-              <a:rPr sz="900">
-                <a:solidFill>
-                  <a:srgbClr val="CCCCCC"/>
-                </a:solidFill>
-                <a:latin typeface="Consolas"/>
-              </a:rPr>
-              <a:t> </a:t>
-            </a:r>
-          </a:p>
-          <a:p>
-            <a:pPr>
-              <a:spcAft>
-                <a:spcPts val="0"/>
-              </a:spcAft>
-            </a:pPr>
-            <a:r>
-              <a:rPr sz="900">
-                <a:solidFill>
-                  <a:srgbClr val="7FAF7F"/>
-                </a:solidFill>
-                <a:latin typeface="Consolas"/>
-              </a:rPr>
-              <a:t>// A ray sees COLLISION geometry, never visual geometry. A link you</a:t>
-            </a:r>
-          </a:p>
-          <a:p>
-            <a:pPr>
-              <a:spcAft>
-                <a:spcPts val="0"/>
-              </a:spcAft>
-            </a:pPr>
-            <a:r>
-              <a:rPr sz="900">
-                <a:solidFill>
-                  <a:srgbClr val="7FAF7F"/>
-                </a:solidFill>
-                <a:latin typeface="Consolas"/>
-              </a:rPr>
-              <a:t>// can see but whose collision is off is invisible to every click.</a:t>
-            </a:r>
-          </a:p>
-          <a:p>
-            <a:pPr>
-              <a:spcAft>
-                <a:spcPts val="0"/>
-              </a:spcAft>
-            </a:pPr>
-            <a:r>
-              <a:rPr sz="900">
-                <a:solidFill>
-                  <a:srgbClr val="7FAF7F"/>
-                </a:solidFill>
-                <a:latin typeface="Consolas"/>
-              </a:rPr>
-              <a:t>// That one sentence accounted for every 'it will not pick' bug here.</a:t>
-            </a:r>
-          </a:p>
-          <a:p>
-            <a:pPr>
-              <a:spcAft>
-                <a:spcPts val="0"/>
-              </a:spcAft>
-            </a:pPr>
-            <a:r>
-              <a:rPr sz="900">
-                <a:solidFill>
-                  <a:srgbClr val="CCCCCC"/>
-                </a:solidFill>
-                <a:latin typeface="Consolas"/>
-              </a:rPr>
-              <a:t> </a:t>
-            </a:r>
-          </a:p>
-          <a:p>
-            <a:pPr>
-              <a:spcAft>
-                <a:spcPts val="0"/>
-              </a:spcAft>
-            </a:pPr>
-            <a:r>
-              <a:rPr sz="900">
-                <a:solidFill>
-                  <a:srgbClr val="7FAF7F"/>
-                </a:solidFill>
-                <a:latin typeface="Consolas"/>
-              </a:rPr>
-              <a:t># ---- and how this tutorial calls it (hil_manipulate.py, lines 338 to 349) ------</a:t>
-            </a:r>
-          </a:p>
-          <a:p>
-            <a:pPr>
-              <a:spcAft>
-                <a:spcPts val="0"/>
-              </a:spcAft>
-            </a:pPr>
-            <a:r>
-              <a:rPr sz="900">
-                <a:solidFill>
-                  <a:srgbClr val="CCCCCC"/>
-                </a:solidFill>
-                <a:latin typeface="Consolas"/>
-              </a:rPr>
-              <a:t>def </a:t>
-            </a:r>
-            <a:r>
-              <a:rPr sz="900">
+              <a:t>Initialize</a:t>
+            </a:r>
+            <a:r>
+              <a:rPr sz="700">
+                <a:solidFill>
+                  <a:srgbClr val="CCCCCC"/>
+                </a:solidFill>
+                <a:latin typeface="Consolas"/>
+              </a:rPr>
+              <a:t>(self.handle, body, False, point, point)</a:t>
+            </a:r>
+          </a:p>
+          <a:p>
+            <a:pPr>
+              <a:spcAft>
+                <a:spcPts val="0"/>
+              </a:spcAft>
+            </a:pPr>
+            <a:r>
+              <a:rPr sz="700">
+                <a:solidFill>
+                  <a:srgbClr val="CCCCCC"/>
+                </a:solidFill>
+                <a:latin typeface="Consolas"/>
+              </a:rPr>
+              <a:t>self.spring.</a:t>
+            </a:r>
+            <a:r>
+              <a:rPr sz="700">
                 <a:solidFill>
                   <a:srgbClr val="7FC7E8"/>
                 </a:solidFill>
                 <a:latin typeface="Consolas"/>
               </a:rPr>
-              <a:t>pick_along_ray</a:t>
-            </a:r>
-            <a:r>
-              <a:rPr sz="900">
-                <a:solidFill>
-                  <a:srgbClr val="CCCCCC"/>
-                </a:solidFill>
-                <a:latin typeface="Consolas"/>
-              </a:rPr>
-              <a:t>(system, start, end):</a:t>
-            </a:r>
-          </a:p>
-          <a:p>
-            <a:pPr>
-              <a:spcAft>
-                <a:spcPts val="0"/>
-              </a:spcAft>
-            </a:pPr>
-            <a:r>
-              <a:rPr sz="900">
-                <a:solidFill>
-                  <a:srgbClr val="CCCCCC"/>
-                </a:solidFill>
-                <a:latin typeface="Consolas"/>
-              </a:rPr>
-              <a:t>    </a:t>
-            </a:r>
-            <a:r>
-              <a:rPr sz="900">
-                <a:solidFill>
-                  <a:srgbClr val="D8A0C0"/>
-                </a:solidFill>
-                <a:latin typeface="Consolas"/>
-              </a:rPr>
-              <a:t>""</a:t>
-            </a:r>
-            <a:r>
-              <a:rPr sz="900">
-                <a:solidFill>
-                  <a:srgbClr val="D8A0C0"/>
-                </a:solidFill>
-                <a:latin typeface="Consolas"/>
-              </a:rPr>
-              <a:t>"The primitive a mouse click would use. Returns (body, world_point) or None."</a:t>
-            </a:r>
-            <a:r>
-              <a:rPr sz="900">
-                <a:solidFill>
-                  <a:srgbClr val="D8A0C0"/>
-                </a:solidFill>
-                <a:latin typeface="Consolas"/>
-              </a:rPr>
-              <a:t>""</a:t>
-            </a:r>
-          </a:p>
-          <a:p>
-            <a:pPr>
-              <a:spcAft>
-                <a:spcPts val="0"/>
-              </a:spcAft>
-            </a:pPr>
-            <a:r>
-              <a:rPr sz="900">
-                <a:solidFill>
-                  <a:srgbClr val="CCCCCC"/>
-                </a:solidFill>
-                <a:latin typeface="Consolas"/>
-              </a:rPr>
-              <a:t>    res = chrono.</a:t>
-            </a:r>
-            <a:r>
-              <a:rPr sz="900">
-                <a:solidFill>
-                  <a:srgbClr val="F0A040"/>
-                </a:solidFill>
-                <a:latin typeface="Consolas"/>
-              </a:rPr>
-              <a:t>ChRayhitResult</a:t>
-            </a:r>
-            <a:r>
-              <a:rPr sz="900">
-                <a:solidFill>
-                  <a:srgbClr val="CCCCCC"/>
-                </a:solidFill>
-                <a:latin typeface="Consolas"/>
-              </a:rPr>
-              <a:t>()</a:t>
-            </a:r>
-          </a:p>
-          <a:p>
-            <a:pPr>
-              <a:spcAft>
-                <a:spcPts val="0"/>
-              </a:spcAft>
-            </a:pPr>
-            <a:r>
-              <a:rPr sz="900">
-                <a:solidFill>
-                  <a:srgbClr val="CCCCCC"/>
-                </a:solidFill>
-                <a:latin typeface="Consolas"/>
-              </a:rPr>
-              <a:t>    system.</a:t>
-            </a:r>
-            <a:r>
-              <a:rPr sz="900">
+              <a:t>SetRestLength</a:t>
+            </a:r>
+            <a:r>
+              <a:rPr sz="700">
+                <a:solidFill>
+                  <a:srgbClr val="CCCCCC"/>
+                </a:solidFill>
+                <a:latin typeface="Consolas"/>
+              </a:rPr>
+              <a:t>(0.0)</a:t>
+            </a:r>
+          </a:p>
+          <a:p>
+            <a:pPr>
+              <a:spcAft>
+                <a:spcPts val="0"/>
+              </a:spcAft>
+            </a:pPr>
+            <a:r>
+              <a:rPr sz="700">
+                <a:solidFill>
+                  <a:srgbClr val="CCCCCC"/>
+                </a:solidFill>
+                <a:latin typeface="Consolas"/>
+              </a:rPr>
+              <a:t>self.spring.</a:t>
+            </a:r>
+            <a:r>
+              <a:rPr sz="700">
                 <a:solidFill>
                   <a:srgbClr val="7FC7E8"/>
                 </a:solidFill>
                 <a:latin typeface="Consolas"/>
               </a:rPr>
-              <a:t>GetCollisionSystem</a:t>
-            </a:r>
-            <a:r>
-              <a:rPr sz="900">
-                <a:solidFill>
-                  <a:srgbClr val="CCCCCC"/>
-                </a:solidFill>
-                <a:latin typeface="Consolas"/>
-              </a:rPr>
-              <a:t>().</a:t>
-            </a:r>
-            <a:r>
-              <a:rPr sz="900">
+              <a:t>SetSpringCoefficient</a:t>
+            </a:r>
+            <a:r>
+              <a:rPr sz="700">
+                <a:solidFill>
+                  <a:srgbClr val="CCCCCC"/>
+                </a:solidFill>
+                <a:latin typeface="Consolas"/>
+              </a:rPr>
+              <a:t>(k)</a:t>
+            </a:r>
+          </a:p>
+          <a:p>
+            <a:pPr>
+              <a:spcAft>
+                <a:spcPts val="0"/>
+              </a:spcAft>
+            </a:pPr>
+            <a:r>
+              <a:rPr sz="700">
+                <a:solidFill>
+                  <a:srgbClr val="CCCCCC"/>
+                </a:solidFill>
+                <a:latin typeface="Consolas"/>
+              </a:rPr>
+              <a:t>self.spring.</a:t>
+            </a:r>
+            <a:r>
+              <a:rPr sz="700">
                 <a:solidFill>
                   <a:srgbClr val="7FC7E8"/>
                 </a:solidFill>
                 <a:latin typeface="Consolas"/>
               </a:rPr>
-              <a:t>RayHit</a:t>
-            </a:r>
-            <a:r>
-              <a:rPr sz="900">
-                <a:solidFill>
-                  <a:srgbClr val="CCCCCC"/>
-                </a:solidFill>
-                <a:latin typeface="Consolas"/>
-              </a:rPr>
-              <a:t>(start, end, res)</a:t>
-            </a:r>
-          </a:p>
-          <a:p>
-            <a:pPr>
-              <a:spcAft>
-                <a:spcPts val="0"/>
-              </a:spcAft>
-            </a:pPr>
-            <a:r>
-              <a:rPr sz="900">
-                <a:solidFill>
-                  <a:srgbClr val="CCCCCC"/>
-                </a:solidFill>
-                <a:latin typeface="Consolas"/>
-              </a:rPr>
-              <a:t>    if not res.hit:</a:t>
-            </a:r>
-          </a:p>
-          <a:p>
-            <a:pPr>
-              <a:spcAft>
-                <a:spcPts val="0"/>
-              </a:spcAft>
-            </a:pPr>
-            <a:r>
-              <a:rPr sz="900">
-                <a:solidFill>
-                  <a:srgbClr val="CCCCCC"/>
-                </a:solidFill>
-                <a:latin typeface="Consolas"/>
-              </a:rPr>
-              <a:t>        return None</a:t>
-            </a:r>
-          </a:p>
-          <a:p>
-            <a:pPr>
-              <a:spcAft>
-                <a:spcPts val="0"/>
-              </a:spcAft>
-            </a:pPr>
-            <a:r>
-              <a:rPr sz="900">
-                <a:solidFill>
-                  <a:srgbClr val="CCCCCC"/>
-                </a:solidFill>
-                <a:latin typeface="Consolas"/>
-              </a:rPr>
-              <a:t>    body = chrono.</a:t>
-            </a:r>
-            <a:r>
-              <a:rPr sz="900">
+              <a:t>SetDampingCoefficient</a:t>
+            </a:r>
+            <a:r>
+              <a:rPr sz="700">
+                <a:solidFill>
+                  <a:srgbClr val="CCCCCC"/>
+                </a:solidFill>
+                <a:latin typeface="Consolas"/>
+              </a:rPr>
+              <a:t>(c)</a:t>
+            </a:r>
+          </a:p>
+          <a:p>
+            <a:pPr>
+              <a:spcAft>
+                <a:spcPts val="0"/>
+              </a:spcAft>
+            </a:pPr>
+            <a:r>
+              <a:rPr sz="700">
+                <a:solidFill>
+                  <a:srgbClr val="CCCCCC"/>
+                </a:solidFill>
+                <a:latin typeface="Consolas"/>
+              </a:rPr>
+              <a:t>self.system.</a:t>
+            </a:r>
+            <a:r>
+              <a:rPr sz="700">
                 <a:solidFill>
                   <a:srgbClr val="7FC7E8"/>
                 </a:solidFill>
                 <a:latin typeface="Consolas"/>
               </a:rPr>
-              <a:t>CastToChBody</a:t>
-            </a:r>
-            <a:r>
-              <a:rPr sz="900">
-                <a:solidFill>
-                  <a:srgbClr val="CCCCCC"/>
-                </a:solidFill>
-                <a:latin typeface="Consolas"/>
-              </a:rPr>
-              <a:t>(res.hitModel.</a:t>
-            </a:r>
-            <a:r>
-              <a:rPr sz="900">
-                <a:solidFill>
-                  <a:srgbClr val="7FC7E8"/>
-                </a:solidFill>
-                <a:latin typeface="Consolas"/>
-              </a:rPr>
-              <a:t>GetContactable</a:t>
-            </a:r>
-            <a:r>
-              <a:rPr sz="900">
-                <a:solidFill>
-                  <a:srgbClr val="CCCCCC"/>
-                </a:solidFill>
-                <a:latin typeface="Consolas"/>
-              </a:rPr>
-              <a:t>())</a:t>
-            </a:r>
-          </a:p>
-          <a:p>
-            <a:pPr>
-              <a:spcAft>
-                <a:spcPts val="0"/>
-              </a:spcAft>
-            </a:pPr>
-            <a:r>
-              <a:rPr sz="900">
-                <a:solidFill>
-                  <a:srgbClr val="CCCCCC"/>
-                </a:solidFill>
-                <a:latin typeface="Consolas"/>
-              </a:rPr>
-              <a:t>    if body is None:</a:t>
-            </a:r>
-          </a:p>
-          <a:p>
-            <a:pPr>
-              <a:spcAft>
-                <a:spcPts val="0"/>
-              </a:spcAft>
-            </a:pPr>
-            <a:r>
-              <a:rPr sz="900">
-                <a:solidFill>
-                  <a:srgbClr val="CCCCCC"/>
-                </a:solidFill>
-                <a:latin typeface="Consolas"/>
-              </a:rPr>
-              <a:t>        return None</a:t>
-            </a:r>
-          </a:p>
-          <a:p>
-            <a:pPr>
-              <a:spcAft>
-                <a:spcPts val="0"/>
-              </a:spcAft>
-            </a:pPr>
-            <a:r>
-              <a:rPr sz="900">
-                <a:solidFill>
-                  <a:srgbClr val="CCCCCC"/>
-                </a:solidFill>
-                <a:latin typeface="Consolas"/>
-              </a:rPr>
-              <a:t>    p, nrm = res.abs_hitPoint, res.abs_hitNormal</a:t>
-            </a:r>
-          </a:p>
-          <a:p>
-            <a:pPr>
-              <a:spcAft>
-                <a:spcPts val="0"/>
-              </a:spcAft>
-            </a:pPr>
-            <a:r>
-              <a:rPr sz="900">
-                <a:solidFill>
-                  <a:srgbClr val="CCCCCC"/>
-                </a:solidFill>
-                <a:latin typeface="Consolas"/>
-              </a:rPr>
-              <a:t>    </a:t>
-            </a:r>
-            <a:r>
-              <a:rPr sz="900">
-                <a:solidFill>
-                  <a:srgbClr val="7FC7E8"/>
-                </a:solidFill>
-                <a:latin typeface="Consolas"/>
-              </a:rPr>
-              <a:t>return</a:t>
-            </a:r>
-            <a:r>
-              <a:rPr sz="900">
-                <a:solidFill>
-                  <a:srgbClr val="CCCCCC"/>
-                </a:solidFill>
-                <a:latin typeface="Consolas"/>
-              </a:rPr>
-              <a:t> (body, chrono.</a:t>
-            </a:r>
-            <a:r>
-              <a:rPr sz="900">
-                <a:solidFill>
-                  <a:srgbClr val="F0A040"/>
-                </a:solidFill>
-                <a:latin typeface="Consolas"/>
-              </a:rPr>
-              <a:t>ChVector3d</a:t>
-            </a:r>
-            <a:r>
-              <a:rPr sz="900">
-                <a:solidFill>
-                  <a:srgbClr val="CCCCCC"/>
-                </a:solidFill>
-                <a:latin typeface="Consolas"/>
-              </a:rPr>
-              <a:t>(p.x, p.y, p.z),</a:t>
-            </a:r>
-          </a:p>
-          <a:p>
-            <a:pPr>
-              <a:spcAft>
-                <a:spcPts val="0"/>
-              </a:spcAft>
-            </a:pPr>
-            <a:r>
-              <a:rPr sz="900">
-                <a:solidFill>
-                  <a:srgbClr val="CCCCCC"/>
-                </a:solidFill>
-                <a:latin typeface="Consolas"/>
-              </a:rPr>
-              <a:t>            chrono.</a:t>
-            </a:r>
-            <a:r>
-              <a:rPr sz="900">
-                <a:solidFill>
-                  <a:srgbClr val="F0A040"/>
-                </a:solidFill>
-                <a:latin typeface="Consolas"/>
-              </a:rPr>
-              <a:t>ChVector3d</a:t>
-            </a:r>
-            <a:r>
-              <a:rPr sz="900">
-                <a:solidFill>
-                  <a:srgbClr val="CCCCCC"/>
-                </a:solidFill>
-                <a:latin typeface="Consolas"/>
-              </a:rPr>
-              <a:t>(nrm.x, nrm.y, nrm.z))</a:t>
+              <a:t>AddLink</a:t>
+            </a:r>
+            <a:r>
+              <a:rPr sz="700">
+                <a:solidFill>
+                  <a:srgbClr val="CCCCCC"/>
+                </a:solidFill>
+                <a:latin typeface="Consolas"/>
+              </a:rPr>
+              <a:t>(self.spring)</a:t>
             </a:r>
           </a:p>
         </p:txBody>
@@ -12890,8 +13178,8 @@
         </p:nvSpPr>
         <p:spPr>
           <a:xfrm>
-            <a:off x="402336" y="5705855"/>
-            <a:ext cx="11393424" cy="713232"/>
+            <a:off x="402336" y="5035931"/>
+            <a:ext cx="11393424" cy="1261872"/>
           </a:xfrm>
           <a:prstGeom prst="rect">
             <a:avLst/>
@@ -12911,7 +13199,48 @@
             </a:pPr>
             <a:r>
               <a:rPr sz="1600"/>
-              <a:t>Exposed in PyChrono already, and exact: the same primitive a native mouse handler would call. Screen pixel to ray is your arithmetic; ray to body is Chrono's.</a:t>
+              <a:t>Chrono never clears an accumulator for you, and </a:t>
+            </a:r>
+            <a:r>
+              <a:rPr sz="1400">
+                <a:latin typeface="Consolas"/>
+              </a:rPr>
+              <a:t>AddAccumulator()</a:t>
+            </a:r>
+            <a:r>
+              <a:rPr sz="1600"/>
+              <a:t> appends, so calling it per push leaks a slot and every stale slot keeps contributing.</a:t>
+            </a:r>
+          </a:p>
+          <a:p>
+            <a:pPr>
+              <a:spcAft>
+                <a:spcPts val="400"/>
+              </a:spcAft>
+            </a:pPr>
+            <a:r>
+              <a:rPr sz="1600"/>
+              <a:t>Gains must scale with what is being pulled. A stiffness tuned on a 0.154 kg Go2 calf gave a 2.7 kg Panda link </a:t>
+            </a:r>
+            <a:r>
+              <a:rPr sz="1400">
+                <a:latin typeface="Consolas"/>
+              </a:rPr>
+              <a:t>21,870 N/m</a:t>
+            </a:r>
+            <a:r>
+              <a:rPr sz="1600"/>
+              <a:t>, which is </a:t>
+            </a:r>
+            <a:r>
+              <a:rPr sz="1400">
+                <a:latin typeface="Consolas"/>
+              </a:rPr>
+              <a:t>24,300 m/s^2</a:t>
+            </a:r>
+            <a:r>
+              <a:rPr sz="1600"/>
+              <a:t>: through the floor in a single step.</a:t>
             </a:r>
           </a:p>
         </p:txBody>
@@ -13010,7 +13339,7 @@
           <a:p>
             <a:r>
               <a:rPr sz="2600"/>
-              <a:t>Turning a pull into physics: force, or constraint</a:t>
+              <a:t>The gap, and the one line that closes it (native_pick.py lines 10 to 26)</a:t>
             </a:r>
           </a:p>
         </p:txBody>
@@ -13024,7 +13353,7 @@
         <p:spPr>
           <a:xfrm>
             <a:off x="0" y="1207008"/>
-            <a:ext cx="12188952" cy="3719195"/>
+            <a:ext cx="12188952" cy="3840479"/>
           </a:xfrm>
           <a:prstGeom prst="rect">
             <a:avLst/>
@@ -13045,23 +13374,100 @@
               </a:spcAft>
             </a:pPr>
             <a:r>
-              <a:rPr sz="700">
+              <a:rPr sz="800">
                 <a:solidFill>
                   <a:srgbClr val="7FAF7F"/>
                 </a:solidFill>
                 <a:latin typeface="Consolas"/>
               </a:rPr>
-              <a:t>// A human pulling on something is one of exactly two things.</a:t>
-            </a:r>
-          </a:p>
-          <a:p>
-            <a:pPr>
-              <a:spcAft>
-                <a:spcPts val="0"/>
-              </a:spcAft>
-            </a:pPr>
-            <a:r>
-              <a:rPr sz="700">
+              <a:t># chrono_swig/interface/irrlicht/ChModuleIrrlicht.i</a:t>
+            </a:r>
+          </a:p>
+          <a:p>
+            <a:pPr>
+              <a:spcAft>
+                <a:spcPts val="0"/>
+              </a:spcAft>
+            </a:pPr>
+            <a:r>
+              <a:rPr sz="800">
+                <a:solidFill>
+                  <a:srgbClr val="CCCCCC"/>
+                </a:solidFill>
+                <a:latin typeface="Consolas"/>
+              </a:rPr>
+              <a:t>+%</a:t>
+            </a:r>
+            <a:r>
+              <a:rPr sz="800">
+                <a:solidFill>
+                  <a:srgbClr val="7FC7E8"/>
+                </a:solidFill>
+                <a:latin typeface="Consolas"/>
+              </a:rPr>
+              <a:t>feature</a:t>
+            </a:r>
+            <a:r>
+              <a:rPr sz="800">
+                <a:solidFill>
+                  <a:srgbClr val="CCCCCC"/>
+                </a:solidFill>
+                <a:latin typeface="Consolas"/>
+              </a:rPr>
+              <a:t>(</a:t>
+            </a:r>
+            <a:r>
+              <a:rPr sz="800">
+                <a:solidFill>
+                  <a:srgbClr val="D8A0C0"/>
+                </a:solidFill>
+                <a:latin typeface="Consolas"/>
+              </a:rPr>
+              <a:t>"director"</a:t>
+            </a:r>
+            <a:r>
+              <a:rPr sz="800">
+                <a:solidFill>
+                  <a:srgbClr val="CCCCCC"/>
+                </a:solidFill>
+                <a:latin typeface="Consolas"/>
+              </a:rPr>
+              <a:t>) irr::IEventReceiver;</a:t>
+            </a:r>
+          </a:p>
+          <a:p>
+            <a:pPr>
+              <a:spcAft>
+                <a:spcPts val="0"/>
+              </a:spcAft>
+            </a:pPr>
+            <a:r>
+              <a:rPr sz="800">
+                <a:solidFill>
+                  <a:srgbClr val="CCCCCC"/>
+                </a:solidFill>
+                <a:latin typeface="Consolas"/>
+              </a:rPr>
+              <a:t>%include </a:t>
+            </a:r>
+            <a:r>
+              <a:rPr sz="800">
+                <a:solidFill>
+                  <a:srgbClr val="D8A0C0"/>
+                </a:solidFill>
+                <a:latin typeface="Consolas"/>
+              </a:rPr>
+              <a:t>"IEventReceiver.h"</a:t>
+            </a:r>
+          </a:p>
+          <a:p>
+            <a:pPr>
+              <a:spcAft>
+                <a:spcPts val="0"/>
+              </a:spcAft>
+            </a:pPr>
+            <a:r>
+              <a:rPr sz="800">
                 <a:solidFill>
                   <a:srgbClr val="CCCCCC"/>
                 </a:solidFill>
@@ -13077,929 +13483,541 @@
               </a:spcAft>
             </a:pPr>
             <a:r>
-              <a:rPr sz="700">
+              <a:rPr sz="800">
                 <a:solidFill>
                   <a:srgbClr val="7FAF7F"/>
                 </a:solidFill>
                 <a:latin typeface="Consolas"/>
               </a:rPr>
-              <a:t>// 1. A FORCE, when you want a push of known size (chrono/physics/ChBody.h)</a:t>
-            </a:r>
-          </a:p>
-          <a:p>
-            <a:pPr>
-              <a:spcAft>
-                <a:spcPts val="0"/>
-              </a:spcAft>
-            </a:pPr>
-            <a:r>
-              <a:rPr sz="700">
-                <a:solidFill>
-                  <a:srgbClr val="CCCCCC"/>
-                </a:solidFill>
-                <a:latin typeface="Consolas"/>
-              </a:rPr>
-              <a:t>unsigned int idx = body-&gt;</a:t>
-            </a:r>
-            <a:r>
-              <a:rPr sz="700">
+              <a:t># The module ALREADY compiles with directors enabled:</a:t>
+            </a:r>
+          </a:p>
+          <a:p>
+            <a:pPr>
+              <a:spcAft>
+                <a:spcPts val="0"/>
+              </a:spcAft>
+            </a:pPr>
+            <a:r>
+              <a:rPr sz="800">
+                <a:solidFill>
+                  <a:srgbClr val="7FAF7F"/>
+                </a:solidFill>
+                <a:latin typeface="Consolas"/>
+              </a:rPr>
+              <a:t>#     %module(directors="1", threads="1") irrlicht</a:t>
+            </a:r>
+          </a:p>
+          <a:p>
+            <a:pPr>
+              <a:spcAft>
+                <a:spcPts val="0"/>
+              </a:spcAft>
+            </a:pPr>
+            <a:r>
+              <a:rPr sz="800">
+                <a:solidFill>
+                  <a:srgbClr val="7FAF7F"/>
+                </a:solidFill>
+                <a:latin typeface="Consolas"/>
+              </a:rPr>
+              <a:t># and AddUserEventReceiver is ALREADY bound. Without the</a:t>
+            </a:r>
+          </a:p>
+          <a:p>
+            <a:pPr>
+              <a:spcAft>
+                <a:spcPts val="0"/>
+              </a:spcAft>
+            </a:pPr>
+            <a:r>
+              <a:rPr sz="800">
+                <a:solidFill>
+                  <a:srgbClr val="7FAF7F"/>
+                </a:solidFill>
+                <a:latin typeface="Consolas"/>
+              </a:rPr>
+              <a:t># director, though, Python gets an abstract class:</a:t>
+            </a:r>
+          </a:p>
+          <a:p>
+            <a:pPr>
+              <a:spcAft>
+                <a:spcPts val="0"/>
+              </a:spcAft>
+            </a:pPr>
+            <a:r>
+              <a:rPr sz="800">
+                <a:solidFill>
+                  <a:srgbClr val="7FAF7F"/>
+                </a:solidFill>
+                <a:latin typeface="Consolas"/>
+              </a:rPr>
+              <a:t>#     &gt;&gt;&gt; ci.IEventReceiver()</a:t>
+            </a:r>
+          </a:p>
+          <a:p>
+            <a:pPr>
+              <a:spcAft>
+                <a:spcPts val="0"/>
+              </a:spcAft>
+            </a:pPr>
+            <a:r>
+              <a:rPr sz="800">
+                <a:solidFill>
+                  <a:srgbClr val="7FAF7F"/>
+                </a:solidFill>
+                <a:latin typeface="Consolas"/>
+              </a:rPr>
+              <a:t>#     AttributeError: No constructor defined - class is abstract</a:t>
+            </a:r>
+          </a:p>
+          <a:p>
+            <a:pPr>
+              <a:spcAft>
+                <a:spcPts val="0"/>
+              </a:spcAft>
+            </a:pPr>
+            <a:r>
+              <a:rPr sz="800">
+                <a:solidFill>
+                  <a:srgbClr val="7FAF7F"/>
+                </a:solidFill>
+                <a:latin typeface="Consolas"/>
+              </a:rPr>
+              <a:t># so there is a socket, and nothing you can plug into it.</a:t>
+            </a:r>
+          </a:p>
+          <a:p>
+            <a:pPr>
+              <a:spcAft>
+                <a:spcPts val="0"/>
+              </a:spcAft>
+            </a:pPr>
+            <a:r>
+              <a:rPr sz="800">
+                <a:solidFill>
+                  <a:srgbClr val="CCCCCC"/>
+                </a:solidFill>
+                <a:latin typeface="Consolas"/>
+              </a:rPr>
+              <a:t> </a:t>
+            </a:r>
+          </a:p>
+          <a:p>
+            <a:pPr>
+              <a:spcAft>
+                <a:spcPts val="0"/>
+              </a:spcAft>
+            </a:pPr>
+            <a:r>
+              <a:rPr sz="800">
+                <a:solidFill>
+                  <a:srgbClr val="CCCCCC"/>
+                </a:solidFill>
+                <a:latin typeface="Consolas"/>
+              </a:rPr>
+              <a:t>class </a:t>
+            </a:r>
+            <a:r>
+              <a:rPr sz="800">
                 <a:solidFill>
                   <a:srgbClr val="7FC7E8"/>
                 </a:solidFill>
                 <a:latin typeface="Consolas"/>
               </a:rPr>
-              <a:t>AddAccumulator</a:t>
-            </a:r>
-            <a:r>
-              <a:rPr sz="700">
-                <a:solidFill>
-                  <a:srgbClr val="CCCCCC"/>
-                </a:solidFill>
-                <a:latin typeface="Consolas"/>
-              </a:rPr>
-              <a:t>();       </a:t>
-            </a:r>
-            <a:r>
-              <a:rPr sz="700">
+              <a:t>MouseReceiver</a:t>
+            </a:r>
+            <a:r>
+              <a:rPr sz="800">
+                <a:solidFill>
+                  <a:srgbClr val="CCCCCC"/>
+                </a:solidFill>
+                <a:latin typeface="Consolas"/>
+              </a:rPr>
+              <a:t>(irr.IEventReceiver):</a:t>
+            </a:r>
+          </a:p>
+          <a:p>
+            <a:pPr>
+              <a:spcAft>
+                <a:spcPts val="0"/>
+              </a:spcAft>
+            </a:pPr>
+            <a:r>
+              <a:rPr sz="800">
+                <a:solidFill>
+                  <a:srgbClr val="CCCCCC"/>
+                </a:solidFill>
+                <a:latin typeface="Consolas"/>
+              </a:rPr>
+              <a:t>    </a:t>
+            </a:r>
+            <a:r>
+              <a:rPr sz="800">
+                <a:solidFill>
+                  <a:srgbClr val="D8A0C0"/>
+                </a:solidFill>
+                <a:latin typeface="Consolas"/>
+              </a:rPr>
+              <a:t>""</a:t>
+            </a:r>
+            <a:r>
+              <a:rPr sz="800">
+                <a:solidFill>
+                  <a:srgbClr val="D8A0C0"/>
+                </a:solidFill>
+                <a:latin typeface="Consolas"/>
+              </a:rPr>
+              <a:t>"No Quartz, no CGWindowList, no NSEvent. No macOS. Just Irrlicht."</a:t>
+            </a:r>
+            <a:r>
+              <a:rPr sz="800">
+                <a:solidFill>
+                  <a:srgbClr val="D8A0C0"/>
+                </a:solidFill>
+                <a:latin typeface="Consolas"/>
+              </a:rPr>
+              <a:t>""</a:t>
+            </a:r>
+          </a:p>
+          <a:p>
+            <a:pPr>
+              <a:spcAft>
+                <a:spcPts val="0"/>
+              </a:spcAft>
+            </a:pPr>
+            <a:r>
+              <a:rPr sz="800">
+                <a:solidFill>
+                  <a:srgbClr val="CCCCCC"/>
+                </a:solidFill>
+                <a:latin typeface="Consolas"/>
+              </a:rPr>
+              <a:t> </a:t>
+            </a:r>
+          </a:p>
+          <a:p>
+            <a:pPr>
+              <a:spcAft>
+                <a:spcPts val="0"/>
+              </a:spcAft>
+            </a:pPr>
+            <a:r>
+              <a:rPr sz="800">
+                <a:solidFill>
+                  <a:srgbClr val="CCCCCC"/>
+                </a:solidFill>
+                <a:latin typeface="Consolas"/>
+              </a:rPr>
+              <a:t>    def </a:t>
+            </a:r>
+            <a:r>
+              <a:rPr sz="800">
+                <a:solidFill>
+                  <a:srgbClr val="7FC7E8"/>
+                </a:solidFill>
+                <a:latin typeface="Consolas"/>
+              </a:rPr>
+              <a:t>__init__</a:t>
+            </a:r>
+            <a:r>
+              <a:rPr sz="800">
+                <a:solidFill>
+                  <a:srgbClr val="CCCCCC"/>
+                </a:solidFill>
+                <a:latin typeface="Consolas"/>
+              </a:rPr>
+              <a:t>(self):</a:t>
+            </a:r>
+          </a:p>
+          <a:p>
+            <a:pPr>
+              <a:spcAft>
+                <a:spcPts val="0"/>
+              </a:spcAft>
+            </a:pPr>
+            <a:r>
+              <a:rPr sz="800">
+                <a:solidFill>
+                  <a:srgbClr val="CCCCCC"/>
+                </a:solidFill>
+                <a:latin typeface="Consolas"/>
+              </a:rPr>
+              <a:t>        </a:t>
+            </a:r>
+            <a:r>
+              <a:rPr sz="800">
+                <a:solidFill>
+                  <a:srgbClr val="7FC7E8"/>
+                </a:solidFill>
+                <a:latin typeface="Consolas"/>
+              </a:rPr>
+              <a:t>super</a:t>
+            </a:r>
+            <a:r>
+              <a:rPr sz="800">
+                <a:solidFill>
+                  <a:srgbClr val="CCCCCC"/>
+                </a:solidFill>
+                <a:latin typeface="Consolas"/>
+              </a:rPr>
+              <a:t>().</a:t>
+            </a:r>
+            <a:r>
+              <a:rPr sz="800">
+                <a:solidFill>
+                  <a:srgbClr val="7FC7E8"/>
+                </a:solidFill>
+                <a:latin typeface="Consolas"/>
+              </a:rPr>
+              <a:t>__init__</a:t>
+            </a:r>
+            <a:r>
+              <a:rPr sz="800">
+                <a:solidFill>
+                  <a:srgbClr val="CCCCCC"/>
+                </a:solidFill>
+                <a:latin typeface="Consolas"/>
+              </a:rPr>
+              <a:t>()</a:t>
+            </a:r>
+          </a:p>
+          <a:p>
+            <a:pPr>
+              <a:spcAft>
+                <a:spcPts val="0"/>
+              </a:spcAft>
+            </a:pPr>
+            <a:r>
+              <a:rPr sz="800">
+                <a:solidFill>
+                  <a:srgbClr val="CCCCCC"/>
+                </a:solidFill>
+                <a:latin typeface="Consolas"/>
+              </a:rPr>
+              <a:t>        self.x = self.y = 0</a:t>
+            </a:r>
+          </a:p>
+          <a:p>
+            <a:pPr>
+              <a:spcAft>
+                <a:spcPts val="0"/>
+              </a:spcAft>
+            </a:pPr>
+            <a:r>
+              <a:rPr sz="800">
+                <a:solidFill>
+                  <a:srgbClr val="CCCCCC"/>
+                </a:solidFill>
+                <a:latin typeface="Consolas"/>
+              </a:rPr>
+              <a:t>        self.down = False</a:t>
+            </a:r>
+          </a:p>
+          <a:p>
+            <a:pPr>
+              <a:spcAft>
+                <a:spcPts val="0"/>
+              </a:spcAft>
+            </a:pPr>
+            <a:r>
+              <a:rPr sz="800">
+                <a:solidFill>
+                  <a:srgbClr val="CCCCCC"/>
+                </a:solidFill>
+                <a:latin typeface="Consolas"/>
+              </a:rPr>
+              <a:t>        self.pressed = False          </a:t>
+            </a:r>
+            <a:r>
+              <a:rPr sz="800">
                 <a:solidFill>
                   <a:srgbClr val="7FAF7F"/>
                 </a:solidFill>
                 <a:latin typeface="Consolas"/>
               </a:rPr>
-              <a:t>// ONCE per body</a:t>
-            </a:r>
-          </a:p>
-          <a:p>
-            <a:pPr>
-              <a:spcAft>
-                <a:spcPts val="0"/>
-              </a:spcAft>
-            </a:pPr>
-            <a:r>
-              <a:rPr sz="700">
-                <a:solidFill>
-                  <a:srgbClr val="CCCCCC"/>
-                </a:solidFill>
-                <a:latin typeface="Consolas"/>
-              </a:rPr>
-              <a:t>body-&gt;</a:t>
-            </a:r>
-            <a:r>
-              <a:rPr sz="700">
+              <a:t># edge, consumed by the loop</a:t>
+            </a:r>
+          </a:p>
+          <a:p>
+            <a:pPr>
+              <a:spcAft>
+                <a:spcPts val="0"/>
+              </a:spcAft>
+            </a:pPr>
+            <a:r>
+              <a:rPr sz="800">
+                <a:solidFill>
+                  <a:srgbClr val="CCCCCC"/>
+                </a:solidFill>
+                <a:latin typeface="Consolas"/>
+              </a:rPr>
+              <a:t>        self.keys = </a:t>
+            </a:r>
+            <a:r>
+              <a:rPr sz="800">
                 <a:solidFill>
                   <a:srgbClr val="7FC7E8"/>
                 </a:solidFill>
                 <a:latin typeface="Consolas"/>
               </a:rPr>
-              <a:t>EmptyAccumulator</a:t>
-            </a:r>
-            <a:r>
-              <a:rPr sz="700">
-                <a:solidFill>
-                  <a:srgbClr val="CCCCCC"/>
-                </a:solidFill>
-                <a:latin typeface="Consolas"/>
-              </a:rPr>
-              <a:t>(idx);                     </a:t>
-            </a:r>
-            <a:r>
-              <a:rPr sz="700">
-                <a:solidFill>
-                  <a:srgbClr val="7FAF7F"/>
-                </a:solidFill>
-                <a:latin typeface="Consolas"/>
-              </a:rPr>
-              <a:t>// your job, EVERY step</a:t>
-            </a:r>
-          </a:p>
-          <a:p>
-            <a:pPr>
-              <a:spcAft>
-                <a:spcPts val="0"/>
-              </a:spcAft>
-            </a:pPr>
-            <a:r>
-              <a:rPr sz="700">
-                <a:solidFill>
-                  <a:srgbClr val="CCCCCC"/>
-                </a:solidFill>
-                <a:latin typeface="Consolas"/>
-              </a:rPr>
-              <a:t>body-&gt;</a:t>
-            </a:r>
-            <a:r>
-              <a:rPr sz="700">
+              <a:t>set</a:t>
+            </a:r>
+            <a:r>
+              <a:rPr sz="800">
+                <a:solidFill>
+                  <a:srgbClr val="CCCCCC"/>
+                </a:solidFill>
+                <a:latin typeface="Consolas"/>
+              </a:rPr>
+              <a:t>()</a:t>
+            </a:r>
+          </a:p>
+          <a:p>
+            <a:pPr>
+              <a:spcAft>
+                <a:spcPts val="0"/>
+              </a:spcAft>
+            </a:pPr>
+            <a:r>
+              <a:rPr sz="800">
+                <a:solidFill>
+                  <a:srgbClr val="CCCCCC"/>
+                </a:solidFill>
+                <a:latin typeface="Consolas"/>
+              </a:rPr>
+              <a:t> </a:t>
+            </a:r>
+          </a:p>
+          <a:p>
+            <a:pPr>
+              <a:spcAft>
+                <a:spcPts val="0"/>
+              </a:spcAft>
+            </a:pPr>
+            <a:r>
+              <a:rPr sz="800">
+                <a:solidFill>
+                  <a:srgbClr val="CCCCCC"/>
+                </a:solidFill>
+                <a:latin typeface="Consolas"/>
+              </a:rPr>
+              <a:t>    def </a:t>
+            </a:r>
+            <a:r>
+              <a:rPr sz="800">
                 <a:solidFill>
                   <a:srgbClr val="7FC7E8"/>
                 </a:solidFill>
                 <a:latin typeface="Consolas"/>
               </a:rPr>
-              <a:t>AccumulateForce</a:t>
-            </a:r>
-            <a:r>
-              <a:rPr sz="700">
-                <a:solidFill>
-                  <a:srgbClr val="CCCCCC"/>
-                </a:solidFill>
-                <a:latin typeface="Consolas"/>
-              </a:rPr>
-              <a:t>(idx, force, appl_point, local);</a:t>
-            </a:r>
-          </a:p>
-          <a:p>
-            <a:pPr>
-              <a:spcAft>
-                <a:spcPts val="0"/>
-              </a:spcAft>
-            </a:pPr>
-            <a:r>
-              <a:rPr sz="700">
-                <a:solidFill>
-                  <a:srgbClr val="CCCCCC"/>
-                </a:solidFill>
-                <a:latin typeface="Consolas"/>
-              </a:rPr>
-              <a:t>body-&gt;</a:t>
-            </a:r>
-            <a:r>
-              <a:rPr sz="700">
-                <a:solidFill>
-                  <a:srgbClr val="7FC7E8"/>
-                </a:solidFill>
-                <a:latin typeface="Consolas"/>
-              </a:rPr>
-              <a:t>AccumulateTorque</a:t>
-            </a:r>
-            <a:r>
-              <a:rPr sz="700">
-                <a:solidFill>
-                  <a:srgbClr val="CCCCCC"/>
-                </a:solidFill>
-                <a:latin typeface="Consolas"/>
-              </a:rPr>
-              <a:t>(idx, torque, local);</a:t>
-            </a:r>
-          </a:p>
-          <a:p>
-            <a:pPr>
-              <a:spcAft>
-                <a:spcPts val="0"/>
-              </a:spcAft>
-            </a:pPr>
-            <a:r>
-              <a:rPr sz="700">
-                <a:solidFill>
-                  <a:srgbClr val="CCCCCC"/>
-                </a:solidFill>
-                <a:latin typeface="Consolas"/>
-              </a:rPr>
-              <a:t> </a:t>
-            </a:r>
-          </a:p>
-          <a:p>
-            <a:pPr>
-              <a:spcAft>
-                <a:spcPts val="0"/>
-              </a:spcAft>
-            </a:pPr>
-            <a:r>
-              <a:rPr sz="700">
-                <a:solidFill>
-                  <a:srgbClr val="7FAF7F"/>
-                </a:solidFill>
-                <a:latin typeface="Consolas"/>
-              </a:rPr>
-              <a:t>// 2. A CONSTRAINT, when you want a hand (chrono/physics/ChLinkTSDA.h)</a:t>
-            </a:r>
-          </a:p>
-          <a:p>
-            <a:pPr>
-              <a:spcAft>
-                <a:spcPts val="0"/>
-              </a:spcAft>
-            </a:pPr>
-            <a:r>
-              <a:rPr sz="700">
-                <a:solidFill>
-                  <a:srgbClr val="CCCCCC"/>
-                </a:solidFill>
-                <a:latin typeface="Consolas"/>
-              </a:rPr>
-              <a:t>spring-&gt;</a:t>
-            </a:r>
-            <a:r>
-              <a:rPr sz="700">
-                <a:solidFill>
-                  <a:srgbClr val="7FC7E8"/>
-                </a:solidFill>
-                <a:latin typeface="Consolas"/>
-              </a:rPr>
-              <a:t>Initialize</a:t>
-            </a:r>
-            <a:r>
-              <a:rPr sz="700">
-                <a:solidFill>
-                  <a:srgbClr val="CCCCCC"/>
-                </a:solidFill>
-                <a:latin typeface="Consolas"/>
-              </a:rPr>
-              <a:t>(handle, body, local, point1, point2);</a:t>
-            </a:r>
-          </a:p>
-          <a:p>
-            <a:pPr>
-              <a:spcAft>
-                <a:spcPts val="0"/>
-              </a:spcAft>
-            </a:pPr>
-            <a:r>
-              <a:rPr sz="700">
-                <a:solidFill>
-                  <a:srgbClr val="CCCCCC"/>
-                </a:solidFill>
-                <a:latin typeface="Consolas"/>
-              </a:rPr>
-              <a:t>spring-&gt;</a:t>
-            </a:r>
-            <a:r>
-              <a:rPr sz="700">
-                <a:solidFill>
-                  <a:srgbClr val="7FC7E8"/>
-                </a:solidFill>
-                <a:latin typeface="Consolas"/>
-              </a:rPr>
-              <a:t>SetRestLength</a:t>
-            </a:r>
-            <a:r>
-              <a:rPr sz="700">
-                <a:solidFill>
-                  <a:srgbClr val="CCCCCC"/>
-                </a:solidFill>
-                <a:latin typeface="Consolas"/>
-              </a:rPr>
-              <a:t>(0.0);</a:t>
-            </a:r>
-          </a:p>
-          <a:p>
-            <a:pPr>
-              <a:spcAft>
-                <a:spcPts val="0"/>
-              </a:spcAft>
-            </a:pPr>
-            <a:r>
-              <a:rPr sz="700">
-                <a:solidFill>
-                  <a:srgbClr val="CCCCCC"/>
-                </a:solidFill>
-                <a:latin typeface="Consolas"/>
-              </a:rPr>
-              <a:t>spring-&gt;</a:t>
-            </a:r>
-            <a:r>
-              <a:rPr sz="700">
-                <a:solidFill>
-                  <a:srgbClr val="7FC7E8"/>
-                </a:solidFill>
-                <a:latin typeface="Consolas"/>
-              </a:rPr>
-              <a:t>SetSpringCoefficient</a:t>
-            </a:r>
-            <a:r>
-              <a:rPr sz="700">
-                <a:solidFill>
-                  <a:srgbClr val="CCCCCC"/>
-                </a:solidFill>
-                <a:latin typeface="Consolas"/>
-              </a:rPr>
-              <a:t>(k);   </a:t>
-            </a:r>
-            <a:r>
-              <a:rPr sz="700">
-                <a:solidFill>
-                  <a:srgbClr val="7FAF7F"/>
-                </a:solidFill>
-                <a:latin typeface="Consolas"/>
-              </a:rPr>
-              <a:t>// k = m*w^2   scale with the MASS</a:t>
-            </a:r>
-          </a:p>
-          <a:p>
-            <a:pPr>
-              <a:spcAft>
-                <a:spcPts val="0"/>
-              </a:spcAft>
-            </a:pPr>
-            <a:r>
-              <a:rPr sz="700">
-                <a:solidFill>
-                  <a:srgbClr val="CCCCCC"/>
-                </a:solidFill>
-                <a:latin typeface="Consolas"/>
-              </a:rPr>
-              <a:t>spring-&gt;</a:t>
-            </a:r>
-            <a:r>
-              <a:rPr sz="700">
-                <a:solidFill>
-                  <a:srgbClr val="7FC7E8"/>
-                </a:solidFill>
-                <a:latin typeface="Consolas"/>
-              </a:rPr>
-              <a:t>SetDampingCoefficient</a:t>
-            </a:r>
-            <a:r>
-              <a:rPr sz="700">
-                <a:solidFill>
-                  <a:srgbClr val="CCCCCC"/>
-                </a:solidFill>
-                <a:latin typeface="Consolas"/>
-              </a:rPr>
-              <a:t>(c);  </a:t>
-            </a:r>
-            <a:r>
-              <a:rPr sz="700">
-                <a:solidFill>
-                  <a:srgbClr val="7FAF7F"/>
-                </a:solidFill>
-                <a:latin typeface="Consolas"/>
-              </a:rPr>
-              <a:t>// c = 2*m*w    critically damped</a:t>
-            </a:r>
-          </a:p>
-          <a:p>
-            <a:pPr>
-              <a:spcAft>
-                <a:spcPts val="0"/>
-              </a:spcAft>
-            </a:pPr>
-            <a:r>
-              <a:rPr sz="700">
-                <a:solidFill>
-                  <a:srgbClr val="CCCCCC"/>
-                </a:solidFill>
-                <a:latin typeface="Consolas"/>
-              </a:rPr>
-              <a:t>sys.</a:t>
-            </a:r>
-            <a:r>
-              <a:rPr sz="700">
-                <a:solidFill>
-                  <a:srgbClr val="7FC7E8"/>
-                </a:solidFill>
-                <a:latin typeface="Consolas"/>
-              </a:rPr>
-              <a:t>AddLink</a:t>
-            </a:r>
-            <a:r>
-              <a:rPr sz="700">
-                <a:solidFill>
-                  <a:srgbClr val="CCCCCC"/>
-                </a:solidFill>
-                <a:latin typeface="Consolas"/>
-              </a:rPr>
-              <a:t>(spring);</a:t>
-            </a:r>
-          </a:p>
-          <a:p>
-            <a:pPr>
-              <a:spcAft>
-                <a:spcPts val="0"/>
-              </a:spcAft>
-            </a:pPr>
-            <a:r>
-              <a:rPr sz="700">
-                <a:solidFill>
-                  <a:srgbClr val="CCCCCC"/>
-                </a:solidFill>
-                <a:latin typeface="Consolas"/>
-              </a:rPr>
-              <a:t> </a:t>
-            </a:r>
-          </a:p>
-          <a:p>
-            <a:pPr>
-              <a:spcAft>
-                <a:spcPts val="0"/>
-              </a:spcAft>
-            </a:pPr>
-            <a:r>
-              <a:rPr sz="700">
-                <a:solidFill>
-                  <a:srgbClr val="7FAF7F"/>
-                </a:solidFill>
-                <a:latin typeface="Consolas"/>
-              </a:rPr>
-              <a:t># ---- and how this tutorial calls it (hil_manipulate.py, lines 488 to 502) ------</a:t>
-            </a:r>
-          </a:p>
-          <a:p>
-            <a:pPr>
-              <a:spcAft>
-                <a:spcPts val="0"/>
-              </a:spcAft>
-            </a:pPr>
-            <a:r>
-              <a:rPr sz="700">
-                <a:solidFill>
-                  <a:srgbClr val="CCCCCC"/>
-                </a:solidFill>
-                <a:latin typeface="Consolas"/>
-              </a:rPr>
-              <a:t>omega = </a:t>
-            </a:r>
-            <a:r>
-              <a:rPr sz="700">
-                <a:solidFill>
-                  <a:srgbClr val="7FC7E8"/>
-                </a:solidFill>
-                <a:latin typeface="Consolas"/>
-              </a:rPr>
-              <a:t>getattr</a:t>
-            </a:r>
-            <a:r>
-              <a:rPr sz="700">
-                <a:solidFill>
-                  <a:srgbClr val="CCCCCC"/>
-                </a:solidFill>
-                <a:latin typeface="Consolas"/>
-              </a:rPr>
-              <a:t>(self.system, </a:t>
-            </a:r>
-            <a:r>
-              <a:rPr sz="700">
-                <a:solidFill>
-                  <a:srgbClr val="D8A0C0"/>
-                </a:solidFill>
-                <a:latin typeface="Consolas"/>
-              </a:rPr>
-              <a:t>"grab_omega"</a:t>
-            </a:r>
-            <a:r>
-              <a:rPr sz="700">
-                <a:solidFill>
-                  <a:srgbClr val="CCCCCC"/>
-                </a:solidFill>
-                <a:latin typeface="Consolas"/>
-              </a:rPr>
-              <a:t>, GRAB_OMEGA)</a:t>
-            </a:r>
-          </a:p>
-          <a:p>
-            <a:pPr>
-              <a:spcAft>
-                <a:spcPts val="0"/>
-              </a:spcAft>
-            </a:pPr>
-            <a:r>
-              <a:rPr sz="700">
-                <a:solidFill>
-                  <a:srgbClr val="CCCCCC"/>
-                </a:solidFill>
-                <a:latin typeface="Consolas"/>
-              </a:rPr>
-              <a:t>m = </a:t>
-            </a:r>
-            <a:r>
-              <a:rPr sz="700">
-                <a:solidFill>
-                  <a:srgbClr val="7FC7E8"/>
-                </a:solidFill>
-                <a:latin typeface="Consolas"/>
-              </a:rPr>
-              <a:t>max</a:t>
-            </a:r>
-            <a:r>
-              <a:rPr sz="700">
-                <a:solidFill>
-                  <a:srgbClr val="CCCCCC"/>
-                </a:solidFill>
-                <a:latin typeface="Consolas"/>
-              </a:rPr>
-              <a:t>(body.</a:t>
-            </a:r>
-            <a:r>
-              <a:rPr sz="700">
-                <a:solidFill>
-                  <a:srgbClr val="7FC7E8"/>
-                </a:solidFill>
-                <a:latin typeface="Consolas"/>
-              </a:rPr>
-              <a:t>GetMass</a:t>
-            </a:r>
-            <a:r>
-              <a:rPr sz="700">
-                <a:solidFill>
-                  <a:srgbClr val="CCCCCC"/>
-                </a:solidFill>
-                <a:latin typeface="Consolas"/>
-              </a:rPr>
-              <a:t>(), 1e-3)</a:t>
-            </a:r>
-          </a:p>
-          <a:p>
-            <a:pPr>
-              <a:spcAft>
-                <a:spcPts val="0"/>
-              </a:spcAft>
-            </a:pPr>
-            <a:r>
-              <a:rPr sz="700">
-                <a:solidFill>
-                  <a:srgbClr val="CCCCCC"/>
-                </a:solidFill>
-                <a:latin typeface="Consolas"/>
-              </a:rPr>
-              <a:t>k = m * omega * omega</a:t>
-            </a:r>
-          </a:p>
-          <a:p>
-            <a:pPr>
-              <a:spcAft>
-                <a:spcPts val="0"/>
-              </a:spcAft>
-            </a:pPr>
-            <a:r>
-              <a:rPr sz="700">
-                <a:solidFill>
-                  <a:srgbClr val="CCCCCC"/>
-                </a:solidFill>
-                <a:latin typeface="Consolas"/>
-              </a:rPr>
-              <a:t>c = 2.0 * m * omega * GRAB_ZETA</a:t>
-            </a:r>
-          </a:p>
-          <a:p>
-            <a:pPr>
-              <a:spcAft>
-                <a:spcPts val="0"/>
-              </a:spcAft>
-            </a:pPr>
-            <a:r>
-              <a:rPr sz="700">
-                <a:solidFill>
-                  <a:srgbClr val="7FAF7F"/>
-                </a:solidFill>
-                <a:latin typeface="Consolas"/>
-              </a:rPr>
-              <a:t># Belt and braces against tunnelling: a grabbed body may not move faster</a:t>
-            </a:r>
-          </a:p>
-          <a:p>
-            <a:pPr>
-              <a:spcAft>
-                <a:spcPts val="0"/>
-              </a:spcAft>
-            </a:pPr>
-            <a:r>
-              <a:rPr sz="700">
-                <a:solidFill>
-                  <a:srgbClr val="7FAF7F"/>
-                </a:solidFill>
-                <a:latin typeface="Consolas"/>
-              </a:rPr>
-              <a:t># than contact detection can keep up with at this step size.</a:t>
-            </a:r>
-          </a:p>
-          <a:p>
-            <a:pPr>
-              <a:spcAft>
-                <a:spcPts val="0"/>
-              </a:spcAft>
-            </a:pPr>
-            <a:r>
-              <a:rPr sz="700">
-                <a:solidFill>
-                  <a:srgbClr val="CCCCCC"/>
-                </a:solidFill>
-                <a:latin typeface="Consolas"/>
-              </a:rPr>
-              <a:t>self._had_limit = body.</a:t>
-            </a:r>
-            <a:r>
-              <a:rPr sz="700">
-                <a:solidFill>
-                  <a:srgbClr val="7FC7E8"/>
-                </a:solidFill>
-                <a:latin typeface="Consolas"/>
-              </a:rPr>
-              <a:t>GetLimitSpeed</a:t>
-            </a:r>
-            <a:r>
-              <a:rPr sz="700">
-                <a:solidFill>
-                  <a:srgbClr val="CCCCCC"/>
-                </a:solidFill>
-                <a:latin typeface="Consolas"/>
-              </a:rPr>
-              <a:t>() if </a:t>
-            </a:r>
-            <a:r>
-              <a:rPr sz="700">
-                <a:solidFill>
-                  <a:srgbClr val="7FC7E8"/>
-                </a:solidFill>
-                <a:latin typeface="Consolas"/>
-              </a:rPr>
-              <a:t>hasattr</a:t>
-            </a:r>
-            <a:r>
-              <a:rPr sz="700">
-                <a:solidFill>
-                  <a:srgbClr val="CCCCCC"/>
-                </a:solidFill>
-                <a:latin typeface="Consolas"/>
-              </a:rPr>
-              <a:t>(body, </a:t>
-            </a:r>
-            <a:r>
-              <a:rPr sz="700">
-                <a:solidFill>
-                  <a:srgbClr val="D8A0C0"/>
-                </a:solidFill>
-                <a:latin typeface="Consolas"/>
-              </a:rPr>
-              <a:t>"GetLimitSpeed"</a:t>
-            </a:r>
-            <a:r>
-              <a:rPr sz="700">
-                <a:solidFill>
-                  <a:srgbClr val="CCCCCC"/>
-                </a:solidFill>
-                <a:latin typeface="Consolas"/>
-              </a:rPr>
-              <a:t>) else False</a:t>
-            </a:r>
-          </a:p>
-          <a:p>
-            <a:pPr>
-              <a:spcAft>
-                <a:spcPts val="0"/>
-              </a:spcAft>
-            </a:pPr>
-            <a:r>
-              <a:rPr sz="700">
-                <a:solidFill>
-                  <a:srgbClr val="CCCCCC"/>
-                </a:solidFill>
-                <a:latin typeface="Consolas"/>
-              </a:rPr>
-              <a:t>body.</a:t>
-            </a:r>
-            <a:r>
-              <a:rPr sz="700">
-                <a:solidFill>
-                  <a:srgbClr val="7FC7E8"/>
-                </a:solidFill>
-                <a:latin typeface="Consolas"/>
-              </a:rPr>
-              <a:t>SetLimitSpeed</a:t>
-            </a:r>
-            <a:r>
-              <a:rPr sz="700">
-                <a:solidFill>
-                  <a:srgbClr val="CCCCCC"/>
-                </a:solidFill>
-                <a:latin typeface="Consolas"/>
-              </a:rPr>
-              <a:t>(True)</a:t>
-            </a:r>
-          </a:p>
-          <a:p>
-            <a:pPr>
-              <a:spcAft>
-                <a:spcPts val="0"/>
-              </a:spcAft>
-            </a:pPr>
-            <a:r>
-              <a:rPr sz="700">
-                <a:solidFill>
-                  <a:srgbClr val="CCCCCC"/>
-                </a:solidFill>
-                <a:latin typeface="Consolas"/>
-              </a:rPr>
-              <a:t>body.</a:t>
-            </a:r>
-            <a:r>
-              <a:rPr sz="700">
-                <a:solidFill>
-                  <a:srgbClr val="7FC7E8"/>
-                </a:solidFill>
-                <a:latin typeface="Consolas"/>
-              </a:rPr>
-              <a:t>SetMaxLinVel</a:t>
-            </a:r>
-            <a:r>
-              <a:rPr sz="700">
-                <a:solidFill>
-                  <a:srgbClr val="CCCCCC"/>
-                </a:solidFill>
-                <a:latin typeface="Consolas"/>
-              </a:rPr>
-              <a:t>(GRAB_MAX_SPEED)</a:t>
-            </a:r>
-          </a:p>
-          <a:p>
-            <a:pPr>
-              <a:spcAft>
-                <a:spcPts val="0"/>
-              </a:spcAft>
-            </a:pPr>
-            <a:r>
-              <a:rPr sz="700">
-                <a:solidFill>
-                  <a:srgbClr val="CCCCCC"/>
-                </a:solidFill>
-                <a:latin typeface="Consolas"/>
-              </a:rPr>
-              <a:t>self.spring = chrono.</a:t>
-            </a:r>
-            <a:r>
-              <a:rPr sz="700">
-                <a:solidFill>
-                  <a:srgbClr val="F0A040"/>
-                </a:solidFill>
-                <a:latin typeface="Consolas"/>
-              </a:rPr>
-              <a:t>ChLinkTSDA</a:t>
-            </a:r>
-            <a:r>
-              <a:rPr sz="700">
-                <a:solidFill>
-                  <a:srgbClr val="CCCCCC"/>
-                </a:solidFill>
-                <a:latin typeface="Consolas"/>
-              </a:rPr>
-              <a:t>()</a:t>
-            </a:r>
-          </a:p>
-          <a:p>
-            <a:pPr>
-              <a:spcAft>
-                <a:spcPts val="0"/>
-              </a:spcAft>
-            </a:pPr>
-            <a:r>
-              <a:rPr sz="700">
-                <a:solidFill>
-                  <a:srgbClr val="CCCCCC"/>
-                </a:solidFill>
-                <a:latin typeface="Consolas"/>
-              </a:rPr>
-              <a:t>self.spring.</a:t>
-            </a:r>
-            <a:r>
-              <a:rPr sz="700">
-                <a:solidFill>
-                  <a:srgbClr val="7FC7E8"/>
-                </a:solidFill>
-                <a:latin typeface="Consolas"/>
-              </a:rPr>
-              <a:t>Initialize</a:t>
-            </a:r>
-            <a:r>
-              <a:rPr sz="700">
-                <a:solidFill>
-                  <a:srgbClr val="CCCCCC"/>
-                </a:solidFill>
-                <a:latin typeface="Consolas"/>
-              </a:rPr>
-              <a:t>(self.handle, body, False, point, point)</a:t>
-            </a:r>
-          </a:p>
-          <a:p>
-            <a:pPr>
-              <a:spcAft>
-                <a:spcPts val="0"/>
-              </a:spcAft>
-            </a:pPr>
-            <a:r>
-              <a:rPr sz="700">
-                <a:solidFill>
-                  <a:srgbClr val="CCCCCC"/>
-                </a:solidFill>
-                <a:latin typeface="Consolas"/>
-              </a:rPr>
-              <a:t>self.spring.</a:t>
-            </a:r>
-            <a:r>
-              <a:rPr sz="700">
-                <a:solidFill>
-                  <a:srgbClr val="7FC7E8"/>
-                </a:solidFill>
-                <a:latin typeface="Consolas"/>
-              </a:rPr>
-              <a:t>SetRestLength</a:t>
-            </a:r>
-            <a:r>
-              <a:rPr sz="700">
-                <a:solidFill>
-                  <a:srgbClr val="CCCCCC"/>
-                </a:solidFill>
-                <a:latin typeface="Consolas"/>
-              </a:rPr>
-              <a:t>(0.0)</a:t>
-            </a:r>
-          </a:p>
-          <a:p>
-            <a:pPr>
-              <a:spcAft>
-                <a:spcPts val="0"/>
-              </a:spcAft>
-            </a:pPr>
-            <a:r>
-              <a:rPr sz="700">
-                <a:solidFill>
-                  <a:srgbClr val="CCCCCC"/>
-                </a:solidFill>
-                <a:latin typeface="Consolas"/>
-              </a:rPr>
-              <a:t>self.spring.</a:t>
-            </a:r>
-            <a:r>
-              <a:rPr sz="700">
-                <a:solidFill>
-                  <a:srgbClr val="7FC7E8"/>
-                </a:solidFill>
-                <a:latin typeface="Consolas"/>
-              </a:rPr>
-              <a:t>SetSpringCoefficient</a:t>
-            </a:r>
-            <a:r>
-              <a:rPr sz="700">
-                <a:solidFill>
-                  <a:srgbClr val="CCCCCC"/>
-                </a:solidFill>
-                <a:latin typeface="Consolas"/>
-              </a:rPr>
-              <a:t>(k)</a:t>
-            </a:r>
-          </a:p>
-          <a:p>
-            <a:pPr>
-              <a:spcAft>
-                <a:spcPts val="0"/>
-              </a:spcAft>
-            </a:pPr>
-            <a:r>
-              <a:rPr sz="700">
-                <a:solidFill>
-                  <a:srgbClr val="CCCCCC"/>
-                </a:solidFill>
-                <a:latin typeface="Consolas"/>
-              </a:rPr>
-              <a:t>self.spring.</a:t>
-            </a:r>
-            <a:r>
-              <a:rPr sz="700">
-                <a:solidFill>
-                  <a:srgbClr val="7FC7E8"/>
-                </a:solidFill>
-                <a:latin typeface="Consolas"/>
-              </a:rPr>
-              <a:t>SetDampingCoefficient</a:t>
-            </a:r>
-            <a:r>
-              <a:rPr sz="700">
-                <a:solidFill>
-                  <a:srgbClr val="CCCCCC"/>
-                </a:solidFill>
-                <a:latin typeface="Consolas"/>
-              </a:rPr>
-              <a:t>(c)</a:t>
-            </a:r>
-          </a:p>
-          <a:p>
-            <a:pPr>
-              <a:spcAft>
-                <a:spcPts val="0"/>
-              </a:spcAft>
-            </a:pPr>
-            <a:r>
-              <a:rPr sz="700">
-                <a:solidFill>
-                  <a:srgbClr val="CCCCCC"/>
-                </a:solidFill>
-                <a:latin typeface="Consolas"/>
-              </a:rPr>
-              <a:t>self.system.</a:t>
-            </a:r>
-            <a:r>
-              <a:rPr sz="700">
-                <a:solidFill>
-                  <a:srgbClr val="7FC7E8"/>
-                </a:solidFill>
-                <a:latin typeface="Consolas"/>
-              </a:rPr>
-              <a:t>AddLink</a:t>
-            </a:r>
-            <a:r>
-              <a:rPr sz="700">
-                <a:solidFill>
-                  <a:srgbClr val="CCCCCC"/>
-                </a:solidFill>
-                <a:latin typeface="Consolas"/>
-              </a:rPr>
-              <a:t>(self.spring)</a:t>
+              <a:t>OnEvent</a:t>
+            </a:r>
+            <a:r>
+              <a:rPr sz="800">
+                <a:solidFill>
+                  <a:srgbClr val="CCCCCC"/>
+                </a:solidFill>
+                <a:latin typeface="Consolas"/>
+              </a:rPr>
+              <a:t>(self, ev):</a:t>
+            </a:r>
+          </a:p>
+          <a:p>
+            <a:pPr>
+              <a:spcAft>
+                <a:spcPts val="0"/>
+              </a:spcAft>
+            </a:pPr>
+            <a:r>
+              <a:rPr sz="800">
+                <a:solidFill>
+                  <a:srgbClr val="CCCCCC"/>
+                </a:solidFill>
+                <a:latin typeface="Consolas"/>
+              </a:rPr>
+              <a:t>        if ev.EventType == irr.EET_MOUSE_INPUT_EVENT:</a:t>
+            </a:r>
+          </a:p>
+          <a:p>
+            <a:pPr>
+              <a:spcAft>
+                <a:spcPts val="0"/>
+              </a:spcAft>
+            </a:pPr>
+            <a:r>
+              <a:rPr sz="800">
+                <a:solidFill>
+                  <a:srgbClr val="CCCCCC"/>
+                </a:solidFill>
+                <a:latin typeface="Consolas"/>
+              </a:rPr>
+              <a:t>            self.x, self.y = ev.MouseInput.X, ev.MouseInput.Y</a:t>
+            </a:r>
+          </a:p>
+          <a:p>
+            <a:pPr>
+              <a:spcAft>
+                <a:spcPts val="0"/>
+              </a:spcAft>
+            </a:pPr>
+            <a:r>
+              <a:rPr sz="800">
+                <a:solidFill>
+                  <a:srgbClr val="CCCCCC"/>
+                </a:solidFill>
+                <a:latin typeface="Consolas"/>
+              </a:rPr>
+              <a:t>            if ev.MouseInput.Event == irr.EMIE_LMOUSE_PRESSED_DOWN:</a:t>
+            </a:r>
+          </a:p>
+          <a:p>
+            <a:pPr>
+              <a:spcAft>
+                <a:spcPts val="0"/>
+              </a:spcAft>
+            </a:pPr>
+            <a:r>
+              <a:rPr sz="800">
+                <a:solidFill>
+                  <a:srgbClr val="CCCCCC"/>
+                </a:solidFill>
+                <a:latin typeface="Consolas"/>
+              </a:rPr>
+              <a:t>                self.down = self.pressed = True</a:t>
+            </a:r>
+          </a:p>
+          <a:p>
+            <a:pPr>
+              <a:spcAft>
+                <a:spcPts val="0"/>
+              </a:spcAft>
+            </a:pPr>
+            <a:r>
+              <a:rPr sz="800">
+                <a:solidFill>
+                  <a:srgbClr val="CCCCCC"/>
+                </a:solidFill>
+                <a:latin typeface="Consolas"/>
+              </a:rPr>
+              <a:t>            elif ev.MouseInput.Event == irr.EMIE_LMOUSE_LEFT_UP:</a:t>
+            </a:r>
+          </a:p>
+          <a:p>
+            <a:pPr>
+              <a:spcAft>
+                <a:spcPts val="0"/>
+              </a:spcAft>
+            </a:pPr>
+            <a:r>
+              <a:rPr sz="800">
+                <a:solidFill>
+                  <a:srgbClr val="CCCCCC"/>
+                </a:solidFill>
+                <a:latin typeface="Consolas"/>
+              </a:rPr>
+              <a:t>                self.down = False</a:t>
             </a:r>
           </a:p>
         </p:txBody>
@@ -14012,7 +14030,7 @@
         </p:nvSpPr>
         <p:spPr>
           <a:xfrm>
-            <a:off x="402336" y="5035931"/>
+            <a:off x="402336" y="5157216"/>
             <a:ext cx="11393424" cy="1261872"/>
           </a:xfrm>
           <a:prstGeom prst="rect">
@@ -14033,17 +14051,17 @@
             </a:pPr>
             <a:r>
               <a:rPr sz="1600"/>
-              <a:t>Chrono never clears an accumulator for you, and </a:t>
+              <a:t>The pick and the pull were both one call. Hearing the click is the step that is not: without the director it means going around Chrono to the operating system, </a:t>
             </a:r>
             <a:r>
               <a:rPr sz="1400">
                 <a:latin typeface="Consolas"/>
               </a:rPr>
-              <a:t>AddAccumulator()</a:t>
+              <a:t>135 lines</a:t>
             </a:r>
             <a:r>
               <a:rPr sz="1600"/>
-              <a:t> appends, so calling it per push leaks a slot and every stale slot keeps contributing.</a:t>
+              <a:t>, macOS only, and it breaks when another window takes focus.</a:t>
             </a:r>
           </a:p>
           <a:p>
@@ -14054,27 +14072,17 @@
             </a:pPr>
             <a:r>
               <a:rPr sz="1600"/>
-              <a:t>Gains must scale with what is being pulled. A stiffness tuned on a 0.154 kg Go2 calf gave a 2.7 kg Panda link </a:t>
+              <a:t>With it, the same capability is </a:t>
             </a:r>
             <a:r>
               <a:rPr sz="1400">
                 <a:latin typeface="Consolas"/>
               </a:rPr>
-              <a:t>21,870 N/m</a:t>
+              <a:t>56 lines</a:t>
             </a:r>
             <a:r>
               <a:rPr sz="1600"/>
-              <a:t>, which is </a:t>
-            </a:r>
-            <a:r>
-              <a:rPr sz="1400">
-                <a:latin typeface="Consolas"/>
-              </a:rPr>
-              <a:t>24,300 m/s^2</a:t>
-            </a:r>
-            <a:r>
-              <a:rPr sz="1600"/>
-              <a:t>: through the floor in a single step.</a:t>
+              <a:t> of ordinary PyChrono. Upstream PR to follow this talk.</a:t>
             </a:r>
           </a:p>
         </p:txBody>
@@ -14173,7 +14181,7 @@
           <a:p>
             <a:r>
               <a:rPr sz="2600"/>
-              <a:t>Demo Time: reaching in and pulling on a robot</a:t>
+              <a:t>Demo 3: reaching in and pulling on a robot</a:t>
             </a:r>
           </a:p>
         </p:txBody>
@@ -14458,7 +14466,7 @@
             </a:pPr>
             <a:r>
               <a:rPr sz="2000"/>
-              <a:t>1.  </a:t>
+              <a:t>Demo 1.  </a:t>
             </a:r>
             <a:r>
               <a:rPr sz="1800">
@@ -14479,7 +14487,7 @@
             </a:pPr>
             <a:r>
               <a:rPr sz="2000"/>
-              <a:t>2.  </a:t>
+              <a:t>Demo 2.  </a:t>
             </a:r>
             <a:r>
               <a:rPr sz="1800">
@@ -14500,7 +14508,7 @@
             </a:pPr>
             <a:r>
               <a:rPr sz="2000"/>
-              <a:t>3.  </a:t>
+              <a:t>Demo 3.  </a:t>
             </a:r>
             <a:r>
               <a:rPr sz="1800">
@@ -14521,7 +14529,7 @@
             </a:pPr>
             <a:r>
               <a:rPr sz="2000"/>
-              <a:t>4.  </a:t>
+              <a:t>Demo 4.  </a:t>
             </a:r>
             <a:r>
               <a:rPr sz="1800">
@@ -14532,6 +14540,17 @@
             <a:r>
               <a:rPr sz="2000"/>
               <a:t> A measured impulse at a point you choose, and the magnitude where recovery stops.</a:t>
+            </a:r>
+          </a:p>
+          <a:p>
+            <a:pPr>
+              <a:spcAft>
+                <a:spcPts val="900"/>
+              </a:spcAft>
+            </a:pPr>
+            <a:r>
+              <a:rPr sz="2000"/>
+              <a:t>The demo numbers are their own: demo 1 closes the clock section, demo 2 the input section, demos 3 and 4 the last one.</a:t>
             </a:r>
           </a:p>
         </p:txBody>
@@ -14552,8 +14571,8 @@
         </p:blipFill>
         <p:spPr>
           <a:xfrm>
-            <a:off x="425195" y="3953256"/>
-            <a:ext cx="2799306" cy="2140399"/>
+            <a:off x="1511331" y="4702556"/>
+            <a:ext cx="2221036" cy="1698244"/>
           </a:xfrm>
           <a:prstGeom prst="rect">
             <a:avLst/>
@@ -14576,8 +14595,8 @@
         </p:blipFill>
         <p:spPr>
           <a:xfrm>
-            <a:off x="3498822" y="3953256"/>
-            <a:ext cx="2764682" cy="2140399"/>
+            <a:off x="4006688" y="4702556"/>
+            <a:ext cx="2193565" cy="1698244"/>
           </a:xfrm>
           <a:prstGeom prst="rect">
             <a:avLst/>
@@ -14600,8 +14619,8 @@
         </p:blipFill>
         <p:spPr>
           <a:xfrm>
-            <a:off x="6537824" y="3953256"/>
-            <a:ext cx="2186929" cy="2140399"/>
+            <a:off x="6474573" y="4702556"/>
+            <a:ext cx="1735162" cy="1698244"/>
           </a:xfrm>
           <a:prstGeom prst="rect">
             <a:avLst/>
@@ -14624,8 +14643,8 @@
         </p:blipFill>
         <p:spPr>
           <a:xfrm>
-            <a:off x="8999073" y="3953256"/>
-            <a:ext cx="2764682" cy="2140399"/>
+            <a:off x="8484055" y="4702556"/>
+            <a:ext cx="2193565" cy="1698244"/>
           </a:xfrm>
           <a:prstGeom prst="rect">
             <a:avLst/>
@@ -14740,7 +14759,7 @@
         <p:spPr>
           <a:xfrm>
             <a:off x="0" y="1207008"/>
-            <a:ext cx="12188952" cy="4389119"/>
+            <a:ext cx="12188952" cy="4163695"/>
           </a:xfrm>
           <a:prstGeom prst="rect">
             <a:avLst/>
@@ -14761,7 +14780,7 @@
               </a:spcAft>
             </a:pPr>
             <a:r>
-              <a:rPr sz="800">
+              <a:rPr sz="700">
                 <a:solidFill>
                   <a:srgbClr val="7FAF7F"/>
                 </a:solidFill>
@@ -14777,7 +14796,7 @@
               </a:spcAft>
             </a:pPr>
             <a:r>
-              <a:rPr sz="800">
+              <a:rPr sz="700">
                 <a:solidFill>
                   <a:srgbClr val="7FAF7F"/>
                 </a:solidFill>
@@ -14793,7 +14812,7 @@
               </a:spcAft>
             </a:pPr>
             <a:r>
-              <a:rPr sz="800">
+              <a:rPr sz="700">
                 <a:solidFill>
                   <a:srgbClr val="7FAF7F"/>
                 </a:solidFill>
@@ -14809,7 +14828,7 @@
               </a:spcAft>
             </a:pPr>
             <a:r>
-              <a:rPr sz="800">
+              <a:rPr sz="700">
                 <a:solidFill>
                   <a:srgbClr val="7FAF7F"/>
                 </a:solidFill>
@@ -14825,7 +14844,7 @@
               </a:spcAft>
             </a:pPr>
             <a:r>
-              <a:rPr sz="800">
+              <a:rPr sz="700">
                 <a:solidFill>
                   <a:srgbClr val="7FAF7F"/>
                 </a:solidFill>
@@ -14841,7 +14860,7 @@
               </a:spcAft>
             </a:pPr>
             <a:r>
-              <a:rPr sz="800">
+              <a:rPr sz="700">
                 <a:solidFill>
                   <a:srgbClr val="7FAF7F"/>
                 </a:solidFill>
@@ -14857,7 +14876,7 @@
               </a:spcAft>
             </a:pPr>
             <a:r>
-              <a:rPr sz="800">
+              <a:rPr sz="700">
                 <a:solidFill>
                   <a:srgbClr val="7FAF7F"/>
                 </a:solidFill>
@@ -14873,7 +14892,7 @@
               </a:spcAft>
             </a:pPr>
             <a:r>
-              <a:rPr sz="800">
+              <a:rPr sz="700">
                 <a:solidFill>
                   <a:srgbClr val="7FAF7F"/>
                 </a:solidFill>
@@ -14889,7 +14908,7 @@
               </a:spcAft>
             </a:pPr>
             <a:r>
-              <a:rPr sz="800">
+              <a:rPr sz="700">
                 <a:solidFill>
                   <a:srgbClr val="7FAF7F"/>
                 </a:solidFill>
@@ -14905,7 +14924,7 @@
               </a:spcAft>
             </a:pPr>
             <a:r>
-              <a:rPr sz="800">
+              <a:rPr sz="700">
                 <a:solidFill>
                   <a:srgbClr val="7FAF7F"/>
                 </a:solidFill>
@@ -14921,7 +14940,7 @@
               </a:spcAft>
             </a:pPr>
             <a:r>
-              <a:rPr sz="800">
+              <a:rPr sz="700">
                 <a:solidFill>
                   <a:srgbClr val="7FAF7F"/>
                 </a:solidFill>
@@ -14937,7 +14956,7 @@
               </a:spcAft>
             </a:pPr>
             <a:r>
-              <a:rPr sz="800">
+              <a:rPr sz="700">
                 <a:solidFill>
                   <a:srgbClr val="7FAF7F"/>
                 </a:solidFill>
@@ -14953,7 +14972,7 @@
               </a:spcAft>
             </a:pPr>
             <a:r>
-              <a:rPr sz="800">
+              <a:rPr sz="700">
                 <a:solidFill>
                   <a:srgbClr val="CCCCCC"/>
                 </a:solidFill>
@@ -14969,23 +14988,23 @@
               </a:spcAft>
             </a:pPr>
             <a:r>
-              <a:rPr sz="800">
+              <a:rPr sz="700">
                 <a:solidFill>
                   <a:srgbClr val="7FAF7F"/>
                 </a:solidFill>
                 <a:latin typeface="Consolas"/>
               </a:rPr>
-              <a:t># ---- and how this tutorial calls it (hil_push.py, lines 264 to 283) ------</a:t>
-            </a:r>
-          </a:p>
-          <a:p>
-            <a:pPr>
-              <a:spcAft>
-                <a:spcPts val="0"/>
-              </a:spcAft>
-            </a:pPr>
-            <a:r>
-              <a:rPr sz="800">
+              <a:t># ---- and how this tutorial calls it (hil_push.py, lines 264 to 284) ------</a:t>
+            </a:r>
+          </a:p>
+          <a:p>
+            <a:pPr>
+              <a:spcAft>
+                <a:spcPts val="0"/>
+              </a:spcAft>
+            </a:pPr>
+            <a:r>
+              <a:rPr sz="700">
                 <a:solidFill>
                   <a:srgbClr val="CCCCCC"/>
                 </a:solidFill>
@@ -14994,7 +15013,7 @@
               <a:t>def </a:t>
             </a:r>
             <a:r>
-              <a:rPr sz="800">
+              <a:rPr sz="700">
                 <a:solidFill>
                   <a:srgbClr val="7FC7E8"/>
                 </a:solidFill>
@@ -15003,7 +15022,7 @@
               <a:t>fire</a:t>
             </a:r>
             <a:r>
-              <a:rPr sz="800">
+              <a:rPr sz="700">
                 <a:solidFill>
                   <a:srgbClr val="CCCCCC"/>
                 </a:solidFill>
@@ -15019,7 +15038,7 @@
               </a:spcAft>
             </a:pPr>
             <a:r>
-              <a:rPr sz="800">
+              <a:rPr sz="700">
                 <a:solidFill>
                   <a:srgbClr val="CCCCCC"/>
                 </a:solidFill>
@@ -15035,7 +15054,7 @@
               </a:spcAft>
             </a:pPr>
             <a:r>
-              <a:rPr sz="800">
+              <a:rPr sz="700">
                 <a:solidFill>
                   <a:srgbClr val="CCCCCC"/>
                 </a:solidFill>
@@ -15044,7 +15063,7 @@
               <a:t>    self.active = (body, cfg.</a:t>
             </a:r>
             <a:r>
-              <a:rPr sz="800">
+              <a:rPr sz="700">
                 <a:solidFill>
                   <a:srgbClr val="7FC7E8"/>
                 </a:solidFill>
@@ -15053,7 +15072,7 @@
               <a:t>force</a:t>
             </a:r>
             <a:r>
-              <a:rPr sz="800">
+              <a:rPr sz="700">
                 <a:solidFill>
                   <a:srgbClr val="CCCCCC"/>
                 </a:solidFill>
@@ -15062,7 +15081,7 @@
               <a:t>(), chrono.</a:t>
             </a:r>
             <a:r>
-              <a:rPr sz="800">
+              <a:rPr sz="700">
                 <a:solidFill>
                   <a:srgbClr val="F0A040"/>
                 </a:solidFill>
@@ -15071,7 +15090,7 @@
               <a:t>ChVector3d</a:t>
             </a:r>
             <a:r>
-              <a:rPr sz="800">
+              <a:rPr sz="700">
                 <a:solidFill>
                   <a:srgbClr val="CCCCCC"/>
                 </a:solidFill>
@@ -15087,7 +15106,7 @@
               </a:spcAft>
             </a:pPr>
             <a:r>
-              <a:rPr sz="800">
+              <a:rPr sz="700">
                 <a:solidFill>
                   <a:srgbClr val="CCCCCC"/>
                 </a:solidFill>
@@ -15103,7 +15122,7 @@
               </a:spcAft>
             </a:pPr>
             <a:r>
-              <a:rPr sz="800">
+              <a:rPr sz="700">
                 <a:solidFill>
                   <a:srgbClr val="CCCCCC"/>
                 </a:solidFill>
@@ -15119,7 +15138,7 @@
               </a:spcAft>
             </a:pPr>
             <a:r>
-              <a:rPr sz="800">
+              <a:rPr sz="700">
                 <a:solidFill>
                   <a:srgbClr val="CCCCCC"/>
                 </a:solidFill>
@@ -15128,7 +15147,7 @@
               <a:t>    return self.</a:t>
             </a:r>
             <a:r>
-              <a:rPr sz="800">
+              <a:rPr sz="700">
                 <a:solidFill>
                   <a:srgbClr val="7FC7E8"/>
                 </a:solidFill>
@@ -15137,7 +15156,7 @@
               <a:t>_slot</a:t>
             </a:r>
             <a:r>
-              <a:rPr sz="800">
+              <a:rPr sz="700">
                 <a:solidFill>
                   <a:srgbClr val="CCCCCC"/>
                 </a:solidFill>
@@ -15153,7 +15172,7 @@
               </a:spcAft>
             </a:pPr>
             <a:r>
-              <a:rPr sz="800">
+              <a:rPr sz="700">
                 <a:solidFill>
                   <a:srgbClr val="CCCCCC"/>
                 </a:solidFill>
@@ -15169,7 +15188,7 @@
               </a:spcAft>
             </a:pPr>
             <a:r>
-              <a:rPr sz="800">
+              <a:rPr sz="700">
                 <a:solidFill>
                   <a:srgbClr val="CCCCCC"/>
                 </a:solidFill>
@@ -15178,7 +15197,7 @@
               <a:t>def </a:t>
             </a:r>
             <a:r>
-              <a:rPr sz="800">
+              <a:rPr sz="700">
                 <a:solidFill>
                   <a:srgbClr val="7FC7E8"/>
                 </a:solidFill>
@@ -15187,7 +15206,7 @@
               <a:t>update</a:t>
             </a:r>
             <a:r>
-              <a:rPr sz="800">
+              <a:rPr sz="700">
                 <a:solidFill>
                   <a:srgbClr val="CCCCCC"/>
                 </a:solidFill>
@@ -15203,7 +15222,7 @@
               </a:spcAft>
             </a:pPr>
             <a:r>
-              <a:rPr sz="800">
+              <a:rPr sz="700">
                 <a:solidFill>
                   <a:srgbClr val="CCCCCC"/>
                 </a:solidFill>
@@ -15212,7 +15231,7 @@
               <a:t>    </a:t>
             </a:r>
             <a:r>
-              <a:rPr sz="800">
+              <a:rPr sz="700">
                 <a:solidFill>
                   <a:srgbClr val="D8A0C0"/>
                 </a:solidFill>
@@ -15221,7 +15240,7 @@
               <a:t>""</a:t>
             </a:r>
             <a:r>
-              <a:rPr sz="800">
+              <a:rPr sz="700">
                 <a:solidFill>
                   <a:srgbClr val="D8A0C0"/>
                 </a:solidFill>
@@ -15230,7 +15249,7 @@
               <a:t>"Call every step, BEFORE DoStepDynamics. Returns True while pushing."</a:t>
             </a:r>
             <a:r>
-              <a:rPr sz="800">
+              <a:rPr sz="700">
                 <a:solidFill>
                   <a:srgbClr val="D8A0C0"/>
                 </a:solidFill>
@@ -15246,7 +15265,7 @@
               </a:spcAft>
             </a:pPr>
             <a:r>
-              <a:rPr sz="800">
+              <a:rPr sz="700">
                 <a:solidFill>
                   <a:srgbClr val="CCCCCC"/>
                 </a:solidFill>
@@ -15262,7 +15281,7 @@
               </a:spcAft>
             </a:pPr>
             <a:r>
-              <a:rPr sz="800">
+              <a:rPr sz="700">
                 <a:solidFill>
                   <a:srgbClr val="CCCCCC"/>
                 </a:solidFill>
@@ -15278,7 +15297,7 @@
               </a:spcAft>
             </a:pPr>
             <a:r>
-              <a:rPr sz="800">
+              <a:rPr sz="700">
                 <a:solidFill>
                   <a:srgbClr val="CCCCCC"/>
                 </a:solidFill>
@@ -15294,7 +15313,7 @@
               </a:spcAft>
             </a:pPr>
             <a:r>
-              <a:rPr sz="800">
+              <a:rPr sz="700">
                 <a:solidFill>
                   <a:srgbClr val="CCCCCC"/>
                 </a:solidFill>
@@ -15303,7 +15322,7 @@
               <a:t>    idx = self.</a:t>
             </a:r>
             <a:r>
-              <a:rPr sz="800">
+              <a:rPr sz="700">
                 <a:solidFill>
                   <a:srgbClr val="7FC7E8"/>
                 </a:solidFill>
@@ -15312,7 +15331,7 @@
               <a:t>_slot</a:t>
             </a:r>
             <a:r>
-              <a:rPr sz="800">
+              <a:rPr sz="700">
                 <a:solidFill>
                   <a:srgbClr val="CCCCCC"/>
                 </a:solidFill>
@@ -15328,7 +15347,7 @@
               </a:spcAft>
             </a:pPr>
             <a:r>
-              <a:rPr sz="800">
+              <a:rPr sz="700">
                 <a:solidFill>
                   <a:srgbClr val="CCCCCC"/>
                 </a:solidFill>
@@ -15337,7 +15356,7 @@
               <a:t>    body.</a:t>
             </a:r>
             <a:r>
-              <a:rPr sz="800">
+              <a:rPr sz="700">
                 <a:solidFill>
                   <a:srgbClr val="7FC7E8"/>
                 </a:solidFill>
@@ -15346,7 +15365,7 @@
               <a:t>EmptyAccumulator</a:t>
             </a:r>
             <a:r>
-              <a:rPr sz="800">
+              <a:rPr sz="700">
                 <a:solidFill>
                   <a:srgbClr val="CCCCCC"/>
                 </a:solidFill>
@@ -15355,7 +15374,7 @@
               <a:t>(idx)            </a:t>
             </a:r>
             <a:r>
-              <a:rPr sz="800">
+              <a:rPr sz="700">
                 <a:solidFill>
                   <a:srgbClr val="7FAF7F"/>
                 </a:solidFill>
@@ -15371,7 +15390,7 @@
               </a:spcAft>
             </a:pPr>
             <a:r>
-              <a:rPr sz="800">
+              <a:rPr sz="700">
                 <a:solidFill>
                   <a:srgbClr val="CCCCCC"/>
                 </a:solidFill>
@@ -15387,7 +15406,7 @@
               </a:spcAft>
             </a:pPr>
             <a:r>
-              <a:rPr sz="800">
+              <a:rPr sz="700">
                 <a:solidFill>
                   <a:srgbClr val="CCCCCC"/>
                 </a:solidFill>
@@ -15403,7 +15422,7 @@
               </a:spcAft>
             </a:pPr>
             <a:r>
-              <a:rPr sz="800">
+              <a:rPr sz="700">
                 <a:solidFill>
                   <a:srgbClr val="CCCCCC"/>
                 </a:solidFill>
@@ -15419,7 +15438,7 @@
               </a:spcAft>
             </a:pPr>
             <a:r>
-              <a:rPr sz="800">
+              <a:rPr sz="700">
                 <a:solidFill>
                   <a:srgbClr val="CCCCCC"/>
                 </a:solidFill>
@@ -15428,7 +15447,7 @@
               <a:t>    </a:t>
             </a:r>
             <a:r>
-              <a:rPr sz="800">
+              <a:rPr sz="700">
                 <a:solidFill>
                   <a:srgbClr val="7FAF7F"/>
                 </a:solidFill>
@@ -15444,7 +15463,7 @@
               </a:spcAft>
             </a:pPr>
             <a:r>
-              <a:rPr sz="800">
+              <a:rPr sz="700">
                 <a:solidFill>
                   <a:srgbClr val="CCCCCC"/>
                 </a:solidFill>
@@ -15453,7 +15472,7 @@
               <a:t>    </a:t>
             </a:r>
             <a:r>
-              <a:rPr sz="800">
+              <a:rPr sz="700">
                 <a:solidFill>
                   <a:srgbClr val="7FAF7F"/>
                 </a:solidFill>
@@ -15469,7 +15488,7 @@
               </a:spcAft>
             </a:pPr>
             <a:r>
-              <a:rPr sz="800">
+              <a:rPr sz="700">
                 <a:solidFill>
                   <a:srgbClr val="CCCCCC"/>
                 </a:solidFill>
@@ -15478,7 +15497,7 @@
               <a:t>    body.</a:t>
             </a:r>
             <a:r>
-              <a:rPr sz="800">
+              <a:rPr sz="700">
                 <a:solidFill>
                   <a:srgbClr val="7FC7E8"/>
                 </a:solidFill>
@@ -15487,7 +15506,7 @@
               <a:t>AccumulateForce</a:t>
             </a:r>
             <a:r>
-              <a:rPr sz="800">
+              <a:rPr sz="700">
                 <a:solidFill>
                   <a:srgbClr val="CCCCCC"/>
                 </a:solidFill>
@@ -15496,7 +15515,7 @@
               <a:t>(idx, force, body.</a:t>
             </a:r>
             <a:r>
-              <a:rPr sz="800">
+              <a:rPr sz="700">
                 <a:solidFill>
                   <a:srgbClr val="7FC7E8"/>
                 </a:solidFill>
@@ -15505,13 +15524,29 @@
               <a:t>TransformPointLocalToParent</a:t>
             </a:r>
             <a:r>
-              <a:rPr sz="800">
+              <a:rPr sz="700">
                 <a:solidFill>
                   <a:srgbClr val="CCCCCC"/>
                 </a:solidFill>
                 <a:latin typeface="Consolas"/>
               </a:rPr>
               <a:t>(local),</a:t>
+            </a:r>
+          </a:p>
+          <a:p>
+            <a:pPr>
+              <a:spcAft>
+                <a:spcPts val="0"/>
+              </a:spcAft>
+            </a:pPr>
+            <a:r>
+              <a:rPr sz="700">
+                <a:solidFill>
+                  <a:srgbClr val="CCCCCC"/>
+                </a:solidFill>
+                <a:latin typeface="Consolas"/>
+              </a:rPr>
+              <a:t>                         False)</a:t>
             </a:r>
           </a:p>
         </p:txBody>
@@ -15524,7 +15559,7 @@
         </p:nvSpPr>
         <p:spPr>
           <a:xfrm>
-            <a:off x="402336" y="5705855"/>
+            <a:off x="402336" y="5480431"/>
             <a:ext cx="11393424" cy="713232"/>
           </a:xfrm>
           <a:prstGeom prst="rect">
@@ -15644,7 +15679,7 @@
           <a:p>
             <a:r>
               <a:rPr sz="2600"/>
-              <a:t>Demo Time: how hard can you shove it</a:t>
+              <a:t>Demo 4: how hard can you shove it</a:t>
             </a:r>
           </a:p>
         </p:txBody>
@@ -15741,7 +15776,7 @@
             </a:r>
             <a:r>
               <a:rPr sz="1700"/>
-              <a:t> does not. Sideways is weaker, at </a:t>
+              <a:t> does not. Sideways is weaker: </a:t>
             </a:r>
             <a:r>
               <a:rPr sz="1500">
@@ -15751,7 +15786,7 @@
             </a:r>
             <a:r>
               <a:rPr sz="1700"/>
-              <a:t>/</a:t>
+              <a:t> recovers, </a:t>
             </a:r>
             <a:r>
               <a:rPr sz="1500">
@@ -15761,7 +15796,7 @@
             </a:r>
             <a:r>
               <a:rPr sz="1700"/>
-              <a:t>.</a:t>
+              <a:t> does not.</a:t>
             </a:r>
           </a:p>
           <a:p>
@@ -15772,7 +15807,7 @@
             </a:pPr>
             <a:r>
               <a:rPr sz="1700"/>
-              <a:t>Change the controller and the threshold moves. The same robot held by a PD stance instead tips at </a:t>
+              <a:t>Change the controller and the threshold moves. The same robot held by a PD stance goes over just past </a:t>
             </a:r>
             <a:r>
               <a:rPr sz="1500">
@@ -15965,7 +16000,7 @@
             </a:pPr>
             <a:r>
               <a:rPr sz="1800"/>
-              <a:t>every part, the demos, and the SWIG director patch under </a:t>
+              <a:t>all four demos, and the SWIG director patch under </a:t>
             </a:r>
             <a:r>
               <a:rPr sz="1600">
@@ -16631,148 +16666,512 @@
           <a:p>
             <a:r>
               <a:rPr sz="2600"/>
-              <a:t>What a person in the loop is for</a:t>
-            </a:r>
-          </a:p>
-        </p:txBody>
-      </p:sp>
-      <p:sp>
-        <p:nvSpPr>
-          <p:cNvPr id="3" name="Content Placeholder 2"/>
-          <p:cNvSpPr>
-            <a:spLocks noGrp="1"/>
-          </p:cNvSpPr>
-          <p:nvPr>
-            <p:ph idx="1"/>
-          </p:nvPr>
+              <a:t>The loop, and the clock around it</a:t>
+            </a:r>
+          </a:p>
+        </p:txBody>
+      </p:sp>
+      <p:sp>
+        <p:nvSpPr>
+          <p:cNvPr id="3" name="Rounded Rectangle 2"/>
+          <p:cNvSpPr/>
+          <p:nvPr/>
         </p:nvSpPr>
         <p:spPr>
           <a:xfrm>
-            <a:off x="642552" y="1313782"/>
-            <a:ext cx="10936224" cy="5203976"/>
+            <a:off x="548640" y="2103120"/>
+            <a:ext cx="3017520" cy="1188720"/>
           </a:xfrm>
+          <a:prstGeom prst="roundRect">
+            <a:avLst/>
+          </a:prstGeom>
+          <a:solidFill>
+            <a:srgbClr val="1F3864"/>
+          </a:solidFill>
+          <a:ln w="12700">
+            <a:solidFill>
+              <a:srgbClr val="0B1E3F"/>
+            </a:solidFill>
+          </a:ln>
         </p:spPr>
-        <p:txBody>
-          <a:bodyPr wrap="square"/>
-          <a:lstStyle/>
-          <a:p>
-            <a:pPr>
-              <a:spcAft>
-                <a:spcPts val="500"/>
-              </a:spcAft>
-            </a:pPr>
-            <a:r>
-              <a:rPr sz="1500">
-                <a:latin typeface="Consolas"/>
-              </a:rPr>
-              <a:t>Measuring the person.</a:t>
-            </a:r>
-            <a:r>
-              <a:rPr sz="1700"/>
-              <a:t> Human factors: what does an operator do when the controls are delayed, when an assist takes authority, when a hazard appears late?</a:t>
-            </a:r>
-          </a:p>
-          <a:p>
-            <a:pPr>
-              <a:spcAft>
-                <a:spcPts val="500"/>
-              </a:spcAft>
-            </a:pPr>
-            <a:r>
-              <a:rPr sz="1500">
-                <a:latin typeface="Consolas"/>
-              </a:rPr>
-              <a:t>Training the person.</a:t>
-            </a:r>
-            <a:r>
-              <a:rPr sz="1700"/>
-              <a:t> Here the simulator IS the product, and the fidelity bar is whether it feels like the real thing.</a:t>
-            </a:r>
-          </a:p>
-          <a:p>
-            <a:pPr>
-              <a:spcAft>
-                <a:spcPts val="500"/>
-              </a:spcAft>
-            </a:pPr>
-            <a:r>
-              <a:rPr sz="1500">
-                <a:latin typeface="Consolas"/>
-              </a:rPr>
-              <a:t>Collecting data from the person.</a:t>
-            </a:r>
-            <a:r>
-              <a:rPr sz="1700"/>
-              <a:t> Demonstrations for imitation learning, driver models, reference trajectories no controller would have produced.</a:t>
-            </a:r>
-          </a:p>
-          <a:p>
-            <a:pPr>
-              <a:spcAft>
-                <a:spcPts val="500"/>
-              </a:spcAft>
-            </a:pPr>
-            <a:r>
-              <a:rPr sz="1500">
-                <a:latin typeface="Consolas"/>
-              </a:rPr>
-              <a:t>Testing the machine against a person.</a:t>
-            </a:r>
-            <a:r>
-              <a:rPr sz="1700"/>
-              <a:t> Someone perturbs a controller in ways a scripted test would never have thought to try.</a:t>
-            </a:r>
-          </a:p>
-          <a:p>
-            <a:pPr>
-              <a:spcAft>
-                <a:spcPts val="500"/>
-              </a:spcAft>
-            </a:pPr>
-            <a:r>
-              <a:rPr sz="1500">
-                <a:latin typeface="Consolas"/>
-              </a:rPr>
-              <a:t>Judging the machine by feel.</a:t>
-            </a:r>
-            <a:r>
-              <a:rPr sz="1700"/>
-              <a:t> Reach in, pull on it, see whether it behaves plausibly. Faster than any metric at answering 'something is wrong here'.</a:t>
-            </a:r>
-          </a:p>
-          <a:p>
-            <a:pPr>
-              <a:spcAft>
-                <a:spcPts val="500"/>
-              </a:spcAft>
-            </a:pPr>
-            <a:r>
-              <a:rPr sz="1500">
-                <a:latin typeface="Consolas"/>
-              </a:rPr>
-              <a:t>Designing shared control.</a:t>
-            </a:r>
-            <a:r>
-              <a:rPr sz="1700"/>
-              <a:t> When authority is split between a person and a controller, neither half can be evaluated alone.</a:t>
-            </a:r>
-          </a:p>
-          <a:p>
-            <a:pPr>
-              <a:spcAft>
-                <a:spcPts val="500"/>
-              </a:spcAft>
-            </a:pPr>
-            <a:r>
-              <a:rPr sz="1700"/>
-              <a:t>Two different jobs hide in that list. Sometimes the person is the SUBJECT being measured; sometimes the person is the CONTROLLER, because nothing else can do the task. Either way the simulator has to hold wall-clock time, or you are measuring the simulator instead of the person.</a:t>
-            </a:r>
-          </a:p>
-        </p:txBody>
-      </p:sp>
-      <p:sp>
-        <p:nvSpPr>
-          <p:cNvPr id="4" name="Footer"/>
+        <p:style>
+          <a:lnRef idx="1">
+            <a:schemeClr val="accent1"/>
+          </a:lnRef>
+          <a:fillRef idx="3">
+            <a:schemeClr val="accent1"/>
+          </a:fillRef>
+          <a:effectRef idx="2">
+            <a:schemeClr val="accent1"/>
+          </a:effectRef>
+          <a:fontRef idx="minor">
+            <a:schemeClr val="lt1"/>
+          </a:fontRef>
+        </p:style>
+        <p:txBody>
+          <a:bodyPr rtlCol="0" anchor="ctr" wrap="square"/>
+          <a:lstStyle/>
+          <a:p>
+            <a:pPr algn="ctr"/>
+            <a:r>
+              <a:rPr sz="1800" b="1">
+                <a:solidFill>
+                  <a:srgbClr val="FFFFFF"/>
+                </a:solidFill>
+              </a:rPr>
+              <a:t>Person</a:t>
+            </a:r>
+          </a:p>
+          <a:p>
+            <a:pPr algn="ctr"/>
+            <a:r>
+              <a:rPr sz="1400">
+                <a:solidFill>
+                  <a:srgbClr val="FFFFFF"/>
+                </a:solidFill>
+              </a:rPr>
+              <a:t>sees, decides, acts</a:t>
+            </a:r>
+          </a:p>
+        </p:txBody>
+      </p:sp>
+      <p:sp>
+        <p:nvSpPr>
+          <p:cNvPr id="4" name="Rounded Rectangle 3"/>
+          <p:cNvSpPr/>
+          <p:nvPr/>
+        </p:nvSpPr>
+        <p:spPr>
+          <a:xfrm>
+            <a:off x="4590288" y="2103120"/>
+            <a:ext cx="3017520" cy="1188720"/>
+          </a:xfrm>
+          <a:prstGeom prst="roundRect">
+            <a:avLst/>
+          </a:prstGeom>
+          <a:solidFill>
+            <a:srgbClr val="1F3864"/>
+          </a:solidFill>
+          <a:ln w="12700">
+            <a:solidFill>
+              <a:srgbClr val="0B1E3F"/>
+            </a:solidFill>
+          </a:ln>
+        </p:spPr>
+        <p:style>
+          <a:lnRef idx="1">
+            <a:schemeClr val="accent1"/>
+          </a:lnRef>
+          <a:fillRef idx="3">
+            <a:schemeClr val="accent1"/>
+          </a:fillRef>
+          <a:effectRef idx="2">
+            <a:schemeClr val="accent1"/>
+          </a:effectRef>
+          <a:fontRef idx="minor">
+            <a:schemeClr val="lt1"/>
+          </a:fontRef>
+        </p:style>
+        <p:txBody>
+          <a:bodyPr rtlCol="0" anchor="ctr" wrap="square"/>
+          <a:lstStyle/>
+          <a:p>
+            <a:pPr algn="ctr"/>
+            <a:r>
+              <a:rPr sz="1800" b="1">
+                <a:solidFill>
+                  <a:srgbClr val="FFFFFF"/>
+                </a:solidFill>
+              </a:rPr>
+              <a:t>Chrono</a:t>
+            </a:r>
+          </a:p>
+          <a:p>
+            <a:pPr algn="ctr"/>
+            <a:r>
+              <a:rPr sz="1400">
+                <a:solidFill>
+                  <a:srgbClr val="FFFFFF"/>
+                </a:solidFill>
+              </a:rPr>
+              <a:t>DoStepDynamics(step)</a:t>
+            </a:r>
+          </a:p>
+        </p:txBody>
+      </p:sp>
+      <p:sp>
+        <p:nvSpPr>
+          <p:cNvPr id="5" name="Rounded Rectangle 4"/>
+          <p:cNvSpPr/>
+          <p:nvPr/>
+        </p:nvSpPr>
+        <p:spPr>
+          <a:xfrm>
+            <a:off x="8631936" y="2103120"/>
+            <a:ext cx="3017520" cy="1188720"/>
+          </a:xfrm>
+          <a:prstGeom prst="roundRect">
+            <a:avLst/>
+          </a:prstGeom>
+          <a:solidFill>
+            <a:srgbClr val="1F3864"/>
+          </a:solidFill>
+          <a:ln w="12700">
+            <a:solidFill>
+              <a:srgbClr val="0B1E3F"/>
+            </a:solidFill>
+          </a:ln>
+        </p:spPr>
+        <p:style>
+          <a:lnRef idx="1">
+            <a:schemeClr val="accent1"/>
+          </a:lnRef>
+          <a:fillRef idx="3">
+            <a:schemeClr val="accent1"/>
+          </a:fillRef>
+          <a:effectRef idx="2">
+            <a:schemeClr val="accent1"/>
+          </a:effectRef>
+          <a:fontRef idx="minor">
+            <a:schemeClr val="lt1"/>
+          </a:fontRef>
+        </p:style>
+        <p:txBody>
+          <a:bodyPr rtlCol="0" anchor="ctr" wrap="square"/>
+          <a:lstStyle/>
+          <a:p>
+            <a:pPr algn="ctr"/>
+            <a:r>
+              <a:rPr sz="1800" b="1">
+                <a:solidFill>
+                  <a:srgbClr val="FFFFFF"/>
+                </a:solidFill>
+              </a:rPr>
+              <a:t>Screen + telemetry</a:t>
+            </a:r>
+          </a:p>
+          <a:p>
+            <a:pPr algn="ctr"/>
+            <a:r>
+              <a:rPr sz="1400">
+                <a:solidFill>
+                  <a:srgbClr val="FFFFFF"/>
+                </a:solidFill>
+              </a:rPr>
+              <a:t>what came back</a:t>
+            </a:r>
+          </a:p>
+        </p:txBody>
+      </p:sp>
+      <p:sp>
+        <p:nvSpPr>
+          <p:cNvPr id="6" name="Right Arrow 5"/>
+          <p:cNvSpPr/>
+          <p:nvPr/>
+        </p:nvSpPr>
+        <p:spPr>
+          <a:xfrm>
+            <a:off x="3657600" y="2514600"/>
+            <a:ext cx="841248" cy="365760"/>
+          </a:xfrm>
+          <a:prstGeom prst="rightArrow">
+            <a:avLst/>
+          </a:prstGeom>
+          <a:solidFill>
+            <a:srgbClr val="8A92A0"/>
+          </a:solidFill>
+          <a:ln>
+            <a:noFill/>
+          </a:ln>
+        </p:spPr>
+        <p:style>
+          <a:lnRef idx="1">
+            <a:schemeClr val="accent1"/>
+          </a:lnRef>
+          <a:fillRef idx="3">
+            <a:schemeClr val="accent1"/>
+          </a:fillRef>
+          <a:effectRef idx="2">
+            <a:schemeClr val="accent1"/>
+          </a:effectRef>
+          <a:fontRef idx="minor">
+            <a:schemeClr val="lt1"/>
+          </a:fontRef>
+        </p:style>
+        <p:txBody>
+          <a:bodyPr rtlCol="0" anchor="ctr"/>
+          <a:lstStyle/>
+          <a:p>
+            <a:pPr algn="ctr"/>
+          </a:p>
+        </p:txBody>
+      </p:sp>
+      <p:sp>
+        <p:nvSpPr>
+          <p:cNvPr id="7" name="Right Arrow 6"/>
+          <p:cNvSpPr/>
+          <p:nvPr/>
+        </p:nvSpPr>
+        <p:spPr>
+          <a:xfrm>
+            <a:off x="7699248" y="2514600"/>
+            <a:ext cx="841248" cy="365760"/>
+          </a:xfrm>
+          <a:prstGeom prst="rightArrow">
+            <a:avLst/>
+          </a:prstGeom>
+          <a:solidFill>
+            <a:srgbClr val="8A92A0"/>
+          </a:solidFill>
+          <a:ln>
+            <a:noFill/>
+          </a:ln>
+        </p:spPr>
+        <p:style>
+          <a:lnRef idx="1">
+            <a:schemeClr val="accent1"/>
+          </a:lnRef>
+          <a:fillRef idx="3">
+            <a:schemeClr val="accent1"/>
+          </a:fillRef>
+          <a:effectRef idx="2">
+            <a:schemeClr val="accent1"/>
+          </a:effectRef>
+          <a:fontRef idx="minor">
+            <a:schemeClr val="lt1"/>
+          </a:fontRef>
+        </p:style>
+        <p:txBody>
+          <a:bodyPr rtlCol="0" anchor="ctr"/>
+          <a:lstStyle/>
+          <a:p>
+            <a:pPr algn="ctr"/>
+          </a:p>
+        </p:txBody>
+      </p:sp>
+      <p:sp>
+        <p:nvSpPr>
+          <p:cNvPr id="8" name="TextBox 7"/>
+          <p:cNvSpPr txBox="1"/>
+          <p:nvPr/>
+        </p:nvSpPr>
+        <p:spPr>
+          <a:xfrm>
+            <a:off x="3291840" y="1600200"/>
+            <a:ext cx="1572768" cy="457200"/>
+          </a:xfrm>
+          <a:prstGeom prst="rect">
+            <a:avLst/>
+          </a:prstGeom>
+          <a:noFill/>
+        </p:spPr>
+        <p:txBody>
+          <a:bodyPr wrap="square">
+            <a:spAutoFit/>
+          </a:bodyPr>
+          <a:lstStyle/>
+          <a:p>
+            <a:pPr algn="ctr"/>
+            <a:r>
+              <a:rPr sz="1300"/>
+              <a:t>steering, a force, a click</a:t>
+            </a:r>
+          </a:p>
+        </p:txBody>
+      </p:sp>
+      <p:sp>
+        <p:nvSpPr>
+          <p:cNvPr id="9" name="TextBox 8"/>
+          <p:cNvSpPr txBox="1"/>
+          <p:nvPr/>
+        </p:nvSpPr>
+        <p:spPr>
+          <a:xfrm>
+            <a:off x="7333488" y="1600200"/>
+            <a:ext cx="1572768" cy="457200"/>
+          </a:xfrm>
+          <a:prstGeom prst="rect">
+            <a:avLst/>
+          </a:prstGeom>
+          <a:noFill/>
+        </p:spPr>
+        <p:txBody>
+          <a:bodyPr wrap="square">
+            <a:spAutoFit/>
+          </a:bodyPr>
+          <a:lstStyle/>
+          <a:p>
+            <a:pPr algn="ctr"/>
+            <a:r>
+              <a:rPr sz="1300"/>
+              <a:t>position, speed, contact</a:t>
+            </a:r>
+          </a:p>
+        </p:txBody>
+      </p:sp>
+      <p:sp>
+        <p:nvSpPr>
+          <p:cNvPr id="10" name="Left Arrow 9"/>
+          <p:cNvSpPr/>
+          <p:nvPr/>
+        </p:nvSpPr>
+        <p:spPr>
+          <a:xfrm>
+            <a:off x="548640" y="3794760"/>
+            <a:ext cx="11100816" cy="384048"/>
+          </a:xfrm>
+          <a:prstGeom prst="leftArrow">
+            <a:avLst/>
+          </a:prstGeom>
+          <a:solidFill>
+            <a:srgbClr val="8A92A0"/>
+          </a:solidFill>
+          <a:ln>
+            <a:noFill/>
+          </a:ln>
+        </p:spPr>
+        <p:style>
+          <a:lnRef idx="1">
+            <a:schemeClr val="accent1"/>
+          </a:lnRef>
+          <a:fillRef idx="3">
+            <a:schemeClr val="accent1"/>
+          </a:fillRef>
+          <a:effectRef idx="2">
+            <a:schemeClr val="accent1"/>
+          </a:effectRef>
+          <a:fontRef idx="minor">
+            <a:schemeClr val="lt1"/>
+          </a:fontRef>
+        </p:style>
+        <p:txBody>
+          <a:bodyPr rtlCol="0" anchor="ctr"/>
+          <a:lstStyle/>
+          <a:p>
+            <a:pPr algn="ctr"/>
+          </a:p>
+        </p:txBody>
+      </p:sp>
+      <p:sp>
+        <p:nvSpPr>
+          <p:cNvPr id="11" name="TextBox 10"/>
+          <p:cNvSpPr txBox="1"/>
+          <p:nvPr/>
+        </p:nvSpPr>
+        <p:spPr>
+          <a:xfrm>
+            <a:off x="548640" y="4224528"/>
+            <a:ext cx="11100816" cy="457200"/>
+          </a:xfrm>
+          <a:prstGeom prst="rect">
+            <a:avLst/>
+          </a:prstGeom>
+          <a:noFill/>
+        </p:spPr>
+        <p:txBody>
+          <a:bodyPr wrap="square">
+            <a:spAutoFit/>
+          </a:bodyPr>
+          <a:lstStyle/>
+          <a:p>
+            <a:pPr algn="ctr"/>
+            <a:r>
+              <a:rPr sz="1500"/>
+              <a:t>what they see changes what they do next  -  this arrow is what makes it a LOOP</a:t>
+            </a:r>
+          </a:p>
+        </p:txBody>
+      </p:sp>
+      <p:sp>
+        <p:nvSpPr>
+          <p:cNvPr id="12" name="Rounded Rectangle 11"/>
+          <p:cNvSpPr/>
+          <p:nvPr/>
+        </p:nvSpPr>
+        <p:spPr>
+          <a:xfrm>
+            <a:off x="3017520" y="4983480"/>
+            <a:ext cx="6126480" cy="731520"/>
+          </a:xfrm>
+          <a:prstGeom prst="roundRect">
+            <a:avLst/>
+          </a:prstGeom>
+          <a:solidFill>
+            <a:srgbClr val="C5050C"/>
+          </a:solidFill>
+          <a:ln w="12700">
+            <a:solidFill>
+              <a:srgbClr val="0B1E3F"/>
+            </a:solidFill>
+          </a:ln>
+        </p:spPr>
+        <p:style>
+          <a:lnRef idx="1">
+            <a:schemeClr val="accent1"/>
+          </a:lnRef>
+          <a:fillRef idx="3">
+            <a:schemeClr val="accent1"/>
+          </a:fillRef>
+          <a:effectRef idx="2">
+            <a:schemeClr val="accent1"/>
+          </a:effectRef>
+          <a:fontRef idx="minor">
+            <a:schemeClr val="lt1"/>
+          </a:fontRef>
+        </p:style>
+        <p:txBody>
+          <a:bodyPr rtlCol="0" anchor="ctr" wrap="square"/>
+          <a:lstStyle/>
+          <a:p>
+            <a:pPr algn="ctr"/>
+            <a:r>
+              <a:rPr sz="1600" b="1">
+                <a:solidFill>
+                  <a:srgbClr val="FFFFFF"/>
+                </a:solidFill>
+              </a:rPr>
+              <a:t>and every lap has to fit inside one wall-clock step</a:t>
+            </a:r>
+          </a:p>
+        </p:txBody>
+      </p:sp>
+      <p:sp>
+        <p:nvSpPr>
+          <p:cNvPr id="13" name="NoteBox"/>
+          <p:cNvSpPr txBox="1"/>
+          <p:nvPr/>
+        </p:nvSpPr>
+        <p:spPr>
+          <a:xfrm>
+            <a:off x="402336" y="5870448"/>
+            <a:ext cx="11393424" cy="713232"/>
+          </a:xfrm>
+          <a:prstGeom prst="rect">
+            <a:avLst/>
+          </a:prstGeom>
+          <a:noFill/>
+        </p:spPr>
+        <p:txBody>
+          <a:bodyPr wrap="square">
+            <a:spAutoFit/>
+          </a:bodyPr>
+          <a:lstStyle/>
+          <a:p>
+            <a:pPr>
+              <a:spcAft>
+                <a:spcPts val="400"/>
+              </a:spcAft>
+            </a:pPr>
+            <a:r>
+              <a:rPr sz="1600"/>
+              <a:t>Break the first arrow and it is a movie. Break the return arrow and it is a recording session. Break the clock and the person cannot stay in the loop at all, which is why the clock comes first in this tutorial.</a:t>
+            </a:r>
+          </a:p>
+        </p:txBody>
+      </p:sp>
+      <p:sp>
+        <p:nvSpPr>
+          <p:cNvPr id="14" name="Footer"/>
           <p:cNvSpPr txBox="1"/>
           <p:nvPr/>
         </p:nvSpPr>
@@ -16801,7 +17200,7 @@
       </p:sp>
       <p:sp>
         <p:nvSpPr>
-          <p:cNvPr id="5" name="PageNo"/>
+          <p:cNvPr id="15" name="PageNo"/>
           <p:cNvSpPr txBox="1"/>
           <p:nvPr/>
         </p:nvSpPr>
@@ -16838,6 +17237,203 @@
 </file>
 
 <file path=ppt/slides/slide7.xml><?xml version="1.0" encoding="utf-8"?>
+<p:sld xmlns:a="http://schemas.openxmlformats.org/drawingml/2006/main" xmlns:p="http://schemas.openxmlformats.org/presentationml/2006/main" xmlns:r="http://schemas.openxmlformats.org/officeDocument/2006/relationships">
+  <p:cSld>
+    <p:spTree>
+      <p:nvGrpSpPr>
+        <p:cNvPr id="1" name=""/>
+        <p:cNvGrpSpPr/>
+        <p:nvPr/>
+      </p:nvGrpSpPr>
+      <p:grpSpPr/>
+      <p:sp>
+        <p:nvSpPr>
+          <p:cNvPr id="2" name="Title 1"/>
+          <p:cNvSpPr>
+            <a:spLocks noGrp="1"/>
+          </p:cNvSpPr>
+          <p:nvPr>
+            <p:ph type="title"/>
+          </p:nvPr>
+        </p:nvSpPr>
+        <p:spPr/>
+        <p:txBody>
+          <a:bodyPr/>
+          <a:lstStyle/>
+          <a:p>
+            <a:r>
+              <a:rPr sz="2600"/>
+              <a:t>Not everything interactive is in the loop</a:t>
+            </a:r>
+          </a:p>
+        </p:txBody>
+      </p:sp>
+      <p:sp>
+        <p:nvSpPr>
+          <p:cNvPr id="3" name="Content Placeholder 2"/>
+          <p:cNvSpPr>
+            <a:spLocks noGrp="1"/>
+          </p:cNvSpPr>
+          <p:nvPr>
+            <p:ph idx="1"/>
+          </p:nvPr>
+        </p:nvSpPr>
+        <p:spPr>
+          <a:xfrm>
+            <a:off x="642552" y="1313782"/>
+            <a:ext cx="10936224" cy="5203976"/>
+          </a:xfrm>
+        </p:spPr>
+        <p:txBody>
+          <a:bodyPr wrap="square"/>
+          <a:lstStyle/>
+          <a:p>
+            <a:pPr>
+              <a:spcAft>
+                <a:spcPts val="900"/>
+              </a:spcAft>
+            </a:pPr>
+            <a:r>
+              <a:rPr sz="2000"/>
+              <a:t>IN the loop  -  a person's input is a term in the dynamics, every step</a:t>
+            </a:r>
+          </a:p>
+          <a:p>
+            <a:pPr lvl="1">
+              <a:spcAft>
+                <a:spcPts val="900"/>
+              </a:spcAft>
+            </a:pPr>
+            <a:r>
+              <a:rPr sz="1800"/>
+              <a:t>driving the HMMWV; dragging a robot's limb while its controller resists</a:t>
+            </a:r>
+          </a:p>
+          <a:p>
+            <a:pPr>
+              <a:spcAft>
+                <a:spcPts val="900"/>
+              </a:spcAft>
+            </a:pPr>
+            <a:r>
+              <a:rPr sz="2000"/>
+              <a:t>ON the loop  -  a person configures and triggers, then watches it play out</a:t>
+            </a:r>
+          </a:p>
+          <a:p>
+            <a:pPr lvl="1">
+              <a:spcAft>
+                <a:spcPts val="900"/>
+              </a:spcAft>
+            </a:pPr>
+            <a:r>
+              <a:rPr sz="1800"/>
+              <a:t>the push rig: you choose where and how hard, the impulse itself is scripted</a:t>
+            </a:r>
+          </a:p>
+          <a:p>
+            <a:pPr>
+              <a:spcAft>
+                <a:spcPts val="900"/>
+              </a:spcAft>
+            </a:pPr>
+            <a:r>
+              <a:rPr sz="2000"/>
+              <a:t>Neither  -  interactive, but nothing is reacting</a:t>
+            </a:r>
+          </a:p>
+          <a:p>
+            <a:pPr lvl="1">
+              <a:spcAft>
+                <a:spcPts val="900"/>
+              </a:spcAft>
+            </a:pPr>
+            <a:r>
+              <a:rPr sz="1800"/>
+              <a:t>the top-down placement tool: kinematic, no dynamics, a scene-authoring tool</a:t>
+            </a:r>
+          </a:p>
+          <a:p>
+            <a:pPr>
+              <a:spcAft>
+                <a:spcPts val="900"/>
+              </a:spcAft>
+            </a:pPr>
+            <a:r>
+              <a:rPr sz="2000"/>
+              <a:t>Worth saying out loud, because 'interactive' and 'in the loop' get used interchangeably and only one of them has a clock in it. All three are useful. Only the first two are what the phrase means.</a:t>
+            </a:r>
+          </a:p>
+        </p:txBody>
+      </p:sp>
+      <p:sp>
+        <p:nvSpPr>
+          <p:cNvPr id="4" name="Footer"/>
+          <p:cNvSpPr txBox="1"/>
+          <p:nvPr/>
+        </p:nvSpPr>
+        <p:spPr>
+          <a:xfrm>
+            <a:off x="310896" y="6647688"/>
+            <a:ext cx="11640312" cy="192024"/>
+          </a:xfrm>
+          <a:prstGeom prst="rect">
+            <a:avLst/>
+          </a:prstGeom>
+          <a:noFill/>
+        </p:spPr>
+        <p:txBody>
+          <a:bodyPr wrap="none">
+            <a:spAutoFit/>
+          </a:bodyPr>
+          <a:lstStyle/>
+          <a:p>
+            <a:r>
+              <a:rPr sz="1000"/>
+              <a:t>University of Wisconsin - Madison</a:t>
+            </a:r>
+          </a:p>
+        </p:txBody>
+      </p:sp>
+      <p:sp>
+        <p:nvSpPr>
+          <p:cNvPr id="5" name="PageNo"/>
+          <p:cNvSpPr txBox="1"/>
+          <p:nvPr/>
+        </p:nvSpPr>
+        <p:spPr>
+          <a:xfrm>
+            <a:off x="10250424" y="6647688"/>
+            <a:ext cx="1709928" cy="192024"/>
+          </a:xfrm>
+          <a:prstGeom prst="rect">
+            <a:avLst/>
+          </a:prstGeom>
+          <a:noFill/>
+        </p:spPr>
+        <p:txBody>
+          <a:bodyPr wrap="none">
+            <a:spAutoFit/>
+          </a:bodyPr>
+          <a:lstStyle/>
+          <a:p>
+            <a:pPr algn="r"/>
+            <a:r>
+              <a:rPr sz="1000"/>
+              <a:t>7</a:t>
+            </a:r>
+          </a:p>
+        </p:txBody>
+      </p:sp>
+    </p:spTree>
+  </p:cSld>
+  <p:clrMapOvr>
+    <a:masterClrMapping/>
+  </p:clrMapOvr>
+</p:sld>
+</file>
+
+<file path=ppt/slides/slide8.xml><?xml version="1.0" encoding="utf-8"?>
 <p:sld xmlns:a="http://schemas.openxmlformats.org/drawingml/2006/main" xmlns:p="http://schemas.openxmlformats.org/presentationml/2006/main" xmlns:r="http://schemas.openxmlformats.org/officeDocument/2006/relationships">
   <p:cSld>
     <p:spTree>
@@ -17095,603 +17691,6 @@
             <a:pPr algn="r"/>
             <a:r>
               <a:rPr sz="1000"/>
-              <a:t>7</a:t>
-            </a:r>
-          </a:p>
-        </p:txBody>
-      </p:sp>
-    </p:spTree>
-  </p:cSld>
-  <p:clrMapOvr>
-    <a:masterClrMapping/>
-  </p:clrMapOvr>
-</p:sld>
-</file>
-
-<file path=ppt/slides/slide8.xml><?xml version="1.0" encoding="utf-8"?>
-<p:sld xmlns:a="http://schemas.openxmlformats.org/drawingml/2006/main" xmlns:p="http://schemas.openxmlformats.org/presentationml/2006/main" xmlns:r="http://schemas.openxmlformats.org/officeDocument/2006/relationships">
-  <p:cSld>
-    <p:spTree>
-      <p:nvGrpSpPr>
-        <p:cNvPr id="1" name=""/>
-        <p:cNvGrpSpPr/>
-        <p:nvPr/>
-      </p:nvGrpSpPr>
-      <p:grpSpPr/>
-      <p:sp>
-        <p:nvSpPr>
-          <p:cNvPr id="2" name="Title 1"/>
-          <p:cNvSpPr>
-            <a:spLocks noGrp="1"/>
-          </p:cNvSpPr>
-          <p:nvPr>
-            <p:ph type="title"/>
-          </p:nvPr>
-        </p:nvSpPr>
-        <p:spPr/>
-        <p:txBody>
-          <a:bodyPr/>
-          <a:lstStyle/>
-          <a:p>
-            <a:r>
-              <a:rPr sz="2600"/>
-              <a:t>The loop, and the clock around it</a:t>
-            </a:r>
-          </a:p>
-        </p:txBody>
-      </p:sp>
-      <p:sp>
-        <p:nvSpPr>
-          <p:cNvPr id="3" name="Rounded Rectangle 2"/>
-          <p:cNvSpPr/>
-          <p:nvPr/>
-        </p:nvSpPr>
-        <p:spPr>
-          <a:xfrm>
-            <a:off x="548640" y="2103120"/>
-            <a:ext cx="3017520" cy="1188720"/>
-          </a:xfrm>
-          <a:prstGeom prst="roundRect">
-            <a:avLst/>
-          </a:prstGeom>
-          <a:solidFill>
-            <a:srgbClr val="1F3864"/>
-          </a:solidFill>
-          <a:ln w="12700">
-            <a:solidFill>
-              <a:srgbClr val="0B1E3F"/>
-            </a:solidFill>
-          </a:ln>
-        </p:spPr>
-        <p:style>
-          <a:lnRef idx="1">
-            <a:schemeClr val="accent1"/>
-          </a:lnRef>
-          <a:fillRef idx="3">
-            <a:schemeClr val="accent1"/>
-          </a:fillRef>
-          <a:effectRef idx="2">
-            <a:schemeClr val="accent1"/>
-          </a:effectRef>
-          <a:fontRef idx="minor">
-            <a:schemeClr val="lt1"/>
-          </a:fontRef>
-        </p:style>
-        <p:txBody>
-          <a:bodyPr rtlCol="0" anchor="ctr" wrap="square"/>
-          <a:lstStyle/>
-          <a:p>
-            <a:pPr algn="ctr"/>
-            <a:r>
-              <a:rPr sz="1800" b="1">
-                <a:solidFill>
-                  <a:srgbClr val="FFFFFF"/>
-                </a:solidFill>
-              </a:rPr>
-              <a:t>Person</a:t>
-            </a:r>
-          </a:p>
-          <a:p>
-            <a:pPr algn="ctr"/>
-            <a:r>
-              <a:rPr sz="1400">
-                <a:solidFill>
-                  <a:srgbClr val="FFFFFF"/>
-                </a:solidFill>
-              </a:rPr>
-              <a:t>sees, decides, acts</a:t>
-            </a:r>
-          </a:p>
-        </p:txBody>
-      </p:sp>
-      <p:sp>
-        <p:nvSpPr>
-          <p:cNvPr id="4" name="Rounded Rectangle 3"/>
-          <p:cNvSpPr/>
-          <p:nvPr/>
-        </p:nvSpPr>
-        <p:spPr>
-          <a:xfrm>
-            <a:off x="4590288" y="2103120"/>
-            <a:ext cx="3017520" cy="1188720"/>
-          </a:xfrm>
-          <a:prstGeom prst="roundRect">
-            <a:avLst/>
-          </a:prstGeom>
-          <a:solidFill>
-            <a:srgbClr val="1F3864"/>
-          </a:solidFill>
-          <a:ln w="12700">
-            <a:solidFill>
-              <a:srgbClr val="0B1E3F"/>
-            </a:solidFill>
-          </a:ln>
-        </p:spPr>
-        <p:style>
-          <a:lnRef idx="1">
-            <a:schemeClr val="accent1"/>
-          </a:lnRef>
-          <a:fillRef idx="3">
-            <a:schemeClr val="accent1"/>
-          </a:fillRef>
-          <a:effectRef idx="2">
-            <a:schemeClr val="accent1"/>
-          </a:effectRef>
-          <a:fontRef idx="minor">
-            <a:schemeClr val="lt1"/>
-          </a:fontRef>
-        </p:style>
-        <p:txBody>
-          <a:bodyPr rtlCol="0" anchor="ctr" wrap="square"/>
-          <a:lstStyle/>
-          <a:p>
-            <a:pPr algn="ctr"/>
-            <a:r>
-              <a:rPr sz="1800" b="1">
-                <a:solidFill>
-                  <a:srgbClr val="FFFFFF"/>
-                </a:solidFill>
-              </a:rPr>
-              <a:t>Chrono</a:t>
-            </a:r>
-          </a:p>
-          <a:p>
-            <a:pPr algn="ctr"/>
-            <a:r>
-              <a:rPr sz="1400">
-                <a:solidFill>
-                  <a:srgbClr val="FFFFFF"/>
-                </a:solidFill>
-              </a:rPr>
-              <a:t>DoStepDynamics(step)</a:t>
-            </a:r>
-          </a:p>
-        </p:txBody>
-      </p:sp>
-      <p:sp>
-        <p:nvSpPr>
-          <p:cNvPr id="5" name="Rounded Rectangle 4"/>
-          <p:cNvSpPr/>
-          <p:nvPr/>
-        </p:nvSpPr>
-        <p:spPr>
-          <a:xfrm>
-            <a:off x="8631936" y="2103120"/>
-            <a:ext cx="3017520" cy="1188720"/>
-          </a:xfrm>
-          <a:prstGeom prst="roundRect">
-            <a:avLst/>
-          </a:prstGeom>
-          <a:solidFill>
-            <a:srgbClr val="1F3864"/>
-          </a:solidFill>
-          <a:ln w="12700">
-            <a:solidFill>
-              <a:srgbClr val="0B1E3F"/>
-            </a:solidFill>
-          </a:ln>
-        </p:spPr>
-        <p:style>
-          <a:lnRef idx="1">
-            <a:schemeClr val="accent1"/>
-          </a:lnRef>
-          <a:fillRef idx="3">
-            <a:schemeClr val="accent1"/>
-          </a:fillRef>
-          <a:effectRef idx="2">
-            <a:schemeClr val="accent1"/>
-          </a:effectRef>
-          <a:fontRef idx="minor">
-            <a:schemeClr val="lt1"/>
-          </a:fontRef>
-        </p:style>
-        <p:txBody>
-          <a:bodyPr rtlCol="0" anchor="ctr" wrap="square"/>
-          <a:lstStyle/>
-          <a:p>
-            <a:pPr algn="ctr"/>
-            <a:r>
-              <a:rPr sz="1800" b="1">
-                <a:solidFill>
-                  <a:srgbClr val="FFFFFF"/>
-                </a:solidFill>
-              </a:rPr>
-              <a:t>Screen + telemetry</a:t>
-            </a:r>
-          </a:p>
-          <a:p>
-            <a:pPr algn="ctr"/>
-            <a:r>
-              <a:rPr sz="1400">
-                <a:solidFill>
-                  <a:srgbClr val="FFFFFF"/>
-                </a:solidFill>
-              </a:rPr>
-              <a:t>what came back</a:t>
-            </a:r>
-          </a:p>
-        </p:txBody>
-      </p:sp>
-      <p:sp>
-        <p:nvSpPr>
-          <p:cNvPr id="6" name="Right Arrow 5"/>
-          <p:cNvSpPr/>
-          <p:nvPr/>
-        </p:nvSpPr>
-        <p:spPr>
-          <a:xfrm>
-            <a:off x="3657600" y="2514600"/>
-            <a:ext cx="841248" cy="365760"/>
-          </a:xfrm>
-          <a:prstGeom prst="rightArrow">
-            <a:avLst/>
-          </a:prstGeom>
-          <a:solidFill>
-            <a:srgbClr val="8A92A0"/>
-          </a:solidFill>
-          <a:ln>
-            <a:noFill/>
-          </a:ln>
-        </p:spPr>
-        <p:style>
-          <a:lnRef idx="1">
-            <a:schemeClr val="accent1"/>
-          </a:lnRef>
-          <a:fillRef idx="3">
-            <a:schemeClr val="accent1"/>
-          </a:fillRef>
-          <a:effectRef idx="2">
-            <a:schemeClr val="accent1"/>
-          </a:effectRef>
-          <a:fontRef idx="minor">
-            <a:schemeClr val="lt1"/>
-          </a:fontRef>
-        </p:style>
-        <p:txBody>
-          <a:bodyPr rtlCol="0" anchor="ctr"/>
-          <a:lstStyle/>
-          <a:p>
-            <a:pPr algn="ctr"/>
-          </a:p>
-        </p:txBody>
-      </p:sp>
-      <p:sp>
-        <p:nvSpPr>
-          <p:cNvPr id="7" name="Right Arrow 6"/>
-          <p:cNvSpPr/>
-          <p:nvPr/>
-        </p:nvSpPr>
-        <p:spPr>
-          <a:xfrm>
-            <a:off x="7699248" y="2514600"/>
-            <a:ext cx="841248" cy="365760"/>
-          </a:xfrm>
-          <a:prstGeom prst="rightArrow">
-            <a:avLst/>
-          </a:prstGeom>
-          <a:solidFill>
-            <a:srgbClr val="8A92A0"/>
-          </a:solidFill>
-          <a:ln>
-            <a:noFill/>
-          </a:ln>
-        </p:spPr>
-        <p:style>
-          <a:lnRef idx="1">
-            <a:schemeClr val="accent1"/>
-          </a:lnRef>
-          <a:fillRef idx="3">
-            <a:schemeClr val="accent1"/>
-          </a:fillRef>
-          <a:effectRef idx="2">
-            <a:schemeClr val="accent1"/>
-          </a:effectRef>
-          <a:fontRef idx="minor">
-            <a:schemeClr val="lt1"/>
-          </a:fontRef>
-        </p:style>
-        <p:txBody>
-          <a:bodyPr rtlCol="0" anchor="ctr"/>
-          <a:lstStyle/>
-          <a:p>
-            <a:pPr algn="ctr"/>
-          </a:p>
-        </p:txBody>
-      </p:sp>
-      <p:sp>
-        <p:nvSpPr>
-          <p:cNvPr id="8" name="TextBox 7"/>
-          <p:cNvSpPr txBox="1"/>
-          <p:nvPr/>
-        </p:nvSpPr>
-        <p:spPr>
-          <a:xfrm>
-            <a:off x="3291840" y="1600200"/>
-            <a:ext cx="1572768" cy="457200"/>
-          </a:xfrm>
-          <a:prstGeom prst="rect">
-            <a:avLst/>
-          </a:prstGeom>
-          <a:noFill/>
-        </p:spPr>
-        <p:txBody>
-          <a:bodyPr wrap="square">
-            <a:spAutoFit/>
-          </a:bodyPr>
-          <a:lstStyle/>
-          <a:p>
-            <a:pPr algn="ctr"/>
-            <a:r>
-              <a:rPr sz="1300"/>
-              <a:t>steering, a force, a click</a:t>
-            </a:r>
-          </a:p>
-        </p:txBody>
-      </p:sp>
-      <p:sp>
-        <p:nvSpPr>
-          <p:cNvPr id="9" name="TextBox 8"/>
-          <p:cNvSpPr txBox="1"/>
-          <p:nvPr/>
-        </p:nvSpPr>
-        <p:spPr>
-          <a:xfrm>
-            <a:off x="7333488" y="1600200"/>
-            <a:ext cx="1572768" cy="457200"/>
-          </a:xfrm>
-          <a:prstGeom prst="rect">
-            <a:avLst/>
-          </a:prstGeom>
-          <a:noFill/>
-        </p:spPr>
-        <p:txBody>
-          <a:bodyPr wrap="square">
-            <a:spAutoFit/>
-          </a:bodyPr>
-          <a:lstStyle/>
-          <a:p>
-            <a:pPr algn="ctr"/>
-            <a:r>
-              <a:rPr sz="1300"/>
-              <a:t>position, speed, contact</a:t>
-            </a:r>
-          </a:p>
-        </p:txBody>
-      </p:sp>
-      <p:sp>
-        <p:nvSpPr>
-          <p:cNvPr id="10" name="Left Arrow 9"/>
-          <p:cNvSpPr/>
-          <p:nvPr/>
-        </p:nvSpPr>
-        <p:spPr>
-          <a:xfrm>
-            <a:off x="548640" y="3794760"/>
-            <a:ext cx="11100816" cy="384048"/>
-          </a:xfrm>
-          <a:prstGeom prst="leftArrow">
-            <a:avLst/>
-          </a:prstGeom>
-          <a:solidFill>
-            <a:srgbClr val="8A92A0"/>
-          </a:solidFill>
-          <a:ln>
-            <a:noFill/>
-          </a:ln>
-        </p:spPr>
-        <p:style>
-          <a:lnRef idx="1">
-            <a:schemeClr val="accent1"/>
-          </a:lnRef>
-          <a:fillRef idx="3">
-            <a:schemeClr val="accent1"/>
-          </a:fillRef>
-          <a:effectRef idx="2">
-            <a:schemeClr val="accent1"/>
-          </a:effectRef>
-          <a:fontRef idx="minor">
-            <a:schemeClr val="lt1"/>
-          </a:fontRef>
-        </p:style>
-        <p:txBody>
-          <a:bodyPr rtlCol="0" anchor="ctr"/>
-          <a:lstStyle/>
-          <a:p>
-            <a:pPr algn="ctr"/>
-          </a:p>
-        </p:txBody>
-      </p:sp>
-      <p:sp>
-        <p:nvSpPr>
-          <p:cNvPr id="11" name="TextBox 10"/>
-          <p:cNvSpPr txBox="1"/>
-          <p:nvPr/>
-        </p:nvSpPr>
-        <p:spPr>
-          <a:xfrm>
-            <a:off x="548640" y="4224528"/>
-            <a:ext cx="11100816" cy="457200"/>
-          </a:xfrm>
-          <a:prstGeom prst="rect">
-            <a:avLst/>
-          </a:prstGeom>
-          <a:noFill/>
-        </p:spPr>
-        <p:txBody>
-          <a:bodyPr wrap="square">
-            <a:spAutoFit/>
-          </a:bodyPr>
-          <a:lstStyle/>
-          <a:p>
-            <a:pPr algn="ctr"/>
-            <a:r>
-              <a:rPr sz="1500"/>
-              <a:t>what they see changes what they do next  -  this arrow is what makes it a LOOP</a:t>
-            </a:r>
-          </a:p>
-        </p:txBody>
-      </p:sp>
-      <p:sp>
-        <p:nvSpPr>
-          <p:cNvPr id="12" name="Rounded Rectangle 11"/>
-          <p:cNvSpPr/>
-          <p:nvPr/>
-        </p:nvSpPr>
-        <p:spPr>
-          <a:xfrm>
-            <a:off x="3017520" y="4983480"/>
-            <a:ext cx="6126480" cy="731520"/>
-          </a:xfrm>
-          <a:prstGeom prst="roundRect">
-            <a:avLst/>
-          </a:prstGeom>
-          <a:solidFill>
-            <a:srgbClr val="C5050C"/>
-          </a:solidFill>
-          <a:ln w="12700">
-            <a:solidFill>
-              <a:srgbClr val="0B1E3F"/>
-            </a:solidFill>
-          </a:ln>
-        </p:spPr>
-        <p:style>
-          <a:lnRef idx="1">
-            <a:schemeClr val="accent1"/>
-          </a:lnRef>
-          <a:fillRef idx="3">
-            <a:schemeClr val="accent1"/>
-          </a:fillRef>
-          <a:effectRef idx="2">
-            <a:schemeClr val="accent1"/>
-          </a:effectRef>
-          <a:fontRef idx="minor">
-            <a:schemeClr val="lt1"/>
-          </a:fontRef>
-        </p:style>
-        <p:txBody>
-          <a:bodyPr rtlCol="0" anchor="ctr" wrap="square"/>
-          <a:lstStyle/>
-          <a:p>
-            <a:pPr algn="ctr"/>
-            <a:r>
-              <a:rPr sz="1600" b="1">
-                <a:solidFill>
-                  <a:srgbClr val="FFFFFF"/>
-                </a:solidFill>
-              </a:rPr>
-              <a:t>and every lap has to fit inside one wall-clock step</a:t>
-            </a:r>
-          </a:p>
-        </p:txBody>
-      </p:sp>
-      <p:sp>
-        <p:nvSpPr>
-          <p:cNvPr id="13" name="NoteBox"/>
-          <p:cNvSpPr txBox="1"/>
-          <p:nvPr/>
-        </p:nvSpPr>
-        <p:spPr>
-          <a:xfrm>
-            <a:off x="402336" y="5870448"/>
-            <a:ext cx="11393424" cy="713232"/>
-          </a:xfrm>
-          <a:prstGeom prst="rect">
-            <a:avLst/>
-          </a:prstGeom>
-          <a:noFill/>
-        </p:spPr>
-        <p:txBody>
-          <a:bodyPr wrap="square">
-            <a:spAutoFit/>
-          </a:bodyPr>
-          <a:lstStyle/>
-          <a:p>
-            <a:pPr>
-              <a:spcAft>
-                <a:spcPts val="400"/>
-              </a:spcAft>
-            </a:pPr>
-            <a:r>
-              <a:rPr sz="1600"/>
-              <a:t>Break the first arrow and it is a movie. Break the return arrow and it is a recording session. Break the clock and the person cannot stay in the loop at all, which is why the clock comes first in this tutorial.</a:t>
-            </a:r>
-          </a:p>
-        </p:txBody>
-      </p:sp>
-      <p:sp>
-        <p:nvSpPr>
-          <p:cNvPr id="14" name="Footer"/>
-          <p:cNvSpPr txBox="1"/>
-          <p:nvPr/>
-        </p:nvSpPr>
-        <p:spPr>
-          <a:xfrm>
-            <a:off x="310896" y="6647688"/>
-            <a:ext cx="11640312" cy="192024"/>
-          </a:xfrm>
-          <a:prstGeom prst="rect">
-            <a:avLst/>
-          </a:prstGeom>
-          <a:noFill/>
-        </p:spPr>
-        <p:txBody>
-          <a:bodyPr wrap="none">
-            <a:spAutoFit/>
-          </a:bodyPr>
-          <a:lstStyle/>
-          <a:p>
-            <a:r>
-              <a:rPr sz="1000"/>
-              <a:t>University of Wisconsin - Madison</a:t>
-            </a:r>
-          </a:p>
-        </p:txBody>
-      </p:sp>
-      <p:sp>
-        <p:nvSpPr>
-          <p:cNvPr id="15" name="PageNo"/>
-          <p:cNvSpPr txBox="1"/>
-          <p:nvPr/>
-        </p:nvSpPr>
-        <p:spPr>
-          <a:xfrm>
-            <a:off x="10250424" y="6647688"/>
-            <a:ext cx="1709928" cy="192024"/>
-          </a:xfrm>
-          <a:prstGeom prst="rect">
-            <a:avLst/>
-          </a:prstGeom>
-          <a:noFill/>
-        </p:spPr>
-        <p:txBody>
-          <a:bodyPr wrap="none">
-            <a:spAutoFit/>
-          </a:bodyPr>
-          <a:lstStyle/>
-          <a:p>
-            <a:pPr algn="r"/>
-            <a:r>
-              <a:rPr sz="1000"/>
               <a:t>8</a:t>
             </a:r>
           </a:p>
@@ -17732,7 +17731,7 @@
           <a:p>
             <a:r>
               <a:rPr sz="2600"/>
-              <a:t>Not everything interactive is in the loop</a:t>
+              <a:t>What a person in the loop is for</a:t>
             </a:r>
           </a:p>
         </p:txBody>
@@ -17759,78 +17758,114 @@
           <a:p>
             <a:pPr>
               <a:spcAft>
-                <a:spcPts val="900"/>
-              </a:spcAft>
-            </a:pPr>
-            <a:r>
-              <a:rPr sz="2000"/>
-              <a:t>IN the loop  -  a person's input is a term in the dynamics, every step</a:t>
-            </a:r>
-          </a:p>
-          <a:p>
-            <a:pPr lvl="1">
-              <a:spcAft>
-                <a:spcPts val="900"/>
-              </a:spcAft>
-            </a:pPr>
-            <a:r>
-              <a:rPr sz="1800"/>
-              <a:t>driving the HMMWV; dragging a robot's limb while its controller resists</a:t>
-            </a:r>
-          </a:p>
-          <a:p>
-            <a:pPr>
-              <a:spcAft>
-                <a:spcPts val="900"/>
-              </a:spcAft>
-            </a:pPr>
-            <a:r>
-              <a:rPr sz="2000"/>
-              <a:t>ON the loop  -  a person configures and triggers, then watches it play out</a:t>
-            </a:r>
-          </a:p>
-          <a:p>
-            <a:pPr lvl="1">
-              <a:spcAft>
-                <a:spcPts val="900"/>
-              </a:spcAft>
-            </a:pPr>
-            <a:r>
-              <a:rPr sz="1800"/>
-              <a:t>the push rig: you choose where and how hard, the impulse itself is scripted</a:t>
-            </a:r>
-          </a:p>
-          <a:p>
-            <a:pPr>
-              <a:spcAft>
-                <a:spcPts val="900"/>
-              </a:spcAft>
-            </a:pPr>
-            <a:r>
-              <a:rPr sz="2000"/>
-              <a:t>Neither  -  interactive, but nothing is reacting</a:t>
-            </a:r>
-          </a:p>
-          <a:p>
-            <a:pPr lvl="1">
-              <a:spcAft>
-                <a:spcPts val="900"/>
-              </a:spcAft>
-            </a:pPr>
-            <a:r>
-              <a:rPr sz="1800"/>
-              <a:t>the top-down placement tool: kinematic, no dynamics, a scene-authoring tool</a:t>
-            </a:r>
-          </a:p>
-          <a:p>
-            <a:pPr>
-              <a:spcAft>
-                <a:spcPts val="900"/>
-              </a:spcAft>
-            </a:pPr>
-            <a:r>
-              <a:rPr sz="2000"/>
-              <a:t>Worth saying out loud, because 'interactive' and 'in the loop' get used interchangeably and only one of them has a clock in it. All three are useful. Only the first two are what the phrase means.</a:t>
+                <a:spcPts val="500"/>
+              </a:spcAft>
+            </a:pPr>
+            <a:r>
+              <a:rPr sz="1500">
+                <a:latin typeface="Consolas"/>
+              </a:rPr>
+              <a:t>Measuring the person.</a:t>
+            </a:r>
+            <a:r>
+              <a:rPr sz="1700"/>
+              <a:t> Human factors, which is what that study measured: how does an operator behave when the controls are delayed, when an assist takes authority, when a hazard appears late?</a:t>
+            </a:r>
+          </a:p>
+          <a:p>
+            <a:pPr>
+              <a:spcAft>
+                <a:spcPts val="500"/>
+              </a:spcAft>
+            </a:pPr>
+            <a:r>
+              <a:rPr sz="1500">
+                <a:latin typeface="Consolas"/>
+              </a:rPr>
+              <a:t>Training the person.</a:t>
+            </a:r>
+            <a:r>
+              <a:rPr sz="1700"/>
+              <a:t> Here the simulator IS the product, and the fidelity bar is whether it feels like the real thing.</a:t>
+            </a:r>
+          </a:p>
+          <a:p>
+            <a:pPr>
+              <a:spcAft>
+                <a:spcPts val="500"/>
+              </a:spcAft>
+            </a:pPr>
+            <a:r>
+              <a:rPr sz="1500">
+                <a:latin typeface="Consolas"/>
+              </a:rPr>
+              <a:t>Collecting data from the person.</a:t>
+            </a:r>
+            <a:r>
+              <a:rPr sz="1700"/>
+              <a:t> Demonstrations for imitation learning, driver models, reference trajectories no controller would have produced.</a:t>
+            </a:r>
+          </a:p>
+          <a:p>
+            <a:pPr>
+              <a:spcAft>
+                <a:spcPts val="500"/>
+              </a:spcAft>
+            </a:pPr>
+            <a:r>
+              <a:rPr sz="1500">
+                <a:latin typeface="Consolas"/>
+              </a:rPr>
+              <a:t>Testing the machine against a person.</a:t>
+            </a:r>
+            <a:r>
+              <a:rPr sz="1700"/>
+              <a:t> Someone perturbs a controller in ways a scripted test would never have thought to try.</a:t>
+            </a:r>
+          </a:p>
+          <a:p>
+            <a:pPr>
+              <a:spcAft>
+                <a:spcPts val="500"/>
+              </a:spcAft>
+            </a:pPr>
+            <a:r>
+              <a:rPr sz="1500">
+                <a:latin typeface="Consolas"/>
+              </a:rPr>
+              <a:t>Judging the machine by feel.</a:t>
+            </a:r>
+            <a:r>
+              <a:rPr sz="1700"/>
+              <a:t> Reach in, pull on it, see whether it behaves plausibly. Faster than any metric at answering 'something is wrong here'.</a:t>
+            </a:r>
+          </a:p>
+          <a:p>
+            <a:pPr>
+              <a:spcAft>
+                <a:spcPts val="500"/>
+              </a:spcAft>
+            </a:pPr>
+            <a:r>
+              <a:rPr sz="1500">
+                <a:latin typeface="Consolas"/>
+              </a:rPr>
+              <a:t>Designing shared control.</a:t>
+            </a:r>
+            <a:r>
+              <a:rPr sz="1700"/>
+              <a:t> When authority is split between a person and a controller, neither half can be evaluated alone.</a:t>
+            </a:r>
+          </a:p>
+          <a:p>
+            <a:pPr>
+              <a:spcAft>
+                <a:spcPts val="500"/>
+              </a:spcAft>
+            </a:pPr>
+            <a:r>
+              <a:rPr sz="1700"/>
+              <a:t>Two different jobs hide in that list. Sometimes the person is the SUBJECT being measured; sometimes the person is the CONTROLLER, because nothing else can do the task. Either way the simulator has to hold wall-clock time, or you are measuring the simulator instead of the person.</a:t>
             </a:r>
           </a:p>
         </p:txBody>

--- a/tutorial_HIL_driver.pptx
+++ b/tutorial_HIL_driver.pptx
@@ -5579,7 +5579,7 @@
                 </a:solidFill>
                 <a:latin typeface="Consolas"/>
               </a:rPr>
-              <a:t># ---- and how this tutorial calls it (tutorial_HIL_driver.py, lines 832 to 836) ------</a:t>
+              <a:t># ---- and how this tutorial calls it (demos/driver/tutorial_HIL_driver.py, lines 825 to 829) ------</a:t>
             </a:r>
           </a:p>
           <a:p>
@@ -8687,7 +8687,7 @@
                 </a:solidFill>
                 <a:latin typeface="Consolas"/>
               </a:rPr>
-              <a:t># ---- and how this tutorial calls it (tutorial_HIL_driver.py, lines 603 to 605) ------</a:t>
+              <a:t># ---- and how this tutorial calls it (demos/driver/tutorial_HIL_driver.py, lines 596 to 598) ------</a:t>
             </a:r>
           </a:p>
           <a:p>
@@ -9787,7 +9787,7 @@
                 </a:solidFill>
                 <a:latin typeface="Consolas"/>
               </a:rPr>
-              <a:t># ---- and how this tutorial calls it (hil_plants.py, lines 335 to 338) ------</a:t>
+              <a:t># ---- and how this tutorial calls it (demos/driver/hil_plants.py, lines 335 to 338) ------</a:t>
             </a:r>
           </a:p>
           <a:p>
@@ -11662,7 +11662,7 @@
                 </a:solidFill>
                 <a:latin typeface="Consolas"/>
               </a:rPr>
-              <a:t># ---- and how this tutorial calls it (hil_manipulate.py, lines 338 to 349) ------</a:t>
+              <a:t># ---- and how this tutorial calls it (chronohil/picking.py, lines 16 to 27) ------</a:t>
             </a:r>
           </a:p>
           <a:p>
@@ -12655,7 +12655,7 @@
                 </a:solidFill>
                 <a:latin typeface="Consolas"/>
               </a:rPr>
-              <a:t># ---- and how this tutorial calls it (hil_manipulate.py, lines 488 to 502) ------</a:t>
+              <a:t># ---- and how this tutorial calls it (chronohil/picking.py, lines 166 to 180) ------</a:t>
             </a:r>
           </a:p>
           <a:p>
@@ -14994,7 +14994,7 @@
                 </a:solidFill>
                 <a:latin typeface="Consolas"/>
               </a:rPr>
-              <a:t># ---- and how this tutorial calls it (hil_push.py, lines 264 to 284) ------</a:t>
+              <a:t># ---- and how this tutorial calls it (demos/push/rig.py, lines 139 to 159) ------</a:t>
             </a:r>
           </a:p>
           <a:p>

--- a/tutorial_HIL_driver.pptx
+++ b/tutorial_HIL_driver.pptx
@@ -5579,7 +5579,7 @@
                 </a:solidFill>
                 <a:latin typeface="Consolas"/>
               </a:rPr>
-              <a:t># ---- and how this tutorial calls it (demos/driver/tutorial_HIL_driver.py, lines 825 to 829) ------</a:t>
+              <a:t># ---- and how this tutorial calls it (demos/driver/tutorial_HIL_driver.py, lines 854 to 858) ------</a:t>
             </a:r>
           </a:p>
           <a:p>
@@ -5595,7 +5595,7 @@
                 </a:solidFill>
                 <a:latin typeface="Consolas"/>
               </a:rPr>
-              <a:t># PART 1: spin in place for real time to catch up</a:t>
+              <a:t># Demo 1: spin in place for real time to catch up</a:t>
             </a:r>
           </a:p>
           <a:p>
@@ -8687,7 +8687,7 @@
                 </a:solidFill>
                 <a:latin typeface="Consolas"/>
               </a:rPr>
-              <a:t># ---- and how this tutorial calls it (demos/driver/tutorial_HIL_driver.py, lines 596 to 598) ------</a:t>
+              <a:t># ---- and how this tutorial calls it (demos/driver/tutorial_HIL_driver.py, lines 614 to 616) ------</a:t>
             </a:r>
           </a:p>
           <a:p>
@@ -11662,7 +11662,7 @@
                 </a:solidFill>
                 <a:latin typeface="Consolas"/>
               </a:rPr>
-              <a:t># ---- and how this tutorial calls it (chronohil/picking.py, lines 16 to 27) ------</a:t>
+              <a:t># ---- and how this tutorial calls it (chronohil/picking.py, lines 21 to 32) ------</a:t>
             </a:r>
           </a:p>
           <a:p>
@@ -12655,7 +12655,7 @@
                 </a:solidFill>
                 <a:latin typeface="Consolas"/>
               </a:rPr>
-              <a:t># ---- and how this tutorial calls it (chronohil/picking.py, lines 166 to 180) ------</a:t>
+              <a:t># ---- and how this tutorial calls it (chronohil/picking.py, lines 171 to 185) ------</a:t>
             </a:r>
           </a:p>
           <a:p>
@@ -12759,7 +12759,7 @@
                 </a:solidFill>
                 <a:latin typeface="Consolas"/>
               </a:rPr>
-              <a:t>(), 1e-3)</a:t>
+              <a:t>(), GRAB_MIN_MASS)</a:t>
             </a:r>
           </a:p>
           <a:p>
@@ -13339,7 +13339,7 @@
           <a:p>
             <a:r>
               <a:rPr sz="2600"/>
-              <a:t>The gap, and the one line that closes it (native_pick.py lines 10 to 26)</a:t>
+              <a:t>The gap, and the one line that closes it (native_pick.py lines 14 to 30)</a:t>
             </a:r>
           </a:p>
         </p:txBody>
@@ -13353,7 +13353,7 @@
         <p:spPr>
           <a:xfrm>
             <a:off x="0" y="1207008"/>
-            <a:ext cx="12188952" cy="3840479"/>
+            <a:ext cx="12188952" cy="3496944"/>
           </a:xfrm>
           <a:prstGeom prst="rect">
             <a:avLst/>
@@ -13374,7 +13374,7 @@
               </a:spcAft>
             </a:pPr>
             <a:r>
-              <a:rPr sz="800">
+              <a:rPr sz="700">
                 <a:solidFill>
                   <a:srgbClr val="7FAF7F"/>
                 </a:solidFill>
@@ -13390,7 +13390,7 @@
               </a:spcAft>
             </a:pPr>
             <a:r>
-              <a:rPr sz="800">
+              <a:rPr sz="700">
                 <a:solidFill>
                   <a:srgbClr val="CCCCCC"/>
                 </a:solidFill>
@@ -13399,7 +13399,7 @@
               <a:t>+%</a:t>
             </a:r>
             <a:r>
-              <a:rPr sz="800">
+              <a:rPr sz="700">
                 <a:solidFill>
                   <a:srgbClr val="7FC7E8"/>
                 </a:solidFill>
@@ -13408,7 +13408,7 @@
               <a:t>feature</a:t>
             </a:r>
             <a:r>
-              <a:rPr sz="800">
+              <a:rPr sz="700">
                 <a:solidFill>
                   <a:srgbClr val="CCCCCC"/>
                 </a:solidFill>
@@ -13417,7 +13417,7 @@
               <a:t>(</a:t>
             </a:r>
             <a:r>
-              <a:rPr sz="800">
+              <a:rPr sz="700">
                 <a:solidFill>
                   <a:srgbClr val="D8A0C0"/>
                 </a:solidFill>
@@ -13426,7 +13426,7 @@
               <a:t>"director"</a:t>
             </a:r>
             <a:r>
-              <a:rPr sz="800">
+              <a:rPr sz="700">
                 <a:solidFill>
                   <a:srgbClr val="CCCCCC"/>
                 </a:solidFill>
@@ -13442,7 +13442,7 @@
               </a:spcAft>
             </a:pPr>
             <a:r>
-              <a:rPr sz="800">
+              <a:rPr sz="700">
                 <a:solidFill>
                   <a:srgbClr val="CCCCCC"/>
                 </a:solidFill>
@@ -13451,7 +13451,7 @@
               <a:t>%include </a:t>
             </a:r>
             <a:r>
-              <a:rPr sz="800">
+              <a:rPr sz="700">
                 <a:solidFill>
                   <a:srgbClr val="D8A0C0"/>
                 </a:solidFill>
@@ -13467,7 +13467,7 @@
               </a:spcAft>
             </a:pPr>
             <a:r>
-              <a:rPr sz="800">
+              <a:rPr sz="700">
                 <a:solidFill>
                   <a:srgbClr val="CCCCCC"/>
                 </a:solidFill>
@@ -13483,7 +13483,7 @@
               </a:spcAft>
             </a:pPr>
             <a:r>
-              <a:rPr sz="800">
+              <a:rPr sz="700">
                 <a:solidFill>
                   <a:srgbClr val="7FAF7F"/>
                 </a:solidFill>
@@ -13499,7 +13499,7 @@
               </a:spcAft>
             </a:pPr>
             <a:r>
-              <a:rPr sz="800">
+              <a:rPr sz="700">
                 <a:solidFill>
                   <a:srgbClr val="7FAF7F"/>
                 </a:solidFill>
@@ -13515,7 +13515,7 @@
               </a:spcAft>
             </a:pPr>
             <a:r>
-              <a:rPr sz="800">
+              <a:rPr sz="700">
                 <a:solidFill>
                   <a:srgbClr val="7FAF7F"/>
                 </a:solidFill>
@@ -13531,7 +13531,7 @@
               </a:spcAft>
             </a:pPr>
             <a:r>
-              <a:rPr sz="800">
+              <a:rPr sz="700">
                 <a:solidFill>
                   <a:srgbClr val="7FAF7F"/>
                 </a:solidFill>
@@ -13547,7 +13547,7 @@
               </a:spcAft>
             </a:pPr>
             <a:r>
-              <a:rPr sz="800">
+              <a:rPr sz="700">
                 <a:solidFill>
                   <a:srgbClr val="7FAF7F"/>
                 </a:solidFill>
@@ -13563,7 +13563,7 @@
               </a:spcAft>
             </a:pPr>
             <a:r>
-              <a:rPr sz="800">
+              <a:rPr sz="700">
                 <a:solidFill>
                   <a:srgbClr val="7FAF7F"/>
                 </a:solidFill>
@@ -13579,7 +13579,7 @@
               </a:spcAft>
             </a:pPr>
             <a:r>
-              <a:rPr sz="800">
+              <a:rPr sz="700">
                 <a:solidFill>
                   <a:srgbClr val="7FAF7F"/>
                 </a:solidFill>
@@ -13595,7 +13595,7 @@
               </a:spcAft>
             </a:pPr>
             <a:r>
-              <a:rPr sz="800">
+              <a:rPr sz="700">
                 <a:solidFill>
                   <a:srgbClr val="CCCCCC"/>
                 </a:solidFill>
@@ -13611,7 +13611,7 @@
               </a:spcAft>
             </a:pPr>
             <a:r>
-              <a:rPr sz="800">
+              <a:rPr sz="700">
                 <a:solidFill>
                   <a:srgbClr val="CCCCCC"/>
                 </a:solidFill>
@@ -13620,7 +13620,7 @@
               <a:t>class </a:t>
             </a:r>
             <a:r>
-              <a:rPr sz="800">
+              <a:rPr sz="700">
                 <a:solidFill>
                   <a:srgbClr val="7FC7E8"/>
                 </a:solidFill>
@@ -13629,7 +13629,7 @@
               <a:t>MouseReceiver</a:t>
             </a:r>
             <a:r>
-              <a:rPr sz="800">
+              <a:rPr sz="700">
                 <a:solidFill>
                   <a:srgbClr val="CCCCCC"/>
                 </a:solidFill>
@@ -13645,7 +13645,7 @@
               </a:spcAft>
             </a:pPr>
             <a:r>
-              <a:rPr sz="800">
+              <a:rPr sz="700">
                 <a:solidFill>
                   <a:srgbClr val="CCCCCC"/>
                 </a:solidFill>
@@ -13654,7 +13654,7 @@
               <a:t>    </a:t>
             </a:r>
             <a:r>
-              <a:rPr sz="800">
+              <a:rPr sz="700">
                 <a:solidFill>
                   <a:srgbClr val="D8A0C0"/>
                 </a:solidFill>
@@ -13663,7 +13663,7 @@
               <a:t>""</a:t>
             </a:r>
             <a:r>
-              <a:rPr sz="800">
+              <a:rPr sz="700">
                 <a:solidFill>
                   <a:srgbClr val="D8A0C0"/>
                 </a:solidFill>
@@ -13672,7 +13672,7 @@
               <a:t>"No Quartz, no CGWindowList, no NSEvent. No macOS. Just Irrlicht."</a:t>
             </a:r>
             <a:r>
-              <a:rPr sz="800">
+              <a:rPr sz="700">
                 <a:solidFill>
                   <a:srgbClr val="D8A0C0"/>
                 </a:solidFill>
@@ -13688,7 +13688,7 @@
               </a:spcAft>
             </a:pPr>
             <a:r>
-              <a:rPr sz="800">
+              <a:rPr sz="700">
                 <a:solidFill>
                   <a:srgbClr val="CCCCCC"/>
                 </a:solidFill>
@@ -13704,7 +13704,7 @@
               </a:spcAft>
             </a:pPr>
             <a:r>
-              <a:rPr sz="800">
+              <a:rPr sz="700">
                 <a:solidFill>
                   <a:srgbClr val="CCCCCC"/>
                 </a:solidFill>
@@ -13713,7 +13713,7 @@
               <a:t>    def </a:t>
             </a:r>
             <a:r>
-              <a:rPr sz="800">
+              <a:rPr sz="700">
                 <a:solidFill>
                   <a:srgbClr val="7FC7E8"/>
                 </a:solidFill>
@@ -13722,7 +13722,7 @@
               <a:t>__init__</a:t>
             </a:r>
             <a:r>
-              <a:rPr sz="800">
+              <a:rPr sz="700">
                 <a:solidFill>
                   <a:srgbClr val="CCCCCC"/>
                 </a:solidFill>
@@ -13738,7 +13738,7 @@
               </a:spcAft>
             </a:pPr>
             <a:r>
-              <a:rPr sz="800">
+              <a:rPr sz="700">
                 <a:solidFill>
                   <a:srgbClr val="CCCCCC"/>
                 </a:solidFill>
@@ -13747,7 +13747,7 @@
               <a:t>        </a:t>
             </a:r>
             <a:r>
-              <a:rPr sz="800">
+              <a:rPr sz="700">
                 <a:solidFill>
                   <a:srgbClr val="7FC7E8"/>
                 </a:solidFill>
@@ -13756,7 +13756,7 @@
               <a:t>super</a:t>
             </a:r>
             <a:r>
-              <a:rPr sz="800">
+              <a:rPr sz="700">
                 <a:solidFill>
                   <a:srgbClr val="CCCCCC"/>
                 </a:solidFill>
@@ -13765,7 +13765,7 @@
               <a:t>().</a:t>
             </a:r>
             <a:r>
-              <a:rPr sz="800">
+              <a:rPr sz="700">
                 <a:solidFill>
                   <a:srgbClr val="7FC7E8"/>
                 </a:solidFill>
@@ -13774,7 +13774,7 @@
               <a:t>__init__</a:t>
             </a:r>
             <a:r>
-              <a:rPr sz="800">
+              <a:rPr sz="700">
                 <a:solidFill>
                   <a:srgbClr val="CCCCCC"/>
                 </a:solidFill>
@@ -13790,7 +13790,7 @@
               </a:spcAft>
             </a:pPr>
             <a:r>
-              <a:rPr sz="800">
+              <a:rPr sz="700">
                 <a:solidFill>
                   <a:srgbClr val="CCCCCC"/>
                 </a:solidFill>
@@ -13806,7 +13806,7 @@
               </a:spcAft>
             </a:pPr>
             <a:r>
-              <a:rPr sz="800">
+              <a:rPr sz="700">
                 <a:solidFill>
                   <a:srgbClr val="CCCCCC"/>
                 </a:solidFill>
@@ -13822,7 +13822,7 @@
               </a:spcAft>
             </a:pPr>
             <a:r>
-              <a:rPr sz="800">
+              <a:rPr sz="700">
                 <a:solidFill>
                   <a:srgbClr val="CCCCCC"/>
                 </a:solidFill>
@@ -13831,7 +13831,7 @@
               <a:t>        self.pressed = False          </a:t>
             </a:r>
             <a:r>
-              <a:rPr sz="800">
+              <a:rPr sz="700">
                 <a:solidFill>
                   <a:srgbClr val="7FAF7F"/>
                 </a:solidFill>
@@ -13847,7 +13847,7 @@
               </a:spcAft>
             </a:pPr>
             <a:r>
-              <a:rPr sz="800">
+              <a:rPr sz="700">
                 <a:solidFill>
                   <a:srgbClr val="CCCCCC"/>
                 </a:solidFill>
@@ -13856,7 +13856,7 @@
               <a:t>        self.keys = </a:t>
             </a:r>
             <a:r>
-              <a:rPr sz="800">
+              <a:rPr sz="700">
                 <a:solidFill>
                   <a:srgbClr val="7FC7E8"/>
                 </a:solidFill>
@@ -13865,7 +13865,7 @@
               <a:t>set</a:t>
             </a:r>
             <a:r>
-              <a:rPr sz="800">
+              <a:rPr sz="700">
                 <a:solidFill>
                   <a:srgbClr val="CCCCCC"/>
                 </a:solidFill>
@@ -13881,7 +13881,7 @@
               </a:spcAft>
             </a:pPr>
             <a:r>
-              <a:rPr sz="800">
+              <a:rPr sz="700">
                 <a:solidFill>
                   <a:srgbClr val="CCCCCC"/>
                 </a:solidFill>
@@ -13897,7 +13897,7 @@
               </a:spcAft>
             </a:pPr>
             <a:r>
-              <a:rPr sz="800">
+              <a:rPr sz="700">
                 <a:solidFill>
                   <a:srgbClr val="CCCCCC"/>
                 </a:solidFill>
@@ -13906,7 +13906,7 @@
               <a:t>    def </a:t>
             </a:r>
             <a:r>
-              <a:rPr sz="800">
+              <a:rPr sz="700">
                 <a:solidFill>
                   <a:srgbClr val="7FC7E8"/>
                 </a:solidFill>
@@ -13915,7 +13915,7 @@
               <a:t>OnEvent</a:t>
             </a:r>
             <a:r>
-              <a:rPr sz="800">
+              <a:rPr sz="700">
                 <a:solidFill>
                   <a:srgbClr val="CCCCCC"/>
                 </a:solidFill>
@@ -13931,7 +13931,7 @@
               </a:spcAft>
             </a:pPr>
             <a:r>
-              <a:rPr sz="800">
+              <a:rPr sz="700">
                 <a:solidFill>
                   <a:srgbClr val="CCCCCC"/>
                 </a:solidFill>
@@ -13947,7 +13947,7 @@
               </a:spcAft>
             </a:pPr>
             <a:r>
-              <a:rPr sz="800">
+              <a:rPr sz="700">
                 <a:solidFill>
                   <a:srgbClr val="CCCCCC"/>
                 </a:solidFill>
@@ -13963,7 +13963,7 @@
               </a:spcAft>
             </a:pPr>
             <a:r>
-              <a:rPr sz="800">
+              <a:rPr sz="700">
                 <a:solidFill>
                   <a:srgbClr val="CCCCCC"/>
                 </a:solidFill>
@@ -13979,7 +13979,7 @@
               </a:spcAft>
             </a:pPr>
             <a:r>
-              <a:rPr sz="800">
+              <a:rPr sz="700">
                 <a:solidFill>
                   <a:srgbClr val="CCCCCC"/>
                 </a:solidFill>
@@ -13995,7 +13995,7 @@
               </a:spcAft>
             </a:pPr>
             <a:r>
-              <a:rPr sz="800">
+              <a:rPr sz="700">
                 <a:solidFill>
                   <a:srgbClr val="CCCCCC"/>
                 </a:solidFill>
@@ -14011,7 +14011,7 @@
               </a:spcAft>
             </a:pPr>
             <a:r>
-              <a:rPr sz="800">
+              <a:rPr sz="700">
                 <a:solidFill>
                   <a:srgbClr val="CCCCCC"/>
                 </a:solidFill>
@@ -14030,8 +14030,8 @@
         </p:nvSpPr>
         <p:spPr>
           <a:xfrm>
-            <a:off x="402336" y="5157216"/>
-            <a:ext cx="11393424" cy="1261872"/>
+            <a:off x="402336" y="4813681"/>
+            <a:ext cx="11393424" cy="1536192"/>
           </a:xfrm>
           <a:prstGeom prst="rect">
             <a:avLst/>
@@ -14051,17 +14051,17 @@
             </a:pPr>
             <a:r>
               <a:rPr sz="1600"/>
-              <a:t>The pick and the pull were both one call. Hearing the click is the step that is not: without the director it means going around Chrono to the operating system, </a:t>
+              <a:t>The pick and the pull were both one call. Hearing the click is the step that is not: without the director it means going around Chrono to the operating system: </a:t>
             </a:r>
             <a:r>
               <a:rPr sz="1400">
                 <a:latin typeface="Consolas"/>
               </a:rPr>
-              <a:t>135 lines</a:t>
+              <a:t>724 lines</a:t>
             </a:r>
             <a:r>
               <a:rPr sz="1600"/>
-              <a:t>, macOS only, and it breaks when another window takes focus.</a:t>
+              <a:t> across three backends, one per platform, each asking where the cursor is, whether the button is down, and where our window sits on screen.</a:t>
             </a:r>
           </a:p>
           <a:p>
@@ -14078,11 +14078,11 @@
               <a:rPr sz="1400">
                 <a:latin typeface="Consolas"/>
               </a:rPr>
-              <a:t>56 lines</a:t>
+              <a:t>81 lines</a:t>
             </a:r>
             <a:r>
               <a:rPr sz="1600"/>
-              <a:t> of ordinary PyChrono. Upstream PR to follow this talk.</a:t>
+              <a:t> that run wherever Irrlicht does, because the events already arrive in window coordinates. Upstream PR to follow this talk.</a:t>
             </a:r>
           </a:p>
         </p:txBody>
@@ -14994,7 +14994,7 @@
                 </a:solidFill>
                 <a:latin typeface="Consolas"/>
               </a:rPr>
-              <a:t># ---- and how this tutorial calls it (demos/push/rig.py, lines 139 to 159) ------</a:t>
+              <a:t># ---- and how this tutorial calls it (demos/push/rig.py, lines 165 to 185) ------</a:t>
             </a:r>
           </a:p>
           <a:p>
@@ -15813,7 +15813,7 @@
               <a:rPr sz="1500">
                 <a:latin typeface="Consolas"/>
               </a:rPr>
-              <a:t>325 N</a:t>
+              <a:t>600 N</a:t>
             </a:r>
             <a:r>
               <a:rPr sz="1700"/>

--- a/tutorial_HIL_driver.pptx
+++ b/tutorial_HIL_driver.pptx
@@ -5579,7 +5579,7 @@
                 </a:solidFill>
                 <a:latin typeface="Consolas"/>
               </a:rPr>
-              <a:t># ---- and how this tutorial calls it (demos/driver/tutorial_HIL_driver.py, lines 854 to 858) ------</a:t>
+              <a:t># ---- and how this tutorial calls it (demos/driver/tutorial_HIL_driver.py, lines 671 to 675) ------</a:t>
             </a:r>
           </a:p>
           <a:p>
@@ -8687,7 +8687,7 @@
                 </a:solidFill>
                 <a:latin typeface="Consolas"/>
               </a:rPr>
-              <a:t># ---- and how this tutorial calls it (demos/driver/tutorial_HIL_driver.py, lines 614 to 616) ------</a:t>
+              <a:t># ---- and how this tutorial calls it (demos/driver/tutorial_HIL_driver.py, lines 478 to 480) ------</a:t>
             </a:r>
           </a:p>
           <a:p>
@@ -9787,7 +9787,7 @@
                 </a:solidFill>
                 <a:latin typeface="Consolas"/>
               </a:rPr>
-              <a:t># ---- and how this tutorial calls it (demos/driver/hil_plants.py, lines 335 to 338) ------</a:t>
+              <a:t># ---- and how this tutorial calls it (demos/driver/hil_plants.py, lines 241 to 244) ------</a:t>
             </a:r>
           </a:p>
           <a:p>
@@ -10464,7 +10464,7 @@
             </a:pPr>
             <a:r>
               <a:rPr sz="2000"/>
-              <a:t>The repository has one of these in its archive, an operator console on UDP, so a second machine can drive the simulation and watch telemetry come back.</a:t>
+              <a:t>Demo 3 is one of these: its input console is a small window of our own that reads the keys and the mouse, hands the loop the same numbers, and takes the readout back.</a:t>
             </a:r>
           </a:p>
         </p:txBody>

--- a/tutorial_HIL_driver.pptx
+++ b/tutorial_HIL_driver.pptx
@@ -5579,7 +5579,7 @@
                 </a:solidFill>
                 <a:latin typeface="Consolas"/>
               </a:rPr>
-              <a:t># ---- and how this tutorial calls it (demos/driver/tutorial_HIL_driver.py, lines 671 to 675) ------</a:t>
+              <a:t># ---- and how this tutorial calls it (demos/driver/tutorial_HIL_driver.py, lines 728 to 732) ------</a:t>
             </a:r>
           </a:p>
           <a:p>
@@ -8687,7 +8687,7 @@
                 </a:solidFill>
                 <a:latin typeface="Consolas"/>
               </a:rPr>
-              <a:t># ---- and how this tutorial calls it (demos/driver/tutorial_HIL_driver.py, lines 478 to 480) ------</a:t>
+              <a:t># ---- and how this tutorial calls it (demos/driver/tutorial_HIL_driver.py, lines 534 to 536) ------</a:t>
             </a:r>
           </a:p>
           <a:p>
@@ -9294,7 +9294,7 @@
         <p:spPr>
           <a:xfrm>
             <a:off x="0" y="1207008"/>
-            <a:ext cx="12188952" cy="3566160"/>
+            <a:ext cx="12188952" cy="2743199"/>
           </a:xfrm>
           <a:prstGeom prst="rect">
             <a:avLst/>
@@ -9315,7 +9315,7 @@
               </a:spcAft>
             </a:pPr>
             <a:r>
-              <a:rPr sz="900">
+              <a:rPr sz="700">
                 <a:solidFill>
                   <a:srgbClr val="7FAF7F"/>
                 </a:solidFill>
@@ -9331,7 +9331,7 @@
               </a:spcAft>
             </a:pPr>
             <a:r>
-              <a:rPr sz="900">
+              <a:rPr sz="700">
                 <a:solidFill>
                   <a:srgbClr val="7FAF7F"/>
                 </a:solidFill>
@@ -9347,7 +9347,7 @@
               </a:spcAft>
             </a:pPr>
             <a:r>
-              <a:rPr sz="900">
+              <a:rPr sz="700">
                 <a:solidFill>
                   <a:srgbClr val="7FAF7F"/>
                 </a:solidFill>
@@ -9363,7 +9363,7 @@
               </a:spcAft>
             </a:pPr>
             <a:r>
-              <a:rPr sz="900">
+              <a:rPr sz="700">
                 <a:solidFill>
                   <a:srgbClr val="7FAF7F"/>
                 </a:solidFill>
@@ -9379,7 +9379,7 @@
               </a:spcAft>
             </a:pPr>
             <a:r>
-              <a:rPr sz="900">
+              <a:rPr sz="700">
                 <a:solidFill>
                   <a:srgbClr val="7FAF7F"/>
                 </a:solidFill>
@@ -9395,7 +9395,7 @@
               </a:spcAft>
             </a:pPr>
             <a:r>
-              <a:rPr sz="900">
+              <a:rPr sz="700">
                 <a:solidFill>
                   <a:srgbClr val="7FAF7F"/>
                 </a:solidFill>
@@ -9411,7 +9411,7 @@
               </a:spcAft>
             </a:pPr>
             <a:r>
-              <a:rPr sz="900">
+              <a:rPr sz="700">
                 <a:solidFill>
                   <a:srgbClr val="7FAF7F"/>
                 </a:solidFill>
@@ -9427,7 +9427,7 @@
               </a:spcAft>
             </a:pPr>
             <a:r>
-              <a:rPr sz="900">
+              <a:rPr sz="700">
                 <a:solidFill>
                   <a:srgbClr val="CCCCCC"/>
                 </a:solidFill>
@@ -9443,7 +9443,7 @@
               </a:spcAft>
             </a:pPr>
             <a:r>
-              <a:rPr sz="900">
+              <a:rPr sz="700">
                 <a:solidFill>
                   <a:srgbClr val="CCCCCC"/>
                 </a:solidFill>
@@ -9452,7 +9452,7 @@
               <a:t>class Plant:                     </a:t>
             </a:r>
             <a:r>
-              <a:rPr sz="900">
+              <a:rPr sz="700">
                 <a:solidFill>
                   <a:srgbClr val="7FAF7F"/>
                 </a:solidFill>
@@ -9468,7 +9468,7 @@
               </a:spcAft>
             </a:pPr>
             <a:r>
-              <a:rPr sz="900">
+              <a:rPr sz="700">
                 <a:solidFill>
                   <a:srgbClr val="CCCCCC"/>
                 </a:solidFill>
@@ -9477,7 +9477,7 @@
               <a:t>    def </a:t>
             </a:r>
             <a:r>
-              <a:rPr sz="900">
+              <a:rPr sz="700">
                 <a:solidFill>
                   <a:srgbClr val="7FC7E8"/>
                 </a:solidFill>
@@ -9486,7 +9486,7 @@
               <a:t>apply</a:t>
             </a:r>
             <a:r>
-              <a:rPr sz="900">
+              <a:rPr sz="700">
                 <a:solidFill>
                   <a:srgbClr val="CCCCCC"/>
                 </a:solidFill>
@@ -9495,7 +9495,7 @@
               <a:t>(self, inputs):          ...  </a:t>
             </a:r>
             <a:r>
-              <a:rPr sz="900">
+              <a:rPr sz="700">
                 <a:solidFill>
                   <a:srgbClr val="7FAF7F"/>
                 </a:solidFill>
@@ -9511,7 +9511,7 @@
               </a:spcAft>
             </a:pPr>
             <a:r>
-              <a:rPr sz="900">
+              <a:rPr sz="700">
                 <a:solidFill>
                   <a:srgbClr val="CCCCCC"/>
                 </a:solidFill>
@@ -9520,7 +9520,7 @@
               <a:t>    def </a:t>
             </a:r>
             <a:r>
-              <a:rPr sz="900">
+              <a:rPr sz="700">
                 <a:solidFill>
                   <a:srgbClr val="7FC7E8"/>
                 </a:solidFill>
@@ -9529,7 +9529,7 @@
               <a:t>synchronize</a:t>
             </a:r>
             <a:r>
-              <a:rPr sz="900">
+              <a:rPr sz="700">
                 <a:solidFill>
                   <a:srgbClr val="CCCCCC"/>
                 </a:solidFill>
@@ -9545,7 +9545,7 @@
               </a:spcAft>
             </a:pPr>
             <a:r>
-              <a:rPr sz="900">
+              <a:rPr sz="700">
                 <a:solidFill>
                   <a:srgbClr val="CCCCCC"/>
                 </a:solidFill>
@@ -9554,7 +9554,7 @@
               <a:t>    def </a:t>
             </a:r>
             <a:r>
-              <a:rPr sz="900">
+              <a:rPr sz="700">
                 <a:solidFill>
                   <a:srgbClr val="7FC7E8"/>
                 </a:solidFill>
@@ -9563,7 +9563,7 @@
               <a:t>advance</a:t>
             </a:r>
             <a:r>
-              <a:rPr sz="900">
+              <a:rPr sz="700">
                 <a:solidFill>
                   <a:srgbClr val="CCCCCC"/>
                 </a:solidFill>
@@ -9579,7 +9579,7 @@
               </a:spcAft>
             </a:pPr>
             <a:r>
-              <a:rPr sz="900">
+              <a:rPr sz="700">
                 <a:solidFill>
                   <a:srgbClr val="CCCCCC"/>
                 </a:solidFill>
@@ -9588,7 +9588,7 @@
               <a:t>    def </a:t>
             </a:r>
             <a:r>
-              <a:rPr sz="900">
+              <a:rPr sz="700">
                 <a:solidFill>
                   <a:srgbClr val="7FC7E8"/>
                 </a:solidFill>
@@ -9597,7 +9597,7 @@
               <a:t>speed</a:t>
             </a:r>
             <a:r>
-              <a:rPr sz="900">
+              <a:rPr sz="700">
                 <a:solidFill>
                   <a:srgbClr val="CCCCCC"/>
                 </a:solidFill>
@@ -9606,7 +9606,7 @@
               <a:t>(self): ...; def </a:t>
             </a:r>
             <a:r>
-              <a:rPr sz="900">
+              <a:rPr sz="700">
                 <a:solidFill>
                   <a:srgbClr val="7FC7E8"/>
                 </a:solidFill>
@@ -9615,7 +9615,7 @@
               <a:t>status</a:t>
             </a:r>
             <a:r>
-              <a:rPr sz="900">
+              <a:rPr sz="700">
                 <a:solidFill>
                   <a:srgbClr val="CCCCCC"/>
                 </a:solidFill>
@@ -9631,7 +9631,7 @@
               </a:spcAft>
             </a:pPr>
             <a:r>
-              <a:rPr sz="900">
+              <a:rPr sz="700">
                 <a:solidFill>
                   <a:srgbClr val="CCCCCC"/>
                 </a:solidFill>
@@ -9647,7 +9647,7 @@
               </a:spcAft>
             </a:pPr>
             <a:r>
-              <a:rPr sz="900">
+              <a:rPr sz="700">
                 <a:solidFill>
                   <a:srgbClr val="7FAF7F"/>
                 </a:solidFill>
@@ -9663,7 +9663,7 @@
               </a:spcAft>
             </a:pPr>
             <a:r>
-              <a:rPr sz="900">
+              <a:rPr sz="700">
                 <a:solidFill>
                   <a:srgbClr val="CCCCCC"/>
                 </a:solidFill>
@@ -9672,7 +9672,7 @@
               <a:t>self.long_motor = chrono.</a:t>
             </a:r>
             <a:r>
-              <a:rPr sz="900">
+              <a:rPr sz="700">
                 <a:solidFill>
                   <a:srgbClr val="F0A040"/>
                 </a:solidFill>
@@ -9681,7 +9681,7 @@
               <a:t>ChLinkMotorLinearSpeed</a:t>
             </a:r>
             <a:r>
-              <a:rPr sz="900">
+              <a:rPr sz="700">
                 <a:solidFill>
                   <a:srgbClr val="CCCCCC"/>
                 </a:solidFill>
@@ -9697,7 +9697,7 @@
               </a:spcAft>
             </a:pPr>
             <a:r>
-              <a:rPr sz="900">
+              <a:rPr sz="700">
                 <a:solidFill>
                   <a:srgbClr val="CCCCCC"/>
                 </a:solidFill>
@@ -9706,7 +9706,7 @@
               <a:t>self.long_speed = chrono.</a:t>
             </a:r>
             <a:r>
-              <a:rPr sz="900">
+              <a:rPr sz="700">
                 <a:solidFill>
                   <a:srgbClr val="F0A040"/>
                 </a:solidFill>
@@ -9715,7 +9715,7 @@
               <a:t>ChFunctionSetpoint</a:t>
             </a:r>
             <a:r>
-              <a:rPr sz="900">
+              <a:rPr sz="700">
                 <a:solidFill>
                   <a:srgbClr val="CCCCCC"/>
                 </a:solidFill>
@@ -9731,7 +9731,7 @@
               </a:spcAft>
             </a:pPr>
             <a:r>
-              <a:rPr sz="900">
+              <a:rPr sz="700">
                 <a:solidFill>
                   <a:srgbClr val="CCCCCC"/>
                 </a:solidFill>
@@ -9740,7 +9740,7 @@
               <a:t>self.long_motor.</a:t>
             </a:r>
             <a:r>
-              <a:rPr sz="900">
+              <a:rPr sz="700">
                 <a:solidFill>
                   <a:srgbClr val="7FC7E8"/>
                 </a:solidFill>
@@ -9749,7 +9749,7 @@
               <a:t>SetSpeedFunction</a:t>
             </a:r>
             <a:r>
-              <a:rPr sz="900">
+              <a:rPr sz="700">
                 <a:solidFill>
                   <a:srgbClr val="CCCCCC"/>
                 </a:solidFill>
@@ -9765,7 +9765,7 @@
               </a:spcAft>
             </a:pPr>
             <a:r>
-              <a:rPr sz="900">
+              <a:rPr sz="700">
                 <a:solidFill>
                   <a:srgbClr val="CCCCCC"/>
                 </a:solidFill>
@@ -9781,7 +9781,7 @@
               </a:spcAft>
             </a:pPr>
             <a:r>
-              <a:rPr sz="900">
+              <a:rPr sz="700">
                 <a:solidFill>
                   <a:srgbClr val="7FAF7F"/>
                 </a:solidFill>
@@ -9797,7 +9797,7 @@
               </a:spcAft>
             </a:pPr>
             <a:r>
-              <a:rPr sz="900">
+              <a:rPr sz="700">
                 <a:solidFill>
                   <a:srgbClr val="7FAF7F"/>
                 </a:solidFill>
@@ -9813,7 +9813,7 @@
               </a:spcAft>
             </a:pPr>
             <a:r>
-              <a:rPr sz="900">
+              <a:rPr sz="700">
                 <a:solidFill>
                   <a:srgbClr val="CCCCCC"/>
                 </a:solidFill>
@@ -9829,7 +9829,7 @@
               </a:spcAft>
             </a:pPr>
             <a:r>
-              <a:rPr sz="900">
+              <a:rPr sz="700">
                 <a:solidFill>
                   <a:srgbClr val="CCCCCC"/>
                 </a:solidFill>
@@ -9838,7 +9838,7 @@
               <a:t>self.long_speed.</a:t>
             </a:r>
             <a:r>
-              <a:rPr sz="900">
+              <a:rPr sz="700">
                 <a:solidFill>
                   <a:srgbClr val="7FC7E8"/>
                 </a:solidFill>
@@ -9847,7 +9847,7 @@
               <a:t>SetSetpoint</a:t>
             </a:r>
             <a:r>
-              <a:rPr sz="900">
+              <a:rPr sz="700">
                 <a:solidFill>
                   <a:srgbClr val="CCCCCC"/>
                 </a:solidFill>
@@ -9863,7 +9863,7 @@
               </a:spcAft>
             </a:pPr>
             <a:r>
-              <a:rPr sz="900">
+              <a:rPr sz="700">
                 <a:solidFill>
                   <a:srgbClr val="CCCCCC"/>
                 </a:solidFill>
@@ -9872,7 +9872,7 @@
               <a:t>self.cross_speed.</a:t>
             </a:r>
             <a:r>
-              <a:rPr sz="900">
+              <a:rPr sz="700">
                 <a:solidFill>
                   <a:srgbClr val="7FC7E8"/>
                 </a:solidFill>
@@ -9881,7 +9881,7 @@
               <a:t>SetSetpoint</a:t>
             </a:r>
             <a:r>
-              <a:rPr sz="900">
+              <a:rPr sz="700">
                 <a:solidFill>
                   <a:srgbClr val="CCCCCC"/>
                 </a:solidFill>
@@ -9900,8 +9900,8 @@
         </p:nvSpPr>
         <p:spPr>
           <a:xfrm>
-            <a:off x="402336" y="4882896"/>
-            <a:ext cx="11393424" cy="1536192"/>
+            <a:off x="402336" y="4059935"/>
+            <a:ext cx="11393424" cy="2359152"/>
           </a:xfrm>
           <a:prstGeom prst="rect">
             <a:avLst/>
@@ -9959,6 +9959,37 @@
             <a:r>
               <a:rPr sz="1600"/>
               <a:t>. No crane operator would recognise that.</a:t>
+            </a:r>
+          </a:p>
+          <a:p>
+            <a:pPr>
+              <a:spcAft>
+                <a:spcPts val="400"/>
+              </a:spcAft>
+            </a:pPr>
+            <a:r>
+              <a:rPr sz="1600"/>
+              <a:t>The producing end is just as small. </a:t>
+            </a:r>
+            <a:r>
+              <a:rPr sz="1400">
+                <a:latin typeface="Consolas"/>
+              </a:rPr>
+              <a:t>WindowInputs</a:t>
+            </a:r>
+            <a:r>
+              <a:rPr sz="1600"/>
+              <a:t> opens a window, reads three floats out of it, and exposes the accessors </a:t>
+            </a:r>
+            <a:r>
+              <a:rPr sz="1400">
+                <a:latin typeface="Consolas"/>
+              </a:rPr>
+              <a:t>ChDriver</a:t>
+            </a:r>
+            <a:r>
+              <a:rPr sz="1600"/>
+              <a:t> exposes -- about twenty lines, and the crane is hand-drivable without a line of Chrono::Vehicle in it.</a:t>
             </a:r>
           </a:p>
         </p:txBody>
